--- a/presentations/0609_FINAL_merged_Stablecoin_Privilege.pptx
+++ b/presentations/0609_FINAL_merged_Stablecoin_Privilege.pptx
@@ -16,18 +16,20 @@
     <p:sldId id="261" r:id="rId9"/>
     <p:sldId id="262" r:id="rId10"/>
     <p:sldId id="263" r:id="rId11"/>
-    <p:sldId id="264" r:id="rId12"/>
-    <p:sldId id="277" r:id="rId13"/>
-    <p:sldId id="266" r:id="rId14"/>
-    <p:sldId id="267" r:id="rId15"/>
-    <p:sldId id="268" r:id="rId16"/>
-    <p:sldId id="269" r:id="rId17"/>
-    <p:sldId id="270" r:id="rId18"/>
-    <p:sldId id="271" r:id="rId19"/>
-    <p:sldId id="272" r:id="rId20"/>
-    <p:sldId id="273" r:id="rId21"/>
-    <p:sldId id="274" r:id="rId22"/>
-    <p:sldId id="275" r:id="rId23"/>
+    <p:sldId id="278" r:id="rId12"/>
+    <p:sldId id="264" r:id="rId13"/>
+    <p:sldId id="277" r:id="rId14"/>
+    <p:sldId id="266" r:id="rId15"/>
+    <p:sldId id="267" r:id="rId16"/>
+    <p:sldId id="268" r:id="rId17"/>
+    <p:sldId id="269" r:id="rId18"/>
+    <p:sldId id="279" r:id="rId19"/>
+    <p:sldId id="270" r:id="rId20"/>
+    <p:sldId id="271" r:id="rId21"/>
+    <p:sldId id="272" r:id="rId22"/>
+    <p:sldId id="273" r:id="rId23"/>
+    <p:sldId id="274" r:id="rId24"/>
+    <p:sldId id="275" r:id="rId25"/>
   </p:sldIdLst>
   <p:sldSz cx="12192000" cy="6858000"/>
   <p:notesSz cx="6858000" cy="12192000"/>
@@ -1851,6 +1853,162 @@
 </p:notes>
 </file>
 
+<file path=ppt/notesSlides/notesSlide21.xml><?xml version="1.0" encoding="utf-8"?>
+<p:notes xmlns:a="http://schemas.openxmlformats.org/drawingml/2006/main" xmlns:r="http://schemas.openxmlformats.org/officeDocument/2006/relationships" xmlns:p="http://schemas.openxmlformats.org/presentationml/2006/main">
+  <p:cSld>
+    <p:spTree>
+      <p:nvGrpSpPr>
+        <p:cNvPr id="1" name=""/>
+        <p:cNvGrpSpPr/>
+        <p:nvPr/>
+      </p:nvGrpSpPr>
+      <p:grpSpPr>
+        <a:xfrm>
+          <a:off x="0" y="0"/>
+          <a:ext cx="0" cy="0"/>
+          <a:chOff x="0" y="0"/>
+          <a:chExt cx="0" cy="0"/>
+        </a:xfrm>
+      </p:grpSpPr>
+      <p:sp>
+        <p:nvSpPr>
+          <p:cNvPr id="2" name="Slide Image Placeholder 1"/>
+          <p:cNvSpPr>
+            <a:spLocks noGrp="1" noRot="1" noChangeAspect="1"/>
+          </p:cNvSpPr>
+          <p:nvPr>
+            <p:ph type="sldImg"/>
+          </p:nvPr>
+        </p:nvSpPr>
+        <p:spPr/>
+      </p:sp>
+      <p:sp>
+        <p:nvSpPr>
+          <p:cNvPr id="3" name="Notes Placeholder 2"/>
+          <p:cNvSpPr>
+            <a:spLocks noGrp="1"/>
+          </p:cNvSpPr>
+          <p:nvPr>
+            <p:ph type="body" idx="1"/>
+          </p:nvPr>
+        </p:nvSpPr>
+        <p:spPr/>
+        <p:txBody>
+          <a:bodyPr/>
+          <a:lstStyle/>
+          <a:p>
+            <a:endParaRPr lang="en-US" dirty="0"/>
+          </a:p>
+        </p:txBody>
+      </p:sp>
+      <p:sp>
+        <p:nvSpPr>
+          <p:cNvPr id="4" name="Slide Number Placeholder 3"/>
+          <p:cNvSpPr>
+            <a:spLocks noGrp="1"/>
+          </p:cNvSpPr>
+          <p:nvPr>
+            <p:ph type="sldNum" sz="quarter" idx="10"/>
+          </p:nvPr>
+        </p:nvSpPr>
+        <p:spPr/>
+        <p:txBody>
+          <a:bodyPr/>
+          <a:lstStyle/>
+          <a:p>
+            <a:fld id="{F7021451-1387-4CA6-816F-3879F97B5CBC}" type="slidenum">
+              <a:rPr lang="en-US"/>
+            </a:fld>
+            <a:endParaRPr lang="en-US"/>
+          </a:p>
+        </p:txBody>
+      </p:sp>
+    </p:spTree>
+  </p:cSld>
+  <p:clrMapOvr>
+    <a:masterClrMapping/>
+  </p:clrMapOvr>
+</p:notes>
+</file>
+
+<file path=ppt/notesSlides/notesSlide22.xml><?xml version="1.0" encoding="utf-8"?>
+<p:notes xmlns:a="http://schemas.openxmlformats.org/drawingml/2006/main" xmlns:r="http://schemas.openxmlformats.org/officeDocument/2006/relationships" xmlns:p="http://schemas.openxmlformats.org/presentationml/2006/main">
+  <p:cSld>
+    <p:spTree>
+      <p:nvGrpSpPr>
+        <p:cNvPr id="1" name=""/>
+        <p:cNvGrpSpPr/>
+        <p:nvPr/>
+      </p:nvGrpSpPr>
+      <p:grpSpPr>
+        <a:xfrm>
+          <a:off x="0" y="0"/>
+          <a:ext cx="0" cy="0"/>
+          <a:chOff x="0" y="0"/>
+          <a:chExt cx="0" cy="0"/>
+        </a:xfrm>
+      </p:grpSpPr>
+      <p:sp>
+        <p:nvSpPr>
+          <p:cNvPr id="2" name="Slide Image Placeholder 1"/>
+          <p:cNvSpPr>
+            <a:spLocks noGrp="1" noRot="1" noChangeAspect="1"/>
+          </p:cNvSpPr>
+          <p:nvPr>
+            <p:ph type="sldImg"/>
+          </p:nvPr>
+        </p:nvSpPr>
+        <p:spPr/>
+      </p:sp>
+      <p:sp>
+        <p:nvSpPr>
+          <p:cNvPr id="3" name="Notes Placeholder 2"/>
+          <p:cNvSpPr>
+            <a:spLocks noGrp="1"/>
+          </p:cNvSpPr>
+          <p:nvPr>
+            <p:ph type="body" idx="1"/>
+          </p:nvPr>
+        </p:nvSpPr>
+        <p:spPr/>
+        <p:txBody>
+          <a:bodyPr/>
+          <a:lstStyle/>
+          <a:p>
+            <a:endParaRPr lang="en-US" dirty="0"/>
+          </a:p>
+        </p:txBody>
+      </p:sp>
+      <p:sp>
+        <p:nvSpPr>
+          <p:cNvPr id="4" name="Slide Number Placeholder 3"/>
+          <p:cNvSpPr>
+            <a:spLocks noGrp="1"/>
+          </p:cNvSpPr>
+          <p:nvPr>
+            <p:ph type="sldNum" sz="quarter" idx="10"/>
+          </p:nvPr>
+        </p:nvSpPr>
+        <p:spPr/>
+        <p:txBody>
+          <a:bodyPr/>
+          <a:lstStyle/>
+          <a:p>
+            <a:fld id="{F7021451-1387-4CA6-816F-3879F97B5CBC}" type="slidenum">
+              <a:rPr lang="en-US"/>
+            </a:fld>
+            <a:endParaRPr lang="en-US"/>
+          </a:p>
+        </p:txBody>
+      </p:sp>
+    </p:spTree>
+  </p:cSld>
+  <p:clrMapOvr>
+    <a:masterClrMapping/>
+  </p:clrMapOvr>
+</p:notes>
+</file>
+
 <file path=ppt/notesSlides/notesSlide3.xml><?xml version="1.0" encoding="utf-8"?>
 <p:notes xmlns:a="http://schemas.openxmlformats.org/drawingml/2006/main" xmlns:r="http://schemas.openxmlformats.org/officeDocument/2006/relationships" xmlns:p="http://schemas.openxmlformats.org/presentationml/2006/main">
   <p:cSld>
@@ -3346,6 +3504,14 @@
 <file path=ppt/slides/slide10.xml><?xml version="1.0" encoding="utf-8"?>
 <p:sld xmlns:a="http://schemas.openxmlformats.org/drawingml/2006/main" xmlns:r="http://schemas.openxmlformats.org/officeDocument/2006/relationships" xmlns:p="http://schemas.openxmlformats.org/presentationml/2006/main">
   <p:cSld>
+    <p:bg>
+      <p:bgPr>
+        <a:solidFill>
+          <a:srgbClr val="FFFFFF"/>
+        </a:solidFill>
+        <a:effectLst/>
+      </p:bgPr>
+    </p:bg>
     <p:spTree>
       <p:nvGrpSpPr>
         <p:cNvPr id="1" name=""/>
@@ -3392,7 +3558,7 @@
                 <a:ea typeface="Calibri" pitchFamily="34" charset="-122"/>
                 <a:cs typeface="Calibri" pitchFamily="34" charset="-120"/>
               </a:rPr>
-              <a:t>INTUITION BEFORE RESULT</a:t>
+              <a:t>INTUITION</a:t>
             </a:r>
             <a:endParaRPr lang="en-US" sz="1200" dirty="0"/>
           </a:p>
@@ -3430,7 +3596,7 @@
                 <a:ea typeface="Georgia" panose="02040502050405090303" pitchFamily="34" charset="-122"/>
                 <a:cs typeface="Georgia" panose="02040502050405090303" pitchFamily="34" charset="-120"/>
               </a:rPr>
-              <a:t>What Should β₁ Look Like?</a:t>
+              <a:t>What the Buffer Condition Means</a:t>
             </a:r>
             <a:endParaRPr lang="en-US" sz="2700" dirty="0"/>
           </a:p>
@@ -3438,14 +3604,52 @@
       </p:sp>
       <p:sp>
         <p:nvSpPr>
-          <p:cNvPr id="4" name="Shape 2"/>
-          <p:cNvSpPr/>
-          <p:nvPr/>
-        </p:nvSpPr>
-        <p:spPr>
-          <a:xfrm>
-            <a:off x="548640" y="2103120"/>
-            <a:ext cx="11091672" cy="2377440"/>
+          <p:cNvPr id="4" name="Text 2"/>
+          <p:cNvSpPr/>
+          <p:nvPr/>
+        </p:nvSpPr>
+        <p:spPr>
+          <a:xfrm>
+            <a:off x="548640" y="1417320"/>
+            <a:ext cx="11091672" cy="365760"/>
+          </a:xfrm>
+          <a:prstGeom prst="rect">
+            <a:avLst/>
+          </a:prstGeom>
+          <a:noFill/>
+        </p:spPr>
+        <p:txBody>
+          <a:bodyPr wrap="square" lIns="0" tIns="0" rIns="0" bIns="0" rtlCol="0" anchor="ctr"/>
+          <a:lstStyle/>
+          <a:p>
+            <a:pPr marL="0" indent="0">
+              <a:buNone/>
+            </a:pPr>
+            <a:r>
+              <a:rPr lang="en-US" sz="1500" i="1" dirty="0">
+                <a:solidFill>
+                  <a:srgbClr val="5B6B82"/>
+                </a:solidFill>
+                <a:latin typeface="Georgia" panose="02040502050405090303" pitchFamily="34" charset="0"/>
+                <a:ea typeface="Georgia" panose="02040502050405090303" pitchFamily="34" charset="-122"/>
+                <a:cs typeface="Georgia" panose="02040502050405090303" pitchFamily="34" charset="-120"/>
+              </a:rPr>
+              <a:t>L = liquid buffer = cash &amp; cash-equivalents ÷ total supply.   Estimated regime break: L* ≈ 13%.</a:t>
+            </a:r>
+            <a:endParaRPr lang="en-US" sz="1500" dirty="0"/>
+          </a:p>
+        </p:txBody>
+      </p:sp>
+      <p:sp>
+        <p:nvSpPr>
+          <p:cNvPr id="5" name="Shape 3"/>
+          <p:cNvSpPr/>
+          <p:nvPr/>
+        </p:nvSpPr>
+        <p:spPr>
+          <a:xfrm>
+            <a:off x="548640" y="2011680"/>
+            <a:ext cx="5362956" cy="3657600"/>
           </a:xfrm>
           <a:prstGeom prst="rect">
             <a:avLst/>
@@ -3464,181 +3668,509 @@
       </p:sp>
       <p:sp>
         <p:nvSpPr>
-          <p:cNvPr id="5" name="Text 3"/>
-          <p:cNvSpPr/>
-          <p:nvPr/>
-        </p:nvSpPr>
-        <p:spPr>
-          <a:xfrm>
-            <a:off x="1005840" y="2514600"/>
-            <a:ext cx="10177272" cy="457200"/>
-          </a:xfrm>
-          <a:prstGeom prst="rect">
-            <a:avLst/>
-          </a:prstGeom>
-          <a:noFill/>
-        </p:spPr>
-        <p:txBody>
-          <a:bodyPr wrap="square" lIns="0" tIns="0" rIns="0" bIns="0" rtlCol="0" anchor="ctr"/>
-          <a:lstStyle/>
-          <a:p>
-            <a:pPr marL="0" indent="0" algn="ctr">
-              <a:buNone/>
-            </a:pPr>
-            <a:r>
-              <a:rPr lang="en-US" sz="2000" dirty="0">
-                <a:solidFill>
-                  <a:srgbClr val="33425C"/>
+          <p:cNvPr id="6" name="Shape 4"/>
+          <p:cNvSpPr/>
+          <p:nvPr/>
+        </p:nvSpPr>
+        <p:spPr>
+          <a:xfrm>
+            <a:off x="548640" y="2011680"/>
+            <a:ext cx="82296" cy="3657600"/>
+          </a:xfrm>
+          <a:prstGeom prst="rect">
+            <a:avLst/>
+          </a:prstGeom>
+          <a:solidFill>
+            <a:srgbClr val="C1121F"/>
+          </a:solidFill>
+        </p:spPr>
+      </p:sp>
+      <p:sp>
+        <p:nvSpPr>
+          <p:cNvPr id="7" name="Text 5"/>
+          <p:cNvSpPr/>
+          <p:nvPr/>
+        </p:nvSpPr>
+        <p:spPr>
+          <a:xfrm>
+            <a:off x="804672" y="2148840"/>
+            <a:ext cx="4905756" cy="365760"/>
+          </a:xfrm>
+          <a:prstGeom prst="rect">
+            <a:avLst/>
+          </a:prstGeom>
+          <a:noFill/>
+        </p:spPr>
+        <p:txBody>
+          <a:bodyPr wrap="square" lIns="0" tIns="0" rIns="0" bIns="0" rtlCol="0" anchor="ctr"/>
+          <a:lstStyle/>
+          <a:p>
+            <a:pPr marL="0" indent="0">
+              <a:buNone/>
+            </a:pPr>
+            <a:r>
+              <a:rPr lang="en-US" sz="1700" b="1" dirty="0">
+                <a:solidFill>
+                  <a:srgbClr val="C1121F"/>
                 </a:solidFill>
                 <a:latin typeface="Georgia" panose="02040502050405090303" pitchFamily="34" charset="0"/>
                 <a:ea typeface="Georgia" panose="02040502050405090303" pitchFamily="34" charset="-122"/>
                 <a:cs typeface="Georgia" panose="02040502050405090303" pitchFamily="34" charset="-120"/>
               </a:rPr>
-              <a:t>If stablecoins truly act as a safe-asset demand channel,</a:t>
-            </a:r>
-            <a:endParaRPr lang="en-US" sz="2000" dirty="0"/>
-          </a:p>
-        </p:txBody>
-      </p:sp>
-      <p:sp>
-        <p:nvSpPr>
-          <p:cNvPr id="6" name="Text 4"/>
-          <p:cNvSpPr/>
-          <p:nvPr/>
-        </p:nvSpPr>
-        <p:spPr>
-          <a:xfrm>
-            <a:off x="1005840" y="3017520"/>
-            <a:ext cx="10177272" cy="548640"/>
-          </a:xfrm>
-          <a:prstGeom prst="rect">
-            <a:avLst/>
-          </a:prstGeom>
-          <a:noFill/>
-        </p:spPr>
-        <p:txBody>
-          <a:bodyPr wrap="square" lIns="0" tIns="0" rIns="0" bIns="0" rtlCol="0" anchor="ctr"/>
-          <a:lstStyle/>
-          <a:p>
-            <a:pPr marL="0" indent="0" algn="ctr">
-              <a:buNone/>
-            </a:pPr>
-            <a:r>
-              <a:rPr lang="en-US" sz="2600" b="1" dirty="0">
-                <a:solidFill>
-                  <a:srgbClr val="13294B"/>
+              <a:t>LOW BUFFER  (L &lt; 13%)</a:t>
+            </a:r>
+            <a:endParaRPr lang="en-US" sz="1700" dirty="0"/>
+          </a:p>
+        </p:txBody>
+      </p:sp>
+      <p:sp>
+        <p:nvSpPr>
+          <p:cNvPr id="8" name="Text 6"/>
+          <p:cNvSpPr/>
+          <p:nvPr/>
+        </p:nvSpPr>
+        <p:spPr>
+          <a:xfrm>
+            <a:off x="804672" y="2542032"/>
+            <a:ext cx="4905756" cy="274320"/>
+          </a:xfrm>
+          <a:prstGeom prst="rect">
+            <a:avLst/>
+          </a:prstGeom>
+          <a:noFill/>
+        </p:spPr>
+        <p:txBody>
+          <a:bodyPr wrap="square" lIns="0" tIns="0" rIns="0" bIns="0" rtlCol="0" anchor="ctr"/>
+          <a:lstStyle/>
+          <a:p>
+            <a:pPr marL="0" indent="0">
+              <a:buNone/>
+            </a:pPr>
+            <a:r>
+              <a:rPr lang="en-US" sz="1200" i="1" dirty="0">
+                <a:solidFill>
+                  <a:srgbClr val="5B6B82"/>
+                </a:solidFill>
+                <a:latin typeface="Calibri" pitchFamily="34" charset="0"/>
+                <a:ea typeface="Calibri" pitchFamily="34" charset="-122"/>
+                <a:cs typeface="Calibri" pitchFamily="34" charset="-120"/>
+              </a:rPr>
+              <a:t>e.g. Tether, May 2022: ~5–8% cash</a:t>
+            </a:r>
+            <a:endParaRPr lang="en-US" sz="1200" dirty="0"/>
+          </a:p>
+        </p:txBody>
+      </p:sp>
+      <p:sp>
+        <p:nvSpPr>
+          <p:cNvPr id="9" name="Text 7"/>
+          <p:cNvSpPr/>
+          <p:nvPr/>
+        </p:nvSpPr>
+        <p:spPr>
+          <a:xfrm>
+            <a:off x="804672" y="2926080"/>
+            <a:ext cx="4860036" cy="2194560"/>
+          </a:xfrm>
+          <a:prstGeom prst="rect">
+            <a:avLst/>
+          </a:prstGeom>
+          <a:noFill/>
+        </p:spPr>
+        <p:txBody>
+          <a:bodyPr wrap="square" lIns="0" tIns="0" rIns="0" bIns="0" rtlCol="0" anchor="ctr"/>
+          <a:lstStyle/>
+          <a:p>
+            <a:pPr marL="342900" indent="-342900">
+              <a:spcAft>
+                <a:spcPts val="700"/>
+              </a:spcAft>
+              <a:buSzPct val="100000"/>
+              <a:buChar char="•"/>
+            </a:pPr>
+            <a:r>
+              <a:rPr lang="en-US" sz="1350" dirty="0">
+                <a:solidFill>
+                  <a:srgbClr val="33425C"/>
+                </a:solidFill>
+                <a:latin typeface="Calibri" pitchFamily="34" charset="0"/>
+                <a:ea typeface="Calibri" pitchFamily="34" charset="-122"/>
+                <a:cs typeface="Calibri" pitchFamily="34" charset="-120"/>
+              </a:rPr>
+              <a:t>Issuer holds mostly T-bills, very little cash</a:t>
+            </a:r>
+            <a:endParaRPr lang="en-US" sz="1350" dirty="0"/>
+          </a:p>
+          <a:p>
+            <a:pPr marL="342900" indent="-342900">
+              <a:spcAft>
+                <a:spcPts val="700"/>
+              </a:spcAft>
+              <a:buSzPct val="100000"/>
+              <a:buChar char="•"/>
+            </a:pPr>
+            <a:r>
+              <a:rPr lang="en-US" sz="1350" dirty="0">
+                <a:solidFill>
+                  <a:srgbClr val="33425C"/>
+                </a:solidFill>
+                <a:latin typeface="Calibri" pitchFamily="34" charset="0"/>
+                <a:ea typeface="Calibri" pitchFamily="34" charset="-122"/>
+                <a:cs typeface="Calibri" pitchFamily="34" charset="-120"/>
+              </a:rPr>
+              <a:t>Investors redeem → issuer MUST sell T-bills to raise cash</a:t>
+            </a:r>
+            <a:endParaRPr lang="en-US" sz="1350" dirty="0"/>
+          </a:p>
+          <a:p>
+            <a:pPr marL="342900" indent="-342900">
+              <a:spcAft>
+                <a:spcPts val="700"/>
+              </a:spcAft>
+              <a:buSzPct val="100000"/>
+              <a:buChar char="•"/>
+            </a:pPr>
+            <a:r>
+              <a:rPr lang="en-US" sz="1350" dirty="0">
+                <a:solidFill>
+                  <a:srgbClr val="33425C"/>
+                </a:solidFill>
+                <a:latin typeface="Calibri" pitchFamily="34" charset="0"/>
+                <a:ea typeface="Calibri" pitchFamily="34" charset="-122"/>
+                <a:cs typeface="Calibri" pitchFamily="34" charset="-120"/>
+              </a:rPr>
+              <a:t>Forced selling pushes T-bill yields UP</a:t>
+            </a:r>
+            <a:endParaRPr lang="en-US" sz="1350" dirty="0"/>
+          </a:p>
+          <a:p>
+            <a:pPr marL="342900" indent="-342900">
+              <a:spcAft>
+                <a:spcPts val="700"/>
+              </a:spcAft>
+              <a:buSzPct val="100000"/>
+              <a:buChar char="•"/>
+            </a:pPr>
+            <a:r>
+              <a:rPr lang="en-US" sz="1350" dirty="0">
+                <a:solidFill>
+                  <a:srgbClr val="33425C"/>
+                </a:solidFill>
+                <a:latin typeface="Calibri" pitchFamily="34" charset="0"/>
+                <a:ea typeface="Calibri" pitchFamily="34" charset="-122"/>
+                <a:cs typeface="Calibri" pitchFamily="34" charset="-120"/>
+              </a:rPr>
+              <a:t>Spread reverses — a forced seller into a stressed market</a:t>
+            </a:r>
+            <a:endParaRPr lang="en-US" sz="1350" dirty="0"/>
+          </a:p>
+        </p:txBody>
+      </p:sp>
+      <p:sp>
+        <p:nvSpPr>
+          <p:cNvPr id="10" name="Text 8"/>
+          <p:cNvSpPr/>
+          <p:nvPr/>
+        </p:nvSpPr>
+        <p:spPr>
+          <a:xfrm>
+            <a:off x="804672" y="5257800"/>
+            <a:ext cx="4905756" cy="320040"/>
+          </a:xfrm>
+          <a:prstGeom prst="rect">
+            <a:avLst/>
+          </a:prstGeom>
+          <a:noFill/>
+        </p:spPr>
+        <p:txBody>
+          <a:bodyPr wrap="square" lIns="0" tIns="0" rIns="0" bIns="0" rtlCol="0" anchor="ctr"/>
+          <a:lstStyle/>
+          <a:p>
+            <a:pPr marL="0" indent="0">
+              <a:buNone/>
+            </a:pPr>
+            <a:r>
+              <a:rPr lang="en-US" sz="1250" b="1" i="1" dirty="0">
+                <a:solidFill>
+                  <a:srgbClr val="C1121F"/>
+                </a:solidFill>
+                <a:latin typeface="Calibri" pitchFamily="34" charset="0"/>
+                <a:ea typeface="Calibri" pitchFamily="34" charset="-122"/>
+                <a:cs typeface="Calibri" pitchFamily="34" charset="-120"/>
+              </a:rPr>
+              <a:t>Issuer behaviour disrupts the Treasury market.</a:t>
+            </a:r>
+            <a:endParaRPr lang="en-US" sz="1250" dirty="0"/>
+          </a:p>
+        </p:txBody>
+      </p:sp>
+      <p:sp>
+        <p:nvSpPr>
+          <p:cNvPr id="11" name="Shape 9"/>
+          <p:cNvSpPr/>
+          <p:nvPr/>
+        </p:nvSpPr>
+        <p:spPr>
+          <a:xfrm>
+            <a:off x="6277356" y="2011680"/>
+            <a:ext cx="5362956" cy="3657600"/>
+          </a:xfrm>
+          <a:prstGeom prst="rect">
+            <a:avLst/>
+          </a:prstGeom>
+          <a:solidFill>
+            <a:srgbClr val="F4F6FA"/>
+          </a:solidFill>
+          <a:effectLst>
+            <a:outerShdw blurRad="88900" dist="38100" dir="8100000" algn="bl" rotWithShape="0">
+              <a:srgbClr val="000000">
+                <a:alpha val="13000"/>
+              </a:srgbClr>
+            </a:outerShdw>
+          </a:effectLst>
+        </p:spPr>
+      </p:sp>
+      <p:sp>
+        <p:nvSpPr>
+          <p:cNvPr id="12" name="Shape 10"/>
+          <p:cNvSpPr/>
+          <p:nvPr/>
+        </p:nvSpPr>
+        <p:spPr>
+          <a:xfrm>
+            <a:off x="6277356" y="2011680"/>
+            <a:ext cx="82296" cy="3657600"/>
+          </a:xfrm>
+          <a:prstGeom prst="rect">
+            <a:avLst/>
+          </a:prstGeom>
+          <a:solidFill>
+            <a:srgbClr val="1B998B"/>
+          </a:solidFill>
+        </p:spPr>
+      </p:sp>
+      <p:sp>
+        <p:nvSpPr>
+          <p:cNvPr id="13" name="Text 11"/>
+          <p:cNvSpPr/>
+          <p:nvPr/>
+        </p:nvSpPr>
+        <p:spPr>
+          <a:xfrm>
+            <a:off x="6533388" y="2148840"/>
+            <a:ext cx="4905756" cy="365760"/>
+          </a:xfrm>
+          <a:prstGeom prst="rect">
+            <a:avLst/>
+          </a:prstGeom>
+          <a:noFill/>
+        </p:spPr>
+        <p:txBody>
+          <a:bodyPr wrap="square" lIns="0" tIns="0" rIns="0" bIns="0" rtlCol="0" anchor="ctr"/>
+          <a:lstStyle/>
+          <a:p>
+            <a:pPr marL="0" indent="0">
+              <a:buNone/>
+            </a:pPr>
+            <a:r>
+              <a:rPr lang="en-US" sz="1700" b="1" dirty="0">
+                <a:solidFill>
+                  <a:srgbClr val="1B998B"/>
                 </a:solidFill>
                 <a:latin typeface="Georgia" panose="02040502050405090303" pitchFamily="34" charset="0"/>
                 <a:ea typeface="Georgia" panose="02040502050405090303" pitchFamily="34" charset="-122"/>
                 <a:cs typeface="Georgia" panose="02040502050405090303" pitchFamily="34" charset="-120"/>
               </a:rPr>
-              <a:t>β₁ must be </a:t>
-            </a:r>
-            <a:r>
-              <a:rPr lang="en-US" sz="2600" b="1" dirty="0">
+              <a:t>HIGH BUFFER  (L ≥ 13%)</a:t>
+            </a:r>
+            <a:endParaRPr lang="en-US" sz="1700" dirty="0"/>
+          </a:p>
+        </p:txBody>
+      </p:sp>
+      <p:sp>
+        <p:nvSpPr>
+          <p:cNvPr id="14" name="Text 12"/>
+          <p:cNvSpPr/>
+          <p:nvPr/>
+        </p:nvSpPr>
+        <p:spPr>
+          <a:xfrm>
+            <a:off x="6533388" y="2542032"/>
+            <a:ext cx="4905756" cy="274320"/>
+          </a:xfrm>
+          <a:prstGeom prst="rect">
+            <a:avLst/>
+          </a:prstGeom>
+          <a:noFill/>
+        </p:spPr>
+        <p:txBody>
+          <a:bodyPr wrap="square" lIns="0" tIns="0" rIns="0" bIns="0" rtlCol="0" anchor="ctr"/>
+          <a:lstStyle/>
+          <a:p>
+            <a:pPr marL="0" indent="0">
+              <a:buNone/>
+            </a:pPr>
+            <a:r>
+              <a:rPr lang="en-US" sz="1200" i="1" dirty="0">
+                <a:solidFill>
+                  <a:srgbClr val="5B6B82"/>
+                </a:solidFill>
+                <a:latin typeface="Calibri" pitchFamily="34" charset="0"/>
+                <a:ea typeface="Calibri" pitchFamily="34" charset="-122"/>
+                <a:cs typeface="Calibri" pitchFamily="34" charset="-120"/>
+              </a:rPr>
+              <a:t>e.g. Circle, Mar 2023: ~18–22% cash</a:t>
+            </a:r>
+            <a:endParaRPr lang="en-US" sz="1200" dirty="0"/>
+          </a:p>
+        </p:txBody>
+      </p:sp>
+      <p:sp>
+        <p:nvSpPr>
+          <p:cNvPr id="15" name="Text 13"/>
+          <p:cNvSpPr/>
+          <p:nvPr/>
+        </p:nvSpPr>
+        <p:spPr>
+          <a:xfrm>
+            <a:off x="6533388" y="2926080"/>
+            <a:ext cx="4494276" cy="2194560"/>
+          </a:xfrm>
+          <a:prstGeom prst="rect">
+            <a:avLst/>
+          </a:prstGeom>
+          <a:noFill/>
+        </p:spPr>
+        <p:txBody>
+          <a:bodyPr wrap="square" lIns="0" tIns="0" rIns="0" bIns="0" rtlCol="0" anchor="ctr"/>
+          <a:lstStyle/>
+          <a:p>
+            <a:pPr marL="342900" indent="-342900">
+              <a:spcAft>
+                <a:spcPts val="700"/>
+              </a:spcAft>
+              <a:buSzPct val="100000"/>
+              <a:buChar char="•"/>
+            </a:pPr>
+            <a:r>
+              <a:rPr lang="en-US" sz="1350" dirty="0">
+                <a:solidFill>
+                  <a:srgbClr val="33425C"/>
+                </a:solidFill>
+                <a:latin typeface="Calibri" pitchFamily="34" charset="0"/>
+                <a:ea typeface="Calibri" pitchFamily="34" charset="-122"/>
+                <a:cs typeface="Calibri" pitchFamily="34" charset="-120"/>
+              </a:rPr>
+              <a:t>Issuer holds substantial cash reserves</a:t>
+            </a:r>
+            <a:endParaRPr lang="en-US" sz="1350" dirty="0"/>
+          </a:p>
+          <a:p>
+            <a:pPr marL="342900" indent="-342900">
+              <a:spcAft>
+                <a:spcPts val="700"/>
+              </a:spcAft>
+              <a:buSzPct val="100000"/>
+              <a:buChar char="•"/>
+            </a:pPr>
+            <a:r>
+              <a:rPr lang="en-US" sz="1350" dirty="0">
+                <a:solidFill>
+                  <a:srgbClr val="33425C"/>
+                </a:solidFill>
+                <a:latin typeface="Calibri" pitchFamily="34" charset="0"/>
+                <a:ea typeface="Calibri" pitchFamily="34" charset="-122"/>
+                <a:cs typeface="Calibri" pitchFamily="34" charset="-120"/>
+              </a:rPr>
+              <a:t>Investors redeem → issuer pays out from cash</a:t>
+            </a:r>
+            <a:endParaRPr lang="en-US" sz="1350" dirty="0"/>
+          </a:p>
+          <a:p>
+            <a:pPr marL="342900" indent="-342900">
+              <a:spcAft>
+                <a:spcPts val="700"/>
+              </a:spcAft>
+              <a:buSzPct val="100000"/>
+              <a:buChar char="•"/>
+            </a:pPr>
+            <a:r>
+              <a:rPr lang="en-US" sz="1350" dirty="0">
+                <a:solidFill>
+                  <a:srgbClr val="33425C"/>
+                </a:solidFill>
+                <a:latin typeface="Calibri" pitchFamily="34" charset="0"/>
+                <a:ea typeface="Calibri" pitchFamily="34" charset="-122"/>
+                <a:cs typeface="Calibri" pitchFamily="34" charset="-120"/>
+              </a:rPr>
+              <a:t>T-bills untouched — no forced selling, no yield pressure</a:t>
+            </a:r>
+            <a:endParaRPr lang="en-US" sz="1350" dirty="0"/>
+          </a:p>
+          <a:p>
+            <a:pPr marL="342900" indent="-342900">
+              <a:spcAft>
+                <a:spcPts val="700"/>
+              </a:spcAft>
+              <a:buSzPct val="100000"/>
+              <a:buChar char="•"/>
+            </a:pPr>
+            <a:r>
+              <a:rPr lang="en-US" sz="1350" dirty="0">
+                <a:solidFill>
+                  <a:srgbClr val="33425C"/>
+                </a:solidFill>
+                <a:latin typeface="Calibri" pitchFamily="34" charset="0"/>
+                <a:ea typeface="Calibri" pitchFamily="34" charset="-122"/>
+                <a:cs typeface="Calibri" pitchFamily="34" charset="-120"/>
+              </a:rPr>
+              <a:t>Spread does not move from issuer behaviour</a:t>
+            </a:r>
+            <a:endParaRPr lang="en-US" sz="1350" dirty="0"/>
+          </a:p>
+        </p:txBody>
+      </p:sp>
+      <p:sp>
+        <p:nvSpPr>
+          <p:cNvPr id="16" name="Text 14"/>
+          <p:cNvSpPr/>
+          <p:nvPr/>
+        </p:nvSpPr>
+        <p:spPr>
+          <a:xfrm>
+            <a:off x="6533388" y="5257800"/>
+            <a:ext cx="4905756" cy="320040"/>
+          </a:xfrm>
+          <a:prstGeom prst="rect">
+            <a:avLst/>
+          </a:prstGeom>
+          <a:noFill/>
+        </p:spPr>
+        <p:txBody>
+          <a:bodyPr wrap="square" lIns="0" tIns="0" rIns="0" bIns="0" rtlCol="0" anchor="ctr"/>
+          <a:lstStyle/>
+          <a:p>
+            <a:pPr marL="0" indent="0">
+              <a:buNone/>
+            </a:pPr>
+            <a:r>
+              <a:rPr lang="en-US" sz="1250" b="1" i="1" dirty="0">
                 <a:solidFill>
                   <a:srgbClr val="1B998B"/>
                 </a:solidFill>
-                <a:latin typeface="Georgia" panose="02040502050405090303" pitchFamily="34" charset="0"/>
-                <a:ea typeface="Georgia" panose="02040502050405090303" pitchFamily="34" charset="-122"/>
-                <a:cs typeface="Georgia" panose="02040502050405090303" pitchFamily="34" charset="-120"/>
-              </a:rPr>
-              <a:t>NEGATIVE</a:t>
-            </a:r>
-            <a:r>
-              <a:rPr lang="en-US" sz="2600" b="1" dirty="0">
-                <a:solidFill>
-                  <a:srgbClr val="13294B"/>
-                </a:solidFill>
-                <a:latin typeface="Georgia" panose="02040502050405090303" pitchFamily="34" charset="0"/>
-                <a:ea typeface="Georgia" panose="02040502050405090303" pitchFamily="34" charset="-122"/>
-                <a:cs typeface="Georgia" panose="02040502050405090303" pitchFamily="34" charset="-120"/>
-              </a:rPr>
-              <a:t> — supply growth compresses the spread.</a:t>
-            </a:r>
-            <a:endParaRPr lang="en-US" sz="2600" dirty="0"/>
-          </a:p>
-        </p:txBody>
-      </p:sp>
-      <p:sp>
-        <p:nvSpPr>
-          <p:cNvPr id="7" name="Text 5"/>
-          <p:cNvSpPr/>
-          <p:nvPr/>
-        </p:nvSpPr>
-        <p:spPr>
-          <a:xfrm>
-            <a:off x="1005840" y="3749040"/>
-            <a:ext cx="10177272" cy="365760"/>
-          </a:xfrm>
-          <a:prstGeom prst="rect">
-            <a:avLst/>
-          </a:prstGeom>
-          <a:noFill/>
-        </p:spPr>
-        <p:txBody>
-          <a:bodyPr wrap="square" lIns="0" tIns="0" rIns="0" bIns="0" rtlCol="0" anchor="ctr"/>
-          <a:lstStyle/>
-          <a:p>
-            <a:pPr marL="0" indent="0" algn="ctr">
-              <a:buNone/>
-            </a:pPr>
-            <a:r>
-              <a:rPr lang="en-US" sz="1400" i="1" dirty="0">
-                <a:solidFill>
-                  <a:srgbClr val="5B6B82"/>
-                </a:solidFill>
-                <a:latin typeface="Calibri" pitchFamily="34" charset="0"/>
-                <a:ea typeface="Calibri" pitchFamily="34" charset="-122"/>
-                <a:cs typeface="Calibri" pitchFamily="34" charset="-120"/>
-              </a:rPr>
-              <a:t>We state the prediction first, then test it on N = 51 monthly observations.</a:t>
-            </a:r>
-            <a:endParaRPr lang="en-US" sz="1400" dirty="0"/>
-          </a:p>
-        </p:txBody>
-      </p:sp>
-      <p:sp>
-        <p:nvSpPr>
-          <p:cNvPr id="8" name="Text 6"/>
-          <p:cNvSpPr/>
-          <p:nvPr/>
-        </p:nvSpPr>
-        <p:spPr>
-          <a:xfrm>
-            <a:off x="548640" y="4937760"/>
-            <a:ext cx="11091672" cy="548640"/>
-          </a:xfrm>
-          <a:prstGeom prst="rect">
-            <a:avLst/>
-          </a:prstGeom>
-          <a:noFill/>
-        </p:spPr>
-        <p:txBody>
-          <a:bodyPr wrap="square" lIns="0" tIns="0" rIns="0" bIns="0" rtlCol="0" anchor="ctr"/>
-          <a:lstStyle/>
-          <a:p>
-            <a:pPr marL="0" indent="0" algn="ctr">
-              <a:buNone/>
-            </a:pPr>
-            <a:r>
-              <a:rPr lang="en-US" sz="1300" i="1" dirty="0">
-                <a:solidFill>
-                  <a:srgbClr val="5B6B82"/>
-                </a:solidFill>
-                <a:latin typeface="Calibri" pitchFamily="34" charset="0"/>
-                <a:ea typeface="Calibri" pitchFamily="34" charset="-122"/>
-                <a:cs typeface="Calibri" pitchFamily="34" charset="-120"/>
-              </a:rPr>
-              <a:t>This ordering is deliberate: the sign is a theoretical commitment, not a fitted surprise. The magnitude and significance are what the data then has to say.</a:t>
-            </a:r>
-            <a:endParaRPr lang="en-US" sz="1300" dirty="0"/>
-          </a:p>
-        </p:txBody>
-      </p:sp>
-      <p:sp>
-        <p:nvSpPr>
-          <p:cNvPr id="9" name="Text 7"/>
+                <a:latin typeface="Calibri" pitchFamily="34" charset="0"/>
+                <a:ea typeface="Calibri" pitchFamily="34" charset="-122"/>
+                <a:cs typeface="Calibri" pitchFamily="34" charset="-120"/>
+              </a:rPr>
+              <a:t>The cash buffer absorbs the shock; the market is insulated.</a:t>
+            </a:r>
+            <a:endParaRPr lang="en-US" sz="1250" dirty="0"/>
+          </a:p>
+        </p:txBody>
+      </p:sp>
+      <p:sp>
+        <p:nvSpPr>
+          <p:cNvPr id="17" name="Text 15"/>
           <p:cNvSpPr/>
           <p:nvPr/>
         </p:nvSpPr>
@@ -3676,7 +4208,7 @@
       </p:sp>
       <p:sp>
         <p:nvSpPr>
-          <p:cNvPr id="10" name="Text 8"/>
+          <p:cNvPr id="18" name="Text 16"/>
           <p:cNvSpPr/>
           <p:nvPr/>
         </p:nvSpPr>
@@ -3706,7 +4238,7 @@
                 <a:ea typeface="Calibri" pitchFamily="34" charset="-122"/>
                 <a:cs typeface="Calibri" pitchFamily="34" charset="-120"/>
               </a:rPr>
-              <a:t>10</a:t>
+              <a:t>9</a:t>
             </a:r>
             <a:endParaRPr lang="en-US" sz="1100" dirty="0"/>
           </a:p>
@@ -3721,6 +4253,383 @@
 </file>
 
 <file path=ppt/slides/slide11.xml><?xml version="1.0" encoding="utf-8"?>
+<p:sld xmlns:a="http://schemas.openxmlformats.org/drawingml/2006/main" xmlns:r="http://schemas.openxmlformats.org/officeDocument/2006/relationships" xmlns:p="http://schemas.openxmlformats.org/presentationml/2006/main">
+  <p:cSld>
+    <p:spTree>
+      <p:nvGrpSpPr>
+        <p:cNvPr id="1" name=""/>
+        <p:cNvGrpSpPr/>
+        <p:nvPr/>
+      </p:nvGrpSpPr>
+      <p:grpSpPr>
+        <a:xfrm>
+          <a:off x="0" y="0"/>
+          <a:ext cx="0" cy="0"/>
+          <a:chOff x="0" y="0"/>
+          <a:chExt cx="0" cy="0"/>
+        </a:xfrm>
+      </p:grpSpPr>
+      <p:sp>
+        <p:nvSpPr>
+          <p:cNvPr id="2" name="Text 0"/>
+          <p:cNvSpPr/>
+          <p:nvPr/>
+        </p:nvSpPr>
+        <p:spPr>
+          <a:xfrm>
+            <a:off x="548640" y="384048"/>
+            <a:ext cx="11091672" cy="274320"/>
+          </a:xfrm>
+          <a:prstGeom prst="rect">
+            <a:avLst/>
+          </a:prstGeom>
+          <a:noFill/>
+        </p:spPr>
+        <p:txBody>
+          <a:bodyPr wrap="square" lIns="0" tIns="0" rIns="0" bIns="0" rtlCol="0" anchor="ctr"/>
+          <a:lstStyle/>
+          <a:p>
+            <a:pPr marL="0" indent="0">
+              <a:buNone/>
+            </a:pPr>
+            <a:r>
+              <a:rPr lang="en-US" sz="1200" b="1" kern="0" spc="200" dirty="0">
+                <a:solidFill>
+                  <a:srgbClr val="1B998B"/>
+                </a:solidFill>
+                <a:latin typeface="Calibri" pitchFamily="34" charset="0"/>
+                <a:ea typeface="Calibri" pitchFamily="34" charset="-122"/>
+                <a:cs typeface="Calibri" pitchFamily="34" charset="-120"/>
+              </a:rPr>
+              <a:t>INTUITION BEFORE RESULT</a:t>
+            </a:r>
+            <a:endParaRPr lang="en-US" sz="1200" dirty="0"/>
+          </a:p>
+        </p:txBody>
+      </p:sp>
+      <p:sp>
+        <p:nvSpPr>
+          <p:cNvPr id="3" name="Text 1"/>
+          <p:cNvSpPr/>
+          <p:nvPr/>
+        </p:nvSpPr>
+        <p:spPr>
+          <a:xfrm>
+            <a:off x="548640" y="658368"/>
+            <a:ext cx="11091672" cy="685800"/>
+          </a:xfrm>
+          <a:prstGeom prst="rect">
+            <a:avLst/>
+          </a:prstGeom>
+          <a:noFill/>
+        </p:spPr>
+        <p:txBody>
+          <a:bodyPr wrap="square" lIns="0" tIns="0" rIns="0" bIns="0" rtlCol="0" anchor="ctr"/>
+          <a:lstStyle/>
+          <a:p>
+            <a:pPr marL="0" indent="0">
+              <a:buNone/>
+            </a:pPr>
+            <a:r>
+              <a:rPr lang="en-US" sz="2700" b="1" dirty="0">
+                <a:solidFill>
+                  <a:srgbClr val="13294B"/>
+                </a:solidFill>
+                <a:latin typeface="Georgia" panose="02040502050405090303" pitchFamily="34" charset="0"/>
+                <a:ea typeface="Georgia" panose="02040502050405090303" pitchFamily="34" charset="-122"/>
+                <a:cs typeface="Georgia" panose="02040502050405090303" pitchFamily="34" charset="-120"/>
+              </a:rPr>
+              <a:t>What Should β₁ Look Like?</a:t>
+            </a:r>
+            <a:endParaRPr lang="en-US" sz="2700" dirty="0"/>
+          </a:p>
+        </p:txBody>
+      </p:sp>
+      <p:sp>
+        <p:nvSpPr>
+          <p:cNvPr id="4" name="Shape 2"/>
+          <p:cNvSpPr/>
+          <p:nvPr/>
+        </p:nvSpPr>
+        <p:spPr>
+          <a:xfrm>
+            <a:off x="548640" y="2103120"/>
+            <a:ext cx="11091672" cy="2377440"/>
+          </a:xfrm>
+          <a:prstGeom prst="rect">
+            <a:avLst/>
+          </a:prstGeom>
+          <a:solidFill>
+            <a:srgbClr val="F4F6FA"/>
+          </a:solidFill>
+          <a:effectLst>
+            <a:outerShdw blurRad="88900" dist="38100" dir="8100000" algn="bl" rotWithShape="0">
+              <a:srgbClr val="000000">
+                <a:alpha val="13000"/>
+              </a:srgbClr>
+            </a:outerShdw>
+          </a:effectLst>
+        </p:spPr>
+      </p:sp>
+      <p:sp>
+        <p:nvSpPr>
+          <p:cNvPr id="5" name="Text 3"/>
+          <p:cNvSpPr/>
+          <p:nvPr/>
+        </p:nvSpPr>
+        <p:spPr>
+          <a:xfrm>
+            <a:off x="1005840" y="2514600"/>
+            <a:ext cx="10177272" cy="457200"/>
+          </a:xfrm>
+          <a:prstGeom prst="rect">
+            <a:avLst/>
+          </a:prstGeom>
+          <a:noFill/>
+        </p:spPr>
+        <p:txBody>
+          <a:bodyPr wrap="square" lIns="0" tIns="0" rIns="0" bIns="0" rtlCol="0" anchor="ctr"/>
+          <a:lstStyle/>
+          <a:p>
+            <a:pPr marL="0" indent="0" algn="ctr">
+              <a:buNone/>
+            </a:pPr>
+            <a:r>
+              <a:rPr lang="en-US" sz="2000" dirty="0">
+                <a:solidFill>
+                  <a:srgbClr val="33425C"/>
+                </a:solidFill>
+                <a:latin typeface="Georgia" panose="02040502050405090303" pitchFamily="34" charset="0"/>
+                <a:ea typeface="Georgia" panose="02040502050405090303" pitchFamily="34" charset="-122"/>
+                <a:cs typeface="Georgia" panose="02040502050405090303" pitchFamily="34" charset="-120"/>
+              </a:rPr>
+              <a:t>If stablecoins truly act as a safe-asset demand channel,</a:t>
+            </a:r>
+            <a:endParaRPr lang="en-US" sz="2000" dirty="0"/>
+          </a:p>
+        </p:txBody>
+      </p:sp>
+      <p:sp>
+        <p:nvSpPr>
+          <p:cNvPr id="6" name="Text 4"/>
+          <p:cNvSpPr/>
+          <p:nvPr/>
+        </p:nvSpPr>
+        <p:spPr>
+          <a:xfrm>
+            <a:off x="1005840" y="3017520"/>
+            <a:ext cx="10177272" cy="548640"/>
+          </a:xfrm>
+          <a:prstGeom prst="rect">
+            <a:avLst/>
+          </a:prstGeom>
+          <a:noFill/>
+        </p:spPr>
+        <p:txBody>
+          <a:bodyPr wrap="square" lIns="0" tIns="0" rIns="0" bIns="0" rtlCol="0" anchor="ctr"/>
+          <a:lstStyle/>
+          <a:p>
+            <a:pPr marL="0" indent="0" algn="ctr">
+              <a:buNone/>
+            </a:pPr>
+            <a:r>
+              <a:rPr lang="en-US" sz="2600" b="1" dirty="0">
+                <a:solidFill>
+                  <a:srgbClr val="13294B"/>
+                </a:solidFill>
+                <a:latin typeface="Georgia" panose="02040502050405090303" pitchFamily="34" charset="0"/>
+                <a:ea typeface="Georgia" panose="02040502050405090303" pitchFamily="34" charset="-122"/>
+                <a:cs typeface="Georgia" panose="02040502050405090303" pitchFamily="34" charset="-120"/>
+              </a:rPr>
+              <a:t>β₁ must be </a:t>
+            </a:r>
+            <a:r>
+              <a:rPr lang="en-US" sz="2600" b="1" dirty="0">
+                <a:solidFill>
+                  <a:srgbClr val="1B998B"/>
+                </a:solidFill>
+                <a:latin typeface="Georgia" panose="02040502050405090303" pitchFamily="34" charset="0"/>
+                <a:ea typeface="Georgia" panose="02040502050405090303" pitchFamily="34" charset="-122"/>
+                <a:cs typeface="Georgia" panose="02040502050405090303" pitchFamily="34" charset="-120"/>
+              </a:rPr>
+              <a:t>NEGATIVE</a:t>
+            </a:r>
+            <a:r>
+              <a:rPr lang="en-US" sz="2600" b="1" dirty="0">
+                <a:solidFill>
+                  <a:srgbClr val="13294B"/>
+                </a:solidFill>
+                <a:latin typeface="Georgia" panose="02040502050405090303" pitchFamily="34" charset="0"/>
+                <a:ea typeface="Georgia" panose="02040502050405090303" pitchFamily="34" charset="-122"/>
+                <a:cs typeface="Georgia" panose="02040502050405090303" pitchFamily="34" charset="-120"/>
+              </a:rPr>
+              <a:t> — supply growth compresses the spread.</a:t>
+            </a:r>
+            <a:endParaRPr lang="en-US" sz="2600" dirty="0"/>
+          </a:p>
+        </p:txBody>
+      </p:sp>
+      <p:sp>
+        <p:nvSpPr>
+          <p:cNvPr id="7" name="Text 5"/>
+          <p:cNvSpPr/>
+          <p:nvPr/>
+        </p:nvSpPr>
+        <p:spPr>
+          <a:xfrm>
+            <a:off x="1005840" y="3749040"/>
+            <a:ext cx="10177272" cy="365760"/>
+          </a:xfrm>
+          <a:prstGeom prst="rect">
+            <a:avLst/>
+          </a:prstGeom>
+          <a:noFill/>
+        </p:spPr>
+        <p:txBody>
+          <a:bodyPr wrap="square" lIns="0" tIns="0" rIns="0" bIns="0" rtlCol="0" anchor="ctr"/>
+          <a:lstStyle/>
+          <a:p>
+            <a:pPr marL="0" indent="0" algn="ctr">
+              <a:buNone/>
+            </a:pPr>
+            <a:r>
+              <a:rPr lang="en-US" sz="1400" i="1" dirty="0">
+                <a:solidFill>
+                  <a:srgbClr val="5B6B82"/>
+                </a:solidFill>
+                <a:latin typeface="Calibri" pitchFamily="34" charset="0"/>
+                <a:ea typeface="Calibri" pitchFamily="34" charset="-122"/>
+                <a:cs typeface="Calibri" pitchFamily="34" charset="-120"/>
+              </a:rPr>
+              <a:t>We state the prediction first, then test it on N = 51 monthly observations.</a:t>
+            </a:r>
+            <a:endParaRPr lang="en-US" sz="1400" dirty="0"/>
+          </a:p>
+        </p:txBody>
+      </p:sp>
+      <p:sp>
+        <p:nvSpPr>
+          <p:cNvPr id="8" name="Text 6"/>
+          <p:cNvSpPr/>
+          <p:nvPr/>
+        </p:nvSpPr>
+        <p:spPr>
+          <a:xfrm>
+            <a:off x="548640" y="4937760"/>
+            <a:ext cx="11091672" cy="548640"/>
+          </a:xfrm>
+          <a:prstGeom prst="rect">
+            <a:avLst/>
+          </a:prstGeom>
+          <a:noFill/>
+        </p:spPr>
+        <p:txBody>
+          <a:bodyPr wrap="square" lIns="0" tIns="0" rIns="0" bIns="0" rtlCol="0" anchor="ctr"/>
+          <a:lstStyle/>
+          <a:p>
+            <a:pPr marL="0" indent="0" algn="ctr">
+              <a:buNone/>
+            </a:pPr>
+            <a:r>
+              <a:rPr lang="en-US" sz="1300" i="1" dirty="0">
+                <a:solidFill>
+                  <a:srgbClr val="5B6B82"/>
+                </a:solidFill>
+                <a:latin typeface="Calibri" pitchFamily="34" charset="0"/>
+                <a:ea typeface="Calibri" pitchFamily="34" charset="-122"/>
+                <a:cs typeface="Calibri" pitchFamily="34" charset="-120"/>
+              </a:rPr>
+              <a:t>This ordering is deliberate: the sign is a theoretical commitment, not a fitted surprise. The magnitude and significance are what the data then has to say.</a:t>
+            </a:r>
+            <a:endParaRPr lang="en-US" sz="1300" dirty="0"/>
+          </a:p>
+        </p:txBody>
+      </p:sp>
+      <p:sp>
+        <p:nvSpPr>
+          <p:cNvPr id="9" name="Text 7"/>
+          <p:cNvSpPr/>
+          <p:nvPr/>
+        </p:nvSpPr>
+        <p:spPr>
+          <a:xfrm>
+            <a:off x="548640" y="6455664"/>
+            <a:ext cx="7315200" cy="274320"/>
+          </a:xfrm>
+          <a:prstGeom prst="rect">
+            <a:avLst/>
+          </a:prstGeom>
+          <a:noFill/>
+        </p:spPr>
+        <p:txBody>
+          <a:bodyPr wrap="square" lIns="0" tIns="0" rIns="0" bIns="0" rtlCol="0" anchor="ctr"/>
+          <a:lstStyle/>
+          <a:p>
+            <a:pPr marL="0" indent="0">
+              <a:buNone/>
+            </a:pPr>
+            <a:r>
+              <a:rPr lang="en-US" sz="900" dirty="0">
+                <a:solidFill>
+                  <a:srgbClr val="5B6B82"/>
+                </a:solidFill>
+                <a:latin typeface="Calibri" pitchFamily="34" charset="0"/>
+                <a:ea typeface="Calibri" pitchFamily="34" charset="-122"/>
+                <a:cs typeface="Calibri" pitchFamily="34" charset="-120"/>
+              </a:rPr>
+              <a:t>Stablecoins &amp; the Exorbitant Privilege</a:t>
+            </a:r>
+            <a:endParaRPr lang="en-US" sz="900" dirty="0"/>
+          </a:p>
+        </p:txBody>
+      </p:sp>
+      <p:sp>
+        <p:nvSpPr>
+          <p:cNvPr id="10" name="Text 8"/>
+          <p:cNvSpPr/>
+          <p:nvPr/>
+        </p:nvSpPr>
+        <p:spPr>
+          <a:xfrm>
+            <a:off x="11274552" y="6400800"/>
+            <a:ext cx="365760" cy="274320"/>
+          </a:xfrm>
+          <a:prstGeom prst="rect">
+            <a:avLst/>
+          </a:prstGeom>
+          <a:noFill/>
+        </p:spPr>
+        <p:txBody>
+          <a:bodyPr wrap="square" lIns="0" tIns="0" rIns="0" bIns="0" rtlCol="0" anchor="ctr"/>
+          <a:lstStyle/>
+          <a:p>
+            <a:pPr marL="0" indent="0" algn="r">
+              <a:buNone/>
+            </a:pPr>
+            <a:r>
+              <a:rPr lang="en-US" sz="1100" dirty="0">
+                <a:solidFill>
+                  <a:srgbClr val="5B6B82"/>
+                </a:solidFill>
+                <a:latin typeface="Calibri" pitchFamily="34" charset="0"/>
+                <a:ea typeface="Calibri" pitchFamily="34" charset="-122"/>
+                <a:cs typeface="Calibri" pitchFamily="34" charset="-120"/>
+              </a:rPr>
+              <a:t>10</a:t>
+            </a:r>
+            <a:endParaRPr lang="en-US" sz="1100" dirty="0"/>
+          </a:p>
+        </p:txBody>
+      </p:sp>
+    </p:spTree>
+  </p:cSld>
+  <p:clrMapOvr>
+    <a:masterClrMapping/>
+  </p:clrMapOvr>
+</p:sld>
+</file>
+
+<file path=ppt/slides/slide12.xml><?xml version="1.0" encoding="utf-8"?>
 <p:sld xmlns:a="http://schemas.openxmlformats.org/drawingml/2006/main" xmlns:r="http://schemas.openxmlformats.org/officeDocument/2006/relationships" xmlns:p="http://schemas.openxmlformats.org/presentationml/2006/main">
   <p:cSld>
     <p:bg>
@@ -5828,678 +6737,6 @@
 </p:sld>
 </file>
 
-<file path=ppt/slides/slide12.xml><?xml version="1.0" encoding="utf-8"?>
-<p:sld xmlns:a="http://schemas.openxmlformats.org/drawingml/2006/main" xmlns:r="http://schemas.openxmlformats.org/officeDocument/2006/relationships" xmlns:p="http://schemas.openxmlformats.org/presentationml/2006/main">
-  <p:cSld>
-    <p:bg>
-      <p:bgPr>
-        <a:solidFill>
-          <a:srgbClr val="FFFFFF"/>
-        </a:solidFill>
-        <a:effectLst/>
-      </p:bgPr>
-    </p:bg>
-    <p:spTree>
-      <p:nvGrpSpPr>
-        <p:cNvPr id="1" name=""/>
-        <p:cNvGrpSpPr/>
-        <p:nvPr/>
-      </p:nvGrpSpPr>
-      <p:grpSpPr>
-        <a:xfrm>
-          <a:off x="0" y="0"/>
-          <a:ext cx="0" cy="0"/>
-          <a:chOff x="0" y="0"/>
-          <a:chExt cx="0" cy="0"/>
-        </a:xfrm>
-      </p:grpSpPr>
-      <p:sp>
-        <p:nvSpPr>
-          <p:cNvPr id="2" name="Text 0"/>
-          <p:cNvSpPr/>
-          <p:nvPr/>
-        </p:nvSpPr>
-        <p:spPr>
-          <a:xfrm>
-            <a:off x="548640" y="384048"/>
-            <a:ext cx="11091672" cy="274320"/>
-          </a:xfrm>
-          <a:prstGeom prst="rect">
-            <a:avLst/>
-          </a:prstGeom>
-          <a:noFill/>
-        </p:spPr>
-        <p:txBody>
-          <a:bodyPr wrap="square" lIns="0" tIns="0" rIns="0" bIns="0" rtlCol="0" anchor="ctr"/>
-          <a:lstStyle/>
-          <a:p>
-            <a:pPr marL="0" indent="0">
-              <a:buNone/>
-            </a:pPr>
-            <a:r>
-              <a:rPr lang="en-US" sz="1200" b="1" kern="0" spc="200" dirty="0">
-                <a:solidFill>
-                  <a:srgbClr val="E8A12C"/>
-                </a:solidFill>
-                <a:latin typeface="Calibri" pitchFamily="34" charset="0"/>
-                <a:ea typeface="Calibri" pitchFamily="34" charset="-122"/>
-                <a:cs typeface="Calibri" pitchFamily="34" charset="-120"/>
-              </a:rPr>
-              <a:t>ROBUSTNESS (PENDING RE-RUN)</a:t>
-            </a:r>
-            <a:endParaRPr lang="en-US" sz="1200" dirty="0"/>
-          </a:p>
-        </p:txBody>
-      </p:sp>
-      <p:sp>
-        <p:nvSpPr>
-          <p:cNvPr id="3" name="Text 1"/>
-          <p:cNvSpPr/>
-          <p:nvPr/>
-        </p:nvSpPr>
-        <p:spPr>
-          <a:xfrm>
-            <a:off x="548640" y="658368"/>
-            <a:ext cx="11091672" cy="685800"/>
-          </a:xfrm>
-          <a:prstGeom prst="rect">
-            <a:avLst/>
-          </a:prstGeom>
-          <a:noFill/>
-        </p:spPr>
-        <p:txBody>
-          <a:bodyPr wrap="square" lIns="0" tIns="0" rIns="0" bIns="0" rtlCol="0" anchor="ctr"/>
-          <a:lstStyle/>
-          <a:p>
-            <a:pPr marL="0" indent="0">
-              <a:buNone/>
-            </a:pPr>
-            <a:r>
-              <a:rPr lang="en-US" sz="2700" b="1" dirty="0">
-                <a:solidFill>
-                  <a:srgbClr val="13294B"/>
-                </a:solidFill>
-                <a:latin typeface="Georgia" panose="02040502050405090303" pitchFamily="34" charset="0"/>
-                <a:ea typeface="Georgia" panose="02040502050405090303" pitchFamily="34" charset="-122"/>
-                <a:cs typeface="Georgia" panose="02040502050405090303" pitchFamily="34" charset="-120"/>
-              </a:rPr>
-              <a:t>Asymmetric Effects: Growth vs. Contraction</a:t>
-            </a:r>
-            <a:endParaRPr lang="en-US" sz="2700" dirty="0"/>
-          </a:p>
-        </p:txBody>
-      </p:sp>
-      <p:sp>
-        <p:nvSpPr>
-          <p:cNvPr id="4" name="Shape 2"/>
-          <p:cNvSpPr/>
-          <p:nvPr/>
-        </p:nvSpPr>
-        <p:spPr>
-          <a:xfrm>
-            <a:off x="548640" y="1371600"/>
-            <a:ext cx="11091672" cy="502920"/>
-          </a:xfrm>
-          <a:prstGeom prst="rect">
-            <a:avLst/>
-          </a:prstGeom>
-          <a:solidFill>
-            <a:srgbClr val="FBEEDD"/>
-          </a:solidFill>
-        </p:spPr>
-      </p:sp>
-      <p:sp>
-        <p:nvSpPr>
-          <p:cNvPr id="5" name="Shape 3"/>
-          <p:cNvSpPr/>
-          <p:nvPr/>
-        </p:nvSpPr>
-        <p:spPr>
-          <a:xfrm>
-            <a:off x="548640" y="1371600"/>
-            <a:ext cx="82296" cy="502920"/>
-          </a:xfrm>
-          <a:prstGeom prst="rect">
-            <a:avLst/>
-          </a:prstGeom>
-          <a:solidFill>
-            <a:srgbClr val="C1121F"/>
-          </a:solidFill>
-        </p:spPr>
-      </p:sp>
-      <p:sp>
-        <p:nvSpPr>
-          <p:cNvPr id="6" name="Text 4"/>
-          <p:cNvSpPr/>
-          <p:nvPr/>
-        </p:nvSpPr>
-        <p:spPr>
-          <a:xfrm>
-            <a:off x="822960" y="1444752"/>
-            <a:ext cx="10634472" cy="365760"/>
-          </a:xfrm>
-          <a:prstGeom prst="rect">
-            <a:avLst/>
-          </a:prstGeom>
-          <a:noFill/>
-        </p:spPr>
-        <p:txBody>
-          <a:bodyPr wrap="square" lIns="0" tIns="0" rIns="0" bIns="0" rtlCol="0" anchor="ctr"/>
-          <a:lstStyle/>
-          <a:p>
-            <a:pPr marL="0" indent="0">
-              <a:buNone/>
-            </a:pPr>
-            <a:r>
-              <a:rPr lang="en-US" sz="1250" b="1" dirty="0">
-                <a:solidFill>
-                  <a:srgbClr val="C1121F"/>
-                </a:solidFill>
-                <a:latin typeface="Calibri" pitchFamily="34" charset="0"/>
-                <a:ea typeface="Calibri" pitchFamily="34" charset="-122"/>
-                <a:cs typeface="Calibri" pitchFamily="34" charset="-120"/>
-              </a:rPr>
-              <a:t>⚠  NUMBERS BELOW ARE ON THE PRE-CORRECTION SPREAD.  </a:t>
-            </a:r>
-            <a:r>
-              <a:rPr lang="en-US" sz="1250" dirty="0">
-                <a:solidFill>
-                  <a:srgbClr val="33425C"/>
-                </a:solidFill>
-                <a:latin typeface="Calibri" pitchFamily="34" charset="0"/>
-                <a:ea typeface="Calibri" pitchFamily="34" charset="-122"/>
-                <a:cs typeface="Calibri" pitchFamily="34" charset="-120"/>
-              </a:rPr>
-              <a:t>Re-run on the corrected DGS3MO−SOFR series before presenting; keep only if the contraction effect survives.</a:t>
-            </a:r>
-            <a:endParaRPr lang="en-US" sz="1250" dirty="0"/>
-          </a:p>
-        </p:txBody>
-      </p:sp>
-      <p:sp>
-        <p:nvSpPr>
-          <p:cNvPr id="7" name="Text 5"/>
-          <p:cNvSpPr/>
-          <p:nvPr/>
-        </p:nvSpPr>
-        <p:spPr>
-          <a:xfrm>
-            <a:off x="548640" y="2057400"/>
-            <a:ext cx="11091672" cy="365760"/>
-          </a:xfrm>
-          <a:prstGeom prst="rect">
-            <a:avLst/>
-          </a:prstGeom>
-          <a:noFill/>
-        </p:spPr>
-        <p:txBody>
-          <a:bodyPr wrap="square" lIns="0" tIns="0" rIns="0" bIns="0" rtlCol="0" anchor="ctr"/>
-          <a:lstStyle/>
-          <a:p>
-            <a:pPr marL="0" indent="0">
-              <a:buNone/>
-            </a:pPr>
-            <a:r>
-              <a:rPr lang="en-US" sz="1400" i="1" dirty="0">
-                <a:solidFill>
-                  <a:srgbClr val="5B6B82"/>
-                </a:solidFill>
-                <a:latin typeface="Georgia" panose="02040502050405090303" pitchFamily="34" charset="0"/>
-                <a:ea typeface="Georgia" panose="02040502050405090303" pitchFamily="34" charset="-122"/>
-                <a:cs typeface="Georgia" panose="02040502050405090303" pitchFamily="34" charset="-120"/>
-              </a:rPr>
-              <a:t>Buying T-bills is gradual and orderly; selling is forced and immediate. The buffer should bite mainly when supply contracts.</a:t>
-            </a:r>
-            <a:endParaRPr lang="en-US" sz="1400" dirty="0"/>
-          </a:p>
-        </p:txBody>
-      </p:sp>
-      <p:sp>
-        <p:nvSpPr>
-          <p:cNvPr id="8" name="Shape 6"/>
-          <p:cNvSpPr/>
-          <p:nvPr/>
-        </p:nvSpPr>
-        <p:spPr>
-          <a:xfrm>
-            <a:off x="548640" y="2606040"/>
-            <a:ext cx="5362956" cy="2743200"/>
-          </a:xfrm>
-          <a:prstGeom prst="rect">
-            <a:avLst/>
-          </a:prstGeom>
-          <a:solidFill>
-            <a:srgbClr val="F4F6FA"/>
-          </a:solidFill>
-          <a:effectLst>
-            <a:outerShdw blurRad="88900" dist="38100" dir="8100000" algn="bl" rotWithShape="0">
-              <a:srgbClr val="000000">
-                <a:alpha val="13000"/>
-              </a:srgbClr>
-            </a:outerShdw>
-          </a:effectLst>
-        </p:spPr>
-      </p:sp>
-      <p:sp>
-        <p:nvSpPr>
-          <p:cNvPr id="9" name="Shape 7"/>
-          <p:cNvSpPr/>
-          <p:nvPr/>
-        </p:nvSpPr>
-        <p:spPr>
-          <a:xfrm>
-            <a:off x="548640" y="2606040"/>
-            <a:ext cx="82296" cy="2743200"/>
-          </a:xfrm>
-          <a:prstGeom prst="rect">
-            <a:avLst/>
-          </a:prstGeom>
-          <a:solidFill>
-            <a:srgbClr val="13294B"/>
-          </a:solidFill>
-        </p:spPr>
-      </p:sp>
-      <p:sp>
-        <p:nvSpPr>
-          <p:cNvPr id="10" name="Text 8"/>
-          <p:cNvSpPr/>
-          <p:nvPr/>
-        </p:nvSpPr>
-        <p:spPr>
-          <a:xfrm>
-            <a:off x="804672" y="2743200"/>
-            <a:ext cx="4905756" cy="320040"/>
-          </a:xfrm>
-          <a:prstGeom prst="rect">
-            <a:avLst/>
-          </a:prstGeom>
-          <a:noFill/>
-        </p:spPr>
-        <p:txBody>
-          <a:bodyPr wrap="square" lIns="0" tIns="0" rIns="0" bIns="0" rtlCol="0" anchor="ctr"/>
-          <a:lstStyle/>
-          <a:p>
-            <a:pPr marL="0" indent="0">
-              <a:buNone/>
-            </a:pPr>
-            <a:r>
-              <a:rPr lang="en-US" sz="1400" b="1" dirty="0">
-                <a:solidFill>
-                  <a:srgbClr val="13294B"/>
-                </a:solidFill>
-                <a:latin typeface="Georgia" panose="02040502050405090303" pitchFamily="34" charset="0"/>
-                <a:ea typeface="Georgia" panose="02040502050405090303" pitchFamily="34" charset="-122"/>
-                <a:cs typeface="Georgia" panose="02040502050405090303" pitchFamily="34" charset="-120"/>
-              </a:rPr>
-              <a:t>GROWTH PERIODS  (ΔlnS &gt; 0)   N = 32</a:t>
-            </a:r>
-            <a:endParaRPr lang="en-US" sz="1400" dirty="0"/>
-          </a:p>
-        </p:txBody>
-      </p:sp>
-      <p:sp>
-        <p:nvSpPr>
-          <p:cNvPr id="11" name="Text 9"/>
-          <p:cNvSpPr/>
-          <p:nvPr/>
-        </p:nvSpPr>
-        <p:spPr>
-          <a:xfrm>
-            <a:off x="804672" y="3200400"/>
-            <a:ext cx="4905756" cy="411480"/>
-          </a:xfrm>
-          <a:prstGeom prst="rect">
-            <a:avLst/>
-          </a:prstGeom>
-          <a:noFill/>
-        </p:spPr>
-        <p:txBody>
-          <a:bodyPr wrap="square" lIns="0" tIns="0" rIns="0" bIns="0" rtlCol="0" anchor="ctr"/>
-          <a:lstStyle/>
-          <a:p>
-            <a:pPr marL="0" indent="0">
-              <a:buNone/>
-            </a:pPr>
-            <a:r>
-              <a:rPr lang="en-US" sz="1800" b="1" dirty="0">
-                <a:solidFill>
-                  <a:srgbClr val="5B6B82"/>
-                </a:solidFill>
-                <a:latin typeface="Georgia" panose="02040502050405090303" pitchFamily="34" charset="0"/>
-                <a:ea typeface="Georgia" panose="02040502050405090303" pitchFamily="34" charset="-122"/>
-                <a:cs typeface="Georgia" panose="02040502050405090303" pitchFamily="34" charset="-120"/>
-              </a:rPr>
-              <a:t>β₁ = −1.79   (p = 0.352, n.s.)</a:t>
-            </a:r>
-            <a:endParaRPr lang="en-US" sz="1800" dirty="0"/>
-          </a:p>
-        </p:txBody>
-      </p:sp>
-      <p:sp>
-        <p:nvSpPr>
-          <p:cNvPr id="12" name="Text 10"/>
-          <p:cNvSpPr/>
-          <p:nvPr/>
-        </p:nvSpPr>
-        <p:spPr>
-          <a:xfrm>
-            <a:off x="804672" y="3749040"/>
-            <a:ext cx="4860036" cy="1371600"/>
-          </a:xfrm>
-          <a:prstGeom prst="rect">
-            <a:avLst/>
-          </a:prstGeom>
-          <a:noFill/>
-        </p:spPr>
-        <p:txBody>
-          <a:bodyPr wrap="square" lIns="0" tIns="0" rIns="0" bIns="0" rtlCol="0" anchor="ctr"/>
-          <a:lstStyle/>
-          <a:p>
-            <a:pPr marL="0" indent="0">
-              <a:lnSpc>
-                <a:spcPct val="110000"/>
-              </a:lnSpc>
-              <a:buNone/>
-            </a:pPr>
-            <a:r>
-              <a:rPr lang="en-US" sz="1300" dirty="0">
-                <a:solidFill>
-                  <a:srgbClr val="33425C"/>
-                </a:solidFill>
-                <a:latin typeface="Calibri" pitchFamily="34" charset="0"/>
-                <a:ea typeface="Calibri" pitchFamily="34" charset="-122"/>
-                <a:cs typeface="Calibri" pitchFamily="34" charset="-120"/>
-              </a:rPr>
-              <a:t>Supply growth → orderly T-bill purchases. Buffer size does not significantly change how issuers move markets.   R² = 0.335</a:t>
-            </a:r>
-            <a:endParaRPr lang="en-US" sz="1300" dirty="0"/>
-          </a:p>
-        </p:txBody>
-      </p:sp>
-      <p:sp>
-        <p:nvSpPr>
-          <p:cNvPr id="13" name="Shape 11"/>
-          <p:cNvSpPr/>
-          <p:nvPr/>
-        </p:nvSpPr>
-        <p:spPr>
-          <a:xfrm>
-            <a:off x="6277356" y="2606040"/>
-            <a:ext cx="5362956" cy="2743200"/>
-          </a:xfrm>
-          <a:prstGeom prst="rect">
-            <a:avLst/>
-          </a:prstGeom>
-          <a:solidFill>
-            <a:srgbClr val="F4F6FA"/>
-          </a:solidFill>
-          <a:effectLst>
-            <a:outerShdw blurRad="88900" dist="38100" dir="8100000" algn="bl" rotWithShape="0">
-              <a:srgbClr val="000000">
-                <a:alpha val="13000"/>
-              </a:srgbClr>
-            </a:outerShdw>
-          </a:effectLst>
-        </p:spPr>
-      </p:sp>
-      <p:sp>
-        <p:nvSpPr>
-          <p:cNvPr id="14" name="Shape 12"/>
-          <p:cNvSpPr/>
-          <p:nvPr/>
-        </p:nvSpPr>
-        <p:spPr>
-          <a:xfrm>
-            <a:off x="6277356" y="2606040"/>
-            <a:ext cx="82296" cy="2743200"/>
-          </a:xfrm>
-          <a:prstGeom prst="rect">
-            <a:avLst/>
-          </a:prstGeom>
-          <a:solidFill>
-            <a:srgbClr val="C1121F"/>
-          </a:solidFill>
-        </p:spPr>
-      </p:sp>
-      <p:sp>
-        <p:nvSpPr>
-          <p:cNvPr id="15" name="Text 13"/>
-          <p:cNvSpPr/>
-          <p:nvPr/>
-        </p:nvSpPr>
-        <p:spPr>
-          <a:xfrm>
-            <a:off x="6533388" y="2743200"/>
-            <a:ext cx="4905756" cy="320040"/>
-          </a:xfrm>
-          <a:prstGeom prst="rect">
-            <a:avLst/>
-          </a:prstGeom>
-          <a:noFill/>
-        </p:spPr>
-        <p:txBody>
-          <a:bodyPr wrap="square" lIns="0" tIns="0" rIns="0" bIns="0" rtlCol="0" anchor="ctr"/>
-          <a:lstStyle/>
-          <a:p>
-            <a:pPr marL="0" indent="0">
-              <a:buNone/>
-            </a:pPr>
-            <a:r>
-              <a:rPr lang="en-US" sz="1400" b="1" dirty="0">
-                <a:solidFill>
-                  <a:srgbClr val="C1121F"/>
-                </a:solidFill>
-                <a:latin typeface="Georgia" panose="02040502050405090303" pitchFamily="34" charset="0"/>
-                <a:ea typeface="Georgia" panose="02040502050405090303" pitchFamily="34" charset="-122"/>
-                <a:cs typeface="Georgia" panose="02040502050405090303" pitchFamily="34" charset="-120"/>
-              </a:rPr>
-              <a:t>CONTRACTION PERIODS  (ΔlnS &lt; 0)   N = 19</a:t>
-            </a:r>
-            <a:endParaRPr lang="en-US" sz="1400" dirty="0"/>
-          </a:p>
-        </p:txBody>
-      </p:sp>
-      <p:sp>
-        <p:nvSpPr>
-          <p:cNvPr id="16" name="Text 14"/>
-          <p:cNvSpPr/>
-          <p:nvPr/>
-        </p:nvSpPr>
-        <p:spPr>
-          <a:xfrm>
-            <a:off x="6533388" y="3200400"/>
-            <a:ext cx="4905756" cy="411480"/>
-          </a:xfrm>
-          <a:prstGeom prst="rect">
-            <a:avLst/>
-          </a:prstGeom>
-          <a:noFill/>
-        </p:spPr>
-        <p:txBody>
-          <a:bodyPr wrap="square" lIns="0" tIns="0" rIns="0" bIns="0" rtlCol="0" anchor="ctr"/>
-          <a:lstStyle/>
-          <a:p>
-            <a:pPr marL="0" indent="0">
-              <a:buNone/>
-            </a:pPr>
-            <a:r>
-              <a:rPr lang="en-US" sz="1800" b="1" dirty="0">
-                <a:solidFill>
-                  <a:srgbClr val="C1121F"/>
-                </a:solidFill>
-                <a:latin typeface="Georgia" panose="02040502050405090303" pitchFamily="34" charset="0"/>
-                <a:ea typeface="Georgia" panose="02040502050405090303" pitchFamily="34" charset="-122"/>
-                <a:cs typeface="Georgia" panose="02040502050405090303" pitchFamily="34" charset="-120"/>
-              </a:rPr>
-              <a:t>β₁ = −12.68 **   (p = 0.037)</a:t>
-            </a:r>
-            <a:endParaRPr lang="en-US" sz="1800" dirty="0"/>
-          </a:p>
-        </p:txBody>
-      </p:sp>
-      <p:sp>
-        <p:nvSpPr>
-          <p:cNvPr id="17" name="Text 15"/>
-          <p:cNvSpPr/>
-          <p:nvPr/>
-        </p:nvSpPr>
-        <p:spPr>
-          <a:xfrm>
-            <a:off x="6533388" y="3749040"/>
-            <a:ext cx="4494276" cy="1371600"/>
-          </a:xfrm>
-          <a:prstGeom prst="rect">
-            <a:avLst/>
-          </a:prstGeom>
-          <a:noFill/>
-        </p:spPr>
-        <p:txBody>
-          <a:bodyPr wrap="square" lIns="0" tIns="0" rIns="0" bIns="0" rtlCol="0" anchor="ctr"/>
-          <a:lstStyle/>
-          <a:p>
-            <a:pPr marL="0" indent="0">
-              <a:lnSpc>
-                <a:spcPct val="110000"/>
-              </a:lnSpc>
-              <a:buNone/>
-            </a:pPr>
-            <a:r>
-              <a:rPr lang="en-US" sz="1300" dirty="0">
-                <a:solidFill>
-                  <a:srgbClr val="33425C"/>
-                </a:solidFill>
-                <a:latin typeface="Calibri" pitchFamily="34" charset="0"/>
-                <a:ea typeface="Calibri" pitchFamily="34" charset="-122"/>
-                <a:cs typeface="Calibri" pitchFamily="34" charset="-120"/>
-              </a:rPr>
-              <a:t>Supply contraction → ~7× larger effect. Forced liquidation drives the sovereign spread. Model explains 73% of stress variation.   R² = 0.728</a:t>
-            </a:r>
-            <a:endParaRPr lang="en-US" sz="1300" dirty="0"/>
-          </a:p>
-        </p:txBody>
-      </p:sp>
-      <p:sp>
-        <p:nvSpPr>
-          <p:cNvPr id="18" name="Text 16"/>
-          <p:cNvSpPr/>
-          <p:nvPr/>
-        </p:nvSpPr>
-        <p:spPr>
-          <a:xfrm>
-            <a:off x="548640" y="5577840"/>
-            <a:ext cx="11091672" cy="365760"/>
-          </a:xfrm>
-          <a:prstGeom prst="rect">
-            <a:avLst/>
-          </a:prstGeom>
-          <a:noFill/>
-        </p:spPr>
-        <p:txBody>
-          <a:bodyPr wrap="square" lIns="0" tIns="0" rIns="0" bIns="0" rtlCol="0" anchor="ctr"/>
-          <a:lstStyle/>
-          <a:p>
-            <a:pPr marL="0" indent="0">
-              <a:buNone/>
-            </a:pPr>
-            <a:r>
-              <a:rPr lang="en-US" sz="1250" b="1" i="1" dirty="0">
-                <a:solidFill>
-                  <a:srgbClr val="13294B"/>
-                </a:solidFill>
-                <a:latin typeface="Calibri" pitchFamily="34" charset="0"/>
-                <a:ea typeface="Calibri" pitchFamily="34" charset="-122"/>
-                <a:cs typeface="Calibri" pitchFamily="34" charset="-120"/>
-              </a:rPr>
-              <a:t>If this survives the corrected spread, it is strong support for the fragility mechanism — the buffer matters precisely when supply is falling.</a:t>
-            </a:r>
-            <a:endParaRPr lang="en-US" sz="1250" dirty="0"/>
-          </a:p>
-        </p:txBody>
-      </p:sp>
-      <p:sp>
-        <p:nvSpPr>
-          <p:cNvPr id="19" name="Text 17"/>
-          <p:cNvSpPr/>
-          <p:nvPr/>
-        </p:nvSpPr>
-        <p:spPr>
-          <a:xfrm>
-            <a:off x="548640" y="6455664"/>
-            <a:ext cx="7315200" cy="274320"/>
-          </a:xfrm>
-          <a:prstGeom prst="rect">
-            <a:avLst/>
-          </a:prstGeom>
-          <a:noFill/>
-        </p:spPr>
-        <p:txBody>
-          <a:bodyPr wrap="square" lIns="0" tIns="0" rIns="0" bIns="0" rtlCol="0" anchor="ctr"/>
-          <a:lstStyle/>
-          <a:p>
-            <a:pPr marL="0" indent="0">
-              <a:buNone/>
-            </a:pPr>
-            <a:r>
-              <a:rPr lang="en-US" sz="900" dirty="0">
-                <a:solidFill>
-                  <a:srgbClr val="5B6B82"/>
-                </a:solidFill>
-                <a:latin typeface="Calibri" pitchFamily="34" charset="0"/>
-                <a:ea typeface="Calibri" pitchFamily="34" charset="-122"/>
-                <a:cs typeface="Calibri" pitchFamily="34" charset="-120"/>
-              </a:rPr>
-              <a:t>Stablecoins &amp; the Exorbitant Privilege</a:t>
-            </a:r>
-            <a:endParaRPr lang="en-US" sz="900" dirty="0"/>
-          </a:p>
-        </p:txBody>
-      </p:sp>
-      <p:sp>
-        <p:nvSpPr>
-          <p:cNvPr id="20" name="Text 18"/>
-          <p:cNvSpPr/>
-          <p:nvPr/>
-        </p:nvSpPr>
-        <p:spPr>
-          <a:xfrm>
-            <a:off x="11274552" y="6400800"/>
-            <a:ext cx="365760" cy="274320"/>
-          </a:xfrm>
-          <a:prstGeom prst="rect">
-            <a:avLst/>
-          </a:prstGeom>
-          <a:noFill/>
-        </p:spPr>
-        <p:txBody>
-          <a:bodyPr wrap="square" lIns="0" tIns="0" rIns="0" bIns="0" rtlCol="0" anchor="ctr"/>
-          <a:lstStyle/>
-          <a:p>
-            <a:pPr marL="0" indent="0" algn="r">
-              <a:buNone/>
-            </a:pPr>
-            <a:r>
-              <a:rPr lang="en-US" sz="1100" dirty="0">
-                <a:solidFill>
-                  <a:srgbClr val="5B6B82"/>
-                </a:solidFill>
-                <a:latin typeface="Calibri" pitchFamily="34" charset="0"/>
-                <a:ea typeface="Calibri" pitchFamily="34" charset="-122"/>
-                <a:cs typeface="Calibri" pitchFamily="34" charset="-120"/>
-              </a:rPr>
-              <a:t>12</a:t>
-            </a:r>
-            <a:endParaRPr lang="en-US" sz="1100" dirty="0"/>
-          </a:p>
-        </p:txBody>
-      </p:sp>
-    </p:spTree>
-  </p:cSld>
-  <p:clrMapOvr>
-    <a:masterClrMapping/>
-  </p:clrMapOvr>
-</p:sld>
-</file>
-
 <file path=ppt/slides/slide13.xml><?xml version="1.0" encoding="utf-8"?>
 <p:sld xmlns:a="http://schemas.openxmlformats.org/drawingml/2006/main" xmlns:r="http://schemas.openxmlformats.org/officeDocument/2006/relationships" xmlns:p="http://schemas.openxmlformats.org/presentationml/2006/main">
   <p:cSld>
@@ -6551,13 +6788,13 @@
             <a:r>
               <a:rPr lang="en-US" sz="1200" b="1" kern="0" spc="200" dirty="0">
                 <a:solidFill>
-                  <a:srgbClr val="1B998B"/>
-                </a:solidFill>
-                <a:latin typeface="Calibri" pitchFamily="34" charset="0"/>
-                <a:ea typeface="Calibri" pitchFamily="34" charset="-122"/>
-                <a:cs typeface="Calibri" pitchFamily="34" charset="-120"/>
-              </a:rPr>
-              <a:t>INTUITION</a:t>
+                  <a:srgbClr val="E8A12C"/>
+                </a:solidFill>
+                <a:latin typeface="Calibri" pitchFamily="34" charset="0"/>
+                <a:ea typeface="Calibri" pitchFamily="34" charset="-122"/>
+                <a:cs typeface="Calibri" pitchFamily="34" charset="-120"/>
+              </a:rPr>
+              <a:t>ROBUSTNESS (PENDING RE-RUN)</a:t>
             </a:r>
             <a:endParaRPr lang="en-US" sz="1200" dirty="0"/>
           </a:p>
@@ -6595,7 +6832,7 @@
                 <a:ea typeface="Georgia" panose="02040502050405090303" pitchFamily="34" charset="-122"/>
                 <a:cs typeface="Georgia" panose="02040502050405090303" pitchFamily="34" charset="-120"/>
               </a:rPr>
-              <a:t>Why Should There Be a Regime Break?</a:t>
+              <a:t>Asymmetric Effects: Growth vs. Contraction</a:t>
             </a:r>
             <a:endParaRPr lang="en-US" sz="2700" dirty="0"/>
           </a:p>
@@ -6603,13 +6840,100 @@
       </p:sp>
       <p:sp>
         <p:nvSpPr>
-          <p:cNvPr id="4" name="Text 2"/>
-          <p:cNvSpPr/>
-          <p:nvPr/>
-        </p:nvSpPr>
-        <p:spPr>
-          <a:xfrm>
-            <a:off x="548640" y="1417320"/>
+          <p:cNvPr id="4" name="Shape 2"/>
+          <p:cNvSpPr/>
+          <p:nvPr/>
+        </p:nvSpPr>
+        <p:spPr>
+          <a:xfrm>
+            <a:off x="548640" y="1371600"/>
+            <a:ext cx="11091672" cy="502920"/>
+          </a:xfrm>
+          <a:prstGeom prst="rect">
+            <a:avLst/>
+          </a:prstGeom>
+          <a:solidFill>
+            <a:srgbClr val="FBEEDD"/>
+          </a:solidFill>
+        </p:spPr>
+      </p:sp>
+      <p:sp>
+        <p:nvSpPr>
+          <p:cNvPr id="5" name="Shape 3"/>
+          <p:cNvSpPr/>
+          <p:nvPr/>
+        </p:nvSpPr>
+        <p:spPr>
+          <a:xfrm>
+            <a:off x="548640" y="1371600"/>
+            <a:ext cx="82296" cy="502920"/>
+          </a:xfrm>
+          <a:prstGeom prst="rect">
+            <a:avLst/>
+          </a:prstGeom>
+          <a:solidFill>
+            <a:srgbClr val="C1121F"/>
+          </a:solidFill>
+        </p:spPr>
+      </p:sp>
+      <p:sp>
+        <p:nvSpPr>
+          <p:cNvPr id="6" name="Text 4"/>
+          <p:cNvSpPr/>
+          <p:nvPr/>
+        </p:nvSpPr>
+        <p:spPr>
+          <a:xfrm>
+            <a:off x="822960" y="1444752"/>
+            <a:ext cx="10634472" cy="365760"/>
+          </a:xfrm>
+          <a:prstGeom prst="rect">
+            <a:avLst/>
+          </a:prstGeom>
+          <a:noFill/>
+        </p:spPr>
+        <p:txBody>
+          <a:bodyPr wrap="square" lIns="0" tIns="0" rIns="0" bIns="0" rtlCol="0" anchor="ctr"/>
+          <a:lstStyle/>
+          <a:p>
+            <a:pPr marL="0" indent="0">
+              <a:buNone/>
+            </a:pPr>
+            <a:r>
+              <a:rPr lang="en-US" sz="1250" b="1" dirty="0">
+                <a:solidFill>
+                  <a:srgbClr val="C1121F"/>
+                </a:solidFill>
+                <a:latin typeface="Calibri" pitchFamily="34" charset="0"/>
+                <a:ea typeface="Calibri" pitchFamily="34" charset="-122"/>
+                <a:cs typeface="Calibri" pitchFamily="34" charset="-120"/>
+              </a:rPr>
+              <a:t>⚠  NUMBERS BELOW ARE ON THE PRE-CORRECTION SPREAD.  </a:t>
+            </a:r>
+            <a:r>
+              <a:rPr lang="en-US" sz="1250" dirty="0">
+                <a:solidFill>
+                  <a:srgbClr val="33425C"/>
+                </a:solidFill>
+                <a:latin typeface="Calibri" pitchFamily="34" charset="0"/>
+                <a:ea typeface="Calibri" pitchFamily="34" charset="-122"/>
+                <a:cs typeface="Calibri" pitchFamily="34" charset="-120"/>
+              </a:rPr>
+              <a:t>Re-run on the corrected DGS3MO−SOFR series before presenting; keep only if the contraction effect survives.</a:t>
+            </a:r>
+            <a:endParaRPr lang="en-US" sz="1250" dirty="0"/>
+          </a:p>
+        </p:txBody>
+      </p:sp>
+      <p:sp>
+        <p:nvSpPr>
+          <p:cNvPr id="7" name="Text 5"/>
+          <p:cNvSpPr/>
+          <p:nvPr/>
+        </p:nvSpPr>
+        <p:spPr>
+          <a:xfrm>
+            <a:off x="548640" y="2057400"/>
             <a:ext cx="11091672" cy="365760"/>
           </a:xfrm>
           <a:prstGeom prst="rect">
@@ -6625,7 +6949,7 @@
               <a:buNone/>
             </a:pPr>
             <a:r>
-              <a:rPr lang="en-US" sz="1500" i="1" dirty="0">
+              <a:rPr lang="en-US" sz="1400" i="1" dirty="0">
                 <a:solidFill>
                   <a:srgbClr val="5B6B82"/>
                 </a:solidFill>
@@ -6633,22 +6957,22 @@
                 <a:ea typeface="Georgia" panose="02040502050405090303" pitchFamily="34" charset="-122"/>
                 <a:cs typeface="Georgia" panose="02040502050405090303" pitchFamily="34" charset="-120"/>
               </a:rPr>
-              <a:t>Low buffer = forced-liquidation risk;  high buffer = orderly redemption. We look for a fragility region, not a knife-edge.</a:t>
-            </a:r>
-            <a:endParaRPr lang="en-US" sz="1500" dirty="0"/>
-          </a:p>
-        </p:txBody>
-      </p:sp>
-      <p:sp>
-        <p:nvSpPr>
-          <p:cNvPr id="5" name="Shape 3"/>
-          <p:cNvSpPr/>
-          <p:nvPr/>
-        </p:nvSpPr>
-        <p:spPr>
-          <a:xfrm>
-            <a:off x="548640" y="2057400"/>
-            <a:ext cx="5362956" cy="2834640"/>
+              <a:t>Buying T-bills is gradual and orderly; selling is forced and immediate. The buffer should bite mainly when supply contracts.</a:t>
+            </a:r>
+            <a:endParaRPr lang="en-US" sz="1400" dirty="0"/>
+          </a:p>
+        </p:txBody>
+      </p:sp>
+      <p:sp>
+        <p:nvSpPr>
+          <p:cNvPr id="8" name="Shape 6"/>
+          <p:cNvSpPr/>
+          <p:nvPr/>
+        </p:nvSpPr>
+        <p:spPr>
+          <a:xfrm>
+            <a:off x="548640" y="2606040"/>
+            <a:ext cx="5362956" cy="2743200"/>
           </a:xfrm>
           <a:prstGeom prst="rect">
             <a:avLst/>
@@ -6667,33 +6991,33 @@
       </p:sp>
       <p:sp>
         <p:nvSpPr>
-          <p:cNvPr id="6" name="Shape 4"/>
-          <p:cNvSpPr/>
-          <p:nvPr/>
-        </p:nvSpPr>
-        <p:spPr>
-          <a:xfrm>
-            <a:off x="548640" y="2057400"/>
-            <a:ext cx="82296" cy="2834640"/>
+          <p:cNvPr id="9" name="Shape 7"/>
+          <p:cNvSpPr/>
+          <p:nvPr/>
+        </p:nvSpPr>
+        <p:spPr>
+          <a:xfrm>
+            <a:off x="548640" y="2606040"/>
+            <a:ext cx="82296" cy="2743200"/>
           </a:xfrm>
           <a:prstGeom prst="rect">
             <a:avLst/>
           </a:prstGeom>
           <a:solidFill>
-            <a:srgbClr val="C1121F"/>
+            <a:srgbClr val="13294B"/>
           </a:solidFill>
         </p:spPr>
       </p:sp>
       <p:sp>
         <p:nvSpPr>
-          <p:cNvPr id="7" name="Text 5"/>
-          <p:cNvSpPr/>
-          <p:nvPr/>
-        </p:nvSpPr>
-        <p:spPr>
-          <a:xfrm>
-            <a:off x="804672" y="2212848"/>
-            <a:ext cx="4905756" cy="365760"/>
+          <p:cNvPr id="10" name="Text 8"/>
+          <p:cNvSpPr/>
+          <p:nvPr/>
+        </p:nvSpPr>
+        <p:spPr>
+          <a:xfrm>
+            <a:off x="804672" y="2743200"/>
+            <a:ext cx="4905756" cy="320040"/>
           </a:xfrm>
           <a:prstGeom prst="rect">
             <a:avLst/>
@@ -6708,49 +7032,86 @@
               <a:buNone/>
             </a:pPr>
             <a:r>
-              <a:rPr lang="en-US" sz="1700" b="1" dirty="0">
-                <a:solidFill>
-                  <a:srgbClr val="C1121F"/>
+              <a:rPr lang="en-US" sz="1400" b="1" dirty="0">
+                <a:solidFill>
+                  <a:srgbClr val="13294B"/>
                 </a:solidFill>
                 <a:latin typeface="Georgia" panose="02040502050405090303" pitchFamily="34" charset="0"/>
                 <a:ea typeface="Georgia" panose="02040502050405090303" pitchFamily="34" charset="-122"/>
                 <a:cs typeface="Georgia" panose="02040502050405090303" pitchFamily="34" charset="-120"/>
               </a:rPr>
-              <a:t>When L is LOW</a:t>
-            </a:r>
-            <a:endParaRPr lang="en-US" sz="1700" dirty="0"/>
-          </a:p>
-        </p:txBody>
-      </p:sp>
-      <p:sp>
-        <p:nvSpPr>
-          <p:cNvPr id="8" name="Text 6"/>
-          <p:cNvSpPr/>
-          <p:nvPr/>
-        </p:nvSpPr>
-        <p:spPr>
-          <a:xfrm>
-            <a:off x="804672" y="2651760"/>
-            <a:ext cx="4860036" cy="2011680"/>
-          </a:xfrm>
-          <a:prstGeom prst="rect">
-            <a:avLst/>
-          </a:prstGeom>
-          <a:noFill/>
-        </p:spPr>
-        <p:txBody>
-          <a:bodyPr wrap="square" lIns="0" tIns="0" rIns="0" bIns="0" rtlCol="0" anchor="ctr"/>
-          <a:lstStyle/>
-          <a:p>
-            <a:pPr marL="342900" indent="-342900">
-              <a:spcAft>
-                <a:spcPts val="800"/>
-              </a:spcAft>
-              <a:buSzPct val="100000"/>
-              <a:buChar char="•"/>
-            </a:pPr>
-            <a:r>
-              <a:rPr lang="en-US" sz="1400" dirty="0">
+              <a:t>GROWTH PERIODS  (ΔlnS &gt; 0)   N = 32</a:t>
+            </a:r>
+            <a:endParaRPr lang="en-US" sz="1400" dirty="0"/>
+          </a:p>
+        </p:txBody>
+      </p:sp>
+      <p:sp>
+        <p:nvSpPr>
+          <p:cNvPr id="11" name="Text 9"/>
+          <p:cNvSpPr/>
+          <p:nvPr/>
+        </p:nvSpPr>
+        <p:spPr>
+          <a:xfrm>
+            <a:off x="804672" y="3200400"/>
+            <a:ext cx="4905756" cy="411480"/>
+          </a:xfrm>
+          <a:prstGeom prst="rect">
+            <a:avLst/>
+          </a:prstGeom>
+          <a:noFill/>
+        </p:spPr>
+        <p:txBody>
+          <a:bodyPr wrap="square" lIns="0" tIns="0" rIns="0" bIns="0" rtlCol="0" anchor="ctr"/>
+          <a:lstStyle/>
+          <a:p>
+            <a:pPr marL="0" indent="0">
+              <a:buNone/>
+            </a:pPr>
+            <a:r>
+              <a:rPr lang="en-US" sz="1800" b="1" dirty="0">
+                <a:solidFill>
+                  <a:srgbClr val="5B6B82"/>
+                </a:solidFill>
+                <a:latin typeface="Georgia" panose="02040502050405090303" pitchFamily="34" charset="0"/>
+                <a:ea typeface="Georgia" panose="02040502050405090303" pitchFamily="34" charset="-122"/>
+                <a:cs typeface="Georgia" panose="02040502050405090303" pitchFamily="34" charset="-120"/>
+              </a:rPr>
+              <a:t>β₁ = −1.79   (p = 0.352, n.s.)</a:t>
+            </a:r>
+            <a:endParaRPr lang="en-US" sz="1800" dirty="0"/>
+          </a:p>
+        </p:txBody>
+      </p:sp>
+      <p:sp>
+        <p:nvSpPr>
+          <p:cNvPr id="12" name="Text 10"/>
+          <p:cNvSpPr/>
+          <p:nvPr/>
+        </p:nvSpPr>
+        <p:spPr>
+          <a:xfrm>
+            <a:off x="804672" y="3749040"/>
+            <a:ext cx="4860036" cy="1371600"/>
+          </a:xfrm>
+          <a:prstGeom prst="rect">
+            <a:avLst/>
+          </a:prstGeom>
+          <a:noFill/>
+        </p:spPr>
+        <p:txBody>
+          <a:bodyPr wrap="square" lIns="0" tIns="0" rIns="0" bIns="0" rtlCol="0" anchor="ctr"/>
+          <a:lstStyle/>
+          <a:p>
+            <a:pPr marL="0" indent="0">
+              <a:lnSpc>
+                <a:spcPct val="110000"/>
+              </a:lnSpc>
+              <a:buNone/>
+            </a:pPr>
+            <a:r>
+              <a:rPr lang="en-US" sz="1300" dirty="0">
                 <a:solidFill>
                   <a:srgbClr val="33425C"/>
                 </a:solidFill>
@@ -6758,64 +7119,22 @@
                 <a:ea typeface="Calibri" pitchFamily="34" charset="-122"/>
                 <a:cs typeface="Calibri" pitchFamily="34" charset="-120"/>
               </a:rPr>
-              <a:t>A redemption wave forces rapid T-bill sales</a:t>
-            </a:r>
-            <a:endParaRPr lang="en-US" sz="1400" dirty="0"/>
-          </a:p>
-          <a:p>
-            <a:pPr marL="342900" indent="-342900">
-              <a:spcAft>
-                <a:spcPts val="800"/>
-              </a:spcAft>
-              <a:buSzPct val="100000"/>
-              <a:buChar char="•"/>
-            </a:pPr>
-            <a:r>
-              <a:rPr lang="en-US" sz="1400" dirty="0">
-                <a:solidFill>
-                  <a:srgbClr val="33425C"/>
-                </a:solidFill>
-                <a:latin typeface="Calibri" pitchFamily="34" charset="0"/>
-                <a:ea typeface="Calibri" pitchFamily="34" charset="-122"/>
-                <a:cs typeface="Calibri" pitchFamily="34" charset="-120"/>
-              </a:rPr>
-              <a:t>Issuer activity moves the market in both directions</a:t>
-            </a:r>
-            <a:endParaRPr lang="en-US" sz="1400" dirty="0"/>
-          </a:p>
-          <a:p>
-            <a:pPr marL="342900" indent="-342900">
-              <a:spcAft>
-                <a:spcPts val="800"/>
-              </a:spcAft>
-              <a:buSzPct val="100000"/>
-              <a:buChar char="•"/>
-            </a:pPr>
-            <a:r>
-              <a:rPr lang="en-US" sz="1400" dirty="0">
-                <a:solidFill>
-                  <a:srgbClr val="33425C"/>
-                </a:solidFill>
-                <a:latin typeface="Calibri" pitchFamily="34" charset="0"/>
-                <a:ea typeface="Calibri" pitchFamily="34" charset="-122"/>
-                <a:cs typeface="Calibri" pitchFamily="34" charset="-120"/>
-              </a:rPr>
-              <a:t>The relationship between supply and spread changes character</a:t>
-            </a:r>
-            <a:endParaRPr lang="en-US" sz="1400" dirty="0"/>
-          </a:p>
-        </p:txBody>
-      </p:sp>
-      <p:sp>
-        <p:nvSpPr>
-          <p:cNvPr id="9" name="Shape 7"/>
-          <p:cNvSpPr/>
-          <p:nvPr/>
-        </p:nvSpPr>
-        <p:spPr>
-          <a:xfrm>
-            <a:off x="6277356" y="2057400"/>
-            <a:ext cx="5362956" cy="2834640"/>
+              <a:t>Supply growth → orderly T-bill purchases. Buffer size does not significantly change how issuers move markets.   R² = 0.335</a:t>
+            </a:r>
+            <a:endParaRPr lang="en-US" sz="1300" dirty="0"/>
+          </a:p>
+        </p:txBody>
+      </p:sp>
+      <p:sp>
+        <p:nvSpPr>
+          <p:cNvPr id="13" name="Shape 11"/>
+          <p:cNvSpPr/>
+          <p:nvPr/>
+        </p:nvSpPr>
+        <p:spPr>
+          <a:xfrm>
+            <a:off x="6277356" y="2606040"/>
+            <a:ext cx="5362956" cy="2743200"/>
           </a:xfrm>
           <a:prstGeom prst="rect">
             <a:avLst/>
@@ -6834,33 +7153,33 @@
       </p:sp>
       <p:sp>
         <p:nvSpPr>
-          <p:cNvPr id="10" name="Shape 8"/>
-          <p:cNvSpPr/>
-          <p:nvPr/>
-        </p:nvSpPr>
-        <p:spPr>
-          <a:xfrm>
-            <a:off x="6277356" y="2057400"/>
-            <a:ext cx="82296" cy="2834640"/>
+          <p:cNvPr id="14" name="Shape 12"/>
+          <p:cNvSpPr/>
+          <p:nvPr/>
+        </p:nvSpPr>
+        <p:spPr>
+          <a:xfrm>
+            <a:off x="6277356" y="2606040"/>
+            <a:ext cx="82296" cy="2743200"/>
           </a:xfrm>
           <a:prstGeom prst="rect">
             <a:avLst/>
           </a:prstGeom>
           <a:solidFill>
-            <a:srgbClr val="1B998B"/>
+            <a:srgbClr val="C1121F"/>
           </a:solidFill>
         </p:spPr>
       </p:sp>
       <p:sp>
         <p:nvSpPr>
-          <p:cNvPr id="11" name="Text 9"/>
-          <p:cNvSpPr/>
-          <p:nvPr/>
-        </p:nvSpPr>
-        <p:spPr>
-          <a:xfrm>
-            <a:off x="6533388" y="2212848"/>
-            <a:ext cx="4905756" cy="365760"/>
+          <p:cNvPr id="15" name="Text 13"/>
+          <p:cNvSpPr/>
+          <p:nvPr/>
+        </p:nvSpPr>
+        <p:spPr>
+          <a:xfrm>
+            <a:off x="6533388" y="2743200"/>
+            <a:ext cx="4905756" cy="320040"/>
           </a:xfrm>
           <a:prstGeom prst="rect">
             <a:avLst/>
@@ -6875,140 +7194,68 @@
               <a:buNone/>
             </a:pPr>
             <a:r>
-              <a:rPr lang="en-US" sz="1700" b="1" dirty="0">
-                <a:solidFill>
-                  <a:srgbClr val="1B998B"/>
+              <a:rPr lang="en-US" sz="1400" b="1" dirty="0">
+                <a:solidFill>
+                  <a:srgbClr val="C1121F"/>
                 </a:solidFill>
                 <a:latin typeface="Georgia" panose="02040502050405090303" pitchFamily="34" charset="0"/>
                 <a:ea typeface="Georgia" panose="02040502050405090303" pitchFamily="34" charset="-122"/>
                 <a:cs typeface="Georgia" panose="02040502050405090303" pitchFamily="34" charset="-120"/>
               </a:rPr>
-              <a:t>When L is HIGH</a:t>
-            </a:r>
-            <a:endParaRPr lang="en-US" sz="1700" dirty="0"/>
-          </a:p>
-        </p:txBody>
-      </p:sp>
-      <p:sp>
-        <p:nvSpPr>
-          <p:cNvPr id="12" name="Text 10"/>
-          <p:cNvSpPr/>
-          <p:nvPr/>
-        </p:nvSpPr>
-        <p:spPr>
-          <a:xfrm>
-            <a:off x="6533388" y="2651760"/>
-            <a:ext cx="4494276" cy="2011680"/>
-          </a:xfrm>
-          <a:prstGeom prst="rect">
-            <a:avLst/>
-          </a:prstGeom>
-          <a:noFill/>
-        </p:spPr>
-        <p:txBody>
-          <a:bodyPr wrap="square" lIns="0" tIns="0" rIns="0" bIns="0" rtlCol="0" anchor="ctr"/>
-          <a:lstStyle/>
-          <a:p>
-            <a:pPr marL="342900" indent="-342900">
-              <a:spcAft>
-                <a:spcPts val="800"/>
-              </a:spcAft>
-              <a:buSzPct val="100000"/>
-              <a:buChar char="•"/>
-            </a:pPr>
-            <a:r>
-              <a:rPr lang="en-US" sz="1400" dirty="0">
-                <a:solidFill>
-                  <a:srgbClr val="33425C"/>
-                </a:solidFill>
-                <a:latin typeface="Calibri" pitchFamily="34" charset="0"/>
-                <a:ea typeface="Calibri" pitchFamily="34" charset="-122"/>
-                <a:cs typeface="Calibri" pitchFamily="34" charset="-120"/>
-              </a:rPr>
-              <a:t>Issuer absorbs redemptions from cash</a:t>
+              <a:t>CONTRACTION PERIODS  (ΔlnS &lt; 0)   N = 19</a:t>
             </a:r>
             <a:endParaRPr lang="en-US" sz="1400" dirty="0"/>
           </a:p>
-          <a:p>
-            <a:pPr marL="342900" indent="-342900">
-              <a:spcAft>
-                <a:spcPts val="800"/>
-              </a:spcAft>
-              <a:buSzPct val="100000"/>
-              <a:buChar char="•"/>
-            </a:pPr>
-            <a:r>
-              <a:rPr lang="en-US" sz="1400" dirty="0">
-                <a:solidFill>
-                  <a:srgbClr val="33425C"/>
-                </a:solidFill>
-                <a:latin typeface="Calibri" pitchFamily="34" charset="0"/>
-                <a:ea typeface="Calibri" pitchFamily="34" charset="-122"/>
-                <a:cs typeface="Calibri" pitchFamily="34" charset="-120"/>
-              </a:rPr>
-              <a:t>T-bill holdings stay untouched</a:t>
-            </a:r>
-            <a:endParaRPr lang="en-US" sz="1400" dirty="0"/>
-          </a:p>
-          <a:p>
-            <a:pPr marL="342900" indent="-342900">
-              <a:spcAft>
-                <a:spcPts val="800"/>
-              </a:spcAft>
-              <a:buSzPct val="100000"/>
-              <a:buChar char="•"/>
-            </a:pPr>
-            <a:r>
-              <a:rPr lang="en-US" sz="1400" dirty="0">
-                <a:solidFill>
-                  <a:srgbClr val="33425C"/>
-                </a:solidFill>
-                <a:latin typeface="Calibri" pitchFamily="34" charset="0"/>
-                <a:ea typeface="Calibri" pitchFamily="34" charset="-122"/>
-                <a:cs typeface="Calibri" pitchFamily="34" charset="-120"/>
-              </a:rPr>
-              <a:t>The privilege channel continues undisturbed</a:t>
-            </a:r>
-            <a:endParaRPr lang="en-US" sz="1400" dirty="0"/>
-          </a:p>
-        </p:txBody>
-      </p:sp>
-      <p:sp>
-        <p:nvSpPr>
-          <p:cNvPr id="13" name="Shape 11"/>
-          <p:cNvSpPr/>
-          <p:nvPr/>
-        </p:nvSpPr>
-        <p:spPr>
-          <a:xfrm>
-            <a:off x="548640" y="5074920"/>
-            <a:ext cx="11091672" cy="868680"/>
-          </a:xfrm>
-          <a:prstGeom prst="rect">
-            <a:avLst/>
-          </a:prstGeom>
-          <a:solidFill>
-            <a:srgbClr val="0E2746"/>
-          </a:solidFill>
-          <a:effectLst>
-            <a:outerShdw blurRad="88900" dist="38100" dir="8100000" algn="bl" rotWithShape="0">
-              <a:srgbClr val="000000">
-                <a:alpha val="13000"/>
-              </a:srgbClr>
-            </a:outerShdw>
-          </a:effectLst>
-        </p:spPr>
-      </p:sp>
-      <p:sp>
-        <p:nvSpPr>
-          <p:cNvPr id="14" name="Text 12"/>
-          <p:cNvSpPr/>
-          <p:nvPr/>
-        </p:nvSpPr>
-        <p:spPr>
-          <a:xfrm>
-            <a:off x="822960" y="5193792"/>
-            <a:ext cx="10543032" cy="640080"/>
+        </p:txBody>
+      </p:sp>
+      <p:sp>
+        <p:nvSpPr>
+          <p:cNvPr id="16" name="Text 14"/>
+          <p:cNvSpPr/>
+          <p:nvPr/>
+        </p:nvSpPr>
+        <p:spPr>
+          <a:xfrm>
+            <a:off x="6533388" y="3200400"/>
+            <a:ext cx="4905756" cy="411480"/>
+          </a:xfrm>
+          <a:prstGeom prst="rect">
+            <a:avLst/>
+          </a:prstGeom>
+          <a:noFill/>
+        </p:spPr>
+        <p:txBody>
+          <a:bodyPr wrap="square" lIns="0" tIns="0" rIns="0" bIns="0" rtlCol="0" anchor="ctr"/>
+          <a:lstStyle/>
+          <a:p>
+            <a:pPr marL="0" indent="0">
+              <a:buNone/>
+            </a:pPr>
+            <a:r>
+              <a:rPr lang="en-US" sz="1800" b="1" dirty="0">
+                <a:solidFill>
+                  <a:srgbClr val="C1121F"/>
+                </a:solidFill>
+                <a:latin typeface="Georgia" panose="02040502050405090303" pitchFamily="34" charset="0"/>
+                <a:ea typeface="Georgia" panose="02040502050405090303" pitchFamily="34" charset="-122"/>
+                <a:cs typeface="Georgia" panose="02040502050405090303" pitchFamily="34" charset="-120"/>
+              </a:rPr>
+              <a:t>β₁ = −12.68 **   (p = 0.037)</a:t>
+            </a:r>
+            <a:endParaRPr lang="en-US" sz="1800" dirty="0"/>
+          </a:p>
+        </p:txBody>
+      </p:sp>
+      <p:sp>
+        <p:nvSpPr>
+          <p:cNvPr id="17" name="Text 15"/>
+          <p:cNvSpPr/>
+          <p:nvPr/>
+        </p:nvSpPr>
+        <p:spPr>
+          <a:xfrm>
+            <a:off x="6533388" y="3749040"/>
+            <a:ext cx="4494276" cy="1371600"/>
           </a:xfrm>
           <a:prstGeom prst="rect">
             <a:avLst/>
@@ -7021,39 +7268,66 @@
           <a:p>
             <a:pPr marL="0" indent="0">
               <a:lnSpc>
-                <a:spcPct val="105000"/>
+                <a:spcPct val="110000"/>
               </a:lnSpc>
               <a:buNone/>
             </a:pPr>
             <a:r>
-              <a:rPr lang="en-US" sz="1350" b="1" dirty="0">
-                <a:solidFill>
-                  <a:srgbClr val="E8A12C"/>
-                </a:solidFill>
-                <a:latin typeface="Calibri" pitchFamily="34" charset="0"/>
-                <a:ea typeface="Calibri" pitchFamily="34" charset="-122"/>
-                <a:cs typeface="Calibri" pitchFamily="34" charset="-120"/>
-              </a:rPr>
-              <a:t>What we estimate:  </a:t>
-            </a:r>
-            <a:r>
-              <a:rPr lang="en-US" sz="1350" dirty="0">
-                <a:solidFill>
-                  <a:srgbClr val="FFFFFF"/>
-                </a:solidFill>
-                <a:latin typeface="Calibri" pitchFamily="34" charset="0"/>
-                <a:ea typeface="Calibri" pitchFamily="34" charset="-122"/>
-                <a:cs typeface="Calibri" pitchFamily="34" charset="-120"/>
-              </a:rPr>
-              <a:t>a critical buffer region in the low teens (L* ≈ 13%) separating amplification from forced liquidation — located consistently by two methods, though imprecisely estimated.</a:t>
-            </a:r>
-            <a:endParaRPr lang="en-US" sz="1350" dirty="0"/>
-          </a:p>
-        </p:txBody>
-      </p:sp>
-      <p:sp>
-        <p:nvSpPr>
-          <p:cNvPr id="15" name="Text 13"/>
+              <a:rPr lang="en-US" sz="1300" dirty="0">
+                <a:solidFill>
+                  <a:srgbClr val="33425C"/>
+                </a:solidFill>
+                <a:latin typeface="Calibri" pitchFamily="34" charset="0"/>
+                <a:ea typeface="Calibri" pitchFamily="34" charset="-122"/>
+                <a:cs typeface="Calibri" pitchFamily="34" charset="-120"/>
+              </a:rPr>
+              <a:t>Supply contraction → ~7× larger effect. Forced liquidation drives the sovereign spread. Model explains 73% of stress variation.   R² = 0.728</a:t>
+            </a:r>
+            <a:endParaRPr lang="en-US" sz="1300" dirty="0"/>
+          </a:p>
+        </p:txBody>
+      </p:sp>
+      <p:sp>
+        <p:nvSpPr>
+          <p:cNvPr id="18" name="Text 16"/>
+          <p:cNvSpPr/>
+          <p:nvPr/>
+        </p:nvSpPr>
+        <p:spPr>
+          <a:xfrm>
+            <a:off x="548640" y="5577840"/>
+            <a:ext cx="11091672" cy="365760"/>
+          </a:xfrm>
+          <a:prstGeom prst="rect">
+            <a:avLst/>
+          </a:prstGeom>
+          <a:noFill/>
+        </p:spPr>
+        <p:txBody>
+          <a:bodyPr wrap="square" lIns="0" tIns="0" rIns="0" bIns="0" rtlCol="0" anchor="ctr"/>
+          <a:lstStyle/>
+          <a:p>
+            <a:pPr marL="0" indent="0">
+              <a:buNone/>
+            </a:pPr>
+            <a:r>
+              <a:rPr lang="en-US" sz="1250" b="1" i="1" dirty="0">
+                <a:solidFill>
+                  <a:srgbClr val="13294B"/>
+                </a:solidFill>
+                <a:latin typeface="Calibri" pitchFamily="34" charset="0"/>
+                <a:ea typeface="Calibri" pitchFamily="34" charset="-122"/>
+                <a:cs typeface="Calibri" pitchFamily="34" charset="-120"/>
+              </a:rPr>
+              <a:t>If this survives the corrected spread, it is strong support for the fragility mechanism — the buffer matters precisely when supply is falling.</a:t>
+            </a:r>
+            <a:endParaRPr lang="en-US" sz="1250" dirty="0"/>
+          </a:p>
+        </p:txBody>
+      </p:sp>
+      <p:sp>
+        <p:nvSpPr>
+          <p:cNvPr id="19" name="Text 17"/>
           <p:cNvSpPr/>
           <p:nvPr/>
         </p:nvSpPr>
@@ -7091,7 +7365,7 @@
       </p:sp>
       <p:sp>
         <p:nvSpPr>
-          <p:cNvPr id="16" name="Text 14"/>
+          <p:cNvPr id="20" name="Text 18"/>
           <p:cNvSpPr/>
           <p:nvPr/>
         </p:nvSpPr>
@@ -7121,7 +7395,7 @@
                 <a:ea typeface="Calibri" pitchFamily="34" charset="-122"/>
                 <a:cs typeface="Calibri" pitchFamily="34" charset="-120"/>
               </a:rPr>
-              <a:t>13</a:t>
+              <a:t>12</a:t>
             </a:r>
             <a:endParaRPr lang="en-US" sz="1100" dirty="0"/>
           </a:p>
@@ -7192,7 +7466,7 @@
                 <a:ea typeface="Calibri" pitchFamily="34" charset="-122"/>
                 <a:cs typeface="Calibri" pitchFamily="34" charset="-120"/>
               </a:rPr>
-              <a:t>THRESHOLD RESULT</a:t>
+              <a:t>INTUITION</a:t>
             </a:r>
             <a:endParaRPr lang="en-US" sz="1200" dirty="0"/>
           </a:p>
@@ -7230,7 +7504,7 @@
                 <a:ea typeface="Georgia" panose="02040502050405090303" pitchFamily="34" charset="-122"/>
                 <a:cs typeface="Georgia" panose="02040502050405090303" pitchFamily="34" charset="-120"/>
               </a:rPr>
-              <a:t>A Fragility Region in the Low Teens (≈ 13%)</a:t>
+              <a:t>Why Should There Be a Regime Break?</a:t>
             </a:r>
             <a:endParaRPr lang="en-US" sz="2700" dirty="0"/>
           </a:p>
@@ -7268,84 +7542,22 @@
                 <a:ea typeface="Georgia" panose="02040502050405090303" pitchFamily="34" charset="-122"/>
                 <a:cs typeface="Georgia" panose="02040502050405090303" pitchFamily="34" charset="-120"/>
               </a:rPr>
-              <a:t>Two methods independently locate the break near 13–15%. The location is robust; the precision is limited by N = 51.</a:t>
+              <a:t>Low buffer = forced-liquidation risk;  high buffer = orderly redemption. We look for a fragility region, not a knife-edge.</a:t>
             </a:r>
             <a:endParaRPr lang="en-US" sz="1500" dirty="0"/>
           </a:p>
         </p:txBody>
       </p:sp>
-      <p:pic>
-        <p:nvPicPr>
-          <p:cNvPr id="5" name="Image 0" descr="figs/image6.png"/>
-          <p:cNvPicPr>
-            <a:picLocks noChangeAspect="1"/>
-          </p:cNvPicPr>
-          <p:nvPr/>
-        </p:nvPicPr>
-        <p:blipFill>
-          <a:blip r:embed="rId1"/>
-          <a:stretch>
-            <a:fillRect/>
-          </a:stretch>
-        </p:blipFill>
-        <p:spPr>
-          <a:xfrm>
-            <a:off x="548640" y="1920240"/>
-            <a:ext cx="5577840" cy="3138908"/>
-          </a:xfrm>
-          <a:prstGeom prst="rect">
-            <a:avLst/>
-          </a:prstGeom>
-        </p:spPr>
-      </p:pic>
-      <p:sp>
-        <p:nvSpPr>
-          <p:cNvPr id="6" name="Text 3"/>
-          <p:cNvSpPr/>
-          <p:nvPr/>
-        </p:nvSpPr>
-        <p:spPr>
-          <a:xfrm>
-            <a:off x="548640" y="5095724"/>
-            <a:ext cx="5577840" cy="365760"/>
-          </a:xfrm>
-          <a:prstGeom prst="rect">
-            <a:avLst/>
-          </a:prstGeom>
-          <a:noFill/>
-        </p:spPr>
-        <p:txBody>
-          <a:bodyPr wrap="square" lIns="0" tIns="0" rIns="0" bIns="0" rtlCol="0" anchor="ctr"/>
-          <a:lstStyle/>
-          <a:p>
-            <a:pPr marL="0" indent="0">
-              <a:buNone/>
-            </a:pPr>
-            <a:r>
-              <a:rPr lang="en-US" sz="1050" i="1" dirty="0">
-                <a:solidFill>
-                  <a:srgbClr val="5B6B82"/>
-                </a:solidFill>
-                <a:latin typeface="Calibri" pitchFamily="34" charset="0"/>
-                <a:ea typeface="Calibri" pitchFamily="34" charset="-122"/>
-                <a:cs typeface="Calibri" pitchFamily="34" charset="-120"/>
-              </a:rPr>
-              <a:t>Hansen (2000) SSR over the buffer grid — minimized at q* = 0.130, with the bootstrap 90% CI shaded.</a:t>
-            </a:r>
-            <a:endParaRPr lang="en-US" sz="1050" dirty="0"/>
-          </a:p>
-        </p:txBody>
-      </p:sp>
-      <p:sp>
-        <p:nvSpPr>
-          <p:cNvPr id="7" name="Shape 4"/>
-          <p:cNvSpPr/>
-          <p:nvPr/>
-        </p:nvSpPr>
-        <p:spPr>
-          <a:xfrm>
-            <a:off x="6446520" y="1920240"/>
-            <a:ext cx="5193792" cy="960120"/>
+      <p:sp>
+        <p:nvSpPr>
+          <p:cNvPr id="5" name="Shape 3"/>
+          <p:cNvSpPr/>
+          <p:nvPr/>
+        </p:nvSpPr>
+        <p:spPr>
+          <a:xfrm>
+            <a:off x="548640" y="2057400"/>
+            <a:ext cx="5362956" cy="2834640"/>
           </a:xfrm>
           <a:prstGeom prst="rect">
             <a:avLst/>
@@ -7364,33 +7576,33 @@
       </p:sp>
       <p:sp>
         <p:nvSpPr>
-          <p:cNvPr id="8" name="Shape 5"/>
-          <p:cNvSpPr/>
-          <p:nvPr/>
-        </p:nvSpPr>
-        <p:spPr>
-          <a:xfrm>
-            <a:off x="6446520" y="1920240"/>
-            <a:ext cx="82296" cy="960120"/>
+          <p:cNvPr id="6" name="Shape 4"/>
+          <p:cNvSpPr/>
+          <p:nvPr/>
+        </p:nvSpPr>
+        <p:spPr>
+          <a:xfrm>
+            <a:off x="548640" y="2057400"/>
+            <a:ext cx="82296" cy="2834640"/>
           </a:xfrm>
           <a:prstGeom prst="rect">
             <a:avLst/>
           </a:prstGeom>
           <a:solidFill>
-            <a:srgbClr val="1B998B"/>
+            <a:srgbClr val="C1121F"/>
           </a:solidFill>
         </p:spPr>
       </p:sp>
       <p:sp>
         <p:nvSpPr>
-          <p:cNvPr id="9" name="Text 6"/>
-          <p:cNvSpPr/>
-          <p:nvPr/>
-        </p:nvSpPr>
-        <p:spPr>
-          <a:xfrm>
-            <a:off x="6675120" y="2029968"/>
-            <a:ext cx="4736592" cy="411480"/>
+          <p:cNvPr id="7" name="Text 5"/>
+          <p:cNvSpPr/>
+          <p:nvPr/>
+        </p:nvSpPr>
+        <p:spPr>
+          <a:xfrm>
+            <a:off x="804672" y="2212848"/>
+            <a:ext cx="4905756" cy="365760"/>
           </a:xfrm>
           <a:prstGeom prst="rect">
             <a:avLst/>
@@ -7405,45 +7617,49 @@
               <a:buNone/>
             </a:pPr>
             <a:r>
-              <a:rPr lang="en-US" sz="2200" b="1" dirty="0">
-                <a:solidFill>
-                  <a:srgbClr val="13294B"/>
+              <a:rPr lang="en-US" sz="1700" b="1" dirty="0">
+                <a:solidFill>
+                  <a:srgbClr val="C1121F"/>
                 </a:solidFill>
                 <a:latin typeface="Georgia" panose="02040502050405090303" pitchFamily="34" charset="0"/>
                 <a:ea typeface="Georgia" panose="02040502050405090303" pitchFamily="34" charset="-122"/>
                 <a:cs typeface="Georgia" panose="02040502050405090303" pitchFamily="34" charset="-120"/>
               </a:rPr>
-              <a:t>q* = 13.0%</a:t>
-            </a:r>
-            <a:endParaRPr lang="en-US" sz="2200" dirty="0"/>
-          </a:p>
-        </p:txBody>
-      </p:sp>
-      <p:sp>
-        <p:nvSpPr>
-          <p:cNvPr id="10" name="Text 7"/>
-          <p:cNvSpPr/>
-          <p:nvPr/>
-        </p:nvSpPr>
-        <p:spPr>
-          <a:xfrm>
-            <a:off x="6675120" y="2468880"/>
-            <a:ext cx="4736592" cy="365760"/>
-          </a:xfrm>
-          <a:prstGeom prst="rect">
-            <a:avLst/>
-          </a:prstGeom>
-          <a:noFill/>
-        </p:spPr>
-        <p:txBody>
-          <a:bodyPr wrap="square" lIns="0" tIns="0" rIns="0" bIns="0" rtlCol="0" anchor="ctr"/>
-          <a:lstStyle/>
-          <a:p>
-            <a:pPr marL="0" indent="0">
-              <a:buNone/>
-            </a:pPr>
-            <a:r>
-              <a:rPr lang="en-US" sz="1150" dirty="0">
+              <a:t>When L is LOW</a:t>
+            </a:r>
+            <a:endParaRPr lang="en-US" sz="1700" dirty="0"/>
+          </a:p>
+        </p:txBody>
+      </p:sp>
+      <p:sp>
+        <p:nvSpPr>
+          <p:cNvPr id="8" name="Text 6"/>
+          <p:cNvSpPr/>
+          <p:nvPr/>
+        </p:nvSpPr>
+        <p:spPr>
+          <a:xfrm>
+            <a:off x="804672" y="2651760"/>
+            <a:ext cx="4860036" cy="2011680"/>
+          </a:xfrm>
+          <a:prstGeom prst="rect">
+            <a:avLst/>
+          </a:prstGeom>
+          <a:noFill/>
+        </p:spPr>
+        <p:txBody>
+          <a:bodyPr wrap="square" lIns="0" tIns="0" rIns="0" bIns="0" rtlCol="0" anchor="ctr"/>
+          <a:lstStyle/>
+          <a:p>
+            <a:pPr marL="342900" indent="-342900">
+              <a:spcAft>
+                <a:spcPts val="800"/>
+              </a:spcAft>
+              <a:buSzPct val="100000"/>
+              <a:buChar char="•"/>
+            </a:pPr>
+            <a:r>
+              <a:rPr lang="en-US" sz="1400" dirty="0">
                 <a:solidFill>
                   <a:srgbClr val="33425C"/>
                 </a:solidFill>
@@ -7451,22 +7667,64 @@
                 <a:ea typeface="Calibri" pitchFamily="34" charset="-122"/>
                 <a:cs typeface="Calibri" pitchFamily="34" charset="-120"/>
               </a:rPr>
-              <a:t>Hansen grid search — stable across TRIM 15/20/25%</a:t>
-            </a:r>
-            <a:endParaRPr lang="en-US" sz="1150" dirty="0"/>
-          </a:p>
-        </p:txBody>
-      </p:sp>
-      <p:sp>
-        <p:nvSpPr>
-          <p:cNvPr id="11" name="Shape 8"/>
-          <p:cNvSpPr/>
-          <p:nvPr/>
-        </p:nvSpPr>
-        <p:spPr>
-          <a:xfrm>
-            <a:off x="6446520" y="2999232"/>
-            <a:ext cx="5193792" cy="960120"/>
+              <a:t>A redemption wave forces rapid T-bill sales</a:t>
+            </a:r>
+            <a:endParaRPr lang="en-US" sz="1400" dirty="0"/>
+          </a:p>
+          <a:p>
+            <a:pPr marL="342900" indent="-342900">
+              <a:spcAft>
+                <a:spcPts val="800"/>
+              </a:spcAft>
+              <a:buSzPct val="100000"/>
+              <a:buChar char="•"/>
+            </a:pPr>
+            <a:r>
+              <a:rPr lang="en-US" sz="1400" dirty="0">
+                <a:solidFill>
+                  <a:srgbClr val="33425C"/>
+                </a:solidFill>
+                <a:latin typeface="Calibri" pitchFamily="34" charset="0"/>
+                <a:ea typeface="Calibri" pitchFamily="34" charset="-122"/>
+                <a:cs typeface="Calibri" pitchFamily="34" charset="-120"/>
+              </a:rPr>
+              <a:t>Issuer activity moves the market in both directions</a:t>
+            </a:r>
+            <a:endParaRPr lang="en-US" sz="1400" dirty="0"/>
+          </a:p>
+          <a:p>
+            <a:pPr marL="342900" indent="-342900">
+              <a:spcAft>
+                <a:spcPts val="800"/>
+              </a:spcAft>
+              <a:buSzPct val="100000"/>
+              <a:buChar char="•"/>
+            </a:pPr>
+            <a:r>
+              <a:rPr lang="en-US" sz="1400" dirty="0">
+                <a:solidFill>
+                  <a:srgbClr val="33425C"/>
+                </a:solidFill>
+                <a:latin typeface="Calibri" pitchFamily="34" charset="0"/>
+                <a:ea typeface="Calibri" pitchFamily="34" charset="-122"/>
+                <a:cs typeface="Calibri" pitchFamily="34" charset="-120"/>
+              </a:rPr>
+              <a:t>The relationship between supply and spread changes character</a:t>
+            </a:r>
+            <a:endParaRPr lang="en-US" sz="1400" dirty="0"/>
+          </a:p>
+        </p:txBody>
+      </p:sp>
+      <p:sp>
+        <p:nvSpPr>
+          <p:cNvPr id="9" name="Shape 7"/>
+          <p:cNvSpPr/>
+          <p:nvPr/>
+        </p:nvSpPr>
+        <p:spPr>
+          <a:xfrm>
+            <a:off x="6277356" y="2057400"/>
+            <a:ext cx="5362956" cy="2834640"/>
           </a:xfrm>
           <a:prstGeom prst="rect">
             <a:avLst/>
@@ -7485,33 +7743,33 @@
       </p:sp>
       <p:sp>
         <p:nvSpPr>
-          <p:cNvPr id="12" name="Shape 9"/>
-          <p:cNvSpPr/>
-          <p:nvPr/>
-        </p:nvSpPr>
-        <p:spPr>
-          <a:xfrm>
-            <a:off x="6446520" y="2999232"/>
-            <a:ext cx="82296" cy="960120"/>
+          <p:cNvPr id="10" name="Shape 8"/>
+          <p:cNvSpPr/>
+          <p:nvPr/>
+        </p:nvSpPr>
+        <p:spPr>
+          <a:xfrm>
+            <a:off x="6277356" y="2057400"/>
+            <a:ext cx="82296" cy="2834640"/>
           </a:xfrm>
           <a:prstGeom prst="rect">
             <a:avLst/>
           </a:prstGeom>
           <a:solidFill>
-            <a:srgbClr val="13294B"/>
+            <a:srgbClr val="1B998B"/>
           </a:solidFill>
         </p:spPr>
       </p:sp>
       <p:sp>
         <p:nvSpPr>
-          <p:cNvPr id="13" name="Text 10"/>
-          <p:cNvSpPr/>
-          <p:nvPr/>
-        </p:nvSpPr>
-        <p:spPr>
-          <a:xfrm>
-            <a:off x="6675120" y="3108960"/>
-            <a:ext cx="4736592" cy="411480"/>
+          <p:cNvPr id="11" name="Text 9"/>
+          <p:cNvSpPr/>
+          <p:nvPr/>
+        </p:nvSpPr>
+        <p:spPr>
+          <a:xfrm>
+            <a:off x="6533388" y="2212848"/>
+            <a:ext cx="4905756" cy="365760"/>
           </a:xfrm>
           <a:prstGeom prst="rect">
             <a:avLst/>
@@ -7526,30 +7784,140 @@
               <a:buNone/>
             </a:pPr>
             <a:r>
-              <a:rPr lang="en-US" sz="2200" b="1" dirty="0">
-                <a:solidFill>
-                  <a:srgbClr val="13294B"/>
+              <a:rPr lang="en-US" sz="1700" b="1" dirty="0">
+                <a:solidFill>
+                  <a:srgbClr val="1B998B"/>
                 </a:solidFill>
                 <a:latin typeface="Georgia" panose="02040502050405090303" pitchFamily="34" charset="0"/>
                 <a:ea typeface="Georgia" panose="02040502050405090303" pitchFamily="34" charset="-122"/>
                 <a:cs typeface="Georgia" panose="02040502050405090303" pitchFamily="34" charset="-120"/>
               </a:rPr>
-              <a:t>c* = 14.9%</a:t>
-            </a:r>
-            <a:endParaRPr lang="en-US" sz="2200" dirty="0"/>
-          </a:p>
-        </p:txBody>
-      </p:sp>
-      <p:sp>
-        <p:nvSpPr>
-          <p:cNvPr id="14" name="Text 11"/>
-          <p:cNvSpPr/>
-          <p:nvPr/>
-        </p:nvSpPr>
-        <p:spPr>
-          <a:xfrm>
-            <a:off x="6675120" y="3547872"/>
-            <a:ext cx="4736592" cy="365760"/>
+              <a:t>When L is HIGH</a:t>
+            </a:r>
+            <a:endParaRPr lang="en-US" sz="1700" dirty="0"/>
+          </a:p>
+        </p:txBody>
+      </p:sp>
+      <p:sp>
+        <p:nvSpPr>
+          <p:cNvPr id="12" name="Text 10"/>
+          <p:cNvSpPr/>
+          <p:nvPr/>
+        </p:nvSpPr>
+        <p:spPr>
+          <a:xfrm>
+            <a:off x="6533388" y="2651760"/>
+            <a:ext cx="4494276" cy="2011680"/>
+          </a:xfrm>
+          <a:prstGeom prst="rect">
+            <a:avLst/>
+          </a:prstGeom>
+          <a:noFill/>
+        </p:spPr>
+        <p:txBody>
+          <a:bodyPr wrap="square" lIns="0" tIns="0" rIns="0" bIns="0" rtlCol="0" anchor="ctr"/>
+          <a:lstStyle/>
+          <a:p>
+            <a:pPr marL="342900" indent="-342900">
+              <a:spcAft>
+                <a:spcPts val="800"/>
+              </a:spcAft>
+              <a:buSzPct val="100000"/>
+              <a:buChar char="•"/>
+            </a:pPr>
+            <a:r>
+              <a:rPr lang="en-US" sz="1400" dirty="0">
+                <a:solidFill>
+                  <a:srgbClr val="33425C"/>
+                </a:solidFill>
+                <a:latin typeface="Calibri" pitchFamily="34" charset="0"/>
+                <a:ea typeface="Calibri" pitchFamily="34" charset="-122"/>
+                <a:cs typeface="Calibri" pitchFamily="34" charset="-120"/>
+              </a:rPr>
+              <a:t>Issuer absorbs redemptions from cash</a:t>
+            </a:r>
+            <a:endParaRPr lang="en-US" sz="1400" dirty="0"/>
+          </a:p>
+          <a:p>
+            <a:pPr marL="342900" indent="-342900">
+              <a:spcAft>
+                <a:spcPts val="800"/>
+              </a:spcAft>
+              <a:buSzPct val="100000"/>
+              <a:buChar char="•"/>
+            </a:pPr>
+            <a:r>
+              <a:rPr lang="en-US" sz="1400" dirty="0">
+                <a:solidFill>
+                  <a:srgbClr val="33425C"/>
+                </a:solidFill>
+                <a:latin typeface="Calibri" pitchFamily="34" charset="0"/>
+                <a:ea typeface="Calibri" pitchFamily="34" charset="-122"/>
+                <a:cs typeface="Calibri" pitchFamily="34" charset="-120"/>
+              </a:rPr>
+              <a:t>T-bill holdings stay untouched</a:t>
+            </a:r>
+            <a:endParaRPr lang="en-US" sz="1400" dirty="0"/>
+          </a:p>
+          <a:p>
+            <a:pPr marL="342900" indent="-342900">
+              <a:spcAft>
+                <a:spcPts val="800"/>
+              </a:spcAft>
+              <a:buSzPct val="100000"/>
+              <a:buChar char="•"/>
+            </a:pPr>
+            <a:r>
+              <a:rPr lang="en-US" sz="1400" dirty="0">
+                <a:solidFill>
+                  <a:srgbClr val="33425C"/>
+                </a:solidFill>
+                <a:latin typeface="Calibri" pitchFamily="34" charset="0"/>
+                <a:ea typeface="Calibri" pitchFamily="34" charset="-122"/>
+                <a:cs typeface="Calibri" pitchFamily="34" charset="-120"/>
+              </a:rPr>
+              <a:t>The privilege channel continues undisturbed</a:t>
+            </a:r>
+            <a:endParaRPr lang="en-US" sz="1400" dirty="0"/>
+          </a:p>
+        </p:txBody>
+      </p:sp>
+      <p:sp>
+        <p:nvSpPr>
+          <p:cNvPr id="13" name="Shape 11"/>
+          <p:cNvSpPr/>
+          <p:nvPr/>
+        </p:nvSpPr>
+        <p:spPr>
+          <a:xfrm>
+            <a:off x="548640" y="5074920"/>
+            <a:ext cx="11091672" cy="868680"/>
+          </a:xfrm>
+          <a:prstGeom prst="rect">
+            <a:avLst/>
+          </a:prstGeom>
+          <a:solidFill>
+            <a:srgbClr val="0E2746"/>
+          </a:solidFill>
+          <a:effectLst>
+            <a:outerShdw blurRad="88900" dist="38100" dir="8100000" algn="bl" rotWithShape="0">
+              <a:srgbClr val="000000">
+                <a:alpha val="13000"/>
+              </a:srgbClr>
+            </a:outerShdw>
+          </a:effectLst>
+        </p:spPr>
+      </p:sp>
+      <p:sp>
+        <p:nvSpPr>
+          <p:cNvPr id="14" name="Text 12"/>
+          <p:cNvSpPr/>
+          <p:nvPr/>
+        </p:nvSpPr>
+        <p:spPr>
+          <a:xfrm>
+            <a:off x="822960" y="5193792"/>
+            <a:ext cx="10543032" cy="640080"/>
           </a:xfrm>
           <a:prstGeom prst="rect">
             <a:avLst/>
@@ -7561,32 +7929,331 @@
           <a:lstStyle/>
           <a:p>
             <a:pPr marL="0" indent="0">
-              <a:buNone/>
-            </a:pPr>
-            <a:r>
-              <a:rPr lang="en-US" sz="1150" dirty="0">
-                <a:solidFill>
-                  <a:srgbClr val="33425C"/>
-                </a:solidFill>
-                <a:latin typeface="Calibri" pitchFamily="34" charset="0"/>
-                <a:ea typeface="Calibri" pitchFamily="34" charset="-122"/>
-                <a:cs typeface="Calibri" pitchFamily="34" charset="-120"/>
-              </a:rPr>
-              <a:t>LSTAR smooth transition — locates the same region</a:t>
-            </a:r>
-            <a:endParaRPr lang="en-US" sz="1150" dirty="0"/>
-          </a:p>
-        </p:txBody>
-      </p:sp>
-      <p:sp>
-        <p:nvSpPr>
-          <p:cNvPr id="15" name="Shape 12"/>
-          <p:cNvSpPr/>
-          <p:nvPr/>
-        </p:nvSpPr>
-        <p:spPr>
-          <a:xfrm>
-            <a:off x="6446520" y="4078224"/>
+              <a:lnSpc>
+                <a:spcPct val="105000"/>
+              </a:lnSpc>
+              <a:buNone/>
+            </a:pPr>
+            <a:r>
+              <a:rPr lang="en-US" sz="1350" b="1" dirty="0">
+                <a:solidFill>
+                  <a:srgbClr val="E8A12C"/>
+                </a:solidFill>
+                <a:latin typeface="Calibri" pitchFamily="34" charset="0"/>
+                <a:ea typeface="Calibri" pitchFamily="34" charset="-122"/>
+                <a:cs typeface="Calibri" pitchFamily="34" charset="-120"/>
+              </a:rPr>
+              <a:t>What we estimate:  </a:t>
+            </a:r>
+            <a:r>
+              <a:rPr lang="en-US" sz="1350" dirty="0">
+                <a:solidFill>
+                  <a:srgbClr val="FFFFFF"/>
+                </a:solidFill>
+                <a:latin typeface="Calibri" pitchFamily="34" charset="0"/>
+                <a:ea typeface="Calibri" pitchFamily="34" charset="-122"/>
+                <a:cs typeface="Calibri" pitchFamily="34" charset="-120"/>
+              </a:rPr>
+              <a:t>a critical buffer region in the low teens (L* ≈ 13%) separating amplification from forced liquidation — located consistently by two methods, though imprecisely estimated.</a:t>
+            </a:r>
+            <a:endParaRPr lang="en-US" sz="1350" dirty="0"/>
+          </a:p>
+        </p:txBody>
+      </p:sp>
+      <p:sp>
+        <p:nvSpPr>
+          <p:cNvPr id="15" name="Text 13"/>
+          <p:cNvSpPr/>
+          <p:nvPr/>
+        </p:nvSpPr>
+        <p:spPr>
+          <a:xfrm>
+            <a:off x="548640" y="6455664"/>
+            <a:ext cx="7315200" cy="274320"/>
+          </a:xfrm>
+          <a:prstGeom prst="rect">
+            <a:avLst/>
+          </a:prstGeom>
+          <a:noFill/>
+        </p:spPr>
+        <p:txBody>
+          <a:bodyPr wrap="square" lIns="0" tIns="0" rIns="0" bIns="0" rtlCol="0" anchor="ctr"/>
+          <a:lstStyle/>
+          <a:p>
+            <a:pPr marL="0" indent="0">
+              <a:buNone/>
+            </a:pPr>
+            <a:r>
+              <a:rPr lang="en-US" sz="900" dirty="0">
+                <a:solidFill>
+                  <a:srgbClr val="5B6B82"/>
+                </a:solidFill>
+                <a:latin typeface="Calibri" pitchFamily="34" charset="0"/>
+                <a:ea typeface="Calibri" pitchFamily="34" charset="-122"/>
+                <a:cs typeface="Calibri" pitchFamily="34" charset="-120"/>
+              </a:rPr>
+              <a:t>Stablecoins &amp; the Exorbitant Privilege</a:t>
+            </a:r>
+            <a:endParaRPr lang="en-US" sz="900" dirty="0"/>
+          </a:p>
+        </p:txBody>
+      </p:sp>
+      <p:sp>
+        <p:nvSpPr>
+          <p:cNvPr id="16" name="Text 14"/>
+          <p:cNvSpPr/>
+          <p:nvPr/>
+        </p:nvSpPr>
+        <p:spPr>
+          <a:xfrm>
+            <a:off x="11274552" y="6400800"/>
+            <a:ext cx="365760" cy="274320"/>
+          </a:xfrm>
+          <a:prstGeom prst="rect">
+            <a:avLst/>
+          </a:prstGeom>
+          <a:noFill/>
+        </p:spPr>
+        <p:txBody>
+          <a:bodyPr wrap="square" lIns="0" tIns="0" rIns="0" bIns="0" rtlCol="0" anchor="ctr"/>
+          <a:lstStyle/>
+          <a:p>
+            <a:pPr marL="0" indent="0" algn="r">
+              <a:buNone/>
+            </a:pPr>
+            <a:r>
+              <a:rPr lang="en-US" sz="1100" dirty="0">
+                <a:solidFill>
+                  <a:srgbClr val="5B6B82"/>
+                </a:solidFill>
+                <a:latin typeface="Calibri" pitchFamily="34" charset="0"/>
+                <a:ea typeface="Calibri" pitchFamily="34" charset="-122"/>
+                <a:cs typeface="Calibri" pitchFamily="34" charset="-120"/>
+              </a:rPr>
+              <a:t>13</a:t>
+            </a:r>
+            <a:endParaRPr lang="en-US" sz="1100" dirty="0"/>
+          </a:p>
+        </p:txBody>
+      </p:sp>
+    </p:spTree>
+  </p:cSld>
+  <p:clrMapOvr>
+    <a:masterClrMapping/>
+  </p:clrMapOvr>
+</p:sld>
+</file>
+
+<file path=ppt/slides/slide15.xml><?xml version="1.0" encoding="utf-8"?>
+<p:sld xmlns:a="http://schemas.openxmlformats.org/drawingml/2006/main" xmlns:r="http://schemas.openxmlformats.org/officeDocument/2006/relationships" xmlns:p="http://schemas.openxmlformats.org/presentationml/2006/main">
+  <p:cSld>
+    <p:bg>
+      <p:bgPr>
+        <a:solidFill>
+          <a:srgbClr val="FFFFFF"/>
+        </a:solidFill>
+        <a:effectLst/>
+      </p:bgPr>
+    </p:bg>
+    <p:spTree>
+      <p:nvGrpSpPr>
+        <p:cNvPr id="1" name=""/>
+        <p:cNvGrpSpPr/>
+        <p:nvPr/>
+      </p:nvGrpSpPr>
+      <p:grpSpPr>
+        <a:xfrm>
+          <a:off x="0" y="0"/>
+          <a:ext cx="0" cy="0"/>
+          <a:chOff x="0" y="0"/>
+          <a:chExt cx="0" cy="0"/>
+        </a:xfrm>
+      </p:grpSpPr>
+      <p:sp>
+        <p:nvSpPr>
+          <p:cNvPr id="2" name="Text 0"/>
+          <p:cNvSpPr/>
+          <p:nvPr/>
+        </p:nvSpPr>
+        <p:spPr>
+          <a:xfrm>
+            <a:off x="548640" y="384048"/>
+            <a:ext cx="11091672" cy="274320"/>
+          </a:xfrm>
+          <a:prstGeom prst="rect">
+            <a:avLst/>
+          </a:prstGeom>
+          <a:noFill/>
+        </p:spPr>
+        <p:txBody>
+          <a:bodyPr wrap="square" lIns="0" tIns="0" rIns="0" bIns="0" rtlCol="0" anchor="ctr"/>
+          <a:lstStyle/>
+          <a:p>
+            <a:pPr marL="0" indent="0">
+              <a:buNone/>
+            </a:pPr>
+            <a:r>
+              <a:rPr lang="en-US" sz="1200" b="1" kern="0" spc="200" dirty="0">
+                <a:solidFill>
+                  <a:srgbClr val="1B998B"/>
+                </a:solidFill>
+                <a:latin typeface="Calibri" pitchFamily="34" charset="0"/>
+                <a:ea typeface="Calibri" pitchFamily="34" charset="-122"/>
+                <a:cs typeface="Calibri" pitchFamily="34" charset="-120"/>
+              </a:rPr>
+              <a:t>THRESHOLD RESULT</a:t>
+            </a:r>
+            <a:endParaRPr lang="en-US" sz="1200" dirty="0"/>
+          </a:p>
+        </p:txBody>
+      </p:sp>
+      <p:sp>
+        <p:nvSpPr>
+          <p:cNvPr id="3" name="Text 1"/>
+          <p:cNvSpPr/>
+          <p:nvPr/>
+        </p:nvSpPr>
+        <p:spPr>
+          <a:xfrm>
+            <a:off x="548640" y="658368"/>
+            <a:ext cx="11091672" cy="685800"/>
+          </a:xfrm>
+          <a:prstGeom prst="rect">
+            <a:avLst/>
+          </a:prstGeom>
+          <a:noFill/>
+        </p:spPr>
+        <p:txBody>
+          <a:bodyPr wrap="square" lIns="0" tIns="0" rIns="0" bIns="0" rtlCol="0" anchor="ctr"/>
+          <a:lstStyle/>
+          <a:p>
+            <a:pPr marL="0" indent="0">
+              <a:buNone/>
+            </a:pPr>
+            <a:r>
+              <a:rPr lang="en-US" sz="2700" b="1" dirty="0">
+                <a:solidFill>
+                  <a:srgbClr val="13294B"/>
+                </a:solidFill>
+                <a:latin typeface="Georgia" panose="02040502050405090303" pitchFamily="34" charset="0"/>
+                <a:ea typeface="Georgia" panose="02040502050405090303" pitchFamily="34" charset="-122"/>
+                <a:cs typeface="Georgia" panose="02040502050405090303" pitchFamily="34" charset="-120"/>
+              </a:rPr>
+              <a:t>A Fragility Region in the Low Teens (≈ 13%)</a:t>
+            </a:r>
+            <a:endParaRPr lang="en-US" sz="2700" dirty="0"/>
+          </a:p>
+        </p:txBody>
+      </p:sp>
+      <p:sp>
+        <p:nvSpPr>
+          <p:cNvPr id="4" name="Text 2"/>
+          <p:cNvSpPr/>
+          <p:nvPr/>
+        </p:nvSpPr>
+        <p:spPr>
+          <a:xfrm>
+            <a:off x="548640" y="1417320"/>
+            <a:ext cx="11091672" cy="365760"/>
+          </a:xfrm>
+          <a:prstGeom prst="rect">
+            <a:avLst/>
+          </a:prstGeom>
+          <a:noFill/>
+        </p:spPr>
+        <p:txBody>
+          <a:bodyPr wrap="square" lIns="0" tIns="0" rIns="0" bIns="0" rtlCol="0" anchor="ctr"/>
+          <a:lstStyle/>
+          <a:p>
+            <a:pPr marL="0" indent="0">
+              <a:buNone/>
+            </a:pPr>
+            <a:r>
+              <a:rPr lang="en-US" sz="1500" i="1" dirty="0">
+                <a:solidFill>
+                  <a:srgbClr val="5B6B82"/>
+                </a:solidFill>
+                <a:latin typeface="Georgia" panose="02040502050405090303" pitchFamily="34" charset="0"/>
+                <a:ea typeface="Georgia" panose="02040502050405090303" pitchFamily="34" charset="-122"/>
+                <a:cs typeface="Georgia" panose="02040502050405090303" pitchFamily="34" charset="-120"/>
+              </a:rPr>
+              <a:t>Two methods independently locate the break near 13–15%. The location is robust; the precision is limited by N = 51.</a:t>
+            </a:r>
+            <a:endParaRPr lang="en-US" sz="1500" dirty="0"/>
+          </a:p>
+        </p:txBody>
+      </p:sp>
+      <p:pic>
+        <p:nvPicPr>
+          <p:cNvPr id="5" name="Image 0" descr="figs/image6.png"/>
+          <p:cNvPicPr>
+            <a:picLocks noChangeAspect="1"/>
+          </p:cNvPicPr>
+          <p:nvPr/>
+        </p:nvPicPr>
+        <p:blipFill>
+          <a:blip r:embed="rId1"/>
+          <a:stretch>
+            <a:fillRect/>
+          </a:stretch>
+        </p:blipFill>
+        <p:spPr>
+          <a:xfrm>
+            <a:off x="548640" y="1920240"/>
+            <a:ext cx="5577840" cy="3138908"/>
+          </a:xfrm>
+          <a:prstGeom prst="rect">
+            <a:avLst/>
+          </a:prstGeom>
+        </p:spPr>
+      </p:pic>
+      <p:sp>
+        <p:nvSpPr>
+          <p:cNvPr id="6" name="Text 3"/>
+          <p:cNvSpPr/>
+          <p:nvPr/>
+        </p:nvSpPr>
+        <p:spPr>
+          <a:xfrm>
+            <a:off x="548640" y="5095724"/>
+            <a:ext cx="5577840" cy="365760"/>
+          </a:xfrm>
+          <a:prstGeom prst="rect">
+            <a:avLst/>
+          </a:prstGeom>
+          <a:noFill/>
+        </p:spPr>
+        <p:txBody>
+          <a:bodyPr wrap="square" lIns="0" tIns="0" rIns="0" bIns="0" rtlCol="0" anchor="ctr"/>
+          <a:lstStyle/>
+          <a:p>
+            <a:pPr marL="0" indent="0">
+              <a:buNone/>
+            </a:pPr>
+            <a:r>
+              <a:rPr lang="en-US" sz="1050" i="1" dirty="0">
+                <a:solidFill>
+                  <a:srgbClr val="5B6B82"/>
+                </a:solidFill>
+                <a:latin typeface="Calibri" pitchFamily="34" charset="0"/>
+                <a:ea typeface="Calibri" pitchFamily="34" charset="-122"/>
+                <a:cs typeface="Calibri" pitchFamily="34" charset="-120"/>
+              </a:rPr>
+              <a:t>Hansen (2000) SSR over the buffer grid — minimized at q* = 0.130, with the bootstrap 90% CI shaded.</a:t>
+            </a:r>
+            <a:endParaRPr lang="en-US" sz="1050" dirty="0"/>
+          </a:p>
+        </p:txBody>
+      </p:sp>
+      <p:sp>
+        <p:nvSpPr>
+          <p:cNvPr id="7" name="Shape 4"/>
+          <p:cNvSpPr/>
+          <p:nvPr/>
+        </p:nvSpPr>
+        <p:spPr>
+          <a:xfrm>
+            <a:off x="6446520" y="1920240"/>
             <a:ext cx="5193792" cy="960120"/>
           </a:xfrm>
           <a:prstGeom prst="rect">
@@ -7606,32 +8273,32 @@
       </p:sp>
       <p:sp>
         <p:nvSpPr>
-          <p:cNvPr id="16" name="Shape 13"/>
-          <p:cNvSpPr/>
-          <p:nvPr/>
-        </p:nvSpPr>
-        <p:spPr>
-          <a:xfrm>
-            <a:off x="6446520" y="4078224"/>
+          <p:cNvPr id="8" name="Shape 5"/>
+          <p:cNvSpPr/>
+          <p:nvPr/>
+        </p:nvSpPr>
+        <p:spPr>
+          <a:xfrm>
+            <a:off x="6446520" y="1920240"/>
             <a:ext cx="82296" cy="960120"/>
           </a:xfrm>
           <a:prstGeom prst="rect">
             <a:avLst/>
           </a:prstGeom>
           <a:solidFill>
-            <a:srgbClr val="E8A12C"/>
+            <a:srgbClr val="1B998B"/>
           </a:solidFill>
         </p:spPr>
       </p:sp>
       <p:sp>
         <p:nvSpPr>
-          <p:cNvPr id="17" name="Text 14"/>
-          <p:cNvSpPr/>
-          <p:nvPr/>
-        </p:nvSpPr>
-        <p:spPr>
-          <a:xfrm>
-            <a:off x="6675120" y="4187952"/>
+          <p:cNvPr id="9" name="Text 6"/>
+          <p:cNvSpPr/>
+          <p:nvPr/>
+        </p:nvSpPr>
+        <p:spPr>
+          <a:xfrm>
+            <a:off x="6675120" y="2029968"/>
             <a:ext cx="4736592" cy="411480"/>
           </a:xfrm>
           <a:prstGeom prst="rect">
@@ -7655,7 +8322,7 @@
                 <a:ea typeface="Georgia" panose="02040502050405090303" pitchFamily="34" charset="-122"/>
                 <a:cs typeface="Georgia" panose="02040502050405090303" pitchFamily="34" charset="-120"/>
               </a:rPr>
-              <a:t>p = 0.406</a:t>
+              <a:t>q* = 13.0%</a:t>
             </a:r>
             <a:endParaRPr lang="en-US" sz="2200" dirty="0"/>
           </a:p>
@@ -7663,13 +8330,13 @@
       </p:sp>
       <p:sp>
         <p:nvSpPr>
-          <p:cNvPr id="18" name="Text 15"/>
-          <p:cNvSpPr/>
-          <p:nvPr/>
-        </p:nvSpPr>
-        <p:spPr>
-          <a:xfrm>
-            <a:off x="6675120" y="4626864"/>
+          <p:cNvPr id="10" name="Text 7"/>
+          <p:cNvSpPr/>
+          <p:nvPr/>
+        </p:nvSpPr>
+        <p:spPr>
+          <a:xfrm>
+            <a:off x="6675120" y="2468880"/>
             <a:ext cx="4736592" cy="365760"/>
           </a:xfrm>
           <a:prstGeom prst="rect">
@@ -7693,7 +8360,7 @@
                 <a:ea typeface="Calibri" pitchFamily="34" charset="-122"/>
                 <a:cs typeface="Calibri" pitchFamily="34" charset="-120"/>
               </a:rPr>
-              <a:t>bootstrap; 90% CI [3.1%, 14.5%] — location robust, not precise</a:t>
+              <a:t>Hansen grid search — stable across TRIM 15/20/25%</a:t>
             </a:r>
             <a:endParaRPr lang="en-US" sz="1150" dirty="0"/>
           </a:p>
@@ -7701,14 +8368,14 @@
       </p:sp>
       <p:sp>
         <p:nvSpPr>
-          <p:cNvPr id="19" name="Shape 16"/>
-          <p:cNvSpPr/>
-          <p:nvPr/>
-        </p:nvSpPr>
-        <p:spPr>
-          <a:xfrm>
-            <a:off x="548640" y="5138928"/>
-            <a:ext cx="11091672" cy="1188720"/>
+          <p:cNvPr id="11" name="Shape 8"/>
+          <p:cNvSpPr/>
+          <p:nvPr/>
+        </p:nvSpPr>
+        <p:spPr>
+          <a:xfrm>
+            <a:off x="6446520" y="2999232"/>
+            <a:ext cx="5193792" cy="960120"/>
           </a:xfrm>
           <a:prstGeom prst="rect">
             <a:avLst/>
@@ -7727,6 +8394,248 @@
       </p:sp>
       <p:sp>
         <p:nvSpPr>
+          <p:cNvPr id="12" name="Shape 9"/>
+          <p:cNvSpPr/>
+          <p:nvPr/>
+        </p:nvSpPr>
+        <p:spPr>
+          <a:xfrm>
+            <a:off x="6446520" y="2999232"/>
+            <a:ext cx="82296" cy="960120"/>
+          </a:xfrm>
+          <a:prstGeom prst="rect">
+            <a:avLst/>
+          </a:prstGeom>
+          <a:solidFill>
+            <a:srgbClr val="13294B"/>
+          </a:solidFill>
+        </p:spPr>
+      </p:sp>
+      <p:sp>
+        <p:nvSpPr>
+          <p:cNvPr id="13" name="Text 10"/>
+          <p:cNvSpPr/>
+          <p:nvPr/>
+        </p:nvSpPr>
+        <p:spPr>
+          <a:xfrm>
+            <a:off x="6675120" y="3108960"/>
+            <a:ext cx="4736592" cy="411480"/>
+          </a:xfrm>
+          <a:prstGeom prst="rect">
+            <a:avLst/>
+          </a:prstGeom>
+          <a:noFill/>
+        </p:spPr>
+        <p:txBody>
+          <a:bodyPr wrap="square" lIns="0" tIns="0" rIns="0" bIns="0" rtlCol="0" anchor="ctr"/>
+          <a:lstStyle/>
+          <a:p>
+            <a:pPr marL="0" indent="0">
+              <a:buNone/>
+            </a:pPr>
+            <a:r>
+              <a:rPr lang="en-US" sz="2200" b="1" dirty="0">
+                <a:solidFill>
+                  <a:srgbClr val="13294B"/>
+                </a:solidFill>
+                <a:latin typeface="Georgia" panose="02040502050405090303" pitchFamily="34" charset="0"/>
+                <a:ea typeface="Georgia" panose="02040502050405090303" pitchFamily="34" charset="-122"/>
+                <a:cs typeface="Georgia" panose="02040502050405090303" pitchFamily="34" charset="-120"/>
+              </a:rPr>
+              <a:t>c* = 14.9%</a:t>
+            </a:r>
+            <a:endParaRPr lang="en-US" sz="2200" dirty="0"/>
+          </a:p>
+        </p:txBody>
+      </p:sp>
+      <p:sp>
+        <p:nvSpPr>
+          <p:cNvPr id="14" name="Text 11"/>
+          <p:cNvSpPr/>
+          <p:nvPr/>
+        </p:nvSpPr>
+        <p:spPr>
+          <a:xfrm>
+            <a:off x="6675120" y="3547872"/>
+            <a:ext cx="4736592" cy="365760"/>
+          </a:xfrm>
+          <a:prstGeom prst="rect">
+            <a:avLst/>
+          </a:prstGeom>
+          <a:noFill/>
+        </p:spPr>
+        <p:txBody>
+          <a:bodyPr wrap="square" lIns="0" tIns="0" rIns="0" bIns="0" rtlCol="0" anchor="ctr"/>
+          <a:lstStyle/>
+          <a:p>
+            <a:pPr marL="0" indent="0">
+              <a:buNone/>
+            </a:pPr>
+            <a:r>
+              <a:rPr lang="en-US" sz="1150" dirty="0">
+                <a:solidFill>
+                  <a:srgbClr val="33425C"/>
+                </a:solidFill>
+                <a:latin typeface="Calibri" pitchFamily="34" charset="0"/>
+                <a:ea typeface="Calibri" pitchFamily="34" charset="-122"/>
+                <a:cs typeface="Calibri" pitchFamily="34" charset="-120"/>
+              </a:rPr>
+              <a:t>LSTAR smooth transition — locates the same region</a:t>
+            </a:r>
+            <a:endParaRPr lang="en-US" sz="1150" dirty="0"/>
+          </a:p>
+        </p:txBody>
+      </p:sp>
+      <p:sp>
+        <p:nvSpPr>
+          <p:cNvPr id="15" name="Shape 12"/>
+          <p:cNvSpPr/>
+          <p:nvPr/>
+        </p:nvSpPr>
+        <p:spPr>
+          <a:xfrm>
+            <a:off x="6446520" y="4078224"/>
+            <a:ext cx="5193792" cy="960120"/>
+          </a:xfrm>
+          <a:prstGeom prst="rect">
+            <a:avLst/>
+          </a:prstGeom>
+          <a:solidFill>
+            <a:srgbClr val="F4F6FA"/>
+          </a:solidFill>
+          <a:effectLst>
+            <a:outerShdw blurRad="88900" dist="38100" dir="8100000" algn="bl" rotWithShape="0">
+              <a:srgbClr val="000000">
+                <a:alpha val="13000"/>
+              </a:srgbClr>
+            </a:outerShdw>
+          </a:effectLst>
+        </p:spPr>
+      </p:sp>
+      <p:sp>
+        <p:nvSpPr>
+          <p:cNvPr id="16" name="Shape 13"/>
+          <p:cNvSpPr/>
+          <p:nvPr/>
+        </p:nvSpPr>
+        <p:spPr>
+          <a:xfrm>
+            <a:off x="6446520" y="4078224"/>
+            <a:ext cx="82296" cy="960120"/>
+          </a:xfrm>
+          <a:prstGeom prst="rect">
+            <a:avLst/>
+          </a:prstGeom>
+          <a:solidFill>
+            <a:srgbClr val="E8A12C"/>
+          </a:solidFill>
+        </p:spPr>
+      </p:sp>
+      <p:sp>
+        <p:nvSpPr>
+          <p:cNvPr id="17" name="Text 14"/>
+          <p:cNvSpPr/>
+          <p:nvPr/>
+        </p:nvSpPr>
+        <p:spPr>
+          <a:xfrm>
+            <a:off x="6675120" y="4187952"/>
+            <a:ext cx="4736592" cy="411480"/>
+          </a:xfrm>
+          <a:prstGeom prst="rect">
+            <a:avLst/>
+          </a:prstGeom>
+          <a:noFill/>
+        </p:spPr>
+        <p:txBody>
+          <a:bodyPr wrap="square" lIns="0" tIns="0" rIns="0" bIns="0" rtlCol="0" anchor="ctr"/>
+          <a:lstStyle/>
+          <a:p>
+            <a:pPr marL="0" indent="0">
+              <a:buNone/>
+            </a:pPr>
+            <a:r>
+              <a:rPr lang="en-US" sz="2200" b="1" dirty="0">
+                <a:solidFill>
+                  <a:srgbClr val="13294B"/>
+                </a:solidFill>
+                <a:latin typeface="Georgia" panose="02040502050405090303" pitchFamily="34" charset="0"/>
+                <a:ea typeface="Georgia" panose="02040502050405090303" pitchFamily="34" charset="-122"/>
+                <a:cs typeface="Georgia" panose="02040502050405090303" pitchFamily="34" charset="-120"/>
+              </a:rPr>
+              <a:t>p = 0.406</a:t>
+            </a:r>
+            <a:endParaRPr lang="en-US" sz="2200" dirty="0"/>
+          </a:p>
+        </p:txBody>
+      </p:sp>
+      <p:sp>
+        <p:nvSpPr>
+          <p:cNvPr id="18" name="Text 15"/>
+          <p:cNvSpPr/>
+          <p:nvPr/>
+        </p:nvSpPr>
+        <p:spPr>
+          <a:xfrm>
+            <a:off x="6675120" y="4626864"/>
+            <a:ext cx="4736592" cy="365760"/>
+          </a:xfrm>
+          <a:prstGeom prst="rect">
+            <a:avLst/>
+          </a:prstGeom>
+          <a:noFill/>
+        </p:spPr>
+        <p:txBody>
+          <a:bodyPr wrap="square" lIns="0" tIns="0" rIns="0" bIns="0" rtlCol="0" anchor="ctr"/>
+          <a:lstStyle/>
+          <a:p>
+            <a:pPr marL="0" indent="0">
+              <a:buNone/>
+            </a:pPr>
+            <a:r>
+              <a:rPr lang="en-US" sz="1150" dirty="0">
+                <a:solidFill>
+                  <a:srgbClr val="33425C"/>
+                </a:solidFill>
+                <a:latin typeface="Calibri" pitchFamily="34" charset="0"/>
+                <a:ea typeface="Calibri" pitchFamily="34" charset="-122"/>
+                <a:cs typeface="Calibri" pitchFamily="34" charset="-120"/>
+              </a:rPr>
+              <a:t>bootstrap; 90% CI [3.1%, 14.5%] — location robust, not precise</a:t>
+            </a:r>
+            <a:endParaRPr lang="en-US" sz="1150" dirty="0"/>
+          </a:p>
+        </p:txBody>
+      </p:sp>
+      <p:sp>
+        <p:nvSpPr>
+          <p:cNvPr id="19" name="Shape 16"/>
+          <p:cNvSpPr/>
+          <p:nvPr/>
+        </p:nvSpPr>
+        <p:spPr>
+          <a:xfrm>
+            <a:off x="548640" y="5138928"/>
+            <a:ext cx="11091672" cy="1188720"/>
+          </a:xfrm>
+          <a:prstGeom prst="rect">
+            <a:avLst/>
+          </a:prstGeom>
+          <a:solidFill>
+            <a:srgbClr val="F4F6FA"/>
+          </a:solidFill>
+          <a:effectLst>
+            <a:outerShdw blurRad="88900" dist="38100" dir="8100000" algn="bl" rotWithShape="0">
+              <a:srgbClr val="000000">
+                <a:alpha val="13000"/>
+              </a:srgbClr>
+            </a:outerShdw>
+          </a:effectLst>
+        </p:spPr>
+      </p:sp>
+      <p:sp>
+        <p:nvSpPr>
           <p:cNvPr id="20" name="Shape 17"/>
           <p:cNvSpPr/>
           <p:nvPr/>
@@ -7924,7 +8833,365 @@
 </p:sld>
 </file>
 
-<file path=ppt/slides/slide15.xml><?xml version="1.0" encoding="utf-8"?>
+<file path=ppt/slides/slide16.xml><?xml version="1.0" encoding="utf-8"?>
+<p:sld xmlns:a="http://schemas.openxmlformats.org/drawingml/2006/main" xmlns:r="http://schemas.openxmlformats.org/officeDocument/2006/relationships" xmlns:p="http://schemas.openxmlformats.org/presentationml/2006/main">
+  <p:cSld>
+    <p:spTree>
+      <p:nvGrpSpPr>
+        <p:cNvPr id="1" name=""/>
+        <p:cNvGrpSpPr/>
+        <p:nvPr/>
+      </p:nvGrpSpPr>
+      <p:grpSpPr>
+        <a:xfrm>
+          <a:off x="0" y="0"/>
+          <a:ext cx="0" cy="0"/>
+          <a:chOff x="0" y="0"/>
+          <a:chExt cx="0" cy="0"/>
+        </a:xfrm>
+      </p:grpSpPr>
+      <p:sp>
+        <p:nvSpPr>
+          <p:cNvPr id="2" name="Text 0"/>
+          <p:cNvSpPr/>
+          <p:nvPr/>
+        </p:nvSpPr>
+        <p:spPr>
+          <a:xfrm>
+            <a:off x="548640" y="384048"/>
+            <a:ext cx="11091672" cy="274320"/>
+          </a:xfrm>
+          <a:prstGeom prst="rect">
+            <a:avLst/>
+          </a:prstGeom>
+          <a:noFill/>
+        </p:spPr>
+        <p:txBody>
+          <a:bodyPr wrap="square" lIns="0" tIns="0" rIns="0" bIns="0" rtlCol="0" anchor="ctr"/>
+          <a:lstStyle/>
+          <a:p>
+            <a:pPr marL="0" indent="0">
+              <a:buNone/>
+            </a:pPr>
+            <a:r>
+              <a:rPr lang="en-US" sz="1200" b="1" kern="0" spc="200" dirty="0">
+                <a:solidFill>
+                  <a:srgbClr val="1B998B"/>
+                </a:solidFill>
+                <a:latin typeface="Calibri" pitchFamily="34" charset="0"/>
+                <a:ea typeface="Calibri" pitchFamily="34" charset="-122"/>
+                <a:cs typeface="Calibri" pitchFamily="34" charset="-120"/>
+              </a:rPr>
+              <a:t>ROBUSTNESS</a:t>
+            </a:r>
+            <a:endParaRPr lang="en-US" sz="1200" dirty="0"/>
+          </a:p>
+        </p:txBody>
+      </p:sp>
+      <p:sp>
+        <p:nvSpPr>
+          <p:cNvPr id="3" name="Text 1"/>
+          <p:cNvSpPr/>
+          <p:nvPr/>
+        </p:nvSpPr>
+        <p:spPr>
+          <a:xfrm>
+            <a:off x="548640" y="658368"/>
+            <a:ext cx="11091672" cy="685800"/>
+          </a:xfrm>
+          <a:prstGeom prst="rect">
+            <a:avLst/>
+          </a:prstGeom>
+          <a:noFill/>
+        </p:spPr>
+        <p:txBody>
+          <a:bodyPr wrap="square" lIns="0" tIns="0" rIns="0" bIns="0" rtlCol="0" anchor="ctr"/>
+          <a:lstStyle/>
+          <a:p>
+            <a:pPr marL="0" indent="0">
+              <a:buNone/>
+            </a:pPr>
+            <a:r>
+              <a:rPr lang="en-US" sz="2700" b="1" dirty="0">
+                <a:solidFill>
+                  <a:srgbClr val="13294B"/>
+                </a:solidFill>
+                <a:latin typeface="Georgia" panose="02040502050405090303" pitchFamily="34" charset="0"/>
+                <a:ea typeface="Georgia" panose="02040502050405090303" pitchFamily="34" charset="-122"/>
+                <a:cs typeface="Georgia" panose="02040502050405090303" pitchFamily="34" charset="-120"/>
+              </a:rPr>
+              <a:t>LSTAR Smooth-Transition Regression</a:t>
+            </a:r>
+            <a:endParaRPr lang="en-US" sz="2700" dirty="0"/>
+          </a:p>
+        </p:txBody>
+      </p:sp>
+      <p:sp>
+        <p:nvSpPr>
+          <p:cNvPr id="4" name="Text 2"/>
+          <p:cNvSpPr/>
+          <p:nvPr/>
+        </p:nvSpPr>
+        <p:spPr>
+          <a:xfrm>
+            <a:off x="548640" y="1417320"/>
+            <a:ext cx="11091672" cy="365760"/>
+          </a:xfrm>
+          <a:prstGeom prst="rect">
+            <a:avLst/>
+          </a:prstGeom>
+          <a:noFill/>
+        </p:spPr>
+        <p:txBody>
+          <a:bodyPr wrap="square" lIns="0" tIns="0" rIns="0" bIns="0" rtlCol="0" anchor="ctr"/>
+          <a:lstStyle/>
+          <a:p>
+            <a:pPr marL="0" indent="0">
+              <a:buNone/>
+            </a:pPr>
+            <a:r>
+              <a:rPr lang="en-US" sz="1500" i="1" dirty="0">
+                <a:solidFill>
+                  <a:srgbClr val="5B6B82"/>
+                </a:solidFill>
+                <a:latin typeface="Georgia" panose="02040502050405090303" pitchFamily="34" charset="0"/>
+                <a:ea typeface="Georgia" panose="02040502050405090303" pitchFamily="34" charset="-122"/>
+                <a:cs typeface="Georgia" panose="02040502050405090303" pitchFamily="34" charset="-120"/>
+              </a:rPr>
+              <a:t>Does Hansen's sharp-switch assumption drive the result? A gradual-transition model locates the same region.</a:t>
+            </a:r>
+            <a:endParaRPr lang="en-US" sz="1500" dirty="0"/>
+          </a:p>
+        </p:txBody>
+      </p:sp>
+      <p:pic>
+        <p:nvPicPr>
+          <p:cNvPr id="5" name="Image 0" descr="figs/image7.png"/>
+          <p:cNvPicPr>
+            <a:picLocks noChangeAspect="1"/>
+          </p:cNvPicPr>
+          <p:nvPr/>
+        </p:nvPicPr>
+        <p:blipFill>
+          <a:blip r:embed="rId1"/>
+          <a:stretch>
+            <a:fillRect/>
+          </a:stretch>
+        </p:blipFill>
+        <p:spPr>
+          <a:xfrm>
+            <a:off x="1705356" y="1828800"/>
+            <a:ext cx="8778240" cy="3287730"/>
+          </a:xfrm>
+          <a:prstGeom prst="rect">
+            <a:avLst/>
+          </a:prstGeom>
+        </p:spPr>
+      </p:pic>
+      <p:sp>
+        <p:nvSpPr>
+          <p:cNvPr id="6" name="Shape 3"/>
+          <p:cNvSpPr/>
+          <p:nvPr/>
+        </p:nvSpPr>
+        <p:spPr>
+          <a:xfrm>
+            <a:off x="548640" y="5212080"/>
+            <a:ext cx="11091672" cy="1051560"/>
+          </a:xfrm>
+          <a:prstGeom prst="rect">
+            <a:avLst/>
+          </a:prstGeom>
+          <a:solidFill>
+            <a:srgbClr val="FBEEDD"/>
+          </a:solidFill>
+          <a:effectLst>
+            <a:outerShdw blurRad="88900" dist="38100" dir="8100000" algn="bl" rotWithShape="0">
+              <a:srgbClr val="000000">
+                <a:alpha val="13000"/>
+              </a:srgbClr>
+            </a:outerShdw>
+          </a:effectLst>
+        </p:spPr>
+      </p:sp>
+      <p:sp>
+        <p:nvSpPr>
+          <p:cNvPr id="7" name="Shape 4"/>
+          <p:cNvSpPr/>
+          <p:nvPr/>
+        </p:nvSpPr>
+        <p:spPr>
+          <a:xfrm>
+            <a:off x="548640" y="5212080"/>
+            <a:ext cx="82296" cy="1051560"/>
+          </a:xfrm>
+          <a:prstGeom prst="rect">
+            <a:avLst/>
+          </a:prstGeom>
+          <a:solidFill>
+            <a:srgbClr val="E8A12C"/>
+          </a:solidFill>
+        </p:spPr>
+      </p:sp>
+      <p:sp>
+        <p:nvSpPr>
+          <p:cNvPr id="8" name="Text 5"/>
+          <p:cNvSpPr/>
+          <p:nvPr/>
+        </p:nvSpPr>
+        <p:spPr>
+          <a:xfrm>
+            <a:off x="822960" y="5303520"/>
+            <a:ext cx="10543032" cy="868680"/>
+          </a:xfrm>
+          <a:prstGeom prst="rect">
+            <a:avLst/>
+          </a:prstGeom>
+          <a:noFill/>
+        </p:spPr>
+        <p:txBody>
+          <a:bodyPr wrap="square" lIns="0" tIns="0" rIns="0" bIns="0" rtlCol="0" anchor="ctr"/>
+          <a:lstStyle/>
+          <a:p>
+            <a:pPr marL="0" indent="0">
+              <a:lnSpc>
+                <a:spcPct val="106000"/>
+              </a:lnSpc>
+              <a:buNone/>
+            </a:pPr>
+            <a:r>
+              <a:rPr lang="en-US" sz="1200" b="1" dirty="0">
+                <a:solidFill>
+                  <a:srgbClr val="13294B"/>
+                </a:solidFill>
+                <a:latin typeface="Calibri" pitchFamily="34" charset="0"/>
+                <a:ea typeface="Calibri" pitchFamily="34" charset="-122"/>
+                <a:cs typeface="Calibri" pitchFamily="34" charset="-120"/>
+              </a:rPr>
+              <a:t>What this adds:  </a:t>
+            </a:r>
+            <a:r>
+              <a:rPr lang="en-US" sz="1200" dirty="0">
+                <a:solidFill>
+                  <a:srgbClr val="33425C"/>
+                </a:solidFill>
+                <a:latin typeface="Calibri" pitchFamily="34" charset="0"/>
+                <a:ea typeface="Calibri" pitchFamily="34" charset="-122"/>
+                <a:cs typeface="Calibri" pitchFamily="34" charset="-120"/>
+              </a:rPr>
+              <a:t>the transition midpoint c* = 14.9% lands inside the Hansen bootstrap CI — two methods, same 13–15% region.   </a:t>
+            </a:r>
+            <a:r>
+              <a:rPr lang="en-US" sz="1200" b="1" dirty="0">
+                <a:solidFill>
+                  <a:srgbClr val="C1121F"/>
+                </a:solidFill>
+                <a:latin typeface="Calibri" pitchFamily="34" charset="0"/>
+                <a:ea typeface="Calibri" pitchFamily="34" charset="-122"/>
+                <a:cs typeface="Calibri" pitchFamily="34" charset="-120"/>
+              </a:rPr>
+              <a:t>Read with care:  </a:t>
+            </a:r>
+            <a:r>
+              <a:rPr lang="en-US" sz="1200" dirty="0">
+                <a:solidFill>
+                  <a:srgbClr val="33425C"/>
+                </a:solidFill>
+                <a:latin typeface="Calibri" pitchFamily="34" charset="0"/>
+                <a:ea typeface="Calibri" pitchFamily="34" charset="-122"/>
+                <a:cs typeface="Calibri" pitchFamily="34" charset="-120"/>
+              </a:rPr>
+              <a:t>the per-regime betas (−1.81 / −12.59) come from a different functional form than Hansen's — treat them as the LSTAR fit, not as beta-level confirmation. The robust cross-model claim is the threshold LOCATION.</a:t>
+            </a:r>
+            <a:endParaRPr lang="en-US" sz="1200" dirty="0"/>
+          </a:p>
+        </p:txBody>
+      </p:sp>
+      <p:sp>
+        <p:nvSpPr>
+          <p:cNvPr id="9" name="Text 6"/>
+          <p:cNvSpPr/>
+          <p:nvPr/>
+        </p:nvSpPr>
+        <p:spPr>
+          <a:xfrm>
+            <a:off x="548640" y="6455664"/>
+            <a:ext cx="7315200" cy="274320"/>
+          </a:xfrm>
+          <a:prstGeom prst="rect">
+            <a:avLst/>
+          </a:prstGeom>
+          <a:noFill/>
+        </p:spPr>
+        <p:txBody>
+          <a:bodyPr wrap="square" lIns="0" tIns="0" rIns="0" bIns="0" rtlCol="0" anchor="ctr"/>
+          <a:lstStyle/>
+          <a:p>
+            <a:pPr marL="0" indent="0">
+              <a:buNone/>
+            </a:pPr>
+            <a:r>
+              <a:rPr lang="en-US" sz="900" dirty="0">
+                <a:solidFill>
+                  <a:srgbClr val="5B6B82"/>
+                </a:solidFill>
+                <a:latin typeface="Calibri" pitchFamily="34" charset="0"/>
+                <a:ea typeface="Calibri" pitchFamily="34" charset="-122"/>
+                <a:cs typeface="Calibri" pitchFamily="34" charset="-120"/>
+              </a:rPr>
+              <a:t>Stablecoins &amp; the Exorbitant Privilege</a:t>
+            </a:r>
+            <a:endParaRPr lang="en-US" sz="900" dirty="0"/>
+          </a:p>
+        </p:txBody>
+      </p:sp>
+      <p:sp>
+        <p:nvSpPr>
+          <p:cNvPr id="10" name="Text 7"/>
+          <p:cNvSpPr/>
+          <p:nvPr/>
+        </p:nvSpPr>
+        <p:spPr>
+          <a:xfrm>
+            <a:off x="11274552" y="6400800"/>
+            <a:ext cx="365760" cy="274320"/>
+          </a:xfrm>
+          <a:prstGeom prst="rect">
+            <a:avLst/>
+          </a:prstGeom>
+          <a:noFill/>
+        </p:spPr>
+        <p:txBody>
+          <a:bodyPr wrap="square" lIns="0" tIns="0" rIns="0" bIns="0" rtlCol="0" anchor="ctr"/>
+          <a:lstStyle/>
+          <a:p>
+            <a:pPr marL="0" indent="0" algn="r">
+              <a:buNone/>
+            </a:pPr>
+            <a:r>
+              <a:rPr lang="en-US" sz="1100" dirty="0">
+                <a:solidFill>
+                  <a:srgbClr val="5B6B82"/>
+                </a:solidFill>
+                <a:latin typeface="Calibri" pitchFamily="34" charset="0"/>
+                <a:ea typeface="Calibri" pitchFamily="34" charset="-122"/>
+                <a:cs typeface="Calibri" pitchFamily="34" charset="-120"/>
+              </a:rPr>
+              <a:t>15</a:t>
+            </a:r>
+            <a:endParaRPr lang="en-US" sz="1100" dirty="0"/>
+          </a:p>
+        </p:txBody>
+      </p:sp>
+    </p:spTree>
+  </p:cSld>
+  <p:clrMapOvr>
+    <a:masterClrMapping/>
+  </p:clrMapOvr>
+</p:sld>
+</file>
+
+<file path=ppt/slides/slide17.xml><?xml version="1.0" encoding="utf-8"?>
 <p:sld xmlns:a="http://schemas.openxmlformats.org/drawingml/2006/main" xmlns:r="http://schemas.openxmlformats.org/officeDocument/2006/relationships" xmlns:p="http://schemas.openxmlformats.org/presentationml/2006/main">
   <p:cSld>
     <p:bg>
@@ -10322,1165 +11589,6 @@
 </p:sld>
 </file>
 
-<file path=ppt/slides/slide16.xml><?xml version="1.0" encoding="utf-8"?>
-<p:sld xmlns:a="http://schemas.openxmlformats.org/drawingml/2006/main" xmlns:r="http://schemas.openxmlformats.org/officeDocument/2006/relationships" xmlns:p="http://schemas.openxmlformats.org/presentationml/2006/main">
-  <p:cSld>
-    <p:bg>
-      <p:bgPr>
-        <a:solidFill>
-          <a:srgbClr val="FFFFFF"/>
-        </a:solidFill>
-        <a:effectLst/>
-      </p:bgPr>
-    </p:bg>
-    <p:spTree>
-      <p:nvGrpSpPr>
-        <p:cNvPr id="1" name=""/>
-        <p:cNvGrpSpPr/>
-        <p:nvPr/>
-      </p:nvGrpSpPr>
-      <p:grpSpPr>
-        <a:xfrm>
-          <a:off x="0" y="0"/>
-          <a:ext cx="0" cy="0"/>
-          <a:chOff x="0" y="0"/>
-          <a:chExt cx="0" cy="0"/>
-        </a:xfrm>
-      </p:grpSpPr>
-      <p:sp>
-        <p:nvSpPr>
-          <p:cNvPr id="2" name="Text 0"/>
-          <p:cNvSpPr/>
-          <p:nvPr/>
-        </p:nvSpPr>
-        <p:spPr>
-          <a:xfrm>
-            <a:off x="548640" y="384048"/>
-            <a:ext cx="11091672" cy="274320"/>
-          </a:xfrm>
-          <a:prstGeom prst="rect">
-            <a:avLst/>
-          </a:prstGeom>
-          <a:noFill/>
-        </p:spPr>
-        <p:txBody>
-          <a:bodyPr wrap="square" lIns="0" tIns="0" rIns="0" bIns="0" rtlCol="0" anchor="ctr"/>
-          <a:lstStyle/>
-          <a:p>
-            <a:pPr marL="0" indent="0">
-              <a:buNone/>
-            </a:pPr>
-            <a:r>
-              <a:rPr lang="en-US" sz="1200" b="1" kern="0" spc="200" dirty="0">
-                <a:solidFill>
-                  <a:srgbClr val="E8A12C"/>
-                </a:solidFill>
-                <a:latin typeface="Calibri" pitchFamily="34" charset="0"/>
-                <a:ea typeface="Calibri" pitchFamily="34" charset="-122"/>
-                <a:cs typeface="Calibri" pitchFamily="34" charset="-120"/>
-              </a:rPr>
-              <a:t>SUPPORTING / ILLUSTRATIVE</a:t>
-            </a:r>
-            <a:endParaRPr lang="en-US" sz="1200" dirty="0"/>
-          </a:p>
-        </p:txBody>
-      </p:sp>
-      <p:sp>
-        <p:nvSpPr>
-          <p:cNvPr id="3" name="Text 1"/>
-          <p:cNvSpPr/>
-          <p:nvPr/>
-        </p:nvSpPr>
-        <p:spPr>
-          <a:xfrm>
-            <a:off x="548640" y="658368"/>
-            <a:ext cx="11091672" cy="685800"/>
-          </a:xfrm>
-          <a:prstGeom prst="rect">
-            <a:avLst/>
-          </a:prstGeom>
-          <a:noFill/>
-        </p:spPr>
-        <p:txBody>
-          <a:bodyPr wrap="square" lIns="0" tIns="0" rIns="0" bIns="0" rtlCol="0" anchor="ctr"/>
-          <a:lstStyle/>
-          <a:p>
-            <a:pPr marL="0" indent="0">
-              <a:buNone/>
-            </a:pPr>
-            <a:r>
-              <a:rPr lang="en-US" sz="2700" b="1" dirty="0">
-                <a:solidFill>
-                  <a:srgbClr val="13294B"/>
-                </a:solidFill>
-                <a:latin typeface="Georgia" panose="02040502050405090303" pitchFamily="34" charset="0"/>
-                <a:ea typeface="Georgia" panose="02040502050405090303" pitchFamily="34" charset="-122"/>
-                <a:cs typeface="Georgia" panose="02040502050405090303" pitchFamily="34" charset="-120"/>
-              </a:rPr>
-              <a:t>Event Study — Honest About Its Limits</a:t>
-            </a:r>
-            <a:endParaRPr lang="en-US" sz="2700" dirty="0"/>
-          </a:p>
-        </p:txBody>
-      </p:sp>
-      <p:sp>
-        <p:nvSpPr>
-          <p:cNvPr id="4" name="Text 2"/>
-          <p:cNvSpPr/>
-          <p:nvPr/>
-        </p:nvSpPr>
-        <p:spPr>
-          <a:xfrm>
-            <a:off x="548640" y="1417320"/>
-            <a:ext cx="11091672" cy="365760"/>
-          </a:xfrm>
-          <a:prstGeom prst="rect">
-            <a:avLst/>
-          </a:prstGeom>
-          <a:noFill/>
-        </p:spPr>
-        <p:txBody>
-          <a:bodyPr wrap="square" lIns="0" tIns="0" rIns="0" bIns="0" rtlCol="0" anchor="ctr"/>
-          <a:lstStyle/>
-          <a:p>
-            <a:pPr marL="0" indent="0">
-              <a:buNone/>
-            </a:pPr>
-            <a:r>
-              <a:rPr lang="en-US" sz="1500" i="1" dirty="0">
-                <a:solidFill>
-                  <a:srgbClr val="5B6B82"/>
-                </a:solidFill>
-                <a:latin typeface="Georgia" panose="02040502050405090303" pitchFamily="34" charset="0"/>
-                <a:ea typeface="Georgia" panose="02040502050405090303" pitchFamily="34" charset="-122"/>
-                <a:cs typeface="Georgia" panose="02040502050405090303" pitchFamily="34" charset="-120"/>
-              </a:rPr>
-              <a:t>Raw daily spread around stress events (not CARs). Included to illustrate plausibility — not as proof.</a:t>
-            </a:r>
-            <a:endParaRPr lang="en-US" sz="1500" dirty="0"/>
-          </a:p>
-        </p:txBody>
-      </p:sp>
-      <p:pic>
-        <p:nvPicPr>
-          <p:cNvPr id="5" name="Image 0" descr="figs/image8.png"/>
-          <p:cNvPicPr>
-            <a:picLocks noChangeAspect="1"/>
-          </p:cNvPicPr>
-          <p:nvPr/>
-        </p:nvPicPr>
-        <p:blipFill>
-          <a:blip r:embed="rId1"/>
-          <a:stretch>
-            <a:fillRect/>
-          </a:stretch>
-        </p:blipFill>
-        <p:spPr>
-          <a:xfrm>
-            <a:off x="548640" y="1828800"/>
-            <a:ext cx="5486400" cy="2514600"/>
-          </a:xfrm>
-          <a:prstGeom prst="rect">
-            <a:avLst/>
-          </a:prstGeom>
-        </p:spPr>
-      </p:pic>
-      <p:pic>
-        <p:nvPicPr>
-          <p:cNvPr id="6" name="Image 1" descr="figs/image9.png"/>
-          <p:cNvPicPr>
-            <a:picLocks noChangeAspect="1"/>
-          </p:cNvPicPr>
-          <p:nvPr/>
-        </p:nvPicPr>
-        <p:blipFill>
-          <a:blip r:embed="rId2"/>
-          <a:stretch>
-            <a:fillRect/>
-          </a:stretch>
-        </p:blipFill>
-        <p:spPr>
-          <a:xfrm>
-            <a:off x="6153912" y="1828800"/>
-            <a:ext cx="5486400" cy="2514600"/>
-          </a:xfrm>
-          <a:prstGeom prst="rect">
-            <a:avLst/>
-          </a:prstGeom>
-        </p:spPr>
-      </p:pic>
-      <p:sp>
-        <p:nvSpPr>
-          <p:cNvPr id="7" name="Shape 3"/>
-          <p:cNvSpPr/>
-          <p:nvPr/>
-        </p:nvSpPr>
-        <p:spPr>
-          <a:xfrm>
-            <a:off x="548640" y="4526280"/>
-            <a:ext cx="11091672" cy="1325880"/>
-          </a:xfrm>
-          <a:prstGeom prst="rect">
-            <a:avLst/>
-          </a:prstGeom>
-          <a:solidFill>
-            <a:srgbClr val="F4F6FA"/>
-          </a:solidFill>
-          <a:effectLst>
-            <a:outerShdw blurRad="88900" dist="38100" dir="8100000" algn="bl" rotWithShape="0">
-              <a:srgbClr val="000000">
-                <a:alpha val="13000"/>
-              </a:srgbClr>
-            </a:outerShdw>
-          </a:effectLst>
-        </p:spPr>
-      </p:sp>
-      <p:sp>
-        <p:nvSpPr>
-          <p:cNvPr id="8" name="Shape 4"/>
-          <p:cNvSpPr/>
-          <p:nvPr/>
-        </p:nvSpPr>
-        <p:spPr>
-          <a:xfrm>
-            <a:off x="548640" y="4526280"/>
-            <a:ext cx="82296" cy="1325880"/>
-          </a:xfrm>
-          <a:prstGeom prst="rect">
-            <a:avLst/>
-          </a:prstGeom>
-          <a:solidFill>
-            <a:srgbClr val="C1121F"/>
-          </a:solidFill>
-        </p:spPr>
-      </p:sp>
-      <p:sp>
-        <p:nvSpPr>
-          <p:cNvPr id="9" name="Text 5"/>
-          <p:cNvSpPr/>
-          <p:nvPr/>
-        </p:nvSpPr>
-        <p:spPr>
-          <a:xfrm>
-            <a:off x="822960" y="4636008"/>
-            <a:ext cx="5486400" cy="274320"/>
-          </a:xfrm>
-          <a:prstGeom prst="rect">
-            <a:avLst/>
-          </a:prstGeom>
-          <a:noFill/>
-        </p:spPr>
-        <p:txBody>
-          <a:bodyPr wrap="square" lIns="0" tIns="0" rIns="0" bIns="0" rtlCol="0" anchor="ctr"/>
-          <a:lstStyle/>
-          <a:p>
-            <a:pPr marL="0" indent="0">
-              <a:buNone/>
-            </a:pPr>
-            <a:r>
-              <a:rPr lang="en-US" sz="1400" b="1" dirty="0">
-                <a:solidFill>
-                  <a:srgbClr val="13294B"/>
-                </a:solidFill>
-                <a:latin typeface="Georgia" panose="02040502050405090303" pitchFamily="34" charset="0"/>
-                <a:ea typeface="Georgia" panose="02040502050405090303" pitchFamily="34" charset="-122"/>
-                <a:cs typeface="Georgia" panose="02040502050405090303" pitchFamily="34" charset="-120"/>
-              </a:rPr>
-              <a:t>The honest read</a:t>
-            </a:r>
-            <a:endParaRPr lang="en-US" sz="1400" dirty="0"/>
-          </a:p>
-        </p:txBody>
-      </p:sp>
-      <p:sp>
-        <p:nvSpPr>
-          <p:cNvPr id="10" name="Text 6"/>
-          <p:cNvSpPr/>
-          <p:nvPr/>
-        </p:nvSpPr>
-        <p:spPr>
-          <a:xfrm>
-            <a:off x="822960" y="4956048"/>
-            <a:ext cx="10543032" cy="822960"/>
-          </a:xfrm>
-          <a:prstGeom prst="rect">
-            <a:avLst/>
-          </a:prstGeom>
-          <a:noFill/>
-        </p:spPr>
-        <p:txBody>
-          <a:bodyPr wrap="square" lIns="0" tIns="0" rIns="0" bIns="0" rtlCol="0" anchor="ctr"/>
-          <a:lstStyle/>
-          <a:p>
-            <a:pPr marL="0" indent="0">
-              <a:lnSpc>
-                <a:spcPct val="110000"/>
-              </a:lnSpc>
-              <a:buNone/>
-            </a:pPr>
-            <a:r>
-              <a:rPr lang="en-US" sz="1250" dirty="0">
-                <a:solidFill>
-                  <a:srgbClr val="33425C"/>
-                </a:solidFill>
-                <a:latin typeface="Calibri" pitchFamily="34" charset="0"/>
-                <a:ea typeface="Calibri" pitchFamily="34" charset="-122"/>
-                <a:cs typeface="Calibri" pitchFamily="34" charset="-120"/>
-              </a:rPr>
-              <a:t>Only 3 events; FOMC contamination in 2 of 3.   </a:t>
-            </a:r>
-            <a:r>
-              <a:rPr lang="en-US" sz="1250" dirty="0">
-                <a:solidFill>
-                  <a:srgbClr val="33425C"/>
-                </a:solidFill>
-                <a:latin typeface="Calibri" pitchFamily="34" charset="0"/>
-                <a:ea typeface="Calibri" pitchFamily="34" charset="-122"/>
-                <a:cs typeface="Calibri" pitchFamily="34" charset="-120"/>
-              </a:rPr>
-              <a:t>All CARs individually insignificant (−41 / +23 / −27 bps).   </a:t>
-            </a:r>
-            <a:endParaRPr lang="en-US" sz="1250" dirty="0"/>
-          </a:p>
-          <a:p>
-            <a:pPr marL="0" indent="0">
-              <a:lnSpc>
-                <a:spcPct val="110000"/>
-              </a:lnSpc>
-              <a:buNone/>
-            </a:pPr>
-            <a:r>
-              <a:rPr lang="en-US" sz="1250" dirty="0">
-                <a:solidFill>
-                  <a:srgbClr val="33425C"/>
-                </a:solidFill>
-                <a:latin typeface="Calibri" pitchFamily="34" charset="0"/>
-                <a:ea typeface="Calibri" pitchFamily="34" charset="-122"/>
-                <a:cs typeface="Calibri" pitchFamily="34" charset="-120"/>
-              </a:rPr>
-              <a:t>Placebo ratio 7.0× — suggestive, not individually significant.   </a:t>
-            </a:r>
-            <a:r>
-              <a:rPr lang="en-US" sz="1250" dirty="0">
-                <a:solidFill>
-                  <a:srgbClr val="33425C"/>
-                </a:solidFill>
-                <a:latin typeface="Calibri" pitchFamily="34" charset="0"/>
-                <a:ea typeface="Calibri" pitchFamily="34" charset="-122"/>
-                <a:cs typeface="Calibri" pitchFamily="34" charset="-120"/>
-              </a:rPr>
-              <a:t>Story has shifted across re-runs — too unstable to be evidence.</a:t>
-            </a:r>
-            <a:endParaRPr lang="en-US" sz="1250" dirty="0"/>
-          </a:p>
-        </p:txBody>
-      </p:sp>
-      <p:sp>
-        <p:nvSpPr>
-          <p:cNvPr id="11" name="Text 7"/>
-          <p:cNvSpPr/>
-          <p:nvPr/>
-        </p:nvSpPr>
-        <p:spPr>
-          <a:xfrm>
-            <a:off x="548640" y="5989320"/>
-            <a:ext cx="11091672" cy="365760"/>
-          </a:xfrm>
-          <a:prstGeom prst="rect">
-            <a:avLst/>
-          </a:prstGeom>
-          <a:noFill/>
-        </p:spPr>
-        <p:txBody>
-          <a:bodyPr wrap="square" lIns="0" tIns="0" rIns="0" bIns="0" rtlCol="0" anchor="ctr"/>
-          <a:lstStyle/>
-          <a:p>
-            <a:pPr marL="0" indent="0">
-              <a:buNone/>
-            </a:pPr>
-            <a:r>
-              <a:rPr lang="en-US" sz="1250" b="1" i="1" dirty="0">
-                <a:solidFill>
-                  <a:srgbClr val="13294B"/>
-                </a:solidFill>
-                <a:latin typeface="Calibri" pitchFamily="34" charset="0"/>
-                <a:ea typeface="Calibri" pitchFamily="34" charset="-122"/>
-                <a:cs typeface="Calibri" pitchFamily="34" charset="-120"/>
-              </a:rPr>
-              <a:t>Role: illustrate the mechanism. The proof lives in the regression and the bid-cover test.</a:t>
-            </a:r>
-            <a:endParaRPr lang="en-US" sz="1250" dirty="0"/>
-          </a:p>
-        </p:txBody>
-      </p:sp>
-      <p:sp>
-        <p:nvSpPr>
-          <p:cNvPr id="12" name="Text 8"/>
-          <p:cNvSpPr/>
-          <p:nvPr/>
-        </p:nvSpPr>
-        <p:spPr>
-          <a:xfrm>
-            <a:off x="548640" y="6455664"/>
-            <a:ext cx="7315200" cy="274320"/>
-          </a:xfrm>
-          <a:prstGeom prst="rect">
-            <a:avLst/>
-          </a:prstGeom>
-          <a:noFill/>
-        </p:spPr>
-        <p:txBody>
-          <a:bodyPr wrap="square" lIns="0" tIns="0" rIns="0" bIns="0" rtlCol="0" anchor="ctr"/>
-          <a:lstStyle/>
-          <a:p>
-            <a:pPr marL="0" indent="0">
-              <a:buNone/>
-            </a:pPr>
-            <a:r>
-              <a:rPr lang="en-US" sz="900" dirty="0">
-                <a:solidFill>
-                  <a:srgbClr val="5B6B82"/>
-                </a:solidFill>
-                <a:latin typeface="Calibri" pitchFamily="34" charset="0"/>
-                <a:ea typeface="Calibri" pitchFamily="34" charset="-122"/>
-                <a:cs typeface="Calibri" pitchFamily="34" charset="-120"/>
-              </a:rPr>
-              <a:t>Stablecoins &amp; the Exorbitant Privilege</a:t>
-            </a:r>
-            <a:endParaRPr lang="en-US" sz="900" dirty="0"/>
-          </a:p>
-        </p:txBody>
-      </p:sp>
-      <p:sp>
-        <p:nvSpPr>
-          <p:cNvPr id="13" name="Text 9"/>
-          <p:cNvSpPr/>
-          <p:nvPr/>
-        </p:nvSpPr>
-        <p:spPr>
-          <a:xfrm>
-            <a:off x="11274552" y="6400800"/>
-            <a:ext cx="365760" cy="274320"/>
-          </a:xfrm>
-          <a:prstGeom prst="rect">
-            <a:avLst/>
-          </a:prstGeom>
-          <a:noFill/>
-        </p:spPr>
-        <p:txBody>
-          <a:bodyPr wrap="square" lIns="0" tIns="0" rIns="0" bIns="0" rtlCol="0" anchor="ctr"/>
-          <a:lstStyle/>
-          <a:p>
-            <a:pPr marL="0" indent="0" algn="r">
-              <a:buNone/>
-            </a:pPr>
-            <a:r>
-              <a:rPr lang="en-US" sz="1100" dirty="0">
-                <a:solidFill>
-                  <a:srgbClr val="5B6B82"/>
-                </a:solidFill>
-                <a:latin typeface="Calibri" pitchFamily="34" charset="0"/>
-                <a:ea typeface="Calibri" pitchFamily="34" charset="-122"/>
-                <a:cs typeface="Calibri" pitchFamily="34" charset="-120"/>
-              </a:rPr>
-              <a:t>16</a:t>
-            </a:r>
-            <a:endParaRPr lang="en-US" sz="1100" dirty="0"/>
-          </a:p>
-        </p:txBody>
-      </p:sp>
-    </p:spTree>
-  </p:cSld>
-  <p:clrMapOvr>
-    <a:masterClrMapping/>
-  </p:clrMapOvr>
-</p:sld>
-</file>
-
-<file path=ppt/slides/slide17.xml><?xml version="1.0" encoding="utf-8"?>
-<p:sld xmlns:a="http://schemas.openxmlformats.org/drawingml/2006/main" xmlns:r="http://schemas.openxmlformats.org/officeDocument/2006/relationships" xmlns:p="http://schemas.openxmlformats.org/presentationml/2006/main">
-  <p:cSld>
-    <p:bg>
-      <p:bgPr>
-        <a:solidFill>
-          <a:srgbClr val="FFFFFF"/>
-        </a:solidFill>
-        <a:effectLst/>
-      </p:bgPr>
-    </p:bg>
-    <p:spTree>
-      <p:nvGrpSpPr>
-        <p:cNvPr id="1" name=""/>
-        <p:cNvGrpSpPr/>
-        <p:nvPr/>
-      </p:nvGrpSpPr>
-      <p:grpSpPr>
-        <a:xfrm>
-          <a:off x="0" y="0"/>
-          <a:ext cx="0" cy="0"/>
-          <a:chOff x="0" y="0"/>
-          <a:chExt cx="0" cy="0"/>
-        </a:xfrm>
-      </p:grpSpPr>
-      <p:sp>
-        <p:nvSpPr>
-          <p:cNvPr id="2" name="Text 0"/>
-          <p:cNvSpPr/>
-          <p:nvPr/>
-        </p:nvSpPr>
-        <p:spPr>
-          <a:xfrm>
-            <a:off x="548640" y="384048"/>
-            <a:ext cx="11091672" cy="274320"/>
-          </a:xfrm>
-          <a:prstGeom prst="rect">
-            <a:avLst/>
-          </a:prstGeom>
-          <a:noFill/>
-        </p:spPr>
-        <p:txBody>
-          <a:bodyPr wrap="square" lIns="0" tIns="0" rIns="0" bIns="0" rtlCol="0" anchor="ctr"/>
-          <a:lstStyle/>
-          <a:p>
-            <a:pPr marL="0" indent="0">
-              <a:buNone/>
-            </a:pPr>
-            <a:r>
-              <a:rPr lang="en-US" sz="1200" b="1" kern="0" spc="200" dirty="0">
-                <a:solidFill>
-                  <a:srgbClr val="1B998B"/>
-                </a:solidFill>
-                <a:latin typeface="Calibri" pitchFamily="34" charset="0"/>
-                <a:ea typeface="Calibri" pitchFamily="34" charset="-122"/>
-                <a:cs typeface="Calibri" pitchFamily="34" charset="-120"/>
-              </a:rPr>
-              <a:t>POLICY IMPLICATIONS</a:t>
-            </a:r>
-            <a:endParaRPr lang="en-US" sz="1200" dirty="0"/>
-          </a:p>
-        </p:txBody>
-      </p:sp>
-      <p:sp>
-        <p:nvSpPr>
-          <p:cNvPr id="3" name="Text 1"/>
-          <p:cNvSpPr/>
-          <p:nvPr/>
-        </p:nvSpPr>
-        <p:spPr>
-          <a:xfrm>
-            <a:off x="548640" y="658368"/>
-            <a:ext cx="11091672" cy="685800"/>
-          </a:xfrm>
-          <a:prstGeom prst="rect">
-            <a:avLst/>
-          </a:prstGeom>
-          <a:noFill/>
-        </p:spPr>
-        <p:txBody>
-          <a:bodyPr wrap="square" lIns="0" tIns="0" rIns="0" bIns="0" rtlCol="0" anchor="ctr"/>
-          <a:lstStyle/>
-          <a:p>
-            <a:pPr marL="0" indent="0">
-              <a:buNone/>
-            </a:pPr>
-            <a:r>
-              <a:rPr lang="en-US" sz="2700" b="1" dirty="0">
-                <a:solidFill>
-                  <a:srgbClr val="13294B"/>
-                </a:solidFill>
-                <a:latin typeface="Georgia" panose="02040502050405090303" pitchFamily="34" charset="0"/>
-                <a:ea typeface="Georgia" panose="02040502050405090303" pitchFamily="34" charset="-122"/>
-                <a:cs typeface="Georgia" panose="02040502050405090303" pitchFamily="34" charset="-120"/>
-              </a:rPr>
-              <a:t>From an Empirical Region to a Regulatory Reference</a:t>
-            </a:r>
-            <a:endParaRPr lang="en-US" sz="2700" dirty="0"/>
-          </a:p>
-        </p:txBody>
-      </p:sp>
-      <p:sp>
-        <p:nvSpPr>
-          <p:cNvPr id="4" name="Shape 2"/>
-          <p:cNvSpPr/>
-          <p:nvPr/>
-        </p:nvSpPr>
-        <p:spPr>
-          <a:xfrm>
-            <a:off x="548640" y="1508760"/>
-            <a:ext cx="3514344" cy="2057400"/>
-          </a:xfrm>
-          <a:prstGeom prst="rect">
-            <a:avLst/>
-          </a:prstGeom>
-          <a:solidFill>
-            <a:srgbClr val="F4F6FA"/>
-          </a:solidFill>
-          <a:effectLst>
-            <a:outerShdw blurRad="88900" dist="38100" dir="8100000" algn="bl" rotWithShape="0">
-              <a:srgbClr val="000000">
-                <a:alpha val="13000"/>
-              </a:srgbClr>
-            </a:outerShdw>
-          </a:effectLst>
-        </p:spPr>
-      </p:sp>
-      <p:sp>
-        <p:nvSpPr>
-          <p:cNvPr id="5" name="Shape 3"/>
-          <p:cNvSpPr/>
-          <p:nvPr/>
-        </p:nvSpPr>
-        <p:spPr>
-          <a:xfrm>
-            <a:off x="548640" y="1508760"/>
-            <a:ext cx="82296" cy="2057400"/>
-          </a:xfrm>
-          <a:prstGeom prst="rect">
-            <a:avLst/>
-          </a:prstGeom>
-          <a:solidFill>
-            <a:srgbClr val="13294B"/>
-          </a:solidFill>
-        </p:spPr>
-      </p:sp>
-      <p:sp>
-        <p:nvSpPr>
-          <p:cNvPr id="6" name="Text 4"/>
-          <p:cNvSpPr/>
-          <p:nvPr/>
-        </p:nvSpPr>
-        <p:spPr>
-          <a:xfrm>
-            <a:off x="749808" y="1645920"/>
-            <a:ext cx="3148584" cy="502920"/>
-          </a:xfrm>
-          <a:prstGeom prst="rect">
-            <a:avLst/>
-          </a:prstGeom>
-          <a:noFill/>
-        </p:spPr>
-        <p:txBody>
-          <a:bodyPr wrap="square" lIns="0" tIns="0" rIns="0" bIns="0" rtlCol="0" anchor="ctr"/>
-          <a:lstStyle/>
-          <a:p>
-            <a:pPr marL="0" indent="0">
-              <a:buNone/>
-            </a:pPr>
-            <a:r>
-              <a:rPr lang="en-US" sz="1500" b="1" dirty="0">
-                <a:solidFill>
-                  <a:srgbClr val="13294B"/>
-                </a:solidFill>
-                <a:latin typeface="Georgia" panose="02040502050405090303" pitchFamily="34" charset="0"/>
-                <a:ea typeface="Georgia" panose="02040502050405090303" pitchFamily="34" charset="-122"/>
-                <a:cs typeface="Georgia" panose="02040502050405090303" pitchFamily="34" charset="-120"/>
-              </a:rPr>
-              <a:t>MiCA (EU, 2024)</a:t>
-            </a:r>
-            <a:endParaRPr lang="en-US" sz="1500" dirty="0"/>
-          </a:p>
-        </p:txBody>
-      </p:sp>
-      <p:sp>
-        <p:nvSpPr>
-          <p:cNvPr id="7" name="Text 5"/>
-          <p:cNvSpPr/>
-          <p:nvPr/>
-        </p:nvSpPr>
-        <p:spPr>
-          <a:xfrm>
-            <a:off x="749808" y="2240280"/>
-            <a:ext cx="3130296" cy="1188720"/>
-          </a:xfrm>
-          <a:prstGeom prst="rect">
-            <a:avLst/>
-          </a:prstGeom>
-          <a:noFill/>
-        </p:spPr>
-        <p:txBody>
-          <a:bodyPr wrap="square" lIns="0" tIns="0" rIns="0" bIns="0" rtlCol="0" anchor="ctr"/>
-          <a:lstStyle/>
-          <a:p>
-            <a:pPr marL="0" indent="0">
-              <a:lnSpc>
-                <a:spcPct val="108000"/>
-              </a:lnSpc>
-              <a:buNone/>
-            </a:pPr>
-            <a:r>
-              <a:rPr lang="en-US" sz="1250" dirty="0">
-                <a:solidFill>
-                  <a:srgbClr val="33425C"/>
-                </a:solidFill>
-                <a:latin typeface="Calibri" pitchFamily="34" charset="0"/>
-                <a:ea typeface="Calibri" pitchFamily="34" charset="-122"/>
-                <a:cs typeface="Calibri" pitchFamily="34" charset="-120"/>
-              </a:rPr>
-              <a:t>Mandates liquid-reserve requirements for ‘significant’ e-money tokens. Our region gives an empirically grounded floor.</a:t>
-            </a:r>
-            <a:endParaRPr lang="en-US" sz="1250" dirty="0"/>
-          </a:p>
-        </p:txBody>
-      </p:sp>
-      <p:sp>
-        <p:nvSpPr>
-          <p:cNvPr id="8" name="Shape 6"/>
-          <p:cNvSpPr/>
-          <p:nvPr/>
-        </p:nvSpPr>
-        <p:spPr>
-          <a:xfrm>
-            <a:off x="4337304" y="1508760"/>
-            <a:ext cx="3514344" cy="2057400"/>
-          </a:xfrm>
-          <a:prstGeom prst="rect">
-            <a:avLst/>
-          </a:prstGeom>
-          <a:solidFill>
-            <a:srgbClr val="F4F6FA"/>
-          </a:solidFill>
-          <a:effectLst>
-            <a:outerShdw blurRad="88900" dist="38100" dir="8100000" algn="bl" rotWithShape="0">
-              <a:srgbClr val="000000">
-                <a:alpha val="13000"/>
-              </a:srgbClr>
-            </a:outerShdw>
-          </a:effectLst>
-        </p:spPr>
-      </p:sp>
-      <p:sp>
-        <p:nvSpPr>
-          <p:cNvPr id="9" name="Shape 7"/>
-          <p:cNvSpPr/>
-          <p:nvPr/>
-        </p:nvSpPr>
-        <p:spPr>
-          <a:xfrm>
-            <a:off x="4337304" y="1508760"/>
-            <a:ext cx="82296" cy="2057400"/>
-          </a:xfrm>
-          <a:prstGeom prst="rect">
-            <a:avLst/>
-          </a:prstGeom>
-          <a:solidFill>
-            <a:srgbClr val="1B998B"/>
-          </a:solidFill>
-        </p:spPr>
-      </p:sp>
-      <p:sp>
-        <p:nvSpPr>
-          <p:cNvPr id="10" name="Text 8"/>
-          <p:cNvSpPr/>
-          <p:nvPr/>
-        </p:nvSpPr>
-        <p:spPr>
-          <a:xfrm>
-            <a:off x="4538472" y="1645920"/>
-            <a:ext cx="3148584" cy="502920"/>
-          </a:xfrm>
-          <a:prstGeom prst="rect">
-            <a:avLst/>
-          </a:prstGeom>
-          <a:noFill/>
-        </p:spPr>
-        <p:txBody>
-          <a:bodyPr wrap="square" lIns="0" tIns="0" rIns="0" bIns="0" rtlCol="0" anchor="ctr"/>
-          <a:lstStyle/>
-          <a:p>
-            <a:pPr marL="0" indent="0">
-              <a:buNone/>
-            </a:pPr>
-            <a:r>
-              <a:rPr lang="en-US" sz="1500" b="1" dirty="0">
-                <a:solidFill>
-                  <a:srgbClr val="13294B"/>
-                </a:solidFill>
-                <a:latin typeface="Georgia" panose="02040502050405090303" pitchFamily="34" charset="0"/>
-                <a:ea typeface="Georgia" panose="02040502050405090303" pitchFamily="34" charset="-122"/>
-                <a:cs typeface="Georgia" panose="02040502050405090303" pitchFamily="34" charset="-120"/>
-              </a:rPr>
-              <a:t>GENIUS Act (US, 2025)</a:t>
-            </a:r>
-            <a:endParaRPr lang="en-US" sz="1500" dirty="0"/>
-          </a:p>
-        </p:txBody>
-      </p:sp>
-      <p:sp>
-        <p:nvSpPr>
-          <p:cNvPr id="11" name="Text 9"/>
-          <p:cNvSpPr/>
-          <p:nvPr/>
-        </p:nvSpPr>
-        <p:spPr>
-          <a:xfrm>
-            <a:off x="4538472" y="2240280"/>
-            <a:ext cx="3130296" cy="1188720"/>
-          </a:xfrm>
-          <a:prstGeom prst="rect">
-            <a:avLst/>
-          </a:prstGeom>
-          <a:noFill/>
-        </p:spPr>
-        <p:txBody>
-          <a:bodyPr wrap="square" lIns="0" tIns="0" rIns="0" bIns="0" rtlCol="0" anchor="ctr"/>
-          <a:lstStyle/>
-          <a:p>
-            <a:pPr marL="0" indent="0">
-              <a:lnSpc>
-                <a:spcPct val="108000"/>
-              </a:lnSpc>
-              <a:buNone/>
-            </a:pPr>
-            <a:r>
-              <a:rPr lang="en-US" sz="1250" dirty="0">
-                <a:solidFill>
-                  <a:srgbClr val="33425C"/>
-                </a:solidFill>
-                <a:latin typeface="Calibri" pitchFamily="34" charset="0"/>
-                <a:ea typeface="Calibri" pitchFamily="34" charset="-122"/>
-                <a:cs typeface="Calibri" pitchFamily="34" charset="-120"/>
-              </a:rPr>
-              <a:t>Requires issuers to hold cash or near-cash reserves. Our CI [3.1%, 14.5%] maps to a regulatory range.</a:t>
-            </a:r>
-            <a:endParaRPr lang="en-US" sz="1250" dirty="0"/>
-          </a:p>
-        </p:txBody>
-      </p:sp>
-      <p:sp>
-        <p:nvSpPr>
-          <p:cNvPr id="12" name="Shape 10"/>
-          <p:cNvSpPr/>
-          <p:nvPr/>
-        </p:nvSpPr>
-        <p:spPr>
-          <a:xfrm>
-            <a:off x="8125968" y="1508760"/>
-            <a:ext cx="3514344" cy="2057400"/>
-          </a:xfrm>
-          <a:prstGeom prst="rect">
-            <a:avLst/>
-          </a:prstGeom>
-          <a:solidFill>
-            <a:srgbClr val="F4F6FA"/>
-          </a:solidFill>
-          <a:effectLst>
-            <a:outerShdw blurRad="88900" dist="38100" dir="8100000" algn="bl" rotWithShape="0">
-              <a:srgbClr val="000000">
-                <a:alpha val="13000"/>
-              </a:srgbClr>
-            </a:outerShdw>
-          </a:effectLst>
-        </p:spPr>
-      </p:sp>
-      <p:sp>
-        <p:nvSpPr>
-          <p:cNvPr id="13" name="Shape 11"/>
-          <p:cNvSpPr/>
-          <p:nvPr/>
-        </p:nvSpPr>
-        <p:spPr>
-          <a:xfrm>
-            <a:off x="8125968" y="1508760"/>
-            <a:ext cx="82296" cy="2057400"/>
-          </a:xfrm>
-          <a:prstGeom prst="rect">
-            <a:avLst/>
-          </a:prstGeom>
-          <a:solidFill>
-            <a:srgbClr val="E8A12C"/>
-          </a:solidFill>
-        </p:spPr>
-      </p:sp>
-      <p:sp>
-        <p:nvSpPr>
-          <p:cNvPr id="14" name="Text 12"/>
-          <p:cNvSpPr/>
-          <p:nvPr/>
-        </p:nvSpPr>
-        <p:spPr>
-          <a:xfrm>
-            <a:off x="8327136" y="1645920"/>
-            <a:ext cx="3148584" cy="502920"/>
-          </a:xfrm>
-          <a:prstGeom prst="rect">
-            <a:avLst/>
-          </a:prstGeom>
-          <a:noFill/>
-        </p:spPr>
-        <p:txBody>
-          <a:bodyPr wrap="square" lIns="0" tIns="0" rIns="0" bIns="0" rtlCol="0" anchor="ctr"/>
-          <a:lstStyle/>
-          <a:p>
-            <a:pPr marL="0" indent="0">
-              <a:buNone/>
-            </a:pPr>
-            <a:r>
-              <a:rPr lang="en-US" sz="1500" b="1" dirty="0">
-                <a:solidFill>
-                  <a:srgbClr val="13294B"/>
-                </a:solidFill>
-                <a:latin typeface="Georgia" panose="02040502050405090303" pitchFamily="34" charset="0"/>
-                <a:ea typeface="Georgia" panose="02040502050405090303" pitchFamily="34" charset="-122"/>
-                <a:cs typeface="Georgia" panose="02040502050405090303" pitchFamily="34" charset="-120"/>
-              </a:rPr>
-              <a:t>Market trajectory</a:t>
-            </a:r>
-            <a:endParaRPr lang="en-US" sz="1500" dirty="0"/>
-          </a:p>
-        </p:txBody>
-      </p:sp>
-      <p:sp>
-        <p:nvSpPr>
-          <p:cNvPr id="15" name="Text 13"/>
-          <p:cNvSpPr/>
-          <p:nvPr/>
-        </p:nvSpPr>
-        <p:spPr>
-          <a:xfrm>
-            <a:off x="8327136" y="2240280"/>
-            <a:ext cx="3130296" cy="1188720"/>
-          </a:xfrm>
-          <a:prstGeom prst="rect">
-            <a:avLst/>
-          </a:prstGeom>
-          <a:noFill/>
-        </p:spPr>
-        <p:txBody>
-          <a:bodyPr wrap="square" lIns="0" tIns="0" rIns="0" bIns="0" rtlCol="0" anchor="ctr"/>
-          <a:lstStyle/>
-          <a:p>
-            <a:pPr marL="0" indent="0">
-              <a:lnSpc>
-                <a:spcPct val="108000"/>
-              </a:lnSpc>
-              <a:buNone/>
-            </a:pPr>
-            <a:r>
-              <a:rPr lang="en-US" sz="1250" dirty="0">
-                <a:solidFill>
-                  <a:srgbClr val="33425C"/>
-                </a:solidFill>
-                <a:latin typeface="Calibri" pitchFamily="34" charset="0"/>
-                <a:ea typeface="Calibri" pitchFamily="34" charset="-122"/>
-                <a:cs typeface="Calibri" pitchFamily="34" charset="-120"/>
-              </a:rPr>
-              <a:t>Supply heading toward $1–2T. At that scale, forced-liquidation risk becomes systemic — a break-the-buck analogue.</a:t>
-            </a:r>
-            <a:endParaRPr lang="en-US" sz="1250" dirty="0"/>
-          </a:p>
-        </p:txBody>
-      </p:sp>
-      <p:sp>
-        <p:nvSpPr>
-          <p:cNvPr id="16" name="Shape 14"/>
-          <p:cNvSpPr/>
-          <p:nvPr/>
-        </p:nvSpPr>
-        <p:spPr>
-          <a:xfrm>
-            <a:off x="548640" y="3794760"/>
-            <a:ext cx="11091672" cy="1828800"/>
-          </a:xfrm>
-          <a:prstGeom prst="rect">
-            <a:avLst/>
-          </a:prstGeom>
-          <a:solidFill>
-            <a:srgbClr val="0E2746"/>
-          </a:solidFill>
-          <a:effectLst>
-            <a:outerShdw blurRad="88900" dist="38100" dir="8100000" algn="bl" rotWithShape="0">
-              <a:srgbClr val="000000">
-                <a:alpha val="13000"/>
-              </a:srgbClr>
-            </a:outerShdw>
-          </a:effectLst>
-        </p:spPr>
-      </p:sp>
-      <p:sp>
-        <p:nvSpPr>
-          <p:cNvPr id="17" name="Text 15"/>
-          <p:cNvSpPr/>
-          <p:nvPr/>
-        </p:nvSpPr>
-        <p:spPr>
-          <a:xfrm>
-            <a:off x="822960" y="3931920"/>
-            <a:ext cx="10543032" cy="365760"/>
-          </a:xfrm>
-          <a:prstGeom prst="rect">
-            <a:avLst/>
-          </a:prstGeom>
-          <a:noFill/>
-        </p:spPr>
-        <p:txBody>
-          <a:bodyPr wrap="square" lIns="0" tIns="0" rIns="0" bIns="0" rtlCol="0" anchor="ctr"/>
-          <a:lstStyle/>
-          <a:p>
-            <a:pPr marL="0" indent="0">
-              <a:buNone/>
-            </a:pPr>
-            <a:r>
-              <a:rPr lang="en-US" sz="1500" b="1" dirty="0">
-                <a:solidFill>
-                  <a:srgbClr val="E8A12C"/>
-                </a:solidFill>
-                <a:latin typeface="Georgia" panose="02040502050405090303" pitchFamily="34" charset="0"/>
-                <a:ea typeface="Georgia" panose="02040502050405090303" pitchFamily="34" charset="-122"/>
-                <a:cs typeface="Georgia" panose="02040502050405090303" pitchFamily="34" charset="-120"/>
-              </a:rPr>
-              <a:t>Our reference — stated as a range, not a precise mandate</a:t>
-            </a:r>
-            <a:endParaRPr lang="en-US" sz="1500" dirty="0"/>
-          </a:p>
-        </p:txBody>
-      </p:sp>
-      <p:sp>
-        <p:nvSpPr>
-          <p:cNvPr id="18" name="Text 16"/>
-          <p:cNvSpPr/>
-          <p:nvPr/>
-        </p:nvSpPr>
-        <p:spPr>
-          <a:xfrm>
-            <a:off x="822960" y="4343400"/>
-            <a:ext cx="10543032" cy="1188720"/>
-          </a:xfrm>
-          <a:prstGeom prst="rect">
-            <a:avLst/>
-          </a:prstGeom>
-          <a:noFill/>
-        </p:spPr>
-        <p:txBody>
-          <a:bodyPr wrap="square" lIns="0" tIns="0" rIns="0" bIns="0" rtlCol="0" anchor="ctr"/>
-          <a:lstStyle/>
-          <a:p>
-            <a:pPr marL="0" indent="0">
-              <a:lnSpc>
-                <a:spcPct val="115000"/>
-              </a:lnSpc>
-              <a:buNone/>
-            </a:pPr>
-            <a:r>
-              <a:rPr lang="en-US" sz="1400" dirty="0">
-                <a:solidFill>
-                  <a:srgbClr val="FFFFFF"/>
-                </a:solidFill>
-                <a:latin typeface="Calibri" pitchFamily="34" charset="0"/>
-                <a:ea typeface="Calibri" pitchFamily="34" charset="-122"/>
-                <a:cs typeface="Calibri" pitchFamily="34" charset="-120"/>
-              </a:rPr>
-              <a:t>Target a low-teens liquid-buffer floor (cash / near-cash), with estimates centered near 13% of outstanding supply — as a </a:t>
-            </a:r>
-            <a:r>
-              <a:rPr lang="en-US" sz="1400" b="1" dirty="0">
-                <a:solidFill>
-                  <a:srgbClr val="FFFFFF"/>
-                </a:solidFill>
-                <a:latin typeface="Calibri" pitchFamily="34" charset="0"/>
-                <a:ea typeface="Calibri" pitchFamily="34" charset="-122"/>
-                <a:cs typeface="Calibri" pitchFamily="34" charset="-120"/>
-              </a:rPr>
-              <a:t>behavioural break, not a welfare optimum.</a:t>
-            </a:r>
-            <a:r>
-              <a:rPr lang="en-US" sz="1400" dirty="0">
-                <a:solidFill>
-                  <a:srgbClr val="AEC0DD"/>
-                </a:solidFill>
-                <a:latin typeface="Calibri" pitchFamily="34" charset="0"/>
-                <a:ea typeface="Calibri" pitchFamily="34" charset="-122"/>
-                <a:cs typeface="Calibri" pitchFamily="34" charset="-120"/>
-              </a:rPr>
-              <a:t>  Below ~3% is clearly under-reserved; above ~14.5% is clearly adequate. As attestation data accumulates, the estimate will sharpen.</a:t>
-            </a:r>
-            <a:endParaRPr lang="en-US" sz="1400" dirty="0"/>
-          </a:p>
-        </p:txBody>
-      </p:sp>
-      <p:sp>
-        <p:nvSpPr>
-          <p:cNvPr id="19" name="Text 17"/>
-          <p:cNvSpPr/>
-          <p:nvPr/>
-        </p:nvSpPr>
-        <p:spPr>
-          <a:xfrm>
-            <a:off x="548640" y="6455664"/>
-            <a:ext cx="7315200" cy="274320"/>
-          </a:xfrm>
-          <a:prstGeom prst="rect">
-            <a:avLst/>
-          </a:prstGeom>
-          <a:noFill/>
-        </p:spPr>
-        <p:txBody>
-          <a:bodyPr wrap="square" lIns="0" tIns="0" rIns="0" bIns="0" rtlCol="0" anchor="ctr"/>
-          <a:lstStyle/>
-          <a:p>
-            <a:pPr marL="0" indent="0">
-              <a:buNone/>
-            </a:pPr>
-            <a:r>
-              <a:rPr lang="en-US" sz="900" dirty="0">
-                <a:solidFill>
-                  <a:srgbClr val="5B6B82"/>
-                </a:solidFill>
-                <a:latin typeface="Calibri" pitchFamily="34" charset="0"/>
-                <a:ea typeface="Calibri" pitchFamily="34" charset="-122"/>
-                <a:cs typeface="Calibri" pitchFamily="34" charset="-120"/>
-              </a:rPr>
-              <a:t>Stablecoins &amp; the Exorbitant Privilege</a:t>
-            </a:r>
-            <a:endParaRPr lang="en-US" sz="900" dirty="0"/>
-          </a:p>
-        </p:txBody>
-      </p:sp>
-      <p:sp>
-        <p:nvSpPr>
-          <p:cNvPr id="20" name="Text 18"/>
-          <p:cNvSpPr/>
-          <p:nvPr/>
-        </p:nvSpPr>
-        <p:spPr>
-          <a:xfrm>
-            <a:off x="11274552" y="6400800"/>
-            <a:ext cx="365760" cy="274320"/>
-          </a:xfrm>
-          <a:prstGeom prst="rect">
-            <a:avLst/>
-          </a:prstGeom>
-          <a:noFill/>
-        </p:spPr>
-        <p:txBody>
-          <a:bodyPr wrap="square" lIns="0" tIns="0" rIns="0" bIns="0" rtlCol="0" anchor="ctr"/>
-          <a:lstStyle/>
-          <a:p>
-            <a:pPr marL="0" indent="0" algn="r">
-              <a:buNone/>
-            </a:pPr>
-            <a:r>
-              <a:rPr lang="en-US" sz="1100" dirty="0">
-                <a:solidFill>
-                  <a:srgbClr val="5B6B82"/>
-                </a:solidFill>
-                <a:latin typeface="Calibri" pitchFamily="34" charset="0"/>
-                <a:ea typeface="Calibri" pitchFamily="34" charset="-122"/>
-                <a:cs typeface="Calibri" pitchFamily="34" charset="-120"/>
-              </a:rPr>
-              <a:t>17</a:t>
-            </a:r>
-            <a:endParaRPr lang="en-US" sz="1100" dirty="0"/>
-          </a:p>
-        </p:txBody>
-      </p:sp>
-    </p:spTree>
-  </p:cSld>
-  <p:clrMapOvr>
-    <a:masterClrMapping/>
-  </p:clrMapOvr>
-</p:sld>
-</file>
-
 <file path=ppt/slides/slide18.xml><?xml version="1.0" encoding="utf-8"?>
 <p:sld xmlns:a="http://schemas.openxmlformats.org/drawingml/2006/main" xmlns:r="http://schemas.openxmlformats.org/officeDocument/2006/relationships" xmlns:p="http://schemas.openxmlformats.org/presentationml/2006/main">
   <p:cSld>
@@ -11532,13 +11640,13 @@
             <a:r>
               <a:rPr lang="en-US" sz="1200" b="1" kern="0" spc="200" dirty="0">
                 <a:solidFill>
-                  <a:srgbClr val="1B998B"/>
-                </a:solidFill>
-                <a:latin typeface="Calibri" pitchFamily="34" charset="0"/>
-                <a:ea typeface="Calibri" pitchFamily="34" charset="-122"/>
-                <a:cs typeface="Calibri" pitchFamily="34" charset="-120"/>
-              </a:rPr>
-              <a:t>SUMMARY</a:t>
+                  <a:srgbClr val="E8A12C"/>
+                </a:solidFill>
+                <a:latin typeface="Calibri" pitchFamily="34" charset="0"/>
+                <a:ea typeface="Calibri" pitchFamily="34" charset="-122"/>
+                <a:cs typeface="Calibri" pitchFamily="34" charset="-120"/>
+              </a:rPr>
+              <a:t>SUPPORTING / ILLUSTRATIVE</a:t>
             </a:r>
             <a:endParaRPr lang="en-US" sz="1200" dirty="0"/>
           </a:p>
@@ -11576,7 +11684,7 @@
                 <a:ea typeface="Georgia" panose="02040502050405090303" pitchFamily="34" charset="-122"/>
                 <a:cs typeface="Georgia" panose="02040502050405090303" pitchFamily="34" charset="-120"/>
               </a:rPr>
-              <a:t>Three Lines of Evidence — Each Limited, Together Coherent</a:t>
+              <a:t>Event Study — Honest About Its Limits</a:t>
             </a:r>
             <a:endParaRPr lang="en-US" sz="2700" dirty="0"/>
           </a:p>
@@ -11584,14 +11692,100 @@
       </p:sp>
       <p:sp>
         <p:nvSpPr>
-          <p:cNvPr id="4" name="Shape 2"/>
-          <p:cNvSpPr/>
-          <p:nvPr/>
-        </p:nvSpPr>
-        <p:spPr>
-          <a:xfrm>
-            <a:off x="548640" y="1554480"/>
-            <a:ext cx="3514344" cy="3840480"/>
+          <p:cNvPr id="4" name="Text 2"/>
+          <p:cNvSpPr/>
+          <p:nvPr/>
+        </p:nvSpPr>
+        <p:spPr>
+          <a:xfrm>
+            <a:off x="548640" y="1417320"/>
+            <a:ext cx="11091672" cy="365760"/>
+          </a:xfrm>
+          <a:prstGeom prst="rect">
+            <a:avLst/>
+          </a:prstGeom>
+          <a:noFill/>
+        </p:spPr>
+        <p:txBody>
+          <a:bodyPr wrap="square" lIns="0" tIns="0" rIns="0" bIns="0" rtlCol="0" anchor="ctr"/>
+          <a:lstStyle/>
+          <a:p>
+            <a:pPr marL="0" indent="0">
+              <a:buNone/>
+            </a:pPr>
+            <a:r>
+              <a:rPr lang="en-US" sz="1500" i="1" dirty="0">
+                <a:solidFill>
+                  <a:srgbClr val="5B6B82"/>
+                </a:solidFill>
+                <a:latin typeface="Georgia" panose="02040502050405090303" pitchFamily="34" charset="0"/>
+                <a:ea typeface="Georgia" panose="02040502050405090303" pitchFamily="34" charset="-122"/>
+                <a:cs typeface="Georgia" panose="02040502050405090303" pitchFamily="34" charset="-120"/>
+              </a:rPr>
+              <a:t>Raw daily spread around stress events (not CARs). Included to illustrate plausibility — not as proof.</a:t>
+            </a:r>
+            <a:endParaRPr lang="en-US" sz="1500" dirty="0"/>
+          </a:p>
+        </p:txBody>
+      </p:sp>
+      <p:pic>
+        <p:nvPicPr>
+          <p:cNvPr id="5" name="Image 0" descr="figs/image8.png"/>
+          <p:cNvPicPr>
+            <a:picLocks noChangeAspect="1"/>
+          </p:cNvPicPr>
+          <p:nvPr/>
+        </p:nvPicPr>
+        <p:blipFill>
+          <a:blip r:embed="rId1"/>
+          <a:stretch>
+            <a:fillRect/>
+          </a:stretch>
+        </p:blipFill>
+        <p:spPr>
+          <a:xfrm>
+            <a:off x="548640" y="1828800"/>
+            <a:ext cx="5486400" cy="2514600"/>
+          </a:xfrm>
+          <a:prstGeom prst="rect">
+            <a:avLst/>
+          </a:prstGeom>
+        </p:spPr>
+      </p:pic>
+      <p:pic>
+        <p:nvPicPr>
+          <p:cNvPr id="6" name="Image 1" descr="figs/image9.png"/>
+          <p:cNvPicPr>
+            <a:picLocks noChangeAspect="1"/>
+          </p:cNvPicPr>
+          <p:nvPr/>
+        </p:nvPicPr>
+        <p:blipFill>
+          <a:blip r:embed="rId2"/>
+          <a:stretch>
+            <a:fillRect/>
+          </a:stretch>
+        </p:blipFill>
+        <p:spPr>
+          <a:xfrm>
+            <a:off x="6153912" y="1828800"/>
+            <a:ext cx="5486400" cy="2514600"/>
+          </a:xfrm>
+          <a:prstGeom prst="rect">
+            <a:avLst/>
+          </a:prstGeom>
+        </p:spPr>
+      </p:pic>
+      <p:sp>
+        <p:nvSpPr>
+          <p:cNvPr id="7" name="Shape 3"/>
+          <p:cNvSpPr/>
+          <p:nvPr/>
+        </p:nvSpPr>
+        <p:spPr>
+          <a:xfrm>
+            <a:off x="548640" y="4526280"/>
+            <a:ext cx="11091672" cy="1325880"/>
           </a:xfrm>
           <a:prstGeom prst="rect">
             <a:avLst/>
@@ -11610,90 +11804,33 @@
       </p:sp>
       <p:sp>
         <p:nvSpPr>
-          <p:cNvPr id="5" name="Shape 3"/>
-          <p:cNvSpPr/>
-          <p:nvPr/>
-        </p:nvSpPr>
-        <p:spPr>
-          <a:xfrm>
-            <a:off x="548640" y="1554480"/>
-            <a:ext cx="82296" cy="3840480"/>
+          <p:cNvPr id="8" name="Shape 4"/>
+          <p:cNvSpPr/>
+          <p:nvPr/>
+        </p:nvSpPr>
+        <p:spPr>
+          <a:xfrm>
+            <a:off x="548640" y="4526280"/>
+            <a:ext cx="82296" cy="1325880"/>
           </a:xfrm>
           <a:prstGeom prst="rect">
             <a:avLst/>
           </a:prstGeom>
           <a:solidFill>
-            <a:srgbClr val="1B998B"/>
+            <a:srgbClr val="C1121F"/>
           </a:solidFill>
         </p:spPr>
       </p:sp>
       <p:sp>
         <p:nvSpPr>
-          <p:cNvPr id="6" name="Shape 4"/>
-          <p:cNvSpPr/>
-          <p:nvPr/>
-        </p:nvSpPr>
-        <p:spPr>
-          <a:xfrm>
-            <a:off x="777240" y="1737360"/>
-            <a:ext cx="384048" cy="384048"/>
-          </a:xfrm>
-          <a:prstGeom prst="ellipse">
-            <a:avLst/>
-          </a:prstGeom>
-          <a:solidFill>
-            <a:srgbClr val="1B998B"/>
-          </a:solidFill>
-        </p:spPr>
-      </p:sp>
-      <p:sp>
-        <p:nvSpPr>
-          <p:cNvPr id="7" name="Text 5"/>
-          <p:cNvSpPr/>
-          <p:nvPr/>
-        </p:nvSpPr>
-        <p:spPr>
-          <a:xfrm>
-            <a:off x="777240" y="1737360"/>
-            <a:ext cx="384048" cy="384048"/>
-          </a:xfrm>
-          <a:prstGeom prst="rect">
-            <a:avLst/>
-          </a:prstGeom>
-          <a:noFill/>
-        </p:spPr>
-        <p:txBody>
-          <a:bodyPr wrap="square" lIns="0" tIns="0" rIns="0" bIns="0" rtlCol="0" anchor="ctr"/>
-          <a:lstStyle/>
-          <a:p>
-            <a:pPr marL="0" indent="0" algn="ctr">
-              <a:buNone/>
-            </a:pPr>
-            <a:r>
-              <a:rPr lang="en-US" sz="1600" b="1" dirty="0">
-                <a:solidFill>
-                  <a:srgbClr val="FFFFFF"/>
-                </a:solidFill>
-                <a:latin typeface="Calibri" pitchFamily="34" charset="0"/>
-                <a:ea typeface="Calibri" pitchFamily="34" charset="-122"/>
-                <a:cs typeface="Calibri" pitchFamily="34" charset="-120"/>
-              </a:rPr>
-              <a:t>1</a:t>
-            </a:r>
-            <a:endParaRPr lang="en-US" sz="1600" dirty="0"/>
-          </a:p>
-        </p:txBody>
-      </p:sp>
-      <p:sp>
-        <p:nvSpPr>
-          <p:cNvPr id="8" name="Text 6"/>
-          <p:cNvSpPr/>
-          <p:nvPr/>
-        </p:nvSpPr>
-        <p:spPr>
-          <a:xfrm>
-            <a:off x="1280160" y="1737360"/>
-            <a:ext cx="2599944" cy="457200"/>
+          <p:cNvPr id="9" name="Text 5"/>
+          <p:cNvSpPr/>
+          <p:nvPr/>
+        </p:nvSpPr>
+        <p:spPr>
+          <a:xfrm>
+            <a:off x="822960" y="4636008"/>
+            <a:ext cx="5486400" cy="274320"/>
           </a:xfrm>
           <a:prstGeom prst="rect">
             <a:avLst/>
@@ -11708,7 +11845,7 @@
               <a:buNone/>
             </a:pPr>
             <a:r>
-              <a:rPr lang="en-US" sz="1600" b="1" dirty="0">
+              <a:rPr lang="en-US" sz="1400" b="1" dirty="0">
                 <a:solidFill>
                   <a:srgbClr val="13294B"/>
                 </a:solidFill>
@@ -11716,41 +11853,40 @@
                 <a:ea typeface="Georgia" panose="02040502050405090303" pitchFamily="34" charset="-122"/>
                 <a:cs typeface="Georgia" panose="02040502050405090303" pitchFamily="34" charset="-120"/>
               </a:rPr>
-              <a:t>Regression</a:t>
-            </a:r>
-            <a:endParaRPr lang="en-US" sz="1600" dirty="0"/>
-          </a:p>
-        </p:txBody>
-      </p:sp>
-      <p:sp>
-        <p:nvSpPr>
-          <p:cNvPr id="9" name="Text 7"/>
-          <p:cNvSpPr/>
-          <p:nvPr/>
-        </p:nvSpPr>
-        <p:spPr>
-          <a:xfrm>
-            <a:off x="777240" y="2423160"/>
-            <a:ext cx="3057144" cy="2743200"/>
-          </a:xfrm>
-          <a:prstGeom prst="rect">
-            <a:avLst/>
-          </a:prstGeom>
-          <a:noFill/>
-        </p:spPr>
-        <p:txBody>
-          <a:bodyPr wrap="square" lIns="0" tIns="0" rIns="0" bIns="0" rtlCol="0" anchor="ctr"/>
-          <a:lstStyle/>
-          <a:p>
-            <a:pPr marL="342900" indent="-342900">
-              <a:spcAft>
-                <a:spcPts val="900"/>
-              </a:spcAft>
-              <a:buSzPct val="100000"/>
-              <a:buChar char="•"/>
-            </a:pPr>
-            <a:r>
-              <a:rPr lang="en-US" sz="1300" dirty="0">
+              <a:t>The honest read</a:t>
+            </a:r>
+            <a:endParaRPr lang="en-US" sz="1400" dirty="0"/>
+          </a:p>
+        </p:txBody>
+      </p:sp>
+      <p:sp>
+        <p:nvSpPr>
+          <p:cNvPr id="10" name="Text 6"/>
+          <p:cNvSpPr/>
+          <p:nvPr/>
+        </p:nvSpPr>
+        <p:spPr>
+          <a:xfrm>
+            <a:off x="822960" y="4956048"/>
+            <a:ext cx="10543032" cy="822960"/>
+          </a:xfrm>
+          <a:prstGeom prst="rect">
+            <a:avLst/>
+          </a:prstGeom>
+          <a:noFill/>
+        </p:spPr>
+        <p:txBody>
+          <a:bodyPr wrap="square" lIns="0" tIns="0" rIns="0" bIns="0" rtlCol="0" anchor="ctr"/>
+          <a:lstStyle/>
+          <a:p>
+            <a:pPr marL="0" indent="0">
+              <a:lnSpc>
+                <a:spcPct val="110000"/>
+              </a:lnSpc>
+              <a:buNone/>
+            </a:pPr>
+            <a:r>
+              <a:rPr lang="en-US" sz="1250" dirty="0">
                 <a:solidFill>
                   <a:srgbClr val="33425C"/>
                 </a:solidFill>
@@ -11758,20 +11894,10 @@
                 <a:ea typeface="Calibri" pitchFamily="34" charset="-122"/>
                 <a:cs typeface="Calibri" pitchFamily="34" charset="-120"/>
               </a:rPr>
-              <a:t>β₁ &lt; 0 — direction robust across every spec &amp; sample.</a:t>
-            </a:r>
-            <a:endParaRPr lang="en-US" sz="1300" dirty="0"/>
-          </a:p>
-          <a:p>
-            <a:pPr marL="342900" indent="-342900">
-              <a:spcAft>
-                <a:spcPts val="900"/>
-              </a:spcAft>
-              <a:buSzPct val="100000"/>
-              <a:buChar char="•"/>
-            </a:pPr>
-            <a:r>
-              <a:rPr lang="en-US" sz="1300" dirty="0">
+              <a:t>Only 3 events; FOMC contamination in 2 of 3.   </a:t>
+            </a:r>
+            <a:r>
+              <a:rPr lang="en-US" sz="1250" dirty="0">
                 <a:solidFill>
                   <a:srgbClr val="33425C"/>
                 </a:solidFill>
@@ -11779,20 +11905,19 @@
                 <a:ea typeface="Calibri" pitchFamily="34" charset="-122"/>
                 <a:cs typeface="Calibri" pitchFamily="34" charset="-120"/>
               </a:rPr>
-              <a:t>Stablecoins amplify the privilege in normal times.</a:t>
-            </a:r>
-            <a:endParaRPr lang="en-US" sz="1300" dirty="0"/>
-          </a:p>
-          <a:p>
-            <a:pPr marL="342900" indent="-342900">
-              <a:spcAft>
-                <a:spcPts val="900"/>
-              </a:spcAft>
-              <a:buSzPct val="100000"/>
-              <a:buChar char="•"/>
-            </a:pPr>
-            <a:r>
-              <a:rPr lang="en-US" sz="1300" dirty="0">
+              <a:t>All CARs individually insignificant (−41 / +23 / −27 bps).   </a:t>
+            </a:r>
+            <a:endParaRPr lang="en-US" sz="1250" dirty="0"/>
+          </a:p>
+          <a:p>
+            <a:pPr marL="0" indent="0">
+              <a:lnSpc>
+                <a:spcPct val="110000"/>
+              </a:lnSpc>
+              <a:buNone/>
+            </a:pPr>
+            <a:r>
+              <a:rPr lang="en-US" sz="1250" dirty="0">
                 <a:solidFill>
                   <a:srgbClr val="33425C"/>
                 </a:solidFill>
@@ -11800,124 +11925,33 @@
                 <a:ea typeface="Calibri" pitchFamily="34" charset="-122"/>
                 <a:cs typeface="Calibri" pitchFamily="34" charset="-120"/>
               </a:rPr>
-              <a:t>~30 bps compression per 1-SD supply growth.</a:t>
-            </a:r>
-            <a:endParaRPr lang="en-US" sz="1300" dirty="0"/>
-          </a:p>
-        </p:txBody>
-      </p:sp>
-      <p:sp>
-        <p:nvSpPr>
-          <p:cNvPr id="10" name="Shape 8"/>
-          <p:cNvSpPr/>
-          <p:nvPr/>
-        </p:nvSpPr>
-        <p:spPr>
-          <a:xfrm>
-            <a:off x="4337304" y="1554480"/>
-            <a:ext cx="3514344" cy="3840480"/>
-          </a:xfrm>
-          <a:prstGeom prst="rect">
-            <a:avLst/>
-          </a:prstGeom>
-          <a:solidFill>
-            <a:srgbClr val="F4F6FA"/>
-          </a:solidFill>
-          <a:effectLst>
-            <a:outerShdw blurRad="88900" dist="38100" dir="8100000" algn="bl" rotWithShape="0">
-              <a:srgbClr val="000000">
-                <a:alpha val="13000"/>
-              </a:srgbClr>
-            </a:outerShdw>
-          </a:effectLst>
-        </p:spPr>
-      </p:sp>
-      <p:sp>
-        <p:nvSpPr>
-          <p:cNvPr id="11" name="Shape 9"/>
-          <p:cNvSpPr/>
-          <p:nvPr/>
-        </p:nvSpPr>
-        <p:spPr>
-          <a:xfrm>
-            <a:off x="4337304" y="1554480"/>
-            <a:ext cx="82296" cy="3840480"/>
-          </a:xfrm>
-          <a:prstGeom prst="rect">
-            <a:avLst/>
-          </a:prstGeom>
-          <a:solidFill>
-            <a:srgbClr val="5B8DEF"/>
-          </a:solidFill>
-        </p:spPr>
-      </p:sp>
-      <p:sp>
-        <p:nvSpPr>
-          <p:cNvPr id="12" name="Shape 10"/>
-          <p:cNvSpPr/>
-          <p:nvPr/>
-        </p:nvSpPr>
-        <p:spPr>
-          <a:xfrm>
-            <a:off x="4565904" y="1737360"/>
-            <a:ext cx="384048" cy="384048"/>
-          </a:xfrm>
-          <a:prstGeom prst="ellipse">
-            <a:avLst/>
-          </a:prstGeom>
-          <a:solidFill>
-            <a:srgbClr val="5B8DEF"/>
-          </a:solidFill>
-        </p:spPr>
-      </p:sp>
-      <p:sp>
-        <p:nvSpPr>
-          <p:cNvPr id="13" name="Text 11"/>
-          <p:cNvSpPr/>
-          <p:nvPr/>
-        </p:nvSpPr>
-        <p:spPr>
-          <a:xfrm>
-            <a:off x="4565904" y="1737360"/>
-            <a:ext cx="384048" cy="384048"/>
-          </a:xfrm>
-          <a:prstGeom prst="rect">
-            <a:avLst/>
-          </a:prstGeom>
-          <a:noFill/>
-        </p:spPr>
-        <p:txBody>
-          <a:bodyPr wrap="square" lIns="0" tIns="0" rIns="0" bIns="0" rtlCol="0" anchor="ctr"/>
-          <a:lstStyle/>
-          <a:p>
-            <a:pPr marL="0" indent="0" algn="ctr">
-              <a:buNone/>
-            </a:pPr>
-            <a:r>
-              <a:rPr lang="en-US" sz="1600" b="1" dirty="0">
-                <a:solidFill>
-                  <a:srgbClr val="FFFFFF"/>
-                </a:solidFill>
-                <a:latin typeface="Calibri" pitchFamily="34" charset="0"/>
-                <a:ea typeface="Calibri" pitchFamily="34" charset="-122"/>
-                <a:cs typeface="Calibri" pitchFamily="34" charset="-120"/>
-              </a:rPr>
-              <a:t>2</a:t>
-            </a:r>
-            <a:endParaRPr lang="en-US" sz="1600" dirty="0"/>
-          </a:p>
-        </p:txBody>
-      </p:sp>
-      <p:sp>
-        <p:nvSpPr>
-          <p:cNvPr id="14" name="Text 12"/>
-          <p:cNvSpPr/>
-          <p:nvPr/>
-        </p:nvSpPr>
-        <p:spPr>
-          <a:xfrm>
-            <a:off x="5068824" y="1737360"/>
-            <a:ext cx="2599944" cy="457200"/>
+              <a:t>Placebo ratio 7.0× — suggestive, not individually significant.   </a:t>
+            </a:r>
+            <a:r>
+              <a:rPr lang="en-US" sz="1250" dirty="0">
+                <a:solidFill>
+                  <a:srgbClr val="33425C"/>
+                </a:solidFill>
+                <a:latin typeface="Calibri" pitchFamily="34" charset="0"/>
+                <a:ea typeface="Calibri" pitchFamily="34" charset="-122"/>
+                <a:cs typeface="Calibri" pitchFamily="34" charset="-120"/>
+              </a:rPr>
+              <a:t>Story has shifted across re-runs — too unstable to be evidence.</a:t>
+            </a:r>
+            <a:endParaRPr lang="en-US" sz="1250" dirty="0"/>
+          </a:p>
+        </p:txBody>
+      </p:sp>
+      <p:sp>
+        <p:nvSpPr>
+          <p:cNvPr id="11" name="Text 7"/>
+          <p:cNvSpPr/>
+          <p:nvPr/>
+        </p:nvSpPr>
+        <p:spPr>
+          <a:xfrm>
+            <a:off x="548640" y="5989320"/>
+            <a:ext cx="11091672" cy="365760"/>
           </a:xfrm>
           <a:prstGeom prst="rect">
             <a:avLst/>
@@ -11932,369 +11966,23 @@
               <a:buNone/>
             </a:pPr>
             <a:r>
-              <a:rPr lang="en-US" sz="1600" b="1" dirty="0">
+              <a:rPr lang="en-US" sz="1250" b="1" i="1" dirty="0">
                 <a:solidFill>
                   <a:srgbClr val="13294B"/>
                 </a:solidFill>
-                <a:latin typeface="Georgia" panose="02040502050405090303" pitchFamily="34" charset="0"/>
-                <a:ea typeface="Georgia" panose="02040502050405090303" pitchFamily="34" charset="-122"/>
-                <a:cs typeface="Georgia" panose="02040502050405090303" pitchFamily="34" charset="-120"/>
-              </a:rPr>
-              <a:t>Bid-cover mechanism</a:t>
-            </a:r>
-            <a:endParaRPr lang="en-US" sz="1600" dirty="0"/>
-          </a:p>
-        </p:txBody>
-      </p:sp>
-      <p:sp>
-        <p:nvSpPr>
-          <p:cNvPr id="15" name="Text 13"/>
-          <p:cNvSpPr/>
-          <p:nvPr/>
-        </p:nvSpPr>
-        <p:spPr>
-          <a:xfrm>
-            <a:off x="4565904" y="2423160"/>
-            <a:ext cx="3057144" cy="2743200"/>
-          </a:xfrm>
-          <a:prstGeom prst="rect">
-            <a:avLst/>
-          </a:prstGeom>
-          <a:noFill/>
-        </p:spPr>
-        <p:txBody>
-          <a:bodyPr wrap="square" lIns="0" tIns="0" rIns="0" bIns="0" rtlCol="0" anchor="ctr"/>
-          <a:lstStyle/>
-          <a:p>
-            <a:pPr marL="342900" indent="-342900">
-              <a:spcAft>
-                <a:spcPts val="900"/>
-              </a:spcAft>
-              <a:buSzPct val="100000"/>
-              <a:buChar char="•"/>
-            </a:pPr>
-            <a:r>
-              <a:rPr lang="en-US" sz="1300" dirty="0">
-                <a:solidFill>
-                  <a:srgbClr val="33425C"/>
-                </a:solidFill>
-                <a:latin typeface="Calibri" pitchFamily="34" charset="0"/>
-                <a:ea typeface="Calibri" pitchFamily="34" charset="-122"/>
-                <a:cs typeface="Calibri" pitchFamily="34" charset="-120"/>
-              </a:rPr>
-              <a:t>Only the T-bill-heavy issuer (USDT) moves auction bid-cover.</a:t>
-            </a:r>
-            <a:endParaRPr lang="en-US" sz="1300" dirty="0"/>
-          </a:p>
-          <a:p>
-            <a:pPr marL="342900" indent="-342900">
-              <a:spcAft>
-                <a:spcPts val="900"/>
-              </a:spcAft>
-              <a:buSzPct val="100000"/>
-              <a:buChar char="•"/>
-            </a:pPr>
-            <a:r>
-              <a:rPr lang="en-US" sz="1300" dirty="0">
-                <a:solidFill>
-                  <a:srgbClr val="33425C"/>
-                </a:solidFill>
-                <a:latin typeface="Calibri" pitchFamily="34" charset="0"/>
-                <a:ea typeface="Calibri" pitchFamily="34" charset="-122"/>
-                <a:cs typeface="Calibri" pitchFamily="34" charset="-120"/>
-              </a:rPr>
-              <a:t>Wald rejects equality with USDC (p &lt; 0.004).</a:t>
-            </a:r>
-            <a:endParaRPr lang="en-US" sz="1300" dirty="0"/>
-          </a:p>
-          <a:p>
-            <a:pPr marL="342900" indent="-342900">
-              <a:spcAft>
-                <a:spcPts val="900"/>
-              </a:spcAft>
-              <a:buSzPct val="100000"/>
-              <a:buChar char="•"/>
-            </a:pPr>
-            <a:r>
-              <a:rPr lang="en-US" sz="1300" dirty="0">
-                <a:solidFill>
-                  <a:srgbClr val="33425C"/>
-                </a:solidFill>
-                <a:latin typeface="Calibri" pitchFamily="34" charset="0"/>
-                <a:ea typeface="Calibri" pitchFamily="34" charset="-122"/>
-                <a:cs typeface="Calibri" pitchFamily="34" charset="-120"/>
-              </a:rPr>
-              <a:t>Cleanest causal evidence; spread-independent.</a:t>
-            </a:r>
-            <a:endParaRPr lang="en-US" sz="1300" dirty="0"/>
-          </a:p>
-        </p:txBody>
-      </p:sp>
-      <p:sp>
-        <p:nvSpPr>
-          <p:cNvPr id="16" name="Shape 14"/>
-          <p:cNvSpPr/>
-          <p:nvPr/>
-        </p:nvSpPr>
-        <p:spPr>
-          <a:xfrm>
-            <a:off x="8125968" y="1554480"/>
-            <a:ext cx="3514344" cy="3840480"/>
-          </a:xfrm>
-          <a:prstGeom prst="rect">
-            <a:avLst/>
-          </a:prstGeom>
-          <a:solidFill>
-            <a:srgbClr val="F4F6FA"/>
-          </a:solidFill>
-          <a:effectLst>
-            <a:outerShdw blurRad="88900" dist="38100" dir="8100000" algn="bl" rotWithShape="0">
-              <a:srgbClr val="000000">
-                <a:alpha val="13000"/>
-              </a:srgbClr>
-            </a:outerShdw>
-          </a:effectLst>
-        </p:spPr>
-      </p:sp>
-      <p:sp>
-        <p:nvSpPr>
-          <p:cNvPr id="17" name="Shape 15"/>
-          <p:cNvSpPr/>
-          <p:nvPr/>
-        </p:nvSpPr>
-        <p:spPr>
-          <a:xfrm>
-            <a:off x="8125968" y="1554480"/>
-            <a:ext cx="82296" cy="3840480"/>
-          </a:xfrm>
-          <a:prstGeom prst="rect">
-            <a:avLst/>
-          </a:prstGeom>
-          <a:solidFill>
-            <a:srgbClr val="E8A12C"/>
-          </a:solidFill>
-        </p:spPr>
-      </p:sp>
-      <p:sp>
-        <p:nvSpPr>
-          <p:cNvPr id="18" name="Shape 16"/>
-          <p:cNvSpPr/>
-          <p:nvPr/>
-        </p:nvSpPr>
-        <p:spPr>
-          <a:xfrm>
-            <a:off x="8354568" y="1737360"/>
-            <a:ext cx="384048" cy="384048"/>
-          </a:xfrm>
-          <a:prstGeom prst="ellipse">
-            <a:avLst/>
-          </a:prstGeom>
-          <a:solidFill>
-            <a:srgbClr val="E8A12C"/>
-          </a:solidFill>
-        </p:spPr>
-      </p:sp>
-      <p:sp>
-        <p:nvSpPr>
-          <p:cNvPr id="19" name="Text 17"/>
-          <p:cNvSpPr/>
-          <p:nvPr/>
-        </p:nvSpPr>
-        <p:spPr>
-          <a:xfrm>
-            <a:off x="8354568" y="1737360"/>
-            <a:ext cx="384048" cy="384048"/>
-          </a:xfrm>
-          <a:prstGeom prst="rect">
-            <a:avLst/>
-          </a:prstGeom>
-          <a:noFill/>
-        </p:spPr>
-        <p:txBody>
-          <a:bodyPr wrap="square" lIns="0" tIns="0" rIns="0" bIns="0" rtlCol="0" anchor="ctr"/>
-          <a:lstStyle/>
-          <a:p>
-            <a:pPr marL="0" indent="0" algn="ctr">
-              <a:buNone/>
-            </a:pPr>
-            <a:r>
-              <a:rPr lang="en-US" sz="1600" b="1" dirty="0">
-                <a:solidFill>
-                  <a:srgbClr val="FFFFFF"/>
-                </a:solidFill>
-                <a:latin typeface="Calibri" pitchFamily="34" charset="0"/>
-                <a:ea typeface="Calibri" pitchFamily="34" charset="-122"/>
-                <a:cs typeface="Calibri" pitchFamily="34" charset="-120"/>
-              </a:rPr>
-              <a:t>3</a:t>
-            </a:r>
-            <a:endParaRPr lang="en-US" sz="1600" dirty="0"/>
-          </a:p>
-        </p:txBody>
-      </p:sp>
-      <p:sp>
-        <p:nvSpPr>
-          <p:cNvPr id="20" name="Text 18"/>
-          <p:cNvSpPr/>
-          <p:nvPr/>
-        </p:nvSpPr>
-        <p:spPr>
-          <a:xfrm>
-            <a:off x="8857488" y="1737360"/>
-            <a:ext cx="2599944" cy="457200"/>
-          </a:xfrm>
-          <a:prstGeom prst="rect">
-            <a:avLst/>
-          </a:prstGeom>
-          <a:noFill/>
-        </p:spPr>
-        <p:txBody>
-          <a:bodyPr wrap="square" lIns="0" tIns="0" rIns="0" bIns="0" rtlCol="0" anchor="ctr"/>
-          <a:lstStyle/>
-          <a:p>
-            <a:pPr marL="0" indent="0">
-              <a:buNone/>
-            </a:pPr>
-            <a:r>
-              <a:rPr lang="en-US" sz="1600" b="1" dirty="0">
-                <a:solidFill>
-                  <a:srgbClr val="13294B"/>
-                </a:solidFill>
-                <a:latin typeface="Georgia" panose="02040502050405090303" pitchFamily="34" charset="0"/>
-                <a:ea typeface="Georgia" panose="02040502050405090303" pitchFamily="34" charset="-122"/>
-                <a:cs typeface="Georgia" panose="02040502050405090303" pitchFamily="34" charset="-120"/>
-              </a:rPr>
-              <a:t>Threshold region</a:t>
-            </a:r>
-            <a:endParaRPr lang="en-US" sz="1600" dirty="0"/>
-          </a:p>
-        </p:txBody>
-      </p:sp>
-      <p:sp>
-        <p:nvSpPr>
-          <p:cNvPr id="21" name="Text 19"/>
-          <p:cNvSpPr/>
-          <p:nvPr/>
-        </p:nvSpPr>
-        <p:spPr>
-          <a:xfrm>
-            <a:off x="8354568" y="2423160"/>
-            <a:ext cx="3057144" cy="2743200"/>
-          </a:xfrm>
-          <a:prstGeom prst="rect">
-            <a:avLst/>
-          </a:prstGeom>
-          <a:noFill/>
-        </p:spPr>
-        <p:txBody>
-          <a:bodyPr wrap="square" lIns="0" tIns="0" rIns="0" bIns="0" rtlCol="0" anchor="ctr"/>
-          <a:lstStyle/>
-          <a:p>
-            <a:pPr marL="342900" indent="-342900">
-              <a:spcAft>
-                <a:spcPts val="900"/>
-              </a:spcAft>
-              <a:buSzPct val="100000"/>
-              <a:buChar char="•"/>
-            </a:pPr>
-            <a:r>
-              <a:rPr lang="en-US" sz="1300" dirty="0">
-                <a:solidFill>
-                  <a:srgbClr val="33425C"/>
-                </a:solidFill>
-                <a:latin typeface="Calibri" pitchFamily="34" charset="0"/>
-                <a:ea typeface="Calibri" pitchFamily="34" charset="-122"/>
-                <a:cs typeface="Calibri" pitchFamily="34" charset="-120"/>
-              </a:rPr>
-              <a:t>Two methods locate a break near 13% (Hansen, LSTAR).</a:t>
-            </a:r>
-            <a:endParaRPr lang="en-US" sz="1300" dirty="0"/>
-          </a:p>
-          <a:p>
-            <a:pPr marL="342900" indent="-342900">
-              <a:spcAft>
-                <a:spcPts val="900"/>
-              </a:spcAft>
-              <a:buSzPct val="100000"/>
-              <a:buChar char="•"/>
-            </a:pPr>
-            <a:r>
-              <a:rPr lang="en-US" sz="1300" dirty="0">
-                <a:solidFill>
-                  <a:srgbClr val="33425C"/>
-                </a:solidFill>
-                <a:latin typeface="Calibri" pitchFamily="34" charset="0"/>
-                <a:ea typeface="Calibri" pitchFamily="34" charset="-122"/>
-                <a:cs typeface="Calibri" pitchFamily="34" charset="-120"/>
-              </a:rPr>
-              <a:t>Location robust; precision limited (p = 0.406, N = 51).</a:t>
-            </a:r>
-            <a:endParaRPr lang="en-US" sz="1300" dirty="0"/>
-          </a:p>
-          <a:p>
-            <a:pPr marL="342900" indent="-342900">
-              <a:spcAft>
-                <a:spcPts val="900"/>
-              </a:spcAft>
-              <a:buSzPct val="100000"/>
-              <a:buChar char="•"/>
-            </a:pPr>
-            <a:r>
-              <a:rPr lang="en-US" sz="1300" dirty="0">
-                <a:solidFill>
-                  <a:srgbClr val="33425C"/>
-                </a:solidFill>
-                <a:latin typeface="Calibri" pitchFamily="34" charset="0"/>
-                <a:ea typeface="Calibri" pitchFamily="34" charset="-122"/>
-                <a:cs typeface="Calibri" pitchFamily="34" charset="-120"/>
-              </a:rPr>
-              <a:t>Reported as a region, not a knife-edge.</a:t>
-            </a:r>
-            <a:endParaRPr lang="en-US" sz="1300" dirty="0"/>
-          </a:p>
-        </p:txBody>
-      </p:sp>
-      <p:sp>
-        <p:nvSpPr>
-          <p:cNvPr id="22" name="Text 20"/>
-          <p:cNvSpPr/>
-          <p:nvPr/>
-        </p:nvSpPr>
-        <p:spPr>
-          <a:xfrm>
-            <a:off x="548640" y="5577840"/>
-            <a:ext cx="11091672" cy="411480"/>
-          </a:xfrm>
-          <a:prstGeom prst="rect">
-            <a:avLst/>
-          </a:prstGeom>
-          <a:noFill/>
-        </p:spPr>
-        <p:txBody>
-          <a:bodyPr wrap="square" lIns="0" tIns="0" rIns="0" bIns="0" rtlCol="0" anchor="ctr"/>
-          <a:lstStyle/>
-          <a:p>
-            <a:pPr marL="0" indent="0" algn="ctr">
-              <a:buNone/>
-            </a:pPr>
-            <a:r>
-              <a:rPr lang="en-US" sz="1400" b="1" i="1" dirty="0">
-                <a:solidFill>
-                  <a:srgbClr val="13294B"/>
-                </a:solidFill>
-                <a:latin typeface="Georgia" panose="02040502050405090303" pitchFamily="34" charset="0"/>
-                <a:ea typeface="Georgia" panose="02040502050405090303" pitchFamily="34" charset="-122"/>
-                <a:cs typeface="Georgia" panose="02040502050405090303" pitchFamily="34" charset="-120"/>
-              </a:rPr>
-              <a:t>All three point the same way: stablecoins amplify the exorbitant privilege, with a fragility threshold near a 13% liquid buffer.</a:t>
-            </a:r>
-            <a:endParaRPr lang="en-US" sz="1400" dirty="0"/>
-          </a:p>
-        </p:txBody>
-      </p:sp>
-      <p:sp>
-        <p:nvSpPr>
-          <p:cNvPr id="23" name="Text 21"/>
+                <a:latin typeface="Calibri" pitchFamily="34" charset="0"/>
+                <a:ea typeface="Calibri" pitchFamily="34" charset="-122"/>
+                <a:cs typeface="Calibri" pitchFamily="34" charset="-120"/>
+              </a:rPr>
+              <a:t>Role: illustrate the mechanism. The proof lives in the regression and the bid-cover test.</a:t>
+            </a:r>
+            <a:endParaRPr lang="en-US" sz="1250" dirty="0"/>
+          </a:p>
+        </p:txBody>
+      </p:sp>
+      <p:sp>
+        <p:nvSpPr>
+          <p:cNvPr id="12" name="Text 8"/>
           <p:cNvSpPr/>
           <p:nvPr/>
         </p:nvSpPr>
@@ -12332,7 +12020,7 @@
       </p:sp>
       <p:sp>
         <p:nvSpPr>
-          <p:cNvPr id="24" name="Text 22"/>
+          <p:cNvPr id="13" name="Text 9"/>
           <p:cNvSpPr/>
           <p:nvPr/>
         </p:nvSpPr>
@@ -12362,7 +12050,7 @@
                 <a:ea typeface="Calibri" pitchFamily="34" charset="-122"/>
                 <a:cs typeface="Calibri" pitchFamily="34" charset="-120"/>
               </a:rPr>
-              <a:t>18</a:t>
+              <a:t>16</a:t>
             </a:r>
             <a:endParaRPr lang="en-US" sz="1100" dirty="0"/>
           </a:p>
@@ -12433,7 +12121,7 @@
                 <a:ea typeface="Calibri" pitchFamily="34" charset="-122"/>
                 <a:cs typeface="Calibri" pitchFamily="34" charset="-120"/>
               </a:rPr>
-              <a:t>LIMITATIONS &amp; NEXT STEPS</a:t>
+              <a:t>POLICY IMPLICATIONS</a:t>
             </a:r>
             <a:endParaRPr lang="en-US" sz="1200" dirty="0"/>
           </a:p>
@@ -12471,7 +12159,7 @@
                 <a:ea typeface="Georgia" panose="02040502050405090303" pitchFamily="34" charset="-122"/>
                 <a:cs typeface="Georgia" panose="02040502050405090303" pitchFamily="34" charset="-120"/>
               </a:rPr>
-              <a:t>Honest Constraints and the Agenda Ahead</a:t>
+              <a:t>From an Empirical Region to a Regulatory Reference</a:t>
             </a:r>
             <a:endParaRPr lang="en-US" sz="2700" dirty="0"/>
           </a:p>
@@ -12486,7 +12174,7 @@
         <p:spPr>
           <a:xfrm>
             <a:off x="548640" y="1508760"/>
-            <a:ext cx="5362956" cy="4297680"/>
+            <a:ext cx="3514344" cy="2057400"/>
           </a:xfrm>
           <a:prstGeom prst="rect">
             <a:avLst/>
@@ -12512,13 +12200,13 @@
         <p:spPr>
           <a:xfrm>
             <a:off x="548640" y="1508760"/>
-            <a:ext cx="82296" cy="4297680"/>
+            <a:ext cx="82296" cy="2057400"/>
           </a:xfrm>
           <a:prstGeom prst="rect">
             <a:avLst/>
           </a:prstGeom>
           <a:solidFill>
-            <a:srgbClr val="C1121F"/>
+            <a:srgbClr val="13294B"/>
           </a:solidFill>
         </p:spPr>
       </p:sp>
@@ -12530,8 +12218,8 @@
         </p:nvSpPr>
         <p:spPr>
           <a:xfrm>
-            <a:off x="804672" y="1645920"/>
-            <a:ext cx="4905756" cy="365760"/>
+            <a:off x="749808" y="1645920"/>
+            <a:ext cx="3148584" cy="502920"/>
           </a:xfrm>
           <a:prstGeom prst="rect">
             <a:avLst/>
@@ -12546,17 +12234,17 @@
               <a:buNone/>
             </a:pPr>
             <a:r>
-              <a:rPr lang="en-US" sz="1700" b="1" dirty="0">
-                <a:solidFill>
-                  <a:srgbClr val="C1121F"/>
+              <a:rPr lang="en-US" sz="1500" b="1" dirty="0">
+                <a:solidFill>
+                  <a:srgbClr val="13294B"/>
                 </a:solidFill>
                 <a:latin typeface="Georgia" panose="02040502050405090303" pitchFamily="34" charset="0"/>
                 <a:ea typeface="Georgia" panose="02040502050405090303" pitchFamily="34" charset="-122"/>
                 <a:cs typeface="Georgia" panose="02040502050405090303" pitchFamily="34" charset="-120"/>
               </a:rPr>
-              <a:t>Limitations</a:t>
-            </a:r>
-            <a:endParaRPr lang="en-US" sz="1700" dirty="0"/>
+              <a:t>MiCA (EU, 2024)</a:t>
+            </a:r>
+            <a:endParaRPr lang="en-US" sz="1500" dirty="0"/>
           </a:p>
         </p:txBody>
       </p:sp>
@@ -12568,27 +12256,26 @@
         </p:nvSpPr>
         <p:spPr>
           <a:xfrm>
-            <a:off x="804672" y="2103120"/>
-            <a:ext cx="4860036" cy="3657600"/>
-          </a:xfrm>
-          <a:prstGeom prst="rect">
-            <a:avLst/>
-          </a:prstGeom>
-          <a:noFill/>
-        </p:spPr>
-        <p:txBody>
-          <a:bodyPr wrap="square" lIns="0" tIns="0" rIns="0" bIns="0" rtlCol="0" anchor="ctr"/>
-          <a:lstStyle/>
-          <a:p>
-            <a:pPr marL="342900" indent="-342900">
-              <a:spcAft>
-                <a:spcPts val="900"/>
-              </a:spcAft>
-              <a:buSzPct val="100000"/>
-              <a:buChar char="•"/>
-            </a:pPr>
-            <a:r>
-              <a:rPr lang="en-US" sz="1300" dirty="0">
+            <a:off x="749808" y="2240280"/>
+            <a:ext cx="3130296" cy="1188720"/>
+          </a:xfrm>
+          <a:prstGeom prst="rect">
+            <a:avLst/>
+          </a:prstGeom>
+          <a:noFill/>
+        </p:spPr>
+        <p:txBody>
+          <a:bodyPr wrap="square" lIns="0" tIns="0" rIns="0" bIns="0" rtlCol="0" anchor="ctr"/>
+          <a:lstStyle/>
+          <a:p>
+            <a:pPr marL="0" indent="0">
+              <a:lnSpc>
+                <a:spcPct val="108000"/>
+              </a:lnSpc>
+              <a:buNone/>
+            </a:pPr>
+            <a:r>
+              <a:rPr lang="en-US" sz="1250" dirty="0">
                 <a:solidFill>
                   <a:srgbClr val="33425C"/>
                 </a:solidFill>
@@ -12596,114 +12283,9 @@
                 <a:ea typeface="Calibri" pitchFamily="34" charset="-122"/>
                 <a:cs typeface="Calibri" pitchFamily="34" charset="-120"/>
               </a:rPr>
-              <a:t>N = 51 months limits power for threshold confirmation.</a:t>
-            </a:r>
-            <a:endParaRPr lang="en-US" sz="1300" dirty="0"/>
-          </a:p>
-          <a:p>
-            <a:pPr marL="342900" indent="-342900">
-              <a:spcAft>
-                <a:spcPts val="900"/>
-              </a:spcAft>
-              <a:buSzPct val="100000"/>
-              <a:buChar char="•"/>
-            </a:pPr>
-            <a:r>
-              <a:rPr lang="en-US" sz="1300" dirty="0">
-                <a:solidFill>
-                  <a:srgbClr val="33425C"/>
-                </a:solidFill>
-                <a:latin typeface="Calibri" pitchFamily="34" charset="0"/>
-                <a:ea typeface="Calibri" pitchFamily="34" charset="-122"/>
-                <a:cs typeface="Calibri" pitchFamily="34" charset="-120"/>
-              </a:rPr>
-              <a:t>L forward-filled for ~13 months (Tether quarterly attestations).</a:t>
-            </a:r>
-            <a:endParaRPr lang="en-US" sz="1300" dirty="0"/>
-          </a:p>
-          <a:p>
-            <a:pPr marL="342900" indent="-342900">
-              <a:spcAft>
-                <a:spcPts val="900"/>
-              </a:spcAft>
-              <a:buSzPct val="100000"/>
-              <a:buChar char="•"/>
-            </a:pPr>
-            <a:r>
-              <a:rPr lang="en-US" sz="1300" dirty="0">
-                <a:solidFill>
-                  <a:srgbClr val="33425C"/>
-                </a:solidFill>
-                <a:latin typeface="Calibri" pitchFamily="34" charset="0"/>
-                <a:ea typeface="Calibri" pitchFamily="34" charset="-122"/>
-                <a:cs typeface="Calibri" pitchFamily="34" charset="-120"/>
-              </a:rPr>
-              <a:t>Spread benchmark still overnight SOFR — finish with 3-mo Term SOFR.</a:t>
-            </a:r>
-            <a:endParaRPr lang="en-US" sz="1300" dirty="0"/>
-          </a:p>
-          <a:p>
-            <a:pPr marL="342900" indent="-342900">
-              <a:spcAft>
-                <a:spcPts val="900"/>
-              </a:spcAft>
-              <a:buSzPct val="100000"/>
-              <a:buChar char="•"/>
-            </a:pPr>
-            <a:r>
-              <a:rPr lang="en-US" sz="1300" dirty="0">
-                <a:solidFill>
-                  <a:srgbClr val="33425C"/>
-                </a:solidFill>
-                <a:latin typeface="Calibri" pitchFamily="34" charset="0"/>
-                <a:ea typeface="Calibri" pitchFamily="34" charset="-122"/>
-                <a:cs typeface="Calibri" pitchFamily="34" charset="-120"/>
-              </a:rPr>
-              <a:t>Endogeneity not fully resolved (Granger addresses, doesn’t solve).</a:t>
-            </a:r>
-            <a:endParaRPr lang="en-US" sz="1300" dirty="0"/>
-          </a:p>
-          <a:p>
-            <a:pPr marL="342900" indent="-342900">
-              <a:spcAft>
-                <a:spcPts val="900"/>
-              </a:spcAft>
-              <a:buSzPct val="100000"/>
-              <a:buChar char="•"/>
-            </a:pPr>
-            <a:r>
-              <a:rPr lang="en-US" sz="1300" dirty="0">
-                <a:solidFill>
-                  <a:srgbClr val="33425C"/>
-                </a:solidFill>
-                <a:latin typeface="Calibri" pitchFamily="34" charset="0"/>
-                <a:ea typeface="Calibri" pitchFamily="34" charset="-122"/>
-                <a:cs typeface="Calibri" pitchFamily="34" charset="-120"/>
-              </a:rPr>
-              <a:t>Only 3 stress events; FOMC contamination in 2 of 3.</a:t>
-            </a:r>
-            <a:endParaRPr lang="en-US" sz="1300" dirty="0"/>
-          </a:p>
-          <a:p>
-            <a:pPr marL="342900" indent="-342900">
-              <a:spcAft>
-                <a:spcPts val="900"/>
-              </a:spcAft>
-              <a:buSzPct val="100000"/>
-              <a:buChar char="•"/>
-            </a:pPr>
-            <a:r>
-              <a:rPr lang="en-US" sz="1300" dirty="0">
-                <a:solidFill>
-                  <a:srgbClr val="33425C"/>
-                </a:solidFill>
-                <a:latin typeface="Calibri" pitchFamily="34" charset="0"/>
-                <a:ea typeface="Calibri" pitchFamily="34" charset="-122"/>
-                <a:cs typeface="Calibri" pitchFamily="34" charset="-120"/>
-              </a:rPr>
-              <a:t>Sample Jan 2022 – Mar 2026; may not generalize past 2026.</a:t>
-            </a:r>
-            <a:endParaRPr lang="en-US" sz="1300" dirty="0"/>
+              <a:t>Mandates liquid-reserve requirements for ‘significant’ e-money tokens. Our region gives an empirically grounded floor.</a:t>
+            </a:r>
+            <a:endParaRPr lang="en-US" sz="1250" dirty="0"/>
           </a:p>
         </p:txBody>
       </p:sp>
@@ -12715,8 +12297,8 @@
         </p:nvSpPr>
         <p:spPr>
           <a:xfrm>
-            <a:off x="6277356" y="1508760"/>
-            <a:ext cx="5362956" cy="4297680"/>
+            <a:off x="4337304" y="1508760"/>
+            <a:ext cx="3514344" cy="2057400"/>
           </a:xfrm>
           <a:prstGeom prst="rect">
             <a:avLst/>
@@ -12741,8 +12323,8 @@
         </p:nvSpPr>
         <p:spPr>
           <a:xfrm>
-            <a:off x="6277356" y="1508760"/>
-            <a:ext cx="82296" cy="4297680"/>
+            <a:off x="4337304" y="1508760"/>
+            <a:ext cx="82296" cy="2057400"/>
           </a:xfrm>
           <a:prstGeom prst="rect">
             <a:avLst/>
@@ -12760,8 +12342,8 @@
         </p:nvSpPr>
         <p:spPr>
           <a:xfrm>
-            <a:off x="6533388" y="1645920"/>
-            <a:ext cx="4905756" cy="365760"/>
+            <a:off x="4538472" y="1645920"/>
+            <a:ext cx="3148584" cy="502920"/>
           </a:xfrm>
           <a:prstGeom prst="rect">
             <a:avLst/>
@@ -12776,17 +12358,17 @@
               <a:buNone/>
             </a:pPr>
             <a:r>
-              <a:rPr lang="en-US" sz="1700" b="1" dirty="0">
-                <a:solidFill>
-                  <a:srgbClr val="1B998B"/>
+              <a:rPr lang="en-US" sz="1500" b="1" dirty="0">
+                <a:solidFill>
+                  <a:srgbClr val="13294B"/>
                 </a:solidFill>
                 <a:latin typeface="Georgia" panose="02040502050405090303" pitchFamily="34" charset="0"/>
                 <a:ea typeface="Georgia" panose="02040502050405090303" pitchFamily="34" charset="-122"/>
                 <a:cs typeface="Georgia" panose="02040502050405090303" pitchFamily="34" charset="-120"/>
               </a:rPr>
-              <a:t>Next steps</a:t>
-            </a:r>
-            <a:endParaRPr lang="en-US" sz="1700" dirty="0"/>
+              <a:t>GENIUS Act (US, 2025)</a:t>
+            </a:r>
+            <a:endParaRPr lang="en-US" sz="1500" dirty="0"/>
           </a:p>
         </p:txBody>
       </p:sp>
@@ -12798,27 +12380,26 @@
         </p:nvSpPr>
         <p:spPr>
           <a:xfrm>
-            <a:off x="6533388" y="2103120"/>
-            <a:ext cx="4494276" cy="3657600"/>
-          </a:xfrm>
-          <a:prstGeom prst="rect">
-            <a:avLst/>
-          </a:prstGeom>
-          <a:noFill/>
-        </p:spPr>
-        <p:txBody>
-          <a:bodyPr wrap="square" lIns="0" tIns="0" rIns="0" bIns="0" rtlCol="0" anchor="ctr"/>
-          <a:lstStyle/>
-          <a:p>
-            <a:pPr marL="342900" indent="-342900">
-              <a:spcAft>
-                <a:spcPts val="900"/>
-              </a:spcAft>
-              <a:buSzPct val="100000"/>
-              <a:buChar char="•"/>
-            </a:pPr>
-            <a:r>
-              <a:rPr lang="en-US" sz="1300" dirty="0">
+            <a:off x="4538472" y="2240280"/>
+            <a:ext cx="3130296" cy="1188720"/>
+          </a:xfrm>
+          <a:prstGeom prst="rect">
+            <a:avLst/>
+          </a:prstGeom>
+          <a:noFill/>
+        </p:spPr>
+        <p:txBody>
+          <a:bodyPr wrap="square" lIns="0" tIns="0" rIns="0" bIns="0" rtlCol="0" anchor="ctr"/>
+          <a:lstStyle/>
+          <a:p>
+            <a:pPr marL="0" indent="0">
+              <a:lnSpc>
+                <a:spcPct val="108000"/>
+              </a:lnSpc>
+              <a:buNone/>
+            </a:pPr>
+            <a:r>
+              <a:rPr lang="en-US" sz="1250" dirty="0">
                 <a:solidFill>
                   <a:srgbClr val="33425C"/>
                 </a:solidFill>
@@ -12826,20 +12407,123 @@
                 <a:ea typeface="Calibri" pitchFamily="34" charset="-122"/>
                 <a:cs typeface="Calibri" pitchFamily="34" charset="-120"/>
               </a:rPr>
-              <a:t>Longer sample as attestations accumulate → power improves.</a:t>
-            </a:r>
-            <a:endParaRPr lang="en-US" sz="1300" dirty="0"/>
-          </a:p>
-          <a:p>
-            <a:pPr marL="342900" indent="-342900">
-              <a:spcAft>
-                <a:spcPts val="900"/>
-              </a:spcAft>
-              <a:buSzPct val="100000"/>
-              <a:buChar char="•"/>
-            </a:pPr>
-            <a:r>
-              <a:rPr lang="en-US" sz="1300" dirty="0">
+              <a:t>Requires issuers to hold cash or near-cash reserves. Our CI [3.1%, 14.5%] maps to a regulatory range.</a:t>
+            </a:r>
+            <a:endParaRPr lang="en-US" sz="1250" dirty="0"/>
+          </a:p>
+        </p:txBody>
+      </p:sp>
+      <p:sp>
+        <p:nvSpPr>
+          <p:cNvPr id="12" name="Shape 10"/>
+          <p:cNvSpPr/>
+          <p:nvPr/>
+        </p:nvSpPr>
+        <p:spPr>
+          <a:xfrm>
+            <a:off x="8125968" y="1508760"/>
+            <a:ext cx="3514344" cy="2057400"/>
+          </a:xfrm>
+          <a:prstGeom prst="rect">
+            <a:avLst/>
+          </a:prstGeom>
+          <a:solidFill>
+            <a:srgbClr val="F4F6FA"/>
+          </a:solidFill>
+          <a:effectLst>
+            <a:outerShdw blurRad="88900" dist="38100" dir="8100000" algn="bl" rotWithShape="0">
+              <a:srgbClr val="000000">
+                <a:alpha val="13000"/>
+              </a:srgbClr>
+            </a:outerShdw>
+          </a:effectLst>
+        </p:spPr>
+      </p:sp>
+      <p:sp>
+        <p:nvSpPr>
+          <p:cNvPr id="13" name="Shape 11"/>
+          <p:cNvSpPr/>
+          <p:nvPr/>
+        </p:nvSpPr>
+        <p:spPr>
+          <a:xfrm>
+            <a:off x="8125968" y="1508760"/>
+            <a:ext cx="82296" cy="2057400"/>
+          </a:xfrm>
+          <a:prstGeom prst="rect">
+            <a:avLst/>
+          </a:prstGeom>
+          <a:solidFill>
+            <a:srgbClr val="E8A12C"/>
+          </a:solidFill>
+        </p:spPr>
+      </p:sp>
+      <p:sp>
+        <p:nvSpPr>
+          <p:cNvPr id="14" name="Text 12"/>
+          <p:cNvSpPr/>
+          <p:nvPr/>
+        </p:nvSpPr>
+        <p:spPr>
+          <a:xfrm>
+            <a:off x="8327136" y="1645920"/>
+            <a:ext cx="3148584" cy="502920"/>
+          </a:xfrm>
+          <a:prstGeom prst="rect">
+            <a:avLst/>
+          </a:prstGeom>
+          <a:noFill/>
+        </p:spPr>
+        <p:txBody>
+          <a:bodyPr wrap="square" lIns="0" tIns="0" rIns="0" bIns="0" rtlCol="0" anchor="ctr"/>
+          <a:lstStyle/>
+          <a:p>
+            <a:pPr marL="0" indent="0">
+              <a:buNone/>
+            </a:pPr>
+            <a:r>
+              <a:rPr lang="en-US" sz="1500" b="1" dirty="0">
+                <a:solidFill>
+                  <a:srgbClr val="13294B"/>
+                </a:solidFill>
+                <a:latin typeface="Georgia" panose="02040502050405090303" pitchFamily="34" charset="0"/>
+                <a:ea typeface="Georgia" panose="02040502050405090303" pitchFamily="34" charset="-122"/>
+                <a:cs typeface="Georgia" panose="02040502050405090303" pitchFamily="34" charset="-120"/>
+              </a:rPr>
+              <a:t>Market trajectory</a:t>
+            </a:r>
+            <a:endParaRPr lang="en-US" sz="1500" dirty="0"/>
+          </a:p>
+        </p:txBody>
+      </p:sp>
+      <p:sp>
+        <p:nvSpPr>
+          <p:cNvPr id="15" name="Text 13"/>
+          <p:cNvSpPr/>
+          <p:nvPr/>
+        </p:nvSpPr>
+        <p:spPr>
+          <a:xfrm>
+            <a:off x="8327136" y="2240280"/>
+            <a:ext cx="3130296" cy="1188720"/>
+          </a:xfrm>
+          <a:prstGeom prst="rect">
+            <a:avLst/>
+          </a:prstGeom>
+          <a:noFill/>
+        </p:spPr>
+        <p:txBody>
+          <a:bodyPr wrap="square" lIns="0" tIns="0" rIns="0" bIns="0" rtlCol="0" anchor="ctr"/>
+          <a:lstStyle/>
+          <a:p>
+            <a:pPr marL="0" indent="0">
+              <a:lnSpc>
+                <a:spcPct val="108000"/>
+              </a:lnSpc>
+              <a:buNone/>
+            </a:pPr>
+            <a:r>
+              <a:rPr lang="en-US" sz="1250" dirty="0">
                 <a:solidFill>
                   <a:srgbClr val="33425C"/>
                 </a:solidFill>
@@ -12847,78 +12531,142 @@
                 <a:ea typeface="Calibri" pitchFamily="34" charset="-122"/>
                 <a:cs typeface="Calibri" pitchFamily="34" charset="-120"/>
               </a:rPr>
-              <a:t>Better identification: instrument supply with regulatory announcements.</a:t>
-            </a:r>
-            <a:endParaRPr lang="en-US" sz="1300" dirty="0"/>
-          </a:p>
-          <a:p>
-            <a:pPr marL="342900" indent="-342900">
-              <a:spcAft>
-                <a:spcPts val="900"/>
-              </a:spcAft>
-              <a:buSzPct val="100000"/>
-              <a:buChar char="•"/>
-            </a:pPr>
-            <a:r>
-              <a:rPr lang="en-US" sz="1300" dirty="0">
-                <a:solidFill>
-                  <a:srgbClr val="33425C"/>
-                </a:solidFill>
-                <a:latin typeface="Calibri" pitchFamily="34" charset="0"/>
-                <a:ea typeface="Calibri" pitchFamily="34" charset="-122"/>
-                <a:cs typeface="Calibri" pitchFamily="34" charset="-120"/>
-              </a:rPr>
-              <a:t>High-frequency: daily spread + daily supply for cleaner events.</a:t>
-            </a:r>
-            <a:endParaRPr lang="en-US" sz="1300" dirty="0"/>
-          </a:p>
-          <a:p>
-            <a:pPr marL="342900" indent="-342900">
-              <a:spcAft>
-                <a:spcPts val="900"/>
-              </a:spcAft>
-              <a:buSzPct val="100000"/>
-              <a:buChar char="•"/>
-            </a:pPr>
-            <a:r>
-              <a:rPr lang="en-US" sz="1300" dirty="0">
-                <a:solidFill>
-                  <a:srgbClr val="33425C"/>
-                </a:solidFill>
-                <a:latin typeface="Calibri" pitchFamily="34" charset="0"/>
-                <a:ea typeface="Calibri" pitchFamily="34" charset="-122"/>
-                <a:cs typeface="Calibri" pitchFamily="34" charset="-120"/>
-              </a:rPr>
-              <a:t>Non-USD ecosystems: euro stablecoins, CBDC interactions.</a:t>
-            </a:r>
-            <a:endParaRPr lang="en-US" sz="1300" dirty="0"/>
-          </a:p>
-          <a:p>
-            <a:pPr marL="342900" indent="-342900">
-              <a:spcAft>
-                <a:spcPts val="900"/>
-              </a:spcAft>
-              <a:buSzPct val="100000"/>
-              <a:buChar char="•"/>
-            </a:pPr>
-            <a:r>
-              <a:rPr lang="en-US" sz="1300" dirty="0">
-                <a:solidFill>
-                  <a:srgbClr val="33425C"/>
-                </a:solidFill>
-                <a:latin typeface="Calibri" pitchFamily="34" charset="0"/>
-                <a:ea typeface="Calibri" pitchFamily="34" charset="-122"/>
-                <a:cs typeface="Calibri" pitchFamily="34" charset="-120"/>
-              </a:rPr>
-              <a:t>Cross-country: does the same mechanism hold for EUR safe assets?</a:t>
-            </a:r>
-            <a:endParaRPr lang="en-US" sz="1300" dirty="0"/>
-          </a:p>
-        </p:txBody>
-      </p:sp>
-      <p:sp>
-        <p:nvSpPr>
-          <p:cNvPr id="12" name="Text 10"/>
+              <a:t>Supply heading toward $1–2T. At that scale, forced-liquidation risk becomes systemic — a break-the-buck analogue.</a:t>
+            </a:r>
+            <a:endParaRPr lang="en-US" sz="1250" dirty="0"/>
+          </a:p>
+        </p:txBody>
+      </p:sp>
+      <p:sp>
+        <p:nvSpPr>
+          <p:cNvPr id="16" name="Shape 14"/>
+          <p:cNvSpPr/>
+          <p:nvPr/>
+        </p:nvSpPr>
+        <p:spPr>
+          <a:xfrm>
+            <a:off x="548640" y="3794760"/>
+            <a:ext cx="11091672" cy="1828800"/>
+          </a:xfrm>
+          <a:prstGeom prst="rect">
+            <a:avLst/>
+          </a:prstGeom>
+          <a:solidFill>
+            <a:srgbClr val="0E2746"/>
+          </a:solidFill>
+          <a:effectLst>
+            <a:outerShdw blurRad="88900" dist="38100" dir="8100000" algn="bl" rotWithShape="0">
+              <a:srgbClr val="000000">
+                <a:alpha val="13000"/>
+              </a:srgbClr>
+            </a:outerShdw>
+          </a:effectLst>
+        </p:spPr>
+      </p:sp>
+      <p:sp>
+        <p:nvSpPr>
+          <p:cNvPr id="17" name="Text 15"/>
+          <p:cNvSpPr/>
+          <p:nvPr/>
+        </p:nvSpPr>
+        <p:spPr>
+          <a:xfrm>
+            <a:off x="822960" y="3931920"/>
+            <a:ext cx="10543032" cy="365760"/>
+          </a:xfrm>
+          <a:prstGeom prst="rect">
+            <a:avLst/>
+          </a:prstGeom>
+          <a:noFill/>
+        </p:spPr>
+        <p:txBody>
+          <a:bodyPr wrap="square" lIns="0" tIns="0" rIns="0" bIns="0" rtlCol="0" anchor="ctr"/>
+          <a:lstStyle/>
+          <a:p>
+            <a:pPr marL="0" indent="0">
+              <a:buNone/>
+            </a:pPr>
+            <a:r>
+              <a:rPr lang="en-US" sz="1500" b="1" dirty="0">
+                <a:solidFill>
+                  <a:srgbClr val="E8A12C"/>
+                </a:solidFill>
+                <a:latin typeface="Georgia" panose="02040502050405090303" pitchFamily="34" charset="0"/>
+                <a:ea typeface="Georgia" panose="02040502050405090303" pitchFamily="34" charset="-122"/>
+                <a:cs typeface="Georgia" panose="02040502050405090303" pitchFamily="34" charset="-120"/>
+              </a:rPr>
+              <a:t>Our reference — stated as a range, not a precise mandate</a:t>
+            </a:r>
+            <a:endParaRPr lang="en-US" sz="1500" dirty="0"/>
+          </a:p>
+        </p:txBody>
+      </p:sp>
+      <p:sp>
+        <p:nvSpPr>
+          <p:cNvPr id="18" name="Text 16"/>
+          <p:cNvSpPr/>
+          <p:nvPr/>
+        </p:nvSpPr>
+        <p:spPr>
+          <a:xfrm>
+            <a:off x="822960" y="4343400"/>
+            <a:ext cx="10543032" cy="1188720"/>
+          </a:xfrm>
+          <a:prstGeom prst="rect">
+            <a:avLst/>
+          </a:prstGeom>
+          <a:noFill/>
+        </p:spPr>
+        <p:txBody>
+          <a:bodyPr wrap="square" lIns="0" tIns="0" rIns="0" bIns="0" rtlCol="0" anchor="ctr"/>
+          <a:lstStyle/>
+          <a:p>
+            <a:pPr marL="0" indent="0">
+              <a:lnSpc>
+                <a:spcPct val="115000"/>
+              </a:lnSpc>
+              <a:buNone/>
+            </a:pPr>
+            <a:r>
+              <a:rPr lang="en-US" sz="1400" dirty="0">
+                <a:solidFill>
+                  <a:srgbClr val="FFFFFF"/>
+                </a:solidFill>
+                <a:latin typeface="Calibri" pitchFamily="34" charset="0"/>
+                <a:ea typeface="Calibri" pitchFamily="34" charset="-122"/>
+                <a:cs typeface="Calibri" pitchFamily="34" charset="-120"/>
+              </a:rPr>
+              <a:t>Target a low-teens liquid-buffer floor (cash / near-cash), with estimates centered near 13% of outstanding supply — as a </a:t>
+            </a:r>
+            <a:r>
+              <a:rPr lang="en-US" sz="1400" b="1" dirty="0">
+                <a:solidFill>
+                  <a:srgbClr val="FFFFFF"/>
+                </a:solidFill>
+                <a:latin typeface="Calibri" pitchFamily="34" charset="0"/>
+                <a:ea typeface="Calibri" pitchFamily="34" charset="-122"/>
+                <a:cs typeface="Calibri" pitchFamily="34" charset="-120"/>
+              </a:rPr>
+              <a:t>behavioural break, not a welfare optimum.</a:t>
+            </a:r>
+            <a:r>
+              <a:rPr lang="en-US" sz="1400" dirty="0">
+                <a:solidFill>
+                  <a:srgbClr val="AEC0DD"/>
+                </a:solidFill>
+                <a:latin typeface="Calibri" pitchFamily="34" charset="0"/>
+                <a:ea typeface="Calibri" pitchFamily="34" charset="-122"/>
+                <a:cs typeface="Calibri" pitchFamily="34" charset="-120"/>
+              </a:rPr>
+              <a:t>  Below ~3% is clearly under-reserved; above ~14.5% is clearly adequate. As attestation data accumulates, the estimate will sharpen.</a:t>
+            </a:r>
+            <a:endParaRPr lang="en-US" sz="1400" dirty="0"/>
+          </a:p>
+        </p:txBody>
+      </p:sp>
+      <p:sp>
+        <p:nvSpPr>
+          <p:cNvPr id="19" name="Text 17"/>
           <p:cNvSpPr/>
           <p:nvPr/>
         </p:nvSpPr>
@@ -12956,7 +12704,7 @@
       </p:sp>
       <p:sp>
         <p:nvSpPr>
-          <p:cNvPr id="13" name="Text 11"/>
+          <p:cNvPr id="20" name="Text 18"/>
           <p:cNvSpPr/>
           <p:nvPr/>
         </p:nvSpPr>
@@ -12986,7 +12734,7 @@
                 <a:ea typeface="Calibri" pitchFamily="34" charset="-122"/>
                 <a:cs typeface="Calibri" pitchFamily="34" charset="-120"/>
               </a:rPr>
-              <a:t>19</a:t>
+              <a:t>17</a:t>
             </a:r>
             <a:endParaRPr lang="en-US" sz="1100" dirty="0"/>
           </a:p>
@@ -13634,6 +13382,1525 @@
 </file>
 
 <file path=ppt/slides/slide20.xml><?xml version="1.0" encoding="utf-8"?>
+<p:sld xmlns:a="http://schemas.openxmlformats.org/drawingml/2006/main" xmlns:r="http://schemas.openxmlformats.org/officeDocument/2006/relationships" xmlns:p="http://schemas.openxmlformats.org/presentationml/2006/main">
+  <p:cSld>
+    <p:bg>
+      <p:bgPr>
+        <a:solidFill>
+          <a:srgbClr val="FFFFFF"/>
+        </a:solidFill>
+        <a:effectLst/>
+      </p:bgPr>
+    </p:bg>
+    <p:spTree>
+      <p:nvGrpSpPr>
+        <p:cNvPr id="1" name=""/>
+        <p:cNvGrpSpPr/>
+        <p:nvPr/>
+      </p:nvGrpSpPr>
+      <p:grpSpPr>
+        <a:xfrm>
+          <a:off x="0" y="0"/>
+          <a:ext cx="0" cy="0"/>
+          <a:chOff x="0" y="0"/>
+          <a:chExt cx="0" cy="0"/>
+        </a:xfrm>
+      </p:grpSpPr>
+      <p:sp>
+        <p:nvSpPr>
+          <p:cNvPr id="2" name="Text 0"/>
+          <p:cNvSpPr/>
+          <p:nvPr/>
+        </p:nvSpPr>
+        <p:spPr>
+          <a:xfrm>
+            <a:off x="548640" y="384048"/>
+            <a:ext cx="11091672" cy="274320"/>
+          </a:xfrm>
+          <a:prstGeom prst="rect">
+            <a:avLst/>
+          </a:prstGeom>
+          <a:noFill/>
+        </p:spPr>
+        <p:txBody>
+          <a:bodyPr wrap="square" lIns="0" tIns="0" rIns="0" bIns="0" rtlCol="0" anchor="ctr"/>
+          <a:lstStyle/>
+          <a:p>
+            <a:pPr marL="0" indent="0">
+              <a:buNone/>
+            </a:pPr>
+            <a:r>
+              <a:rPr lang="en-US" sz="1200" b="1" kern="0" spc="200" dirty="0">
+                <a:solidFill>
+                  <a:srgbClr val="1B998B"/>
+                </a:solidFill>
+                <a:latin typeface="Calibri" pitchFamily="34" charset="0"/>
+                <a:ea typeface="Calibri" pitchFamily="34" charset="-122"/>
+                <a:cs typeface="Calibri" pitchFamily="34" charset="-120"/>
+              </a:rPr>
+              <a:t>SUMMARY</a:t>
+            </a:r>
+            <a:endParaRPr lang="en-US" sz="1200" dirty="0"/>
+          </a:p>
+        </p:txBody>
+      </p:sp>
+      <p:sp>
+        <p:nvSpPr>
+          <p:cNvPr id="3" name="Text 1"/>
+          <p:cNvSpPr/>
+          <p:nvPr/>
+        </p:nvSpPr>
+        <p:spPr>
+          <a:xfrm>
+            <a:off x="548640" y="658368"/>
+            <a:ext cx="11091672" cy="685800"/>
+          </a:xfrm>
+          <a:prstGeom prst="rect">
+            <a:avLst/>
+          </a:prstGeom>
+          <a:noFill/>
+        </p:spPr>
+        <p:txBody>
+          <a:bodyPr wrap="square" lIns="0" tIns="0" rIns="0" bIns="0" rtlCol="0" anchor="ctr"/>
+          <a:lstStyle/>
+          <a:p>
+            <a:pPr marL="0" indent="0">
+              <a:buNone/>
+            </a:pPr>
+            <a:r>
+              <a:rPr lang="en-US" sz="2700" b="1" dirty="0">
+                <a:solidFill>
+                  <a:srgbClr val="13294B"/>
+                </a:solidFill>
+                <a:latin typeface="Georgia" panose="02040502050405090303" pitchFamily="34" charset="0"/>
+                <a:ea typeface="Georgia" panose="02040502050405090303" pitchFamily="34" charset="-122"/>
+                <a:cs typeface="Georgia" panose="02040502050405090303" pitchFamily="34" charset="-120"/>
+              </a:rPr>
+              <a:t>Three Lines of Evidence — Each Limited, Together Coherent</a:t>
+            </a:r>
+            <a:endParaRPr lang="en-US" sz="2700" dirty="0"/>
+          </a:p>
+        </p:txBody>
+      </p:sp>
+      <p:sp>
+        <p:nvSpPr>
+          <p:cNvPr id="4" name="Shape 2"/>
+          <p:cNvSpPr/>
+          <p:nvPr/>
+        </p:nvSpPr>
+        <p:spPr>
+          <a:xfrm>
+            <a:off x="548640" y="1554480"/>
+            <a:ext cx="3514344" cy="3840480"/>
+          </a:xfrm>
+          <a:prstGeom prst="rect">
+            <a:avLst/>
+          </a:prstGeom>
+          <a:solidFill>
+            <a:srgbClr val="F4F6FA"/>
+          </a:solidFill>
+          <a:effectLst>
+            <a:outerShdw blurRad="88900" dist="38100" dir="8100000" algn="bl" rotWithShape="0">
+              <a:srgbClr val="000000">
+                <a:alpha val="13000"/>
+              </a:srgbClr>
+            </a:outerShdw>
+          </a:effectLst>
+        </p:spPr>
+      </p:sp>
+      <p:sp>
+        <p:nvSpPr>
+          <p:cNvPr id="5" name="Shape 3"/>
+          <p:cNvSpPr/>
+          <p:nvPr/>
+        </p:nvSpPr>
+        <p:spPr>
+          <a:xfrm>
+            <a:off x="548640" y="1554480"/>
+            <a:ext cx="82296" cy="3840480"/>
+          </a:xfrm>
+          <a:prstGeom prst="rect">
+            <a:avLst/>
+          </a:prstGeom>
+          <a:solidFill>
+            <a:srgbClr val="1B998B"/>
+          </a:solidFill>
+        </p:spPr>
+      </p:sp>
+      <p:sp>
+        <p:nvSpPr>
+          <p:cNvPr id="6" name="Shape 4"/>
+          <p:cNvSpPr/>
+          <p:nvPr/>
+        </p:nvSpPr>
+        <p:spPr>
+          <a:xfrm>
+            <a:off x="777240" y="1737360"/>
+            <a:ext cx="384048" cy="384048"/>
+          </a:xfrm>
+          <a:prstGeom prst="ellipse">
+            <a:avLst/>
+          </a:prstGeom>
+          <a:solidFill>
+            <a:srgbClr val="1B998B"/>
+          </a:solidFill>
+        </p:spPr>
+      </p:sp>
+      <p:sp>
+        <p:nvSpPr>
+          <p:cNvPr id="7" name="Text 5"/>
+          <p:cNvSpPr/>
+          <p:nvPr/>
+        </p:nvSpPr>
+        <p:spPr>
+          <a:xfrm>
+            <a:off x="777240" y="1737360"/>
+            <a:ext cx="384048" cy="384048"/>
+          </a:xfrm>
+          <a:prstGeom prst="rect">
+            <a:avLst/>
+          </a:prstGeom>
+          <a:noFill/>
+        </p:spPr>
+        <p:txBody>
+          <a:bodyPr wrap="square" lIns="0" tIns="0" rIns="0" bIns="0" rtlCol="0" anchor="ctr"/>
+          <a:lstStyle/>
+          <a:p>
+            <a:pPr marL="0" indent="0" algn="ctr">
+              <a:buNone/>
+            </a:pPr>
+            <a:r>
+              <a:rPr lang="en-US" sz="1600" b="1" dirty="0">
+                <a:solidFill>
+                  <a:srgbClr val="FFFFFF"/>
+                </a:solidFill>
+                <a:latin typeface="Calibri" pitchFamily="34" charset="0"/>
+                <a:ea typeface="Calibri" pitchFamily="34" charset="-122"/>
+                <a:cs typeface="Calibri" pitchFamily="34" charset="-120"/>
+              </a:rPr>
+              <a:t>1</a:t>
+            </a:r>
+            <a:endParaRPr lang="en-US" sz="1600" dirty="0"/>
+          </a:p>
+        </p:txBody>
+      </p:sp>
+      <p:sp>
+        <p:nvSpPr>
+          <p:cNvPr id="8" name="Text 6"/>
+          <p:cNvSpPr/>
+          <p:nvPr/>
+        </p:nvSpPr>
+        <p:spPr>
+          <a:xfrm>
+            <a:off x="1280160" y="1737360"/>
+            <a:ext cx="2599944" cy="457200"/>
+          </a:xfrm>
+          <a:prstGeom prst="rect">
+            <a:avLst/>
+          </a:prstGeom>
+          <a:noFill/>
+        </p:spPr>
+        <p:txBody>
+          <a:bodyPr wrap="square" lIns="0" tIns="0" rIns="0" bIns="0" rtlCol="0" anchor="ctr"/>
+          <a:lstStyle/>
+          <a:p>
+            <a:pPr marL="0" indent="0">
+              <a:buNone/>
+            </a:pPr>
+            <a:r>
+              <a:rPr lang="en-US" sz="1600" b="1" dirty="0">
+                <a:solidFill>
+                  <a:srgbClr val="13294B"/>
+                </a:solidFill>
+                <a:latin typeface="Georgia" panose="02040502050405090303" pitchFamily="34" charset="0"/>
+                <a:ea typeface="Georgia" panose="02040502050405090303" pitchFamily="34" charset="-122"/>
+                <a:cs typeface="Georgia" panose="02040502050405090303" pitchFamily="34" charset="-120"/>
+              </a:rPr>
+              <a:t>Regression</a:t>
+            </a:r>
+            <a:endParaRPr lang="en-US" sz="1600" dirty="0"/>
+          </a:p>
+        </p:txBody>
+      </p:sp>
+      <p:sp>
+        <p:nvSpPr>
+          <p:cNvPr id="9" name="Text 7"/>
+          <p:cNvSpPr/>
+          <p:nvPr/>
+        </p:nvSpPr>
+        <p:spPr>
+          <a:xfrm>
+            <a:off x="777240" y="2423160"/>
+            <a:ext cx="3057144" cy="2743200"/>
+          </a:xfrm>
+          <a:prstGeom prst="rect">
+            <a:avLst/>
+          </a:prstGeom>
+          <a:noFill/>
+        </p:spPr>
+        <p:txBody>
+          <a:bodyPr wrap="square" lIns="0" tIns="0" rIns="0" bIns="0" rtlCol="0" anchor="ctr"/>
+          <a:lstStyle/>
+          <a:p>
+            <a:pPr marL="342900" indent="-342900">
+              <a:spcAft>
+                <a:spcPts val="900"/>
+              </a:spcAft>
+              <a:buSzPct val="100000"/>
+              <a:buChar char="•"/>
+            </a:pPr>
+            <a:r>
+              <a:rPr lang="en-US" sz="1300" dirty="0">
+                <a:solidFill>
+                  <a:srgbClr val="33425C"/>
+                </a:solidFill>
+                <a:latin typeface="Calibri" pitchFamily="34" charset="0"/>
+                <a:ea typeface="Calibri" pitchFamily="34" charset="-122"/>
+                <a:cs typeface="Calibri" pitchFamily="34" charset="-120"/>
+              </a:rPr>
+              <a:t>β₁ &lt; 0 — direction robust across every spec &amp; sample.</a:t>
+            </a:r>
+            <a:endParaRPr lang="en-US" sz="1300" dirty="0"/>
+          </a:p>
+          <a:p>
+            <a:pPr marL="342900" indent="-342900">
+              <a:spcAft>
+                <a:spcPts val="900"/>
+              </a:spcAft>
+              <a:buSzPct val="100000"/>
+              <a:buChar char="•"/>
+            </a:pPr>
+            <a:r>
+              <a:rPr lang="en-US" sz="1300" dirty="0">
+                <a:solidFill>
+                  <a:srgbClr val="33425C"/>
+                </a:solidFill>
+                <a:latin typeface="Calibri" pitchFamily="34" charset="0"/>
+                <a:ea typeface="Calibri" pitchFamily="34" charset="-122"/>
+                <a:cs typeface="Calibri" pitchFamily="34" charset="-120"/>
+              </a:rPr>
+              <a:t>Stablecoins amplify the privilege in normal times.</a:t>
+            </a:r>
+            <a:endParaRPr lang="en-US" sz="1300" dirty="0"/>
+          </a:p>
+          <a:p>
+            <a:pPr marL="342900" indent="-342900">
+              <a:spcAft>
+                <a:spcPts val="900"/>
+              </a:spcAft>
+              <a:buSzPct val="100000"/>
+              <a:buChar char="•"/>
+            </a:pPr>
+            <a:r>
+              <a:rPr lang="en-US" sz="1300" dirty="0">
+                <a:solidFill>
+                  <a:srgbClr val="33425C"/>
+                </a:solidFill>
+                <a:latin typeface="Calibri" pitchFamily="34" charset="0"/>
+                <a:ea typeface="Calibri" pitchFamily="34" charset="-122"/>
+                <a:cs typeface="Calibri" pitchFamily="34" charset="-120"/>
+              </a:rPr>
+              <a:t>~30 bps compression per 1-SD supply growth.</a:t>
+            </a:r>
+            <a:endParaRPr lang="en-US" sz="1300" dirty="0"/>
+          </a:p>
+        </p:txBody>
+      </p:sp>
+      <p:sp>
+        <p:nvSpPr>
+          <p:cNvPr id="10" name="Shape 8"/>
+          <p:cNvSpPr/>
+          <p:nvPr/>
+        </p:nvSpPr>
+        <p:spPr>
+          <a:xfrm>
+            <a:off x="4337304" y="1554480"/>
+            <a:ext cx="3514344" cy="3840480"/>
+          </a:xfrm>
+          <a:prstGeom prst="rect">
+            <a:avLst/>
+          </a:prstGeom>
+          <a:solidFill>
+            <a:srgbClr val="F4F6FA"/>
+          </a:solidFill>
+          <a:effectLst>
+            <a:outerShdw blurRad="88900" dist="38100" dir="8100000" algn="bl" rotWithShape="0">
+              <a:srgbClr val="000000">
+                <a:alpha val="13000"/>
+              </a:srgbClr>
+            </a:outerShdw>
+          </a:effectLst>
+        </p:spPr>
+      </p:sp>
+      <p:sp>
+        <p:nvSpPr>
+          <p:cNvPr id="11" name="Shape 9"/>
+          <p:cNvSpPr/>
+          <p:nvPr/>
+        </p:nvSpPr>
+        <p:spPr>
+          <a:xfrm>
+            <a:off x="4337304" y="1554480"/>
+            <a:ext cx="82296" cy="3840480"/>
+          </a:xfrm>
+          <a:prstGeom prst="rect">
+            <a:avLst/>
+          </a:prstGeom>
+          <a:solidFill>
+            <a:srgbClr val="5B8DEF"/>
+          </a:solidFill>
+        </p:spPr>
+      </p:sp>
+      <p:sp>
+        <p:nvSpPr>
+          <p:cNvPr id="12" name="Shape 10"/>
+          <p:cNvSpPr/>
+          <p:nvPr/>
+        </p:nvSpPr>
+        <p:spPr>
+          <a:xfrm>
+            <a:off x="4565904" y="1737360"/>
+            <a:ext cx="384048" cy="384048"/>
+          </a:xfrm>
+          <a:prstGeom prst="ellipse">
+            <a:avLst/>
+          </a:prstGeom>
+          <a:solidFill>
+            <a:srgbClr val="5B8DEF"/>
+          </a:solidFill>
+        </p:spPr>
+      </p:sp>
+      <p:sp>
+        <p:nvSpPr>
+          <p:cNvPr id="13" name="Text 11"/>
+          <p:cNvSpPr/>
+          <p:nvPr/>
+        </p:nvSpPr>
+        <p:spPr>
+          <a:xfrm>
+            <a:off x="4565904" y="1737360"/>
+            <a:ext cx="384048" cy="384048"/>
+          </a:xfrm>
+          <a:prstGeom prst="rect">
+            <a:avLst/>
+          </a:prstGeom>
+          <a:noFill/>
+        </p:spPr>
+        <p:txBody>
+          <a:bodyPr wrap="square" lIns="0" tIns="0" rIns="0" bIns="0" rtlCol="0" anchor="ctr"/>
+          <a:lstStyle/>
+          <a:p>
+            <a:pPr marL="0" indent="0" algn="ctr">
+              <a:buNone/>
+            </a:pPr>
+            <a:r>
+              <a:rPr lang="en-US" sz="1600" b="1" dirty="0">
+                <a:solidFill>
+                  <a:srgbClr val="FFFFFF"/>
+                </a:solidFill>
+                <a:latin typeface="Calibri" pitchFamily="34" charset="0"/>
+                <a:ea typeface="Calibri" pitchFamily="34" charset="-122"/>
+                <a:cs typeface="Calibri" pitchFamily="34" charset="-120"/>
+              </a:rPr>
+              <a:t>2</a:t>
+            </a:r>
+            <a:endParaRPr lang="en-US" sz="1600" dirty="0"/>
+          </a:p>
+        </p:txBody>
+      </p:sp>
+      <p:sp>
+        <p:nvSpPr>
+          <p:cNvPr id="14" name="Text 12"/>
+          <p:cNvSpPr/>
+          <p:nvPr/>
+        </p:nvSpPr>
+        <p:spPr>
+          <a:xfrm>
+            <a:off x="5068824" y="1737360"/>
+            <a:ext cx="2599944" cy="457200"/>
+          </a:xfrm>
+          <a:prstGeom prst="rect">
+            <a:avLst/>
+          </a:prstGeom>
+          <a:noFill/>
+        </p:spPr>
+        <p:txBody>
+          <a:bodyPr wrap="square" lIns="0" tIns="0" rIns="0" bIns="0" rtlCol="0" anchor="ctr"/>
+          <a:lstStyle/>
+          <a:p>
+            <a:pPr marL="0" indent="0">
+              <a:buNone/>
+            </a:pPr>
+            <a:r>
+              <a:rPr lang="en-US" sz="1600" b="1" dirty="0">
+                <a:solidFill>
+                  <a:srgbClr val="13294B"/>
+                </a:solidFill>
+                <a:latin typeface="Georgia" panose="02040502050405090303" pitchFamily="34" charset="0"/>
+                <a:ea typeface="Georgia" panose="02040502050405090303" pitchFamily="34" charset="-122"/>
+                <a:cs typeface="Georgia" panose="02040502050405090303" pitchFamily="34" charset="-120"/>
+              </a:rPr>
+              <a:t>Bid-cover mechanism</a:t>
+            </a:r>
+            <a:endParaRPr lang="en-US" sz="1600" dirty="0"/>
+          </a:p>
+        </p:txBody>
+      </p:sp>
+      <p:sp>
+        <p:nvSpPr>
+          <p:cNvPr id="15" name="Text 13"/>
+          <p:cNvSpPr/>
+          <p:nvPr/>
+        </p:nvSpPr>
+        <p:spPr>
+          <a:xfrm>
+            <a:off x="4565904" y="2423160"/>
+            <a:ext cx="3057144" cy="2743200"/>
+          </a:xfrm>
+          <a:prstGeom prst="rect">
+            <a:avLst/>
+          </a:prstGeom>
+          <a:noFill/>
+        </p:spPr>
+        <p:txBody>
+          <a:bodyPr wrap="square" lIns="0" tIns="0" rIns="0" bIns="0" rtlCol="0" anchor="ctr"/>
+          <a:lstStyle/>
+          <a:p>
+            <a:pPr marL="342900" indent="-342900">
+              <a:spcAft>
+                <a:spcPts val="900"/>
+              </a:spcAft>
+              <a:buSzPct val="100000"/>
+              <a:buChar char="•"/>
+            </a:pPr>
+            <a:r>
+              <a:rPr lang="en-US" sz="1300" dirty="0">
+                <a:solidFill>
+                  <a:srgbClr val="33425C"/>
+                </a:solidFill>
+                <a:latin typeface="Calibri" pitchFamily="34" charset="0"/>
+                <a:ea typeface="Calibri" pitchFamily="34" charset="-122"/>
+                <a:cs typeface="Calibri" pitchFamily="34" charset="-120"/>
+              </a:rPr>
+              <a:t>Only the T-bill-heavy issuer (USDT) moves auction bid-cover.</a:t>
+            </a:r>
+            <a:endParaRPr lang="en-US" sz="1300" dirty="0"/>
+          </a:p>
+          <a:p>
+            <a:pPr marL="342900" indent="-342900">
+              <a:spcAft>
+                <a:spcPts val="900"/>
+              </a:spcAft>
+              <a:buSzPct val="100000"/>
+              <a:buChar char="•"/>
+            </a:pPr>
+            <a:r>
+              <a:rPr lang="en-US" sz="1300" dirty="0">
+                <a:solidFill>
+                  <a:srgbClr val="33425C"/>
+                </a:solidFill>
+                <a:latin typeface="Calibri" pitchFamily="34" charset="0"/>
+                <a:ea typeface="Calibri" pitchFamily="34" charset="-122"/>
+                <a:cs typeface="Calibri" pitchFamily="34" charset="-120"/>
+              </a:rPr>
+              <a:t>Wald rejects equality with USDC (p &lt; 0.004).</a:t>
+            </a:r>
+            <a:endParaRPr lang="en-US" sz="1300" dirty="0"/>
+          </a:p>
+          <a:p>
+            <a:pPr marL="342900" indent="-342900">
+              <a:spcAft>
+                <a:spcPts val="900"/>
+              </a:spcAft>
+              <a:buSzPct val="100000"/>
+              <a:buChar char="•"/>
+            </a:pPr>
+            <a:r>
+              <a:rPr lang="en-US" sz="1300" dirty="0">
+                <a:solidFill>
+                  <a:srgbClr val="33425C"/>
+                </a:solidFill>
+                <a:latin typeface="Calibri" pitchFamily="34" charset="0"/>
+                <a:ea typeface="Calibri" pitchFamily="34" charset="-122"/>
+                <a:cs typeface="Calibri" pitchFamily="34" charset="-120"/>
+              </a:rPr>
+              <a:t>Cleanest causal evidence; spread-independent.</a:t>
+            </a:r>
+            <a:endParaRPr lang="en-US" sz="1300" dirty="0"/>
+          </a:p>
+        </p:txBody>
+      </p:sp>
+      <p:sp>
+        <p:nvSpPr>
+          <p:cNvPr id="16" name="Shape 14"/>
+          <p:cNvSpPr/>
+          <p:nvPr/>
+        </p:nvSpPr>
+        <p:spPr>
+          <a:xfrm>
+            <a:off x="8125968" y="1554480"/>
+            <a:ext cx="3514344" cy="3840480"/>
+          </a:xfrm>
+          <a:prstGeom prst="rect">
+            <a:avLst/>
+          </a:prstGeom>
+          <a:solidFill>
+            <a:srgbClr val="F4F6FA"/>
+          </a:solidFill>
+          <a:effectLst>
+            <a:outerShdw blurRad="88900" dist="38100" dir="8100000" algn="bl" rotWithShape="0">
+              <a:srgbClr val="000000">
+                <a:alpha val="13000"/>
+              </a:srgbClr>
+            </a:outerShdw>
+          </a:effectLst>
+        </p:spPr>
+      </p:sp>
+      <p:sp>
+        <p:nvSpPr>
+          <p:cNvPr id="17" name="Shape 15"/>
+          <p:cNvSpPr/>
+          <p:nvPr/>
+        </p:nvSpPr>
+        <p:spPr>
+          <a:xfrm>
+            <a:off x="8125968" y="1554480"/>
+            <a:ext cx="82296" cy="3840480"/>
+          </a:xfrm>
+          <a:prstGeom prst="rect">
+            <a:avLst/>
+          </a:prstGeom>
+          <a:solidFill>
+            <a:srgbClr val="E8A12C"/>
+          </a:solidFill>
+        </p:spPr>
+      </p:sp>
+      <p:sp>
+        <p:nvSpPr>
+          <p:cNvPr id="18" name="Shape 16"/>
+          <p:cNvSpPr/>
+          <p:nvPr/>
+        </p:nvSpPr>
+        <p:spPr>
+          <a:xfrm>
+            <a:off x="8354568" y="1737360"/>
+            <a:ext cx="384048" cy="384048"/>
+          </a:xfrm>
+          <a:prstGeom prst="ellipse">
+            <a:avLst/>
+          </a:prstGeom>
+          <a:solidFill>
+            <a:srgbClr val="E8A12C"/>
+          </a:solidFill>
+        </p:spPr>
+      </p:sp>
+      <p:sp>
+        <p:nvSpPr>
+          <p:cNvPr id="19" name="Text 17"/>
+          <p:cNvSpPr/>
+          <p:nvPr/>
+        </p:nvSpPr>
+        <p:spPr>
+          <a:xfrm>
+            <a:off x="8354568" y="1737360"/>
+            <a:ext cx="384048" cy="384048"/>
+          </a:xfrm>
+          <a:prstGeom prst="rect">
+            <a:avLst/>
+          </a:prstGeom>
+          <a:noFill/>
+        </p:spPr>
+        <p:txBody>
+          <a:bodyPr wrap="square" lIns="0" tIns="0" rIns="0" bIns="0" rtlCol="0" anchor="ctr"/>
+          <a:lstStyle/>
+          <a:p>
+            <a:pPr marL="0" indent="0" algn="ctr">
+              <a:buNone/>
+            </a:pPr>
+            <a:r>
+              <a:rPr lang="en-US" sz="1600" b="1" dirty="0">
+                <a:solidFill>
+                  <a:srgbClr val="FFFFFF"/>
+                </a:solidFill>
+                <a:latin typeface="Calibri" pitchFamily="34" charset="0"/>
+                <a:ea typeface="Calibri" pitchFamily="34" charset="-122"/>
+                <a:cs typeface="Calibri" pitchFamily="34" charset="-120"/>
+              </a:rPr>
+              <a:t>3</a:t>
+            </a:r>
+            <a:endParaRPr lang="en-US" sz="1600" dirty="0"/>
+          </a:p>
+        </p:txBody>
+      </p:sp>
+      <p:sp>
+        <p:nvSpPr>
+          <p:cNvPr id="20" name="Text 18"/>
+          <p:cNvSpPr/>
+          <p:nvPr/>
+        </p:nvSpPr>
+        <p:spPr>
+          <a:xfrm>
+            <a:off x="8857488" y="1737360"/>
+            <a:ext cx="2599944" cy="457200"/>
+          </a:xfrm>
+          <a:prstGeom prst="rect">
+            <a:avLst/>
+          </a:prstGeom>
+          <a:noFill/>
+        </p:spPr>
+        <p:txBody>
+          <a:bodyPr wrap="square" lIns="0" tIns="0" rIns="0" bIns="0" rtlCol="0" anchor="ctr"/>
+          <a:lstStyle/>
+          <a:p>
+            <a:pPr marL="0" indent="0">
+              <a:buNone/>
+            </a:pPr>
+            <a:r>
+              <a:rPr lang="en-US" sz="1600" b="1" dirty="0">
+                <a:solidFill>
+                  <a:srgbClr val="13294B"/>
+                </a:solidFill>
+                <a:latin typeface="Georgia" panose="02040502050405090303" pitchFamily="34" charset="0"/>
+                <a:ea typeface="Georgia" panose="02040502050405090303" pitchFamily="34" charset="-122"/>
+                <a:cs typeface="Georgia" panose="02040502050405090303" pitchFamily="34" charset="-120"/>
+              </a:rPr>
+              <a:t>Threshold region</a:t>
+            </a:r>
+            <a:endParaRPr lang="en-US" sz="1600" dirty="0"/>
+          </a:p>
+        </p:txBody>
+      </p:sp>
+      <p:sp>
+        <p:nvSpPr>
+          <p:cNvPr id="21" name="Text 19"/>
+          <p:cNvSpPr/>
+          <p:nvPr/>
+        </p:nvSpPr>
+        <p:spPr>
+          <a:xfrm>
+            <a:off x="8354568" y="2423160"/>
+            <a:ext cx="3057144" cy="2743200"/>
+          </a:xfrm>
+          <a:prstGeom prst="rect">
+            <a:avLst/>
+          </a:prstGeom>
+          <a:noFill/>
+        </p:spPr>
+        <p:txBody>
+          <a:bodyPr wrap="square" lIns="0" tIns="0" rIns="0" bIns="0" rtlCol="0" anchor="ctr"/>
+          <a:lstStyle/>
+          <a:p>
+            <a:pPr marL="342900" indent="-342900">
+              <a:spcAft>
+                <a:spcPts val="900"/>
+              </a:spcAft>
+              <a:buSzPct val="100000"/>
+              <a:buChar char="•"/>
+            </a:pPr>
+            <a:r>
+              <a:rPr lang="en-US" sz="1300" dirty="0">
+                <a:solidFill>
+                  <a:srgbClr val="33425C"/>
+                </a:solidFill>
+                <a:latin typeface="Calibri" pitchFamily="34" charset="0"/>
+                <a:ea typeface="Calibri" pitchFamily="34" charset="-122"/>
+                <a:cs typeface="Calibri" pitchFamily="34" charset="-120"/>
+              </a:rPr>
+              <a:t>Two methods locate a break near 13% (Hansen, LSTAR).</a:t>
+            </a:r>
+            <a:endParaRPr lang="en-US" sz="1300" dirty="0"/>
+          </a:p>
+          <a:p>
+            <a:pPr marL="342900" indent="-342900">
+              <a:spcAft>
+                <a:spcPts val="900"/>
+              </a:spcAft>
+              <a:buSzPct val="100000"/>
+              <a:buChar char="•"/>
+            </a:pPr>
+            <a:r>
+              <a:rPr lang="en-US" sz="1300" dirty="0">
+                <a:solidFill>
+                  <a:srgbClr val="33425C"/>
+                </a:solidFill>
+                <a:latin typeface="Calibri" pitchFamily="34" charset="0"/>
+                <a:ea typeface="Calibri" pitchFamily="34" charset="-122"/>
+                <a:cs typeface="Calibri" pitchFamily="34" charset="-120"/>
+              </a:rPr>
+              <a:t>Location robust; precision limited (p = 0.406, N = 51).</a:t>
+            </a:r>
+            <a:endParaRPr lang="en-US" sz="1300" dirty="0"/>
+          </a:p>
+          <a:p>
+            <a:pPr marL="342900" indent="-342900">
+              <a:spcAft>
+                <a:spcPts val="900"/>
+              </a:spcAft>
+              <a:buSzPct val="100000"/>
+              <a:buChar char="•"/>
+            </a:pPr>
+            <a:r>
+              <a:rPr lang="en-US" sz="1300" dirty="0">
+                <a:solidFill>
+                  <a:srgbClr val="33425C"/>
+                </a:solidFill>
+                <a:latin typeface="Calibri" pitchFamily="34" charset="0"/>
+                <a:ea typeface="Calibri" pitchFamily="34" charset="-122"/>
+                <a:cs typeface="Calibri" pitchFamily="34" charset="-120"/>
+              </a:rPr>
+              <a:t>Reported as a region, not a knife-edge.</a:t>
+            </a:r>
+            <a:endParaRPr lang="en-US" sz="1300" dirty="0"/>
+          </a:p>
+        </p:txBody>
+      </p:sp>
+      <p:sp>
+        <p:nvSpPr>
+          <p:cNvPr id="22" name="Text 20"/>
+          <p:cNvSpPr/>
+          <p:nvPr/>
+        </p:nvSpPr>
+        <p:spPr>
+          <a:xfrm>
+            <a:off x="548640" y="5577840"/>
+            <a:ext cx="11091672" cy="411480"/>
+          </a:xfrm>
+          <a:prstGeom prst="rect">
+            <a:avLst/>
+          </a:prstGeom>
+          <a:noFill/>
+        </p:spPr>
+        <p:txBody>
+          <a:bodyPr wrap="square" lIns="0" tIns="0" rIns="0" bIns="0" rtlCol="0" anchor="ctr"/>
+          <a:lstStyle/>
+          <a:p>
+            <a:pPr marL="0" indent="0" algn="ctr">
+              <a:buNone/>
+            </a:pPr>
+            <a:r>
+              <a:rPr lang="en-US" sz="1400" b="1" i="1" dirty="0">
+                <a:solidFill>
+                  <a:srgbClr val="13294B"/>
+                </a:solidFill>
+                <a:latin typeface="Georgia" panose="02040502050405090303" pitchFamily="34" charset="0"/>
+                <a:ea typeface="Georgia" panose="02040502050405090303" pitchFamily="34" charset="-122"/>
+                <a:cs typeface="Georgia" panose="02040502050405090303" pitchFamily="34" charset="-120"/>
+              </a:rPr>
+              <a:t>All three point the same way: stablecoins amplify the exorbitant privilege, with a fragility threshold near a 13% liquid buffer.</a:t>
+            </a:r>
+            <a:endParaRPr lang="en-US" sz="1400" dirty="0"/>
+          </a:p>
+        </p:txBody>
+      </p:sp>
+      <p:sp>
+        <p:nvSpPr>
+          <p:cNvPr id="23" name="Text 21"/>
+          <p:cNvSpPr/>
+          <p:nvPr/>
+        </p:nvSpPr>
+        <p:spPr>
+          <a:xfrm>
+            <a:off x="548640" y="6455664"/>
+            <a:ext cx="7315200" cy="274320"/>
+          </a:xfrm>
+          <a:prstGeom prst="rect">
+            <a:avLst/>
+          </a:prstGeom>
+          <a:noFill/>
+        </p:spPr>
+        <p:txBody>
+          <a:bodyPr wrap="square" lIns="0" tIns="0" rIns="0" bIns="0" rtlCol="0" anchor="ctr"/>
+          <a:lstStyle/>
+          <a:p>
+            <a:pPr marL="0" indent="0">
+              <a:buNone/>
+            </a:pPr>
+            <a:r>
+              <a:rPr lang="en-US" sz="900" dirty="0">
+                <a:solidFill>
+                  <a:srgbClr val="5B6B82"/>
+                </a:solidFill>
+                <a:latin typeface="Calibri" pitchFamily="34" charset="0"/>
+                <a:ea typeface="Calibri" pitchFamily="34" charset="-122"/>
+                <a:cs typeface="Calibri" pitchFamily="34" charset="-120"/>
+              </a:rPr>
+              <a:t>Stablecoins &amp; the Exorbitant Privilege</a:t>
+            </a:r>
+            <a:endParaRPr lang="en-US" sz="900" dirty="0"/>
+          </a:p>
+        </p:txBody>
+      </p:sp>
+      <p:sp>
+        <p:nvSpPr>
+          <p:cNvPr id="24" name="Text 22"/>
+          <p:cNvSpPr/>
+          <p:nvPr/>
+        </p:nvSpPr>
+        <p:spPr>
+          <a:xfrm>
+            <a:off x="11274552" y="6400800"/>
+            <a:ext cx="365760" cy="274320"/>
+          </a:xfrm>
+          <a:prstGeom prst="rect">
+            <a:avLst/>
+          </a:prstGeom>
+          <a:noFill/>
+        </p:spPr>
+        <p:txBody>
+          <a:bodyPr wrap="square" lIns="0" tIns="0" rIns="0" bIns="0" rtlCol="0" anchor="ctr"/>
+          <a:lstStyle/>
+          <a:p>
+            <a:pPr marL="0" indent="0" algn="r">
+              <a:buNone/>
+            </a:pPr>
+            <a:r>
+              <a:rPr lang="en-US" sz="1100" dirty="0">
+                <a:solidFill>
+                  <a:srgbClr val="5B6B82"/>
+                </a:solidFill>
+                <a:latin typeface="Calibri" pitchFamily="34" charset="0"/>
+                <a:ea typeface="Calibri" pitchFamily="34" charset="-122"/>
+                <a:cs typeface="Calibri" pitchFamily="34" charset="-120"/>
+              </a:rPr>
+              <a:t>18</a:t>
+            </a:r>
+            <a:endParaRPr lang="en-US" sz="1100" dirty="0"/>
+          </a:p>
+        </p:txBody>
+      </p:sp>
+    </p:spTree>
+  </p:cSld>
+  <p:clrMapOvr>
+    <a:masterClrMapping/>
+  </p:clrMapOvr>
+</p:sld>
+</file>
+
+<file path=ppt/slides/slide21.xml><?xml version="1.0" encoding="utf-8"?>
+<p:sld xmlns:a="http://schemas.openxmlformats.org/drawingml/2006/main" xmlns:r="http://schemas.openxmlformats.org/officeDocument/2006/relationships" xmlns:p="http://schemas.openxmlformats.org/presentationml/2006/main">
+  <p:cSld>
+    <p:bg>
+      <p:bgPr>
+        <a:solidFill>
+          <a:srgbClr val="FFFFFF"/>
+        </a:solidFill>
+        <a:effectLst/>
+      </p:bgPr>
+    </p:bg>
+    <p:spTree>
+      <p:nvGrpSpPr>
+        <p:cNvPr id="1" name=""/>
+        <p:cNvGrpSpPr/>
+        <p:nvPr/>
+      </p:nvGrpSpPr>
+      <p:grpSpPr>
+        <a:xfrm>
+          <a:off x="0" y="0"/>
+          <a:ext cx="0" cy="0"/>
+          <a:chOff x="0" y="0"/>
+          <a:chExt cx="0" cy="0"/>
+        </a:xfrm>
+      </p:grpSpPr>
+      <p:sp>
+        <p:nvSpPr>
+          <p:cNvPr id="2" name="Text 0"/>
+          <p:cNvSpPr/>
+          <p:nvPr/>
+        </p:nvSpPr>
+        <p:spPr>
+          <a:xfrm>
+            <a:off x="548640" y="384048"/>
+            <a:ext cx="11091672" cy="274320"/>
+          </a:xfrm>
+          <a:prstGeom prst="rect">
+            <a:avLst/>
+          </a:prstGeom>
+          <a:noFill/>
+        </p:spPr>
+        <p:txBody>
+          <a:bodyPr wrap="square" lIns="0" tIns="0" rIns="0" bIns="0" rtlCol="0" anchor="ctr"/>
+          <a:lstStyle/>
+          <a:p>
+            <a:pPr marL="0" indent="0">
+              <a:buNone/>
+            </a:pPr>
+            <a:r>
+              <a:rPr lang="en-US" sz="1200" b="1" kern="0" spc="200" dirty="0">
+                <a:solidFill>
+                  <a:srgbClr val="1B998B"/>
+                </a:solidFill>
+                <a:latin typeface="Calibri" pitchFamily="34" charset="0"/>
+                <a:ea typeface="Calibri" pitchFamily="34" charset="-122"/>
+                <a:cs typeface="Calibri" pitchFamily="34" charset="-120"/>
+              </a:rPr>
+              <a:t>LIMITATIONS &amp; NEXT STEPS</a:t>
+            </a:r>
+            <a:endParaRPr lang="en-US" sz="1200" dirty="0"/>
+          </a:p>
+        </p:txBody>
+      </p:sp>
+      <p:sp>
+        <p:nvSpPr>
+          <p:cNvPr id="3" name="Text 1"/>
+          <p:cNvSpPr/>
+          <p:nvPr/>
+        </p:nvSpPr>
+        <p:spPr>
+          <a:xfrm>
+            <a:off x="548640" y="658368"/>
+            <a:ext cx="11091672" cy="685800"/>
+          </a:xfrm>
+          <a:prstGeom prst="rect">
+            <a:avLst/>
+          </a:prstGeom>
+          <a:noFill/>
+        </p:spPr>
+        <p:txBody>
+          <a:bodyPr wrap="square" lIns="0" tIns="0" rIns="0" bIns="0" rtlCol="0" anchor="ctr"/>
+          <a:lstStyle/>
+          <a:p>
+            <a:pPr marL="0" indent="0">
+              <a:buNone/>
+            </a:pPr>
+            <a:r>
+              <a:rPr lang="en-US" sz="2700" b="1" dirty="0">
+                <a:solidFill>
+                  <a:srgbClr val="13294B"/>
+                </a:solidFill>
+                <a:latin typeface="Georgia" panose="02040502050405090303" pitchFamily="34" charset="0"/>
+                <a:ea typeface="Georgia" panose="02040502050405090303" pitchFamily="34" charset="-122"/>
+                <a:cs typeface="Georgia" panose="02040502050405090303" pitchFamily="34" charset="-120"/>
+              </a:rPr>
+              <a:t>Honest Constraints and the Agenda Ahead</a:t>
+            </a:r>
+            <a:endParaRPr lang="en-US" sz="2700" dirty="0"/>
+          </a:p>
+        </p:txBody>
+      </p:sp>
+      <p:sp>
+        <p:nvSpPr>
+          <p:cNvPr id="4" name="Shape 2"/>
+          <p:cNvSpPr/>
+          <p:nvPr/>
+        </p:nvSpPr>
+        <p:spPr>
+          <a:xfrm>
+            <a:off x="548640" y="1508760"/>
+            <a:ext cx="5362956" cy="4297680"/>
+          </a:xfrm>
+          <a:prstGeom prst="rect">
+            <a:avLst/>
+          </a:prstGeom>
+          <a:solidFill>
+            <a:srgbClr val="F4F6FA"/>
+          </a:solidFill>
+          <a:effectLst>
+            <a:outerShdw blurRad="88900" dist="38100" dir="8100000" algn="bl" rotWithShape="0">
+              <a:srgbClr val="000000">
+                <a:alpha val="13000"/>
+              </a:srgbClr>
+            </a:outerShdw>
+          </a:effectLst>
+        </p:spPr>
+      </p:sp>
+      <p:sp>
+        <p:nvSpPr>
+          <p:cNvPr id="5" name="Shape 3"/>
+          <p:cNvSpPr/>
+          <p:nvPr/>
+        </p:nvSpPr>
+        <p:spPr>
+          <a:xfrm>
+            <a:off x="548640" y="1508760"/>
+            <a:ext cx="82296" cy="4297680"/>
+          </a:xfrm>
+          <a:prstGeom prst="rect">
+            <a:avLst/>
+          </a:prstGeom>
+          <a:solidFill>
+            <a:srgbClr val="C1121F"/>
+          </a:solidFill>
+        </p:spPr>
+      </p:sp>
+      <p:sp>
+        <p:nvSpPr>
+          <p:cNvPr id="6" name="Text 4"/>
+          <p:cNvSpPr/>
+          <p:nvPr/>
+        </p:nvSpPr>
+        <p:spPr>
+          <a:xfrm>
+            <a:off x="804672" y="1645920"/>
+            <a:ext cx="4905756" cy="365760"/>
+          </a:xfrm>
+          <a:prstGeom prst="rect">
+            <a:avLst/>
+          </a:prstGeom>
+          <a:noFill/>
+        </p:spPr>
+        <p:txBody>
+          <a:bodyPr wrap="square" lIns="0" tIns="0" rIns="0" bIns="0" rtlCol="0" anchor="ctr"/>
+          <a:lstStyle/>
+          <a:p>
+            <a:pPr marL="0" indent="0">
+              <a:buNone/>
+            </a:pPr>
+            <a:r>
+              <a:rPr lang="en-US" sz="1700" b="1" dirty="0">
+                <a:solidFill>
+                  <a:srgbClr val="C1121F"/>
+                </a:solidFill>
+                <a:latin typeface="Georgia" panose="02040502050405090303" pitchFamily="34" charset="0"/>
+                <a:ea typeface="Georgia" panose="02040502050405090303" pitchFamily="34" charset="-122"/>
+                <a:cs typeface="Georgia" panose="02040502050405090303" pitchFamily="34" charset="-120"/>
+              </a:rPr>
+              <a:t>Limitations</a:t>
+            </a:r>
+            <a:endParaRPr lang="en-US" sz="1700" dirty="0"/>
+          </a:p>
+        </p:txBody>
+      </p:sp>
+      <p:sp>
+        <p:nvSpPr>
+          <p:cNvPr id="7" name="Text 5"/>
+          <p:cNvSpPr/>
+          <p:nvPr/>
+        </p:nvSpPr>
+        <p:spPr>
+          <a:xfrm>
+            <a:off x="804672" y="2103120"/>
+            <a:ext cx="4860036" cy="3657600"/>
+          </a:xfrm>
+          <a:prstGeom prst="rect">
+            <a:avLst/>
+          </a:prstGeom>
+          <a:noFill/>
+        </p:spPr>
+        <p:txBody>
+          <a:bodyPr wrap="square" lIns="0" tIns="0" rIns="0" bIns="0" rtlCol="0" anchor="ctr"/>
+          <a:lstStyle/>
+          <a:p>
+            <a:pPr marL="342900" indent="-342900">
+              <a:spcAft>
+                <a:spcPts val="900"/>
+              </a:spcAft>
+              <a:buSzPct val="100000"/>
+              <a:buChar char="•"/>
+            </a:pPr>
+            <a:r>
+              <a:rPr lang="en-US" sz="1300" dirty="0">
+                <a:solidFill>
+                  <a:srgbClr val="33425C"/>
+                </a:solidFill>
+                <a:latin typeface="Calibri" pitchFamily="34" charset="0"/>
+                <a:ea typeface="Calibri" pitchFamily="34" charset="-122"/>
+                <a:cs typeface="Calibri" pitchFamily="34" charset="-120"/>
+              </a:rPr>
+              <a:t>N = 51 months limits power for threshold confirmation.</a:t>
+            </a:r>
+            <a:endParaRPr lang="en-US" sz="1300" dirty="0"/>
+          </a:p>
+          <a:p>
+            <a:pPr marL="342900" indent="-342900">
+              <a:spcAft>
+                <a:spcPts val="900"/>
+              </a:spcAft>
+              <a:buSzPct val="100000"/>
+              <a:buChar char="•"/>
+            </a:pPr>
+            <a:r>
+              <a:rPr lang="en-US" sz="1300" dirty="0">
+                <a:solidFill>
+                  <a:srgbClr val="33425C"/>
+                </a:solidFill>
+                <a:latin typeface="Calibri" pitchFamily="34" charset="0"/>
+                <a:ea typeface="Calibri" pitchFamily="34" charset="-122"/>
+                <a:cs typeface="Calibri" pitchFamily="34" charset="-120"/>
+              </a:rPr>
+              <a:t>L forward-filled for ~13 months (Tether quarterly attestations).</a:t>
+            </a:r>
+            <a:endParaRPr lang="en-US" sz="1300" dirty="0"/>
+          </a:p>
+          <a:p>
+            <a:pPr marL="342900" indent="-342900">
+              <a:spcAft>
+                <a:spcPts val="900"/>
+              </a:spcAft>
+              <a:buSzPct val="100000"/>
+              <a:buChar char="•"/>
+            </a:pPr>
+            <a:r>
+              <a:rPr lang="en-US" sz="1300" dirty="0">
+                <a:solidFill>
+                  <a:srgbClr val="33425C"/>
+                </a:solidFill>
+                <a:latin typeface="Calibri" pitchFamily="34" charset="0"/>
+                <a:ea typeface="Calibri" pitchFamily="34" charset="-122"/>
+                <a:cs typeface="Calibri" pitchFamily="34" charset="-120"/>
+              </a:rPr>
+              <a:t>Spread benchmark still overnight SOFR — finish with 3-mo Term SOFR.</a:t>
+            </a:r>
+            <a:endParaRPr lang="en-US" sz="1300" dirty="0"/>
+          </a:p>
+          <a:p>
+            <a:pPr marL="342900" indent="-342900">
+              <a:spcAft>
+                <a:spcPts val="900"/>
+              </a:spcAft>
+              <a:buSzPct val="100000"/>
+              <a:buChar char="•"/>
+            </a:pPr>
+            <a:r>
+              <a:rPr lang="en-US" sz="1300" dirty="0">
+                <a:solidFill>
+                  <a:srgbClr val="33425C"/>
+                </a:solidFill>
+                <a:latin typeface="Calibri" pitchFamily="34" charset="0"/>
+                <a:ea typeface="Calibri" pitchFamily="34" charset="-122"/>
+                <a:cs typeface="Calibri" pitchFamily="34" charset="-120"/>
+              </a:rPr>
+              <a:t>Endogeneity not fully resolved (Granger addresses, doesn’t solve).</a:t>
+            </a:r>
+            <a:endParaRPr lang="en-US" sz="1300" dirty="0"/>
+          </a:p>
+          <a:p>
+            <a:pPr marL="342900" indent="-342900">
+              <a:spcAft>
+                <a:spcPts val="900"/>
+              </a:spcAft>
+              <a:buSzPct val="100000"/>
+              <a:buChar char="•"/>
+            </a:pPr>
+            <a:r>
+              <a:rPr lang="en-US" sz="1300" dirty="0">
+                <a:solidFill>
+                  <a:srgbClr val="33425C"/>
+                </a:solidFill>
+                <a:latin typeface="Calibri" pitchFamily="34" charset="0"/>
+                <a:ea typeface="Calibri" pitchFamily="34" charset="-122"/>
+                <a:cs typeface="Calibri" pitchFamily="34" charset="-120"/>
+              </a:rPr>
+              <a:t>Only 3 stress events; FOMC contamination in 2 of 3.</a:t>
+            </a:r>
+            <a:endParaRPr lang="en-US" sz="1300" dirty="0"/>
+          </a:p>
+          <a:p>
+            <a:pPr marL="342900" indent="-342900">
+              <a:spcAft>
+                <a:spcPts val="900"/>
+              </a:spcAft>
+              <a:buSzPct val="100000"/>
+              <a:buChar char="•"/>
+            </a:pPr>
+            <a:r>
+              <a:rPr lang="en-US" sz="1300" dirty="0">
+                <a:solidFill>
+                  <a:srgbClr val="33425C"/>
+                </a:solidFill>
+                <a:latin typeface="Calibri" pitchFamily="34" charset="0"/>
+                <a:ea typeface="Calibri" pitchFamily="34" charset="-122"/>
+                <a:cs typeface="Calibri" pitchFamily="34" charset="-120"/>
+              </a:rPr>
+              <a:t>Sample Jan 2022 – Mar 2026; may not generalize past 2026.</a:t>
+            </a:r>
+            <a:endParaRPr lang="en-US" sz="1300" dirty="0"/>
+          </a:p>
+        </p:txBody>
+      </p:sp>
+      <p:sp>
+        <p:nvSpPr>
+          <p:cNvPr id="8" name="Shape 6"/>
+          <p:cNvSpPr/>
+          <p:nvPr/>
+        </p:nvSpPr>
+        <p:spPr>
+          <a:xfrm>
+            <a:off x="6277356" y="1508760"/>
+            <a:ext cx="5362956" cy="4297680"/>
+          </a:xfrm>
+          <a:prstGeom prst="rect">
+            <a:avLst/>
+          </a:prstGeom>
+          <a:solidFill>
+            <a:srgbClr val="F4F6FA"/>
+          </a:solidFill>
+          <a:effectLst>
+            <a:outerShdw blurRad="88900" dist="38100" dir="8100000" algn="bl" rotWithShape="0">
+              <a:srgbClr val="000000">
+                <a:alpha val="13000"/>
+              </a:srgbClr>
+            </a:outerShdw>
+          </a:effectLst>
+        </p:spPr>
+      </p:sp>
+      <p:sp>
+        <p:nvSpPr>
+          <p:cNvPr id="9" name="Shape 7"/>
+          <p:cNvSpPr/>
+          <p:nvPr/>
+        </p:nvSpPr>
+        <p:spPr>
+          <a:xfrm>
+            <a:off x="6277356" y="1508760"/>
+            <a:ext cx="82296" cy="4297680"/>
+          </a:xfrm>
+          <a:prstGeom prst="rect">
+            <a:avLst/>
+          </a:prstGeom>
+          <a:solidFill>
+            <a:srgbClr val="1B998B"/>
+          </a:solidFill>
+        </p:spPr>
+      </p:sp>
+      <p:sp>
+        <p:nvSpPr>
+          <p:cNvPr id="10" name="Text 8"/>
+          <p:cNvSpPr/>
+          <p:nvPr/>
+        </p:nvSpPr>
+        <p:spPr>
+          <a:xfrm>
+            <a:off x="6533388" y="1645920"/>
+            <a:ext cx="4905756" cy="365760"/>
+          </a:xfrm>
+          <a:prstGeom prst="rect">
+            <a:avLst/>
+          </a:prstGeom>
+          <a:noFill/>
+        </p:spPr>
+        <p:txBody>
+          <a:bodyPr wrap="square" lIns="0" tIns="0" rIns="0" bIns="0" rtlCol="0" anchor="ctr"/>
+          <a:lstStyle/>
+          <a:p>
+            <a:pPr marL="0" indent="0">
+              <a:buNone/>
+            </a:pPr>
+            <a:r>
+              <a:rPr lang="en-US" sz="1700" b="1" dirty="0">
+                <a:solidFill>
+                  <a:srgbClr val="1B998B"/>
+                </a:solidFill>
+                <a:latin typeface="Georgia" panose="02040502050405090303" pitchFamily="34" charset="0"/>
+                <a:ea typeface="Georgia" panose="02040502050405090303" pitchFamily="34" charset="-122"/>
+                <a:cs typeface="Georgia" panose="02040502050405090303" pitchFamily="34" charset="-120"/>
+              </a:rPr>
+              <a:t>Next steps</a:t>
+            </a:r>
+            <a:endParaRPr lang="en-US" sz="1700" dirty="0"/>
+          </a:p>
+        </p:txBody>
+      </p:sp>
+      <p:sp>
+        <p:nvSpPr>
+          <p:cNvPr id="11" name="Text 9"/>
+          <p:cNvSpPr/>
+          <p:nvPr/>
+        </p:nvSpPr>
+        <p:spPr>
+          <a:xfrm>
+            <a:off x="6533388" y="2103120"/>
+            <a:ext cx="4494276" cy="3657600"/>
+          </a:xfrm>
+          <a:prstGeom prst="rect">
+            <a:avLst/>
+          </a:prstGeom>
+          <a:noFill/>
+        </p:spPr>
+        <p:txBody>
+          <a:bodyPr wrap="square" lIns="0" tIns="0" rIns="0" bIns="0" rtlCol="0" anchor="ctr"/>
+          <a:lstStyle/>
+          <a:p>
+            <a:pPr marL="342900" indent="-342900">
+              <a:spcAft>
+                <a:spcPts val="900"/>
+              </a:spcAft>
+              <a:buSzPct val="100000"/>
+              <a:buChar char="•"/>
+            </a:pPr>
+            <a:r>
+              <a:rPr lang="en-US" sz="1300" dirty="0">
+                <a:solidFill>
+                  <a:srgbClr val="33425C"/>
+                </a:solidFill>
+                <a:latin typeface="Calibri" pitchFamily="34" charset="0"/>
+                <a:ea typeface="Calibri" pitchFamily="34" charset="-122"/>
+                <a:cs typeface="Calibri" pitchFamily="34" charset="-120"/>
+              </a:rPr>
+              <a:t>Longer sample as attestations accumulate → power improves.</a:t>
+            </a:r>
+            <a:endParaRPr lang="en-US" sz="1300" dirty="0"/>
+          </a:p>
+          <a:p>
+            <a:pPr marL="342900" indent="-342900">
+              <a:spcAft>
+                <a:spcPts val="900"/>
+              </a:spcAft>
+              <a:buSzPct val="100000"/>
+              <a:buChar char="•"/>
+            </a:pPr>
+            <a:r>
+              <a:rPr lang="en-US" sz="1300" dirty="0">
+                <a:solidFill>
+                  <a:srgbClr val="33425C"/>
+                </a:solidFill>
+                <a:latin typeface="Calibri" pitchFamily="34" charset="0"/>
+                <a:ea typeface="Calibri" pitchFamily="34" charset="-122"/>
+                <a:cs typeface="Calibri" pitchFamily="34" charset="-120"/>
+              </a:rPr>
+              <a:t>Better identification: instrument supply with regulatory announcements.</a:t>
+            </a:r>
+            <a:endParaRPr lang="en-US" sz="1300" dirty="0"/>
+          </a:p>
+          <a:p>
+            <a:pPr marL="342900" indent="-342900">
+              <a:spcAft>
+                <a:spcPts val="900"/>
+              </a:spcAft>
+              <a:buSzPct val="100000"/>
+              <a:buChar char="•"/>
+            </a:pPr>
+            <a:r>
+              <a:rPr lang="en-US" sz="1300" dirty="0">
+                <a:solidFill>
+                  <a:srgbClr val="33425C"/>
+                </a:solidFill>
+                <a:latin typeface="Calibri" pitchFamily="34" charset="0"/>
+                <a:ea typeface="Calibri" pitchFamily="34" charset="-122"/>
+                <a:cs typeface="Calibri" pitchFamily="34" charset="-120"/>
+              </a:rPr>
+              <a:t>High-frequency: daily spread + daily supply for cleaner events.</a:t>
+            </a:r>
+            <a:endParaRPr lang="en-US" sz="1300" dirty="0"/>
+          </a:p>
+          <a:p>
+            <a:pPr marL="342900" indent="-342900">
+              <a:spcAft>
+                <a:spcPts val="900"/>
+              </a:spcAft>
+              <a:buSzPct val="100000"/>
+              <a:buChar char="•"/>
+            </a:pPr>
+            <a:r>
+              <a:rPr lang="en-US" sz="1300" dirty="0">
+                <a:solidFill>
+                  <a:srgbClr val="33425C"/>
+                </a:solidFill>
+                <a:latin typeface="Calibri" pitchFamily="34" charset="0"/>
+                <a:ea typeface="Calibri" pitchFamily="34" charset="-122"/>
+                <a:cs typeface="Calibri" pitchFamily="34" charset="-120"/>
+              </a:rPr>
+              <a:t>Non-USD ecosystems: euro stablecoins, CBDC interactions.</a:t>
+            </a:r>
+            <a:endParaRPr lang="en-US" sz="1300" dirty="0"/>
+          </a:p>
+          <a:p>
+            <a:pPr marL="342900" indent="-342900">
+              <a:spcAft>
+                <a:spcPts val="900"/>
+              </a:spcAft>
+              <a:buSzPct val="100000"/>
+              <a:buChar char="•"/>
+            </a:pPr>
+            <a:r>
+              <a:rPr lang="en-US" sz="1300" dirty="0">
+                <a:solidFill>
+                  <a:srgbClr val="33425C"/>
+                </a:solidFill>
+                <a:latin typeface="Calibri" pitchFamily="34" charset="0"/>
+                <a:ea typeface="Calibri" pitchFamily="34" charset="-122"/>
+                <a:cs typeface="Calibri" pitchFamily="34" charset="-120"/>
+              </a:rPr>
+              <a:t>Cross-country: does the same mechanism hold for EUR safe assets?</a:t>
+            </a:r>
+            <a:endParaRPr lang="en-US" sz="1300" dirty="0"/>
+          </a:p>
+        </p:txBody>
+      </p:sp>
+      <p:sp>
+        <p:nvSpPr>
+          <p:cNvPr id="12" name="Text 10"/>
+          <p:cNvSpPr/>
+          <p:nvPr/>
+        </p:nvSpPr>
+        <p:spPr>
+          <a:xfrm>
+            <a:off x="548640" y="6455664"/>
+            <a:ext cx="7315200" cy="274320"/>
+          </a:xfrm>
+          <a:prstGeom prst="rect">
+            <a:avLst/>
+          </a:prstGeom>
+          <a:noFill/>
+        </p:spPr>
+        <p:txBody>
+          <a:bodyPr wrap="square" lIns="0" tIns="0" rIns="0" bIns="0" rtlCol="0" anchor="ctr"/>
+          <a:lstStyle/>
+          <a:p>
+            <a:pPr marL="0" indent="0">
+              <a:buNone/>
+            </a:pPr>
+            <a:r>
+              <a:rPr lang="en-US" sz="900" dirty="0">
+                <a:solidFill>
+                  <a:srgbClr val="5B6B82"/>
+                </a:solidFill>
+                <a:latin typeface="Calibri" pitchFamily="34" charset="0"/>
+                <a:ea typeface="Calibri" pitchFamily="34" charset="-122"/>
+                <a:cs typeface="Calibri" pitchFamily="34" charset="-120"/>
+              </a:rPr>
+              <a:t>Stablecoins &amp; the Exorbitant Privilege</a:t>
+            </a:r>
+            <a:endParaRPr lang="en-US" sz="900" dirty="0"/>
+          </a:p>
+        </p:txBody>
+      </p:sp>
+      <p:sp>
+        <p:nvSpPr>
+          <p:cNvPr id="13" name="Text 11"/>
+          <p:cNvSpPr/>
+          <p:nvPr/>
+        </p:nvSpPr>
+        <p:spPr>
+          <a:xfrm>
+            <a:off x="11274552" y="6400800"/>
+            <a:ext cx="365760" cy="274320"/>
+          </a:xfrm>
+          <a:prstGeom prst="rect">
+            <a:avLst/>
+          </a:prstGeom>
+          <a:noFill/>
+        </p:spPr>
+        <p:txBody>
+          <a:bodyPr wrap="square" lIns="0" tIns="0" rIns="0" bIns="0" rtlCol="0" anchor="ctr"/>
+          <a:lstStyle/>
+          <a:p>
+            <a:pPr marL="0" indent="0" algn="r">
+              <a:buNone/>
+            </a:pPr>
+            <a:r>
+              <a:rPr lang="en-US" sz="1100" dirty="0">
+                <a:solidFill>
+                  <a:srgbClr val="5B6B82"/>
+                </a:solidFill>
+                <a:latin typeface="Calibri" pitchFamily="34" charset="0"/>
+                <a:ea typeface="Calibri" pitchFamily="34" charset="-122"/>
+                <a:cs typeface="Calibri" pitchFamily="34" charset="-120"/>
+              </a:rPr>
+              <a:t>19</a:t>
+            </a:r>
+            <a:endParaRPr lang="en-US" sz="1100" dirty="0"/>
+          </a:p>
+        </p:txBody>
+      </p:sp>
+    </p:spTree>
+  </p:cSld>
+  <p:clrMapOvr>
+    <a:masterClrMapping/>
+  </p:clrMapOvr>
+</p:sld>
+</file>
+
+<file path=ppt/slides/slide22.xml><?xml version="1.0" encoding="utf-8"?>
 <p:sld xmlns:a="http://schemas.openxmlformats.org/drawingml/2006/main" xmlns:r="http://schemas.openxmlformats.org/officeDocument/2006/relationships" xmlns:p="http://schemas.openxmlformats.org/presentationml/2006/main">
   <p:cSld>
     <p:bg>
@@ -20000,14 +21267,6 @@
 <file path=ppt/slides/slide9.xml><?xml version="1.0" encoding="utf-8"?>
 <p:sld xmlns:a="http://schemas.openxmlformats.org/drawingml/2006/main" xmlns:r="http://schemas.openxmlformats.org/officeDocument/2006/relationships" xmlns:p="http://schemas.openxmlformats.org/presentationml/2006/main">
   <p:cSld>
-    <p:bg>
-      <p:bgPr>
-        <a:solidFill>
-          <a:srgbClr val="FFFFFF"/>
-        </a:solidFill>
-        <a:effectLst/>
-      </p:bgPr>
-    </p:bg>
     <p:spTree>
       <p:nvGrpSpPr>
         <p:cNvPr id="1" name=""/>
@@ -20054,7 +21313,7 @@
                 <a:ea typeface="Calibri" pitchFamily="34" charset="-122"/>
                 <a:cs typeface="Calibri" pitchFamily="34" charset="-120"/>
               </a:rPr>
-              <a:t>INTUITION</a:t>
+              <a:t>DATA — KEY VARIABLES OVER TIME</a:t>
             </a:r>
             <a:endParaRPr lang="en-US" sz="1200" dirty="0"/>
           </a:p>
@@ -20092,60 +21351,46 @@
                 <a:ea typeface="Georgia" panose="02040502050405090303" pitchFamily="34" charset="-122"/>
                 <a:cs typeface="Georgia" panose="02040502050405090303" pitchFamily="34" charset="-120"/>
               </a:rPr>
-              <a:t>What the Buffer Condition Means</a:t>
+              <a:t>Spread, Supply, and the Liquid Buffer (2022–2026)</a:t>
             </a:r>
             <a:endParaRPr lang="en-US" sz="2700" dirty="0"/>
           </a:p>
         </p:txBody>
       </p:sp>
-      <p:sp>
-        <p:nvSpPr>
-          <p:cNvPr id="4" name="Text 2"/>
-          <p:cNvSpPr/>
-          <p:nvPr/>
-        </p:nvSpPr>
+      <p:pic>
+        <p:nvPicPr>
+          <p:cNvPr id="4" name="Image 0" descr="figs/image3.png"/>
+          <p:cNvPicPr>
+            <a:picLocks noChangeAspect="1"/>
+          </p:cNvPicPr>
+          <p:nvPr/>
+        </p:nvPicPr>
+        <p:blipFill>
+          <a:blip r:embed="rId1"/>
+          <a:stretch>
+            <a:fillRect/>
+          </a:stretch>
+        </p:blipFill>
         <p:spPr>
           <a:xfrm>
             <a:off x="548640" y="1417320"/>
-            <a:ext cx="11091672" cy="365760"/>
-          </a:xfrm>
-          <a:prstGeom prst="rect">
-            <a:avLst/>
-          </a:prstGeom>
-          <a:noFill/>
-        </p:spPr>
-        <p:txBody>
-          <a:bodyPr wrap="square" lIns="0" tIns="0" rIns="0" bIns="0" rtlCol="0" anchor="ctr"/>
-          <a:lstStyle/>
-          <a:p>
-            <a:pPr marL="0" indent="0">
-              <a:buNone/>
-            </a:pPr>
-            <a:r>
-              <a:rPr lang="en-US" sz="1500" i="1" dirty="0">
-                <a:solidFill>
-                  <a:srgbClr val="5B6B82"/>
-                </a:solidFill>
-                <a:latin typeface="Georgia" panose="02040502050405090303" pitchFamily="34" charset="0"/>
-                <a:ea typeface="Georgia" panose="02040502050405090303" pitchFamily="34" charset="-122"/>
-                <a:cs typeface="Georgia" panose="02040502050405090303" pitchFamily="34" charset="-120"/>
-              </a:rPr>
-              <a:t>L = liquid buffer = cash &amp; cash-equivalents ÷ total supply.   Estimated regime break: L* ≈ 13%.</a:t>
-            </a:r>
-            <a:endParaRPr lang="en-US" sz="1500" dirty="0"/>
-          </a:p>
-        </p:txBody>
-      </p:sp>
-      <p:sp>
-        <p:nvSpPr>
-          <p:cNvPr id="5" name="Shape 3"/>
-          <p:cNvSpPr/>
-          <p:nvPr/>
-        </p:nvSpPr>
-        <p:spPr>
-          <a:xfrm>
-            <a:off x="548640" y="2011680"/>
-            <a:ext cx="5362956" cy="3657600"/>
+            <a:ext cx="6400800" cy="4685798"/>
+          </a:xfrm>
+          <a:prstGeom prst="rect">
+            <a:avLst/>
+          </a:prstGeom>
+        </p:spPr>
+      </p:pic>
+      <p:sp>
+        <p:nvSpPr>
+          <p:cNvPr id="5" name="Shape 2"/>
+          <p:cNvSpPr/>
+          <p:nvPr/>
+        </p:nvSpPr>
+        <p:spPr>
+          <a:xfrm>
+            <a:off x="7315200" y="1554480"/>
+            <a:ext cx="4325112" cy="1828800"/>
           </a:xfrm>
           <a:prstGeom prst="rect">
             <a:avLst/>
@@ -20164,33 +21409,33 @@
       </p:sp>
       <p:sp>
         <p:nvSpPr>
-          <p:cNvPr id="6" name="Shape 4"/>
-          <p:cNvSpPr/>
-          <p:nvPr/>
-        </p:nvSpPr>
-        <p:spPr>
-          <a:xfrm>
-            <a:off x="548640" y="2011680"/>
-            <a:ext cx="82296" cy="3657600"/>
+          <p:cNvPr id="6" name="Shape 3"/>
+          <p:cNvSpPr/>
+          <p:nvPr/>
+        </p:nvSpPr>
+        <p:spPr>
+          <a:xfrm>
+            <a:off x="7315200" y="1554480"/>
+            <a:ext cx="82296" cy="1828800"/>
           </a:xfrm>
           <a:prstGeom prst="rect">
             <a:avLst/>
           </a:prstGeom>
           <a:solidFill>
-            <a:srgbClr val="C1121F"/>
+            <a:srgbClr val="1B998B"/>
           </a:solidFill>
         </p:spPr>
       </p:sp>
       <p:sp>
         <p:nvSpPr>
-          <p:cNvPr id="7" name="Text 5"/>
-          <p:cNvSpPr/>
-          <p:nvPr/>
-        </p:nvSpPr>
-        <p:spPr>
-          <a:xfrm>
-            <a:off x="804672" y="2148840"/>
-            <a:ext cx="4905756" cy="365760"/>
+          <p:cNvPr id="7" name="Text 4"/>
+          <p:cNvSpPr/>
+          <p:nvPr/>
+        </p:nvSpPr>
+        <p:spPr>
+          <a:xfrm>
+            <a:off x="7543800" y="1664208"/>
+            <a:ext cx="3867912" cy="320040"/>
           </a:xfrm>
           <a:prstGeom prst="rect">
             <a:avLst/>
@@ -20205,30 +21450,30 @@
               <a:buNone/>
             </a:pPr>
             <a:r>
-              <a:rPr lang="en-US" sz="1700" b="1" dirty="0">
-                <a:solidFill>
-                  <a:srgbClr val="C1121F"/>
+              <a:rPr lang="en-US" sz="1400" b="1" dirty="0">
+                <a:solidFill>
+                  <a:srgbClr val="13294B"/>
                 </a:solidFill>
                 <a:latin typeface="Georgia" panose="02040502050405090303" pitchFamily="34" charset="0"/>
                 <a:ea typeface="Georgia" panose="02040502050405090303" pitchFamily="34" charset="-122"/>
                 <a:cs typeface="Georgia" panose="02040502050405090303" pitchFamily="34" charset="-120"/>
               </a:rPr>
-              <a:t>LOW BUFFER  (L &lt; 13%)</a:t>
-            </a:r>
-            <a:endParaRPr lang="en-US" sz="1700" dirty="0"/>
-          </a:p>
-        </p:txBody>
-      </p:sp>
-      <p:sp>
-        <p:nvSpPr>
-          <p:cNvPr id="8" name="Text 6"/>
-          <p:cNvSpPr/>
-          <p:nvPr/>
-        </p:nvSpPr>
-        <p:spPr>
-          <a:xfrm>
-            <a:off x="804672" y="2542032"/>
-            <a:ext cx="4905756" cy="274320"/>
+              <a:t>How to read it</a:t>
+            </a:r>
+            <a:endParaRPr lang="en-US" sz="1400" dirty="0"/>
+          </a:p>
+        </p:txBody>
+      </p:sp>
+      <p:sp>
+        <p:nvSpPr>
+          <p:cNvPr id="8" name="Text 5"/>
+          <p:cNvSpPr/>
+          <p:nvPr/>
+        </p:nvSpPr>
+        <p:spPr>
+          <a:xfrm>
+            <a:off x="7543800" y="2011680"/>
+            <a:ext cx="3867912" cy="1280160"/>
           </a:xfrm>
           <a:prstGeom prst="rect">
             <a:avLst/>
@@ -20240,18 +21485,76 @@
           <a:lstStyle/>
           <a:p>
             <a:pPr marL="0" indent="0">
-              <a:buNone/>
-            </a:pPr>
-            <a:r>
-              <a:rPr lang="en-US" sz="1200" i="1" dirty="0">
-                <a:solidFill>
-                  <a:srgbClr val="5B6B82"/>
-                </a:solidFill>
-                <a:latin typeface="Calibri" pitchFamily="34" charset="0"/>
-                <a:ea typeface="Calibri" pitchFamily="34" charset="-122"/>
-                <a:cs typeface="Calibri" pitchFamily="34" charset="-120"/>
-              </a:rPr>
-              <a:t>e.g. Tether, May 2022: ~5–8% cash</a:t>
+              <a:lnSpc>
+                <a:spcPct val="110000"/>
+              </a:lnSpc>
+              <a:buNone/>
+            </a:pPr>
+            <a:r>
+              <a:rPr lang="en-US" sz="1200" b="1" dirty="0">
+                <a:solidFill>
+                  <a:srgbClr val="13294B"/>
+                </a:solidFill>
+                <a:latin typeface="Calibri" pitchFamily="34" charset="0"/>
+                <a:ea typeface="Calibri" pitchFamily="34" charset="-122"/>
+                <a:cs typeface="Calibri" pitchFamily="34" charset="-120"/>
+              </a:rPr>
+              <a:t>A </a:t>
+            </a:r>
+            <a:r>
+              <a:rPr lang="en-US" sz="1200" dirty="0">
+                <a:solidFill>
+                  <a:srgbClr val="33425C"/>
+                </a:solidFill>
+                <a:latin typeface="Calibri" pitchFamily="34" charset="0"/>
+                <a:ea typeface="Calibri" pitchFamily="34" charset="-122"/>
+                <a:cs typeface="Calibri" pitchFamily="34" charset="-120"/>
+              </a:rPr>
+              <a:t>— convenience-yield spread.   </a:t>
+            </a:r>
+            <a:r>
+              <a:rPr lang="en-US" sz="1200" b="1" dirty="0">
+                <a:solidFill>
+                  <a:srgbClr val="13294B"/>
+                </a:solidFill>
+                <a:latin typeface="Calibri" pitchFamily="34" charset="0"/>
+                <a:ea typeface="Calibri" pitchFamily="34" charset="-122"/>
+                <a:cs typeface="Calibri" pitchFamily="34" charset="-120"/>
+              </a:rPr>
+              <a:t>B </a:t>
+            </a:r>
+            <a:r>
+              <a:rPr lang="en-US" sz="1200" dirty="0">
+                <a:solidFill>
+                  <a:srgbClr val="33425C"/>
+                </a:solidFill>
+                <a:latin typeface="Calibri" pitchFamily="34" charset="0"/>
+                <a:ea typeface="Calibri" pitchFamily="34" charset="-122"/>
+                <a:cs typeface="Calibri" pitchFamily="34" charset="-120"/>
+              </a:rPr>
+              <a:t>— USDT+USDC supply, now ~$260B.   </a:t>
+            </a:r>
+            <a:r>
+              <a:rPr lang="en-US" sz="1200" b="1" dirty="0">
+                <a:solidFill>
+                  <a:srgbClr val="13294B"/>
+                </a:solidFill>
+                <a:latin typeface="Calibri" pitchFamily="34" charset="0"/>
+                <a:ea typeface="Calibri" pitchFamily="34" charset="-122"/>
+                <a:cs typeface="Calibri" pitchFamily="34" charset="-120"/>
+              </a:rPr>
+              <a:t>C </a:t>
+            </a:r>
+            <a:r>
+              <a:rPr lang="en-US" sz="1200" dirty="0">
+                <a:solidFill>
+                  <a:srgbClr val="33425C"/>
+                </a:solidFill>
+                <a:latin typeface="Calibri" pitchFamily="34" charset="0"/>
+                <a:ea typeface="Calibri" pitchFamily="34" charset="-122"/>
+                <a:cs typeface="Calibri" pitchFamily="34" charset="-120"/>
+              </a:rPr>
+              <a:t>— the buffer L, long stretches below the 13% line.</a:t>
             </a:r>
             <a:endParaRPr lang="en-US" sz="1200" dirty="0"/>
           </a:p>
@@ -20259,163 +21562,20 @@
       </p:sp>
       <p:sp>
         <p:nvSpPr>
-          <p:cNvPr id="9" name="Text 7"/>
-          <p:cNvSpPr/>
-          <p:nvPr/>
-        </p:nvSpPr>
-        <p:spPr>
-          <a:xfrm>
-            <a:off x="804672" y="2926080"/>
-            <a:ext cx="4860036" cy="2194560"/>
-          </a:xfrm>
-          <a:prstGeom prst="rect">
-            <a:avLst/>
-          </a:prstGeom>
-          <a:noFill/>
-        </p:spPr>
-        <p:txBody>
-          <a:bodyPr wrap="square" lIns="0" tIns="0" rIns="0" bIns="0" rtlCol="0" anchor="ctr"/>
-          <a:lstStyle/>
-          <a:p>
-            <a:pPr marL="342900" indent="-342900">
-              <a:spcAft>
-                <a:spcPts val="700"/>
-              </a:spcAft>
-              <a:buSzPct val="100000"/>
-              <a:buChar char="•"/>
-            </a:pPr>
-            <a:r>
-              <a:rPr lang="en-US" sz="1350" dirty="0">
-                <a:solidFill>
-                  <a:srgbClr val="33425C"/>
-                </a:solidFill>
-                <a:latin typeface="Calibri" pitchFamily="34" charset="0"/>
-                <a:ea typeface="Calibri" pitchFamily="34" charset="-122"/>
-                <a:cs typeface="Calibri" pitchFamily="34" charset="-120"/>
-              </a:rPr>
-              <a:t>Issuer holds mostly T-bills, very little cash</a:t>
-            </a:r>
-            <a:endParaRPr lang="en-US" sz="1350" dirty="0"/>
-          </a:p>
-          <a:p>
-            <a:pPr marL="342900" indent="-342900">
-              <a:spcAft>
-                <a:spcPts val="700"/>
-              </a:spcAft>
-              <a:buSzPct val="100000"/>
-              <a:buChar char="•"/>
-            </a:pPr>
-            <a:r>
-              <a:rPr lang="en-US" sz="1350" dirty="0">
-                <a:solidFill>
-                  <a:srgbClr val="33425C"/>
-                </a:solidFill>
-                <a:latin typeface="Calibri" pitchFamily="34" charset="0"/>
-                <a:ea typeface="Calibri" pitchFamily="34" charset="-122"/>
-                <a:cs typeface="Calibri" pitchFamily="34" charset="-120"/>
-              </a:rPr>
-              <a:t>Investors redeem → issuer MUST sell T-bills to raise cash</a:t>
-            </a:r>
-            <a:endParaRPr lang="en-US" sz="1350" dirty="0"/>
-          </a:p>
-          <a:p>
-            <a:pPr marL="342900" indent="-342900">
-              <a:spcAft>
-                <a:spcPts val="700"/>
-              </a:spcAft>
-              <a:buSzPct val="100000"/>
-              <a:buChar char="•"/>
-            </a:pPr>
-            <a:r>
-              <a:rPr lang="en-US" sz="1350" dirty="0">
-                <a:solidFill>
-                  <a:srgbClr val="33425C"/>
-                </a:solidFill>
-                <a:latin typeface="Calibri" pitchFamily="34" charset="0"/>
-                <a:ea typeface="Calibri" pitchFamily="34" charset="-122"/>
-                <a:cs typeface="Calibri" pitchFamily="34" charset="-120"/>
-              </a:rPr>
-              <a:t>Forced selling pushes T-bill yields UP</a:t>
-            </a:r>
-            <a:endParaRPr lang="en-US" sz="1350" dirty="0"/>
-          </a:p>
-          <a:p>
-            <a:pPr marL="342900" indent="-342900">
-              <a:spcAft>
-                <a:spcPts val="700"/>
-              </a:spcAft>
-              <a:buSzPct val="100000"/>
-              <a:buChar char="•"/>
-            </a:pPr>
-            <a:r>
-              <a:rPr lang="en-US" sz="1350" dirty="0">
-                <a:solidFill>
-                  <a:srgbClr val="33425C"/>
-                </a:solidFill>
-                <a:latin typeface="Calibri" pitchFamily="34" charset="0"/>
-                <a:ea typeface="Calibri" pitchFamily="34" charset="-122"/>
-                <a:cs typeface="Calibri" pitchFamily="34" charset="-120"/>
-              </a:rPr>
-              <a:t>Spread reverses — a forced seller into a stressed market</a:t>
-            </a:r>
-            <a:endParaRPr lang="en-US" sz="1350" dirty="0"/>
-          </a:p>
-        </p:txBody>
-      </p:sp>
-      <p:sp>
-        <p:nvSpPr>
-          <p:cNvPr id="10" name="Text 8"/>
-          <p:cNvSpPr/>
-          <p:nvPr/>
-        </p:nvSpPr>
-        <p:spPr>
-          <a:xfrm>
-            <a:off x="804672" y="5257800"/>
-            <a:ext cx="4905756" cy="320040"/>
-          </a:xfrm>
-          <a:prstGeom prst="rect">
-            <a:avLst/>
-          </a:prstGeom>
-          <a:noFill/>
-        </p:spPr>
-        <p:txBody>
-          <a:bodyPr wrap="square" lIns="0" tIns="0" rIns="0" bIns="0" rtlCol="0" anchor="ctr"/>
-          <a:lstStyle/>
-          <a:p>
-            <a:pPr marL="0" indent="0">
-              <a:buNone/>
-            </a:pPr>
-            <a:r>
-              <a:rPr lang="en-US" sz="1250" b="1" i="1" dirty="0">
-                <a:solidFill>
-                  <a:srgbClr val="C1121F"/>
-                </a:solidFill>
-                <a:latin typeface="Calibri" pitchFamily="34" charset="0"/>
-                <a:ea typeface="Calibri" pitchFamily="34" charset="-122"/>
-                <a:cs typeface="Calibri" pitchFamily="34" charset="-120"/>
-              </a:rPr>
-              <a:t>Issuer behaviour disrupts the Treasury market.</a:t>
-            </a:r>
-            <a:endParaRPr lang="en-US" sz="1250" dirty="0"/>
-          </a:p>
-        </p:txBody>
-      </p:sp>
-      <p:sp>
-        <p:nvSpPr>
-          <p:cNvPr id="11" name="Shape 9"/>
-          <p:cNvSpPr/>
-          <p:nvPr/>
-        </p:nvSpPr>
-        <p:spPr>
-          <a:xfrm>
-            <a:off x="6277356" y="2011680"/>
-            <a:ext cx="5362956" cy="3657600"/>
+          <p:cNvPr id="9" name="Shape 6"/>
+          <p:cNvSpPr/>
+          <p:nvPr/>
+        </p:nvSpPr>
+        <p:spPr>
+          <a:xfrm>
+            <a:off x="7315200" y="3566160"/>
+            <a:ext cx="4325112" cy="1828800"/>
           </a:xfrm>
           <a:prstGeom prst="rect">
             <a:avLst/>
           </a:prstGeom>
           <a:solidFill>
-            <a:srgbClr val="F4F6FA"/>
+            <a:srgbClr val="FBEEDD"/>
           </a:solidFill>
           <a:effectLst>
             <a:outerShdw blurRad="88900" dist="38100" dir="8100000" algn="bl" rotWithShape="0">
@@ -20428,33 +21588,33 @@
       </p:sp>
       <p:sp>
         <p:nvSpPr>
-          <p:cNvPr id="12" name="Shape 10"/>
-          <p:cNvSpPr/>
-          <p:nvPr/>
-        </p:nvSpPr>
-        <p:spPr>
-          <a:xfrm>
-            <a:off x="6277356" y="2011680"/>
-            <a:ext cx="82296" cy="3657600"/>
+          <p:cNvPr id="10" name="Shape 7"/>
+          <p:cNvSpPr/>
+          <p:nvPr/>
+        </p:nvSpPr>
+        <p:spPr>
+          <a:xfrm>
+            <a:off x="7315200" y="3566160"/>
+            <a:ext cx="82296" cy="1828800"/>
           </a:xfrm>
           <a:prstGeom prst="rect">
             <a:avLst/>
           </a:prstGeom>
           <a:solidFill>
-            <a:srgbClr val="1B998B"/>
+            <a:srgbClr val="E8A12C"/>
           </a:solidFill>
         </p:spPr>
       </p:sp>
       <p:sp>
         <p:nvSpPr>
-          <p:cNvPr id="13" name="Text 11"/>
-          <p:cNvSpPr/>
-          <p:nvPr/>
-        </p:nvSpPr>
-        <p:spPr>
-          <a:xfrm>
-            <a:off x="6533388" y="2148840"/>
-            <a:ext cx="4905756" cy="365760"/>
+          <p:cNvPr id="11" name="Text 8"/>
+          <p:cNvSpPr/>
+          <p:nvPr/>
+        </p:nvSpPr>
+        <p:spPr>
+          <a:xfrm>
+            <a:off x="7543800" y="3675888"/>
+            <a:ext cx="3867912" cy="320040"/>
           </a:xfrm>
           <a:prstGeom prst="rect">
             <a:avLst/>
@@ -20469,30 +21629,30 @@
               <a:buNone/>
             </a:pPr>
             <a:r>
-              <a:rPr lang="en-US" sz="1700" b="1" dirty="0">
-                <a:solidFill>
-                  <a:srgbClr val="1B998B"/>
+              <a:rPr lang="en-US" sz="1400" b="1" dirty="0">
+                <a:solidFill>
+                  <a:srgbClr val="C1121F"/>
                 </a:solidFill>
                 <a:latin typeface="Georgia" panose="02040502050405090303" pitchFamily="34" charset="0"/>
                 <a:ea typeface="Georgia" panose="02040502050405090303" pitchFamily="34" charset="-122"/>
                 <a:cs typeface="Georgia" panose="02040502050405090303" pitchFamily="34" charset="-120"/>
               </a:rPr>
-              <a:t>HIGH BUFFER  (L ≥ 13%)</a:t>
-            </a:r>
-            <a:endParaRPr lang="en-US" sz="1700" dirty="0"/>
-          </a:p>
-        </p:txBody>
-      </p:sp>
-      <p:sp>
-        <p:nvSpPr>
-          <p:cNvPr id="14" name="Text 12"/>
-          <p:cNvSpPr/>
-          <p:nvPr/>
-        </p:nvSpPr>
-        <p:spPr>
-          <a:xfrm>
-            <a:off x="6533388" y="2542032"/>
-            <a:ext cx="4905756" cy="274320"/>
+              <a:t>Note on panel A</a:t>
+            </a:r>
+            <a:endParaRPr lang="en-US" sz="1400" dirty="0"/>
+          </a:p>
+        </p:txBody>
+      </p:sp>
+      <p:sp>
+        <p:nvSpPr>
+          <p:cNvPr id="12" name="Text 9"/>
+          <p:cNvSpPr/>
+          <p:nvPr/>
+        </p:nvSpPr>
+        <p:spPr>
+          <a:xfrm>
+            <a:off x="7543800" y="4023360"/>
+            <a:ext cx="3867912" cy="1280160"/>
           </a:xfrm>
           <a:prstGeom prst="rect">
             <a:avLst/>
@@ -20504,18 +21664,21 @@
           <a:lstStyle/>
           <a:p>
             <a:pPr marL="0" indent="0">
-              <a:buNone/>
-            </a:pPr>
-            <a:r>
-              <a:rPr lang="en-US" sz="1200" i="1" dirty="0">
-                <a:solidFill>
-                  <a:srgbClr val="5B6B82"/>
-                </a:solidFill>
-                <a:latin typeface="Calibri" pitchFamily="34" charset="0"/>
-                <a:ea typeface="Calibri" pitchFamily="34" charset="-122"/>
-                <a:cs typeface="Calibri" pitchFamily="34" charset="-120"/>
-              </a:rPr>
-              <a:t>e.g. Circle, Mar 2023: ~18–22% cash</a:t>
+              <a:lnSpc>
+                <a:spcPct val="110000"/>
+              </a:lnSpc>
+              <a:buNone/>
+            </a:pPr>
+            <a:r>
+              <a:rPr lang="en-US" sz="1200" dirty="0">
+                <a:solidFill>
+                  <a:srgbClr val="33425C"/>
+                </a:solidFill>
+                <a:latin typeface="Calibri" pitchFamily="34" charset="0"/>
+                <a:ea typeface="Calibri" pitchFamily="34" charset="-122"/>
+                <a:cs typeface="Calibri" pitchFamily="34" charset="-120"/>
+              </a:rPr>
+              <a:t>Panel A is still the pre-correction series (titled DTB3−SOFR90DAYAVG, swinging ±150 bps). Re-plot it on the corrected DGS3MO−SOFR spread before final submission — panels B and C are already correct.</a:t>
             </a:r>
             <a:endParaRPr lang="en-US" sz="1200" dirty="0"/>
           </a:p>
@@ -20523,150 +21686,7 @@
       </p:sp>
       <p:sp>
         <p:nvSpPr>
-          <p:cNvPr id="15" name="Text 13"/>
-          <p:cNvSpPr/>
-          <p:nvPr/>
-        </p:nvSpPr>
-        <p:spPr>
-          <a:xfrm>
-            <a:off x="6533388" y="2926080"/>
-            <a:ext cx="4494276" cy="2194560"/>
-          </a:xfrm>
-          <a:prstGeom prst="rect">
-            <a:avLst/>
-          </a:prstGeom>
-          <a:noFill/>
-        </p:spPr>
-        <p:txBody>
-          <a:bodyPr wrap="square" lIns="0" tIns="0" rIns="0" bIns="0" rtlCol="0" anchor="ctr"/>
-          <a:lstStyle/>
-          <a:p>
-            <a:pPr marL="342900" indent="-342900">
-              <a:spcAft>
-                <a:spcPts val="700"/>
-              </a:spcAft>
-              <a:buSzPct val="100000"/>
-              <a:buChar char="•"/>
-            </a:pPr>
-            <a:r>
-              <a:rPr lang="en-US" sz="1350" dirty="0">
-                <a:solidFill>
-                  <a:srgbClr val="33425C"/>
-                </a:solidFill>
-                <a:latin typeface="Calibri" pitchFamily="34" charset="0"/>
-                <a:ea typeface="Calibri" pitchFamily="34" charset="-122"/>
-                <a:cs typeface="Calibri" pitchFamily="34" charset="-120"/>
-              </a:rPr>
-              <a:t>Issuer holds substantial cash reserves</a:t>
-            </a:r>
-            <a:endParaRPr lang="en-US" sz="1350" dirty="0"/>
-          </a:p>
-          <a:p>
-            <a:pPr marL="342900" indent="-342900">
-              <a:spcAft>
-                <a:spcPts val="700"/>
-              </a:spcAft>
-              <a:buSzPct val="100000"/>
-              <a:buChar char="•"/>
-            </a:pPr>
-            <a:r>
-              <a:rPr lang="en-US" sz="1350" dirty="0">
-                <a:solidFill>
-                  <a:srgbClr val="33425C"/>
-                </a:solidFill>
-                <a:latin typeface="Calibri" pitchFamily="34" charset="0"/>
-                <a:ea typeface="Calibri" pitchFamily="34" charset="-122"/>
-                <a:cs typeface="Calibri" pitchFamily="34" charset="-120"/>
-              </a:rPr>
-              <a:t>Investors redeem → issuer pays out from cash</a:t>
-            </a:r>
-            <a:endParaRPr lang="en-US" sz="1350" dirty="0"/>
-          </a:p>
-          <a:p>
-            <a:pPr marL="342900" indent="-342900">
-              <a:spcAft>
-                <a:spcPts val="700"/>
-              </a:spcAft>
-              <a:buSzPct val="100000"/>
-              <a:buChar char="•"/>
-            </a:pPr>
-            <a:r>
-              <a:rPr lang="en-US" sz="1350" dirty="0">
-                <a:solidFill>
-                  <a:srgbClr val="33425C"/>
-                </a:solidFill>
-                <a:latin typeface="Calibri" pitchFamily="34" charset="0"/>
-                <a:ea typeface="Calibri" pitchFamily="34" charset="-122"/>
-                <a:cs typeface="Calibri" pitchFamily="34" charset="-120"/>
-              </a:rPr>
-              <a:t>T-bills untouched — no forced selling, no yield pressure</a:t>
-            </a:r>
-            <a:endParaRPr lang="en-US" sz="1350" dirty="0"/>
-          </a:p>
-          <a:p>
-            <a:pPr marL="342900" indent="-342900">
-              <a:spcAft>
-                <a:spcPts val="700"/>
-              </a:spcAft>
-              <a:buSzPct val="100000"/>
-              <a:buChar char="•"/>
-            </a:pPr>
-            <a:r>
-              <a:rPr lang="en-US" sz="1350" dirty="0">
-                <a:solidFill>
-                  <a:srgbClr val="33425C"/>
-                </a:solidFill>
-                <a:latin typeface="Calibri" pitchFamily="34" charset="0"/>
-                <a:ea typeface="Calibri" pitchFamily="34" charset="-122"/>
-                <a:cs typeface="Calibri" pitchFamily="34" charset="-120"/>
-              </a:rPr>
-              <a:t>Spread does not move from issuer behaviour</a:t>
-            </a:r>
-            <a:endParaRPr lang="en-US" sz="1350" dirty="0"/>
-          </a:p>
-        </p:txBody>
-      </p:sp>
-      <p:sp>
-        <p:nvSpPr>
-          <p:cNvPr id="16" name="Text 14"/>
-          <p:cNvSpPr/>
-          <p:nvPr/>
-        </p:nvSpPr>
-        <p:spPr>
-          <a:xfrm>
-            <a:off x="6533388" y="5257800"/>
-            <a:ext cx="4905756" cy="320040"/>
-          </a:xfrm>
-          <a:prstGeom prst="rect">
-            <a:avLst/>
-          </a:prstGeom>
-          <a:noFill/>
-        </p:spPr>
-        <p:txBody>
-          <a:bodyPr wrap="square" lIns="0" tIns="0" rIns="0" bIns="0" rtlCol="0" anchor="ctr"/>
-          <a:lstStyle/>
-          <a:p>
-            <a:pPr marL="0" indent="0">
-              <a:buNone/>
-            </a:pPr>
-            <a:r>
-              <a:rPr lang="en-US" sz="1250" b="1" i="1" dirty="0">
-                <a:solidFill>
-                  <a:srgbClr val="1B998B"/>
-                </a:solidFill>
-                <a:latin typeface="Calibri" pitchFamily="34" charset="0"/>
-                <a:ea typeface="Calibri" pitchFamily="34" charset="-122"/>
-                <a:cs typeface="Calibri" pitchFamily="34" charset="-120"/>
-              </a:rPr>
-              <a:t>The cash buffer absorbs the shock; the market is insulated.</a:t>
-            </a:r>
-            <a:endParaRPr lang="en-US" sz="1250" dirty="0"/>
-          </a:p>
-        </p:txBody>
-      </p:sp>
-      <p:sp>
-        <p:nvSpPr>
-          <p:cNvPr id="17" name="Text 15"/>
+          <p:cNvPr id="13" name="Text 10"/>
           <p:cNvSpPr/>
           <p:nvPr/>
         </p:nvSpPr>
@@ -20704,7 +21724,7 @@
       </p:sp>
       <p:sp>
         <p:nvSpPr>
-          <p:cNvPr id="18" name="Text 16"/>
+          <p:cNvPr id="14" name="Text 11"/>
           <p:cNvSpPr/>
           <p:nvPr/>
         </p:nvSpPr>

--- a/presentations/0609_FINAL_merged_Stablecoin_Privilege.pptx
+++ b/presentations/0609_FINAL_merged_Stablecoin_Privilege.pptx
@@ -16,20 +16,19 @@
     <p:sldId id="261" r:id="rId9"/>
     <p:sldId id="262" r:id="rId10"/>
     <p:sldId id="263" r:id="rId11"/>
-    <p:sldId id="278" r:id="rId12"/>
+    <p:sldId id="280" r:id="rId12"/>
     <p:sldId id="264" r:id="rId13"/>
     <p:sldId id="277" r:id="rId14"/>
     <p:sldId id="266" r:id="rId15"/>
-    <p:sldId id="267" r:id="rId16"/>
-    <p:sldId id="268" r:id="rId17"/>
-    <p:sldId id="269" r:id="rId18"/>
-    <p:sldId id="279" r:id="rId19"/>
-    <p:sldId id="270" r:id="rId20"/>
-    <p:sldId id="271" r:id="rId21"/>
-    <p:sldId id="272" r:id="rId22"/>
-    <p:sldId id="273" r:id="rId23"/>
-    <p:sldId id="274" r:id="rId24"/>
-    <p:sldId id="275" r:id="rId25"/>
+    <p:sldId id="268" r:id="rId16"/>
+    <p:sldId id="269" r:id="rId17"/>
+    <p:sldId id="281" r:id="rId18"/>
+    <p:sldId id="270" r:id="rId19"/>
+    <p:sldId id="271" r:id="rId20"/>
+    <p:sldId id="272" r:id="rId21"/>
+    <p:sldId id="273" r:id="rId22"/>
+    <p:sldId id="274" r:id="rId23"/>
+    <p:sldId id="275" r:id="rId24"/>
   </p:sldIdLst>
   <p:sldSz cx="12192000" cy="6858000"/>
   <p:notesSz cx="6858000" cy="12192000"/>
@@ -1931,84 +1930,6 @@
 </p:notes>
 </file>
 
-<file path=ppt/notesSlides/notesSlide22.xml><?xml version="1.0" encoding="utf-8"?>
-<p:notes xmlns:a="http://schemas.openxmlformats.org/drawingml/2006/main" xmlns:r="http://schemas.openxmlformats.org/officeDocument/2006/relationships" xmlns:p="http://schemas.openxmlformats.org/presentationml/2006/main">
-  <p:cSld>
-    <p:spTree>
-      <p:nvGrpSpPr>
-        <p:cNvPr id="1" name=""/>
-        <p:cNvGrpSpPr/>
-        <p:nvPr/>
-      </p:nvGrpSpPr>
-      <p:grpSpPr>
-        <a:xfrm>
-          <a:off x="0" y="0"/>
-          <a:ext cx="0" cy="0"/>
-          <a:chOff x="0" y="0"/>
-          <a:chExt cx="0" cy="0"/>
-        </a:xfrm>
-      </p:grpSpPr>
-      <p:sp>
-        <p:nvSpPr>
-          <p:cNvPr id="2" name="Slide Image Placeholder 1"/>
-          <p:cNvSpPr>
-            <a:spLocks noGrp="1" noRot="1" noChangeAspect="1"/>
-          </p:cNvSpPr>
-          <p:nvPr>
-            <p:ph type="sldImg"/>
-          </p:nvPr>
-        </p:nvSpPr>
-        <p:spPr/>
-      </p:sp>
-      <p:sp>
-        <p:nvSpPr>
-          <p:cNvPr id="3" name="Notes Placeholder 2"/>
-          <p:cNvSpPr>
-            <a:spLocks noGrp="1"/>
-          </p:cNvSpPr>
-          <p:nvPr>
-            <p:ph type="body" idx="1"/>
-          </p:nvPr>
-        </p:nvSpPr>
-        <p:spPr/>
-        <p:txBody>
-          <a:bodyPr/>
-          <a:lstStyle/>
-          <a:p>
-            <a:endParaRPr lang="en-US" dirty="0"/>
-          </a:p>
-        </p:txBody>
-      </p:sp>
-      <p:sp>
-        <p:nvSpPr>
-          <p:cNvPr id="4" name="Slide Number Placeholder 3"/>
-          <p:cNvSpPr>
-            <a:spLocks noGrp="1"/>
-          </p:cNvSpPr>
-          <p:nvPr>
-            <p:ph type="sldNum" sz="quarter" idx="10"/>
-          </p:nvPr>
-        </p:nvSpPr>
-        <p:spPr/>
-        <p:txBody>
-          <a:bodyPr/>
-          <a:lstStyle/>
-          <a:p>
-            <a:fld id="{F7021451-1387-4CA6-816F-3879F97B5CBC}" type="slidenum">
-              <a:rPr lang="en-US"/>
-            </a:fld>
-            <a:endParaRPr lang="en-US"/>
-          </a:p>
-        </p:txBody>
-      </p:sp>
-    </p:spTree>
-  </p:cSld>
-  <p:clrMapOvr>
-    <a:masterClrMapping/>
-  </p:clrMapOvr>
-</p:notes>
-</file>
-
 <file path=ppt/notesSlides/notesSlide3.xml><?xml version="1.0" encoding="utf-8"?>
 <p:notes xmlns:a="http://schemas.openxmlformats.org/drawingml/2006/main" xmlns:r="http://schemas.openxmlformats.org/officeDocument/2006/relationships" xmlns:p="http://schemas.openxmlformats.org/presentationml/2006/main">
   <p:cSld>
@@ -6788,13 +6709,13 @@
             <a:r>
               <a:rPr lang="en-US" sz="1200" b="1" kern="0" spc="200" dirty="0">
                 <a:solidFill>
-                  <a:srgbClr val="E8A12C"/>
-                </a:solidFill>
-                <a:latin typeface="Calibri" pitchFamily="34" charset="0"/>
-                <a:ea typeface="Calibri" pitchFamily="34" charset="-122"/>
-                <a:cs typeface="Calibri" pitchFamily="34" charset="-120"/>
-              </a:rPr>
-              <a:t>ROBUSTNESS (PENDING RE-RUN)</a:t>
+                  <a:srgbClr val="1B998B"/>
+                </a:solidFill>
+                <a:latin typeface="Calibri" pitchFamily="34" charset="0"/>
+                <a:ea typeface="Calibri" pitchFamily="34" charset="-122"/>
+                <a:cs typeface="Calibri" pitchFamily="34" charset="-120"/>
+              </a:rPr>
+              <a:t>INTUITION</a:t>
             </a:r>
             <a:endParaRPr lang="en-US" sz="1200" dirty="0"/>
           </a:p>
@@ -6832,7 +6753,7 @@
                 <a:ea typeface="Georgia" panose="02040502050405090303" pitchFamily="34" charset="-122"/>
                 <a:cs typeface="Georgia" panose="02040502050405090303" pitchFamily="34" charset="-120"/>
               </a:rPr>
-              <a:t>Asymmetric Effects: Growth vs. Contraction</a:t>
+              <a:t>Why Should There Be a Regime Break?</a:t>
             </a:r>
             <a:endParaRPr lang="en-US" sz="2700" dirty="0"/>
           </a:p>
@@ -6840,52 +6761,14 @@
       </p:sp>
       <p:sp>
         <p:nvSpPr>
-          <p:cNvPr id="4" name="Shape 2"/>
-          <p:cNvSpPr/>
-          <p:nvPr/>
-        </p:nvSpPr>
-        <p:spPr>
-          <a:xfrm>
-            <a:off x="548640" y="1371600"/>
-            <a:ext cx="11091672" cy="502920"/>
-          </a:xfrm>
-          <a:prstGeom prst="rect">
-            <a:avLst/>
-          </a:prstGeom>
-          <a:solidFill>
-            <a:srgbClr val="FBEEDD"/>
-          </a:solidFill>
-        </p:spPr>
-      </p:sp>
-      <p:sp>
-        <p:nvSpPr>
-          <p:cNvPr id="5" name="Shape 3"/>
-          <p:cNvSpPr/>
-          <p:nvPr/>
-        </p:nvSpPr>
-        <p:spPr>
-          <a:xfrm>
-            <a:off x="548640" y="1371600"/>
-            <a:ext cx="82296" cy="502920"/>
-          </a:xfrm>
-          <a:prstGeom prst="rect">
-            <a:avLst/>
-          </a:prstGeom>
-          <a:solidFill>
-            <a:srgbClr val="C1121F"/>
-          </a:solidFill>
-        </p:spPr>
-      </p:sp>
-      <p:sp>
-        <p:nvSpPr>
-          <p:cNvPr id="6" name="Text 4"/>
-          <p:cNvSpPr/>
-          <p:nvPr/>
-        </p:nvSpPr>
-        <p:spPr>
-          <a:xfrm>
-            <a:off x="822960" y="1444752"/>
-            <a:ext cx="10634472" cy="365760"/>
+          <p:cNvPr id="4" name="Text 2"/>
+          <p:cNvSpPr/>
+          <p:nvPr/>
+        </p:nvSpPr>
+        <p:spPr>
+          <a:xfrm>
+            <a:off x="548640" y="1417320"/>
+            <a:ext cx="11091672" cy="365760"/>
           </a:xfrm>
           <a:prstGeom prst="rect">
             <a:avLst/>
@@ -6900,56 +6783,7 @@
               <a:buNone/>
             </a:pPr>
             <a:r>
-              <a:rPr lang="en-US" sz="1250" b="1" dirty="0">
-                <a:solidFill>
-                  <a:srgbClr val="C1121F"/>
-                </a:solidFill>
-                <a:latin typeface="Calibri" pitchFamily="34" charset="0"/>
-                <a:ea typeface="Calibri" pitchFamily="34" charset="-122"/>
-                <a:cs typeface="Calibri" pitchFamily="34" charset="-120"/>
-              </a:rPr>
-              <a:t>⚠  NUMBERS BELOW ARE ON THE PRE-CORRECTION SPREAD.  </a:t>
-            </a:r>
-            <a:r>
-              <a:rPr lang="en-US" sz="1250" dirty="0">
-                <a:solidFill>
-                  <a:srgbClr val="33425C"/>
-                </a:solidFill>
-                <a:latin typeface="Calibri" pitchFamily="34" charset="0"/>
-                <a:ea typeface="Calibri" pitchFamily="34" charset="-122"/>
-                <a:cs typeface="Calibri" pitchFamily="34" charset="-120"/>
-              </a:rPr>
-              <a:t>Re-run on the corrected DGS3MO−SOFR series before presenting; keep only if the contraction effect survives.</a:t>
-            </a:r>
-            <a:endParaRPr lang="en-US" sz="1250" dirty="0"/>
-          </a:p>
-        </p:txBody>
-      </p:sp>
-      <p:sp>
-        <p:nvSpPr>
-          <p:cNvPr id="7" name="Text 5"/>
-          <p:cNvSpPr/>
-          <p:nvPr/>
-        </p:nvSpPr>
-        <p:spPr>
-          <a:xfrm>
-            <a:off x="548640" y="2057400"/>
-            <a:ext cx="11091672" cy="365760"/>
-          </a:xfrm>
-          <a:prstGeom prst="rect">
-            <a:avLst/>
-          </a:prstGeom>
-          <a:noFill/>
-        </p:spPr>
-        <p:txBody>
-          <a:bodyPr wrap="square" lIns="0" tIns="0" rIns="0" bIns="0" rtlCol="0" anchor="ctr"/>
-          <a:lstStyle/>
-          <a:p>
-            <a:pPr marL="0" indent="0">
-              <a:buNone/>
-            </a:pPr>
-            <a:r>
-              <a:rPr lang="en-US" sz="1400" i="1" dirty="0">
+              <a:rPr lang="en-US" sz="1500" i="1" dirty="0">
                 <a:solidFill>
                   <a:srgbClr val="5B6B82"/>
                 </a:solidFill>
@@ -6957,22 +6791,22 @@
                 <a:ea typeface="Georgia" panose="02040502050405090303" pitchFamily="34" charset="-122"/>
                 <a:cs typeface="Georgia" panose="02040502050405090303" pitchFamily="34" charset="-120"/>
               </a:rPr>
-              <a:t>Buying T-bills is gradual and orderly; selling is forced and immediate. The buffer should bite mainly when supply contracts.</a:t>
-            </a:r>
-            <a:endParaRPr lang="en-US" sz="1400" dirty="0"/>
-          </a:p>
-        </p:txBody>
-      </p:sp>
-      <p:sp>
-        <p:nvSpPr>
-          <p:cNvPr id="8" name="Shape 6"/>
-          <p:cNvSpPr/>
-          <p:nvPr/>
-        </p:nvSpPr>
-        <p:spPr>
-          <a:xfrm>
-            <a:off x="548640" y="2606040"/>
-            <a:ext cx="5362956" cy="2743200"/>
+              <a:t>Low buffer = forced-liquidation risk;  high buffer = orderly redemption. We look for a fragility region, not a knife-edge.</a:t>
+            </a:r>
+            <a:endParaRPr lang="en-US" sz="1500" dirty="0"/>
+          </a:p>
+        </p:txBody>
+      </p:sp>
+      <p:sp>
+        <p:nvSpPr>
+          <p:cNvPr id="5" name="Shape 3"/>
+          <p:cNvSpPr/>
+          <p:nvPr/>
+        </p:nvSpPr>
+        <p:spPr>
+          <a:xfrm>
+            <a:off x="548640" y="2057400"/>
+            <a:ext cx="5362956" cy="2834640"/>
           </a:xfrm>
           <a:prstGeom prst="rect">
             <a:avLst/>
@@ -6991,33 +6825,33 @@
       </p:sp>
       <p:sp>
         <p:nvSpPr>
-          <p:cNvPr id="9" name="Shape 7"/>
-          <p:cNvSpPr/>
-          <p:nvPr/>
-        </p:nvSpPr>
-        <p:spPr>
-          <a:xfrm>
-            <a:off x="548640" y="2606040"/>
-            <a:ext cx="82296" cy="2743200"/>
+          <p:cNvPr id="6" name="Shape 4"/>
+          <p:cNvSpPr/>
+          <p:nvPr/>
+        </p:nvSpPr>
+        <p:spPr>
+          <a:xfrm>
+            <a:off x="548640" y="2057400"/>
+            <a:ext cx="82296" cy="2834640"/>
           </a:xfrm>
           <a:prstGeom prst="rect">
             <a:avLst/>
           </a:prstGeom>
           <a:solidFill>
-            <a:srgbClr val="13294B"/>
+            <a:srgbClr val="C1121F"/>
           </a:solidFill>
         </p:spPr>
       </p:sp>
       <p:sp>
         <p:nvSpPr>
-          <p:cNvPr id="10" name="Text 8"/>
-          <p:cNvSpPr/>
-          <p:nvPr/>
-        </p:nvSpPr>
-        <p:spPr>
-          <a:xfrm>
-            <a:off x="804672" y="2743200"/>
-            <a:ext cx="4905756" cy="320040"/>
+          <p:cNvPr id="7" name="Text 5"/>
+          <p:cNvSpPr/>
+          <p:nvPr/>
+        </p:nvSpPr>
+        <p:spPr>
+          <a:xfrm>
+            <a:off x="804672" y="2212848"/>
+            <a:ext cx="4905756" cy="365760"/>
           </a:xfrm>
           <a:prstGeom prst="rect">
             <a:avLst/>
@@ -7032,86 +6866,70 @@
               <a:buNone/>
             </a:pPr>
             <a:r>
-              <a:rPr lang="en-US" sz="1400" b="1" dirty="0">
-                <a:solidFill>
-                  <a:srgbClr val="13294B"/>
+              <a:rPr lang="en-US" sz="1700" b="1" dirty="0">
+                <a:solidFill>
+                  <a:srgbClr val="C1121F"/>
                 </a:solidFill>
                 <a:latin typeface="Georgia" panose="02040502050405090303" pitchFamily="34" charset="0"/>
                 <a:ea typeface="Georgia" panose="02040502050405090303" pitchFamily="34" charset="-122"/>
                 <a:cs typeface="Georgia" panose="02040502050405090303" pitchFamily="34" charset="-120"/>
               </a:rPr>
-              <a:t>GROWTH PERIODS  (ΔlnS &gt; 0)   N = 32</a:t>
+              <a:t>When L is LOW</a:t>
+            </a:r>
+            <a:endParaRPr lang="en-US" sz="1700" dirty="0"/>
+          </a:p>
+        </p:txBody>
+      </p:sp>
+      <p:sp>
+        <p:nvSpPr>
+          <p:cNvPr id="8" name="Text 6"/>
+          <p:cNvSpPr/>
+          <p:nvPr/>
+        </p:nvSpPr>
+        <p:spPr>
+          <a:xfrm>
+            <a:off x="804672" y="2651760"/>
+            <a:ext cx="4860036" cy="2011680"/>
+          </a:xfrm>
+          <a:prstGeom prst="rect">
+            <a:avLst/>
+          </a:prstGeom>
+          <a:noFill/>
+        </p:spPr>
+        <p:txBody>
+          <a:bodyPr wrap="square" lIns="0" tIns="0" rIns="0" bIns="0" rtlCol="0" anchor="ctr"/>
+          <a:lstStyle/>
+          <a:p>
+            <a:pPr marL="342900" indent="-342900">
+              <a:spcAft>
+                <a:spcPts val="800"/>
+              </a:spcAft>
+              <a:buSzPct val="100000"/>
+              <a:buChar char="•"/>
+            </a:pPr>
+            <a:r>
+              <a:rPr lang="en-US" sz="1400" dirty="0">
+                <a:solidFill>
+                  <a:srgbClr val="33425C"/>
+                </a:solidFill>
+                <a:latin typeface="Calibri" pitchFamily="34" charset="0"/>
+                <a:ea typeface="Calibri" pitchFamily="34" charset="-122"/>
+                <a:cs typeface="Calibri" pitchFamily="34" charset="-120"/>
+              </a:rPr>
+              <a:t>A redemption wave forces rapid T-bill sales</a:t>
             </a:r>
             <a:endParaRPr lang="en-US" sz="1400" dirty="0"/>
           </a:p>
-        </p:txBody>
-      </p:sp>
-      <p:sp>
-        <p:nvSpPr>
-          <p:cNvPr id="11" name="Text 9"/>
-          <p:cNvSpPr/>
-          <p:nvPr/>
-        </p:nvSpPr>
-        <p:spPr>
-          <a:xfrm>
-            <a:off x="804672" y="3200400"/>
-            <a:ext cx="4905756" cy="411480"/>
-          </a:xfrm>
-          <a:prstGeom prst="rect">
-            <a:avLst/>
-          </a:prstGeom>
-          <a:noFill/>
-        </p:spPr>
-        <p:txBody>
-          <a:bodyPr wrap="square" lIns="0" tIns="0" rIns="0" bIns="0" rtlCol="0" anchor="ctr"/>
-          <a:lstStyle/>
-          <a:p>
-            <a:pPr marL="0" indent="0">
-              <a:buNone/>
-            </a:pPr>
-            <a:r>
-              <a:rPr lang="en-US" sz="1800" b="1" dirty="0">
-                <a:solidFill>
-                  <a:srgbClr val="5B6B82"/>
-                </a:solidFill>
-                <a:latin typeface="Georgia" panose="02040502050405090303" pitchFamily="34" charset="0"/>
-                <a:ea typeface="Georgia" panose="02040502050405090303" pitchFamily="34" charset="-122"/>
-                <a:cs typeface="Georgia" panose="02040502050405090303" pitchFamily="34" charset="-120"/>
-              </a:rPr>
-              <a:t>β₁ = −1.79   (p = 0.352, n.s.)</a:t>
-            </a:r>
-            <a:endParaRPr lang="en-US" sz="1800" dirty="0"/>
-          </a:p>
-        </p:txBody>
-      </p:sp>
-      <p:sp>
-        <p:nvSpPr>
-          <p:cNvPr id="12" name="Text 10"/>
-          <p:cNvSpPr/>
-          <p:nvPr/>
-        </p:nvSpPr>
-        <p:spPr>
-          <a:xfrm>
-            <a:off x="804672" y="3749040"/>
-            <a:ext cx="4860036" cy="1371600"/>
-          </a:xfrm>
-          <a:prstGeom prst="rect">
-            <a:avLst/>
-          </a:prstGeom>
-          <a:noFill/>
-        </p:spPr>
-        <p:txBody>
-          <a:bodyPr wrap="square" lIns="0" tIns="0" rIns="0" bIns="0" rtlCol="0" anchor="ctr"/>
-          <a:lstStyle/>
-          <a:p>
-            <a:pPr marL="0" indent="0">
-              <a:lnSpc>
-                <a:spcPct val="110000"/>
-              </a:lnSpc>
-              <a:buNone/>
-            </a:pPr>
-            <a:r>
-              <a:rPr lang="en-US" sz="1300" dirty="0">
+          <a:p>
+            <a:pPr marL="342900" indent="-342900">
+              <a:spcAft>
+                <a:spcPts val="800"/>
+              </a:spcAft>
+              <a:buSzPct val="100000"/>
+              <a:buChar char="•"/>
+            </a:pPr>
+            <a:r>
+              <a:rPr lang="en-US" sz="1400" dirty="0">
                 <a:solidFill>
                   <a:srgbClr val="33425C"/>
                 </a:solidFill>
@@ -7119,22 +6937,43 @@
                 <a:ea typeface="Calibri" pitchFamily="34" charset="-122"/>
                 <a:cs typeface="Calibri" pitchFamily="34" charset="-120"/>
               </a:rPr>
-              <a:t>Supply growth → orderly T-bill purchases. Buffer size does not significantly change how issuers move markets.   R² = 0.335</a:t>
-            </a:r>
-            <a:endParaRPr lang="en-US" sz="1300" dirty="0"/>
-          </a:p>
-        </p:txBody>
-      </p:sp>
-      <p:sp>
-        <p:nvSpPr>
-          <p:cNvPr id="13" name="Shape 11"/>
-          <p:cNvSpPr/>
-          <p:nvPr/>
-        </p:nvSpPr>
-        <p:spPr>
-          <a:xfrm>
-            <a:off x="6277356" y="2606040"/>
-            <a:ext cx="5362956" cy="2743200"/>
+              <a:t>Issuer activity moves the market in both directions</a:t>
+            </a:r>
+            <a:endParaRPr lang="en-US" sz="1400" dirty="0"/>
+          </a:p>
+          <a:p>
+            <a:pPr marL="342900" indent="-342900">
+              <a:spcAft>
+                <a:spcPts val="800"/>
+              </a:spcAft>
+              <a:buSzPct val="100000"/>
+              <a:buChar char="•"/>
+            </a:pPr>
+            <a:r>
+              <a:rPr lang="en-US" sz="1400" dirty="0">
+                <a:solidFill>
+                  <a:srgbClr val="33425C"/>
+                </a:solidFill>
+                <a:latin typeface="Calibri" pitchFamily="34" charset="0"/>
+                <a:ea typeface="Calibri" pitchFamily="34" charset="-122"/>
+                <a:cs typeface="Calibri" pitchFamily="34" charset="-120"/>
+              </a:rPr>
+              <a:t>The relationship between supply and spread changes character</a:t>
+            </a:r>
+            <a:endParaRPr lang="en-US" sz="1400" dirty="0"/>
+          </a:p>
+        </p:txBody>
+      </p:sp>
+      <p:sp>
+        <p:nvSpPr>
+          <p:cNvPr id="9" name="Shape 7"/>
+          <p:cNvSpPr/>
+          <p:nvPr/>
+        </p:nvSpPr>
+        <p:spPr>
+          <a:xfrm>
+            <a:off x="6277356" y="2057400"/>
+            <a:ext cx="5362956" cy="2834640"/>
           </a:xfrm>
           <a:prstGeom prst="rect">
             <a:avLst/>
@@ -7153,33 +6992,33 @@
       </p:sp>
       <p:sp>
         <p:nvSpPr>
-          <p:cNvPr id="14" name="Shape 12"/>
-          <p:cNvSpPr/>
-          <p:nvPr/>
-        </p:nvSpPr>
-        <p:spPr>
-          <a:xfrm>
-            <a:off x="6277356" y="2606040"/>
-            <a:ext cx="82296" cy="2743200"/>
+          <p:cNvPr id="10" name="Shape 8"/>
+          <p:cNvSpPr/>
+          <p:nvPr/>
+        </p:nvSpPr>
+        <p:spPr>
+          <a:xfrm>
+            <a:off x="6277356" y="2057400"/>
+            <a:ext cx="82296" cy="2834640"/>
           </a:xfrm>
           <a:prstGeom prst="rect">
             <a:avLst/>
           </a:prstGeom>
           <a:solidFill>
-            <a:srgbClr val="C1121F"/>
+            <a:srgbClr val="1B998B"/>
           </a:solidFill>
         </p:spPr>
       </p:sp>
       <p:sp>
         <p:nvSpPr>
-          <p:cNvPr id="15" name="Text 13"/>
-          <p:cNvSpPr/>
-          <p:nvPr/>
-        </p:nvSpPr>
-        <p:spPr>
-          <a:xfrm>
-            <a:off x="6533388" y="2743200"/>
-            <a:ext cx="4905756" cy="320040"/>
+          <p:cNvPr id="11" name="Text 9"/>
+          <p:cNvSpPr/>
+          <p:nvPr/>
+        </p:nvSpPr>
+        <p:spPr>
+          <a:xfrm>
+            <a:off x="6533388" y="2212848"/>
+            <a:ext cx="4905756" cy="365760"/>
           </a:xfrm>
           <a:prstGeom prst="rect">
             <a:avLst/>
@@ -7194,30 +7033,192 @@
               <a:buNone/>
             </a:pPr>
             <a:r>
-              <a:rPr lang="en-US" sz="1400" b="1" dirty="0">
-                <a:solidFill>
-                  <a:srgbClr val="C1121F"/>
+              <a:rPr lang="en-US" sz="1700" b="1" dirty="0">
+                <a:solidFill>
+                  <a:srgbClr val="1B998B"/>
                 </a:solidFill>
                 <a:latin typeface="Georgia" panose="02040502050405090303" pitchFamily="34" charset="0"/>
                 <a:ea typeface="Georgia" panose="02040502050405090303" pitchFamily="34" charset="-122"/>
                 <a:cs typeface="Georgia" panose="02040502050405090303" pitchFamily="34" charset="-120"/>
               </a:rPr>
-              <a:t>CONTRACTION PERIODS  (ΔlnS &lt; 0)   N = 19</a:t>
+              <a:t>When L is HIGH</a:t>
+            </a:r>
+            <a:endParaRPr lang="en-US" sz="1700" dirty="0"/>
+          </a:p>
+        </p:txBody>
+      </p:sp>
+      <p:sp>
+        <p:nvSpPr>
+          <p:cNvPr id="12" name="Text 10"/>
+          <p:cNvSpPr/>
+          <p:nvPr/>
+        </p:nvSpPr>
+        <p:spPr>
+          <a:xfrm>
+            <a:off x="6533388" y="2651760"/>
+            <a:ext cx="4494276" cy="2011680"/>
+          </a:xfrm>
+          <a:prstGeom prst="rect">
+            <a:avLst/>
+          </a:prstGeom>
+          <a:noFill/>
+        </p:spPr>
+        <p:txBody>
+          <a:bodyPr wrap="square" lIns="0" tIns="0" rIns="0" bIns="0" rtlCol="0" anchor="ctr"/>
+          <a:lstStyle/>
+          <a:p>
+            <a:pPr marL="342900" indent="-342900">
+              <a:spcAft>
+                <a:spcPts val="800"/>
+              </a:spcAft>
+              <a:buSzPct val="100000"/>
+              <a:buChar char="•"/>
+            </a:pPr>
+            <a:r>
+              <a:rPr lang="en-US" sz="1400" dirty="0">
+                <a:solidFill>
+                  <a:srgbClr val="33425C"/>
+                </a:solidFill>
+                <a:latin typeface="Calibri" pitchFamily="34" charset="0"/>
+                <a:ea typeface="Calibri" pitchFamily="34" charset="-122"/>
+                <a:cs typeface="Calibri" pitchFamily="34" charset="-120"/>
+              </a:rPr>
+              <a:t>Issuer absorbs redemptions from cash</a:t>
             </a:r>
             <a:endParaRPr lang="en-US" sz="1400" dirty="0"/>
           </a:p>
-        </p:txBody>
-      </p:sp>
-      <p:sp>
-        <p:nvSpPr>
-          <p:cNvPr id="16" name="Text 14"/>
-          <p:cNvSpPr/>
-          <p:nvPr/>
-        </p:nvSpPr>
-        <p:spPr>
-          <a:xfrm>
-            <a:off x="6533388" y="3200400"/>
-            <a:ext cx="4905756" cy="411480"/>
+          <a:p>
+            <a:pPr marL="342900" indent="-342900">
+              <a:spcAft>
+                <a:spcPts val="800"/>
+              </a:spcAft>
+              <a:buSzPct val="100000"/>
+              <a:buChar char="•"/>
+            </a:pPr>
+            <a:r>
+              <a:rPr lang="en-US" sz="1400" dirty="0">
+                <a:solidFill>
+                  <a:srgbClr val="33425C"/>
+                </a:solidFill>
+                <a:latin typeface="Calibri" pitchFamily="34" charset="0"/>
+                <a:ea typeface="Calibri" pitchFamily="34" charset="-122"/>
+                <a:cs typeface="Calibri" pitchFamily="34" charset="-120"/>
+              </a:rPr>
+              <a:t>T-bill holdings stay untouched</a:t>
+            </a:r>
+            <a:endParaRPr lang="en-US" sz="1400" dirty="0"/>
+          </a:p>
+          <a:p>
+            <a:pPr marL="342900" indent="-342900">
+              <a:spcAft>
+                <a:spcPts val="800"/>
+              </a:spcAft>
+              <a:buSzPct val="100000"/>
+              <a:buChar char="•"/>
+            </a:pPr>
+            <a:r>
+              <a:rPr lang="en-US" sz="1400" dirty="0">
+                <a:solidFill>
+                  <a:srgbClr val="33425C"/>
+                </a:solidFill>
+                <a:latin typeface="Calibri" pitchFamily="34" charset="0"/>
+                <a:ea typeface="Calibri" pitchFamily="34" charset="-122"/>
+                <a:cs typeface="Calibri" pitchFamily="34" charset="-120"/>
+              </a:rPr>
+              <a:t>The privilege channel continues undisturbed</a:t>
+            </a:r>
+            <a:endParaRPr lang="en-US" sz="1400" dirty="0"/>
+          </a:p>
+        </p:txBody>
+      </p:sp>
+      <p:sp>
+        <p:nvSpPr>
+          <p:cNvPr id="13" name="Shape 11"/>
+          <p:cNvSpPr/>
+          <p:nvPr/>
+        </p:nvSpPr>
+        <p:spPr>
+          <a:xfrm>
+            <a:off x="548640" y="5074920"/>
+            <a:ext cx="11091672" cy="868680"/>
+          </a:xfrm>
+          <a:prstGeom prst="rect">
+            <a:avLst/>
+          </a:prstGeom>
+          <a:solidFill>
+            <a:srgbClr val="0E2746"/>
+          </a:solidFill>
+          <a:effectLst>
+            <a:outerShdw blurRad="88900" dist="38100" dir="8100000" algn="bl" rotWithShape="0">
+              <a:srgbClr val="000000">
+                <a:alpha val="13000"/>
+              </a:srgbClr>
+            </a:outerShdw>
+          </a:effectLst>
+        </p:spPr>
+      </p:sp>
+      <p:sp>
+        <p:nvSpPr>
+          <p:cNvPr id="14" name="Text 12"/>
+          <p:cNvSpPr/>
+          <p:nvPr/>
+        </p:nvSpPr>
+        <p:spPr>
+          <a:xfrm>
+            <a:off x="822960" y="5193792"/>
+            <a:ext cx="10543032" cy="640080"/>
+          </a:xfrm>
+          <a:prstGeom prst="rect">
+            <a:avLst/>
+          </a:prstGeom>
+          <a:noFill/>
+        </p:spPr>
+        <p:txBody>
+          <a:bodyPr wrap="square" lIns="0" tIns="0" rIns="0" bIns="0" rtlCol="0" anchor="ctr"/>
+          <a:lstStyle/>
+          <a:p>
+            <a:pPr marL="0" indent="0">
+              <a:lnSpc>
+                <a:spcPct val="105000"/>
+              </a:lnSpc>
+              <a:buNone/>
+            </a:pPr>
+            <a:r>
+              <a:rPr lang="en-US" sz="1350" b="1" dirty="0">
+                <a:solidFill>
+                  <a:srgbClr val="E8A12C"/>
+                </a:solidFill>
+                <a:latin typeface="Calibri" pitchFamily="34" charset="0"/>
+                <a:ea typeface="Calibri" pitchFamily="34" charset="-122"/>
+                <a:cs typeface="Calibri" pitchFamily="34" charset="-120"/>
+              </a:rPr>
+              <a:t>What we estimate:  </a:t>
+            </a:r>
+            <a:r>
+              <a:rPr lang="en-US" sz="1350" dirty="0">
+                <a:solidFill>
+                  <a:srgbClr val="FFFFFF"/>
+                </a:solidFill>
+                <a:latin typeface="Calibri" pitchFamily="34" charset="0"/>
+                <a:ea typeface="Calibri" pitchFamily="34" charset="-122"/>
+                <a:cs typeface="Calibri" pitchFamily="34" charset="-120"/>
+              </a:rPr>
+              <a:t>a critical buffer region in the low teens (L* ≈ 13%) separating amplification from forced liquidation — located consistently by two methods, though imprecisely estimated.</a:t>
+            </a:r>
+            <a:endParaRPr lang="en-US" sz="1350" dirty="0"/>
+          </a:p>
+        </p:txBody>
+      </p:sp>
+      <p:sp>
+        <p:nvSpPr>
+          <p:cNvPr id="15" name="Text 13"/>
+          <p:cNvSpPr/>
+          <p:nvPr/>
+        </p:nvSpPr>
+        <p:spPr>
+          <a:xfrm>
+            <a:off x="548640" y="6455664"/>
+            <a:ext cx="7315200" cy="274320"/>
           </a:xfrm>
           <a:prstGeom prst="rect">
             <a:avLst/>
@@ -7232,123 +7233,6 @@
               <a:buNone/>
             </a:pPr>
             <a:r>
-              <a:rPr lang="en-US" sz="1800" b="1" dirty="0">
-                <a:solidFill>
-                  <a:srgbClr val="C1121F"/>
-                </a:solidFill>
-                <a:latin typeface="Georgia" panose="02040502050405090303" pitchFamily="34" charset="0"/>
-                <a:ea typeface="Georgia" panose="02040502050405090303" pitchFamily="34" charset="-122"/>
-                <a:cs typeface="Georgia" panose="02040502050405090303" pitchFamily="34" charset="-120"/>
-              </a:rPr>
-              <a:t>β₁ = −12.68 **   (p = 0.037)</a:t>
-            </a:r>
-            <a:endParaRPr lang="en-US" sz="1800" dirty="0"/>
-          </a:p>
-        </p:txBody>
-      </p:sp>
-      <p:sp>
-        <p:nvSpPr>
-          <p:cNvPr id="17" name="Text 15"/>
-          <p:cNvSpPr/>
-          <p:nvPr/>
-        </p:nvSpPr>
-        <p:spPr>
-          <a:xfrm>
-            <a:off x="6533388" y="3749040"/>
-            <a:ext cx="4494276" cy="1371600"/>
-          </a:xfrm>
-          <a:prstGeom prst="rect">
-            <a:avLst/>
-          </a:prstGeom>
-          <a:noFill/>
-        </p:spPr>
-        <p:txBody>
-          <a:bodyPr wrap="square" lIns="0" tIns="0" rIns="0" bIns="0" rtlCol="0" anchor="ctr"/>
-          <a:lstStyle/>
-          <a:p>
-            <a:pPr marL="0" indent="0">
-              <a:lnSpc>
-                <a:spcPct val="110000"/>
-              </a:lnSpc>
-              <a:buNone/>
-            </a:pPr>
-            <a:r>
-              <a:rPr lang="en-US" sz="1300" dirty="0">
-                <a:solidFill>
-                  <a:srgbClr val="33425C"/>
-                </a:solidFill>
-                <a:latin typeface="Calibri" pitchFamily="34" charset="0"/>
-                <a:ea typeface="Calibri" pitchFamily="34" charset="-122"/>
-                <a:cs typeface="Calibri" pitchFamily="34" charset="-120"/>
-              </a:rPr>
-              <a:t>Supply contraction → ~7× larger effect. Forced liquidation drives the sovereign spread. Model explains 73% of stress variation.   R² = 0.728</a:t>
-            </a:r>
-            <a:endParaRPr lang="en-US" sz="1300" dirty="0"/>
-          </a:p>
-        </p:txBody>
-      </p:sp>
-      <p:sp>
-        <p:nvSpPr>
-          <p:cNvPr id="18" name="Text 16"/>
-          <p:cNvSpPr/>
-          <p:nvPr/>
-        </p:nvSpPr>
-        <p:spPr>
-          <a:xfrm>
-            <a:off x="548640" y="5577840"/>
-            <a:ext cx="11091672" cy="365760"/>
-          </a:xfrm>
-          <a:prstGeom prst="rect">
-            <a:avLst/>
-          </a:prstGeom>
-          <a:noFill/>
-        </p:spPr>
-        <p:txBody>
-          <a:bodyPr wrap="square" lIns="0" tIns="0" rIns="0" bIns="0" rtlCol="0" anchor="ctr"/>
-          <a:lstStyle/>
-          <a:p>
-            <a:pPr marL="0" indent="0">
-              <a:buNone/>
-            </a:pPr>
-            <a:r>
-              <a:rPr lang="en-US" sz="1250" b="1" i="1" dirty="0">
-                <a:solidFill>
-                  <a:srgbClr val="13294B"/>
-                </a:solidFill>
-                <a:latin typeface="Calibri" pitchFamily="34" charset="0"/>
-                <a:ea typeface="Calibri" pitchFamily="34" charset="-122"/>
-                <a:cs typeface="Calibri" pitchFamily="34" charset="-120"/>
-              </a:rPr>
-              <a:t>If this survives the corrected spread, it is strong support for the fragility mechanism — the buffer matters precisely when supply is falling.</a:t>
-            </a:r>
-            <a:endParaRPr lang="en-US" sz="1250" dirty="0"/>
-          </a:p>
-        </p:txBody>
-      </p:sp>
-      <p:sp>
-        <p:nvSpPr>
-          <p:cNvPr id="19" name="Text 17"/>
-          <p:cNvSpPr/>
-          <p:nvPr/>
-        </p:nvSpPr>
-        <p:spPr>
-          <a:xfrm>
-            <a:off x="548640" y="6455664"/>
-            <a:ext cx="7315200" cy="274320"/>
-          </a:xfrm>
-          <a:prstGeom prst="rect">
-            <a:avLst/>
-          </a:prstGeom>
-          <a:noFill/>
-        </p:spPr>
-        <p:txBody>
-          <a:bodyPr wrap="square" lIns="0" tIns="0" rIns="0" bIns="0" rtlCol="0" anchor="ctr"/>
-          <a:lstStyle/>
-          <a:p>
-            <a:pPr marL="0" indent="0">
-              <a:buNone/>
-            </a:pPr>
-            <a:r>
               <a:rPr lang="en-US" sz="900" dirty="0">
                 <a:solidFill>
                   <a:srgbClr val="5B6B82"/>
@@ -7365,7 +7249,7 @@
       </p:sp>
       <p:sp>
         <p:nvSpPr>
-          <p:cNvPr id="20" name="Text 18"/>
+          <p:cNvPr id="16" name="Text 14"/>
           <p:cNvSpPr/>
           <p:nvPr/>
         </p:nvSpPr>
@@ -7395,7 +7279,7 @@
                 <a:ea typeface="Calibri" pitchFamily="34" charset="-122"/>
                 <a:cs typeface="Calibri" pitchFamily="34" charset="-120"/>
               </a:rPr>
-              <a:t>12</a:t>
+              <a:t>13</a:t>
             </a:r>
             <a:endParaRPr lang="en-US" sz="1100" dirty="0"/>
           </a:p>
@@ -7466,7 +7350,7 @@
                 <a:ea typeface="Calibri" pitchFamily="34" charset="-122"/>
                 <a:cs typeface="Calibri" pitchFamily="34" charset="-120"/>
               </a:rPr>
-              <a:t>INTUITION</a:t>
+              <a:t>THRESHOLD RESULT</a:t>
             </a:r>
             <a:endParaRPr lang="en-US" sz="1200" dirty="0"/>
           </a:p>
@@ -7504,7 +7388,7 @@
                 <a:ea typeface="Georgia" panose="02040502050405090303" pitchFamily="34" charset="-122"/>
                 <a:cs typeface="Georgia" panose="02040502050405090303" pitchFamily="34" charset="-120"/>
               </a:rPr>
-              <a:t>Why Should There Be a Regime Break?</a:t>
+              <a:t>A Fragility Region in the Low Teens (≈ 13%)</a:t>
             </a:r>
             <a:endParaRPr lang="en-US" sz="2700" dirty="0"/>
           </a:p>
@@ -7542,22 +7426,84 @@
                 <a:ea typeface="Georgia" panose="02040502050405090303" pitchFamily="34" charset="-122"/>
                 <a:cs typeface="Georgia" panose="02040502050405090303" pitchFamily="34" charset="-120"/>
               </a:rPr>
-              <a:t>Low buffer = forced-liquidation risk;  high buffer = orderly redemption. We look for a fragility region, not a knife-edge.</a:t>
+              <a:t>Two methods independently locate the break near 13–15%. The location is robust; the precision is limited by N = 51.</a:t>
             </a:r>
             <a:endParaRPr lang="en-US" sz="1500" dirty="0"/>
           </a:p>
         </p:txBody>
       </p:sp>
-      <p:sp>
-        <p:nvSpPr>
-          <p:cNvPr id="5" name="Shape 3"/>
-          <p:cNvSpPr/>
-          <p:nvPr/>
-        </p:nvSpPr>
-        <p:spPr>
-          <a:xfrm>
-            <a:off x="548640" y="2057400"/>
-            <a:ext cx="5362956" cy="2834640"/>
+      <p:pic>
+        <p:nvPicPr>
+          <p:cNvPr id="5" name="Image 0" descr="figs/image6.png"/>
+          <p:cNvPicPr>
+            <a:picLocks noChangeAspect="1"/>
+          </p:cNvPicPr>
+          <p:nvPr/>
+        </p:nvPicPr>
+        <p:blipFill>
+          <a:blip r:embed="rId1"/>
+          <a:stretch>
+            <a:fillRect/>
+          </a:stretch>
+        </p:blipFill>
+        <p:spPr>
+          <a:xfrm>
+            <a:off x="548640" y="1920240"/>
+            <a:ext cx="5577840" cy="3138908"/>
+          </a:xfrm>
+          <a:prstGeom prst="rect">
+            <a:avLst/>
+          </a:prstGeom>
+        </p:spPr>
+      </p:pic>
+      <p:sp>
+        <p:nvSpPr>
+          <p:cNvPr id="6" name="Text 3"/>
+          <p:cNvSpPr/>
+          <p:nvPr/>
+        </p:nvSpPr>
+        <p:spPr>
+          <a:xfrm>
+            <a:off x="548640" y="5095724"/>
+            <a:ext cx="5577840" cy="365760"/>
+          </a:xfrm>
+          <a:prstGeom prst="rect">
+            <a:avLst/>
+          </a:prstGeom>
+          <a:noFill/>
+        </p:spPr>
+        <p:txBody>
+          <a:bodyPr wrap="square" lIns="0" tIns="0" rIns="0" bIns="0" rtlCol="0" anchor="ctr"/>
+          <a:lstStyle/>
+          <a:p>
+            <a:pPr marL="0" indent="0">
+              <a:buNone/>
+            </a:pPr>
+            <a:r>
+              <a:rPr lang="en-US" sz="1050" i="1" dirty="0">
+                <a:solidFill>
+                  <a:srgbClr val="5B6B82"/>
+                </a:solidFill>
+                <a:latin typeface="Calibri" pitchFamily="34" charset="0"/>
+                <a:ea typeface="Calibri" pitchFamily="34" charset="-122"/>
+                <a:cs typeface="Calibri" pitchFamily="34" charset="-120"/>
+              </a:rPr>
+              <a:t>Hansen (2000) SSR over the buffer grid — minimized at q* = 0.130, with the bootstrap 90% CI shaded.</a:t>
+            </a:r>
+            <a:endParaRPr lang="en-US" sz="1050" dirty="0"/>
+          </a:p>
+        </p:txBody>
+      </p:sp>
+      <p:sp>
+        <p:nvSpPr>
+          <p:cNvPr id="7" name="Shape 4"/>
+          <p:cNvSpPr/>
+          <p:nvPr/>
+        </p:nvSpPr>
+        <p:spPr>
+          <a:xfrm>
+            <a:off x="6446520" y="1920240"/>
+            <a:ext cx="5193792" cy="960120"/>
           </a:xfrm>
           <a:prstGeom prst="rect">
             <a:avLst/>
@@ -7576,33 +7522,33 @@
       </p:sp>
       <p:sp>
         <p:nvSpPr>
-          <p:cNvPr id="6" name="Shape 4"/>
-          <p:cNvSpPr/>
-          <p:nvPr/>
-        </p:nvSpPr>
-        <p:spPr>
-          <a:xfrm>
-            <a:off x="548640" y="2057400"/>
-            <a:ext cx="82296" cy="2834640"/>
+          <p:cNvPr id="8" name="Shape 5"/>
+          <p:cNvSpPr/>
+          <p:nvPr/>
+        </p:nvSpPr>
+        <p:spPr>
+          <a:xfrm>
+            <a:off x="6446520" y="1920240"/>
+            <a:ext cx="82296" cy="960120"/>
           </a:xfrm>
           <a:prstGeom prst="rect">
             <a:avLst/>
           </a:prstGeom>
           <a:solidFill>
-            <a:srgbClr val="C1121F"/>
+            <a:srgbClr val="1B998B"/>
           </a:solidFill>
         </p:spPr>
       </p:sp>
       <p:sp>
         <p:nvSpPr>
-          <p:cNvPr id="7" name="Text 5"/>
-          <p:cNvSpPr/>
-          <p:nvPr/>
-        </p:nvSpPr>
-        <p:spPr>
-          <a:xfrm>
-            <a:off x="804672" y="2212848"/>
-            <a:ext cx="4905756" cy="365760"/>
+          <p:cNvPr id="9" name="Text 6"/>
+          <p:cNvSpPr/>
+          <p:nvPr/>
+        </p:nvSpPr>
+        <p:spPr>
+          <a:xfrm>
+            <a:off x="6675120" y="2029968"/>
+            <a:ext cx="4736592" cy="411480"/>
           </a:xfrm>
           <a:prstGeom prst="rect">
             <a:avLst/>
@@ -7617,49 +7563,45 @@
               <a:buNone/>
             </a:pPr>
             <a:r>
-              <a:rPr lang="en-US" sz="1700" b="1" dirty="0">
-                <a:solidFill>
-                  <a:srgbClr val="C1121F"/>
+              <a:rPr lang="en-US" sz="2200" b="1" dirty="0">
+                <a:solidFill>
+                  <a:srgbClr val="13294B"/>
                 </a:solidFill>
                 <a:latin typeface="Georgia" panose="02040502050405090303" pitchFamily="34" charset="0"/>
                 <a:ea typeface="Georgia" panose="02040502050405090303" pitchFamily="34" charset="-122"/>
                 <a:cs typeface="Georgia" panose="02040502050405090303" pitchFamily="34" charset="-120"/>
               </a:rPr>
-              <a:t>When L is LOW</a:t>
-            </a:r>
-            <a:endParaRPr lang="en-US" sz="1700" dirty="0"/>
-          </a:p>
-        </p:txBody>
-      </p:sp>
-      <p:sp>
-        <p:nvSpPr>
-          <p:cNvPr id="8" name="Text 6"/>
-          <p:cNvSpPr/>
-          <p:nvPr/>
-        </p:nvSpPr>
-        <p:spPr>
-          <a:xfrm>
-            <a:off x="804672" y="2651760"/>
-            <a:ext cx="4860036" cy="2011680"/>
-          </a:xfrm>
-          <a:prstGeom prst="rect">
-            <a:avLst/>
-          </a:prstGeom>
-          <a:noFill/>
-        </p:spPr>
-        <p:txBody>
-          <a:bodyPr wrap="square" lIns="0" tIns="0" rIns="0" bIns="0" rtlCol="0" anchor="ctr"/>
-          <a:lstStyle/>
-          <a:p>
-            <a:pPr marL="342900" indent="-342900">
-              <a:spcAft>
-                <a:spcPts val="800"/>
-              </a:spcAft>
-              <a:buSzPct val="100000"/>
-              <a:buChar char="•"/>
-            </a:pPr>
-            <a:r>
-              <a:rPr lang="en-US" sz="1400" dirty="0">
+              <a:t>q* = 13.0%</a:t>
+            </a:r>
+            <a:endParaRPr lang="en-US" sz="2200" dirty="0"/>
+          </a:p>
+        </p:txBody>
+      </p:sp>
+      <p:sp>
+        <p:nvSpPr>
+          <p:cNvPr id="10" name="Text 7"/>
+          <p:cNvSpPr/>
+          <p:nvPr/>
+        </p:nvSpPr>
+        <p:spPr>
+          <a:xfrm>
+            <a:off x="6675120" y="2468880"/>
+            <a:ext cx="4736592" cy="365760"/>
+          </a:xfrm>
+          <a:prstGeom prst="rect">
+            <a:avLst/>
+          </a:prstGeom>
+          <a:noFill/>
+        </p:spPr>
+        <p:txBody>
+          <a:bodyPr wrap="square" lIns="0" tIns="0" rIns="0" bIns="0" rtlCol="0" anchor="ctr"/>
+          <a:lstStyle/>
+          <a:p>
+            <a:pPr marL="0" indent="0">
+              <a:buNone/>
+            </a:pPr>
+            <a:r>
+              <a:rPr lang="en-US" sz="1150" dirty="0">
                 <a:solidFill>
                   <a:srgbClr val="33425C"/>
                 </a:solidFill>
@@ -7667,64 +7609,22 @@
                 <a:ea typeface="Calibri" pitchFamily="34" charset="-122"/>
                 <a:cs typeface="Calibri" pitchFamily="34" charset="-120"/>
               </a:rPr>
-              <a:t>A redemption wave forces rapid T-bill sales</a:t>
-            </a:r>
-            <a:endParaRPr lang="en-US" sz="1400" dirty="0"/>
-          </a:p>
-          <a:p>
-            <a:pPr marL="342900" indent="-342900">
-              <a:spcAft>
-                <a:spcPts val="800"/>
-              </a:spcAft>
-              <a:buSzPct val="100000"/>
-              <a:buChar char="•"/>
-            </a:pPr>
-            <a:r>
-              <a:rPr lang="en-US" sz="1400" dirty="0">
-                <a:solidFill>
-                  <a:srgbClr val="33425C"/>
-                </a:solidFill>
-                <a:latin typeface="Calibri" pitchFamily="34" charset="0"/>
-                <a:ea typeface="Calibri" pitchFamily="34" charset="-122"/>
-                <a:cs typeface="Calibri" pitchFamily="34" charset="-120"/>
-              </a:rPr>
-              <a:t>Issuer activity moves the market in both directions</a:t>
-            </a:r>
-            <a:endParaRPr lang="en-US" sz="1400" dirty="0"/>
-          </a:p>
-          <a:p>
-            <a:pPr marL="342900" indent="-342900">
-              <a:spcAft>
-                <a:spcPts val="800"/>
-              </a:spcAft>
-              <a:buSzPct val="100000"/>
-              <a:buChar char="•"/>
-            </a:pPr>
-            <a:r>
-              <a:rPr lang="en-US" sz="1400" dirty="0">
-                <a:solidFill>
-                  <a:srgbClr val="33425C"/>
-                </a:solidFill>
-                <a:latin typeface="Calibri" pitchFamily="34" charset="0"/>
-                <a:ea typeface="Calibri" pitchFamily="34" charset="-122"/>
-                <a:cs typeface="Calibri" pitchFamily="34" charset="-120"/>
-              </a:rPr>
-              <a:t>The relationship between supply and spread changes character</a:t>
-            </a:r>
-            <a:endParaRPr lang="en-US" sz="1400" dirty="0"/>
-          </a:p>
-        </p:txBody>
-      </p:sp>
-      <p:sp>
-        <p:nvSpPr>
-          <p:cNvPr id="9" name="Shape 7"/>
-          <p:cNvSpPr/>
-          <p:nvPr/>
-        </p:nvSpPr>
-        <p:spPr>
-          <a:xfrm>
-            <a:off x="6277356" y="2057400"/>
-            <a:ext cx="5362956" cy="2834640"/>
+              <a:t>Hansen grid search — stable across TRIM 15/20/25%</a:t>
+            </a:r>
+            <a:endParaRPr lang="en-US" sz="1150" dirty="0"/>
+          </a:p>
+        </p:txBody>
+      </p:sp>
+      <p:sp>
+        <p:nvSpPr>
+          <p:cNvPr id="11" name="Shape 8"/>
+          <p:cNvSpPr/>
+          <p:nvPr/>
+        </p:nvSpPr>
+        <p:spPr>
+          <a:xfrm>
+            <a:off x="6446520" y="2999232"/>
+            <a:ext cx="5193792" cy="960120"/>
           </a:xfrm>
           <a:prstGeom prst="rect">
             <a:avLst/>
@@ -7743,33 +7643,33 @@
       </p:sp>
       <p:sp>
         <p:nvSpPr>
-          <p:cNvPr id="10" name="Shape 8"/>
-          <p:cNvSpPr/>
-          <p:nvPr/>
-        </p:nvSpPr>
-        <p:spPr>
-          <a:xfrm>
-            <a:off x="6277356" y="2057400"/>
-            <a:ext cx="82296" cy="2834640"/>
+          <p:cNvPr id="12" name="Shape 9"/>
+          <p:cNvSpPr/>
+          <p:nvPr/>
+        </p:nvSpPr>
+        <p:spPr>
+          <a:xfrm>
+            <a:off x="6446520" y="2999232"/>
+            <a:ext cx="82296" cy="960120"/>
           </a:xfrm>
           <a:prstGeom prst="rect">
             <a:avLst/>
           </a:prstGeom>
           <a:solidFill>
-            <a:srgbClr val="1B998B"/>
+            <a:srgbClr val="13294B"/>
           </a:solidFill>
         </p:spPr>
       </p:sp>
       <p:sp>
         <p:nvSpPr>
-          <p:cNvPr id="11" name="Text 9"/>
-          <p:cNvSpPr/>
-          <p:nvPr/>
-        </p:nvSpPr>
-        <p:spPr>
-          <a:xfrm>
-            <a:off x="6533388" y="2212848"/>
-            <a:ext cx="4905756" cy="365760"/>
+          <p:cNvPr id="13" name="Text 10"/>
+          <p:cNvSpPr/>
+          <p:nvPr/>
+        </p:nvSpPr>
+        <p:spPr>
+          <a:xfrm>
+            <a:off x="6675120" y="3108960"/>
+            <a:ext cx="4736592" cy="411480"/>
           </a:xfrm>
           <a:prstGeom prst="rect">
             <a:avLst/>
@@ -7784,192 +7684,30 @@
               <a:buNone/>
             </a:pPr>
             <a:r>
-              <a:rPr lang="en-US" sz="1700" b="1" dirty="0">
-                <a:solidFill>
-                  <a:srgbClr val="1B998B"/>
+              <a:rPr lang="en-US" sz="2200" b="1" dirty="0">
+                <a:solidFill>
+                  <a:srgbClr val="13294B"/>
                 </a:solidFill>
                 <a:latin typeface="Georgia" panose="02040502050405090303" pitchFamily="34" charset="0"/>
                 <a:ea typeface="Georgia" panose="02040502050405090303" pitchFamily="34" charset="-122"/>
                 <a:cs typeface="Georgia" panose="02040502050405090303" pitchFamily="34" charset="-120"/>
               </a:rPr>
-              <a:t>When L is HIGH</a:t>
-            </a:r>
-            <a:endParaRPr lang="en-US" sz="1700" dirty="0"/>
-          </a:p>
-        </p:txBody>
-      </p:sp>
-      <p:sp>
-        <p:nvSpPr>
-          <p:cNvPr id="12" name="Text 10"/>
-          <p:cNvSpPr/>
-          <p:nvPr/>
-        </p:nvSpPr>
-        <p:spPr>
-          <a:xfrm>
-            <a:off x="6533388" y="2651760"/>
-            <a:ext cx="4494276" cy="2011680"/>
-          </a:xfrm>
-          <a:prstGeom prst="rect">
-            <a:avLst/>
-          </a:prstGeom>
-          <a:noFill/>
-        </p:spPr>
-        <p:txBody>
-          <a:bodyPr wrap="square" lIns="0" tIns="0" rIns="0" bIns="0" rtlCol="0" anchor="ctr"/>
-          <a:lstStyle/>
-          <a:p>
-            <a:pPr marL="342900" indent="-342900">
-              <a:spcAft>
-                <a:spcPts val="800"/>
-              </a:spcAft>
-              <a:buSzPct val="100000"/>
-              <a:buChar char="•"/>
-            </a:pPr>
-            <a:r>
-              <a:rPr lang="en-US" sz="1400" dirty="0">
-                <a:solidFill>
-                  <a:srgbClr val="33425C"/>
-                </a:solidFill>
-                <a:latin typeface="Calibri" pitchFamily="34" charset="0"/>
-                <a:ea typeface="Calibri" pitchFamily="34" charset="-122"/>
-                <a:cs typeface="Calibri" pitchFamily="34" charset="-120"/>
-              </a:rPr>
-              <a:t>Issuer absorbs redemptions from cash</a:t>
-            </a:r>
-            <a:endParaRPr lang="en-US" sz="1400" dirty="0"/>
-          </a:p>
-          <a:p>
-            <a:pPr marL="342900" indent="-342900">
-              <a:spcAft>
-                <a:spcPts val="800"/>
-              </a:spcAft>
-              <a:buSzPct val="100000"/>
-              <a:buChar char="•"/>
-            </a:pPr>
-            <a:r>
-              <a:rPr lang="en-US" sz="1400" dirty="0">
-                <a:solidFill>
-                  <a:srgbClr val="33425C"/>
-                </a:solidFill>
-                <a:latin typeface="Calibri" pitchFamily="34" charset="0"/>
-                <a:ea typeface="Calibri" pitchFamily="34" charset="-122"/>
-                <a:cs typeface="Calibri" pitchFamily="34" charset="-120"/>
-              </a:rPr>
-              <a:t>T-bill holdings stay untouched</a:t>
-            </a:r>
-            <a:endParaRPr lang="en-US" sz="1400" dirty="0"/>
-          </a:p>
-          <a:p>
-            <a:pPr marL="342900" indent="-342900">
-              <a:spcAft>
-                <a:spcPts val="800"/>
-              </a:spcAft>
-              <a:buSzPct val="100000"/>
-              <a:buChar char="•"/>
-            </a:pPr>
-            <a:r>
-              <a:rPr lang="en-US" sz="1400" dirty="0">
-                <a:solidFill>
-                  <a:srgbClr val="33425C"/>
-                </a:solidFill>
-                <a:latin typeface="Calibri" pitchFamily="34" charset="0"/>
-                <a:ea typeface="Calibri" pitchFamily="34" charset="-122"/>
-                <a:cs typeface="Calibri" pitchFamily="34" charset="-120"/>
-              </a:rPr>
-              <a:t>The privilege channel continues undisturbed</a:t>
-            </a:r>
-            <a:endParaRPr lang="en-US" sz="1400" dirty="0"/>
-          </a:p>
-        </p:txBody>
-      </p:sp>
-      <p:sp>
-        <p:nvSpPr>
-          <p:cNvPr id="13" name="Shape 11"/>
-          <p:cNvSpPr/>
-          <p:nvPr/>
-        </p:nvSpPr>
-        <p:spPr>
-          <a:xfrm>
-            <a:off x="548640" y="5074920"/>
-            <a:ext cx="11091672" cy="868680"/>
-          </a:xfrm>
-          <a:prstGeom prst="rect">
-            <a:avLst/>
-          </a:prstGeom>
-          <a:solidFill>
-            <a:srgbClr val="0E2746"/>
-          </a:solidFill>
-          <a:effectLst>
-            <a:outerShdw blurRad="88900" dist="38100" dir="8100000" algn="bl" rotWithShape="0">
-              <a:srgbClr val="000000">
-                <a:alpha val="13000"/>
-              </a:srgbClr>
-            </a:outerShdw>
-          </a:effectLst>
-        </p:spPr>
-      </p:sp>
-      <p:sp>
-        <p:nvSpPr>
-          <p:cNvPr id="14" name="Text 12"/>
-          <p:cNvSpPr/>
-          <p:nvPr/>
-        </p:nvSpPr>
-        <p:spPr>
-          <a:xfrm>
-            <a:off x="822960" y="5193792"/>
-            <a:ext cx="10543032" cy="640080"/>
-          </a:xfrm>
-          <a:prstGeom prst="rect">
-            <a:avLst/>
-          </a:prstGeom>
-          <a:noFill/>
-        </p:spPr>
-        <p:txBody>
-          <a:bodyPr wrap="square" lIns="0" tIns="0" rIns="0" bIns="0" rtlCol="0" anchor="ctr"/>
-          <a:lstStyle/>
-          <a:p>
-            <a:pPr marL="0" indent="0">
-              <a:lnSpc>
-                <a:spcPct val="105000"/>
-              </a:lnSpc>
-              <a:buNone/>
-            </a:pPr>
-            <a:r>
-              <a:rPr lang="en-US" sz="1350" b="1" dirty="0">
-                <a:solidFill>
-                  <a:srgbClr val="E8A12C"/>
-                </a:solidFill>
-                <a:latin typeface="Calibri" pitchFamily="34" charset="0"/>
-                <a:ea typeface="Calibri" pitchFamily="34" charset="-122"/>
-                <a:cs typeface="Calibri" pitchFamily="34" charset="-120"/>
-              </a:rPr>
-              <a:t>What we estimate:  </a:t>
-            </a:r>
-            <a:r>
-              <a:rPr lang="en-US" sz="1350" dirty="0">
-                <a:solidFill>
-                  <a:srgbClr val="FFFFFF"/>
-                </a:solidFill>
-                <a:latin typeface="Calibri" pitchFamily="34" charset="0"/>
-                <a:ea typeface="Calibri" pitchFamily="34" charset="-122"/>
-                <a:cs typeface="Calibri" pitchFamily="34" charset="-120"/>
-              </a:rPr>
-              <a:t>a critical buffer region in the low teens (L* ≈ 13%) separating amplification from forced liquidation — located consistently by two methods, though imprecisely estimated.</a:t>
-            </a:r>
-            <a:endParaRPr lang="en-US" sz="1350" dirty="0"/>
-          </a:p>
-        </p:txBody>
-      </p:sp>
-      <p:sp>
-        <p:nvSpPr>
-          <p:cNvPr id="15" name="Text 13"/>
-          <p:cNvSpPr/>
-          <p:nvPr/>
-        </p:nvSpPr>
-        <p:spPr>
-          <a:xfrm>
-            <a:off x="548640" y="6455664"/>
-            <a:ext cx="7315200" cy="274320"/>
+              <a:t>c* = 14.9%</a:t>
+            </a:r>
+            <a:endParaRPr lang="en-US" sz="2200" dirty="0"/>
+          </a:p>
+        </p:txBody>
+      </p:sp>
+      <p:sp>
+        <p:nvSpPr>
+          <p:cNvPr id="14" name="Text 11"/>
+          <p:cNvSpPr/>
+          <p:nvPr/>
+        </p:nvSpPr>
+        <p:spPr>
+          <a:xfrm>
+            <a:off x="6675120" y="3547872"/>
+            <a:ext cx="4736592" cy="365760"/>
           </a:xfrm>
           <a:prstGeom prst="rect">
             <a:avLst/>
@@ -7984,276 +7722,29 @@
               <a:buNone/>
             </a:pPr>
             <a:r>
-              <a:rPr lang="en-US" sz="900" dirty="0">
-                <a:solidFill>
-                  <a:srgbClr val="5B6B82"/>
-                </a:solidFill>
-                <a:latin typeface="Calibri" pitchFamily="34" charset="0"/>
-                <a:ea typeface="Calibri" pitchFamily="34" charset="-122"/>
-                <a:cs typeface="Calibri" pitchFamily="34" charset="-120"/>
-              </a:rPr>
-              <a:t>Stablecoins &amp; the Exorbitant Privilege</a:t>
-            </a:r>
-            <a:endParaRPr lang="en-US" sz="900" dirty="0"/>
-          </a:p>
-        </p:txBody>
-      </p:sp>
-      <p:sp>
-        <p:nvSpPr>
-          <p:cNvPr id="16" name="Text 14"/>
-          <p:cNvSpPr/>
-          <p:nvPr/>
-        </p:nvSpPr>
-        <p:spPr>
-          <a:xfrm>
-            <a:off x="11274552" y="6400800"/>
-            <a:ext cx="365760" cy="274320"/>
-          </a:xfrm>
-          <a:prstGeom prst="rect">
-            <a:avLst/>
-          </a:prstGeom>
-          <a:noFill/>
-        </p:spPr>
-        <p:txBody>
-          <a:bodyPr wrap="square" lIns="0" tIns="0" rIns="0" bIns="0" rtlCol="0" anchor="ctr"/>
-          <a:lstStyle/>
-          <a:p>
-            <a:pPr marL="0" indent="0" algn="r">
-              <a:buNone/>
-            </a:pPr>
-            <a:r>
-              <a:rPr lang="en-US" sz="1100" dirty="0">
-                <a:solidFill>
-                  <a:srgbClr val="5B6B82"/>
-                </a:solidFill>
-                <a:latin typeface="Calibri" pitchFamily="34" charset="0"/>
-                <a:ea typeface="Calibri" pitchFamily="34" charset="-122"/>
-                <a:cs typeface="Calibri" pitchFamily="34" charset="-120"/>
-              </a:rPr>
-              <a:t>13</a:t>
-            </a:r>
-            <a:endParaRPr lang="en-US" sz="1100" dirty="0"/>
-          </a:p>
-        </p:txBody>
-      </p:sp>
-    </p:spTree>
-  </p:cSld>
-  <p:clrMapOvr>
-    <a:masterClrMapping/>
-  </p:clrMapOvr>
-</p:sld>
-</file>
-
-<file path=ppt/slides/slide15.xml><?xml version="1.0" encoding="utf-8"?>
-<p:sld xmlns:a="http://schemas.openxmlformats.org/drawingml/2006/main" xmlns:r="http://schemas.openxmlformats.org/officeDocument/2006/relationships" xmlns:p="http://schemas.openxmlformats.org/presentationml/2006/main">
-  <p:cSld>
-    <p:bg>
-      <p:bgPr>
-        <a:solidFill>
-          <a:srgbClr val="FFFFFF"/>
-        </a:solidFill>
-        <a:effectLst/>
-      </p:bgPr>
-    </p:bg>
-    <p:spTree>
-      <p:nvGrpSpPr>
-        <p:cNvPr id="1" name=""/>
-        <p:cNvGrpSpPr/>
-        <p:nvPr/>
-      </p:nvGrpSpPr>
-      <p:grpSpPr>
-        <a:xfrm>
-          <a:off x="0" y="0"/>
-          <a:ext cx="0" cy="0"/>
-          <a:chOff x="0" y="0"/>
-          <a:chExt cx="0" cy="0"/>
-        </a:xfrm>
-      </p:grpSpPr>
-      <p:sp>
-        <p:nvSpPr>
-          <p:cNvPr id="2" name="Text 0"/>
-          <p:cNvSpPr/>
-          <p:nvPr/>
-        </p:nvSpPr>
-        <p:spPr>
-          <a:xfrm>
-            <a:off x="548640" y="384048"/>
-            <a:ext cx="11091672" cy="274320"/>
-          </a:xfrm>
-          <a:prstGeom prst="rect">
-            <a:avLst/>
-          </a:prstGeom>
-          <a:noFill/>
-        </p:spPr>
-        <p:txBody>
-          <a:bodyPr wrap="square" lIns="0" tIns="0" rIns="0" bIns="0" rtlCol="0" anchor="ctr"/>
-          <a:lstStyle/>
-          <a:p>
-            <a:pPr marL="0" indent="0">
-              <a:buNone/>
-            </a:pPr>
-            <a:r>
-              <a:rPr lang="en-US" sz="1200" b="1" kern="0" spc="200" dirty="0">
-                <a:solidFill>
-                  <a:srgbClr val="1B998B"/>
-                </a:solidFill>
-                <a:latin typeface="Calibri" pitchFamily="34" charset="0"/>
-                <a:ea typeface="Calibri" pitchFamily="34" charset="-122"/>
-                <a:cs typeface="Calibri" pitchFamily="34" charset="-120"/>
-              </a:rPr>
-              <a:t>THRESHOLD RESULT</a:t>
-            </a:r>
-            <a:endParaRPr lang="en-US" sz="1200" dirty="0"/>
-          </a:p>
-        </p:txBody>
-      </p:sp>
-      <p:sp>
-        <p:nvSpPr>
-          <p:cNvPr id="3" name="Text 1"/>
-          <p:cNvSpPr/>
-          <p:nvPr/>
-        </p:nvSpPr>
-        <p:spPr>
-          <a:xfrm>
-            <a:off x="548640" y="658368"/>
-            <a:ext cx="11091672" cy="685800"/>
-          </a:xfrm>
-          <a:prstGeom prst="rect">
-            <a:avLst/>
-          </a:prstGeom>
-          <a:noFill/>
-        </p:spPr>
-        <p:txBody>
-          <a:bodyPr wrap="square" lIns="0" tIns="0" rIns="0" bIns="0" rtlCol="0" anchor="ctr"/>
-          <a:lstStyle/>
-          <a:p>
-            <a:pPr marL="0" indent="0">
-              <a:buNone/>
-            </a:pPr>
-            <a:r>
-              <a:rPr lang="en-US" sz="2700" b="1" dirty="0">
-                <a:solidFill>
-                  <a:srgbClr val="13294B"/>
-                </a:solidFill>
-                <a:latin typeface="Georgia" panose="02040502050405090303" pitchFamily="34" charset="0"/>
-                <a:ea typeface="Georgia" panose="02040502050405090303" pitchFamily="34" charset="-122"/>
-                <a:cs typeface="Georgia" panose="02040502050405090303" pitchFamily="34" charset="-120"/>
-              </a:rPr>
-              <a:t>A Fragility Region in the Low Teens (≈ 13%)</a:t>
-            </a:r>
-            <a:endParaRPr lang="en-US" sz="2700" dirty="0"/>
-          </a:p>
-        </p:txBody>
-      </p:sp>
-      <p:sp>
-        <p:nvSpPr>
-          <p:cNvPr id="4" name="Text 2"/>
-          <p:cNvSpPr/>
-          <p:nvPr/>
-        </p:nvSpPr>
-        <p:spPr>
-          <a:xfrm>
-            <a:off x="548640" y="1417320"/>
-            <a:ext cx="11091672" cy="365760"/>
-          </a:xfrm>
-          <a:prstGeom prst="rect">
-            <a:avLst/>
-          </a:prstGeom>
-          <a:noFill/>
-        </p:spPr>
-        <p:txBody>
-          <a:bodyPr wrap="square" lIns="0" tIns="0" rIns="0" bIns="0" rtlCol="0" anchor="ctr"/>
-          <a:lstStyle/>
-          <a:p>
-            <a:pPr marL="0" indent="0">
-              <a:buNone/>
-            </a:pPr>
-            <a:r>
-              <a:rPr lang="en-US" sz="1500" i="1" dirty="0">
-                <a:solidFill>
-                  <a:srgbClr val="5B6B82"/>
-                </a:solidFill>
-                <a:latin typeface="Georgia" panose="02040502050405090303" pitchFamily="34" charset="0"/>
-                <a:ea typeface="Georgia" panose="02040502050405090303" pitchFamily="34" charset="-122"/>
-                <a:cs typeface="Georgia" panose="02040502050405090303" pitchFamily="34" charset="-120"/>
-              </a:rPr>
-              <a:t>Two methods independently locate the break near 13–15%. The location is robust; the precision is limited by N = 51.</a:t>
-            </a:r>
-            <a:endParaRPr lang="en-US" sz="1500" dirty="0"/>
-          </a:p>
-        </p:txBody>
-      </p:sp>
-      <p:pic>
-        <p:nvPicPr>
-          <p:cNvPr id="5" name="Image 0" descr="figs/image6.png"/>
-          <p:cNvPicPr>
-            <a:picLocks noChangeAspect="1"/>
-          </p:cNvPicPr>
-          <p:nvPr/>
-        </p:nvPicPr>
-        <p:blipFill>
-          <a:blip r:embed="rId1"/>
-          <a:stretch>
-            <a:fillRect/>
-          </a:stretch>
-        </p:blipFill>
-        <p:spPr>
-          <a:xfrm>
-            <a:off x="548640" y="1920240"/>
-            <a:ext cx="5577840" cy="3138908"/>
-          </a:xfrm>
-          <a:prstGeom prst="rect">
-            <a:avLst/>
-          </a:prstGeom>
-        </p:spPr>
-      </p:pic>
-      <p:sp>
-        <p:nvSpPr>
-          <p:cNvPr id="6" name="Text 3"/>
-          <p:cNvSpPr/>
-          <p:nvPr/>
-        </p:nvSpPr>
-        <p:spPr>
-          <a:xfrm>
-            <a:off x="548640" y="5095724"/>
-            <a:ext cx="5577840" cy="365760"/>
-          </a:xfrm>
-          <a:prstGeom prst="rect">
-            <a:avLst/>
-          </a:prstGeom>
-          <a:noFill/>
-        </p:spPr>
-        <p:txBody>
-          <a:bodyPr wrap="square" lIns="0" tIns="0" rIns="0" bIns="0" rtlCol="0" anchor="ctr"/>
-          <a:lstStyle/>
-          <a:p>
-            <a:pPr marL="0" indent="0">
-              <a:buNone/>
-            </a:pPr>
-            <a:r>
-              <a:rPr lang="en-US" sz="1050" i="1" dirty="0">
-                <a:solidFill>
-                  <a:srgbClr val="5B6B82"/>
-                </a:solidFill>
-                <a:latin typeface="Calibri" pitchFamily="34" charset="0"/>
-                <a:ea typeface="Calibri" pitchFamily="34" charset="-122"/>
-                <a:cs typeface="Calibri" pitchFamily="34" charset="-120"/>
-              </a:rPr>
-              <a:t>Hansen (2000) SSR over the buffer grid — minimized at q* = 0.130, with the bootstrap 90% CI shaded.</a:t>
-            </a:r>
-            <a:endParaRPr lang="en-US" sz="1050" dirty="0"/>
-          </a:p>
-        </p:txBody>
-      </p:sp>
-      <p:sp>
-        <p:nvSpPr>
-          <p:cNvPr id="7" name="Shape 4"/>
-          <p:cNvSpPr/>
-          <p:nvPr/>
-        </p:nvSpPr>
-        <p:spPr>
-          <a:xfrm>
-            <a:off x="6446520" y="1920240"/>
+              <a:rPr lang="en-US" sz="1150" dirty="0">
+                <a:solidFill>
+                  <a:srgbClr val="33425C"/>
+                </a:solidFill>
+                <a:latin typeface="Calibri" pitchFamily="34" charset="0"/>
+                <a:ea typeface="Calibri" pitchFamily="34" charset="-122"/>
+                <a:cs typeface="Calibri" pitchFamily="34" charset="-120"/>
+              </a:rPr>
+              <a:t>LSTAR smooth transition — locates the same region</a:t>
+            </a:r>
+            <a:endParaRPr lang="en-US" sz="1150" dirty="0"/>
+          </a:p>
+        </p:txBody>
+      </p:sp>
+      <p:sp>
+        <p:nvSpPr>
+          <p:cNvPr id="15" name="Shape 12"/>
+          <p:cNvSpPr/>
+          <p:nvPr/>
+        </p:nvSpPr>
+        <p:spPr>
+          <a:xfrm>
+            <a:off x="6446520" y="4078224"/>
             <a:ext cx="5193792" cy="960120"/>
           </a:xfrm>
           <a:prstGeom prst="rect">
@@ -8273,32 +7764,32 @@
       </p:sp>
       <p:sp>
         <p:nvSpPr>
-          <p:cNvPr id="8" name="Shape 5"/>
-          <p:cNvSpPr/>
-          <p:nvPr/>
-        </p:nvSpPr>
-        <p:spPr>
-          <a:xfrm>
-            <a:off x="6446520" y="1920240"/>
+          <p:cNvPr id="16" name="Shape 13"/>
+          <p:cNvSpPr/>
+          <p:nvPr/>
+        </p:nvSpPr>
+        <p:spPr>
+          <a:xfrm>
+            <a:off x="6446520" y="4078224"/>
             <a:ext cx="82296" cy="960120"/>
           </a:xfrm>
           <a:prstGeom prst="rect">
             <a:avLst/>
           </a:prstGeom>
           <a:solidFill>
-            <a:srgbClr val="1B998B"/>
+            <a:srgbClr val="E8A12C"/>
           </a:solidFill>
         </p:spPr>
       </p:sp>
       <p:sp>
         <p:nvSpPr>
-          <p:cNvPr id="9" name="Text 6"/>
-          <p:cNvSpPr/>
-          <p:nvPr/>
-        </p:nvSpPr>
-        <p:spPr>
-          <a:xfrm>
-            <a:off x="6675120" y="2029968"/>
+          <p:cNvPr id="17" name="Text 14"/>
+          <p:cNvSpPr/>
+          <p:nvPr/>
+        </p:nvSpPr>
+        <p:spPr>
+          <a:xfrm>
+            <a:off x="6675120" y="4187952"/>
             <a:ext cx="4736592" cy="411480"/>
           </a:xfrm>
           <a:prstGeom prst="rect">
@@ -8322,7 +7813,7 @@
                 <a:ea typeface="Georgia" panose="02040502050405090303" pitchFamily="34" charset="-122"/>
                 <a:cs typeface="Georgia" panose="02040502050405090303" pitchFamily="34" charset="-120"/>
               </a:rPr>
-              <a:t>q* = 13.0%</a:t>
+              <a:t>p = 0.406</a:t>
             </a:r>
             <a:endParaRPr lang="en-US" sz="2200" dirty="0"/>
           </a:p>
@@ -8330,13 +7821,13 @@
       </p:sp>
       <p:sp>
         <p:nvSpPr>
-          <p:cNvPr id="10" name="Text 7"/>
-          <p:cNvSpPr/>
-          <p:nvPr/>
-        </p:nvSpPr>
-        <p:spPr>
-          <a:xfrm>
-            <a:off x="6675120" y="2468880"/>
+          <p:cNvPr id="18" name="Text 15"/>
+          <p:cNvSpPr/>
+          <p:nvPr/>
+        </p:nvSpPr>
+        <p:spPr>
+          <a:xfrm>
+            <a:off x="6675120" y="4626864"/>
             <a:ext cx="4736592" cy="365760"/>
           </a:xfrm>
           <a:prstGeom prst="rect">
@@ -8360,7 +7851,7 @@
                 <a:ea typeface="Calibri" pitchFamily="34" charset="-122"/>
                 <a:cs typeface="Calibri" pitchFamily="34" charset="-120"/>
               </a:rPr>
-              <a:t>Hansen grid search — stable across TRIM 15/20/25%</a:t>
+              <a:t>bootstrap; 90% CI [3.1%, 14.5%] — location robust, not precise</a:t>
             </a:r>
             <a:endParaRPr lang="en-US" sz="1150" dirty="0"/>
           </a:p>
@@ -8368,14 +7859,14 @@
       </p:sp>
       <p:sp>
         <p:nvSpPr>
-          <p:cNvPr id="11" name="Shape 8"/>
-          <p:cNvSpPr/>
-          <p:nvPr/>
-        </p:nvSpPr>
-        <p:spPr>
-          <a:xfrm>
-            <a:off x="6446520" y="2999232"/>
-            <a:ext cx="5193792" cy="960120"/>
+          <p:cNvPr id="19" name="Shape 16"/>
+          <p:cNvSpPr/>
+          <p:nvPr/>
+        </p:nvSpPr>
+        <p:spPr>
+          <a:xfrm>
+            <a:off x="548640" y="5138928"/>
+            <a:ext cx="11091672" cy="1188720"/>
           </a:xfrm>
           <a:prstGeom prst="rect">
             <a:avLst/>
@@ -8394,248 +7885,6 @@
       </p:sp>
       <p:sp>
         <p:nvSpPr>
-          <p:cNvPr id="12" name="Shape 9"/>
-          <p:cNvSpPr/>
-          <p:nvPr/>
-        </p:nvSpPr>
-        <p:spPr>
-          <a:xfrm>
-            <a:off x="6446520" y="2999232"/>
-            <a:ext cx="82296" cy="960120"/>
-          </a:xfrm>
-          <a:prstGeom prst="rect">
-            <a:avLst/>
-          </a:prstGeom>
-          <a:solidFill>
-            <a:srgbClr val="13294B"/>
-          </a:solidFill>
-        </p:spPr>
-      </p:sp>
-      <p:sp>
-        <p:nvSpPr>
-          <p:cNvPr id="13" name="Text 10"/>
-          <p:cNvSpPr/>
-          <p:nvPr/>
-        </p:nvSpPr>
-        <p:spPr>
-          <a:xfrm>
-            <a:off x="6675120" y="3108960"/>
-            <a:ext cx="4736592" cy="411480"/>
-          </a:xfrm>
-          <a:prstGeom prst="rect">
-            <a:avLst/>
-          </a:prstGeom>
-          <a:noFill/>
-        </p:spPr>
-        <p:txBody>
-          <a:bodyPr wrap="square" lIns="0" tIns="0" rIns="0" bIns="0" rtlCol="0" anchor="ctr"/>
-          <a:lstStyle/>
-          <a:p>
-            <a:pPr marL="0" indent="0">
-              <a:buNone/>
-            </a:pPr>
-            <a:r>
-              <a:rPr lang="en-US" sz="2200" b="1" dirty="0">
-                <a:solidFill>
-                  <a:srgbClr val="13294B"/>
-                </a:solidFill>
-                <a:latin typeface="Georgia" panose="02040502050405090303" pitchFamily="34" charset="0"/>
-                <a:ea typeface="Georgia" panose="02040502050405090303" pitchFamily="34" charset="-122"/>
-                <a:cs typeface="Georgia" panose="02040502050405090303" pitchFamily="34" charset="-120"/>
-              </a:rPr>
-              <a:t>c* = 14.9%</a:t>
-            </a:r>
-            <a:endParaRPr lang="en-US" sz="2200" dirty="0"/>
-          </a:p>
-        </p:txBody>
-      </p:sp>
-      <p:sp>
-        <p:nvSpPr>
-          <p:cNvPr id="14" name="Text 11"/>
-          <p:cNvSpPr/>
-          <p:nvPr/>
-        </p:nvSpPr>
-        <p:spPr>
-          <a:xfrm>
-            <a:off x="6675120" y="3547872"/>
-            <a:ext cx="4736592" cy="365760"/>
-          </a:xfrm>
-          <a:prstGeom prst="rect">
-            <a:avLst/>
-          </a:prstGeom>
-          <a:noFill/>
-        </p:spPr>
-        <p:txBody>
-          <a:bodyPr wrap="square" lIns="0" tIns="0" rIns="0" bIns="0" rtlCol="0" anchor="ctr"/>
-          <a:lstStyle/>
-          <a:p>
-            <a:pPr marL="0" indent="0">
-              <a:buNone/>
-            </a:pPr>
-            <a:r>
-              <a:rPr lang="en-US" sz="1150" dirty="0">
-                <a:solidFill>
-                  <a:srgbClr val="33425C"/>
-                </a:solidFill>
-                <a:latin typeface="Calibri" pitchFamily="34" charset="0"/>
-                <a:ea typeface="Calibri" pitchFamily="34" charset="-122"/>
-                <a:cs typeface="Calibri" pitchFamily="34" charset="-120"/>
-              </a:rPr>
-              <a:t>LSTAR smooth transition — locates the same region</a:t>
-            </a:r>
-            <a:endParaRPr lang="en-US" sz="1150" dirty="0"/>
-          </a:p>
-        </p:txBody>
-      </p:sp>
-      <p:sp>
-        <p:nvSpPr>
-          <p:cNvPr id="15" name="Shape 12"/>
-          <p:cNvSpPr/>
-          <p:nvPr/>
-        </p:nvSpPr>
-        <p:spPr>
-          <a:xfrm>
-            <a:off x="6446520" y="4078224"/>
-            <a:ext cx="5193792" cy="960120"/>
-          </a:xfrm>
-          <a:prstGeom prst="rect">
-            <a:avLst/>
-          </a:prstGeom>
-          <a:solidFill>
-            <a:srgbClr val="F4F6FA"/>
-          </a:solidFill>
-          <a:effectLst>
-            <a:outerShdw blurRad="88900" dist="38100" dir="8100000" algn="bl" rotWithShape="0">
-              <a:srgbClr val="000000">
-                <a:alpha val="13000"/>
-              </a:srgbClr>
-            </a:outerShdw>
-          </a:effectLst>
-        </p:spPr>
-      </p:sp>
-      <p:sp>
-        <p:nvSpPr>
-          <p:cNvPr id="16" name="Shape 13"/>
-          <p:cNvSpPr/>
-          <p:nvPr/>
-        </p:nvSpPr>
-        <p:spPr>
-          <a:xfrm>
-            <a:off x="6446520" y="4078224"/>
-            <a:ext cx="82296" cy="960120"/>
-          </a:xfrm>
-          <a:prstGeom prst="rect">
-            <a:avLst/>
-          </a:prstGeom>
-          <a:solidFill>
-            <a:srgbClr val="E8A12C"/>
-          </a:solidFill>
-        </p:spPr>
-      </p:sp>
-      <p:sp>
-        <p:nvSpPr>
-          <p:cNvPr id="17" name="Text 14"/>
-          <p:cNvSpPr/>
-          <p:nvPr/>
-        </p:nvSpPr>
-        <p:spPr>
-          <a:xfrm>
-            <a:off x="6675120" y="4187952"/>
-            <a:ext cx="4736592" cy="411480"/>
-          </a:xfrm>
-          <a:prstGeom prst="rect">
-            <a:avLst/>
-          </a:prstGeom>
-          <a:noFill/>
-        </p:spPr>
-        <p:txBody>
-          <a:bodyPr wrap="square" lIns="0" tIns="0" rIns="0" bIns="0" rtlCol="0" anchor="ctr"/>
-          <a:lstStyle/>
-          <a:p>
-            <a:pPr marL="0" indent="0">
-              <a:buNone/>
-            </a:pPr>
-            <a:r>
-              <a:rPr lang="en-US" sz="2200" b="1" dirty="0">
-                <a:solidFill>
-                  <a:srgbClr val="13294B"/>
-                </a:solidFill>
-                <a:latin typeface="Georgia" panose="02040502050405090303" pitchFamily="34" charset="0"/>
-                <a:ea typeface="Georgia" panose="02040502050405090303" pitchFamily="34" charset="-122"/>
-                <a:cs typeface="Georgia" panose="02040502050405090303" pitchFamily="34" charset="-120"/>
-              </a:rPr>
-              <a:t>p = 0.406</a:t>
-            </a:r>
-            <a:endParaRPr lang="en-US" sz="2200" dirty="0"/>
-          </a:p>
-        </p:txBody>
-      </p:sp>
-      <p:sp>
-        <p:nvSpPr>
-          <p:cNvPr id="18" name="Text 15"/>
-          <p:cNvSpPr/>
-          <p:nvPr/>
-        </p:nvSpPr>
-        <p:spPr>
-          <a:xfrm>
-            <a:off x="6675120" y="4626864"/>
-            <a:ext cx="4736592" cy="365760"/>
-          </a:xfrm>
-          <a:prstGeom prst="rect">
-            <a:avLst/>
-          </a:prstGeom>
-          <a:noFill/>
-        </p:spPr>
-        <p:txBody>
-          <a:bodyPr wrap="square" lIns="0" tIns="0" rIns="0" bIns="0" rtlCol="0" anchor="ctr"/>
-          <a:lstStyle/>
-          <a:p>
-            <a:pPr marL="0" indent="0">
-              <a:buNone/>
-            </a:pPr>
-            <a:r>
-              <a:rPr lang="en-US" sz="1150" dirty="0">
-                <a:solidFill>
-                  <a:srgbClr val="33425C"/>
-                </a:solidFill>
-                <a:latin typeface="Calibri" pitchFamily="34" charset="0"/>
-                <a:ea typeface="Calibri" pitchFamily="34" charset="-122"/>
-                <a:cs typeface="Calibri" pitchFamily="34" charset="-120"/>
-              </a:rPr>
-              <a:t>bootstrap; 90% CI [3.1%, 14.5%] — location robust, not precise</a:t>
-            </a:r>
-            <a:endParaRPr lang="en-US" sz="1150" dirty="0"/>
-          </a:p>
-        </p:txBody>
-      </p:sp>
-      <p:sp>
-        <p:nvSpPr>
-          <p:cNvPr id="19" name="Shape 16"/>
-          <p:cNvSpPr/>
-          <p:nvPr/>
-        </p:nvSpPr>
-        <p:spPr>
-          <a:xfrm>
-            <a:off x="548640" y="5138928"/>
-            <a:ext cx="11091672" cy="1188720"/>
-          </a:xfrm>
-          <a:prstGeom prst="rect">
-            <a:avLst/>
-          </a:prstGeom>
-          <a:solidFill>
-            <a:srgbClr val="F4F6FA"/>
-          </a:solidFill>
-          <a:effectLst>
-            <a:outerShdw blurRad="88900" dist="38100" dir="8100000" algn="bl" rotWithShape="0">
-              <a:srgbClr val="000000">
-                <a:alpha val="13000"/>
-              </a:srgbClr>
-            </a:outerShdw>
-          </a:effectLst>
-        </p:spPr>
-      </p:sp>
-      <p:sp>
-        <p:nvSpPr>
           <p:cNvPr id="20" name="Shape 17"/>
           <p:cNvSpPr/>
           <p:nvPr/>
@@ -8833,7 +8082,7 @@
 </p:sld>
 </file>
 
-<file path=ppt/slides/slide16.xml><?xml version="1.0" encoding="utf-8"?>
+<file path=ppt/slides/slide15.xml><?xml version="1.0" encoding="utf-8"?>
 <p:sld xmlns:a="http://schemas.openxmlformats.org/drawingml/2006/main" xmlns:r="http://schemas.openxmlformats.org/officeDocument/2006/relationships" xmlns:p="http://schemas.openxmlformats.org/presentationml/2006/main">
   <p:cSld>
     <p:spTree>
@@ -8966,7 +8215,7 @@
       </p:sp>
       <p:pic>
         <p:nvPicPr>
-          <p:cNvPr id="5" name="Image 0" descr="figs/image7.png"/>
+          <p:cNvPr id="5" name="Image 0" descr="figs/lstar_corrected.png"/>
           <p:cNvPicPr>
             <a:picLocks noChangeAspect="1"/>
           </p:cNvPicPr>
@@ -8981,7 +8230,7 @@
         <p:spPr>
           <a:xfrm>
             <a:off x="1705356" y="1828800"/>
-            <a:ext cx="8778240" cy="3287730"/>
+            <a:ext cx="8778240" cy="3284040"/>
           </a:xfrm>
           <a:prstGeom prst="rect">
             <a:avLst/>
@@ -9191,7 +8440,7 @@
 </p:sld>
 </file>
 
-<file path=ppt/slides/slide17.xml><?xml version="1.0" encoding="utf-8"?>
+<file path=ppt/slides/slide16.xml><?xml version="1.0" encoding="utf-8"?>
 <p:sld xmlns:a="http://schemas.openxmlformats.org/drawingml/2006/main" xmlns:r="http://schemas.openxmlformats.org/officeDocument/2006/relationships" xmlns:p="http://schemas.openxmlformats.org/presentationml/2006/main">
   <p:cSld>
     <p:bg>
@@ -11589,6 +10838,481 @@
 </p:sld>
 </file>
 
+<file path=ppt/slides/slide17.xml><?xml version="1.0" encoding="utf-8"?>
+<p:sld xmlns:a="http://schemas.openxmlformats.org/drawingml/2006/main" xmlns:r="http://schemas.openxmlformats.org/officeDocument/2006/relationships" xmlns:p="http://schemas.openxmlformats.org/presentationml/2006/main">
+  <p:cSld>
+    <p:bg>
+      <p:bgPr>
+        <a:solidFill>
+          <a:srgbClr val="FFFFFF"/>
+        </a:solidFill>
+        <a:effectLst/>
+      </p:bgPr>
+    </p:bg>
+    <p:spTree>
+      <p:nvGrpSpPr>
+        <p:cNvPr id="1" name=""/>
+        <p:cNvGrpSpPr/>
+        <p:nvPr/>
+      </p:nvGrpSpPr>
+      <p:grpSpPr>
+        <a:xfrm>
+          <a:off x="0" y="0"/>
+          <a:ext cx="0" cy="0"/>
+          <a:chOff x="0" y="0"/>
+          <a:chExt cx="0" cy="0"/>
+        </a:xfrm>
+      </p:grpSpPr>
+      <p:sp>
+        <p:nvSpPr>
+          <p:cNvPr id="2" name="Text 0"/>
+          <p:cNvSpPr/>
+          <p:nvPr/>
+        </p:nvSpPr>
+        <p:spPr>
+          <a:xfrm>
+            <a:off x="548640" y="384048"/>
+            <a:ext cx="11091672" cy="274320"/>
+          </a:xfrm>
+          <a:prstGeom prst="rect">
+            <a:avLst/>
+          </a:prstGeom>
+          <a:noFill/>
+        </p:spPr>
+        <p:txBody>
+          <a:bodyPr wrap="square" lIns="0" tIns="0" rIns="0" bIns="0" rtlCol="0" anchor="ctr"/>
+          <a:lstStyle/>
+          <a:p>
+            <a:pPr marL="0" indent="0">
+              <a:buNone/>
+            </a:pPr>
+            <a:r>
+              <a:rPr lang="en-US" sz="1200" b="1" kern="0" spc="200" dirty="0">
+                <a:solidFill>
+                  <a:srgbClr val="E8A12C"/>
+                </a:solidFill>
+                <a:latin typeface="Calibri" pitchFamily="34" charset="0"/>
+                <a:ea typeface="Calibri" pitchFamily="34" charset="-122"/>
+                <a:cs typeface="Calibri" pitchFamily="34" charset="-120"/>
+              </a:rPr>
+              <a:t>SUPPORTING / ILLUSTRATIVE</a:t>
+            </a:r>
+            <a:endParaRPr lang="en-US" sz="1200" dirty="0"/>
+          </a:p>
+        </p:txBody>
+      </p:sp>
+      <p:sp>
+        <p:nvSpPr>
+          <p:cNvPr id="3" name="Text 1"/>
+          <p:cNvSpPr/>
+          <p:nvPr/>
+        </p:nvSpPr>
+        <p:spPr>
+          <a:xfrm>
+            <a:off x="548640" y="658368"/>
+            <a:ext cx="11091672" cy="685800"/>
+          </a:xfrm>
+          <a:prstGeom prst="rect">
+            <a:avLst/>
+          </a:prstGeom>
+          <a:noFill/>
+        </p:spPr>
+        <p:txBody>
+          <a:bodyPr wrap="square" lIns="0" tIns="0" rIns="0" bIns="0" rtlCol="0" anchor="ctr"/>
+          <a:lstStyle/>
+          <a:p>
+            <a:pPr marL="0" indent="0">
+              <a:buNone/>
+            </a:pPr>
+            <a:r>
+              <a:rPr lang="en-US" sz="2700" b="1" dirty="0">
+                <a:solidFill>
+                  <a:srgbClr val="13294B"/>
+                </a:solidFill>
+                <a:latin typeface="Georgia" panose="02040502050405090303" pitchFamily="34" charset="0"/>
+                <a:ea typeface="Georgia" panose="02040502050405090303" pitchFamily="34" charset="-122"/>
+                <a:cs typeface="Georgia" panose="02040502050405090303" pitchFamily="34" charset="-120"/>
+              </a:rPr>
+              <a:t>Event Study — Honest About Its Limits</a:t>
+            </a:r>
+            <a:endParaRPr lang="en-US" sz="2700" dirty="0"/>
+          </a:p>
+        </p:txBody>
+      </p:sp>
+      <p:sp>
+        <p:nvSpPr>
+          <p:cNvPr id="4" name="Text 2"/>
+          <p:cNvSpPr/>
+          <p:nvPr/>
+        </p:nvSpPr>
+        <p:spPr>
+          <a:xfrm>
+            <a:off x="548640" y="1417320"/>
+            <a:ext cx="11091672" cy="365760"/>
+          </a:xfrm>
+          <a:prstGeom prst="rect">
+            <a:avLst/>
+          </a:prstGeom>
+          <a:noFill/>
+        </p:spPr>
+        <p:txBody>
+          <a:bodyPr wrap="square" lIns="0" tIns="0" rIns="0" bIns="0" rtlCol="0" anchor="ctr"/>
+          <a:lstStyle/>
+          <a:p>
+            <a:pPr marL="0" indent="0">
+              <a:buNone/>
+            </a:pPr>
+            <a:r>
+              <a:rPr lang="en-US" sz="1500" i="1" dirty="0">
+                <a:solidFill>
+                  <a:srgbClr val="5B6B82"/>
+                </a:solidFill>
+                <a:latin typeface="Georgia" panose="02040502050405090303" pitchFamily="34" charset="0"/>
+                <a:ea typeface="Georgia" panose="02040502050405090303" pitchFamily="34" charset="-122"/>
+                <a:cs typeface="Georgia" panose="02040502050405090303" pitchFamily="34" charset="-120"/>
+              </a:rPr>
+              <a:t>Raw daily spread around stress events (not CARs). Included to illustrate plausibility — not as proof.</a:t>
+            </a:r>
+            <a:endParaRPr lang="en-US" sz="1500" dirty="0"/>
+          </a:p>
+        </p:txBody>
+      </p:sp>
+      <p:pic>
+        <p:nvPicPr>
+          <p:cNvPr id="5" name="Image 0" descr="figs/image8.png"/>
+          <p:cNvPicPr>
+            <a:picLocks noChangeAspect="1"/>
+          </p:cNvPicPr>
+          <p:nvPr/>
+        </p:nvPicPr>
+        <p:blipFill>
+          <a:blip r:embed="rId1"/>
+          <a:stretch>
+            <a:fillRect/>
+          </a:stretch>
+        </p:blipFill>
+        <p:spPr>
+          <a:xfrm>
+            <a:off x="548640" y="1828800"/>
+            <a:ext cx="5486400" cy="2514600"/>
+          </a:xfrm>
+          <a:prstGeom prst="rect">
+            <a:avLst/>
+          </a:prstGeom>
+        </p:spPr>
+      </p:pic>
+      <p:pic>
+        <p:nvPicPr>
+          <p:cNvPr id="6" name="Image 1" descr="figs/image9.png"/>
+          <p:cNvPicPr>
+            <a:picLocks noChangeAspect="1"/>
+          </p:cNvPicPr>
+          <p:nvPr/>
+        </p:nvPicPr>
+        <p:blipFill>
+          <a:blip r:embed="rId2"/>
+          <a:stretch>
+            <a:fillRect/>
+          </a:stretch>
+        </p:blipFill>
+        <p:spPr>
+          <a:xfrm>
+            <a:off x="6153912" y="1828800"/>
+            <a:ext cx="5486400" cy="2514600"/>
+          </a:xfrm>
+          <a:prstGeom prst="rect">
+            <a:avLst/>
+          </a:prstGeom>
+        </p:spPr>
+      </p:pic>
+      <p:sp>
+        <p:nvSpPr>
+          <p:cNvPr id="7" name="Shape 3"/>
+          <p:cNvSpPr/>
+          <p:nvPr/>
+        </p:nvSpPr>
+        <p:spPr>
+          <a:xfrm>
+            <a:off x="548640" y="4526280"/>
+            <a:ext cx="11091672" cy="1325880"/>
+          </a:xfrm>
+          <a:prstGeom prst="rect">
+            <a:avLst/>
+          </a:prstGeom>
+          <a:solidFill>
+            <a:srgbClr val="F4F6FA"/>
+          </a:solidFill>
+          <a:effectLst>
+            <a:outerShdw blurRad="88900" dist="38100" dir="8100000" algn="bl" rotWithShape="0">
+              <a:srgbClr val="000000">
+                <a:alpha val="13000"/>
+              </a:srgbClr>
+            </a:outerShdw>
+          </a:effectLst>
+        </p:spPr>
+      </p:sp>
+      <p:sp>
+        <p:nvSpPr>
+          <p:cNvPr id="8" name="Shape 4"/>
+          <p:cNvSpPr/>
+          <p:nvPr/>
+        </p:nvSpPr>
+        <p:spPr>
+          <a:xfrm>
+            <a:off x="548640" y="4526280"/>
+            <a:ext cx="82296" cy="1325880"/>
+          </a:xfrm>
+          <a:prstGeom prst="rect">
+            <a:avLst/>
+          </a:prstGeom>
+          <a:solidFill>
+            <a:srgbClr val="C1121F"/>
+          </a:solidFill>
+        </p:spPr>
+      </p:sp>
+      <p:sp>
+        <p:nvSpPr>
+          <p:cNvPr id="9" name="Text 5"/>
+          <p:cNvSpPr/>
+          <p:nvPr/>
+        </p:nvSpPr>
+        <p:spPr>
+          <a:xfrm>
+            <a:off x="822960" y="4636008"/>
+            <a:ext cx="5486400" cy="274320"/>
+          </a:xfrm>
+          <a:prstGeom prst="rect">
+            <a:avLst/>
+          </a:prstGeom>
+          <a:noFill/>
+        </p:spPr>
+        <p:txBody>
+          <a:bodyPr wrap="square" lIns="0" tIns="0" rIns="0" bIns="0" rtlCol="0" anchor="ctr"/>
+          <a:lstStyle/>
+          <a:p>
+            <a:pPr marL="0" indent="0">
+              <a:buNone/>
+            </a:pPr>
+            <a:r>
+              <a:rPr lang="en-US" sz="1400" b="1" dirty="0">
+                <a:solidFill>
+                  <a:srgbClr val="13294B"/>
+                </a:solidFill>
+                <a:latin typeface="Georgia" panose="02040502050405090303" pitchFamily="34" charset="0"/>
+                <a:ea typeface="Georgia" panose="02040502050405090303" pitchFamily="34" charset="-122"/>
+                <a:cs typeface="Georgia" panose="02040502050405090303" pitchFamily="34" charset="-120"/>
+              </a:rPr>
+              <a:t>The honest read</a:t>
+            </a:r>
+            <a:endParaRPr lang="en-US" sz="1400" dirty="0"/>
+          </a:p>
+        </p:txBody>
+      </p:sp>
+      <p:sp>
+        <p:nvSpPr>
+          <p:cNvPr id="10" name="Text 6"/>
+          <p:cNvSpPr/>
+          <p:nvPr/>
+        </p:nvSpPr>
+        <p:spPr>
+          <a:xfrm>
+            <a:off x="822960" y="4956048"/>
+            <a:ext cx="10543032" cy="822960"/>
+          </a:xfrm>
+          <a:prstGeom prst="rect">
+            <a:avLst/>
+          </a:prstGeom>
+          <a:noFill/>
+        </p:spPr>
+        <p:txBody>
+          <a:bodyPr wrap="square" lIns="0" tIns="0" rIns="0" bIns="0" rtlCol="0" anchor="ctr"/>
+          <a:lstStyle/>
+          <a:p>
+            <a:pPr marL="0" indent="0">
+              <a:lnSpc>
+                <a:spcPct val="110000"/>
+              </a:lnSpc>
+              <a:buNone/>
+            </a:pPr>
+            <a:r>
+              <a:rPr lang="en-US" sz="1250" dirty="0">
+                <a:solidFill>
+                  <a:srgbClr val="33425C"/>
+                </a:solidFill>
+                <a:latin typeface="Calibri" pitchFamily="34" charset="0"/>
+                <a:ea typeface="Calibri" pitchFamily="34" charset="-122"/>
+                <a:cs typeface="Calibri" pitchFamily="34" charset="-120"/>
+              </a:rPr>
+              <a:t>Only 3 events; FOMC contamination in 2 of 3.   </a:t>
+            </a:r>
+            <a:r>
+              <a:rPr lang="en-US" sz="1250" dirty="0">
+                <a:solidFill>
+                  <a:srgbClr val="33425C"/>
+                </a:solidFill>
+                <a:latin typeface="Calibri" pitchFamily="34" charset="0"/>
+                <a:ea typeface="Calibri" pitchFamily="34" charset="-122"/>
+                <a:cs typeface="Calibri" pitchFamily="34" charset="-120"/>
+              </a:rPr>
+              <a:t>All CARs individually insignificant (−41 / +23 / −27 bps).   </a:t>
+            </a:r>
+            <a:endParaRPr lang="en-US" sz="1250" dirty="0"/>
+          </a:p>
+          <a:p>
+            <a:pPr marL="0" indent="0">
+              <a:lnSpc>
+                <a:spcPct val="110000"/>
+              </a:lnSpc>
+              <a:buNone/>
+            </a:pPr>
+            <a:r>
+              <a:rPr lang="en-US" sz="1250" dirty="0">
+                <a:solidFill>
+                  <a:srgbClr val="33425C"/>
+                </a:solidFill>
+                <a:latin typeface="Calibri" pitchFamily="34" charset="0"/>
+                <a:ea typeface="Calibri" pitchFamily="34" charset="-122"/>
+                <a:cs typeface="Calibri" pitchFamily="34" charset="-120"/>
+              </a:rPr>
+              <a:t>Placebo ratio 7.0× — suggestive, not individually significant.   </a:t>
+            </a:r>
+            <a:r>
+              <a:rPr lang="en-US" sz="1250" dirty="0">
+                <a:solidFill>
+                  <a:srgbClr val="33425C"/>
+                </a:solidFill>
+                <a:latin typeface="Calibri" pitchFamily="34" charset="0"/>
+                <a:ea typeface="Calibri" pitchFamily="34" charset="-122"/>
+                <a:cs typeface="Calibri" pitchFamily="34" charset="-120"/>
+              </a:rPr>
+              <a:t>Story has shifted across re-runs — too unstable to be evidence.</a:t>
+            </a:r>
+            <a:endParaRPr lang="en-US" sz="1250" dirty="0"/>
+          </a:p>
+        </p:txBody>
+      </p:sp>
+      <p:sp>
+        <p:nvSpPr>
+          <p:cNvPr id="11" name="Text 7"/>
+          <p:cNvSpPr/>
+          <p:nvPr/>
+        </p:nvSpPr>
+        <p:spPr>
+          <a:xfrm>
+            <a:off x="548640" y="5989320"/>
+            <a:ext cx="11091672" cy="365760"/>
+          </a:xfrm>
+          <a:prstGeom prst="rect">
+            <a:avLst/>
+          </a:prstGeom>
+          <a:noFill/>
+        </p:spPr>
+        <p:txBody>
+          <a:bodyPr wrap="square" lIns="0" tIns="0" rIns="0" bIns="0" rtlCol="0" anchor="ctr"/>
+          <a:lstStyle/>
+          <a:p>
+            <a:pPr marL="0" indent="0">
+              <a:buNone/>
+            </a:pPr>
+            <a:r>
+              <a:rPr lang="en-US" sz="1250" b="1" i="1" dirty="0">
+                <a:solidFill>
+                  <a:srgbClr val="13294B"/>
+                </a:solidFill>
+                <a:latin typeface="Calibri" pitchFamily="34" charset="0"/>
+                <a:ea typeface="Calibri" pitchFamily="34" charset="-122"/>
+                <a:cs typeface="Calibri" pitchFamily="34" charset="-120"/>
+              </a:rPr>
+              <a:t>Role: illustrate the mechanism. The proof lives in the regression and the bid-cover test.</a:t>
+            </a:r>
+            <a:endParaRPr lang="en-US" sz="1250" dirty="0"/>
+          </a:p>
+        </p:txBody>
+      </p:sp>
+      <p:sp>
+        <p:nvSpPr>
+          <p:cNvPr id="12" name="Text 8"/>
+          <p:cNvSpPr/>
+          <p:nvPr/>
+        </p:nvSpPr>
+        <p:spPr>
+          <a:xfrm>
+            <a:off x="548640" y="6455664"/>
+            <a:ext cx="7315200" cy="274320"/>
+          </a:xfrm>
+          <a:prstGeom prst="rect">
+            <a:avLst/>
+          </a:prstGeom>
+          <a:noFill/>
+        </p:spPr>
+        <p:txBody>
+          <a:bodyPr wrap="square" lIns="0" tIns="0" rIns="0" bIns="0" rtlCol="0" anchor="ctr"/>
+          <a:lstStyle/>
+          <a:p>
+            <a:pPr marL="0" indent="0">
+              <a:buNone/>
+            </a:pPr>
+            <a:r>
+              <a:rPr lang="en-US" sz="900" dirty="0">
+                <a:solidFill>
+                  <a:srgbClr val="5B6B82"/>
+                </a:solidFill>
+                <a:latin typeface="Calibri" pitchFamily="34" charset="0"/>
+                <a:ea typeface="Calibri" pitchFamily="34" charset="-122"/>
+                <a:cs typeface="Calibri" pitchFamily="34" charset="-120"/>
+              </a:rPr>
+              <a:t>Stablecoins &amp; the Exorbitant Privilege</a:t>
+            </a:r>
+            <a:endParaRPr lang="en-US" sz="900" dirty="0"/>
+          </a:p>
+        </p:txBody>
+      </p:sp>
+      <p:sp>
+        <p:nvSpPr>
+          <p:cNvPr id="13" name="Text 9"/>
+          <p:cNvSpPr/>
+          <p:nvPr/>
+        </p:nvSpPr>
+        <p:spPr>
+          <a:xfrm>
+            <a:off x="11274552" y="6400800"/>
+            <a:ext cx="365760" cy="274320"/>
+          </a:xfrm>
+          <a:prstGeom prst="rect">
+            <a:avLst/>
+          </a:prstGeom>
+          <a:noFill/>
+        </p:spPr>
+        <p:txBody>
+          <a:bodyPr wrap="square" lIns="0" tIns="0" rIns="0" bIns="0" rtlCol="0" anchor="ctr"/>
+          <a:lstStyle/>
+          <a:p>
+            <a:pPr marL="0" indent="0" algn="r">
+              <a:buNone/>
+            </a:pPr>
+            <a:r>
+              <a:rPr lang="en-US" sz="1100" dirty="0">
+                <a:solidFill>
+                  <a:srgbClr val="5B6B82"/>
+                </a:solidFill>
+                <a:latin typeface="Calibri" pitchFamily="34" charset="0"/>
+                <a:ea typeface="Calibri" pitchFamily="34" charset="-122"/>
+                <a:cs typeface="Calibri" pitchFamily="34" charset="-120"/>
+              </a:rPr>
+              <a:t>16</a:t>
+            </a:r>
+            <a:endParaRPr lang="en-US" sz="1100" dirty="0"/>
+          </a:p>
+        </p:txBody>
+      </p:sp>
+    </p:spTree>
+  </p:cSld>
+  <p:clrMapOvr>
+    <a:masterClrMapping/>
+  </p:clrMapOvr>
+</p:sld>
+</file>
+
 <file path=ppt/slides/slide18.xml><?xml version="1.0" encoding="utf-8"?>
 <p:sld xmlns:a="http://schemas.openxmlformats.org/drawingml/2006/main" xmlns:r="http://schemas.openxmlformats.org/officeDocument/2006/relationships" xmlns:p="http://schemas.openxmlformats.org/presentationml/2006/main">
   <p:cSld>
@@ -11640,13 +11364,13 @@
             <a:r>
               <a:rPr lang="en-US" sz="1200" b="1" kern="0" spc="200" dirty="0">
                 <a:solidFill>
-                  <a:srgbClr val="E8A12C"/>
-                </a:solidFill>
-                <a:latin typeface="Calibri" pitchFamily="34" charset="0"/>
-                <a:ea typeface="Calibri" pitchFamily="34" charset="-122"/>
-                <a:cs typeface="Calibri" pitchFamily="34" charset="-120"/>
-              </a:rPr>
-              <a:t>SUPPORTING / ILLUSTRATIVE</a:t>
+                  <a:srgbClr val="1B998B"/>
+                </a:solidFill>
+                <a:latin typeface="Calibri" pitchFamily="34" charset="0"/>
+                <a:ea typeface="Calibri" pitchFamily="34" charset="-122"/>
+                <a:cs typeface="Calibri" pitchFamily="34" charset="-120"/>
+              </a:rPr>
+              <a:t>POLICY IMPLICATIONS</a:t>
             </a:r>
             <a:endParaRPr lang="en-US" sz="1200" dirty="0"/>
           </a:p>
@@ -11684,7 +11408,7 @@
                 <a:ea typeface="Georgia" panose="02040502050405090303" pitchFamily="34" charset="-122"/>
                 <a:cs typeface="Georgia" panose="02040502050405090303" pitchFamily="34" charset="-120"/>
               </a:rPr>
-              <a:t>Event Study — Honest About Its Limits</a:t>
+              <a:t>From an Empirical Region to a Regulatory Reference</a:t>
             </a:r>
             <a:endParaRPr lang="en-US" sz="2700" dirty="0"/>
           </a:p>
@@ -11692,100 +11416,14 @@
       </p:sp>
       <p:sp>
         <p:nvSpPr>
-          <p:cNvPr id="4" name="Text 2"/>
-          <p:cNvSpPr/>
-          <p:nvPr/>
-        </p:nvSpPr>
-        <p:spPr>
-          <a:xfrm>
-            <a:off x="548640" y="1417320"/>
-            <a:ext cx="11091672" cy="365760"/>
-          </a:xfrm>
-          <a:prstGeom prst="rect">
-            <a:avLst/>
-          </a:prstGeom>
-          <a:noFill/>
-        </p:spPr>
-        <p:txBody>
-          <a:bodyPr wrap="square" lIns="0" tIns="0" rIns="0" bIns="0" rtlCol="0" anchor="ctr"/>
-          <a:lstStyle/>
-          <a:p>
-            <a:pPr marL="0" indent="0">
-              <a:buNone/>
-            </a:pPr>
-            <a:r>
-              <a:rPr lang="en-US" sz="1500" i="1" dirty="0">
-                <a:solidFill>
-                  <a:srgbClr val="5B6B82"/>
-                </a:solidFill>
-                <a:latin typeface="Georgia" panose="02040502050405090303" pitchFamily="34" charset="0"/>
-                <a:ea typeface="Georgia" panose="02040502050405090303" pitchFamily="34" charset="-122"/>
-                <a:cs typeface="Georgia" panose="02040502050405090303" pitchFamily="34" charset="-120"/>
-              </a:rPr>
-              <a:t>Raw daily spread around stress events (not CARs). Included to illustrate plausibility — not as proof.</a:t>
-            </a:r>
-            <a:endParaRPr lang="en-US" sz="1500" dirty="0"/>
-          </a:p>
-        </p:txBody>
-      </p:sp>
-      <p:pic>
-        <p:nvPicPr>
-          <p:cNvPr id="5" name="Image 0" descr="figs/image8.png"/>
-          <p:cNvPicPr>
-            <a:picLocks noChangeAspect="1"/>
-          </p:cNvPicPr>
-          <p:nvPr/>
-        </p:nvPicPr>
-        <p:blipFill>
-          <a:blip r:embed="rId1"/>
-          <a:stretch>
-            <a:fillRect/>
-          </a:stretch>
-        </p:blipFill>
-        <p:spPr>
-          <a:xfrm>
-            <a:off x="548640" y="1828800"/>
-            <a:ext cx="5486400" cy="2514600"/>
-          </a:xfrm>
-          <a:prstGeom prst="rect">
-            <a:avLst/>
-          </a:prstGeom>
-        </p:spPr>
-      </p:pic>
-      <p:pic>
-        <p:nvPicPr>
-          <p:cNvPr id="6" name="Image 1" descr="figs/image9.png"/>
-          <p:cNvPicPr>
-            <a:picLocks noChangeAspect="1"/>
-          </p:cNvPicPr>
-          <p:nvPr/>
-        </p:nvPicPr>
-        <p:blipFill>
-          <a:blip r:embed="rId2"/>
-          <a:stretch>
-            <a:fillRect/>
-          </a:stretch>
-        </p:blipFill>
-        <p:spPr>
-          <a:xfrm>
-            <a:off x="6153912" y="1828800"/>
-            <a:ext cx="5486400" cy="2514600"/>
-          </a:xfrm>
-          <a:prstGeom prst="rect">
-            <a:avLst/>
-          </a:prstGeom>
-        </p:spPr>
-      </p:pic>
-      <p:sp>
-        <p:nvSpPr>
-          <p:cNvPr id="7" name="Shape 3"/>
-          <p:cNvSpPr/>
-          <p:nvPr/>
-        </p:nvSpPr>
-        <p:spPr>
-          <a:xfrm>
-            <a:off x="548640" y="4526280"/>
-            <a:ext cx="11091672" cy="1325880"/>
+          <p:cNvPr id="4" name="Shape 2"/>
+          <p:cNvSpPr/>
+          <p:nvPr/>
+        </p:nvSpPr>
+        <p:spPr>
+          <a:xfrm>
+            <a:off x="548640" y="1508760"/>
+            <a:ext cx="3514344" cy="2057400"/>
           </a:xfrm>
           <a:prstGeom prst="rect">
             <a:avLst/>
@@ -11804,33 +11442,33 @@
       </p:sp>
       <p:sp>
         <p:nvSpPr>
-          <p:cNvPr id="8" name="Shape 4"/>
-          <p:cNvSpPr/>
-          <p:nvPr/>
-        </p:nvSpPr>
-        <p:spPr>
-          <a:xfrm>
-            <a:off x="548640" y="4526280"/>
-            <a:ext cx="82296" cy="1325880"/>
+          <p:cNvPr id="5" name="Shape 3"/>
+          <p:cNvSpPr/>
+          <p:nvPr/>
+        </p:nvSpPr>
+        <p:spPr>
+          <a:xfrm>
+            <a:off x="548640" y="1508760"/>
+            <a:ext cx="82296" cy="2057400"/>
           </a:xfrm>
           <a:prstGeom prst="rect">
             <a:avLst/>
           </a:prstGeom>
           <a:solidFill>
-            <a:srgbClr val="C1121F"/>
+            <a:srgbClr val="13294B"/>
           </a:solidFill>
         </p:spPr>
       </p:sp>
       <p:sp>
         <p:nvSpPr>
-          <p:cNvPr id="9" name="Text 5"/>
-          <p:cNvSpPr/>
-          <p:nvPr/>
-        </p:nvSpPr>
-        <p:spPr>
-          <a:xfrm>
-            <a:off x="822960" y="4636008"/>
-            <a:ext cx="5486400" cy="274320"/>
+          <p:cNvPr id="6" name="Text 4"/>
+          <p:cNvSpPr/>
+          <p:nvPr/>
+        </p:nvSpPr>
+        <p:spPr>
+          <a:xfrm>
+            <a:off x="749808" y="1645920"/>
+            <a:ext cx="3148584" cy="502920"/>
           </a:xfrm>
           <a:prstGeom prst="rect">
             <a:avLst/>
@@ -11845,7 +11483,7 @@
               <a:buNone/>
             </a:pPr>
             <a:r>
-              <a:rPr lang="en-US" sz="1400" b="1" dirty="0">
+              <a:rPr lang="en-US" sz="1500" b="1" dirty="0">
                 <a:solidFill>
                   <a:srgbClr val="13294B"/>
                 </a:solidFill>
@@ -11853,22 +11491,22 @@
                 <a:ea typeface="Georgia" panose="02040502050405090303" pitchFamily="34" charset="-122"/>
                 <a:cs typeface="Georgia" panose="02040502050405090303" pitchFamily="34" charset="-120"/>
               </a:rPr>
-              <a:t>The honest read</a:t>
-            </a:r>
-            <a:endParaRPr lang="en-US" sz="1400" dirty="0"/>
-          </a:p>
-        </p:txBody>
-      </p:sp>
-      <p:sp>
-        <p:nvSpPr>
-          <p:cNvPr id="10" name="Text 6"/>
-          <p:cNvSpPr/>
-          <p:nvPr/>
-        </p:nvSpPr>
-        <p:spPr>
-          <a:xfrm>
-            <a:off x="822960" y="4956048"/>
-            <a:ext cx="10543032" cy="822960"/>
+              <a:t>MiCA (EU, 2024)</a:t>
+            </a:r>
+            <a:endParaRPr lang="en-US" sz="1500" dirty="0"/>
+          </a:p>
+        </p:txBody>
+      </p:sp>
+      <p:sp>
+        <p:nvSpPr>
+          <p:cNvPr id="7" name="Text 5"/>
+          <p:cNvSpPr/>
+          <p:nvPr/>
+        </p:nvSpPr>
+        <p:spPr>
+          <a:xfrm>
+            <a:off x="749808" y="2240280"/>
+            <a:ext cx="3130296" cy="1188720"/>
           </a:xfrm>
           <a:prstGeom prst="rect">
             <a:avLst/>
@@ -11881,7 +11519,7 @@
           <a:p>
             <a:pPr marL="0" indent="0">
               <a:lnSpc>
-                <a:spcPct val="110000"/>
+                <a:spcPct val="108000"/>
               </a:lnSpc>
               <a:buNone/>
             </a:pPr>
@@ -11894,25 +11532,118 @@
                 <a:ea typeface="Calibri" pitchFamily="34" charset="-122"/>
                 <a:cs typeface="Calibri" pitchFamily="34" charset="-120"/>
               </a:rPr>
-              <a:t>Only 3 events; FOMC contamination in 2 of 3.   </a:t>
-            </a:r>
-            <a:r>
-              <a:rPr lang="en-US" sz="1250" dirty="0">
-                <a:solidFill>
-                  <a:srgbClr val="33425C"/>
-                </a:solidFill>
-                <a:latin typeface="Calibri" pitchFamily="34" charset="0"/>
-                <a:ea typeface="Calibri" pitchFamily="34" charset="-122"/>
-                <a:cs typeface="Calibri" pitchFamily="34" charset="-120"/>
-              </a:rPr>
-              <a:t>All CARs individually insignificant (−41 / +23 / −27 bps).   </a:t>
+              <a:t>Mandates liquid-reserve requirements for ‘significant’ e-money tokens. Our region gives an empirically grounded floor.</a:t>
             </a:r>
             <a:endParaRPr lang="en-US" sz="1250" dirty="0"/>
           </a:p>
+        </p:txBody>
+      </p:sp>
+      <p:sp>
+        <p:nvSpPr>
+          <p:cNvPr id="8" name="Shape 6"/>
+          <p:cNvSpPr/>
+          <p:nvPr/>
+        </p:nvSpPr>
+        <p:spPr>
+          <a:xfrm>
+            <a:off x="4337304" y="1508760"/>
+            <a:ext cx="3514344" cy="2057400"/>
+          </a:xfrm>
+          <a:prstGeom prst="rect">
+            <a:avLst/>
+          </a:prstGeom>
+          <a:solidFill>
+            <a:srgbClr val="F4F6FA"/>
+          </a:solidFill>
+          <a:effectLst>
+            <a:outerShdw blurRad="88900" dist="38100" dir="8100000" algn="bl" rotWithShape="0">
+              <a:srgbClr val="000000">
+                <a:alpha val="13000"/>
+              </a:srgbClr>
+            </a:outerShdw>
+          </a:effectLst>
+        </p:spPr>
+      </p:sp>
+      <p:sp>
+        <p:nvSpPr>
+          <p:cNvPr id="9" name="Shape 7"/>
+          <p:cNvSpPr/>
+          <p:nvPr/>
+        </p:nvSpPr>
+        <p:spPr>
+          <a:xfrm>
+            <a:off x="4337304" y="1508760"/>
+            <a:ext cx="82296" cy="2057400"/>
+          </a:xfrm>
+          <a:prstGeom prst="rect">
+            <a:avLst/>
+          </a:prstGeom>
+          <a:solidFill>
+            <a:srgbClr val="1B998B"/>
+          </a:solidFill>
+        </p:spPr>
+      </p:sp>
+      <p:sp>
+        <p:nvSpPr>
+          <p:cNvPr id="10" name="Text 8"/>
+          <p:cNvSpPr/>
+          <p:nvPr/>
+        </p:nvSpPr>
+        <p:spPr>
+          <a:xfrm>
+            <a:off x="4538472" y="1645920"/>
+            <a:ext cx="3148584" cy="502920"/>
+          </a:xfrm>
+          <a:prstGeom prst="rect">
+            <a:avLst/>
+          </a:prstGeom>
+          <a:noFill/>
+        </p:spPr>
+        <p:txBody>
+          <a:bodyPr wrap="square" lIns="0" tIns="0" rIns="0" bIns="0" rtlCol="0" anchor="ctr"/>
+          <a:lstStyle/>
+          <a:p>
+            <a:pPr marL="0" indent="0">
+              <a:buNone/>
+            </a:pPr>
+            <a:r>
+              <a:rPr lang="en-US" sz="1500" b="1" dirty="0">
+                <a:solidFill>
+                  <a:srgbClr val="13294B"/>
+                </a:solidFill>
+                <a:latin typeface="Georgia" panose="02040502050405090303" pitchFamily="34" charset="0"/>
+                <a:ea typeface="Georgia" panose="02040502050405090303" pitchFamily="34" charset="-122"/>
+                <a:cs typeface="Georgia" panose="02040502050405090303" pitchFamily="34" charset="-120"/>
+              </a:rPr>
+              <a:t>GENIUS Act (US, 2025)</a:t>
+            </a:r>
+            <a:endParaRPr lang="en-US" sz="1500" dirty="0"/>
+          </a:p>
+        </p:txBody>
+      </p:sp>
+      <p:sp>
+        <p:nvSpPr>
+          <p:cNvPr id="11" name="Text 9"/>
+          <p:cNvSpPr/>
+          <p:nvPr/>
+        </p:nvSpPr>
+        <p:spPr>
+          <a:xfrm>
+            <a:off x="4538472" y="2240280"/>
+            <a:ext cx="3130296" cy="1188720"/>
+          </a:xfrm>
+          <a:prstGeom prst="rect">
+            <a:avLst/>
+          </a:prstGeom>
+          <a:noFill/>
+        </p:spPr>
+        <p:txBody>
+          <a:bodyPr wrap="square" lIns="0" tIns="0" rIns="0" bIns="0" rtlCol="0" anchor="ctr"/>
+          <a:lstStyle/>
           <a:p>
             <a:pPr marL="0" indent="0">
               <a:lnSpc>
-                <a:spcPct val="110000"/>
+                <a:spcPct val="108000"/>
               </a:lnSpc>
               <a:buNone/>
             </a:pPr>
@@ -11925,18 +11656,7 @@
                 <a:ea typeface="Calibri" pitchFamily="34" charset="-122"/>
                 <a:cs typeface="Calibri" pitchFamily="34" charset="-120"/>
               </a:rPr>
-              <a:t>Placebo ratio 7.0× — suggestive, not individually significant.   </a:t>
-            </a:r>
-            <a:r>
-              <a:rPr lang="en-US" sz="1250" dirty="0">
-                <a:solidFill>
-                  <a:srgbClr val="33425C"/>
-                </a:solidFill>
-                <a:latin typeface="Calibri" pitchFamily="34" charset="0"/>
-                <a:ea typeface="Calibri" pitchFamily="34" charset="-122"/>
-                <a:cs typeface="Calibri" pitchFamily="34" charset="-120"/>
-              </a:rPr>
-              <a:t>Story has shifted across re-runs — too unstable to be evidence.</a:t>
+              <a:t>Requires issuers to hold cash or near-cash reserves. Our CI [3.1%, 14.5%] maps to a regulatory range.</a:t>
             </a:r>
             <a:endParaRPr lang="en-US" sz="1250" dirty="0"/>
           </a:p>
@@ -11944,14 +11664,59 @@
       </p:sp>
       <p:sp>
         <p:nvSpPr>
-          <p:cNvPr id="11" name="Text 7"/>
-          <p:cNvSpPr/>
-          <p:nvPr/>
-        </p:nvSpPr>
-        <p:spPr>
-          <a:xfrm>
-            <a:off x="548640" y="5989320"/>
-            <a:ext cx="11091672" cy="365760"/>
+          <p:cNvPr id="12" name="Shape 10"/>
+          <p:cNvSpPr/>
+          <p:nvPr/>
+        </p:nvSpPr>
+        <p:spPr>
+          <a:xfrm>
+            <a:off x="8125968" y="1508760"/>
+            <a:ext cx="3514344" cy="2057400"/>
+          </a:xfrm>
+          <a:prstGeom prst="rect">
+            <a:avLst/>
+          </a:prstGeom>
+          <a:solidFill>
+            <a:srgbClr val="F4F6FA"/>
+          </a:solidFill>
+          <a:effectLst>
+            <a:outerShdw blurRad="88900" dist="38100" dir="8100000" algn="bl" rotWithShape="0">
+              <a:srgbClr val="000000">
+                <a:alpha val="13000"/>
+              </a:srgbClr>
+            </a:outerShdw>
+          </a:effectLst>
+        </p:spPr>
+      </p:sp>
+      <p:sp>
+        <p:nvSpPr>
+          <p:cNvPr id="13" name="Shape 11"/>
+          <p:cNvSpPr/>
+          <p:nvPr/>
+        </p:nvSpPr>
+        <p:spPr>
+          <a:xfrm>
+            <a:off x="8125968" y="1508760"/>
+            <a:ext cx="82296" cy="2057400"/>
+          </a:xfrm>
+          <a:prstGeom prst="rect">
+            <a:avLst/>
+          </a:prstGeom>
+          <a:solidFill>
+            <a:srgbClr val="E8A12C"/>
+          </a:solidFill>
+        </p:spPr>
+      </p:sp>
+      <p:sp>
+        <p:nvSpPr>
+          <p:cNvPr id="14" name="Text 12"/>
+          <p:cNvSpPr/>
+          <p:nvPr/>
+        </p:nvSpPr>
+        <p:spPr>
+          <a:xfrm>
+            <a:off x="8327136" y="1645920"/>
+            <a:ext cx="3148584" cy="502920"/>
           </a:xfrm>
           <a:prstGeom prst="rect">
             <a:avLst/>
@@ -11966,15 +11731,56 @@
               <a:buNone/>
             </a:pPr>
             <a:r>
-              <a:rPr lang="en-US" sz="1250" b="1" i="1" dirty="0">
+              <a:rPr lang="en-US" sz="1500" b="1" dirty="0">
                 <a:solidFill>
                   <a:srgbClr val="13294B"/>
                 </a:solidFill>
-                <a:latin typeface="Calibri" pitchFamily="34" charset="0"/>
-                <a:ea typeface="Calibri" pitchFamily="34" charset="-122"/>
-                <a:cs typeface="Calibri" pitchFamily="34" charset="-120"/>
-              </a:rPr>
-              <a:t>Role: illustrate the mechanism. The proof lives in the regression and the bid-cover test.</a:t>
+                <a:latin typeface="Georgia" panose="02040502050405090303" pitchFamily="34" charset="0"/>
+                <a:ea typeface="Georgia" panose="02040502050405090303" pitchFamily="34" charset="-122"/>
+                <a:cs typeface="Georgia" panose="02040502050405090303" pitchFamily="34" charset="-120"/>
+              </a:rPr>
+              <a:t>Market trajectory</a:t>
+            </a:r>
+            <a:endParaRPr lang="en-US" sz="1500" dirty="0"/>
+          </a:p>
+        </p:txBody>
+      </p:sp>
+      <p:sp>
+        <p:nvSpPr>
+          <p:cNvPr id="15" name="Text 13"/>
+          <p:cNvSpPr/>
+          <p:nvPr/>
+        </p:nvSpPr>
+        <p:spPr>
+          <a:xfrm>
+            <a:off x="8327136" y="2240280"/>
+            <a:ext cx="3130296" cy="1188720"/>
+          </a:xfrm>
+          <a:prstGeom prst="rect">
+            <a:avLst/>
+          </a:prstGeom>
+          <a:noFill/>
+        </p:spPr>
+        <p:txBody>
+          <a:bodyPr wrap="square" lIns="0" tIns="0" rIns="0" bIns="0" rtlCol="0" anchor="ctr"/>
+          <a:lstStyle/>
+          <a:p>
+            <a:pPr marL="0" indent="0">
+              <a:lnSpc>
+                <a:spcPct val="108000"/>
+              </a:lnSpc>
+              <a:buNone/>
+            </a:pPr>
+            <a:r>
+              <a:rPr lang="en-US" sz="1250" dirty="0">
+                <a:solidFill>
+                  <a:srgbClr val="33425C"/>
+                </a:solidFill>
+                <a:latin typeface="Calibri" pitchFamily="34" charset="0"/>
+                <a:ea typeface="Calibri" pitchFamily="34" charset="-122"/>
+                <a:cs typeface="Calibri" pitchFamily="34" charset="-120"/>
+              </a:rPr>
+              <a:t>Supply heading toward $1–2T. At that scale, forced-liquidation risk becomes systemic — a break-the-buck analogue.</a:t>
             </a:r>
             <a:endParaRPr lang="en-US" sz="1250" dirty="0"/>
           </a:p>
@@ -11982,7 +11788,134 @@
       </p:sp>
       <p:sp>
         <p:nvSpPr>
-          <p:cNvPr id="12" name="Text 8"/>
+          <p:cNvPr id="16" name="Shape 14"/>
+          <p:cNvSpPr/>
+          <p:nvPr/>
+        </p:nvSpPr>
+        <p:spPr>
+          <a:xfrm>
+            <a:off x="548640" y="3794760"/>
+            <a:ext cx="11091672" cy="1828800"/>
+          </a:xfrm>
+          <a:prstGeom prst="rect">
+            <a:avLst/>
+          </a:prstGeom>
+          <a:solidFill>
+            <a:srgbClr val="0E2746"/>
+          </a:solidFill>
+          <a:effectLst>
+            <a:outerShdw blurRad="88900" dist="38100" dir="8100000" algn="bl" rotWithShape="0">
+              <a:srgbClr val="000000">
+                <a:alpha val="13000"/>
+              </a:srgbClr>
+            </a:outerShdw>
+          </a:effectLst>
+        </p:spPr>
+      </p:sp>
+      <p:sp>
+        <p:nvSpPr>
+          <p:cNvPr id="17" name="Text 15"/>
+          <p:cNvSpPr/>
+          <p:nvPr/>
+        </p:nvSpPr>
+        <p:spPr>
+          <a:xfrm>
+            <a:off x="822960" y="3931920"/>
+            <a:ext cx="10543032" cy="365760"/>
+          </a:xfrm>
+          <a:prstGeom prst="rect">
+            <a:avLst/>
+          </a:prstGeom>
+          <a:noFill/>
+        </p:spPr>
+        <p:txBody>
+          <a:bodyPr wrap="square" lIns="0" tIns="0" rIns="0" bIns="0" rtlCol="0" anchor="ctr"/>
+          <a:lstStyle/>
+          <a:p>
+            <a:pPr marL="0" indent="0">
+              <a:buNone/>
+            </a:pPr>
+            <a:r>
+              <a:rPr lang="en-US" sz="1500" b="1" dirty="0">
+                <a:solidFill>
+                  <a:srgbClr val="E8A12C"/>
+                </a:solidFill>
+                <a:latin typeface="Georgia" panose="02040502050405090303" pitchFamily="34" charset="0"/>
+                <a:ea typeface="Georgia" panose="02040502050405090303" pitchFamily="34" charset="-122"/>
+                <a:cs typeface="Georgia" panose="02040502050405090303" pitchFamily="34" charset="-120"/>
+              </a:rPr>
+              <a:t>Our reference — stated as a range, not a precise mandate</a:t>
+            </a:r>
+            <a:endParaRPr lang="en-US" sz="1500" dirty="0"/>
+          </a:p>
+        </p:txBody>
+      </p:sp>
+      <p:sp>
+        <p:nvSpPr>
+          <p:cNvPr id="18" name="Text 16"/>
+          <p:cNvSpPr/>
+          <p:nvPr/>
+        </p:nvSpPr>
+        <p:spPr>
+          <a:xfrm>
+            <a:off x="822960" y="4343400"/>
+            <a:ext cx="10543032" cy="1188720"/>
+          </a:xfrm>
+          <a:prstGeom prst="rect">
+            <a:avLst/>
+          </a:prstGeom>
+          <a:noFill/>
+        </p:spPr>
+        <p:txBody>
+          <a:bodyPr wrap="square" lIns="0" tIns="0" rIns="0" bIns="0" rtlCol="0" anchor="ctr"/>
+          <a:lstStyle/>
+          <a:p>
+            <a:pPr marL="0" indent="0">
+              <a:lnSpc>
+                <a:spcPct val="115000"/>
+              </a:lnSpc>
+              <a:buNone/>
+            </a:pPr>
+            <a:r>
+              <a:rPr lang="en-US" sz="1400" dirty="0">
+                <a:solidFill>
+                  <a:srgbClr val="FFFFFF"/>
+                </a:solidFill>
+                <a:latin typeface="Calibri" pitchFamily="34" charset="0"/>
+                <a:ea typeface="Calibri" pitchFamily="34" charset="-122"/>
+                <a:cs typeface="Calibri" pitchFamily="34" charset="-120"/>
+              </a:rPr>
+              <a:t>Target a low-teens liquid-buffer floor (cash / near-cash), with estimates centered near 13% of outstanding supply — as a </a:t>
+            </a:r>
+            <a:r>
+              <a:rPr lang="en-US" sz="1400" b="1" dirty="0">
+                <a:solidFill>
+                  <a:srgbClr val="FFFFFF"/>
+                </a:solidFill>
+                <a:latin typeface="Calibri" pitchFamily="34" charset="0"/>
+                <a:ea typeface="Calibri" pitchFamily="34" charset="-122"/>
+                <a:cs typeface="Calibri" pitchFamily="34" charset="-120"/>
+              </a:rPr>
+              <a:t>behavioural break, not a welfare optimum.</a:t>
+            </a:r>
+            <a:r>
+              <a:rPr lang="en-US" sz="1400" dirty="0">
+                <a:solidFill>
+                  <a:srgbClr val="AEC0DD"/>
+                </a:solidFill>
+                <a:latin typeface="Calibri" pitchFamily="34" charset="0"/>
+                <a:ea typeface="Calibri" pitchFamily="34" charset="-122"/>
+                <a:cs typeface="Calibri" pitchFamily="34" charset="-120"/>
+              </a:rPr>
+              <a:t>  Below ~3% is clearly under-reserved; above ~14.5% is clearly adequate. As attestation data accumulates, the estimate will sharpen.</a:t>
+            </a:r>
+            <a:endParaRPr lang="en-US" sz="1400" dirty="0"/>
+          </a:p>
+        </p:txBody>
+      </p:sp>
+      <p:sp>
+        <p:nvSpPr>
+          <p:cNvPr id="19" name="Text 17"/>
           <p:cNvSpPr/>
           <p:nvPr/>
         </p:nvSpPr>
@@ -12020,7 +11953,7 @@
       </p:sp>
       <p:sp>
         <p:nvSpPr>
-          <p:cNvPr id="13" name="Text 9"/>
+          <p:cNvPr id="20" name="Text 18"/>
           <p:cNvSpPr/>
           <p:nvPr/>
         </p:nvSpPr>
@@ -12050,7 +11983,7 @@
                 <a:ea typeface="Calibri" pitchFamily="34" charset="-122"/>
                 <a:cs typeface="Calibri" pitchFamily="34" charset="-120"/>
               </a:rPr>
-              <a:t>16</a:t>
+              <a:t>17</a:t>
             </a:r>
             <a:endParaRPr lang="en-US" sz="1100" dirty="0"/>
           </a:p>
@@ -12121,7 +12054,7 @@
                 <a:ea typeface="Calibri" pitchFamily="34" charset="-122"/>
                 <a:cs typeface="Calibri" pitchFamily="34" charset="-120"/>
               </a:rPr>
-              <a:t>POLICY IMPLICATIONS</a:t>
+              <a:t>SUMMARY</a:t>
             </a:r>
             <a:endParaRPr lang="en-US" sz="1200" dirty="0"/>
           </a:p>
@@ -12159,7 +12092,7 @@
                 <a:ea typeface="Georgia" panose="02040502050405090303" pitchFamily="34" charset="-122"/>
                 <a:cs typeface="Georgia" panose="02040502050405090303" pitchFamily="34" charset="-120"/>
               </a:rPr>
-              <a:t>From an Empirical Region to a Regulatory Reference</a:t>
+              <a:t>Three Lines of Evidence — Each Limited, Together Coherent</a:t>
             </a:r>
             <a:endParaRPr lang="en-US" sz="2700" dirty="0"/>
           </a:p>
@@ -12173,8 +12106,8 @@
         </p:nvSpPr>
         <p:spPr>
           <a:xfrm>
-            <a:off x="548640" y="1508760"/>
-            <a:ext cx="3514344" cy="2057400"/>
+            <a:off x="548640" y="1554480"/>
+            <a:ext cx="3514344" cy="3840480"/>
           </a:xfrm>
           <a:prstGeom prst="rect">
             <a:avLst/>
@@ -12199,27 +12132,84 @@
         </p:nvSpPr>
         <p:spPr>
           <a:xfrm>
-            <a:off x="548640" y="1508760"/>
-            <a:ext cx="82296" cy="2057400"/>
+            <a:off x="548640" y="1554480"/>
+            <a:ext cx="82296" cy="3840480"/>
           </a:xfrm>
           <a:prstGeom prst="rect">
             <a:avLst/>
           </a:prstGeom>
           <a:solidFill>
-            <a:srgbClr val="13294B"/>
+            <a:srgbClr val="1B998B"/>
           </a:solidFill>
         </p:spPr>
       </p:sp>
       <p:sp>
         <p:nvSpPr>
-          <p:cNvPr id="6" name="Text 4"/>
-          <p:cNvSpPr/>
-          <p:nvPr/>
-        </p:nvSpPr>
-        <p:spPr>
-          <a:xfrm>
-            <a:off x="749808" y="1645920"/>
-            <a:ext cx="3148584" cy="502920"/>
+          <p:cNvPr id="6" name="Shape 4"/>
+          <p:cNvSpPr/>
+          <p:nvPr/>
+        </p:nvSpPr>
+        <p:spPr>
+          <a:xfrm>
+            <a:off x="777240" y="1737360"/>
+            <a:ext cx="384048" cy="384048"/>
+          </a:xfrm>
+          <a:prstGeom prst="ellipse">
+            <a:avLst/>
+          </a:prstGeom>
+          <a:solidFill>
+            <a:srgbClr val="1B998B"/>
+          </a:solidFill>
+        </p:spPr>
+      </p:sp>
+      <p:sp>
+        <p:nvSpPr>
+          <p:cNvPr id="7" name="Text 5"/>
+          <p:cNvSpPr/>
+          <p:nvPr/>
+        </p:nvSpPr>
+        <p:spPr>
+          <a:xfrm>
+            <a:off x="777240" y="1737360"/>
+            <a:ext cx="384048" cy="384048"/>
+          </a:xfrm>
+          <a:prstGeom prst="rect">
+            <a:avLst/>
+          </a:prstGeom>
+          <a:noFill/>
+        </p:spPr>
+        <p:txBody>
+          <a:bodyPr wrap="square" lIns="0" tIns="0" rIns="0" bIns="0" rtlCol="0" anchor="ctr"/>
+          <a:lstStyle/>
+          <a:p>
+            <a:pPr marL="0" indent="0" algn="ctr">
+              <a:buNone/>
+            </a:pPr>
+            <a:r>
+              <a:rPr lang="en-US" sz="1600" b="1" dirty="0">
+                <a:solidFill>
+                  <a:srgbClr val="FFFFFF"/>
+                </a:solidFill>
+                <a:latin typeface="Calibri" pitchFamily="34" charset="0"/>
+                <a:ea typeface="Calibri" pitchFamily="34" charset="-122"/>
+                <a:cs typeface="Calibri" pitchFamily="34" charset="-120"/>
+              </a:rPr>
+              <a:t>1</a:t>
+            </a:r>
+            <a:endParaRPr lang="en-US" sz="1600" dirty="0"/>
+          </a:p>
+        </p:txBody>
+      </p:sp>
+      <p:sp>
+        <p:nvSpPr>
+          <p:cNvPr id="8" name="Text 6"/>
+          <p:cNvSpPr/>
+          <p:nvPr/>
+        </p:nvSpPr>
+        <p:spPr>
+          <a:xfrm>
+            <a:off x="1280160" y="1737360"/>
+            <a:ext cx="2599944" cy="457200"/>
           </a:xfrm>
           <a:prstGeom prst="rect">
             <a:avLst/>
@@ -12234,7 +12224,7 @@
               <a:buNone/>
             </a:pPr>
             <a:r>
-              <a:rPr lang="en-US" sz="1500" b="1" dirty="0">
+              <a:rPr lang="en-US" sz="1600" b="1" dirty="0">
                 <a:solidFill>
                   <a:srgbClr val="13294B"/>
                 </a:solidFill>
@@ -12242,40 +12232,41 @@
                 <a:ea typeface="Georgia" panose="02040502050405090303" pitchFamily="34" charset="-122"/>
                 <a:cs typeface="Georgia" panose="02040502050405090303" pitchFamily="34" charset="-120"/>
               </a:rPr>
-              <a:t>MiCA (EU, 2024)</a:t>
-            </a:r>
-            <a:endParaRPr lang="en-US" sz="1500" dirty="0"/>
-          </a:p>
-        </p:txBody>
-      </p:sp>
-      <p:sp>
-        <p:nvSpPr>
-          <p:cNvPr id="7" name="Text 5"/>
-          <p:cNvSpPr/>
-          <p:nvPr/>
-        </p:nvSpPr>
-        <p:spPr>
-          <a:xfrm>
-            <a:off x="749808" y="2240280"/>
-            <a:ext cx="3130296" cy="1188720"/>
-          </a:xfrm>
-          <a:prstGeom prst="rect">
-            <a:avLst/>
-          </a:prstGeom>
-          <a:noFill/>
-        </p:spPr>
-        <p:txBody>
-          <a:bodyPr wrap="square" lIns="0" tIns="0" rIns="0" bIns="0" rtlCol="0" anchor="ctr"/>
-          <a:lstStyle/>
-          <a:p>
-            <a:pPr marL="0" indent="0">
-              <a:lnSpc>
-                <a:spcPct val="108000"/>
-              </a:lnSpc>
-              <a:buNone/>
-            </a:pPr>
-            <a:r>
-              <a:rPr lang="en-US" sz="1250" dirty="0">
+              <a:t>Regression</a:t>
+            </a:r>
+            <a:endParaRPr lang="en-US" sz="1600" dirty="0"/>
+          </a:p>
+        </p:txBody>
+      </p:sp>
+      <p:sp>
+        <p:nvSpPr>
+          <p:cNvPr id="9" name="Text 7"/>
+          <p:cNvSpPr/>
+          <p:nvPr/>
+        </p:nvSpPr>
+        <p:spPr>
+          <a:xfrm>
+            <a:off x="777240" y="2423160"/>
+            <a:ext cx="3057144" cy="2743200"/>
+          </a:xfrm>
+          <a:prstGeom prst="rect">
+            <a:avLst/>
+          </a:prstGeom>
+          <a:noFill/>
+        </p:spPr>
+        <p:txBody>
+          <a:bodyPr wrap="square" lIns="0" tIns="0" rIns="0" bIns="0" rtlCol="0" anchor="ctr"/>
+          <a:lstStyle/>
+          <a:p>
+            <a:pPr marL="342900" indent="-342900">
+              <a:spcAft>
+                <a:spcPts val="900"/>
+              </a:spcAft>
+              <a:buSzPct val="100000"/>
+              <a:buChar char="•"/>
+            </a:pPr>
+            <a:r>
+              <a:rPr lang="en-US" sz="1300" dirty="0">
                 <a:solidFill>
                   <a:srgbClr val="33425C"/>
                 </a:solidFill>
@@ -12283,22 +12274,64 @@
                 <a:ea typeface="Calibri" pitchFamily="34" charset="-122"/>
                 <a:cs typeface="Calibri" pitchFamily="34" charset="-120"/>
               </a:rPr>
-              <a:t>Mandates liquid-reserve requirements for ‘significant’ e-money tokens. Our region gives an empirically grounded floor.</a:t>
-            </a:r>
-            <a:endParaRPr lang="en-US" sz="1250" dirty="0"/>
-          </a:p>
-        </p:txBody>
-      </p:sp>
-      <p:sp>
-        <p:nvSpPr>
-          <p:cNvPr id="8" name="Shape 6"/>
-          <p:cNvSpPr/>
-          <p:nvPr/>
-        </p:nvSpPr>
-        <p:spPr>
-          <a:xfrm>
-            <a:off x="4337304" y="1508760"/>
-            <a:ext cx="3514344" cy="2057400"/>
+              <a:t>β₁ &lt; 0 — direction robust across every spec &amp; sample.</a:t>
+            </a:r>
+            <a:endParaRPr lang="en-US" sz="1300" dirty="0"/>
+          </a:p>
+          <a:p>
+            <a:pPr marL="342900" indent="-342900">
+              <a:spcAft>
+                <a:spcPts val="900"/>
+              </a:spcAft>
+              <a:buSzPct val="100000"/>
+              <a:buChar char="•"/>
+            </a:pPr>
+            <a:r>
+              <a:rPr lang="en-US" sz="1300" dirty="0">
+                <a:solidFill>
+                  <a:srgbClr val="33425C"/>
+                </a:solidFill>
+                <a:latin typeface="Calibri" pitchFamily="34" charset="0"/>
+                <a:ea typeface="Calibri" pitchFamily="34" charset="-122"/>
+                <a:cs typeface="Calibri" pitchFamily="34" charset="-120"/>
+              </a:rPr>
+              <a:t>Stablecoins amplify the privilege in normal times.</a:t>
+            </a:r>
+            <a:endParaRPr lang="en-US" sz="1300" dirty="0"/>
+          </a:p>
+          <a:p>
+            <a:pPr marL="342900" indent="-342900">
+              <a:spcAft>
+                <a:spcPts val="900"/>
+              </a:spcAft>
+              <a:buSzPct val="100000"/>
+              <a:buChar char="•"/>
+            </a:pPr>
+            <a:r>
+              <a:rPr lang="en-US" sz="1300" dirty="0">
+                <a:solidFill>
+                  <a:srgbClr val="33425C"/>
+                </a:solidFill>
+                <a:latin typeface="Calibri" pitchFamily="34" charset="0"/>
+                <a:ea typeface="Calibri" pitchFamily="34" charset="-122"/>
+                <a:cs typeface="Calibri" pitchFamily="34" charset="-120"/>
+              </a:rPr>
+              <a:t>~30 bps compression per 1-SD supply growth.</a:t>
+            </a:r>
+            <a:endParaRPr lang="en-US" sz="1300" dirty="0"/>
+          </a:p>
+        </p:txBody>
+      </p:sp>
+      <p:sp>
+        <p:nvSpPr>
+          <p:cNvPr id="10" name="Shape 8"/>
+          <p:cNvSpPr/>
+          <p:nvPr/>
+        </p:nvSpPr>
+        <p:spPr>
+          <a:xfrm>
+            <a:off x="4337304" y="1554480"/>
+            <a:ext cx="3514344" cy="3840480"/>
           </a:xfrm>
           <a:prstGeom prst="rect">
             <a:avLst/>
@@ -12317,33 +12350,90 @@
       </p:sp>
       <p:sp>
         <p:nvSpPr>
-          <p:cNvPr id="9" name="Shape 7"/>
-          <p:cNvSpPr/>
-          <p:nvPr/>
-        </p:nvSpPr>
-        <p:spPr>
-          <a:xfrm>
-            <a:off x="4337304" y="1508760"/>
-            <a:ext cx="82296" cy="2057400"/>
+          <p:cNvPr id="11" name="Shape 9"/>
+          <p:cNvSpPr/>
+          <p:nvPr/>
+        </p:nvSpPr>
+        <p:spPr>
+          <a:xfrm>
+            <a:off x="4337304" y="1554480"/>
+            <a:ext cx="82296" cy="3840480"/>
           </a:xfrm>
           <a:prstGeom prst="rect">
             <a:avLst/>
           </a:prstGeom>
           <a:solidFill>
-            <a:srgbClr val="1B998B"/>
+            <a:srgbClr val="5B8DEF"/>
           </a:solidFill>
         </p:spPr>
       </p:sp>
       <p:sp>
         <p:nvSpPr>
-          <p:cNvPr id="10" name="Text 8"/>
-          <p:cNvSpPr/>
-          <p:nvPr/>
-        </p:nvSpPr>
-        <p:spPr>
-          <a:xfrm>
-            <a:off x="4538472" y="1645920"/>
-            <a:ext cx="3148584" cy="502920"/>
+          <p:cNvPr id="12" name="Shape 10"/>
+          <p:cNvSpPr/>
+          <p:nvPr/>
+        </p:nvSpPr>
+        <p:spPr>
+          <a:xfrm>
+            <a:off x="4565904" y="1737360"/>
+            <a:ext cx="384048" cy="384048"/>
+          </a:xfrm>
+          <a:prstGeom prst="ellipse">
+            <a:avLst/>
+          </a:prstGeom>
+          <a:solidFill>
+            <a:srgbClr val="5B8DEF"/>
+          </a:solidFill>
+        </p:spPr>
+      </p:sp>
+      <p:sp>
+        <p:nvSpPr>
+          <p:cNvPr id="13" name="Text 11"/>
+          <p:cNvSpPr/>
+          <p:nvPr/>
+        </p:nvSpPr>
+        <p:spPr>
+          <a:xfrm>
+            <a:off x="4565904" y="1737360"/>
+            <a:ext cx="384048" cy="384048"/>
+          </a:xfrm>
+          <a:prstGeom prst="rect">
+            <a:avLst/>
+          </a:prstGeom>
+          <a:noFill/>
+        </p:spPr>
+        <p:txBody>
+          <a:bodyPr wrap="square" lIns="0" tIns="0" rIns="0" bIns="0" rtlCol="0" anchor="ctr"/>
+          <a:lstStyle/>
+          <a:p>
+            <a:pPr marL="0" indent="0" algn="ctr">
+              <a:buNone/>
+            </a:pPr>
+            <a:r>
+              <a:rPr lang="en-US" sz="1600" b="1" dirty="0">
+                <a:solidFill>
+                  <a:srgbClr val="FFFFFF"/>
+                </a:solidFill>
+                <a:latin typeface="Calibri" pitchFamily="34" charset="0"/>
+                <a:ea typeface="Calibri" pitchFamily="34" charset="-122"/>
+                <a:cs typeface="Calibri" pitchFamily="34" charset="-120"/>
+              </a:rPr>
+              <a:t>2</a:t>
+            </a:r>
+            <a:endParaRPr lang="en-US" sz="1600" dirty="0"/>
+          </a:p>
+        </p:txBody>
+      </p:sp>
+      <p:sp>
+        <p:nvSpPr>
+          <p:cNvPr id="14" name="Text 12"/>
+          <p:cNvSpPr/>
+          <p:nvPr/>
+        </p:nvSpPr>
+        <p:spPr>
+          <a:xfrm>
+            <a:off x="5068824" y="1737360"/>
+            <a:ext cx="2599944" cy="457200"/>
           </a:xfrm>
           <a:prstGeom prst="rect">
             <a:avLst/>
@@ -12358,7 +12448,7 @@
               <a:buNone/>
             </a:pPr>
             <a:r>
-              <a:rPr lang="en-US" sz="1500" b="1" dirty="0">
+              <a:rPr lang="en-US" sz="1600" b="1" dirty="0">
                 <a:solidFill>
                   <a:srgbClr val="13294B"/>
                 </a:solidFill>
@@ -12366,40 +12456,41 @@
                 <a:ea typeface="Georgia" panose="02040502050405090303" pitchFamily="34" charset="-122"/>
                 <a:cs typeface="Georgia" panose="02040502050405090303" pitchFamily="34" charset="-120"/>
               </a:rPr>
-              <a:t>GENIUS Act (US, 2025)</a:t>
-            </a:r>
-            <a:endParaRPr lang="en-US" sz="1500" dirty="0"/>
-          </a:p>
-        </p:txBody>
-      </p:sp>
-      <p:sp>
-        <p:nvSpPr>
-          <p:cNvPr id="11" name="Text 9"/>
-          <p:cNvSpPr/>
-          <p:nvPr/>
-        </p:nvSpPr>
-        <p:spPr>
-          <a:xfrm>
-            <a:off x="4538472" y="2240280"/>
-            <a:ext cx="3130296" cy="1188720"/>
-          </a:xfrm>
-          <a:prstGeom prst="rect">
-            <a:avLst/>
-          </a:prstGeom>
-          <a:noFill/>
-        </p:spPr>
-        <p:txBody>
-          <a:bodyPr wrap="square" lIns="0" tIns="0" rIns="0" bIns="0" rtlCol="0" anchor="ctr"/>
-          <a:lstStyle/>
-          <a:p>
-            <a:pPr marL="0" indent="0">
-              <a:lnSpc>
-                <a:spcPct val="108000"/>
-              </a:lnSpc>
-              <a:buNone/>
-            </a:pPr>
-            <a:r>
-              <a:rPr lang="en-US" sz="1250" dirty="0">
+              <a:t>Bid-cover mechanism</a:t>
+            </a:r>
+            <a:endParaRPr lang="en-US" sz="1600" dirty="0"/>
+          </a:p>
+        </p:txBody>
+      </p:sp>
+      <p:sp>
+        <p:nvSpPr>
+          <p:cNvPr id="15" name="Text 13"/>
+          <p:cNvSpPr/>
+          <p:nvPr/>
+        </p:nvSpPr>
+        <p:spPr>
+          <a:xfrm>
+            <a:off x="4565904" y="2423160"/>
+            <a:ext cx="3057144" cy="2743200"/>
+          </a:xfrm>
+          <a:prstGeom prst="rect">
+            <a:avLst/>
+          </a:prstGeom>
+          <a:noFill/>
+        </p:spPr>
+        <p:txBody>
+          <a:bodyPr wrap="square" lIns="0" tIns="0" rIns="0" bIns="0" rtlCol="0" anchor="ctr"/>
+          <a:lstStyle/>
+          <a:p>
+            <a:pPr marL="342900" indent="-342900">
+              <a:spcAft>
+                <a:spcPts val="900"/>
+              </a:spcAft>
+              <a:buSzPct val="100000"/>
+              <a:buChar char="•"/>
+            </a:pPr>
+            <a:r>
+              <a:rPr lang="en-US" sz="1300" dirty="0">
                 <a:solidFill>
                   <a:srgbClr val="33425C"/>
                 </a:solidFill>
@@ -12407,22 +12498,64 @@
                 <a:ea typeface="Calibri" pitchFamily="34" charset="-122"/>
                 <a:cs typeface="Calibri" pitchFamily="34" charset="-120"/>
               </a:rPr>
-              <a:t>Requires issuers to hold cash or near-cash reserves. Our CI [3.1%, 14.5%] maps to a regulatory range.</a:t>
-            </a:r>
-            <a:endParaRPr lang="en-US" sz="1250" dirty="0"/>
-          </a:p>
-        </p:txBody>
-      </p:sp>
-      <p:sp>
-        <p:nvSpPr>
-          <p:cNvPr id="12" name="Shape 10"/>
-          <p:cNvSpPr/>
-          <p:nvPr/>
-        </p:nvSpPr>
-        <p:spPr>
-          <a:xfrm>
-            <a:off x="8125968" y="1508760"/>
-            <a:ext cx="3514344" cy="2057400"/>
+              <a:t>Only the T-bill-heavy issuer (USDT) moves auction bid-cover.</a:t>
+            </a:r>
+            <a:endParaRPr lang="en-US" sz="1300" dirty="0"/>
+          </a:p>
+          <a:p>
+            <a:pPr marL="342900" indent="-342900">
+              <a:spcAft>
+                <a:spcPts val="900"/>
+              </a:spcAft>
+              <a:buSzPct val="100000"/>
+              <a:buChar char="•"/>
+            </a:pPr>
+            <a:r>
+              <a:rPr lang="en-US" sz="1300" dirty="0">
+                <a:solidFill>
+                  <a:srgbClr val="33425C"/>
+                </a:solidFill>
+                <a:latin typeface="Calibri" pitchFamily="34" charset="0"/>
+                <a:ea typeface="Calibri" pitchFamily="34" charset="-122"/>
+                <a:cs typeface="Calibri" pitchFamily="34" charset="-120"/>
+              </a:rPr>
+              <a:t>Wald rejects equality with USDC (p &lt; 0.004).</a:t>
+            </a:r>
+            <a:endParaRPr lang="en-US" sz="1300" dirty="0"/>
+          </a:p>
+          <a:p>
+            <a:pPr marL="342900" indent="-342900">
+              <a:spcAft>
+                <a:spcPts val="900"/>
+              </a:spcAft>
+              <a:buSzPct val="100000"/>
+              <a:buChar char="•"/>
+            </a:pPr>
+            <a:r>
+              <a:rPr lang="en-US" sz="1300" dirty="0">
+                <a:solidFill>
+                  <a:srgbClr val="33425C"/>
+                </a:solidFill>
+                <a:latin typeface="Calibri" pitchFamily="34" charset="0"/>
+                <a:ea typeface="Calibri" pitchFamily="34" charset="-122"/>
+                <a:cs typeface="Calibri" pitchFamily="34" charset="-120"/>
+              </a:rPr>
+              <a:t>Cleanest causal evidence; spread-independent.</a:t>
+            </a:r>
+            <a:endParaRPr lang="en-US" sz="1300" dirty="0"/>
+          </a:p>
+        </p:txBody>
+      </p:sp>
+      <p:sp>
+        <p:nvSpPr>
+          <p:cNvPr id="16" name="Shape 14"/>
+          <p:cNvSpPr/>
+          <p:nvPr/>
+        </p:nvSpPr>
+        <p:spPr>
+          <a:xfrm>
+            <a:off x="8125968" y="1554480"/>
+            <a:ext cx="3514344" cy="3840480"/>
           </a:xfrm>
           <a:prstGeom prst="rect">
             <a:avLst/>
@@ -12441,14 +12574,14 @@
       </p:sp>
       <p:sp>
         <p:nvSpPr>
-          <p:cNvPr id="13" name="Shape 11"/>
-          <p:cNvSpPr/>
-          <p:nvPr/>
-        </p:nvSpPr>
-        <p:spPr>
-          <a:xfrm>
-            <a:off x="8125968" y="1508760"/>
-            <a:ext cx="82296" cy="2057400"/>
+          <p:cNvPr id="17" name="Shape 15"/>
+          <p:cNvSpPr/>
+          <p:nvPr/>
+        </p:nvSpPr>
+        <p:spPr>
+          <a:xfrm>
+            <a:off x="8125968" y="1554480"/>
+            <a:ext cx="82296" cy="3840480"/>
           </a:xfrm>
           <a:prstGeom prst="rect">
             <a:avLst/>
@@ -12460,14 +12593,71 @@
       </p:sp>
       <p:sp>
         <p:nvSpPr>
-          <p:cNvPr id="14" name="Text 12"/>
-          <p:cNvSpPr/>
-          <p:nvPr/>
-        </p:nvSpPr>
-        <p:spPr>
-          <a:xfrm>
-            <a:off x="8327136" y="1645920"/>
-            <a:ext cx="3148584" cy="502920"/>
+          <p:cNvPr id="18" name="Shape 16"/>
+          <p:cNvSpPr/>
+          <p:nvPr/>
+        </p:nvSpPr>
+        <p:spPr>
+          <a:xfrm>
+            <a:off x="8354568" y="1737360"/>
+            <a:ext cx="384048" cy="384048"/>
+          </a:xfrm>
+          <a:prstGeom prst="ellipse">
+            <a:avLst/>
+          </a:prstGeom>
+          <a:solidFill>
+            <a:srgbClr val="E8A12C"/>
+          </a:solidFill>
+        </p:spPr>
+      </p:sp>
+      <p:sp>
+        <p:nvSpPr>
+          <p:cNvPr id="19" name="Text 17"/>
+          <p:cNvSpPr/>
+          <p:nvPr/>
+        </p:nvSpPr>
+        <p:spPr>
+          <a:xfrm>
+            <a:off x="8354568" y="1737360"/>
+            <a:ext cx="384048" cy="384048"/>
+          </a:xfrm>
+          <a:prstGeom prst="rect">
+            <a:avLst/>
+          </a:prstGeom>
+          <a:noFill/>
+        </p:spPr>
+        <p:txBody>
+          <a:bodyPr wrap="square" lIns="0" tIns="0" rIns="0" bIns="0" rtlCol="0" anchor="ctr"/>
+          <a:lstStyle/>
+          <a:p>
+            <a:pPr marL="0" indent="0" algn="ctr">
+              <a:buNone/>
+            </a:pPr>
+            <a:r>
+              <a:rPr lang="en-US" sz="1600" b="1" dirty="0">
+                <a:solidFill>
+                  <a:srgbClr val="FFFFFF"/>
+                </a:solidFill>
+                <a:latin typeface="Calibri" pitchFamily="34" charset="0"/>
+                <a:ea typeface="Calibri" pitchFamily="34" charset="-122"/>
+                <a:cs typeface="Calibri" pitchFamily="34" charset="-120"/>
+              </a:rPr>
+              <a:t>3</a:t>
+            </a:r>
+            <a:endParaRPr lang="en-US" sz="1600" dirty="0"/>
+          </a:p>
+        </p:txBody>
+      </p:sp>
+      <p:sp>
+        <p:nvSpPr>
+          <p:cNvPr id="20" name="Text 18"/>
+          <p:cNvSpPr/>
+          <p:nvPr/>
+        </p:nvSpPr>
+        <p:spPr>
+          <a:xfrm>
+            <a:off x="8857488" y="1737360"/>
+            <a:ext cx="2599944" cy="457200"/>
           </a:xfrm>
           <a:prstGeom prst="rect">
             <a:avLst/>
@@ -12482,7 +12672,7 @@
               <a:buNone/>
             </a:pPr>
             <a:r>
-              <a:rPr lang="en-US" sz="1500" b="1" dirty="0">
+              <a:rPr lang="en-US" sz="1600" b="1" dirty="0">
                 <a:solidFill>
                   <a:srgbClr val="13294B"/>
                 </a:solidFill>
@@ -12490,175 +12680,129 @@
                 <a:ea typeface="Georgia" panose="02040502050405090303" pitchFamily="34" charset="-122"/>
                 <a:cs typeface="Georgia" panose="02040502050405090303" pitchFamily="34" charset="-120"/>
               </a:rPr>
-              <a:t>Market trajectory</a:t>
-            </a:r>
-            <a:endParaRPr lang="en-US" sz="1500" dirty="0"/>
-          </a:p>
-        </p:txBody>
-      </p:sp>
-      <p:sp>
-        <p:nvSpPr>
-          <p:cNvPr id="15" name="Text 13"/>
-          <p:cNvSpPr/>
-          <p:nvPr/>
-        </p:nvSpPr>
-        <p:spPr>
-          <a:xfrm>
-            <a:off x="8327136" y="2240280"/>
-            <a:ext cx="3130296" cy="1188720"/>
-          </a:xfrm>
-          <a:prstGeom prst="rect">
-            <a:avLst/>
-          </a:prstGeom>
-          <a:noFill/>
-        </p:spPr>
-        <p:txBody>
-          <a:bodyPr wrap="square" lIns="0" tIns="0" rIns="0" bIns="0" rtlCol="0" anchor="ctr"/>
-          <a:lstStyle/>
-          <a:p>
-            <a:pPr marL="0" indent="0">
-              <a:lnSpc>
-                <a:spcPct val="108000"/>
-              </a:lnSpc>
+              <a:t>Threshold region</a:t>
+            </a:r>
+            <a:endParaRPr lang="en-US" sz="1600" dirty="0"/>
+          </a:p>
+        </p:txBody>
+      </p:sp>
+      <p:sp>
+        <p:nvSpPr>
+          <p:cNvPr id="21" name="Text 19"/>
+          <p:cNvSpPr/>
+          <p:nvPr/>
+        </p:nvSpPr>
+        <p:spPr>
+          <a:xfrm>
+            <a:off x="8354568" y="2423160"/>
+            <a:ext cx="3057144" cy="2743200"/>
+          </a:xfrm>
+          <a:prstGeom prst="rect">
+            <a:avLst/>
+          </a:prstGeom>
+          <a:noFill/>
+        </p:spPr>
+        <p:txBody>
+          <a:bodyPr wrap="square" lIns="0" tIns="0" rIns="0" bIns="0" rtlCol="0" anchor="ctr"/>
+          <a:lstStyle/>
+          <a:p>
+            <a:pPr marL="342900" indent="-342900">
+              <a:spcAft>
+                <a:spcPts val="900"/>
+              </a:spcAft>
+              <a:buSzPct val="100000"/>
+              <a:buChar char="•"/>
+            </a:pPr>
+            <a:r>
+              <a:rPr lang="en-US" sz="1300" dirty="0">
+                <a:solidFill>
+                  <a:srgbClr val="33425C"/>
+                </a:solidFill>
+                <a:latin typeface="Calibri" pitchFamily="34" charset="0"/>
+                <a:ea typeface="Calibri" pitchFamily="34" charset="-122"/>
+                <a:cs typeface="Calibri" pitchFamily="34" charset="-120"/>
+              </a:rPr>
+              <a:t>Two methods locate a break near 13% (Hansen, LSTAR).</a:t>
+            </a:r>
+            <a:endParaRPr lang="en-US" sz="1300" dirty="0"/>
+          </a:p>
+          <a:p>
+            <a:pPr marL="342900" indent="-342900">
+              <a:spcAft>
+                <a:spcPts val="900"/>
+              </a:spcAft>
+              <a:buSzPct val="100000"/>
+              <a:buChar char="•"/>
+            </a:pPr>
+            <a:r>
+              <a:rPr lang="en-US" sz="1300" dirty="0">
+                <a:solidFill>
+                  <a:srgbClr val="33425C"/>
+                </a:solidFill>
+                <a:latin typeface="Calibri" pitchFamily="34" charset="0"/>
+                <a:ea typeface="Calibri" pitchFamily="34" charset="-122"/>
+                <a:cs typeface="Calibri" pitchFamily="34" charset="-120"/>
+              </a:rPr>
+              <a:t>Location robust; precision limited (p = 0.406, N = 51).</a:t>
+            </a:r>
+            <a:endParaRPr lang="en-US" sz="1300" dirty="0"/>
+          </a:p>
+          <a:p>
+            <a:pPr marL="342900" indent="-342900">
+              <a:spcAft>
+                <a:spcPts val="900"/>
+              </a:spcAft>
+              <a:buSzPct val="100000"/>
+              <a:buChar char="•"/>
+            </a:pPr>
+            <a:r>
+              <a:rPr lang="en-US" sz="1300" dirty="0">
+                <a:solidFill>
+                  <a:srgbClr val="33425C"/>
+                </a:solidFill>
+                <a:latin typeface="Calibri" pitchFamily="34" charset="0"/>
+                <a:ea typeface="Calibri" pitchFamily="34" charset="-122"/>
+                <a:cs typeface="Calibri" pitchFamily="34" charset="-120"/>
+              </a:rPr>
+              <a:t>Reported as a region, not a knife-edge.</a:t>
+            </a:r>
+            <a:endParaRPr lang="en-US" sz="1300" dirty="0"/>
+          </a:p>
+        </p:txBody>
+      </p:sp>
+      <p:sp>
+        <p:nvSpPr>
+          <p:cNvPr id="22" name="Text 20"/>
+          <p:cNvSpPr/>
+          <p:nvPr/>
+        </p:nvSpPr>
+        <p:spPr>
+          <a:xfrm>
+            <a:off x="548640" y="5577840"/>
+            <a:ext cx="11091672" cy="411480"/>
+          </a:xfrm>
+          <a:prstGeom prst="rect">
+            <a:avLst/>
+          </a:prstGeom>
+          <a:noFill/>
+        </p:spPr>
+        <p:txBody>
+          <a:bodyPr wrap="square" lIns="0" tIns="0" rIns="0" bIns="0" rtlCol="0" anchor="ctr"/>
+          <a:lstStyle/>
+          <a:p>
+            <a:pPr marL="0" indent="0" algn="ctr">
               <a:buNone/>
             </a:pPr>
             <a:r>
-              <a:rPr lang="en-US" sz="1250" dirty="0">
-                <a:solidFill>
-                  <a:srgbClr val="33425C"/>
-                </a:solidFill>
-                <a:latin typeface="Calibri" pitchFamily="34" charset="0"/>
-                <a:ea typeface="Calibri" pitchFamily="34" charset="-122"/>
-                <a:cs typeface="Calibri" pitchFamily="34" charset="-120"/>
-              </a:rPr>
-              <a:t>Supply heading toward $1–2T. At that scale, forced-liquidation risk becomes systemic — a break-the-buck analogue.</a:t>
-            </a:r>
-            <a:endParaRPr lang="en-US" sz="1250" dirty="0"/>
-          </a:p>
-        </p:txBody>
-      </p:sp>
-      <p:sp>
-        <p:nvSpPr>
-          <p:cNvPr id="16" name="Shape 14"/>
-          <p:cNvSpPr/>
-          <p:nvPr/>
-        </p:nvSpPr>
-        <p:spPr>
-          <a:xfrm>
-            <a:off x="548640" y="3794760"/>
-            <a:ext cx="11091672" cy="1828800"/>
-          </a:xfrm>
-          <a:prstGeom prst="rect">
-            <a:avLst/>
-          </a:prstGeom>
-          <a:solidFill>
-            <a:srgbClr val="0E2746"/>
-          </a:solidFill>
-          <a:effectLst>
-            <a:outerShdw blurRad="88900" dist="38100" dir="8100000" algn="bl" rotWithShape="0">
-              <a:srgbClr val="000000">
-                <a:alpha val="13000"/>
-              </a:srgbClr>
-            </a:outerShdw>
-          </a:effectLst>
-        </p:spPr>
-      </p:sp>
-      <p:sp>
-        <p:nvSpPr>
-          <p:cNvPr id="17" name="Text 15"/>
-          <p:cNvSpPr/>
-          <p:nvPr/>
-        </p:nvSpPr>
-        <p:spPr>
-          <a:xfrm>
-            <a:off x="822960" y="3931920"/>
-            <a:ext cx="10543032" cy="365760"/>
-          </a:xfrm>
-          <a:prstGeom prst="rect">
-            <a:avLst/>
-          </a:prstGeom>
-          <a:noFill/>
-        </p:spPr>
-        <p:txBody>
-          <a:bodyPr wrap="square" lIns="0" tIns="0" rIns="0" bIns="0" rtlCol="0" anchor="ctr"/>
-          <a:lstStyle/>
-          <a:p>
-            <a:pPr marL="0" indent="0">
-              <a:buNone/>
-            </a:pPr>
-            <a:r>
-              <a:rPr lang="en-US" sz="1500" b="1" dirty="0">
-                <a:solidFill>
-                  <a:srgbClr val="E8A12C"/>
+              <a:rPr lang="en-US" sz="1400" b="1" i="1" dirty="0">
+                <a:solidFill>
+                  <a:srgbClr val="13294B"/>
                 </a:solidFill>
                 <a:latin typeface="Georgia" panose="02040502050405090303" pitchFamily="34" charset="0"/>
                 <a:ea typeface="Georgia" panose="02040502050405090303" pitchFamily="34" charset="-122"/>
                 <a:cs typeface="Georgia" panose="02040502050405090303" pitchFamily="34" charset="-120"/>
               </a:rPr>
-              <a:t>Our reference — stated as a range, not a precise mandate</a:t>
-            </a:r>
-            <a:endParaRPr lang="en-US" sz="1500" dirty="0"/>
-          </a:p>
-        </p:txBody>
-      </p:sp>
-      <p:sp>
-        <p:nvSpPr>
-          <p:cNvPr id="18" name="Text 16"/>
-          <p:cNvSpPr/>
-          <p:nvPr/>
-        </p:nvSpPr>
-        <p:spPr>
-          <a:xfrm>
-            <a:off x="822960" y="4343400"/>
-            <a:ext cx="10543032" cy="1188720"/>
-          </a:xfrm>
-          <a:prstGeom prst="rect">
-            <a:avLst/>
-          </a:prstGeom>
-          <a:noFill/>
-        </p:spPr>
-        <p:txBody>
-          <a:bodyPr wrap="square" lIns="0" tIns="0" rIns="0" bIns="0" rtlCol="0" anchor="ctr"/>
-          <a:lstStyle/>
-          <a:p>
-            <a:pPr marL="0" indent="0">
-              <a:lnSpc>
-                <a:spcPct val="115000"/>
-              </a:lnSpc>
-              <a:buNone/>
-            </a:pPr>
-            <a:r>
-              <a:rPr lang="en-US" sz="1400" dirty="0">
-                <a:solidFill>
-                  <a:srgbClr val="FFFFFF"/>
-                </a:solidFill>
-                <a:latin typeface="Calibri" pitchFamily="34" charset="0"/>
-                <a:ea typeface="Calibri" pitchFamily="34" charset="-122"/>
-                <a:cs typeface="Calibri" pitchFamily="34" charset="-120"/>
-              </a:rPr>
-              <a:t>Target a low-teens liquid-buffer floor (cash / near-cash), with estimates centered near 13% of outstanding supply — as a </a:t>
-            </a:r>
-            <a:r>
-              <a:rPr lang="en-US" sz="1400" b="1" dirty="0">
-                <a:solidFill>
-                  <a:srgbClr val="FFFFFF"/>
-                </a:solidFill>
-                <a:latin typeface="Calibri" pitchFamily="34" charset="0"/>
-                <a:ea typeface="Calibri" pitchFamily="34" charset="-122"/>
-                <a:cs typeface="Calibri" pitchFamily="34" charset="-120"/>
-              </a:rPr>
-              <a:t>behavioural break, not a welfare optimum.</a:t>
-            </a:r>
-            <a:r>
-              <a:rPr lang="en-US" sz="1400" dirty="0">
-                <a:solidFill>
-                  <a:srgbClr val="AEC0DD"/>
-                </a:solidFill>
-                <a:latin typeface="Calibri" pitchFamily="34" charset="0"/>
-                <a:ea typeface="Calibri" pitchFamily="34" charset="-122"/>
-                <a:cs typeface="Calibri" pitchFamily="34" charset="-120"/>
-              </a:rPr>
-              <a:t>  Below ~3% is clearly under-reserved; above ~14.5% is clearly adequate. As attestation data accumulates, the estimate will sharpen.</a:t>
+              <a:t>All three point the same way: stablecoins amplify the exorbitant privilege, with a fragility threshold near a 13% liquid buffer.</a:t>
             </a:r>
             <a:endParaRPr lang="en-US" sz="1400" dirty="0"/>
           </a:p>
@@ -12666,7 +12810,7 @@
       </p:sp>
       <p:sp>
         <p:nvSpPr>
-          <p:cNvPr id="19" name="Text 17"/>
+          <p:cNvPr id="23" name="Text 21"/>
           <p:cNvSpPr/>
           <p:nvPr/>
         </p:nvSpPr>
@@ -12704,7 +12848,7 @@
       </p:sp>
       <p:sp>
         <p:nvSpPr>
-          <p:cNvPr id="20" name="Text 18"/>
+          <p:cNvPr id="24" name="Text 22"/>
           <p:cNvSpPr/>
           <p:nvPr/>
         </p:nvSpPr>
@@ -12734,7 +12878,7 @@
                 <a:ea typeface="Calibri" pitchFamily="34" charset="-122"/>
                 <a:cs typeface="Calibri" pitchFamily="34" charset="-120"/>
               </a:rPr>
-              <a:t>17</a:t>
+              <a:t>18</a:t>
             </a:r>
             <a:endParaRPr lang="en-US" sz="1100" dirty="0"/>
           </a:p>
@@ -13438,7 +13582,7 @@
                 <a:ea typeface="Calibri" pitchFamily="34" charset="-122"/>
                 <a:cs typeface="Calibri" pitchFamily="34" charset="-120"/>
               </a:rPr>
-              <a:t>SUMMARY</a:t>
+              <a:t>LIMITATIONS &amp; NEXT STEPS</a:t>
             </a:r>
             <a:endParaRPr lang="en-US" sz="1200" dirty="0"/>
           </a:p>
@@ -13476,7 +13620,7 @@
                 <a:ea typeface="Georgia" panose="02040502050405090303" pitchFamily="34" charset="-122"/>
                 <a:cs typeface="Georgia" panose="02040502050405090303" pitchFamily="34" charset="-120"/>
               </a:rPr>
-              <a:t>Three Lines of Evidence — Each Limited, Together Coherent</a:t>
+              <a:t>Honest Constraints and the Agenda Ahead</a:t>
             </a:r>
             <a:endParaRPr lang="en-US" sz="2700" dirty="0"/>
           </a:p>
@@ -13490,8 +13634,8 @@
         </p:nvSpPr>
         <p:spPr>
           <a:xfrm>
-            <a:off x="548640" y="1554480"/>
-            <a:ext cx="3514344" cy="3840480"/>
+            <a:off x="548640" y="1508760"/>
+            <a:ext cx="5362956" cy="4297680"/>
           </a:xfrm>
           <a:prstGeom prst="rect">
             <a:avLst/>
@@ -13516,84 +13660,27 @@
         </p:nvSpPr>
         <p:spPr>
           <a:xfrm>
-            <a:off x="548640" y="1554480"/>
-            <a:ext cx="82296" cy="3840480"/>
+            <a:off x="548640" y="1508760"/>
+            <a:ext cx="82296" cy="4297680"/>
           </a:xfrm>
           <a:prstGeom prst="rect">
             <a:avLst/>
           </a:prstGeom>
           <a:solidFill>
-            <a:srgbClr val="1B998B"/>
+            <a:srgbClr val="C1121F"/>
           </a:solidFill>
         </p:spPr>
       </p:sp>
       <p:sp>
         <p:nvSpPr>
-          <p:cNvPr id="6" name="Shape 4"/>
-          <p:cNvSpPr/>
-          <p:nvPr/>
-        </p:nvSpPr>
-        <p:spPr>
-          <a:xfrm>
-            <a:off x="777240" y="1737360"/>
-            <a:ext cx="384048" cy="384048"/>
-          </a:xfrm>
-          <a:prstGeom prst="ellipse">
-            <a:avLst/>
-          </a:prstGeom>
-          <a:solidFill>
-            <a:srgbClr val="1B998B"/>
-          </a:solidFill>
-        </p:spPr>
-      </p:sp>
-      <p:sp>
-        <p:nvSpPr>
-          <p:cNvPr id="7" name="Text 5"/>
-          <p:cNvSpPr/>
-          <p:nvPr/>
-        </p:nvSpPr>
-        <p:spPr>
-          <a:xfrm>
-            <a:off x="777240" y="1737360"/>
-            <a:ext cx="384048" cy="384048"/>
-          </a:xfrm>
-          <a:prstGeom prst="rect">
-            <a:avLst/>
-          </a:prstGeom>
-          <a:noFill/>
-        </p:spPr>
-        <p:txBody>
-          <a:bodyPr wrap="square" lIns="0" tIns="0" rIns="0" bIns="0" rtlCol="0" anchor="ctr"/>
-          <a:lstStyle/>
-          <a:p>
-            <a:pPr marL="0" indent="0" algn="ctr">
-              <a:buNone/>
-            </a:pPr>
-            <a:r>
-              <a:rPr lang="en-US" sz="1600" b="1" dirty="0">
-                <a:solidFill>
-                  <a:srgbClr val="FFFFFF"/>
-                </a:solidFill>
-                <a:latin typeface="Calibri" pitchFamily="34" charset="0"/>
-                <a:ea typeface="Calibri" pitchFamily="34" charset="-122"/>
-                <a:cs typeface="Calibri" pitchFamily="34" charset="-120"/>
-              </a:rPr>
-              <a:t>1</a:t>
-            </a:r>
-            <a:endParaRPr lang="en-US" sz="1600" dirty="0"/>
-          </a:p>
-        </p:txBody>
-      </p:sp>
-      <p:sp>
-        <p:nvSpPr>
-          <p:cNvPr id="8" name="Text 6"/>
-          <p:cNvSpPr/>
-          <p:nvPr/>
-        </p:nvSpPr>
-        <p:spPr>
-          <a:xfrm>
-            <a:off x="1280160" y="1737360"/>
-            <a:ext cx="2599944" cy="457200"/>
+          <p:cNvPr id="6" name="Text 4"/>
+          <p:cNvSpPr/>
+          <p:nvPr/>
+        </p:nvSpPr>
+        <p:spPr>
+          <a:xfrm>
+            <a:off x="804672" y="1645920"/>
+            <a:ext cx="4905756" cy="365760"/>
           </a:xfrm>
           <a:prstGeom prst="rect">
             <a:avLst/>
@@ -13608,30 +13695,30 @@
               <a:buNone/>
             </a:pPr>
             <a:r>
-              <a:rPr lang="en-US" sz="1600" b="1" dirty="0">
-                <a:solidFill>
-                  <a:srgbClr val="13294B"/>
+              <a:rPr lang="en-US" sz="1700" b="1" dirty="0">
+                <a:solidFill>
+                  <a:srgbClr val="C1121F"/>
                 </a:solidFill>
                 <a:latin typeface="Georgia" panose="02040502050405090303" pitchFamily="34" charset="0"/>
                 <a:ea typeface="Georgia" panose="02040502050405090303" pitchFamily="34" charset="-122"/>
                 <a:cs typeface="Georgia" panose="02040502050405090303" pitchFamily="34" charset="-120"/>
               </a:rPr>
-              <a:t>Regression</a:t>
-            </a:r>
-            <a:endParaRPr lang="en-US" sz="1600" dirty="0"/>
-          </a:p>
-        </p:txBody>
-      </p:sp>
-      <p:sp>
-        <p:nvSpPr>
-          <p:cNvPr id="9" name="Text 7"/>
-          <p:cNvSpPr/>
-          <p:nvPr/>
-        </p:nvSpPr>
-        <p:spPr>
-          <a:xfrm>
-            <a:off x="777240" y="2423160"/>
-            <a:ext cx="3057144" cy="2743200"/>
+              <a:t>Limitations</a:t>
+            </a:r>
+            <a:endParaRPr lang="en-US" sz="1700" dirty="0"/>
+          </a:p>
+        </p:txBody>
+      </p:sp>
+      <p:sp>
+        <p:nvSpPr>
+          <p:cNvPr id="7" name="Text 5"/>
+          <p:cNvSpPr/>
+          <p:nvPr/>
+        </p:nvSpPr>
+        <p:spPr>
+          <a:xfrm>
+            <a:off x="804672" y="2103120"/>
+            <a:ext cx="4860036" cy="3657600"/>
           </a:xfrm>
           <a:prstGeom prst="rect">
             <a:avLst/>
@@ -13658,7 +13745,7 @@
                 <a:ea typeface="Calibri" pitchFamily="34" charset="-122"/>
                 <a:cs typeface="Calibri" pitchFamily="34" charset="-120"/>
               </a:rPr>
-              <a:t>β₁ &lt; 0 — direction robust across every spec &amp; sample.</a:t>
+              <a:t>N = 51 months limits power for threshold confirmation.</a:t>
             </a:r>
             <a:endParaRPr lang="en-US" sz="1300" dirty="0"/>
           </a:p>
@@ -13679,7 +13766,7 @@
                 <a:ea typeface="Calibri" pitchFamily="34" charset="-122"/>
                 <a:cs typeface="Calibri" pitchFamily="34" charset="-120"/>
               </a:rPr>
-              <a:t>Stablecoins amplify the privilege in normal times.</a:t>
+              <a:t>L forward-filled for ~13 months (Tether quarterly attestations).</a:t>
             </a:r>
             <a:endParaRPr lang="en-US" sz="1300" dirty="0"/>
           </a:p>
@@ -13700,22 +13787,85 @@
                 <a:ea typeface="Calibri" pitchFamily="34" charset="-122"/>
                 <a:cs typeface="Calibri" pitchFamily="34" charset="-120"/>
               </a:rPr>
-              <a:t>~30 bps compression per 1-SD supply growth.</a:t>
+              <a:t>Spread benchmark still overnight SOFR — finish with 3-mo Term SOFR.</a:t>
             </a:r>
             <a:endParaRPr lang="en-US" sz="1300" dirty="0"/>
           </a:p>
-        </p:txBody>
-      </p:sp>
-      <p:sp>
-        <p:nvSpPr>
-          <p:cNvPr id="10" name="Shape 8"/>
-          <p:cNvSpPr/>
-          <p:nvPr/>
-        </p:nvSpPr>
-        <p:spPr>
-          <a:xfrm>
-            <a:off x="4337304" y="1554480"/>
-            <a:ext cx="3514344" cy="3840480"/>
+          <a:p>
+            <a:pPr marL="342900" indent="-342900">
+              <a:spcAft>
+                <a:spcPts val="900"/>
+              </a:spcAft>
+              <a:buSzPct val="100000"/>
+              <a:buChar char="•"/>
+            </a:pPr>
+            <a:r>
+              <a:rPr lang="en-US" sz="1300" dirty="0">
+                <a:solidFill>
+                  <a:srgbClr val="33425C"/>
+                </a:solidFill>
+                <a:latin typeface="Calibri" pitchFamily="34" charset="0"/>
+                <a:ea typeface="Calibri" pitchFamily="34" charset="-122"/>
+                <a:cs typeface="Calibri" pitchFamily="34" charset="-120"/>
+              </a:rPr>
+              <a:t>Endogeneity not fully resolved (Granger addresses, doesn’t solve).</a:t>
+            </a:r>
+            <a:endParaRPr lang="en-US" sz="1300" dirty="0"/>
+          </a:p>
+          <a:p>
+            <a:pPr marL="342900" indent="-342900">
+              <a:spcAft>
+                <a:spcPts val="900"/>
+              </a:spcAft>
+              <a:buSzPct val="100000"/>
+              <a:buChar char="•"/>
+            </a:pPr>
+            <a:r>
+              <a:rPr lang="en-US" sz="1300" dirty="0">
+                <a:solidFill>
+                  <a:srgbClr val="33425C"/>
+                </a:solidFill>
+                <a:latin typeface="Calibri" pitchFamily="34" charset="0"/>
+                <a:ea typeface="Calibri" pitchFamily="34" charset="-122"/>
+                <a:cs typeface="Calibri" pitchFamily="34" charset="-120"/>
+              </a:rPr>
+              <a:t>Only 3 stress events; FOMC contamination in 2 of 3.</a:t>
+            </a:r>
+            <a:endParaRPr lang="en-US" sz="1300" dirty="0"/>
+          </a:p>
+          <a:p>
+            <a:pPr marL="342900" indent="-342900">
+              <a:spcAft>
+                <a:spcPts val="900"/>
+              </a:spcAft>
+              <a:buSzPct val="100000"/>
+              <a:buChar char="•"/>
+            </a:pPr>
+            <a:r>
+              <a:rPr lang="en-US" sz="1300" dirty="0">
+                <a:solidFill>
+                  <a:srgbClr val="33425C"/>
+                </a:solidFill>
+                <a:latin typeface="Calibri" pitchFamily="34" charset="0"/>
+                <a:ea typeface="Calibri" pitchFamily="34" charset="-122"/>
+                <a:cs typeface="Calibri" pitchFamily="34" charset="-120"/>
+              </a:rPr>
+              <a:t>Sample Jan 2022 – Mar 2026; may not generalize past 2026.</a:t>
+            </a:r>
+            <a:endParaRPr lang="en-US" sz="1300" dirty="0"/>
+          </a:p>
+        </p:txBody>
+      </p:sp>
+      <p:sp>
+        <p:nvSpPr>
+          <p:cNvPr id="8" name="Shape 6"/>
+          <p:cNvSpPr/>
+          <p:nvPr/>
+        </p:nvSpPr>
+        <p:spPr>
+          <a:xfrm>
+            <a:off x="6277356" y="1508760"/>
+            <a:ext cx="5362956" cy="4297680"/>
           </a:xfrm>
           <a:prstGeom prst="rect">
             <a:avLst/>
@@ -13734,90 +13884,33 @@
       </p:sp>
       <p:sp>
         <p:nvSpPr>
-          <p:cNvPr id="11" name="Shape 9"/>
-          <p:cNvSpPr/>
-          <p:nvPr/>
-        </p:nvSpPr>
-        <p:spPr>
-          <a:xfrm>
-            <a:off x="4337304" y="1554480"/>
-            <a:ext cx="82296" cy="3840480"/>
+          <p:cNvPr id="9" name="Shape 7"/>
+          <p:cNvSpPr/>
+          <p:nvPr/>
+        </p:nvSpPr>
+        <p:spPr>
+          <a:xfrm>
+            <a:off x="6277356" y="1508760"/>
+            <a:ext cx="82296" cy="4297680"/>
           </a:xfrm>
           <a:prstGeom prst="rect">
             <a:avLst/>
           </a:prstGeom>
           <a:solidFill>
-            <a:srgbClr val="5B8DEF"/>
+            <a:srgbClr val="1B998B"/>
           </a:solidFill>
         </p:spPr>
       </p:sp>
       <p:sp>
         <p:nvSpPr>
-          <p:cNvPr id="12" name="Shape 10"/>
-          <p:cNvSpPr/>
-          <p:nvPr/>
-        </p:nvSpPr>
-        <p:spPr>
-          <a:xfrm>
-            <a:off x="4565904" y="1737360"/>
-            <a:ext cx="384048" cy="384048"/>
-          </a:xfrm>
-          <a:prstGeom prst="ellipse">
-            <a:avLst/>
-          </a:prstGeom>
-          <a:solidFill>
-            <a:srgbClr val="5B8DEF"/>
-          </a:solidFill>
-        </p:spPr>
-      </p:sp>
-      <p:sp>
-        <p:nvSpPr>
-          <p:cNvPr id="13" name="Text 11"/>
-          <p:cNvSpPr/>
-          <p:nvPr/>
-        </p:nvSpPr>
-        <p:spPr>
-          <a:xfrm>
-            <a:off x="4565904" y="1737360"/>
-            <a:ext cx="384048" cy="384048"/>
-          </a:xfrm>
-          <a:prstGeom prst="rect">
-            <a:avLst/>
-          </a:prstGeom>
-          <a:noFill/>
-        </p:spPr>
-        <p:txBody>
-          <a:bodyPr wrap="square" lIns="0" tIns="0" rIns="0" bIns="0" rtlCol="0" anchor="ctr"/>
-          <a:lstStyle/>
-          <a:p>
-            <a:pPr marL="0" indent="0" algn="ctr">
-              <a:buNone/>
-            </a:pPr>
-            <a:r>
-              <a:rPr lang="en-US" sz="1600" b="1" dirty="0">
-                <a:solidFill>
-                  <a:srgbClr val="FFFFFF"/>
-                </a:solidFill>
-                <a:latin typeface="Calibri" pitchFamily="34" charset="0"/>
-                <a:ea typeface="Calibri" pitchFamily="34" charset="-122"/>
-                <a:cs typeface="Calibri" pitchFamily="34" charset="-120"/>
-              </a:rPr>
-              <a:t>2</a:t>
-            </a:r>
-            <a:endParaRPr lang="en-US" sz="1600" dirty="0"/>
-          </a:p>
-        </p:txBody>
-      </p:sp>
-      <p:sp>
-        <p:nvSpPr>
-          <p:cNvPr id="14" name="Text 12"/>
-          <p:cNvSpPr/>
-          <p:nvPr/>
-        </p:nvSpPr>
-        <p:spPr>
-          <a:xfrm>
-            <a:off x="5068824" y="1737360"/>
-            <a:ext cx="2599944" cy="457200"/>
+          <p:cNvPr id="10" name="Text 8"/>
+          <p:cNvSpPr/>
+          <p:nvPr/>
+        </p:nvSpPr>
+        <p:spPr>
+          <a:xfrm>
+            <a:off x="6533388" y="1645920"/>
+            <a:ext cx="4905756" cy="365760"/>
           </a:xfrm>
           <a:prstGeom prst="rect">
             <a:avLst/>
@@ -13832,30 +13925,30 @@
               <a:buNone/>
             </a:pPr>
             <a:r>
-              <a:rPr lang="en-US" sz="1600" b="1" dirty="0">
-                <a:solidFill>
-                  <a:srgbClr val="13294B"/>
+              <a:rPr lang="en-US" sz="1700" b="1" dirty="0">
+                <a:solidFill>
+                  <a:srgbClr val="1B998B"/>
                 </a:solidFill>
                 <a:latin typeface="Georgia" panose="02040502050405090303" pitchFamily="34" charset="0"/>
                 <a:ea typeface="Georgia" panose="02040502050405090303" pitchFamily="34" charset="-122"/>
                 <a:cs typeface="Georgia" panose="02040502050405090303" pitchFamily="34" charset="-120"/>
               </a:rPr>
-              <a:t>Bid-cover mechanism</a:t>
-            </a:r>
-            <a:endParaRPr lang="en-US" sz="1600" dirty="0"/>
-          </a:p>
-        </p:txBody>
-      </p:sp>
-      <p:sp>
-        <p:nvSpPr>
-          <p:cNvPr id="15" name="Text 13"/>
-          <p:cNvSpPr/>
-          <p:nvPr/>
-        </p:nvSpPr>
-        <p:spPr>
-          <a:xfrm>
-            <a:off x="4565904" y="2423160"/>
-            <a:ext cx="3057144" cy="2743200"/>
+              <a:t>Next steps</a:t>
+            </a:r>
+            <a:endParaRPr lang="en-US" sz="1700" dirty="0"/>
+          </a:p>
+        </p:txBody>
+      </p:sp>
+      <p:sp>
+        <p:nvSpPr>
+          <p:cNvPr id="11" name="Text 9"/>
+          <p:cNvSpPr/>
+          <p:nvPr/>
+        </p:nvSpPr>
+        <p:spPr>
+          <a:xfrm>
+            <a:off x="6533388" y="2103120"/>
+            <a:ext cx="4494276" cy="3657600"/>
           </a:xfrm>
           <a:prstGeom prst="rect">
             <a:avLst/>
@@ -13882,7 +13975,7 @@
                 <a:ea typeface="Calibri" pitchFamily="34" charset="-122"/>
                 <a:cs typeface="Calibri" pitchFamily="34" charset="-120"/>
               </a:rPr>
-              <a:t>Only the T-bill-heavy issuer (USDT) moves auction bid-cover.</a:t>
+              <a:t>Longer sample as attestations accumulate → power improves.</a:t>
             </a:r>
             <a:endParaRPr lang="en-US" sz="1300" dirty="0"/>
           </a:p>
@@ -13903,7 +13996,7 @@
                 <a:ea typeface="Calibri" pitchFamily="34" charset="-122"/>
                 <a:cs typeface="Calibri" pitchFamily="34" charset="-120"/>
               </a:rPr>
-              <a:t>Wald rejects equality with USDC (p &lt; 0.004).</a:t>
+              <a:t>Better identification: instrument supply with regulatory announcements.</a:t>
             </a:r>
             <a:endParaRPr lang="en-US" sz="1300" dirty="0"/>
           </a:p>
@@ -13924,171 +14017,10 @@
                 <a:ea typeface="Calibri" pitchFamily="34" charset="-122"/>
                 <a:cs typeface="Calibri" pitchFamily="34" charset="-120"/>
               </a:rPr>
-              <a:t>Cleanest causal evidence; spread-independent.</a:t>
+              <a:t>High-frequency: daily spread + daily supply for cleaner events.</a:t>
             </a:r>
             <a:endParaRPr lang="en-US" sz="1300" dirty="0"/>
           </a:p>
-        </p:txBody>
-      </p:sp>
-      <p:sp>
-        <p:nvSpPr>
-          <p:cNvPr id="16" name="Shape 14"/>
-          <p:cNvSpPr/>
-          <p:nvPr/>
-        </p:nvSpPr>
-        <p:spPr>
-          <a:xfrm>
-            <a:off x="8125968" y="1554480"/>
-            <a:ext cx="3514344" cy="3840480"/>
-          </a:xfrm>
-          <a:prstGeom prst="rect">
-            <a:avLst/>
-          </a:prstGeom>
-          <a:solidFill>
-            <a:srgbClr val="F4F6FA"/>
-          </a:solidFill>
-          <a:effectLst>
-            <a:outerShdw blurRad="88900" dist="38100" dir="8100000" algn="bl" rotWithShape="0">
-              <a:srgbClr val="000000">
-                <a:alpha val="13000"/>
-              </a:srgbClr>
-            </a:outerShdw>
-          </a:effectLst>
-        </p:spPr>
-      </p:sp>
-      <p:sp>
-        <p:nvSpPr>
-          <p:cNvPr id="17" name="Shape 15"/>
-          <p:cNvSpPr/>
-          <p:nvPr/>
-        </p:nvSpPr>
-        <p:spPr>
-          <a:xfrm>
-            <a:off x="8125968" y="1554480"/>
-            <a:ext cx="82296" cy="3840480"/>
-          </a:xfrm>
-          <a:prstGeom prst="rect">
-            <a:avLst/>
-          </a:prstGeom>
-          <a:solidFill>
-            <a:srgbClr val="E8A12C"/>
-          </a:solidFill>
-        </p:spPr>
-      </p:sp>
-      <p:sp>
-        <p:nvSpPr>
-          <p:cNvPr id="18" name="Shape 16"/>
-          <p:cNvSpPr/>
-          <p:nvPr/>
-        </p:nvSpPr>
-        <p:spPr>
-          <a:xfrm>
-            <a:off x="8354568" y="1737360"/>
-            <a:ext cx="384048" cy="384048"/>
-          </a:xfrm>
-          <a:prstGeom prst="ellipse">
-            <a:avLst/>
-          </a:prstGeom>
-          <a:solidFill>
-            <a:srgbClr val="E8A12C"/>
-          </a:solidFill>
-        </p:spPr>
-      </p:sp>
-      <p:sp>
-        <p:nvSpPr>
-          <p:cNvPr id="19" name="Text 17"/>
-          <p:cNvSpPr/>
-          <p:nvPr/>
-        </p:nvSpPr>
-        <p:spPr>
-          <a:xfrm>
-            <a:off x="8354568" y="1737360"/>
-            <a:ext cx="384048" cy="384048"/>
-          </a:xfrm>
-          <a:prstGeom prst="rect">
-            <a:avLst/>
-          </a:prstGeom>
-          <a:noFill/>
-        </p:spPr>
-        <p:txBody>
-          <a:bodyPr wrap="square" lIns="0" tIns="0" rIns="0" bIns="0" rtlCol="0" anchor="ctr"/>
-          <a:lstStyle/>
-          <a:p>
-            <a:pPr marL="0" indent="0" algn="ctr">
-              <a:buNone/>
-            </a:pPr>
-            <a:r>
-              <a:rPr lang="en-US" sz="1600" b="1" dirty="0">
-                <a:solidFill>
-                  <a:srgbClr val="FFFFFF"/>
-                </a:solidFill>
-                <a:latin typeface="Calibri" pitchFamily="34" charset="0"/>
-                <a:ea typeface="Calibri" pitchFamily="34" charset="-122"/>
-                <a:cs typeface="Calibri" pitchFamily="34" charset="-120"/>
-              </a:rPr>
-              <a:t>3</a:t>
-            </a:r>
-            <a:endParaRPr lang="en-US" sz="1600" dirty="0"/>
-          </a:p>
-        </p:txBody>
-      </p:sp>
-      <p:sp>
-        <p:nvSpPr>
-          <p:cNvPr id="20" name="Text 18"/>
-          <p:cNvSpPr/>
-          <p:nvPr/>
-        </p:nvSpPr>
-        <p:spPr>
-          <a:xfrm>
-            <a:off x="8857488" y="1737360"/>
-            <a:ext cx="2599944" cy="457200"/>
-          </a:xfrm>
-          <a:prstGeom prst="rect">
-            <a:avLst/>
-          </a:prstGeom>
-          <a:noFill/>
-        </p:spPr>
-        <p:txBody>
-          <a:bodyPr wrap="square" lIns="0" tIns="0" rIns="0" bIns="0" rtlCol="0" anchor="ctr"/>
-          <a:lstStyle/>
-          <a:p>
-            <a:pPr marL="0" indent="0">
-              <a:buNone/>
-            </a:pPr>
-            <a:r>
-              <a:rPr lang="en-US" sz="1600" b="1" dirty="0">
-                <a:solidFill>
-                  <a:srgbClr val="13294B"/>
-                </a:solidFill>
-                <a:latin typeface="Georgia" panose="02040502050405090303" pitchFamily="34" charset="0"/>
-                <a:ea typeface="Georgia" panose="02040502050405090303" pitchFamily="34" charset="-122"/>
-                <a:cs typeface="Georgia" panose="02040502050405090303" pitchFamily="34" charset="-120"/>
-              </a:rPr>
-              <a:t>Threshold region</a:t>
-            </a:r>
-            <a:endParaRPr lang="en-US" sz="1600" dirty="0"/>
-          </a:p>
-        </p:txBody>
-      </p:sp>
-      <p:sp>
-        <p:nvSpPr>
-          <p:cNvPr id="21" name="Text 19"/>
-          <p:cNvSpPr/>
-          <p:nvPr/>
-        </p:nvSpPr>
-        <p:spPr>
-          <a:xfrm>
-            <a:off x="8354568" y="2423160"/>
-            <a:ext cx="3057144" cy="2743200"/>
-          </a:xfrm>
-          <a:prstGeom prst="rect">
-            <a:avLst/>
-          </a:prstGeom>
-          <a:noFill/>
-        </p:spPr>
-        <p:txBody>
-          <a:bodyPr wrap="square" lIns="0" tIns="0" rIns="0" bIns="0" rtlCol="0" anchor="ctr"/>
-          <a:lstStyle/>
           <a:p>
             <a:pPr marL="342900" indent="-342900">
               <a:spcAft>
@@ -14106,7 +14038,7 @@
                 <a:ea typeface="Calibri" pitchFamily="34" charset="-122"/>
                 <a:cs typeface="Calibri" pitchFamily="34" charset="-120"/>
               </a:rPr>
-              <a:t>Two methods locate a break near 13% (Hansen, LSTAR).</a:t>
+              <a:t>Non-USD ecosystems: euro stablecoins, CBDC interactions.</a:t>
             </a:r>
             <a:endParaRPr lang="en-US" sz="1300" dirty="0"/>
           </a:p>
@@ -14127,74 +14059,15 @@
                 <a:ea typeface="Calibri" pitchFamily="34" charset="-122"/>
                 <a:cs typeface="Calibri" pitchFamily="34" charset="-120"/>
               </a:rPr>
-              <a:t>Location robust; precision limited (p = 0.406, N = 51).</a:t>
+              <a:t>Cross-country: does the same mechanism hold for EUR safe assets?</a:t>
             </a:r>
             <a:endParaRPr lang="en-US" sz="1300" dirty="0"/>
           </a:p>
-          <a:p>
-            <a:pPr marL="342900" indent="-342900">
-              <a:spcAft>
-                <a:spcPts val="900"/>
-              </a:spcAft>
-              <a:buSzPct val="100000"/>
-              <a:buChar char="•"/>
-            </a:pPr>
-            <a:r>
-              <a:rPr lang="en-US" sz="1300" dirty="0">
-                <a:solidFill>
-                  <a:srgbClr val="33425C"/>
-                </a:solidFill>
-                <a:latin typeface="Calibri" pitchFamily="34" charset="0"/>
-                <a:ea typeface="Calibri" pitchFamily="34" charset="-122"/>
-                <a:cs typeface="Calibri" pitchFamily="34" charset="-120"/>
-              </a:rPr>
-              <a:t>Reported as a region, not a knife-edge.</a:t>
-            </a:r>
-            <a:endParaRPr lang="en-US" sz="1300" dirty="0"/>
-          </a:p>
-        </p:txBody>
-      </p:sp>
-      <p:sp>
-        <p:nvSpPr>
-          <p:cNvPr id="22" name="Text 20"/>
-          <p:cNvSpPr/>
-          <p:nvPr/>
-        </p:nvSpPr>
-        <p:spPr>
-          <a:xfrm>
-            <a:off x="548640" y="5577840"/>
-            <a:ext cx="11091672" cy="411480"/>
-          </a:xfrm>
-          <a:prstGeom prst="rect">
-            <a:avLst/>
-          </a:prstGeom>
-          <a:noFill/>
-        </p:spPr>
-        <p:txBody>
-          <a:bodyPr wrap="square" lIns="0" tIns="0" rIns="0" bIns="0" rtlCol="0" anchor="ctr"/>
-          <a:lstStyle/>
-          <a:p>
-            <a:pPr marL="0" indent="0" algn="ctr">
-              <a:buNone/>
-            </a:pPr>
-            <a:r>
-              <a:rPr lang="en-US" sz="1400" b="1" i="1" dirty="0">
-                <a:solidFill>
-                  <a:srgbClr val="13294B"/>
-                </a:solidFill>
-                <a:latin typeface="Georgia" panose="02040502050405090303" pitchFamily="34" charset="0"/>
-                <a:ea typeface="Georgia" panose="02040502050405090303" pitchFamily="34" charset="-122"/>
-                <a:cs typeface="Georgia" panose="02040502050405090303" pitchFamily="34" charset="-120"/>
-              </a:rPr>
-              <a:t>All three point the same way: stablecoins amplify the exorbitant privilege, with a fragility threshold near a 13% liquid buffer.</a:t>
-            </a:r>
-            <a:endParaRPr lang="en-US" sz="1400" dirty="0"/>
-          </a:p>
-        </p:txBody>
-      </p:sp>
-      <p:sp>
-        <p:nvSpPr>
-          <p:cNvPr id="23" name="Text 21"/>
+        </p:txBody>
+      </p:sp>
+      <p:sp>
+        <p:nvSpPr>
+          <p:cNvPr id="12" name="Text 10"/>
           <p:cNvSpPr/>
           <p:nvPr/>
         </p:nvSpPr>
@@ -14232,7 +14105,7 @@
       </p:sp>
       <p:sp>
         <p:nvSpPr>
-          <p:cNvPr id="24" name="Text 22"/>
+          <p:cNvPr id="13" name="Text 11"/>
           <p:cNvSpPr/>
           <p:nvPr/>
         </p:nvSpPr>
@@ -14262,7 +14135,7 @@
                 <a:ea typeface="Calibri" pitchFamily="34" charset="-122"/>
                 <a:cs typeface="Calibri" pitchFamily="34" charset="-120"/>
               </a:rPr>
-              <a:t>18</a:t>
+              <a:t>19</a:t>
             </a:r>
             <a:endParaRPr lang="en-US" sz="1100" dirty="0"/>
           </a:p>
@@ -14277,630 +14150,6 @@
 </file>
 
 <file path=ppt/slides/slide21.xml><?xml version="1.0" encoding="utf-8"?>
-<p:sld xmlns:a="http://schemas.openxmlformats.org/drawingml/2006/main" xmlns:r="http://schemas.openxmlformats.org/officeDocument/2006/relationships" xmlns:p="http://schemas.openxmlformats.org/presentationml/2006/main">
-  <p:cSld>
-    <p:bg>
-      <p:bgPr>
-        <a:solidFill>
-          <a:srgbClr val="FFFFFF"/>
-        </a:solidFill>
-        <a:effectLst/>
-      </p:bgPr>
-    </p:bg>
-    <p:spTree>
-      <p:nvGrpSpPr>
-        <p:cNvPr id="1" name=""/>
-        <p:cNvGrpSpPr/>
-        <p:nvPr/>
-      </p:nvGrpSpPr>
-      <p:grpSpPr>
-        <a:xfrm>
-          <a:off x="0" y="0"/>
-          <a:ext cx="0" cy="0"/>
-          <a:chOff x="0" y="0"/>
-          <a:chExt cx="0" cy="0"/>
-        </a:xfrm>
-      </p:grpSpPr>
-      <p:sp>
-        <p:nvSpPr>
-          <p:cNvPr id="2" name="Text 0"/>
-          <p:cNvSpPr/>
-          <p:nvPr/>
-        </p:nvSpPr>
-        <p:spPr>
-          <a:xfrm>
-            <a:off x="548640" y="384048"/>
-            <a:ext cx="11091672" cy="274320"/>
-          </a:xfrm>
-          <a:prstGeom prst="rect">
-            <a:avLst/>
-          </a:prstGeom>
-          <a:noFill/>
-        </p:spPr>
-        <p:txBody>
-          <a:bodyPr wrap="square" lIns="0" tIns="0" rIns="0" bIns="0" rtlCol="0" anchor="ctr"/>
-          <a:lstStyle/>
-          <a:p>
-            <a:pPr marL="0" indent="0">
-              <a:buNone/>
-            </a:pPr>
-            <a:r>
-              <a:rPr lang="en-US" sz="1200" b="1" kern="0" spc="200" dirty="0">
-                <a:solidFill>
-                  <a:srgbClr val="1B998B"/>
-                </a:solidFill>
-                <a:latin typeface="Calibri" pitchFamily="34" charset="0"/>
-                <a:ea typeface="Calibri" pitchFamily="34" charset="-122"/>
-                <a:cs typeface="Calibri" pitchFamily="34" charset="-120"/>
-              </a:rPr>
-              <a:t>LIMITATIONS &amp; NEXT STEPS</a:t>
-            </a:r>
-            <a:endParaRPr lang="en-US" sz="1200" dirty="0"/>
-          </a:p>
-        </p:txBody>
-      </p:sp>
-      <p:sp>
-        <p:nvSpPr>
-          <p:cNvPr id="3" name="Text 1"/>
-          <p:cNvSpPr/>
-          <p:nvPr/>
-        </p:nvSpPr>
-        <p:spPr>
-          <a:xfrm>
-            <a:off x="548640" y="658368"/>
-            <a:ext cx="11091672" cy="685800"/>
-          </a:xfrm>
-          <a:prstGeom prst="rect">
-            <a:avLst/>
-          </a:prstGeom>
-          <a:noFill/>
-        </p:spPr>
-        <p:txBody>
-          <a:bodyPr wrap="square" lIns="0" tIns="0" rIns="0" bIns="0" rtlCol="0" anchor="ctr"/>
-          <a:lstStyle/>
-          <a:p>
-            <a:pPr marL="0" indent="0">
-              <a:buNone/>
-            </a:pPr>
-            <a:r>
-              <a:rPr lang="en-US" sz="2700" b="1" dirty="0">
-                <a:solidFill>
-                  <a:srgbClr val="13294B"/>
-                </a:solidFill>
-                <a:latin typeface="Georgia" panose="02040502050405090303" pitchFamily="34" charset="0"/>
-                <a:ea typeface="Georgia" panose="02040502050405090303" pitchFamily="34" charset="-122"/>
-                <a:cs typeface="Georgia" panose="02040502050405090303" pitchFamily="34" charset="-120"/>
-              </a:rPr>
-              <a:t>Honest Constraints and the Agenda Ahead</a:t>
-            </a:r>
-            <a:endParaRPr lang="en-US" sz="2700" dirty="0"/>
-          </a:p>
-        </p:txBody>
-      </p:sp>
-      <p:sp>
-        <p:nvSpPr>
-          <p:cNvPr id="4" name="Shape 2"/>
-          <p:cNvSpPr/>
-          <p:nvPr/>
-        </p:nvSpPr>
-        <p:spPr>
-          <a:xfrm>
-            <a:off x="548640" y="1508760"/>
-            <a:ext cx="5362956" cy="4297680"/>
-          </a:xfrm>
-          <a:prstGeom prst="rect">
-            <a:avLst/>
-          </a:prstGeom>
-          <a:solidFill>
-            <a:srgbClr val="F4F6FA"/>
-          </a:solidFill>
-          <a:effectLst>
-            <a:outerShdw blurRad="88900" dist="38100" dir="8100000" algn="bl" rotWithShape="0">
-              <a:srgbClr val="000000">
-                <a:alpha val="13000"/>
-              </a:srgbClr>
-            </a:outerShdw>
-          </a:effectLst>
-        </p:spPr>
-      </p:sp>
-      <p:sp>
-        <p:nvSpPr>
-          <p:cNvPr id="5" name="Shape 3"/>
-          <p:cNvSpPr/>
-          <p:nvPr/>
-        </p:nvSpPr>
-        <p:spPr>
-          <a:xfrm>
-            <a:off x="548640" y="1508760"/>
-            <a:ext cx="82296" cy="4297680"/>
-          </a:xfrm>
-          <a:prstGeom prst="rect">
-            <a:avLst/>
-          </a:prstGeom>
-          <a:solidFill>
-            <a:srgbClr val="C1121F"/>
-          </a:solidFill>
-        </p:spPr>
-      </p:sp>
-      <p:sp>
-        <p:nvSpPr>
-          <p:cNvPr id="6" name="Text 4"/>
-          <p:cNvSpPr/>
-          <p:nvPr/>
-        </p:nvSpPr>
-        <p:spPr>
-          <a:xfrm>
-            <a:off x="804672" y="1645920"/>
-            <a:ext cx="4905756" cy="365760"/>
-          </a:xfrm>
-          <a:prstGeom prst="rect">
-            <a:avLst/>
-          </a:prstGeom>
-          <a:noFill/>
-        </p:spPr>
-        <p:txBody>
-          <a:bodyPr wrap="square" lIns="0" tIns="0" rIns="0" bIns="0" rtlCol="0" anchor="ctr"/>
-          <a:lstStyle/>
-          <a:p>
-            <a:pPr marL="0" indent="0">
-              <a:buNone/>
-            </a:pPr>
-            <a:r>
-              <a:rPr lang="en-US" sz="1700" b="1" dirty="0">
-                <a:solidFill>
-                  <a:srgbClr val="C1121F"/>
-                </a:solidFill>
-                <a:latin typeface="Georgia" panose="02040502050405090303" pitchFamily="34" charset="0"/>
-                <a:ea typeface="Georgia" panose="02040502050405090303" pitchFamily="34" charset="-122"/>
-                <a:cs typeface="Georgia" panose="02040502050405090303" pitchFamily="34" charset="-120"/>
-              </a:rPr>
-              <a:t>Limitations</a:t>
-            </a:r>
-            <a:endParaRPr lang="en-US" sz="1700" dirty="0"/>
-          </a:p>
-        </p:txBody>
-      </p:sp>
-      <p:sp>
-        <p:nvSpPr>
-          <p:cNvPr id="7" name="Text 5"/>
-          <p:cNvSpPr/>
-          <p:nvPr/>
-        </p:nvSpPr>
-        <p:spPr>
-          <a:xfrm>
-            <a:off x="804672" y="2103120"/>
-            <a:ext cx="4860036" cy="3657600"/>
-          </a:xfrm>
-          <a:prstGeom prst="rect">
-            <a:avLst/>
-          </a:prstGeom>
-          <a:noFill/>
-        </p:spPr>
-        <p:txBody>
-          <a:bodyPr wrap="square" lIns="0" tIns="0" rIns="0" bIns="0" rtlCol="0" anchor="ctr"/>
-          <a:lstStyle/>
-          <a:p>
-            <a:pPr marL="342900" indent="-342900">
-              <a:spcAft>
-                <a:spcPts val="900"/>
-              </a:spcAft>
-              <a:buSzPct val="100000"/>
-              <a:buChar char="•"/>
-            </a:pPr>
-            <a:r>
-              <a:rPr lang="en-US" sz="1300" dirty="0">
-                <a:solidFill>
-                  <a:srgbClr val="33425C"/>
-                </a:solidFill>
-                <a:latin typeface="Calibri" pitchFamily="34" charset="0"/>
-                <a:ea typeface="Calibri" pitchFamily="34" charset="-122"/>
-                <a:cs typeface="Calibri" pitchFamily="34" charset="-120"/>
-              </a:rPr>
-              <a:t>N = 51 months limits power for threshold confirmation.</a:t>
-            </a:r>
-            <a:endParaRPr lang="en-US" sz="1300" dirty="0"/>
-          </a:p>
-          <a:p>
-            <a:pPr marL="342900" indent="-342900">
-              <a:spcAft>
-                <a:spcPts val="900"/>
-              </a:spcAft>
-              <a:buSzPct val="100000"/>
-              <a:buChar char="•"/>
-            </a:pPr>
-            <a:r>
-              <a:rPr lang="en-US" sz="1300" dirty="0">
-                <a:solidFill>
-                  <a:srgbClr val="33425C"/>
-                </a:solidFill>
-                <a:latin typeface="Calibri" pitchFamily="34" charset="0"/>
-                <a:ea typeface="Calibri" pitchFamily="34" charset="-122"/>
-                <a:cs typeface="Calibri" pitchFamily="34" charset="-120"/>
-              </a:rPr>
-              <a:t>L forward-filled for ~13 months (Tether quarterly attestations).</a:t>
-            </a:r>
-            <a:endParaRPr lang="en-US" sz="1300" dirty="0"/>
-          </a:p>
-          <a:p>
-            <a:pPr marL="342900" indent="-342900">
-              <a:spcAft>
-                <a:spcPts val="900"/>
-              </a:spcAft>
-              <a:buSzPct val="100000"/>
-              <a:buChar char="•"/>
-            </a:pPr>
-            <a:r>
-              <a:rPr lang="en-US" sz="1300" dirty="0">
-                <a:solidFill>
-                  <a:srgbClr val="33425C"/>
-                </a:solidFill>
-                <a:latin typeface="Calibri" pitchFamily="34" charset="0"/>
-                <a:ea typeface="Calibri" pitchFamily="34" charset="-122"/>
-                <a:cs typeface="Calibri" pitchFamily="34" charset="-120"/>
-              </a:rPr>
-              <a:t>Spread benchmark still overnight SOFR — finish with 3-mo Term SOFR.</a:t>
-            </a:r>
-            <a:endParaRPr lang="en-US" sz="1300" dirty="0"/>
-          </a:p>
-          <a:p>
-            <a:pPr marL="342900" indent="-342900">
-              <a:spcAft>
-                <a:spcPts val="900"/>
-              </a:spcAft>
-              <a:buSzPct val="100000"/>
-              <a:buChar char="•"/>
-            </a:pPr>
-            <a:r>
-              <a:rPr lang="en-US" sz="1300" dirty="0">
-                <a:solidFill>
-                  <a:srgbClr val="33425C"/>
-                </a:solidFill>
-                <a:latin typeface="Calibri" pitchFamily="34" charset="0"/>
-                <a:ea typeface="Calibri" pitchFamily="34" charset="-122"/>
-                <a:cs typeface="Calibri" pitchFamily="34" charset="-120"/>
-              </a:rPr>
-              <a:t>Endogeneity not fully resolved (Granger addresses, doesn’t solve).</a:t>
-            </a:r>
-            <a:endParaRPr lang="en-US" sz="1300" dirty="0"/>
-          </a:p>
-          <a:p>
-            <a:pPr marL="342900" indent="-342900">
-              <a:spcAft>
-                <a:spcPts val="900"/>
-              </a:spcAft>
-              <a:buSzPct val="100000"/>
-              <a:buChar char="•"/>
-            </a:pPr>
-            <a:r>
-              <a:rPr lang="en-US" sz="1300" dirty="0">
-                <a:solidFill>
-                  <a:srgbClr val="33425C"/>
-                </a:solidFill>
-                <a:latin typeface="Calibri" pitchFamily="34" charset="0"/>
-                <a:ea typeface="Calibri" pitchFamily="34" charset="-122"/>
-                <a:cs typeface="Calibri" pitchFamily="34" charset="-120"/>
-              </a:rPr>
-              <a:t>Only 3 stress events; FOMC contamination in 2 of 3.</a:t>
-            </a:r>
-            <a:endParaRPr lang="en-US" sz="1300" dirty="0"/>
-          </a:p>
-          <a:p>
-            <a:pPr marL="342900" indent="-342900">
-              <a:spcAft>
-                <a:spcPts val="900"/>
-              </a:spcAft>
-              <a:buSzPct val="100000"/>
-              <a:buChar char="•"/>
-            </a:pPr>
-            <a:r>
-              <a:rPr lang="en-US" sz="1300" dirty="0">
-                <a:solidFill>
-                  <a:srgbClr val="33425C"/>
-                </a:solidFill>
-                <a:latin typeface="Calibri" pitchFamily="34" charset="0"/>
-                <a:ea typeface="Calibri" pitchFamily="34" charset="-122"/>
-                <a:cs typeface="Calibri" pitchFamily="34" charset="-120"/>
-              </a:rPr>
-              <a:t>Sample Jan 2022 – Mar 2026; may not generalize past 2026.</a:t>
-            </a:r>
-            <a:endParaRPr lang="en-US" sz="1300" dirty="0"/>
-          </a:p>
-        </p:txBody>
-      </p:sp>
-      <p:sp>
-        <p:nvSpPr>
-          <p:cNvPr id="8" name="Shape 6"/>
-          <p:cNvSpPr/>
-          <p:nvPr/>
-        </p:nvSpPr>
-        <p:spPr>
-          <a:xfrm>
-            <a:off x="6277356" y="1508760"/>
-            <a:ext cx="5362956" cy="4297680"/>
-          </a:xfrm>
-          <a:prstGeom prst="rect">
-            <a:avLst/>
-          </a:prstGeom>
-          <a:solidFill>
-            <a:srgbClr val="F4F6FA"/>
-          </a:solidFill>
-          <a:effectLst>
-            <a:outerShdw blurRad="88900" dist="38100" dir="8100000" algn="bl" rotWithShape="0">
-              <a:srgbClr val="000000">
-                <a:alpha val="13000"/>
-              </a:srgbClr>
-            </a:outerShdw>
-          </a:effectLst>
-        </p:spPr>
-      </p:sp>
-      <p:sp>
-        <p:nvSpPr>
-          <p:cNvPr id="9" name="Shape 7"/>
-          <p:cNvSpPr/>
-          <p:nvPr/>
-        </p:nvSpPr>
-        <p:spPr>
-          <a:xfrm>
-            <a:off x="6277356" y="1508760"/>
-            <a:ext cx="82296" cy="4297680"/>
-          </a:xfrm>
-          <a:prstGeom prst="rect">
-            <a:avLst/>
-          </a:prstGeom>
-          <a:solidFill>
-            <a:srgbClr val="1B998B"/>
-          </a:solidFill>
-        </p:spPr>
-      </p:sp>
-      <p:sp>
-        <p:nvSpPr>
-          <p:cNvPr id="10" name="Text 8"/>
-          <p:cNvSpPr/>
-          <p:nvPr/>
-        </p:nvSpPr>
-        <p:spPr>
-          <a:xfrm>
-            <a:off x="6533388" y="1645920"/>
-            <a:ext cx="4905756" cy="365760"/>
-          </a:xfrm>
-          <a:prstGeom prst="rect">
-            <a:avLst/>
-          </a:prstGeom>
-          <a:noFill/>
-        </p:spPr>
-        <p:txBody>
-          <a:bodyPr wrap="square" lIns="0" tIns="0" rIns="0" bIns="0" rtlCol="0" anchor="ctr"/>
-          <a:lstStyle/>
-          <a:p>
-            <a:pPr marL="0" indent="0">
-              <a:buNone/>
-            </a:pPr>
-            <a:r>
-              <a:rPr lang="en-US" sz="1700" b="1" dirty="0">
-                <a:solidFill>
-                  <a:srgbClr val="1B998B"/>
-                </a:solidFill>
-                <a:latin typeface="Georgia" panose="02040502050405090303" pitchFamily="34" charset="0"/>
-                <a:ea typeface="Georgia" panose="02040502050405090303" pitchFamily="34" charset="-122"/>
-                <a:cs typeface="Georgia" panose="02040502050405090303" pitchFamily="34" charset="-120"/>
-              </a:rPr>
-              <a:t>Next steps</a:t>
-            </a:r>
-            <a:endParaRPr lang="en-US" sz="1700" dirty="0"/>
-          </a:p>
-        </p:txBody>
-      </p:sp>
-      <p:sp>
-        <p:nvSpPr>
-          <p:cNvPr id="11" name="Text 9"/>
-          <p:cNvSpPr/>
-          <p:nvPr/>
-        </p:nvSpPr>
-        <p:spPr>
-          <a:xfrm>
-            <a:off x="6533388" y="2103120"/>
-            <a:ext cx="4494276" cy="3657600"/>
-          </a:xfrm>
-          <a:prstGeom prst="rect">
-            <a:avLst/>
-          </a:prstGeom>
-          <a:noFill/>
-        </p:spPr>
-        <p:txBody>
-          <a:bodyPr wrap="square" lIns="0" tIns="0" rIns="0" bIns="0" rtlCol="0" anchor="ctr"/>
-          <a:lstStyle/>
-          <a:p>
-            <a:pPr marL="342900" indent="-342900">
-              <a:spcAft>
-                <a:spcPts val="900"/>
-              </a:spcAft>
-              <a:buSzPct val="100000"/>
-              <a:buChar char="•"/>
-            </a:pPr>
-            <a:r>
-              <a:rPr lang="en-US" sz="1300" dirty="0">
-                <a:solidFill>
-                  <a:srgbClr val="33425C"/>
-                </a:solidFill>
-                <a:latin typeface="Calibri" pitchFamily="34" charset="0"/>
-                <a:ea typeface="Calibri" pitchFamily="34" charset="-122"/>
-                <a:cs typeface="Calibri" pitchFamily="34" charset="-120"/>
-              </a:rPr>
-              <a:t>Longer sample as attestations accumulate → power improves.</a:t>
-            </a:r>
-            <a:endParaRPr lang="en-US" sz="1300" dirty="0"/>
-          </a:p>
-          <a:p>
-            <a:pPr marL="342900" indent="-342900">
-              <a:spcAft>
-                <a:spcPts val="900"/>
-              </a:spcAft>
-              <a:buSzPct val="100000"/>
-              <a:buChar char="•"/>
-            </a:pPr>
-            <a:r>
-              <a:rPr lang="en-US" sz="1300" dirty="0">
-                <a:solidFill>
-                  <a:srgbClr val="33425C"/>
-                </a:solidFill>
-                <a:latin typeface="Calibri" pitchFamily="34" charset="0"/>
-                <a:ea typeface="Calibri" pitchFamily="34" charset="-122"/>
-                <a:cs typeface="Calibri" pitchFamily="34" charset="-120"/>
-              </a:rPr>
-              <a:t>Better identification: instrument supply with regulatory announcements.</a:t>
-            </a:r>
-            <a:endParaRPr lang="en-US" sz="1300" dirty="0"/>
-          </a:p>
-          <a:p>
-            <a:pPr marL="342900" indent="-342900">
-              <a:spcAft>
-                <a:spcPts val="900"/>
-              </a:spcAft>
-              <a:buSzPct val="100000"/>
-              <a:buChar char="•"/>
-            </a:pPr>
-            <a:r>
-              <a:rPr lang="en-US" sz="1300" dirty="0">
-                <a:solidFill>
-                  <a:srgbClr val="33425C"/>
-                </a:solidFill>
-                <a:latin typeface="Calibri" pitchFamily="34" charset="0"/>
-                <a:ea typeface="Calibri" pitchFamily="34" charset="-122"/>
-                <a:cs typeface="Calibri" pitchFamily="34" charset="-120"/>
-              </a:rPr>
-              <a:t>High-frequency: daily spread + daily supply for cleaner events.</a:t>
-            </a:r>
-            <a:endParaRPr lang="en-US" sz="1300" dirty="0"/>
-          </a:p>
-          <a:p>
-            <a:pPr marL="342900" indent="-342900">
-              <a:spcAft>
-                <a:spcPts val="900"/>
-              </a:spcAft>
-              <a:buSzPct val="100000"/>
-              <a:buChar char="•"/>
-            </a:pPr>
-            <a:r>
-              <a:rPr lang="en-US" sz="1300" dirty="0">
-                <a:solidFill>
-                  <a:srgbClr val="33425C"/>
-                </a:solidFill>
-                <a:latin typeface="Calibri" pitchFamily="34" charset="0"/>
-                <a:ea typeface="Calibri" pitchFamily="34" charset="-122"/>
-                <a:cs typeface="Calibri" pitchFamily="34" charset="-120"/>
-              </a:rPr>
-              <a:t>Non-USD ecosystems: euro stablecoins, CBDC interactions.</a:t>
-            </a:r>
-            <a:endParaRPr lang="en-US" sz="1300" dirty="0"/>
-          </a:p>
-          <a:p>
-            <a:pPr marL="342900" indent="-342900">
-              <a:spcAft>
-                <a:spcPts val="900"/>
-              </a:spcAft>
-              <a:buSzPct val="100000"/>
-              <a:buChar char="•"/>
-            </a:pPr>
-            <a:r>
-              <a:rPr lang="en-US" sz="1300" dirty="0">
-                <a:solidFill>
-                  <a:srgbClr val="33425C"/>
-                </a:solidFill>
-                <a:latin typeface="Calibri" pitchFamily="34" charset="0"/>
-                <a:ea typeface="Calibri" pitchFamily="34" charset="-122"/>
-                <a:cs typeface="Calibri" pitchFamily="34" charset="-120"/>
-              </a:rPr>
-              <a:t>Cross-country: does the same mechanism hold for EUR safe assets?</a:t>
-            </a:r>
-            <a:endParaRPr lang="en-US" sz="1300" dirty="0"/>
-          </a:p>
-        </p:txBody>
-      </p:sp>
-      <p:sp>
-        <p:nvSpPr>
-          <p:cNvPr id="12" name="Text 10"/>
-          <p:cNvSpPr/>
-          <p:nvPr/>
-        </p:nvSpPr>
-        <p:spPr>
-          <a:xfrm>
-            <a:off x="548640" y="6455664"/>
-            <a:ext cx="7315200" cy="274320"/>
-          </a:xfrm>
-          <a:prstGeom prst="rect">
-            <a:avLst/>
-          </a:prstGeom>
-          <a:noFill/>
-        </p:spPr>
-        <p:txBody>
-          <a:bodyPr wrap="square" lIns="0" tIns="0" rIns="0" bIns="0" rtlCol="0" anchor="ctr"/>
-          <a:lstStyle/>
-          <a:p>
-            <a:pPr marL="0" indent="0">
-              <a:buNone/>
-            </a:pPr>
-            <a:r>
-              <a:rPr lang="en-US" sz="900" dirty="0">
-                <a:solidFill>
-                  <a:srgbClr val="5B6B82"/>
-                </a:solidFill>
-                <a:latin typeface="Calibri" pitchFamily="34" charset="0"/>
-                <a:ea typeface="Calibri" pitchFamily="34" charset="-122"/>
-                <a:cs typeface="Calibri" pitchFamily="34" charset="-120"/>
-              </a:rPr>
-              <a:t>Stablecoins &amp; the Exorbitant Privilege</a:t>
-            </a:r>
-            <a:endParaRPr lang="en-US" sz="900" dirty="0"/>
-          </a:p>
-        </p:txBody>
-      </p:sp>
-      <p:sp>
-        <p:nvSpPr>
-          <p:cNvPr id="13" name="Text 11"/>
-          <p:cNvSpPr/>
-          <p:nvPr/>
-        </p:nvSpPr>
-        <p:spPr>
-          <a:xfrm>
-            <a:off x="11274552" y="6400800"/>
-            <a:ext cx="365760" cy="274320"/>
-          </a:xfrm>
-          <a:prstGeom prst="rect">
-            <a:avLst/>
-          </a:prstGeom>
-          <a:noFill/>
-        </p:spPr>
-        <p:txBody>
-          <a:bodyPr wrap="square" lIns="0" tIns="0" rIns="0" bIns="0" rtlCol="0" anchor="ctr"/>
-          <a:lstStyle/>
-          <a:p>
-            <a:pPr marL="0" indent="0" algn="r">
-              <a:buNone/>
-            </a:pPr>
-            <a:r>
-              <a:rPr lang="en-US" sz="1100" dirty="0">
-                <a:solidFill>
-                  <a:srgbClr val="5B6B82"/>
-                </a:solidFill>
-                <a:latin typeface="Calibri" pitchFamily="34" charset="0"/>
-                <a:ea typeface="Calibri" pitchFamily="34" charset="-122"/>
-                <a:cs typeface="Calibri" pitchFamily="34" charset="-120"/>
-              </a:rPr>
-              <a:t>19</a:t>
-            </a:r>
-            <a:endParaRPr lang="en-US" sz="1100" dirty="0"/>
-          </a:p>
-        </p:txBody>
-      </p:sp>
-    </p:spTree>
-  </p:cSld>
-  <p:clrMapOvr>
-    <a:masterClrMapping/>
-  </p:clrMapOvr>
-</p:sld>
-</file>
-
-<file path=ppt/slides/slide22.xml><?xml version="1.0" encoding="utf-8"?>
 <p:sld xmlns:a="http://schemas.openxmlformats.org/drawingml/2006/main" xmlns:r="http://schemas.openxmlformats.org/officeDocument/2006/relationships" xmlns:p="http://schemas.openxmlformats.org/presentationml/2006/main">
   <p:cSld>
     <p:bg>
@@ -21359,7 +20608,7 @@
       </p:sp>
       <p:pic>
         <p:nvPicPr>
-          <p:cNvPr id="4" name="Image 0" descr="figs/image3.png"/>
+          <p:cNvPr id="4" name="Image 0" descr="figs/keyvars_corrected.png"/>
           <p:cNvPicPr>
             <a:picLocks noChangeAspect="1"/>
           </p:cNvPicPr>
@@ -21373,8 +20622,8 @@
         </p:blipFill>
         <p:spPr>
           <a:xfrm>
-            <a:off x="548640" y="1417320"/>
-            <a:ext cx="6400800" cy="4685798"/>
+            <a:off x="548640" y="1554480"/>
+            <a:ext cx="6675120" cy="4345781"/>
           </a:xfrm>
           <a:prstGeom prst="rect">
             <a:avLst/>
@@ -21389,8 +20638,8 @@
         </p:nvSpPr>
         <p:spPr>
           <a:xfrm>
-            <a:off x="7315200" y="1554480"/>
-            <a:ext cx="4325112" cy="1828800"/>
+            <a:off x="7589520" y="1645920"/>
+            <a:ext cx="4050792" cy="1874520"/>
           </a:xfrm>
           <a:prstGeom prst="rect">
             <a:avLst/>
@@ -21415,8 +20664,8 @@
         </p:nvSpPr>
         <p:spPr>
           <a:xfrm>
-            <a:off x="7315200" y="1554480"/>
-            <a:ext cx="82296" cy="1828800"/>
+            <a:off x="7589520" y="1645920"/>
+            <a:ext cx="82296" cy="1874520"/>
           </a:xfrm>
           <a:prstGeom prst="rect">
             <a:avLst/>
@@ -21434,8 +20683,8 @@
         </p:nvSpPr>
         <p:spPr>
           <a:xfrm>
-            <a:off x="7543800" y="1664208"/>
-            <a:ext cx="3867912" cy="320040"/>
+            <a:off x="7818120" y="1755648"/>
+            <a:ext cx="3593592" cy="320040"/>
           </a:xfrm>
           <a:prstGeom prst="rect">
             <a:avLst/>
@@ -21472,8 +20721,8 @@
         </p:nvSpPr>
         <p:spPr>
           <a:xfrm>
-            <a:off x="7543800" y="2011680"/>
-            <a:ext cx="3867912" cy="1280160"/>
+            <a:off x="7818120" y="2103120"/>
+            <a:ext cx="3593592" cy="1371600"/>
           </a:xfrm>
           <a:prstGeom prst="rect">
             <a:avLst/>
@@ -21486,7 +20735,7 @@
           <a:p>
             <a:pPr marL="0" indent="0">
               <a:lnSpc>
-                <a:spcPct val="110000"/>
+                <a:spcPct val="112000"/>
               </a:lnSpc>
               <a:buNone/>
             </a:pPr>
@@ -21510,7 +20759,7 @@
                 <a:ea typeface="Calibri" pitchFamily="34" charset="-122"/>
                 <a:cs typeface="Calibri" pitchFamily="34" charset="-120"/>
               </a:rPr>
-              <a:t>— convenience-yield spread.   </a:t>
+              <a:t>— corrected convenience-yield spread (DGS3MO − overnight SOFR).   </a:t>
             </a:r>
             <a:r>
               <a:rPr lang="en-US" sz="1200" b="1" dirty="0">
@@ -21554,7 +20803,7 @@
                 <a:ea typeface="Calibri" pitchFamily="34" charset="-122"/>
                 <a:cs typeface="Calibri" pitchFamily="34" charset="-120"/>
               </a:rPr>
-              <a:t>— the buffer L, long stretches below the 13% line.</a:t>
+              <a:t>— the buffer L, with the q* = 13% line.</a:t>
             </a:r>
             <a:endParaRPr lang="en-US" sz="1200" dirty="0"/>
           </a:p>
@@ -21568,14 +20817,14 @@
         </p:nvSpPr>
         <p:spPr>
           <a:xfrm>
-            <a:off x="7315200" y="3566160"/>
-            <a:ext cx="4325112" cy="1828800"/>
+            <a:off x="7589520" y="3703320"/>
+            <a:ext cx="4050792" cy="1828800"/>
           </a:xfrm>
           <a:prstGeom prst="rect">
             <a:avLst/>
           </a:prstGeom>
           <a:solidFill>
-            <a:srgbClr val="FBEEDD"/>
+            <a:srgbClr val="F4F6FA"/>
           </a:solidFill>
           <a:effectLst>
             <a:outerShdw blurRad="88900" dist="38100" dir="8100000" algn="bl" rotWithShape="0">
@@ -21594,7 +20843,7 @@
         </p:nvSpPr>
         <p:spPr>
           <a:xfrm>
-            <a:off x="7315200" y="3566160"/>
+            <a:off x="7589520" y="3703320"/>
             <a:ext cx="82296" cy="1828800"/>
           </a:xfrm>
           <a:prstGeom prst="rect">
@@ -21613,8 +20862,8 @@
         </p:nvSpPr>
         <p:spPr>
           <a:xfrm>
-            <a:off x="7543800" y="3675888"/>
-            <a:ext cx="3867912" cy="320040"/>
+            <a:off x="7818120" y="3813048"/>
+            <a:ext cx="3593592" cy="320040"/>
           </a:xfrm>
           <a:prstGeom prst="rect">
             <a:avLst/>
@@ -21631,13 +20880,13 @@
             <a:r>
               <a:rPr lang="en-US" sz="1400" b="1" dirty="0">
                 <a:solidFill>
-                  <a:srgbClr val="C1121F"/>
+                  <a:srgbClr val="13294B"/>
                 </a:solidFill>
                 <a:latin typeface="Georgia" panose="02040502050405090303" pitchFamily="34" charset="0"/>
                 <a:ea typeface="Georgia" panose="02040502050405090303" pitchFamily="34" charset="-122"/>
                 <a:cs typeface="Georgia" panose="02040502050405090303" pitchFamily="34" charset="-120"/>
               </a:rPr>
-              <a:t>Note on panel A</a:t>
+              <a:t>What it shows</a:t>
             </a:r>
             <a:endParaRPr lang="en-US" sz="1400" dirty="0"/>
           </a:p>
@@ -21651,8 +20900,8 @@
         </p:nvSpPr>
         <p:spPr>
           <a:xfrm>
-            <a:off x="7543800" y="4023360"/>
-            <a:ext cx="3867912" cy="1280160"/>
+            <a:off x="7818120" y="4160520"/>
+            <a:ext cx="3593592" cy="1325880"/>
           </a:xfrm>
           <a:prstGeom prst="rect">
             <a:avLst/>
@@ -21665,7 +20914,7 @@
           <a:p>
             <a:pPr marL="0" indent="0">
               <a:lnSpc>
-                <a:spcPct val="110000"/>
+                <a:spcPct val="112000"/>
               </a:lnSpc>
               <a:buNone/>
             </a:pPr>
@@ -21678,7 +20927,7 @@
                 <a:ea typeface="Calibri" pitchFamily="34" charset="-122"/>
                 <a:cs typeface="Calibri" pitchFamily="34" charset="-120"/>
               </a:rPr>
-              <a:t>Panel A is still the pre-correction series (titled DTB3−SOFR90DAYAVG, swinging ±150 bps). Re-plot it on the corrected DGS3MO−SOFR spread before final submission — panels B and C are already correct.</a:t>
+              <a:t>The spread sits near zero in calm periods, with a residual term-premium bump during the 2022 hiking cycle that reverts toward zero by 2024–26. Meanwhile L spends long stretches below the 13% line — exactly the fragility region.</a:t>
             </a:r>
             <a:endParaRPr lang="en-US" sz="1200" dirty="0"/>
           </a:p>

--- a/presentations/0609_FINAL_merged_Stablecoin_Privilege.pptx
+++ b/presentations/0609_FINAL_merged_Stablecoin_Privilege.pptx
@@ -4151,15 +4151,8 @@
               <a:buNone/>
             </a:pPr>
             <a:r>
-              <a:rPr lang="en-US" sz="1100" dirty="0">
-                <a:solidFill>
-                  <a:srgbClr val="5B6B82"/>
-                </a:solidFill>
-                <a:latin typeface="Calibri" pitchFamily="34" charset="0"/>
-                <a:ea typeface="Calibri" pitchFamily="34" charset="-122"/>
-                <a:cs typeface="Calibri" pitchFamily="34" charset="-120"/>
-              </a:rPr>
-              <a:t>9</a:t>
+              <a:rPr lang="en-US" sz="1100" dirty="0"/>
+              <a:t>10</a:t>
             </a:r>
             <a:endParaRPr lang="en-US" sz="1100" dirty="0"/>
           </a:p>
@@ -4536,7 +4529,7 @@
                 <a:ea typeface="Calibri" pitchFamily="34" charset="-122"/>
                 <a:cs typeface="Calibri" pitchFamily="34" charset="-120"/>
               </a:rPr>
-              <a:t>10</a:t>
+              <a:t>11</a:t>
             </a:r>
             <a:endParaRPr lang="en-US" sz="1100" dirty="0"/>
           </a:p>
@@ -6644,7 +6637,7 @@
                 <a:ea typeface="Calibri" pitchFamily="34" charset="-122"/>
                 <a:cs typeface="Calibri" pitchFamily="34" charset="-120"/>
               </a:rPr>
-              <a:t>11</a:t>
+              <a:t>12</a:t>
             </a:r>
             <a:endParaRPr lang="en-US" sz="1100" dirty="0"/>
           </a:p>
@@ -7950,6 +7943,16 @@
               </a:rPr>
               <a:t>the threshold LOCATION (≈13%) — stable across both methods, all TRIM values, every model vintage.   </a:t>
             </a:r>
+            <a:br>
+              <a:rPr lang="en-US" sz="1250" dirty="0">
+                <a:solidFill>
+                  <a:srgbClr val="33425C"/>
+                </a:solidFill>
+                <a:latin typeface="Calibri" pitchFamily="34" charset="0"/>
+                <a:ea typeface="Calibri" pitchFamily="34" charset="-122"/>
+                <a:cs typeface="Calibri" pitchFamily="34" charset="-120"/>
+              </a:rPr>
+            </a:br>
             <a:r>
               <a:rPr lang="en-US" sz="1250" b="1" dirty="0">
                 <a:solidFill>
@@ -7972,6 +7975,16 @@
               </a:rPr>
               <a:t>the regime-beta magnitudes — Hansen (hard split) and LSTAR (smooth model) estimate different objects, so do not show them as mutual corroboration.   </a:t>
             </a:r>
+            <a:br>
+              <a:rPr lang="en-US" sz="1250" dirty="0">
+                <a:solidFill>
+                  <a:srgbClr val="33425C"/>
+                </a:solidFill>
+                <a:latin typeface="Calibri" pitchFamily="34" charset="0"/>
+                <a:ea typeface="Calibri" pitchFamily="34" charset="-122"/>
+                <a:cs typeface="Calibri" pitchFamily="34" charset="-120"/>
+              </a:rPr>
+            </a:br>
             <a:r>
               <a:rPr lang="en-US" sz="1250" b="1" dirty="0">
                 <a:solidFill>
@@ -10824,7 +10837,7 @@
                 <a:ea typeface="Calibri" pitchFamily="34" charset="-122"/>
                 <a:cs typeface="Calibri" pitchFamily="34" charset="-120"/>
               </a:rPr>
-              <a:t>15</a:t>
+              <a:t>16</a:t>
             </a:r>
             <a:endParaRPr lang="en-US" sz="1100" dirty="0"/>
           </a:p>
@@ -11299,7 +11312,7 @@
                 <a:ea typeface="Calibri" pitchFamily="34" charset="-122"/>
                 <a:cs typeface="Calibri" pitchFamily="34" charset="-120"/>
               </a:rPr>
-              <a:t>16</a:t>
+              <a:t>17</a:t>
             </a:r>
             <a:endParaRPr lang="en-US" sz="1100" dirty="0"/>
           </a:p>
@@ -11983,7 +11996,7 @@
                 <a:ea typeface="Calibri" pitchFamily="34" charset="-122"/>
                 <a:cs typeface="Calibri" pitchFamily="34" charset="-120"/>
               </a:rPr>
-              <a:t>17</a:t>
+              <a:t>18</a:t>
             </a:r>
             <a:endParaRPr lang="en-US" sz="1100" dirty="0"/>
           </a:p>
@@ -12878,7 +12891,7 @@
                 <a:ea typeface="Calibri" pitchFamily="34" charset="-122"/>
                 <a:cs typeface="Calibri" pitchFamily="34" charset="-120"/>
               </a:rPr>
-              <a:t>18</a:t>
+              <a:t>19</a:t>
             </a:r>
             <a:endParaRPr lang="en-US" sz="1100" dirty="0"/>
           </a:p>
@@ -14127,15 +14140,8 @@
               <a:buNone/>
             </a:pPr>
             <a:r>
-              <a:rPr lang="en-US" sz="1100" dirty="0">
-                <a:solidFill>
-                  <a:srgbClr val="5B6B82"/>
-                </a:solidFill>
-                <a:latin typeface="Calibri" pitchFamily="34" charset="0"/>
-                <a:ea typeface="Calibri" pitchFamily="34" charset="-122"/>
-                <a:cs typeface="Calibri" pitchFamily="34" charset="-120"/>
-              </a:rPr>
-              <a:t>19</a:t>
+              <a:rPr lang="en-US" sz="1100" dirty="0"/>
+              <a:t>20</a:t>
             </a:r>
             <a:endParaRPr lang="en-US" sz="1100" dirty="0"/>
           </a:p>
@@ -16526,6 +16532,30 @@
           </a:p>
         </p:txBody>
       </p:sp>
+      <p:pic>
+        <p:nvPicPr>
+          <p:cNvPr id="19" name="Picture 18"/>
+          <p:cNvPicPr>
+            <a:picLocks noChangeAspect="1"/>
+          </p:cNvPicPr>
+          <p:nvPr/>
+        </p:nvPicPr>
+        <p:blipFill>
+          <a:blip r:embed="rId1"/>
+          <a:stretch>
+            <a:fillRect/>
+          </a:stretch>
+        </p:blipFill>
+        <p:spPr>
+          <a:xfrm>
+            <a:off x="737235" y="3830955"/>
+            <a:ext cx="4968875" cy="1546860"/>
+          </a:xfrm>
+          <a:prstGeom prst="rect">
+            <a:avLst/>
+          </a:prstGeom>
+        </p:spPr>
+      </p:pic>
     </p:spTree>
   </p:cSld>
   <p:clrMapOvr>

--- a/presentations/0609_FINAL_merged_Stablecoin_Privilege.pptx
+++ b/presentations/0609_FINAL_merged_Stablecoin_Privilege.pptx
@@ -16548,7 +16548,7 @@
         </p:blipFill>
         <p:spPr>
           <a:xfrm>
-            <a:off x="737235" y="3830955"/>
+            <a:off x="746125" y="3801110"/>
             <a:ext cx="4968875" cy="1546860"/>
           </a:xfrm>
           <a:prstGeom prst="rect">
@@ -20636,30 +20636,6 @@
           </a:p>
         </p:txBody>
       </p:sp>
-      <p:pic>
-        <p:nvPicPr>
-          <p:cNvPr id="4" name="Image 0" descr="figs/keyvars_corrected.png"/>
-          <p:cNvPicPr>
-            <a:picLocks noChangeAspect="1"/>
-          </p:cNvPicPr>
-          <p:nvPr/>
-        </p:nvPicPr>
-        <p:blipFill>
-          <a:blip r:embed="rId1"/>
-          <a:stretch>
-            <a:fillRect/>
-          </a:stretch>
-        </p:blipFill>
-        <p:spPr>
-          <a:xfrm>
-            <a:off x="548640" y="1554480"/>
-            <a:ext cx="6675120" cy="4345781"/>
-          </a:xfrm>
-          <a:prstGeom prst="rect">
-            <a:avLst/>
-          </a:prstGeom>
-        </p:spPr>
-      </p:pic>
       <p:sp>
         <p:nvSpPr>
           <p:cNvPr id="5" name="Shape 2"/>
@@ -20791,6 +20767,22 @@
               </a:rPr>
               <a:t>— corrected convenience-yield spread (DGS3MO − overnight SOFR).   </a:t>
             </a:r>
+            <a:endParaRPr lang="en-US" sz="1200" dirty="0">
+              <a:solidFill>
+                <a:srgbClr val="33425C"/>
+              </a:solidFill>
+              <a:latin typeface="Calibri" pitchFamily="34" charset="0"/>
+              <a:ea typeface="Calibri" pitchFamily="34" charset="-122"/>
+              <a:cs typeface="Calibri" pitchFamily="34" charset="-120"/>
+            </a:endParaRPr>
+          </a:p>
+          <a:p>
+            <a:pPr marL="0" indent="0">
+              <a:lnSpc>
+                <a:spcPct val="112000"/>
+              </a:lnSpc>
+              <a:buNone/>
+            </a:pPr>
             <a:r>
               <a:rPr lang="en-US" sz="1200" b="1" dirty="0">
                 <a:solidFill>
@@ -20813,6 +20805,22 @@
               </a:rPr>
               <a:t>— USDT+USDC supply, now ~$260B.   </a:t>
             </a:r>
+            <a:endParaRPr lang="en-US" sz="1200" dirty="0">
+              <a:solidFill>
+                <a:srgbClr val="33425C"/>
+              </a:solidFill>
+              <a:latin typeface="Calibri" pitchFamily="34" charset="0"/>
+              <a:ea typeface="Calibri" pitchFamily="34" charset="-122"/>
+              <a:cs typeface="Calibri" pitchFamily="34" charset="-120"/>
+            </a:endParaRPr>
+          </a:p>
+          <a:p>
+            <a:pPr marL="0" indent="0">
+              <a:lnSpc>
+                <a:spcPct val="112000"/>
+              </a:lnSpc>
+              <a:buNone/>
+            </a:pPr>
             <a:r>
               <a:rPr lang="en-US" sz="1200" b="1" dirty="0">
                 <a:solidFill>
@@ -21039,6 +21047,30 @@
           </a:p>
         </p:txBody>
       </p:sp>
+      <p:pic>
+        <p:nvPicPr>
+          <p:cNvPr id="15" name="Picture 14" descr="KakaoTalk_Photo_2026-06-08-17-48-10"/>
+          <p:cNvPicPr>
+            <a:picLocks noChangeAspect="1"/>
+          </p:cNvPicPr>
+          <p:nvPr/>
+        </p:nvPicPr>
+        <p:blipFill>
+          <a:blip r:embed="rId1"/>
+          <a:stretch>
+            <a:fillRect/>
+          </a:stretch>
+        </p:blipFill>
+        <p:spPr>
+          <a:xfrm>
+            <a:off x="285750" y="1351915"/>
+            <a:ext cx="7141210" cy="4647565"/>
+          </a:xfrm>
+          <a:prstGeom prst="rect">
+            <a:avLst/>
+          </a:prstGeom>
+        </p:spPr>
+      </p:pic>
     </p:spTree>
   </p:cSld>
   <p:clrMapOvr>

--- a/presentations/0609_FINAL_merged_Stablecoin_Privilege.pptx
+++ b/presentations/0609_FINAL_merged_Stablecoin_Privilege.pptx
@@ -5,30 +5,30 @@
     <p:sldMasterId id="2147483648" r:id="rId1"/>
   </p:sldMasterIdLst>
   <p:notesMasterIdLst>
-    <p:notesMasterId r:id="rId4"/>
+    <p:notesMasterId r:id="rId23"/>
   </p:notesMasterIdLst>
   <p:sldIdLst>
-    <p:sldId id="256" r:id="rId3"/>
-    <p:sldId id="257" r:id="rId5"/>
-    <p:sldId id="258" r:id="rId6"/>
-    <p:sldId id="276" r:id="rId7"/>
-    <p:sldId id="260" r:id="rId8"/>
-    <p:sldId id="261" r:id="rId9"/>
-    <p:sldId id="262" r:id="rId10"/>
-    <p:sldId id="263" r:id="rId11"/>
-    <p:sldId id="280" r:id="rId12"/>
-    <p:sldId id="264" r:id="rId13"/>
-    <p:sldId id="277" r:id="rId14"/>
-    <p:sldId id="266" r:id="rId15"/>
-    <p:sldId id="268" r:id="rId16"/>
-    <p:sldId id="269" r:id="rId17"/>
-    <p:sldId id="281" r:id="rId18"/>
-    <p:sldId id="270" r:id="rId19"/>
-    <p:sldId id="271" r:id="rId20"/>
-    <p:sldId id="272" r:id="rId21"/>
-    <p:sldId id="273" r:id="rId22"/>
-    <p:sldId id="274" r:id="rId23"/>
-    <p:sldId id="275" r:id="rId24"/>
+    <p:sldId id="256" r:id="rId2"/>
+    <p:sldId id="257" r:id="rId3"/>
+    <p:sldId id="258" r:id="rId4"/>
+    <p:sldId id="276" r:id="rId5"/>
+    <p:sldId id="260" r:id="rId6"/>
+    <p:sldId id="261" r:id="rId7"/>
+    <p:sldId id="262" r:id="rId8"/>
+    <p:sldId id="263" r:id="rId9"/>
+    <p:sldId id="280" r:id="rId10"/>
+    <p:sldId id="264" r:id="rId11"/>
+    <p:sldId id="277" r:id="rId12"/>
+    <p:sldId id="266" r:id="rId13"/>
+    <p:sldId id="268" r:id="rId14"/>
+    <p:sldId id="269" r:id="rId15"/>
+    <p:sldId id="281" r:id="rId16"/>
+    <p:sldId id="270" r:id="rId17"/>
+    <p:sldId id="271" r:id="rId18"/>
+    <p:sldId id="272" r:id="rId19"/>
+    <p:sldId id="273" r:id="rId20"/>
+    <p:sldId id="274" r:id="rId21"/>
+    <p:sldId id="275" r:id="rId22"/>
   </p:sldIdLst>
   <p:sldSz cx="12192000" cy="6858000"/>
   <p:notesSz cx="6858000" cy="12192000"/>
@@ -124,13 +124,18 @@
       </a:defRPr>
     </a:lvl9pPr>
   </p:defaultTextStyle>
+  <p:extLst>
+    <p:ext uri="{EFAFB233-063F-42B5-8137-9DF3F51BA10A}">
+      <p15:sldGuideLst xmlns:p15="http://schemas.microsoft.com/office/powerpoint/2012/main"/>
+    </p:ext>
+  </p:extLst>
 </p:presentation>
 </file>
 
 <file path=ppt/charts/chart1.xml><?xml version="1.0" encoding="utf-8"?>
-<c:chartSpace xmlns:c="http://schemas.openxmlformats.org/drawingml/2006/chart" xmlns:a="http://schemas.openxmlformats.org/drawingml/2006/main" xmlns:r="http://schemas.openxmlformats.org/officeDocument/2006/relationships">
+<c:chartSpace xmlns:c="http://schemas.openxmlformats.org/drawingml/2006/chart" xmlns:a="http://schemas.openxmlformats.org/drawingml/2006/main" xmlns:r="http://schemas.openxmlformats.org/officeDocument/2006/relationships" xmlns:c16r2="http://schemas.microsoft.com/office/drawing/2015/06/chart">
   <c:date1904 val="0"/>
-  <c:lang val="zh-CN"/>
+  <c:lang val="ko-KR"/>
   <c:roundedCorners val="1"/>
   <mc:AlternateContent xmlns:mc="http://schemas.openxmlformats.org/markup-compatibility/2006">
     <mc:Choice xmlns:c14="http://schemas.microsoft.com/office/drawing/2007/8/2/chart" Requires="c14">
@@ -192,6 +197,7 @@
                     <a:cs typeface="+mn-cs"/>
                   </a:defRPr>
                 </a:pPr>
+                <a:endParaRPr lang="ko-KR"/>
               </a:p>
             </c:txPr>
             <c:dLblPos val="outEnd"/>
@@ -204,9 +210,7 @@
             <c:showLeaderLines val="0"/>
             <c:extLst>
               <c:ext xmlns:c15="http://schemas.microsoft.com/office/drawing/2012/chart" uri="{CE6537A1-D6FC-4f65-9D91-7224C49458BB}">
-                <c15:layout/>
                 <c15:showLeaderLines val="0"/>
-                <c15:leaderLines/>
               </c:ext>
             </c:extLst>
           </c:dLbls>
@@ -237,7 +241,7 @@
                   <c:v>84.8</c:v>
                 </c:pt>
                 <c:pt idx="1">
-                  <c:v>70.9</c:v>
+                  <c:v>70.900000000000006</c:v>
                 </c:pt>
                 <c:pt idx="2">
                   <c:v>0.2</c:v>
@@ -245,6 +249,11 @@
               </c:numCache>
             </c:numRef>
           </c:val>
+          <c:extLst>
+            <c:ext xmlns:c16="http://schemas.microsoft.com/office/drawing/2014/chart" uri="{C3380CC4-5D6E-409C-BE32-E72D297353CC}">
+              <c16:uniqueId val="{00000000-8BA2-0649-9647-185E7E1B1DAE}"/>
+            </c:ext>
+          </c:extLst>
         </c:ser>
         <c:ser>
           <c:idx val="1"/>
@@ -290,6 +299,7 @@
                     <a:cs typeface="+mn-cs"/>
                   </a:defRPr>
                 </a:pPr>
+                <a:endParaRPr lang="ko-KR"/>
               </a:p>
             </c:txPr>
             <c:dLblPos val="outEnd"/>
@@ -302,9 +312,7 @@
             <c:showLeaderLines val="0"/>
             <c:extLst>
               <c:ext xmlns:c15="http://schemas.microsoft.com/office/drawing/2012/chart" uri="{CE6537A1-D6FC-4f65-9D91-7224C49458BB}">
-                <c15:layout/>
                 <c15:showLeaderLines val="0"/>
-                <c15:leaderLines/>
               </c:ext>
             </c:extLst>
           </c:dLbls>
@@ -332,7 +340,7 @@
                 <c:formatCode>General</c:formatCode>
                 <c:ptCount val="3"/>
                 <c:pt idx="0">
-                  <c:v>16.6</c:v>
+                  <c:v>16.600000000000001</c:v>
                 </c:pt>
                 <c:pt idx="1">
                   <c:v>14</c:v>
@@ -343,6 +351,11 @@
               </c:numCache>
             </c:numRef>
           </c:val>
+          <c:extLst>
+            <c:ext xmlns:c16="http://schemas.microsoft.com/office/drawing/2014/chart" uri="{C3380CC4-5D6E-409C-BE32-E72D297353CC}">
+              <c16:uniqueId val="{00000001-8BA2-0649-9647-185E7E1B1DAE}"/>
+            </c:ext>
+          </c:extLst>
         </c:ser>
         <c:dLbls>
           <c:showLegendKey val="0"/>
@@ -353,7 +366,6 @@
           <c:showBubbleSize val="0"/>
         </c:dLbls>
         <c:gapWidth val="150"/>
-        <c:overlap val="0"/>
         <c:axId val="2094734554"/>
         <c:axId val="2094734552"/>
       </c:barChart>
@@ -391,6 +403,7 @@
                 <a:cs typeface="+mn-cs"/>
               </a:defRPr>
             </a:pPr>
+            <a:endParaRPr lang="ko-KR"/>
           </a:p>
         </c:txPr>
         <c:crossAx val="2094734552"/>
@@ -411,22 +424,6 @@
         <c:majorTickMark val="out"/>
         <c:minorTickMark val="none"/>
         <c:tickLblPos val="nextTo"/>
-        <c:txPr>
-          <a:bodyPr rot="-60000000" spcFirstLastPara="0" vertOverflow="ellipsis" vert="horz" wrap="square" anchor="ctr" anchorCtr="1"/>
-          <a:lstStyle/>
-          <a:p>
-            <a:pPr>
-              <a:defRPr lang="en-US" sz="1200" b="0" i="0" u="none" strike="noStrike" kern="1200" baseline="0">
-                <a:solidFill>
-                  <a:srgbClr val="000000"/>
-                </a:solidFill>
-                <a:latin typeface="Arial" panose="020B0704020202020204"/>
-                <a:ea typeface="+mn-ea"/>
-                <a:cs typeface="+mn-cs"/>
-              </a:defRPr>
-            </a:pPr>
-          </a:p>
-        </c:txPr>
         <c:crossAx val="2094734554"/>
         <c:crosses val="autoZero"/>
         <c:crossBetween val="between"/>
@@ -441,7 +438,6 @@
     </c:plotArea>
     <c:legend>
       <c:legendPos val="b"/>
-      <c:layout/>
       <c:overlay val="0"/>
       <c:txPr>
         <a:bodyPr rot="0" spcFirstLastPara="0" vertOverflow="ellipsis" vert="horz" wrap="square" anchor="ctr" anchorCtr="1"/>
@@ -457,6 +453,7 @@
               <a:cs typeface="+mn-cs"/>
             </a:defRPr>
           </a:pPr>
+          <a:endParaRPr lang="ko-KR"/>
         </a:p>
       </c:txPr>
     </c:legend>
@@ -483,6 +480,7 @@
       <a:pPr>
         <a:defRPr lang="en-US"/>
       </a:pPr>
+      <a:endParaRPr lang="ko-KR"/>
     </a:p>
   </c:txPr>
   <c:externalData r:id="rId1">
@@ -573,6 +571,7 @@
           <a:p>
             <a:fld id="{5282F153-3F37-0F45-9E97-73ACFA13230C}" type="datetimeFigureOut">
               <a:rPr lang="en-US"/>
+              <a:t>6/9/26</a:t>
             </a:fld>
             <a:endParaRPr lang="en-US"/>
           </a:p>
@@ -639,7 +638,6 @@
               <a:rPr lang="en-US"/>
               <a:t>Click to edit Master text styles</a:t>
             </a:r>
-            <a:endParaRPr lang="en-US"/>
           </a:p>
           <a:p>
             <a:pPr lvl="1"/>
@@ -647,7 +645,6 @@
               <a:rPr lang="en-US"/>
               <a:t>Second level</a:t>
             </a:r>
-            <a:endParaRPr lang="en-US"/>
           </a:p>
           <a:p>
             <a:pPr lvl="2"/>
@@ -655,7 +652,6 @@
               <a:rPr lang="en-US"/>
               <a:t>Third level</a:t>
             </a:r>
-            <a:endParaRPr lang="en-US"/>
           </a:p>
           <a:p>
             <a:pPr lvl="3"/>
@@ -663,7 +659,6 @@
               <a:rPr lang="en-US"/>
               <a:t>Fourth level</a:t>
             </a:r>
-            <a:endParaRPr lang="en-US"/>
           </a:p>
           <a:p>
             <a:pPr lvl="4"/>
@@ -671,7 +666,6 @@
               <a:rPr lang="en-US"/>
               <a:t>Fifth level</a:t>
             </a:r>
-            <a:endParaRPr lang="en-US"/>
           </a:p>
         </p:txBody>
       </p:sp>
@@ -735,6 +729,7 @@
           <a:p>
             <a:fld id="{CE5E9CC1-C706-0F49-92D6-E571CC5EEA8F}" type="slidenum">
               <a:rPr lang="en-US"/>
+              <a:t>‹#›</a:t>
             </a:fld>
             <a:endParaRPr lang="en-US"/>
           </a:p>
@@ -903,6 +898,7 @@
           <a:p>
             <a:fld id="{F7021451-1387-4CA6-816F-3879F97B5CBC}" type="slidenum">
               <a:rPr lang="en-US"/>
+              <a:t>1</a:t>
             </a:fld>
             <a:endParaRPr lang="en-US"/>
           </a:p>
@@ -981,6 +977,7 @@
           <a:p>
             <a:fld id="{F7021451-1387-4CA6-816F-3879F97B5CBC}" type="slidenum">
               <a:rPr lang="en-US"/>
+              <a:t>10</a:t>
             </a:fld>
             <a:endParaRPr lang="en-US"/>
           </a:p>
@@ -1059,6 +1056,7 @@
           <a:p>
             <a:fld id="{F7021451-1387-4CA6-816F-3879F97B5CBC}" type="slidenum">
               <a:rPr lang="en-US"/>
+              <a:t>11</a:t>
             </a:fld>
             <a:endParaRPr lang="en-US"/>
           </a:p>
@@ -1137,6 +1135,7 @@
           <a:p>
             <a:fld id="{F7021451-1387-4CA6-816F-3879F97B5CBC}" type="slidenum">
               <a:rPr lang="en-US"/>
+              <a:t>12</a:t>
             </a:fld>
             <a:endParaRPr lang="en-US"/>
           </a:p>
@@ -1215,6 +1214,7 @@
           <a:p>
             <a:fld id="{F7021451-1387-4CA6-816F-3879F97B5CBC}" type="slidenum">
               <a:rPr lang="en-US"/>
+              <a:t>13</a:t>
             </a:fld>
             <a:endParaRPr lang="en-US"/>
           </a:p>
@@ -1293,6 +1293,7 @@
           <a:p>
             <a:fld id="{F7021451-1387-4CA6-816F-3879F97B5CBC}" type="slidenum">
               <a:rPr lang="en-US"/>
+              <a:t>14</a:t>
             </a:fld>
             <a:endParaRPr lang="en-US"/>
           </a:p>
@@ -1371,6 +1372,7 @@
           <a:p>
             <a:fld id="{F7021451-1387-4CA6-816F-3879F97B5CBC}" type="slidenum">
               <a:rPr lang="en-US"/>
+              <a:t>15</a:t>
             </a:fld>
             <a:endParaRPr lang="en-US"/>
           </a:p>
@@ -1449,6 +1451,7 @@
           <a:p>
             <a:fld id="{F7021451-1387-4CA6-816F-3879F97B5CBC}" type="slidenum">
               <a:rPr lang="en-US"/>
+              <a:t>16</a:t>
             </a:fld>
             <a:endParaRPr lang="en-US"/>
           </a:p>
@@ -1527,6 +1530,7 @@
           <a:p>
             <a:fld id="{F7021451-1387-4CA6-816F-3879F97B5CBC}" type="slidenum">
               <a:rPr lang="en-US"/>
+              <a:t>17</a:t>
             </a:fld>
             <a:endParaRPr lang="en-US"/>
           </a:p>
@@ -1605,6 +1609,7 @@
           <a:p>
             <a:fld id="{F7021451-1387-4CA6-816F-3879F97B5CBC}" type="slidenum">
               <a:rPr lang="en-US"/>
+              <a:t>18</a:t>
             </a:fld>
             <a:endParaRPr lang="en-US"/>
           </a:p>
@@ -1683,6 +1688,7 @@
           <a:p>
             <a:fld id="{F7021451-1387-4CA6-816F-3879F97B5CBC}" type="slidenum">
               <a:rPr lang="en-US"/>
+              <a:t>19</a:t>
             </a:fld>
             <a:endParaRPr lang="en-US"/>
           </a:p>
@@ -1761,6 +1767,7 @@
           <a:p>
             <a:fld id="{F7021451-1387-4CA6-816F-3879F97B5CBC}" type="slidenum">
               <a:rPr lang="en-US"/>
+              <a:t>2</a:t>
             </a:fld>
             <a:endParaRPr lang="en-US"/>
           </a:p>
@@ -1839,6 +1846,7 @@
           <a:p>
             <a:fld id="{F7021451-1387-4CA6-816F-3879F97B5CBC}" type="slidenum">
               <a:rPr lang="en-US"/>
+              <a:t>20</a:t>
             </a:fld>
             <a:endParaRPr lang="en-US"/>
           </a:p>
@@ -1917,6 +1925,7 @@
           <a:p>
             <a:fld id="{F7021451-1387-4CA6-816F-3879F97B5CBC}" type="slidenum">
               <a:rPr lang="en-US"/>
+              <a:t>21</a:t>
             </a:fld>
             <a:endParaRPr lang="en-US"/>
           </a:p>
@@ -1995,6 +2004,7 @@
           <a:p>
             <a:fld id="{F7021451-1387-4CA6-816F-3879F97B5CBC}" type="slidenum">
               <a:rPr lang="en-US"/>
+              <a:t>3</a:t>
             </a:fld>
             <a:endParaRPr lang="en-US"/>
           </a:p>
@@ -2073,6 +2083,7 @@
           <a:p>
             <a:fld id="{F7021451-1387-4CA6-816F-3879F97B5CBC}" type="slidenum">
               <a:rPr lang="en-US"/>
+              <a:t>4</a:t>
             </a:fld>
             <a:endParaRPr lang="en-US"/>
           </a:p>
@@ -2151,6 +2162,7 @@
           <a:p>
             <a:fld id="{F7021451-1387-4CA6-816F-3879F97B5CBC}" type="slidenum">
               <a:rPr lang="en-US"/>
+              <a:t>5</a:t>
             </a:fld>
             <a:endParaRPr lang="en-US"/>
           </a:p>
@@ -2229,6 +2241,7 @@
           <a:p>
             <a:fld id="{F7021451-1387-4CA6-816F-3879F97B5CBC}" type="slidenum">
               <a:rPr lang="en-US"/>
+              <a:t>6</a:t>
             </a:fld>
             <a:endParaRPr lang="en-US"/>
           </a:p>
@@ -2307,6 +2320,7 @@
           <a:p>
             <a:fld id="{F7021451-1387-4CA6-816F-3879F97B5CBC}" type="slidenum">
               <a:rPr lang="en-US"/>
+              <a:t>7</a:t>
             </a:fld>
             <a:endParaRPr lang="en-US"/>
           </a:p>
@@ -2385,6 +2399,7 @@
           <a:p>
             <a:fld id="{F7021451-1387-4CA6-816F-3879F97B5CBC}" type="slidenum">
               <a:rPr lang="en-US"/>
+              <a:t>8</a:t>
             </a:fld>
             <a:endParaRPr lang="en-US"/>
           </a:p>
@@ -2463,6 +2478,7 @@
           <a:p>
             <a:fld id="{F7021451-1387-4CA6-816F-3879F97B5CBC}" type="slidenum">
               <a:rPr lang="en-US"/>
+              <a:t>9</a:t>
             </a:fld>
             <a:endParaRPr lang="en-US"/>
           </a:p>
@@ -2831,6 +2847,13 @@
             <a:srgbClr val="1B998B"/>
           </a:solidFill>
         </p:spPr>
+        <p:txBody>
+          <a:bodyPr/>
+          <a:lstStyle/>
+          <a:p>
+            <a:endParaRPr lang="ko-KR" altLang="en-US"/>
+          </a:p>
+        </p:txBody>
       </p:sp>
       <p:sp>
         <p:nvSpPr>
@@ -2850,6 +2873,13 @@
             <a:srgbClr val="E8A12C"/>
           </a:solidFill>
         </p:spPr>
+        <p:txBody>
+          <a:bodyPr/>
+          <a:lstStyle/>
+          <a:p>
+            <a:endParaRPr lang="ko-KR" altLang="en-US"/>
+          </a:p>
+        </p:txBody>
       </p:sp>
       <p:sp>
         <p:nvSpPr>
@@ -3027,6 +3057,13 @@
             <a:prstDash val="solid"/>
           </a:ln>
         </p:spPr>
+        <p:txBody>
+          <a:bodyPr/>
+          <a:lstStyle/>
+          <a:p>
+            <a:endParaRPr lang="ko-KR" altLang="en-US"/>
+          </a:p>
+        </p:txBody>
       </p:sp>
       <p:sp>
         <p:nvSpPr>
@@ -3046,6 +3083,13 @@
             <a:srgbClr val="1B998B"/>
           </a:solidFill>
         </p:spPr>
+        <p:txBody>
+          <a:bodyPr/>
+          <a:lstStyle/>
+          <a:p>
+            <a:endParaRPr lang="ko-KR" altLang="en-US"/>
+          </a:p>
+        </p:txBody>
       </p:sp>
       <p:sp>
         <p:nvSpPr>
@@ -3164,6 +3208,13 @@
             <a:prstDash val="solid"/>
           </a:ln>
         </p:spPr>
+        <p:txBody>
+          <a:bodyPr/>
+          <a:lstStyle/>
+          <a:p>
+            <a:endParaRPr lang="ko-KR" altLang="en-US"/>
+          </a:p>
+        </p:txBody>
       </p:sp>
       <p:sp>
         <p:nvSpPr>
@@ -3183,6 +3234,13 @@
             <a:srgbClr val="E8A12C"/>
           </a:solidFill>
         </p:spPr>
+        <p:txBody>
+          <a:bodyPr/>
+          <a:lstStyle/>
+          <a:p>
+            <a:endParaRPr lang="ko-KR" altLang="en-US"/>
+          </a:p>
+        </p:txBody>
       </p:sp>
       <p:sp>
         <p:nvSpPr>
@@ -3301,6 +3359,13 @@
             <a:prstDash val="solid"/>
           </a:ln>
         </p:spPr>
+        <p:txBody>
+          <a:bodyPr/>
+          <a:lstStyle/>
+          <a:p>
+            <a:endParaRPr lang="ko-KR" altLang="en-US"/>
+          </a:p>
+        </p:txBody>
       </p:sp>
       <p:sp>
         <p:nvSpPr>
@@ -3320,6 +3385,13 @@
             <a:srgbClr val="5B8DEF"/>
           </a:solidFill>
         </p:spPr>
+        <p:txBody>
+          <a:bodyPr/>
+          <a:lstStyle/>
+          <a:p>
+            <a:endParaRPr lang="ko-KR" altLang="en-US"/>
+          </a:p>
+        </p:txBody>
       </p:sp>
       <p:sp>
         <p:nvSpPr>
@@ -3586,6 +3658,13 @@
             </a:outerShdw>
           </a:effectLst>
         </p:spPr>
+        <p:txBody>
+          <a:bodyPr/>
+          <a:lstStyle/>
+          <a:p>
+            <a:endParaRPr lang="ko-KR" altLang="en-US"/>
+          </a:p>
+        </p:txBody>
       </p:sp>
       <p:sp>
         <p:nvSpPr>
@@ -3605,6 +3684,13 @@
             <a:srgbClr val="C1121F"/>
           </a:solidFill>
         </p:spPr>
+        <p:txBody>
+          <a:bodyPr/>
+          <a:lstStyle/>
+          <a:p>
+            <a:endParaRPr lang="ko-KR" altLang="en-US"/>
+          </a:p>
+        </p:txBody>
       </p:sp>
       <p:sp>
         <p:nvSpPr>
@@ -3850,6 +3936,13 @@
             </a:outerShdw>
           </a:effectLst>
         </p:spPr>
+        <p:txBody>
+          <a:bodyPr/>
+          <a:lstStyle/>
+          <a:p>
+            <a:endParaRPr lang="ko-KR" altLang="en-US"/>
+          </a:p>
+        </p:txBody>
       </p:sp>
       <p:sp>
         <p:nvSpPr>
@@ -3869,6 +3962,13 @@
             <a:srgbClr val="1B998B"/>
           </a:solidFill>
         </p:spPr>
+        <p:txBody>
+          <a:bodyPr/>
+          <a:lstStyle/>
+          <a:p>
+            <a:endParaRPr lang="ko-KR" altLang="en-US"/>
+          </a:p>
+        </p:txBody>
       </p:sp>
       <p:sp>
         <p:nvSpPr>
@@ -4154,7 +4254,6 @@
               <a:rPr lang="en-US" sz="1100" dirty="0"/>
               <a:t>10</a:t>
             </a:r>
-            <a:endParaRPr lang="en-US" sz="1100" dirty="0"/>
           </a:p>
         </p:txBody>
       </p:sp>
@@ -4284,6 +4383,13 @@
             </a:outerShdw>
           </a:effectLst>
         </p:spPr>
+        <p:txBody>
+          <a:bodyPr/>
+          <a:lstStyle/>
+          <a:p>
+            <a:endParaRPr lang="ko-KR" altLang="en-US"/>
+          </a:p>
+        </p:txBody>
       </p:sp>
       <p:sp>
         <p:nvSpPr>
@@ -4661,10 +4767,34 @@
             <a:tbl>
               <a:tblPr/>
               <a:tblGrid>
-                <a:gridCol w="2743200"/>
-                <a:gridCol w="1371600"/>
-                <a:gridCol w="1371600"/>
-                <a:gridCol w="1371600"/>
+                <a:gridCol w="2743200">
+                  <a:extLst>
+                    <a:ext uri="{9D8B030D-6E8A-4147-A177-3AD203B41FA5}">
+                      <a16:colId xmlns:a16="http://schemas.microsoft.com/office/drawing/2014/main" val="20000"/>
+                    </a:ext>
+                  </a:extLst>
+                </a:gridCol>
+                <a:gridCol w="1371600">
+                  <a:extLst>
+                    <a:ext uri="{9D8B030D-6E8A-4147-A177-3AD203B41FA5}">
+                      <a16:colId xmlns:a16="http://schemas.microsoft.com/office/drawing/2014/main" val="20001"/>
+                    </a:ext>
+                  </a:extLst>
+                </a:gridCol>
+                <a:gridCol w="1371600">
+                  <a:extLst>
+                    <a:ext uri="{9D8B030D-6E8A-4147-A177-3AD203B41FA5}">
+                      <a16:colId xmlns:a16="http://schemas.microsoft.com/office/drawing/2014/main" val="20002"/>
+                    </a:ext>
+                  </a:extLst>
+                </a:gridCol>
+                <a:gridCol w="1371600">
+                  <a:extLst>
+                    <a:ext uri="{9D8B030D-6E8A-4147-A177-3AD203B41FA5}">
+                      <a16:colId xmlns:a16="http://schemas.microsoft.com/office/drawing/2014/main" val="20003"/>
+                    </a:ext>
+                  </a:extLst>
+                </a:gridCol>
               </a:tblGrid>
               <a:tr h="457200">
                 <a:tc>
@@ -4939,6 +5069,11 @@
                     </a:solidFill>
                   </a:tcPr>
                 </a:tc>
+                <a:extLst>
+                  <a:ext uri="{0D108BD9-81ED-4DB2-BD59-A6C34878D82A}">
+                    <a16:rowId xmlns:a16="http://schemas.microsoft.com/office/drawing/2014/main" val="10000"/>
+                  </a:ext>
+                </a:extLst>
               </a:tr>
               <a:tr h="457200">
                 <a:tc>
@@ -5213,6 +5348,11 @@
                     </a:solidFill>
                   </a:tcPr>
                 </a:tc>
+                <a:extLst>
+                  <a:ext uri="{0D108BD9-81ED-4DB2-BD59-A6C34878D82A}">
+                    <a16:rowId xmlns:a16="http://schemas.microsoft.com/office/drawing/2014/main" val="10001"/>
+                  </a:ext>
+                </a:extLst>
               </a:tr>
               <a:tr h="457200">
                 <a:tc>
@@ -5487,6 +5627,11 @@
                     </a:solidFill>
                   </a:tcPr>
                 </a:tc>
+                <a:extLst>
+                  <a:ext uri="{0D108BD9-81ED-4DB2-BD59-A6C34878D82A}">
+                    <a16:rowId xmlns:a16="http://schemas.microsoft.com/office/drawing/2014/main" val="10002"/>
+                  </a:ext>
+                </a:extLst>
               </a:tr>
               <a:tr h="457200">
                 <a:tc>
@@ -5761,6 +5906,11 @@
                     </a:solidFill>
                   </a:tcPr>
                 </a:tc>
+                <a:extLst>
+                  <a:ext uri="{0D108BD9-81ED-4DB2-BD59-A6C34878D82A}">
+                    <a16:rowId xmlns:a16="http://schemas.microsoft.com/office/drawing/2014/main" val="10003"/>
+                  </a:ext>
+                </a:extLst>
               </a:tr>
               <a:tr h="457200">
                 <a:tc>
@@ -6035,6 +6185,11 @@
                     </a:solidFill>
                   </a:tcPr>
                 </a:tc>
+                <a:extLst>
+                  <a:ext uri="{0D108BD9-81ED-4DB2-BD59-A6C34878D82A}">
+                    <a16:rowId xmlns:a16="http://schemas.microsoft.com/office/drawing/2014/main" val="10004"/>
+                  </a:ext>
+                </a:extLst>
               </a:tr>
             </a:tbl>
           </a:graphicData>
@@ -6103,6 +6258,13 @@
             </a:outerShdw>
           </a:effectLst>
         </p:spPr>
+        <p:txBody>
+          <a:bodyPr/>
+          <a:lstStyle/>
+          <a:p>
+            <a:endParaRPr lang="ko-KR" altLang="en-US"/>
+          </a:p>
+        </p:txBody>
       </p:sp>
       <p:sp>
         <p:nvSpPr>
@@ -6122,6 +6284,13 @@
             <a:srgbClr val="E8A12C"/>
           </a:solidFill>
         </p:spPr>
+        <p:txBody>
+          <a:bodyPr/>
+          <a:lstStyle/>
+          <a:p>
+            <a:endParaRPr lang="ko-KR" altLang="en-US"/>
+          </a:p>
+        </p:txBody>
       </p:sp>
       <p:sp>
         <p:nvSpPr>
@@ -6249,6 +6418,13 @@
             </a:outerShdw>
           </a:effectLst>
         </p:spPr>
+        <p:txBody>
+          <a:bodyPr/>
+          <a:lstStyle/>
+          <a:p>
+            <a:endParaRPr lang="ko-KR" altLang="en-US"/>
+          </a:p>
+        </p:txBody>
       </p:sp>
       <p:sp>
         <p:nvSpPr>
@@ -6268,6 +6444,13 @@
             <a:srgbClr val="1B998B"/>
           </a:solidFill>
         </p:spPr>
+        <p:txBody>
+          <a:bodyPr/>
+          <a:lstStyle/>
+          <a:p>
+            <a:endParaRPr lang="ko-KR" altLang="en-US"/>
+          </a:p>
+        </p:txBody>
       </p:sp>
       <p:sp>
         <p:nvSpPr>
@@ -6408,6 +6591,13 @@
             </a:outerShdw>
           </a:effectLst>
         </p:spPr>
+        <p:txBody>
+          <a:bodyPr/>
+          <a:lstStyle/>
+          <a:p>
+            <a:endParaRPr lang="ko-KR" altLang="en-US"/>
+          </a:p>
+        </p:txBody>
       </p:sp>
       <p:sp>
         <p:nvSpPr>
@@ -6427,6 +6617,13 @@
             <a:srgbClr val="13294B"/>
           </a:solidFill>
         </p:spPr>
+        <p:txBody>
+          <a:bodyPr/>
+          <a:lstStyle/>
+          <a:p>
+            <a:endParaRPr lang="ko-KR" altLang="en-US"/>
+          </a:p>
+        </p:txBody>
       </p:sp>
       <p:sp>
         <p:nvSpPr>
@@ -6799,7 +6996,7 @@
         <p:spPr>
           <a:xfrm>
             <a:off x="548640" y="2057400"/>
-            <a:ext cx="5362956" cy="2834640"/>
+            <a:ext cx="3042859" cy="2834640"/>
           </a:xfrm>
           <a:prstGeom prst="rect">
             <a:avLst/>
@@ -6815,6 +7012,13 @@
             </a:outerShdw>
           </a:effectLst>
         </p:spPr>
+        <p:txBody>
+          <a:bodyPr/>
+          <a:lstStyle/>
+          <a:p>
+            <a:endParaRPr lang="ko-KR" altLang="en-US"/>
+          </a:p>
+        </p:txBody>
       </p:sp>
       <p:sp>
         <p:nvSpPr>
@@ -6834,6 +7038,13 @@
             <a:srgbClr val="C1121F"/>
           </a:solidFill>
         </p:spPr>
+        <p:txBody>
+          <a:bodyPr/>
+          <a:lstStyle/>
+          <a:p>
+            <a:endParaRPr lang="ko-KR" altLang="en-US"/>
+          </a:p>
+        </p:txBody>
       </p:sp>
       <p:sp>
         <p:nvSpPr>
@@ -6882,7 +7093,7 @@
         <p:spPr>
           <a:xfrm>
             <a:off x="804672" y="2651760"/>
-            <a:ext cx="4860036" cy="2011680"/>
+            <a:ext cx="2512121" cy="2011680"/>
           </a:xfrm>
           <a:prstGeom prst="rect">
             <a:avLst/>
@@ -6965,8 +7176,8 @@
         </p:nvSpPr>
         <p:spPr>
           <a:xfrm>
-            <a:off x="6277356" y="2057400"/>
-            <a:ext cx="5362956" cy="2834640"/>
+            <a:off x="3765235" y="2057400"/>
+            <a:ext cx="2877661" cy="2834640"/>
           </a:xfrm>
           <a:prstGeom prst="rect">
             <a:avLst/>
@@ -6982,6 +7193,13 @@
             </a:outerShdw>
           </a:effectLst>
         </p:spPr>
+        <p:txBody>
+          <a:bodyPr/>
+          <a:lstStyle/>
+          <a:p>
+            <a:endParaRPr lang="ko-KR" altLang="en-US"/>
+          </a:p>
+        </p:txBody>
       </p:sp>
       <p:sp>
         <p:nvSpPr>
@@ -6991,7 +7209,7 @@
         </p:nvSpPr>
         <p:spPr>
           <a:xfrm>
-            <a:off x="6277356" y="2057400"/>
+            <a:off x="3765235" y="2057400"/>
             <a:ext cx="82296" cy="2834640"/>
           </a:xfrm>
           <a:prstGeom prst="rect">
@@ -7001,6 +7219,13 @@
             <a:srgbClr val="1B998B"/>
           </a:solidFill>
         </p:spPr>
+        <p:txBody>
+          <a:bodyPr/>
+          <a:lstStyle/>
+          <a:p>
+            <a:endParaRPr lang="ko-KR" altLang="en-US"/>
+          </a:p>
+        </p:txBody>
       </p:sp>
       <p:sp>
         <p:nvSpPr>
@@ -7010,8 +7235,8 @@
         </p:nvSpPr>
         <p:spPr>
           <a:xfrm>
-            <a:off x="6533388" y="2212848"/>
-            <a:ext cx="4905756" cy="365760"/>
+            <a:off x="4028696" y="2258568"/>
+            <a:ext cx="2067304" cy="365760"/>
           </a:xfrm>
           <a:prstGeom prst="rect">
             <a:avLst/>
@@ -7048,8 +7273,8 @@
         </p:nvSpPr>
         <p:spPr>
           <a:xfrm>
-            <a:off x="6533388" y="2651760"/>
-            <a:ext cx="4494276" cy="2011680"/>
+            <a:off x="4021267" y="2651760"/>
+            <a:ext cx="2330012" cy="2011680"/>
           </a:xfrm>
           <a:prstGeom prst="rect">
             <a:avLst/>
@@ -7149,6 +7374,13 @@
             </a:outerShdw>
           </a:effectLst>
         </p:spPr>
+        <p:txBody>
+          <a:bodyPr/>
+          <a:lstStyle/>
+          <a:p>
+            <a:endParaRPr lang="ko-KR" altLang="en-US"/>
+          </a:p>
+        </p:txBody>
       </p:sp>
       <p:sp>
         <p:nvSpPr>
@@ -7196,7 +7428,7 @@
                 <a:ea typeface="Calibri" pitchFamily="34" charset="-122"/>
                 <a:cs typeface="Calibri" pitchFamily="34" charset="-120"/>
               </a:rPr>
-              <a:t>a critical buffer region in the low teens (L* ≈ 13%) separating amplification from forced liquidation — located consistently by two methods, though imprecisely estimated.</a:t>
+              <a:t>a critical buffer region (L* ≈ 13%) separating amplification from forced liquidation — located consistently by two methods.</a:t>
             </a:r>
             <a:endParaRPr lang="en-US" sz="1350" dirty="0"/>
           </a:p>
@@ -7275,6 +7507,354 @@
               <a:t>13</a:t>
             </a:r>
             <a:endParaRPr lang="en-US" sz="1100" dirty="0"/>
+          </a:p>
+        </p:txBody>
+      </p:sp>
+      <p:sp>
+        <p:nvSpPr>
+          <p:cNvPr id="17" name="Shape 12">
+            <a:extLst>
+              <a:ext uri="{FF2B5EF4-FFF2-40B4-BE49-F238E27FC236}">
+                <a16:creationId xmlns:a16="http://schemas.microsoft.com/office/drawing/2014/main" id="{34FCE5DF-20C9-5636-A609-56D47C380EFF}"/>
+              </a:ext>
+            </a:extLst>
+          </p:cNvPr>
+          <p:cNvSpPr/>
+          <p:nvPr/>
+        </p:nvSpPr>
+        <p:spPr>
+          <a:xfrm>
+            <a:off x="6816632" y="2057400"/>
+            <a:ext cx="5193792" cy="2847104"/>
+          </a:xfrm>
+          <a:prstGeom prst="rect">
+            <a:avLst/>
+          </a:prstGeom>
+          <a:solidFill>
+            <a:srgbClr val="F4F6FA"/>
+          </a:solidFill>
+          <a:effectLst>
+            <a:outerShdw blurRad="88900" dist="38100" dir="8100000" algn="bl" rotWithShape="0">
+              <a:srgbClr val="000000">
+                <a:alpha val="13000"/>
+              </a:srgbClr>
+            </a:outerShdw>
+          </a:effectLst>
+        </p:spPr>
+        <p:txBody>
+          <a:bodyPr/>
+          <a:lstStyle/>
+          <a:p>
+            <a:endParaRPr lang="ko-KR" altLang="en-US"/>
+          </a:p>
+        </p:txBody>
+      </p:sp>
+      <p:sp>
+        <p:nvSpPr>
+          <p:cNvPr id="18" name="Shape 13">
+            <a:extLst>
+              <a:ext uri="{FF2B5EF4-FFF2-40B4-BE49-F238E27FC236}">
+                <a16:creationId xmlns:a16="http://schemas.microsoft.com/office/drawing/2014/main" id="{96B1B4A8-6414-9ABB-BD51-DB6F006AA1EF}"/>
+              </a:ext>
+            </a:extLst>
+          </p:cNvPr>
+          <p:cNvSpPr/>
+          <p:nvPr/>
+        </p:nvSpPr>
+        <p:spPr>
+          <a:xfrm>
+            <a:off x="6816632" y="2057400"/>
+            <a:ext cx="82296" cy="2847104"/>
+          </a:xfrm>
+          <a:prstGeom prst="rect">
+            <a:avLst/>
+          </a:prstGeom>
+          <a:solidFill>
+            <a:srgbClr val="E8A12C"/>
+          </a:solidFill>
+        </p:spPr>
+        <p:txBody>
+          <a:bodyPr/>
+          <a:lstStyle/>
+          <a:p>
+            <a:endParaRPr lang="ko-KR" altLang="en-US"/>
+          </a:p>
+        </p:txBody>
+      </p:sp>
+      <p:sp>
+        <p:nvSpPr>
+          <p:cNvPr id="19" name="Text 14">
+            <a:extLst>
+              <a:ext uri="{FF2B5EF4-FFF2-40B4-BE49-F238E27FC236}">
+                <a16:creationId xmlns:a16="http://schemas.microsoft.com/office/drawing/2014/main" id="{E8B88EF7-4715-5E8F-C87F-08B32656A655}"/>
+              </a:ext>
+            </a:extLst>
+          </p:cNvPr>
+          <p:cNvSpPr/>
+          <p:nvPr/>
+        </p:nvSpPr>
+        <p:spPr>
+          <a:xfrm>
+            <a:off x="7072664" y="1818477"/>
+            <a:ext cx="4736592" cy="1220187"/>
+          </a:xfrm>
+          <a:prstGeom prst="rect">
+            <a:avLst/>
+          </a:prstGeom>
+          <a:noFill/>
+        </p:spPr>
+        <p:txBody>
+          <a:bodyPr wrap="square" lIns="0" tIns="0" rIns="0" bIns="0" rtlCol="0" anchor="ctr"/>
+          <a:lstStyle/>
+          <a:p>
+            <a:pPr marL="0" indent="0">
+              <a:buNone/>
+            </a:pPr>
+            <a:r>
+              <a:rPr lang="en-US" sz="2200" b="1" dirty="0">
+                <a:solidFill>
+                  <a:srgbClr val="13294B"/>
+                </a:solidFill>
+                <a:latin typeface="Georgia" panose="02040502050405090303" pitchFamily="34" charset="0"/>
+                <a:ea typeface="Georgia" panose="02040502050405090303" pitchFamily="34" charset="-122"/>
+                <a:cs typeface="Georgia" panose="02040502050405090303" pitchFamily="34" charset="-120"/>
+              </a:rPr>
+              <a:t>L* is the point of the switch</a:t>
+            </a:r>
+            <a:endParaRPr lang="en-US" sz="2200" dirty="0"/>
+          </a:p>
+        </p:txBody>
+      </p:sp>
+      <p:sp>
+        <p:nvSpPr>
+          <p:cNvPr id="20" name="Text 15">
+            <a:extLst>
+              <a:ext uri="{FF2B5EF4-FFF2-40B4-BE49-F238E27FC236}">
+                <a16:creationId xmlns:a16="http://schemas.microsoft.com/office/drawing/2014/main" id="{0B464FF1-E1BC-FA4C-7565-37BD6B0B9788}"/>
+              </a:ext>
+            </a:extLst>
+          </p:cNvPr>
+          <p:cNvSpPr/>
+          <p:nvPr/>
+        </p:nvSpPr>
+        <p:spPr>
+          <a:xfrm>
+            <a:off x="7045232" y="2412430"/>
+            <a:ext cx="4736592" cy="1084611"/>
+          </a:xfrm>
+          <a:prstGeom prst="rect">
+            <a:avLst/>
+          </a:prstGeom>
+          <a:noFill/>
+        </p:spPr>
+        <p:txBody>
+          <a:bodyPr wrap="square" lIns="0" tIns="0" rIns="0" bIns="0" rtlCol="0" anchor="ctr"/>
+          <a:lstStyle/>
+          <a:p>
+            <a:pPr marL="0" indent="0">
+              <a:buNone/>
+            </a:pPr>
+            <a:endParaRPr lang="en-US" sz="1150" dirty="0"/>
+          </a:p>
+        </p:txBody>
+      </p:sp>
+      <p:sp>
+        <p:nvSpPr>
+          <p:cNvPr id="25" name="Text 10">
+            <a:extLst>
+              <a:ext uri="{FF2B5EF4-FFF2-40B4-BE49-F238E27FC236}">
+                <a16:creationId xmlns:a16="http://schemas.microsoft.com/office/drawing/2014/main" id="{EC6ACDE3-C373-84EE-2C2E-8D25C10C1C7A}"/>
+              </a:ext>
+            </a:extLst>
+          </p:cNvPr>
+          <p:cNvSpPr/>
+          <p:nvPr/>
+        </p:nvSpPr>
+        <p:spPr>
+          <a:xfrm>
+            <a:off x="7141244" y="2674081"/>
+            <a:ext cx="4626864" cy="2011680"/>
+          </a:xfrm>
+          <a:prstGeom prst="rect">
+            <a:avLst/>
+          </a:prstGeom>
+          <a:noFill/>
+        </p:spPr>
+        <p:txBody>
+          <a:bodyPr wrap="square" lIns="0" tIns="0" rIns="0" bIns="0" rtlCol="0" anchor="ctr"/>
+          <a:lstStyle/>
+          <a:p>
+            <a:pPr marL="342900" indent="-342900">
+              <a:spcAft>
+                <a:spcPts val="800"/>
+              </a:spcAft>
+              <a:buSzPct val="100000"/>
+              <a:buChar char="•"/>
+            </a:pPr>
+            <a:r>
+              <a:rPr lang="en-US" sz="1400" dirty="0">
+                <a:solidFill>
+                  <a:srgbClr val="33425C"/>
+                </a:solidFill>
+                <a:latin typeface="Calibri" pitchFamily="34" charset="0"/>
+                <a:ea typeface="Calibri" pitchFamily="34" charset="-122"/>
+                <a:cs typeface="Calibri" pitchFamily="34" charset="-120"/>
+              </a:rPr>
+              <a:t>Depends on the historical </a:t>
+            </a:r>
+            <a:r>
+              <a:rPr lang="en-US" sz="1400" dirty="0">
+                <a:solidFill>
+                  <a:srgbClr val="33425C"/>
+                </a:solidFill>
+                <a:highlight>
+                  <a:srgbClr val="FFFF00"/>
+                </a:highlight>
+                <a:latin typeface="Calibri" pitchFamily="34" charset="0"/>
+                <a:ea typeface="Calibri" pitchFamily="34" charset="-122"/>
+                <a:cs typeface="Calibri" pitchFamily="34" charset="-120"/>
+              </a:rPr>
+              <a:t>distribution of redemption shocks</a:t>
+            </a:r>
+            <a:r>
+              <a:rPr lang="en-US" sz="1400" dirty="0">
+                <a:solidFill>
+                  <a:srgbClr val="33425C"/>
+                </a:solidFill>
+                <a:latin typeface="Calibri" pitchFamily="34" charset="0"/>
+                <a:ea typeface="Calibri" pitchFamily="34" charset="-122"/>
+                <a:cs typeface="Calibri" pitchFamily="34" charset="-120"/>
+              </a:rPr>
+              <a:t>, the </a:t>
+            </a:r>
+            <a:r>
+              <a:rPr lang="en-US" sz="1400" dirty="0">
+                <a:solidFill>
+                  <a:srgbClr val="33425C"/>
+                </a:solidFill>
+                <a:highlight>
+                  <a:srgbClr val="FFFF00"/>
+                </a:highlight>
+                <a:latin typeface="Calibri" pitchFamily="34" charset="0"/>
+                <a:ea typeface="Calibri" pitchFamily="34" charset="-122"/>
+                <a:cs typeface="Calibri" pitchFamily="34" charset="-120"/>
+              </a:rPr>
+              <a:t>depth and liquidity of the T-bill market</a:t>
+            </a:r>
+            <a:r>
+              <a:rPr lang="en-US" sz="1400" dirty="0">
+                <a:solidFill>
+                  <a:srgbClr val="33425C"/>
+                </a:solidFill>
+                <a:latin typeface="Calibri" pitchFamily="34" charset="0"/>
+                <a:ea typeface="Calibri" pitchFamily="34" charset="-122"/>
+                <a:cs typeface="Calibri" pitchFamily="34" charset="-120"/>
+              </a:rPr>
+              <a:t>, and </a:t>
+            </a:r>
+            <a:r>
+              <a:rPr lang="en-US" sz="1400" dirty="0">
+                <a:solidFill>
+                  <a:srgbClr val="33425C"/>
+                </a:solidFill>
+                <a:highlight>
+                  <a:srgbClr val="FFFF00"/>
+                </a:highlight>
+                <a:latin typeface="Calibri" pitchFamily="34" charset="0"/>
+                <a:ea typeface="Calibri" pitchFamily="34" charset="-122"/>
+                <a:cs typeface="Calibri" pitchFamily="34" charset="-120"/>
+              </a:rPr>
+              <a:t>composition of reserves</a:t>
+            </a:r>
+            <a:r>
+              <a:rPr lang="en-US" sz="1400" dirty="0">
+                <a:solidFill>
+                  <a:srgbClr val="33425C"/>
+                </a:solidFill>
+                <a:latin typeface="Calibri" pitchFamily="34" charset="0"/>
+                <a:ea typeface="Calibri" pitchFamily="34" charset="-122"/>
+                <a:cs typeface="Calibri" pitchFamily="34" charset="-120"/>
+              </a:rPr>
+              <a:t>.</a:t>
+            </a:r>
+            <a:endParaRPr lang="en-US" sz="1400" dirty="0"/>
+          </a:p>
+          <a:p>
+            <a:pPr marL="342900" indent="-342900">
+              <a:spcAft>
+                <a:spcPts val="800"/>
+              </a:spcAft>
+              <a:buSzPct val="100000"/>
+              <a:buChar char="•"/>
+            </a:pPr>
+            <a:r>
+              <a:rPr lang="en-US" sz="1400" dirty="0">
+                <a:solidFill>
+                  <a:srgbClr val="33425C"/>
+                </a:solidFill>
+                <a:latin typeface="Calibri" pitchFamily="34" charset="0"/>
+                <a:ea typeface="Calibri" pitchFamily="34" charset="-122"/>
+                <a:cs typeface="Calibri" pitchFamily="34" charset="-120"/>
+              </a:rPr>
+              <a:t>Above L*, supply-spread relationship reflects the </a:t>
+            </a:r>
+            <a:r>
+              <a:rPr lang="en-US" sz="1400" dirty="0">
+                <a:solidFill>
+                  <a:srgbClr val="33425C"/>
+                </a:solidFill>
+                <a:highlight>
+                  <a:srgbClr val="FFFF00"/>
+                </a:highlight>
+                <a:latin typeface="Calibri" pitchFamily="34" charset="0"/>
+                <a:ea typeface="Calibri" pitchFamily="34" charset="-122"/>
+                <a:cs typeface="Calibri" pitchFamily="34" charset="-120"/>
+              </a:rPr>
+              <a:t>demand only channel. </a:t>
+            </a:r>
+          </a:p>
+          <a:p>
+            <a:pPr marL="342900" indent="-342900">
+              <a:spcAft>
+                <a:spcPts val="800"/>
+              </a:spcAft>
+              <a:buSzPct val="100000"/>
+              <a:buChar char="•"/>
+            </a:pPr>
+            <a:r>
+              <a:rPr lang="en-US" sz="1400" dirty="0">
+                <a:solidFill>
+                  <a:srgbClr val="33425C"/>
+                </a:solidFill>
+                <a:latin typeface="Calibri" pitchFamily="34" charset="0"/>
+                <a:cs typeface="Calibri" pitchFamily="34" charset="-120"/>
+              </a:rPr>
+              <a:t>Below L*, it reflects for </a:t>
+            </a:r>
+            <a:r>
+              <a:rPr lang="en-US" sz="1400" dirty="0">
+                <a:solidFill>
+                  <a:srgbClr val="33425C"/>
+                </a:solidFill>
+                <a:highlight>
+                  <a:srgbClr val="FFFF00"/>
+                </a:highlight>
+                <a:latin typeface="Calibri" pitchFamily="34" charset="0"/>
+                <a:cs typeface="Calibri" pitchFamily="34" charset="-120"/>
+              </a:rPr>
+              <a:t>forced liquidation </a:t>
+            </a:r>
+            <a:r>
+              <a:rPr lang="en-US" sz="1400" dirty="0">
+                <a:solidFill>
+                  <a:srgbClr val="33425C"/>
+                </a:solidFill>
+                <a:latin typeface="Calibri" pitchFamily="34" charset="0"/>
+                <a:cs typeface="Calibri" pitchFamily="34" charset="-120"/>
+              </a:rPr>
+              <a:t>– also changes the sign of some effects and magnitude of others. </a:t>
+            </a:r>
+            <a:endParaRPr lang="en-US" sz="1400" dirty="0"/>
           </a:p>
         </p:txBody>
       </p:sp>
@@ -7343,7 +7923,7 @@
                 <a:ea typeface="Calibri" pitchFamily="34" charset="-122"/>
                 <a:cs typeface="Calibri" pitchFamily="34" charset="-120"/>
               </a:rPr>
-              <a:t>THRESHOLD RESULT</a:t>
+              <a:t>THRESHOLD RESULT: HANSEN</a:t>
             </a:r>
             <a:endParaRPr lang="en-US" sz="1200" dirty="0"/>
           </a:p>
@@ -7434,7 +8014,7 @@
           <p:nvPr/>
         </p:nvPicPr>
         <p:blipFill>
-          <a:blip r:embed="rId1"/>
+          <a:blip r:embed="rId3"/>
           <a:stretch>
             <a:fillRect/>
           </a:stretch>
@@ -7495,7 +8075,7 @@
         </p:nvSpPr>
         <p:spPr>
           <a:xfrm>
-            <a:off x="6446520" y="1920240"/>
+            <a:off x="6446520" y="2438763"/>
             <a:ext cx="5193792" cy="960120"/>
           </a:xfrm>
           <a:prstGeom prst="rect">
@@ -7512,6 +8092,13 @@
             </a:outerShdw>
           </a:effectLst>
         </p:spPr>
+        <p:txBody>
+          <a:bodyPr/>
+          <a:lstStyle/>
+          <a:p>
+            <a:endParaRPr lang="ko-KR" altLang="en-US"/>
+          </a:p>
+        </p:txBody>
       </p:sp>
       <p:sp>
         <p:nvSpPr>
@@ -7521,7 +8108,7 @@
         </p:nvSpPr>
         <p:spPr>
           <a:xfrm>
-            <a:off x="6446520" y="1920240"/>
+            <a:off x="6446520" y="2438763"/>
             <a:ext cx="82296" cy="960120"/>
           </a:xfrm>
           <a:prstGeom prst="rect">
@@ -7531,6 +8118,13 @@
             <a:srgbClr val="1B998B"/>
           </a:solidFill>
         </p:spPr>
+        <p:txBody>
+          <a:bodyPr/>
+          <a:lstStyle/>
+          <a:p>
+            <a:endParaRPr lang="ko-KR" altLang="en-US"/>
+          </a:p>
+        </p:txBody>
       </p:sp>
       <p:sp>
         <p:nvSpPr>
@@ -7540,7 +8134,7 @@
         </p:nvSpPr>
         <p:spPr>
           <a:xfrm>
-            <a:off x="6675120" y="2029968"/>
+            <a:off x="6675120" y="2548491"/>
             <a:ext cx="4736592" cy="411480"/>
           </a:xfrm>
           <a:prstGeom prst="rect">
@@ -7578,7 +8172,7 @@
         </p:nvSpPr>
         <p:spPr>
           <a:xfrm>
-            <a:off x="6675120" y="2468880"/>
+            <a:off x="6675120" y="2987403"/>
             <a:ext cx="4736592" cy="365760"/>
           </a:xfrm>
           <a:prstGeom prst="rect">
@@ -7610,13 +8204,13 @@
       </p:sp>
       <p:sp>
         <p:nvSpPr>
-          <p:cNvPr id="11" name="Shape 8"/>
-          <p:cNvSpPr/>
-          <p:nvPr/>
-        </p:nvSpPr>
-        <p:spPr>
-          <a:xfrm>
-            <a:off x="6446520" y="2999232"/>
+          <p:cNvPr id="15" name="Shape 12"/>
+          <p:cNvSpPr/>
+          <p:nvPr/>
+        </p:nvSpPr>
+        <p:spPr>
+          <a:xfrm>
+            <a:off x="6446520" y="3658858"/>
             <a:ext cx="5193792" cy="960120"/>
           </a:xfrm>
           <a:prstGeom prst="rect">
@@ -7633,35 +8227,49 @@
             </a:outerShdw>
           </a:effectLst>
         </p:spPr>
-      </p:sp>
-      <p:sp>
-        <p:nvSpPr>
-          <p:cNvPr id="12" name="Shape 9"/>
-          <p:cNvSpPr/>
-          <p:nvPr/>
-        </p:nvSpPr>
-        <p:spPr>
-          <a:xfrm>
-            <a:off x="6446520" y="2999232"/>
+        <p:txBody>
+          <a:bodyPr/>
+          <a:lstStyle/>
+          <a:p>
+            <a:endParaRPr lang="ko-KR" altLang="en-US"/>
+          </a:p>
+        </p:txBody>
+      </p:sp>
+      <p:sp>
+        <p:nvSpPr>
+          <p:cNvPr id="16" name="Shape 13"/>
+          <p:cNvSpPr/>
+          <p:nvPr/>
+        </p:nvSpPr>
+        <p:spPr>
+          <a:xfrm>
+            <a:off x="6446520" y="3658858"/>
             <a:ext cx="82296" cy="960120"/>
           </a:xfrm>
           <a:prstGeom prst="rect">
             <a:avLst/>
           </a:prstGeom>
           <a:solidFill>
-            <a:srgbClr val="13294B"/>
+            <a:srgbClr val="E8A12C"/>
           </a:solidFill>
         </p:spPr>
-      </p:sp>
-      <p:sp>
-        <p:nvSpPr>
-          <p:cNvPr id="13" name="Text 10"/>
-          <p:cNvSpPr/>
-          <p:nvPr/>
-        </p:nvSpPr>
-        <p:spPr>
-          <a:xfrm>
-            <a:off x="6675120" y="3108960"/>
+        <p:txBody>
+          <a:bodyPr/>
+          <a:lstStyle/>
+          <a:p>
+            <a:endParaRPr lang="ko-KR" altLang="en-US"/>
+          </a:p>
+        </p:txBody>
+      </p:sp>
+      <p:sp>
+        <p:nvSpPr>
+          <p:cNvPr id="17" name="Text 14"/>
+          <p:cNvSpPr/>
+          <p:nvPr/>
+        </p:nvSpPr>
+        <p:spPr>
+          <a:xfrm>
+            <a:off x="6675120" y="3768586"/>
             <a:ext cx="4736592" cy="411480"/>
           </a:xfrm>
           <a:prstGeom prst="rect">
@@ -7685,7 +8293,7 @@
                 <a:ea typeface="Georgia" panose="02040502050405090303" pitchFamily="34" charset="-122"/>
                 <a:cs typeface="Georgia" panose="02040502050405090303" pitchFamily="34" charset="-120"/>
               </a:rPr>
-              <a:t>c* = 14.9%</a:t>
+              <a:t>p = 0.406</a:t>
             </a:r>
             <a:endParaRPr lang="en-US" sz="2200" dirty="0"/>
           </a:p>
@@ -7693,13 +8301,13 @@
       </p:sp>
       <p:sp>
         <p:nvSpPr>
-          <p:cNvPr id="14" name="Text 11"/>
-          <p:cNvSpPr/>
-          <p:nvPr/>
-        </p:nvSpPr>
-        <p:spPr>
-          <a:xfrm>
-            <a:off x="6675120" y="3547872"/>
+          <p:cNvPr id="18" name="Text 15"/>
+          <p:cNvSpPr/>
+          <p:nvPr/>
+        </p:nvSpPr>
+        <p:spPr>
+          <a:xfrm>
+            <a:off x="6675120" y="4207498"/>
             <a:ext cx="4736592" cy="365760"/>
           </a:xfrm>
           <a:prstGeom prst="rect">
@@ -7723,7 +8331,7 @@
                 <a:ea typeface="Calibri" pitchFamily="34" charset="-122"/>
                 <a:cs typeface="Calibri" pitchFamily="34" charset="-120"/>
               </a:rPr>
-              <a:t>LSTAR smooth transition — locates the same region</a:t>
+              <a:t>bootstrap; 90% CI [3.1%, 14.5%] — location robust, not precise</a:t>
             </a:r>
             <a:endParaRPr lang="en-US" sz="1150" dirty="0"/>
           </a:p>
@@ -7731,14 +8339,14 @@
       </p:sp>
       <p:sp>
         <p:nvSpPr>
-          <p:cNvPr id="15" name="Shape 12"/>
-          <p:cNvSpPr/>
-          <p:nvPr/>
-        </p:nvSpPr>
-        <p:spPr>
-          <a:xfrm>
-            <a:off x="6446520" y="4078224"/>
-            <a:ext cx="5193792" cy="960120"/>
+          <p:cNvPr id="19" name="Shape 16"/>
+          <p:cNvSpPr/>
+          <p:nvPr/>
+        </p:nvSpPr>
+        <p:spPr>
+          <a:xfrm>
+            <a:off x="548640" y="5138928"/>
+            <a:ext cx="11091672" cy="1188720"/>
           </a:xfrm>
           <a:prstGeom prst="rect">
             <a:avLst/>
@@ -7754,127 +8362,13 @@
             </a:outerShdw>
           </a:effectLst>
         </p:spPr>
-      </p:sp>
-      <p:sp>
-        <p:nvSpPr>
-          <p:cNvPr id="16" name="Shape 13"/>
-          <p:cNvSpPr/>
-          <p:nvPr/>
-        </p:nvSpPr>
-        <p:spPr>
-          <a:xfrm>
-            <a:off x="6446520" y="4078224"/>
-            <a:ext cx="82296" cy="960120"/>
-          </a:xfrm>
-          <a:prstGeom prst="rect">
-            <a:avLst/>
-          </a:prstGeom>
-          <a:solidFill>
-            <a:srgbClr val="E8A12C"/>
-          </a:solidFill>
-        </p:spPr>
-      </p:sp>
-      <p:sp>
-        <p:nvSpPr>
-          <p:cNvPr id="17" name="Text 14"/>
-          <p:cNvSpPr/>
-          <p:nvPr/>
-        </p:nvSpPr>
-        <p:spPr>
-          <a:xfrm>
-            <a:off x="6675120" y="4187952"/>
-            <a:ext cx="4736592" cy="411480"/>
-          </a:xfrm>
-          <a:prstGeom prst="rect">
-            <a:avLst/>
-          </a:prstGeom>
-          <a:noFill/>
-        </p:spPr>
-        <p:txBody>
-          <a:bodyPr wrap="square" lIns="0" tIns="0" rIns="0" bIns="0" rtlCol="0" anchor="ctr"/>
-          <a:lstStyle/>
-          <a:p>
-            <a:pPr marL="0" indent="0">
-              <a:buNone/>
-            </a:pPr>
-            <a:r>
-              <a:rPr lang="en-US" sz="2200" b="1" dirty="0">
-                <a:solidFill>
-                  <a:srgbClr val="13294B"/>
-                </a:solidFill>
-                <a:latin typeface="Georgia" panose="02040502050405090303" pitchFamily="34" charset="0"/>
-                <a:ea typeface="Georgia" panose="02040502050405090303" pitchFamily="34" charset="-122"/>
-                <a:cs typeface="Georgia" panose="02040502050405090303" pitchFamily="34" charset="-120"/>
-              </a:rPr>
-              <a:t>p = 0.406</a:t>
-            </a:r>
-            <a:endParaRPr lang="en-US" sz="2200" dirty="0"/>
-          </a:p>
-        </p:txBody>
-      </p:sp>
-      <p:sp>
-        <p:nvSpPr>
-          <p:cNvPr id="18" name="Text 15"/>
-          <p:cNvSpPr/>
-          <p:nvPr/>
-        </p:nvSpPr>
-        <p:spPr>
-          <a:xfrm>
-            <a:off x="6675120" y="4626864"/>
-            <a:ext cx="4736592" cy="365760"/>
-          </a:xfrm>
-          <a:prstGeom prst="rect">
-            <a:avLst/>
-          </a:prstGeom>
-          <a:noFill/>
-        </p:spPr>
-        <p:txBody>
-          <a:bodyPr wrap="square" lIns="0" tIns="0" rIns="0" bIns="0" rtlCol="0" anchor="ctr"/>
-          <a:lstStyle/>
-          <a:p>
-            <a:pPr marL="0" indent="0">
-              <a:buNone/>
-            </a:pPr>
-            <a:r>
-              <a:rPr lang="en-US" sz="1150" dirty="0">
-                <a:solidFill>
-                  <a:srgbClr val="33425C"/>
-                </a:solidFill>
-                <a:latin typeface="Calibri" pitchFamily="34" charset="0"/>
-                <a:ea typeface="Calibri" pitchFamily="34" charset="-122"/>
-                <a:cs typeface="Calibri" pitchFamily="34" charset="-120"/>
-              </a:rPr>
-              <a:t>bootstrap; 90% CI [3.1%, 14.5%] — location robust, not precise</a:t>
-            </a:r>
-            <a:endParaRPr lang="en-US" sz="1150" dirty="0"/>
-          </a:p>
-        </p:txBody>
-      </p:sp>
-      <p:sp>
-        <p:nvSpPr>
-          <p:cNvPr id="19" name="Shape 16"/>
-          <p:cNvSpPr/>
-          <p:nvPr/>
-        </p:nvSpPr>
-        <p:spPr>
-          <a:xfrm>
-            <a:off x="548640" y="5138928"/>
-            <a:ext cx="11091672" cy="1188720"/>
-          </a:xfrm>
-          <a:prstGeom prst="rect">
-            <a:avLst/>
-          </a:prstGeom>
-          <a:solidFill>
-            <a:srgbClr val="F4F6FA"/>
-          </a:solidFill>
-          <a:effectLst>
-            <a:outerShdw blurRad="88900" dist="38100" dir="8100000" algn="bl" rotWithShape="0">
-              <a:srgbClr val="000000">
-                <a:alpha val="13000"/>
-              </a:srgbClr>
-            </a:outerShdw>
-          </a:effectLst>
-        </p:spPr>
+        <p:txBody>
+          <a:bodyPr/>
+          <a:lstStyle/>
+          <a:p>
+            <a:endParaRPr lang="ko-KR" altLang="en-US"/>
+          </a:p>
+        </p:txBody>
       </p:sp>
       <p:sp>
         <p:nvSpPr>
@@ -7894,6 +8388,13 @@
             <a:srgbClr val="C1121F"/>
           </a:solidFill>
         </p:spPr>
+        <p:txBody>
+          <a:bodyPr/>
+          <a:lstStyle/>
+          <a:p>
+            <a:endParaRPr lang="ko-KR" altLang="en-US"/>
+          </a:p>
+        </p:txBody>
       </p:sp>
       <p:sp>
         <p:nvSpPr>
@@ -7903,7 +8404,7 @@
         </p:nvSpPr>
         <p:spPr>
           <a:xfrm>
-            <a:off x="822960" y="5248656"/>
+            <a:off x="822960" y="5376672"/>
             <a:ext cx="10543032" cy="960120"/>
           </a:xfrm>
           <a:prstGeom prst="rect">
@@ -7922,7 +8423,7 @@
               <a:buNone/>
             </a:pPr>
             <a:r>
-              <a:rPr lang="en-US" sz="1250" b="1" dirty="0">
+              <a:rPr lang="en-US" sz="1600" b="1" dirty="0">
                 <a:solidFill>
                   <a:srgbClr val="1B998B"/>
                 </a:solidFill>
@@ -7933,7 +8434,7 @@
               <a:t>Converges:  </a:t>
             </a:r>
             <a:r>
-              <a:rPr lang="en-US" sz="1250" dirty="0">
+              <a:rPr lang="en-US" sz="1600" dirty="0">
                 <a:solidFill>
                   <a:srgbClr val="33425C"/>
                 </a:solidFill>
@@ -7944,7 +8445,7 @@
               <a:t>the threshold LOCATION (≈13%) — stable across both methods, all TRIM values, every model vintage.   </a:t>
             </a:r>
             <a:br>
-              <a:rPr lang="en-US" sz="1250" dirty="0">
+              <a:rPr lang="en-US" sz="1600" dirty="0">
                 <a:solidFill>
                   <a:srgbClr val="33425C"/>
                 </a:solidFill>
@@ -7954,7 +8455,7 @@
               </a:rPr>
             </a:br>
             <a:r>
-              <a:rPr lang="en-US" sz="1250" b="1" dirty="0">
+              <a:rPr lang="en-US" sz="1600" b="1" dirty="0">
                 <a:solidFill>
                   <a:srgbClr val="C1121F"/>
                 </a:solidFill>
@@ -7965,7 +8466,7 @@
               <a:t>Does NOT converge:  </a:t>
             </a:r>
             <a:r>
-              <a:rPr lang="en-US" sz="1250" dirty="0">
+              <a:rPr lang="en-US" sz="1600" dirty="0">
                 <a:solidFill>
                   <a:srgbClr val="33425C"/>
                 </a:solidFill>
@@ -7973,10 +8474,10 @@
                 <a:ea typeface="Calibri" pitchFamily="34" charset="-122"/>
                 <a:cs typeface="Calibri" pitchFamily="34" charset="-120"/>
               </a:rPr>
-              <a:t>the regime-beta magnitudes — Hansen (hard split) and LSTAR (smooth model) estimate different objects, so do not show them as mutual corroboration.   </a:t>
+              <a:t>the regime-beta magnitudes — Hansen (hard split) and LSTAR (smooth model) estimate different objects.</a:t>
             </a:r>
             <a:br>
-              <a:rPr lang="en-US" sz="1250" dirty="0">
+              <a:rPr lang="en-US" sz="1600" dirty="0">
                 <a:solidFill>
                   <a:srgbClr val="33425C"/>
                 </a:solidFill>
@@ -7985,29 +8486,7 @@
                 <a:cs typeface="Calibri" pitchFamily="34" charset="-120"/>
               </a:rPr>
             </a:br>
-            <a:r>
-              <a:rPr lang="en-US" sz="1250" b="1" dirty="0">
-                <a:solidFill>
-                  <a:srgbClr val="13294B"/>
-                </a:solidFill>
-                <a:latin typeface="Calibri" pitchFamily="34" charset="0"/>
-                <a:ea typeface="Calibri" pitchFamily="34" charset="-122"/>
-                <a:cs typeface="Calibri" pitchFamily="34" charset="-120"/>
-              </a:rPr>
-              <a:t>Claim only:  </a:t>
-            </a:r>
-            <a:r>
-              <a:rPr lang="en-US" sz="1250" i="1" dirty="0">
-                <a:solidFill>
-                  <a:srgbClr val="33425C"/>
-                </a:solidFill>
-                <a:latin typeface="Calibri" pitchFamily="34" charset="0"/>
-                <a:ea typeface="Calibri" pitchFamily="34" charset="-122"/>
-                <a:cs typeface="Calibri" pitchFamily="34" charset="-120"/>
-              </a:rPr>
-              <a:t>“two methods locate the same fragility region near 13%.”</a:t>
-            </a:r>
-            <a:endParaRPr lang="en-US" sz="1250" dirty="0"/>
+            <a:endParaRPr lang="en-US" sz="1600" dirty="0"/>
           </a:p>
         </p:txBody>
       </p:sp>
@@ -8132,9 +8611,6 @@
           <a:bodyPr wrap="square" lIns="0" tIns="0" rIns="0" bIns="0" rtlCol="0" anchor="ctr"/>
           <a:lstStyle/>
           <a:p>
-            <a:pPr marL="0" indent="0">
-              <a:buNone/>
-            </a:pPr>
             <a:r>
               <a:rPr lang="en-US" sz="1200" b="1" kern="0" spc="200" dirty="0">
                 <a:solidFill>
@@ -8144,9 +8620,20 @@
                 <a:ea typeface="Calibri" pitchFamily="34" charset="-122"/>
                 <a:cs typeface="Calibri" pitchFamily="34" charset="-120"/>
               </a:rPr>
-              <a:t>ROBUSTNESS</a:t>
-            </a:r>
-            <a:endParaRPr lang="en-US" sz="1200" dirty="0"/>
+              <a:t>ROBUSTNESS - </a:t>
+            </a:r>
+            <a:r>
+              <a:rPr lang="en-US" altLang="ko-KR" sz="1200" b="1" kern="0" spc="200" dirty="0">
+                <a:solidFill>
+                  <a:srgbClr val="1B998B"/>
+                </a:solidFill>
+                <a:latin typeface="Calibri" pitchFamily="34" charset="0"/>
+                <a:ea typeface="Calibri" pitchFamily="34" charset="-122"/>
+                <a:cs typeface="Calibri" pitchFamily="34" charset="-120"/>
+              </a:rPr>
+              <a:t>THRESHOLD RESULT: LSTAR</a:t>
+            </a:r>
+            <a:endParaRPr lang="en-US" altLang="ko-KR" sz="1200" dirty="0"/>
           </a:p>
         </p:txBody>
       </p:sp>
@@ -8235,15 +8722,15 @@
           <p:nvPr/>
         </p:nvPicPr>
         <p:blipFill>
-          <a:blip r:embed="rId1"/>
+          <a:blip r:embed="rId3"/>
           <a:stretch>
             <a:fillRect/>
           </a:stretch>
         </p:blipFill>
         <p:spPr>
           <a:xfrm>
-            <a:off x="1705356" y="1828800"/>
-            <a:ext cx="8778240" cy="3284040"/>
+            <a:off x="3068879" y="1874521"/>
+            <a:ext cx="8495105" cy="3178116"/>
           </a:xfrm>
           <a:prstGeom prst="rect">
             <a:avLst/>
@@ -8275,6 +8762,13 @@
             </a:outerShdw>
           </a:effectLst>
         </p:spPr>
+        <p:txBody>
+          <a:bodyPr/>
+          <a:lstStyle/>
+          <a:p>
+            <a:endParaRPr lang="ko-KR" altLang="en-US"/>
+          </a:p>
+        </p:txBody>
       </p:sp>
       <p:sp>
         <p:nvSpPr>
@@ -8294,6 +8788,13 @@
             <a:srgbClr val="E8A12C"/>
           </a:solidFill>
         </p:spPr>
+        <p:txBody>
+          <a:bodyPr/>
+          <a:lstStyle/>
+          <a:p>
+            <a:endParaRPr lang="ko-KR" altLang="en-US"/>
+          </a:p>
+        </p:txBody>
       </p:sp>
       <p:sp>
         <p:nvSpPr>
@@ -8341,8 +8842,30 @@
                 <a:ea typeface="Calibri" pitchFamily="34" charset="-122"/>
                 <a:cs typeface="Calibri" pitchFamily="34" charset="-120"/>
               </a:rPr>
-              <a:t>the transition midpoint c* = 14.9% lands inside the Hansen bootstrap CI — two methods, same 13–15% region.   </a:t>
-            </a:r>
+              <a:t>the transition midpoint c* = 14.9% lands just above the Hansen bootstrap CI — two methods, </a:t>
+            </a:r>
+            <a:r>
+              <a:rPr lang="en-US" sz="1200" dirty="0">
+                <a:solidFill>
+                  <a:srgbClr val="33425C"/>
+                </a:solidFill>
+                <a:highlight>
+                  <a:srgbClr val="FFFF00"/>
+                </a:highlight>
+                <a:latin typeface="Calibri" pitchFamily="34" charset="0"/>
+                <a:ea typeface="Calibri" pitchFamily="34" charset="-122"/>
+                <a:cs typeface="Calibri" pitchFamily="34" charset="-120"/>
+              </a:rPr>
+              <a:t>same 13–15% region.   </a:t>
+            </a:r>
+          </a:p>
+          <a:p>
+            <a:pPr marL="0" indent="0">
+              <a:lnSpc>
+                <a:spcPct val="106000"/>
+              </a:lnSpc>
+              <a:buNone/>
+            </a:pPr>
             <a:r>
               <a:rPr lang="en-US" sz="1200" b="1" dirty="0">
                 <a:solidFill>
@@ -8363,7 +8886,50 @@
                 <a:ea typeface="Calibri" pitchFamily="34" charset="-122"/>
                 <a:cs typeface="Calibri" pitchFamily="34" charset="-120"/>
               </a:rPr>
-              <a:t>the per-regime betas (−1.81 / −12.59) come from a different functional form than Hansen's — treat them as the LSTAR fit, not as beta-level confirmation. The robust cross-model claim is the threshold LOCATION.</a:t>
+              <a:t>the per-regime betas (−1.81 / −12.59) come from a different functional form than Hansen's — treat them as the LSTAR fit, not as beta-level confirmation. The robust cross-model claim is the threshold </a:t>
+            </a:r>
+            <a:r>
+              <a:rPr lang="en-US" sz="1200" dirty="0">
+                <a:solidFill>
+                  <a:srgbClr val="33425C"/>
+                </a:solidFill>
+                <a:highlight>
+                  <a:srgbClr val="FFFF00"/>
+                </a:highlight>
+                <a:latin typeface="Calibri" pitchFamily="34" charset="0"/>
+                <a:ea typeface="Calibri" pitchFamily="34" charset="-122"/>
+                <a:cs typeface="Calibri" pitchFamily="34" charset="-120"/>
+              </a:rPr>
+              <a:t>LOCATION.</a:t>
+            </a:r>
+          </a:p>
+          <a:p>
+            <a:pPr>
+              <a:lnSpc>
+                <a:spcPct val="106000"/>
+              </a:lnSpc>
+            </a:pPr>
+            <a:r>
+              <a:rPr lang="en-US" altLang="ko-KR" sz="1200" b="1" dirty="0">
+                <a:solidFill>
+                  <a:srgbClr val="13294B"/>
+                </a:solidFill>
+                <a:latin typeface="Calibri" pitchFamily="34" charset="0"/>
+                <a:ea typeface="Calibri" pitchFamily="34" charset="-122"/>
+                <a:cs typeface="Calibri" pitchFamily="34" charset="-120"/>
+              </a:rPr>
+              <a:t>Claim:  </a:t>
+            </a:r>
+            <a:r>
+              <a:rPr lang="en-US" altLang="ko-KR" sz="1200" i="1" dirty="0">
+                <a:solidFill>
+                  <a:srgbClr val="33425C"/>
+                </a:solidFill>
+                <a:latin typeface="Calibri" pitchFamily="34" charset="0"/>
+                <a:ea typeface="Calibri" pitchFamily="34" charset="-122"/>
+                <a:cs typeface="Calibri" pitchFamily="34" charset="-120"/>
+              </a:rPr>
+              <a:t>“two methods locate the same fragility region near 13%.”</a:t>
             </a:r>
             <a:endParaRPr lang="en-US" sz="1200" dirty="0"/>
           </a:p>
@@ -8442,6 +9008,321 @@
               <a:t>15</a:t>
             </a:r>
             <a:endParaRPr lang="en-US" sz="1100" dirty="0"/>
+          </a:p>
+        </p:txBody>
+      </p:sp>
+      <p:sp>
+        <p:nvSpPr>
+          <p:cNvPr id="11" name="Shape 8">
+            <a:extLst>
+              <a:ext uri="{FF2B5EF4-FFF2-40B4-BE49-F238E27FC236}">
+                <a16:creationId xmlns:a16="http://schemas.microsoft.com/office/drawing/2014/main" id="{00F3DB8D-E911-06FB-2D49-D384F9C74714}"/>
+              </a:ext>
+            </a:extLst>
+          </p:cNvPr>
+          <p:cNvSpPr/>
+          <p:nvPr/>
+        </p:nvSpPr>
+        <p:spPr>
+          <a:xfrm>
+            <a:off x="204004" y="2480599"/>
+            <a:ext cx="2778339" cy="960120"/>
+          </a:xfrm>
+          <a:prstGeom prst="rect">
+            <a:avLst/>
+          </a:prstGeom>
+          <a:solidFill>
+            <a:srgbClr val="F4F6FA"/>
+          </a:solidFill>
+          <a:effectLst>
+            <a:outerShdw blurRad="88900" dist="38100" dir="8100000" algn="bl" rotWithShape="0">
+              <a:srgbClr val="000000">
+                <a:alpha val="13000"/>
+              </a:srgbClr>
+            </a:outerShdw>
+          </a:effectLst>
+        </p:spPr>
+        <p:txBody>
+          <a:bodyPr/>
+          <a:lstStyle/>
+          <a:p>
+            <a:endParaRPr lang="ko-KR" altLang="en-US"/>
+          </a:p>
+        </p:txBody>
+      </p:sp>
+      <p:sp>
+        <p:nvSpPr>
+          <p:cNvPr id="12" name="Shape 9">
+            <a:extLst>
+              <a:ext uri="{FF2B5EF4-FFF2-40B4-BE49-F238E27FC236}">
+                <a16:creationId xmlns:a16="http://schemas.microsoft.com/office/drawing/2014/main" id="{5A79590A-AF30-3C1E-151A-61507E740F57}"/>
+              </a:ext>
+            </a:extLst>
+          </p:cNvPr>
+          <p:cNvSpPr/>
+          <p:nvPr/>
+        </p:nvSpPr>
+        <p:spPr>
+          <a:xfrm>
+            <a:off x="142422" y="2480599"/>
+            <a:ext cx="82296" cy="960120"/>
+          </a:xfrm>
+          <a:prstGeom prst="rect">
+            <a:avLst/>
+          </a:prstGeom>
+          <a:solidFill>
+            <a:srgbClr val="13294B"/>
+          </a:solidFill>
+        </p:spPr>
+        <p:txBody>
+          <a:bodyPr/>
+          <a:lstStyle/>
+          <a:p>
+            <a:endParaRPr lang="ko-KR" altLang="en-US"/>
+          </a:p>
+        </p:txBody>
+      </p:sp>
+      <p:sp>
+        <p:nvSpPr>
+          <p:cNvPr id="13" name="Text 10">
+            <a:extLst>
+              <a:ext uri="{FF2B5EF4-FFF2-40B4-BE49-F238E27FC236}">
+                <a16:creationId xmlns:a16="http://schemas.microsoft.com/office/drawing/2014/main" id="{9351EC8B-D08D-4EC3-684E-CBA763BCDADA}"/>
+              </a:ext>
+            </a:extLst>
+          </p:cNvPr>
+          <p:cNvSpPr/>
+          <p:nvPr/>
+        </p:nvSpPr>
+        <p:spPr>
+          <a:xfrm>
+            <a:off x="336647" y="2572039"/>
+            <a:ext cx="2533767" cy="411480"/>
+          </a:xfrm>
+          <a:prstGeom prst="rect">
+            <a:avLst/>
+          </a:prstGeom>
+          <a:noFill/>
+        </p:spPr>
+        <p:txBody>
+          <a:bodyPr wrap="square" lIns="0" tIns="0" rIns="0" bIns="0" rtlCol="0" anchor="ctr"/>
+          <a:lstStyle/>
+          <a:p>
+            <a:pPr marL="0" indent="0">
+              <a:buNone/>
+            </a:pPr>
+            <a:r>
+              <a:rPr lang="en-US" sz="2200" b="1" dirty="0">
+                <a:solidFill>
+                  <a:srgbClr val="13294B"/>
+                </a:solidFill>
+                <a:latin typeface="Georgia" panose="02040502050405090303" pitchFamily="34" charset="0"/>
+                <a:ea typeface="Georgia" panose="02040502050405090303" pitchFamily="34" charset="-122"/>
+                <a:cs typeface="Georgia" panose="02040502050405090303" pitchFamily="34" charset="-120"/>
+              </a:rPr>
+              <a:t>c* = 14.9%</a:t>
+            </a:r>
+            <a:endParaRPr lang="en-US" sz="2200" dirty="0"/>
+          </a:p>
+        </p:txBody>
+      </p:sp>
+      <p:sp>
+        <p:nvSpPr>
+          <p:cNvPr id="14" name="Text 11">
+            <a:extLst>
+              <a:ext uri="{FF2B5EF4-FFF2-40B4-BE49-F238E27FC236}">
+                <a16:creationId xmlns:a16="http://schemas.microsoft.com/office/drawing/2014/main" id="{FD166B33-C2EA-594C-6C47-100E76262320}"/>
+              </a:ext>
+            </a:extLst>
+          </p:cNvPr>
+          <p:cNvSpPr/>
+          <p:nvPr/>
+        </p:nvSpPr>
+        <p:spPr>
+          <a:xfrm>
+            <a:off x="286300" y="3029238"/>
+            <a:ext cx="2533767" cy="365760"/>
+          </a:xfrm>
+          <a:prstGeom prst="rect">
+            <a:avLst/>
+          </a:prstGeom>
+          <a:noFill/>
+        </p:spPr>
+        <p:txBody>
+          <a:bodyPr wrap="square" lIns="0" tIns="0" rIns="0" bIns="0" rtlCol="0" anchor="ctr"/>
+          <a:lstStyle/>
+          <a:p>
+            <a:pPr marL="0" indent="0">
+              <a:buNone/>
+            </a:pPr>
+            <a:r>
+              <a:rPr lang="en-US" sz="1150" dirty="0">
+                <a:solidFill>
+                  <a:srgbClr val="33425C"/>
+                </a:solidFill>
+                <a:latin typeface="Calibri" pitchFamily="34" charset="0"/>
+                <a:ea typeface="Calibri" pitchFamily="34" charset="-122"/>
+                <a:cs typeface="Calibri" pitchFamily="34" charset="-120"/>
+              </a:rPr>
+              <a:t>LSTAR smooth transition — locates a near region</a:t>
+            </a:r>
+            <a:endParaRPr lang="en-US" sz="1150" dirty="0"/>
+          </a:p>
+        </p:txBody>
+      </p:sp>
+      <p:sp>
+        <p:nvSpPr>
+          <p:cNvPr id="15" name="Shape 12">
+            <a:extLst>
+              <a:ext uri="{FF2B5EF4-FFF2-40B4-BE49-F238E27FC236}">
+                <a16:creationId xmlns:a16="http://schemas.microsoft.com/office/drawing/2014/main" id="{C847B695-BD6F-D6B5-F4B5-979D8BD7AE0A}"/>
+              </a:ext>
+            </a:extLst>
+          </p:cNvPr>
+          <p:cNvSpPr/>
+          <p:nvPr/>
+        </p:nvSpPr>
+        <p:spPr>
+          <a:xfrm>
+            <a:off x="142422" y="3554441"/>
+            <a:ext cx="2839921" cy="960120"/>
+          </a:xfrm>
+          <a:prstGeom prst="rect">
+            <a:avLst/>
+          </a:prstGeom>
+          <a:solidFill>
+            <a:srgbClr val="F4F6FA"/>
+          </a:solidFill>
+          <a:effectLst>
+            <a:outerShdw blurRad="88900" dist="38100" dir="8100000" algn="bl" rotWithShape="0">
+              <a:srgbClr val="000000">
+                <a:alpha val="13000"/>
+              </a:srgbClr>
+            </a:outerShdw>
+          </a:effectLst>
+        </p:spPr>
+        <p:txBody>
+          <a:bodyPr/>
+          <a:lstStyle/>
+          <a:p>
+            <a:endParaRPr lang="ko-KR" altLang="en-US"/>
+          </a:p>
+        </p:txBody>
+      </p:sp>
+      <p:sp>
+        <p:nvSpPr>
+          <p:cNvPr id="16" name="Shape 13">
+            <a:extLst>
+              <a:ext uri="{FF2B5EF4-FFF2-40B4-BE49-F238E27FC236}">
+                <a16:creationId xmlns:a16="http://schemas.microsoft.com/office/drawing/2014/main" id="{5AEB9283-4706-9AFD-26BC-A9866FC9F6CB}"/>
+              </a:ext>
+            </a:extLst>
+          </p:cNvPr>
+          <p:cNvSpPr/>
+          <p:nvPr/>
+        </p:nvSpPr>
+        <p:spPr>
+          <a:xfrm>
+            <a:off x="142422" y="3554441"/>
+            <a:ext cx="45719" cy="960120"/>
+          </a:xfrm>
+          <a:prstGeom prst="rect">
+            <a:avLst/>
+          </a:prstGeom>
+          <a:solidFill>
+            <a:srgbClr val="E8A12C"/>
+          </a:solidFill>
+        </p:spPr>
+        <p:txBody>
+          <a:bodyPr/>
+          <a:lstStyle/>
+          <a:p>
+            <a:endParaRPr lang="ko-KR" altLang="en-US"/>
+          </a:p>
+        </p:txBody>
+      </p:sp>
+      <p:sp>
+        <p:nvSpPr>
+          <p:cNvPr id="17" name="Text 14">
+            <a:extLst>
+              <a:ext uri="{FF2B5EF4-FFF2-40B4-BE49-F238E27FC236}">
+                <a16:creationId xmlns:a16="http://schemas.microsoft.com/office/drawing/2014/main" id="{4F6C2E0C-59FC-908A-D251-C3ED56F8A4C7}"/>
+              </a:ext>
+            </a:extLst>
+          </p:cNvPr>
+          <p:cNvSpPr/>
+          <p:nvPr/>
+        </p:nvSpPr>
+        <p:spPr>
+          <a:xfrm>
+            <a:off x="371022" y="3664169"/>
+            <a:ext cx="2589928" cy="411480"/>
+          </a:xfrm>
+          <a:prstGeom prst="rect">
+            <a:avLst/>
+          </a:prstGeom>
+          <a:noFill/>
+        </p:spPr>
+        <p:txBody>
+          <a:bodyPr wrap="square" lIns="0" tIns="0" rIns="0" bIns="0" rtlCol="0" anchor="ctr"/>
+          <a:lstStyle/>
+          <a:p>
+            <a:pPr marL="0" indent="0">
+              <a:buNone/>
+            </a:pPr>
+            <a:r>
+              <a:rPr lang="en-US" sz="2200" b="1" dirty="0">
+                <a:solidFill>
+                  <a:srgbClr val="13294B"/>
+                </a:solidFill>
+                <a:latin typeface="Georgia" panose="02040502050405090303" pitchFamily="34" charset="0"/>
+                <a:ea typeface="Georgia" panose="02040502050405090303" pitchFamily="34" charset="-122"/>
+                <a:cs typeface="Georgia" panose="02040502050405090303" pitchFamily="34" charset="-120"/>
+              </a:rPr>
+              <a:t>p = 0.063</a:t>
+            </a:r>
+            <a:endParaRPr lang="en-US" sz="2200" dirty="0"/>
+          </a:p>
+        </p:txBody>
+      </p:sp>
+      <p:sp>
+        <p:nvSpPr>
+          <p:cNvPr id="18" name="Text 15">
+            <a:extLst>
+              <a:ext uri="{FF2B5EF4-FFF2-40B4-BE49-F238E27FC236}">
+                <a16:creationId xmlns:a16="http://schemas.microsoft.com/office/drawing/2014/main" id="{0B71220E-46B3-BB25-80CC-E00CE1B53F4F}"/>
+              </a:ext>
+            </a:extLst>
+          </p:cNvPr>
+          <p:cNvSpPr/>
+          <p:nvPr/>
+        </p:nvSpPr>
+        <p:spPr>
+          <a:xfrm>
+            <a:off x="371022" y="4103081"/>
+            <a:ext cx="2589928" cy="365760"/>
+          </a:xfrm>
+          <a:prstGeom prst="rect">
+            <a:avLst/>
+          </a:prstGeom>
+          <a:noFill/>
+        </p:spPr>
+        <p:txBody>
+          <a:bodyPr wrap="square" lIns="0" tIns="0" rIns="0" bIns="0" rtlCol="0" anchor="ctr"/>
+          <a:lstStyle/>
+          <a:p>
+            <a:r>
+              <a:rPr lang="en-US" sz="1150" dirty="0">
+                <a:solidFill>
+                  <a:srgbClr val="33425C"/>
+                </a:solidFill>
+                <a:latin typeface="Calibri" pitchFamily="34" charset="0"/>
+                <a:ea typeface="Calibri" pitchFamily="34" charset="-122"/>
+                <a:cs typeface="Calibri" pitchFamily="34" charset="-120"/>
+              </a:rPr>
+              <a:t>bootstrap; 90% CI [3.24%, 14.52%] — location robust, not precise</a:t>
+            </a:r>
+            <a:endParaRPr lang="en-US" sz="1150" dirty="0"/>
           </a:p>
         </p:txBody>
       </p:sp>
@@ -8602,19 +9483,55 @@
         </p:nvGraphicFramePr>
         <p:xfrm>
           <a:off x="548640" y="2057400"/>
-          <a:ext cx="11091672" cy="2377440"/>
+          <a:ext cx="11091670" cy="2377440"/>
         </p:xfrm>
         <a:graphic>
           <a:graphicData uri="http://schemas.openxmlformats.org/drawingml/2006/table">
             <a:tbl>
               <a:tblPr/>
               <a:tblGrid>
-                <a:gridCol w="2011680"/>
-                <a:gridCol w="1815998"/>
-                <a:gridCol w="1815998"/>
-                <a:gridCol w="1815998"/>
-                <a:gridCol w="1815998"/>
-                <a:gridCol w="1815998"/>
+                <a:gridCol w="2011680">
+                  <a:extLst>
+                    <a:ext uri="{9D8B030D-6E8A-4147-A177-3AD203B41FA5}">
+                      <a16:colId xmlns:a16="http://schemas.microsoft.com/office/drawing/2014/main" val="20000"/>
+                    </a:ext>
+                  </a:extLst>
+                </a:gridCol>
+                <a:gridCol w="1815998">
+                  <a:extLst>
+                    <a:ext uri="{9D8B030D-6E8A-4147-A177-3AD203B41FA5}">
+                      <a16:colId xmlns:a16="http://schemas.microsoft.com/office/drawing/2014/main" val="20001"/>
+                    </a:ext>
+                  </a:extLst>
+                </a:gridCol>
+                <a:gridCol w="1815998">
+                  <a:extLst>
+                    <a:ext uri="{9D8B030D-6E8A-4147-A177-3AD203B41FA5}">
+                      <a16:colId xmlns:a16="http://schemas.microsoft.com/office/drawing/2014/main" val="20002"/>
+                    </a:ext>
+                  </a:extLst>
+                </a:gridCol>
+                <a:gridCol w="1815998">
+                  <a:extLst>
+                    <a:ext uri="{9D8B030D-6E8A-4147-A177-3AD203B41FA5}">
+                      <a16:colId xmlns:a16="http://schemas.microsoft.com/office/drawing/2014/main" val="20003"/>
+                    </a:ext>
+                  </a:extLst>
+                </a:gridCol>
+                <a:gridCol w="1815998">
+                  <a:extLst>
+                    <a:ext uri="{9D8B030D-6E8A-4147-A177-3AD203B41FA5}">
+                      <a16:colId xmlns:a16="http://schemas.microsoft.com/office/drawing/2014/main" val="20004"/>
+                    </a:ext>
+                  </a:extLst>
+                </a:gridCol>
+                <a:gridCol w="1815998">
+                  <a:extLst>
+                    <a:ext uri="{9D8B030D-6E8A-4147-A177-3AD203B41FA5}">
+                      <a16:colId xmlns:a16="http://schemas.microsoft.com/office/drawing/2014/main" val="20005"/>
+                    </a:ext>
+                  </a:extLst>
+                </a:gridCol>
               </a:tblGrid>
               <a:tr h="475488">
                 <a:tc>
@@ -9025,6 +9942,11 @@
                     </a:solidFill>
                   </a:tcPr>
                 </a:tc>
+                <a:extLst>
+                  <a:ext uri="{0D108BD9-81ED-4DB2-BD59-A6C34878D82A}">
+                    <a16:rowId xmlns:a16="http://schemas.microsoft.com/office/drawing/2014/main" val="10000"/>
+                  </a:ext>
+                </a:extLst>
               </a:tr>
               <a:tr h="475488">
                 <a:tc>
@@ -9435,6 +10357,11 @@
                     </a:solidFill>
                   </a:tcPr>
                 </a:tc>
+                <a:extLst>
+                  <a:ext uri="{0D108BD9-81ED-4DB2-BD59-A6C34878D82A}">
+                    <a16:rowId xmlns:a16="http://schemas.microsoft.com/office/drawing/2014/main" val="10001"/>
+                  </a:ext>
+                </a:extLst>
               </a:tr>
               <a:tr h="475488">
                 <a:tc>
@@ -9845,6 +10772,11 @@
                     </a:solidFill>
                   </a:tcPr>
                 </a:tc>
+                <a:extLst>
+                  <a:ext uri="{0D108BD9-81ED-4DB2-BD59-A6C34878D82A}">
+                    <a16:rowId xmlns:a16="http://schemas.microsoft.com/office/drawing/2014/main" val="10002"/>
+                  </a:ext>
+                </a:extLst>
               </a:tr>
               <a:tr h="475488">
                 <a:tc>
@@ -10255,6 +11187,11 @@
                     </a:solidFill>
                   </a:tcPr>
                 </a:tc>
+                <a:extLst>
+                  <a:ext uri="{0D108BD9-81ED-4DB2-BD59-A6C34878D82A}">
+                    <a16:rowId xmlns:a16="http://schemas.microsoft.com/office/drawing/2014/main" val="10003"/>
+                  </a:ext>
+                </a:extLst>
               </a:tr>
               <a:tr h="475488">
                 <a:tc>
@@ -10665,6 +11602,11 @@
                     </a:solidFill>
                   </a:tcPr>
                 </a:tc>
+                <a:extLst>
+                  <a:ext uri="{0D108BD9-81ED-4DB2-BD59-A6C34878D82A}">
+                    <a16:rowId xmlns:a16="http://schemas.microsoft.com/office/drawing/2014/main" val="10004"/>
+                  </a:ext>
+                </a:extLst>
               </a:tr>
             </a:tbl>
           </a:graphicData>
@@ -10695,6 +11637,13 @@
             </a:outerShdw>
           </a:effectLst>
         </p:spPr>
+        <p:txBody>
+          <a:bodyPr/>
+          <a:lstStyle/>
+          <a:p>
+            <a:endParaRPr lang="ko-KR" altLang="en-US"/>
+          </a:p>
+        </p:txBody>
       </p:sp>
       <p:sp>
         <p:nvSpPr>
@@ -10714,6 +11663,13 @@
             <a:srgbClr val="1B998B"/>
           </a:solidFill>
         </p:spPr>
+        <p:txBody>
+          <a:bodyPr/>
+          <a:lstStyle/>
+          <a:p>
+            <a:endParaRPr lang="ko-KR" altLang="en-US"/>
+          </a:p>
+        </p:txBody>
       </p:sp>
       <p:sp>
         <p:nvSpPr>
@@ -10999,7 +11955,7 @@
           <p:nvPr/>
         </p:nvPicPr>
         <p:blipFill>
-          <a:blip r:embed="rId1"/>
+          <a:blip r:embed="rId3"/>
           <a:stretch>
             <a:fillRect/>
           </a:stretch>
@@ -11023,7 +11979,7 @@
           <p:nvPr/>
         </p:nvPicPr>
         <p:blipFill>
-          <a:blip r:embed="rId2"/>
+          <a:blip r:embed="rId4"/>
           <a:stretch>
             <a:fillRect/>
           </a:stretch>
@@ -11063,6 +12019,13 @@
             </a:outerShdw>
           </a:effectLst>
         </p:spPr>
+        <p:txBody>
+          <a:bodyPr/>
+          <a:lstStyle/>
+          <a:p>
+            <a:endParaRPr lang="ko-KR" altLang="en-US"/>
+          </a:p>
+        </p:txBody>
       </p:sp>
       <p:sp>
         <p:nvSpPr>
@@ -11082,6 +12045,13 @@
             <a:srgbClr val="C1121F"/>
           </a:solidFill>
         </p:spPr>
+        <p:txBody>
+          <a:bodyPr/>
+          <a:lstStyle/>
+          <a:p>
+            <a:endParaRPr lang="ko-KR" altLang="en-US"/>
+          </a:p>
+        </p:txBody>
       </p:sp>
       <p:sp>
         <p:nvSpPr>
@@ -11156,18 +12126,7 @@
                 <a:ea typeface="Calibri" pitchFamily="34" charset="-122"/>
                 <a:cs typeface="Calibri" pitchFamily="34" charset="-120"/>
               </a:rPr>
-              <a:t>Only 3 events; FOMC contamination in 2 of 3.   </a:t>
-            </a:r>
-            <a:r>
-              <a:rPr lang="en-US" sz="1250" dirty="0">
-                <a:solidFill>
-                  <a:srgbClr val="33425C"/>
-                </a:solidFill>
-                <a:latin typeface="Calibri" pitchFamily="34" charset="0"/>
-                <a:ea typeface="Calibri" pitchFamily="34" charset="-122"/>
-                <a:cs typeface="Calibri" pitchFamily="34" charset="-120"/>
-              </a:rPr>
-              <a:t>All CARs individually insignificant (−41 / +23 / −27 bps).   </a:t>
+              <a:t>Only 3 events; FOMC contamination in 2 of 3.   All CARs individually insignificant (−41 / +23 / −27 bps).   </a:t>
             </a:r>
             <a:endParaRPr lang="en-US" sz="1250" dirty="0"/>
           </a:p>
@@ -11187,18 +12146,7 @@
                 <a:ea typeface="Calibri" pitchFamily="34" charset="-122"/>
                 <a:cs typeface="Calibri" pitchFamily="34" charset="-120"/>
               </a:rPr>
-              <a:t>Placebo ratio 7.0× — suggestive, not individually significant.   </a:t>
-            </a:r>
-            <a:r>
-              <a:rPr lang="en-US" sz="1250" dirty="0">
-                <a:solidFill>
-                  <a:srgbClr val="33425C"/>
-                </a:solidFill>
-                <a:latin typeface="Calibri" pitchFamily="34" charset="0"/>
-                <a:ea typeface="Calibri" pitchFamily="34" charset="-122"/>
-                <a:cs typeface="Calibri" pitchFamily="34" charset="-120"/>
-              </a:rPr>
-              <a:t>Story has shifted across re-runs — too unstable to be evidence.</a:t>
+              <a:t>Placebo ratio 7.0× — suggestive, not individually significant.   Story has shifted across re-runs — too unstable to be evidence.</a:t>
             </a:r>
             <a:endParaRPr lang="en-US" sz="1250" dirty="0"/>
           </a:p>
@@ -11452,6 +12400,13 @@
             </a:outerShdw>
           </a:effectLst>
         </p:spPr>
+        <p:txBody>
+          <a:bodyPr/>
+          <a:lstStyle/>
+          <a:p>
+            <a:endParaRPr lang="ko-KR" altLang="en-US"/>
+          </a:p>
+        </p:txBody>
       </p:sp>
       <p:sp>
         <p:nvSpPr>
@@ -11471,6 +12426,13 @@
             <a:srgbClr val="13294B"/>
           </a:solidFill>
         </p:spPr>
+        <p:txBody>
+          <a:bodyPr/>
+          <a:lstStyle/>
+          <a:p>
+            <a:endParaRPr lang="ko-KR" altLang="en-US"/>
+          </a:p>
+        </p:txBody>
       </p:sp>
       <p:sp>
         <p:nvSpPr>
@@ -11576,6 +12538,13 @@
             </a:outerShdw>
           </a:effectLst>
         </p:spPr>
+        <p:txBody>
+          <a:bodyPr/>
+          <a:lstStyle/>
+          <a:p>
+            <a:endParaRPr lang="ko-KR" altLang="en-US"/>
+          </a:p>
+        </p:txBody>
       </p:sp>
       <p:sp>
         <p:nvSpPr>
@@ -11595,6 +12564,13 @@
             <a:srgbClr val="1B998B"/>
           </a:solidFill>
         </p:spPr>
+        <p:txBody>
+          <a:bodyPr/>
+          <a:lstStyle/>
+          <a:p>
+            <a:endParaRPr lang="ko-KR" altLang="en-US"/>
+          </a:p>
+        </p:txBody>
       </p:sp>
       <p:sp>
         <p:nvSpPr>
@@ -11700,6 +12676,13 @@
             </a:outerShdw>
           </a:effectLst>
         </p:spPr>
+        <p:txBody>
+          <a:bodyPr/>
+          <a:lstStyle/>
+          <a:p>
+            <a:endParaRPr lang="ko-KR" altLang="en-US"/>
+          </a:p>
+        </p:txBody>
       </p:sp>
       <p:sp>
         <p:nvSpPr>
@@ -11719,6 +12702,13 @@
             <a:srgbClr val="E8A12C"/>
           </a:solidFill>
         </p:spPr>
+        <p:txBody>
+          <a:bodyPr/>
+          <a:lstStyle/>
+          <a:p>
+            <a:endParaRPr lang="ko-KR" altLang="en-US"/>
+          </a:p>
+        </p:txBody>
       </p:sp>
       <p:sp>
         <p:nvSpPr>
@@ -11824,6 +12814,13 @@
             </a:outerShdw>
           </a:effectLst>
         </p:spPr>
+        <p:txBody>
+          <a:bodyPr/>
+          <a:lstStyle/>
+          <a:p>
+            <a:endParaRPr lang="ko-KR" altLang="en-US"/>
+          </a:p>
+        </p:txBody>
       </p:sp>
       <p:sp>
         <p:nvSpPr>
@@ -12136,6 +13133,13 @@
             </a:outerShdw>
           </a:effectLst>
         </p:spPr>
+        <p:txBody>
+          <a:bodyPr/>
+          <a:lstStyle/>
+          <a:p>
+            <a:endParaRPr lang="ko-KR" altLang="en-US"/>
+          </a:p>
+        </p:txBody>
       </p:sp>
       <p:sp>
         <p:nvSpPr>
@@ -12155,6 +13159,13 @@
             <a:srgbClr val="1B998B"/>
           </a:solidFill>
         </p:spPr>
+        <p:txBody>
+          <a:bodyPr/>
+          <a:lstStyle/>
+          <a:p>
+            <a:endParaRPr lang="ko-KR" altLang="en-US"/>
+          </a:p>
+        </p:txBody>
       </p:sp>
       <p:sp>
         <p:nvSpPr>
@@ -12174,6 +13185,13 @@
             <a:srgbClr val="1B998B"/>
           </a:solidFill>
         </p:spPr>
+        <p:txBody>
+          <a:bodyPr/>
+          <a:lstStyle/>
+          <a:p>
+            <a:endParaRPr lang="ko-KR" altLang="en-US"/>
+          </a:p>
+        </p:txBody>
       </p:sp>
       <p:sp>
         <p:nvSpPr>
@@ -12360,6 +13378,13 @@
             </a:outerShdw>
           </a:effectLst>
         </p:spPr>
+        <p:txBody>
+          <a:bodyPr/>
+          <a:lstStyle/>
+          <a:p>
+            <a:endParaRPr lang="ko-KR" altLang="en-US"/>
+          </a:p>
+        </p:txBody>
       </p:sp>
       <p:sp>
         <p:nvSpPr>
@@ -12379,6 +13404,13 @@
             <a:srgbClr val="5B8DEF"/>
           </a:solidFill>
         </p:spPr>
+        <p:txBody>
+          <a:bodyPr/>
+          <a:lstStyle/>
+          <a:p>
+            <a:endParaRPr lang="ko-KR" altLang="en-US"/>
+          </a:p>
+        </p:txBody>
       </p:sp>
       <p:sp>
         <p:nvSpPr>
@@ -12398,6 +13430,13 @@
             <a:srgbClr val="5B8DEF"/>
           </a:solidFill>
         </p:spPr>
+        <p:txBody>
+          <a:bodyPr/>
+          <a:lstStyle/>
+          <a:p>
+            <a:endParaRPr lang="ko-KR" altLang="en-US"/>
+          </a:p>
+        </p:txBody>
       </p:sp>
       <p:sp>
         <p:nvSpPr>
@@ -12584,6 +13623,13 @@
             </a:outerShdw>
           </a:effectLst>
         </p:spPr>
+        <p:txBody>
+          <a:bodyPr/>
+          <a:lstStyle/>
+          <a:p>
+            <a:endParaRPr lang="ko-KR" altLang="en-US"/>
+          </a:p>
+        </p:txBody>
       </p:sp>
       <p:sp>
         <p:nvSpPr>
@@ -12603,6 +13649,13 @@
             <a:srgbClr val="E8A12C"/>
           </a:solidFill>
         </p:spPr>
+        <p:txBody>
+          <a:bodyPr/>
+          <a:lstStyle/>
+          <a:p>
+            <a:endParaRPr lang="ko-KR" altLang="en-US"/>
+          </a:p>
+        </p:txBody>
       </p:sp>
       <p:sp>
         <p:nvSpPr>
@@ -12622,6 +13675,13 @@
             <a:srgbClr val="E8A12C"/>
           </a:solidFill>
         </p:spPr>
+        <p:txBody>
+          <a:bodyPr/>
+          <a:lstStyle/>
+          <a:p>
+            <a:endParaRPr lang="ko-KR" altLang="en-US"/>
+          </a:p>
+        </p:txBody>
       </p:sp>
       <p:sp>
         <p:nvSpPr>
@@ -13069,6 +14129,13 @@
             </a:outerShdw>
           </a:effectLst>
         </p:spPr>
+        <p:txBody>
+          <a:bodyPr/>
+          <a:lstStyle/>
+          <a:p>
+            <a:endParaRPr lang="ko-KR" altLang="en-US"/>
+          </a:p>
+        </p:txBody>
       </p:sp>
       <p:sp>
         <p:nvSpPr>
@@ -13088,6 +14155,13 @@
             <a:srgbClr val="1B998B"/>
           </a:solidFill>
         </p:spPr>
+        <p:txBody>
+          <a:bodyPr/>
+          <a:lstStyle/>
+          <a:p>
+            <a:endParaRPr lang="ko-KR" altLang="en-US"/>
+          </a:p>
+        </p:txBody>
       </p:sp>
       <p:sp>
         <p:nvSpPr>
@@ -13114,6 +14188,13 @@
             </a:outerShdw>
           </a:effectLst>
         </p:spPr>
+        <p:txBody>
+          <a:bodyPr/>
+          <a:lstStyle/>
+          <a:p>
+            <a:endParaRPr lang="ko-KR" altLang="en-US"/>
+          </a:p>
+        </p:txBody>
       </p:sp>
       <p:sp>
         <p:nvSpPr>
@@ -13133,6 +14214,13 @@
             <a:srgbClr val="13294B"/>
           </a:solidFill>
         </p:spPr>
+        <p:txBody>
+          <a:bodyPr/>
+          <a:lstStyle/>
+          <a:p>
+            <a:endParaRPr lang="ko-KR" altLang="en-US"/>
+          </a:p>
+        </p:txBody>
       </p:sp>
       <p:sp>
         <p:nvSpPr>
@@ -13159,6 +14247,13 @@
             </a:outerShdw>
           </a:effectLst>
         </p:spPr>
+        <p:txBody>
+          <a:bodyPr/>
+          <a:lstStyle/>
+          <a:p>
+            <a:endParaRPr lang="ko-KR" altLang="en-US"/>
+          </a:p>
+        </p:txBody>
       </p:sp>
       <p:sp>
         <p:nvSpPr>
@@ -13178,6 +14273,13 @@
             <a:srgbClr val="E8A12C"/>
           </a:solidFill>
         </p:spPr>
+        <p:txBody>
+          <a:bodyPr/>
+          <a:lstStyle/>
+          <a:p>
+            <a:endParaRPr lang="ko-KR" altLang="en-US"/>
+          </a:p>
+        </p:txBody>
       </p:sp>
       <p:sp>
         <p:nvSpPr>
@@ -13664,6 +14766,13 @@
             </a:outerShdw>
           </a:effectLst>
         </p:spPr>
+        <p:txBody>
+          <a:bodyPr/>
+          <a:lstStyle/>
+          <a:p>
+            <a:endParaRPr lang="ko-KR" altLang="en-US"/>
+          </a:p>
+        </p:txBody>
       </p:sp>
       <p:sp>
         <p:nvSpPr>
@@ -13683,6 +14792,13 @@
             <a:srgbClr val="C1121F"/>
           </a:solidFill>
         </p:spPr>
+        <p:txBody>
+          <a:bodyPr/>
+          <a:lstStyle/>
+          <a:p>
+            <a:endParaRPr lang="ko-KR" altLang="en-US"/>
+          </a:p>
+        </p:txBody>
       </p:sp>
       <p:sp>
         <p:nvSpPr>
@@ -13894,6 +15010,13 @@
             </a:outerShdw>
           </a:effectLst>
         </p:spPr>
+        <p:txBody>
+          <a:bodyPr/>
+          <a:lstStyle/>
+          <a:p>
+            <a:endParaRPr lang="ko-KR" altLang="en-US"/>
+          </a:p>
+        </p:txBody>
       </p:sp>
       <p:sp>
         <p:nvSpPr>
@@ -13913,6 +15036,13 @@
             <a:srgbClr val="1B998B"/>
           </a:solidFill>
         </p:spPr>
+        <p:txBody>
+          <a:bodyPr/>
+          <a:lstStyle/>
+          <a:p>
+            <a:endParaRPr lang="ko-KR" altLang="en-US"/>
+          </a:p>
+        </p:txBody>
       </p:sp>
       <p:sp>
         <p:nvSpPr>
@@ -14143,7 +15273,6 @@
               <a:rPr lang="en-US" sz="1100" dirty="0"/>
               <a:t>20</a:t>
             </a:r>
-            <a:endParaRPr lang="en-US" sz="1100" dirty="0"/>
           </a:p>
         </p:txBody>
       </p:sp>
@@ -14198,6 +15327,13 @@
             <a:srgbClr val="1B998B"/>
           </a:solidFill>
         </p:spPr>
+        <p:txBody>
+          <a:bodyPr/>
+          <a:lstStyle/>
+          <a:p>
+            <a:endParaRPr lang="ko-KR" altLang="en-US"/>
+          </a:p>
+        </p:txBody>
       </p:sp>
       <p:sp>
         <p:nvSpPr>
@@ -14217,6 +15353,13 @@
             <a:srgbClr val="E8A12C"/>
           </a:solidFill>
         </p:spPr>
+        <p:txBody>
+          <a:bodyPr/>
+          <a:lstStyle/>
+          <a:p>
+            <a:endParaRPr lang="ko-KR" altLang="en-US"/>
+          </a:p>
+        </p:txBody>
       </p:sp>
       <p:sp>
         <p:nvSpPr>
@@ -14580,6 +15723,13 @@
             </a:outerShdw>
           </a:effectLst>
         </p:spPr>
+        <p:txBody>
+          <a:bodyPr/>
+          <a:lstStyle/>
+          <a:p>
+            <a:endParaRPr lang="ko-KR" altLang="en-US"/>
+          </a:p>
+        </p:txBody>
       </p:sp>
       <p:sp>
         <p:nvSpPr>
@@ -14599,6 +15749,13 @@
             <a:srgbClr val="E8A12C"/>
           </a:solidFill>
         </p:spPr>
+        <p:txBody>
+          <a:bodyPr/>
+          <a:lstStyle/>
+          <a:p>
+            <a:endParaRPr lang="ko-KR" altLang="en-US"/>
+          </a:p>
+        </p:txBody>
       </p:sp>
       <p:sp>
         <p:nvSpPr>
@@ -14704,6 +15861,13 @@
             </a:outerShdw>
           </a:effectLst>
         </p:spPr>
+        <p:txBody>
+          <a:bodyPr/>
+          <a:lstStyle/>
+          <a:p>
+            <a:endParaRPr lang="ko-KR" altLang="en-US"/>
+          </a:p>
+        </p:txBody>
       </p:sp>
       <p:sp>
         <p:nvSpPr>
@@ -14723,6 +15887,13 @@
             <a:srgbClr val="1B998B"/>
           </a:solidFill>
         </p:spPr>
+        <p:txBody>
+          <a:bodyPr/>
+          <a:lstStyle/>
+          <a:p>
+            <a:endParaRPr lang="ko-KR" altLang="en-US"/>
+          </a:p>
+        </p:txBody>
       </p:sp>
       <p:sp>
         <p:nvSpPr>
@@ -15086,6 +16257,13 @@
             </a:outerShdw>
           </a:effectLst>
         </p:spPr>
+        <p:txBody>
+          <a:bodyPr/>
+          <a:lstStyle/>
+          <a:p>
+            <a:endParaRPr lang="ko-KR" altLang="en-US"/>
+          </a:p>
+        </p:txBody>
       </p:sp>
       <p:sp>
         <p:nvSpPr>
@@ -15105,6 +16283,13 @@
             <a:srgbClr val="1B998B"/>
           </a:solidFill>
         </p:spPr>
+        <p:txBody>
+          <a:bodyPr/>
+          <a:lstStyle/>
+          <a:p>
+            <a:endParaRPr lang="ko-KR" altLang="en-US"/>
+          </a:p>
+        </p:txBody>
       </p:sp>
       <p:sp>
         <p:nvSpPr>
@@ -15138,18 +16323,7 @@
                 <a:ea typeface="Calibri" pitchFamily="34" charset="-122"/>
                 <a:cs typeface="Calibri" pitchFamily="34" charset="-120"/>
               </a:rPr>
-              <a:t>NORMAL TIMES   </a:t>
-            </a:r>
-            <a:r>
-              <a:rPr lang="en-US" sz="1500" b="1" dirty="0">
-                <a:solidFill>
-                  <a:srgbClr val="1B998B"/>
-                </a:solidFill>
-                <a:latin typeface="Calibri" pitchFamily="34" charset="0"/>
-                <a:ea typeface="Calibri" pitchFamily="34" charset="-122"/>
-                <a:cs typeface="Calibri" pitchFamily="34" charset="-120"/>
-              </a:rPr>
-              <a:t>✓</a:t>
+              <a:t>NORMAL TIMES   ✓</a:t>
             </a:r>
             <a:endParaRPr lang="en-US" sz="1500" dirty="0"/>
           </a:p>
@@ -15285,6 +16459,13 @@
             </a:outerShdw>
           </a:effectLst>
         </p:spPr>
+        <p:txBody>
+          <a:bodyPr/>
+          <a:lstStyle/>
+          <a:p>
+            <a:endParaRPr lang="ko-KR" altLang="en-US"/>
+          </a:p>
+        </p:txBody>
       </p:sp>
       <p:sp>
         <p:nvSpPr>
@@ -15304,6 +16485,13 @@
             <a:srgbClr val="C1121F"/>
           </a:solidFill>
         </p:spPr>
+        <p:txBody>
+          <a:bodyPr/>
+          <a:lstStyle/>
+          <a:p>
+            <a:endParaRPr lang="ko-KR" altLang="en-US"/>
+          </a:p>
+        </p:txBody>
       </p:sp>
       <p:sp>
         <p:nvSpPr>
@@ -15337,18 +16525,7 @@
                 <a:ea typeface="Calibri" pitchFamily="34" charset="-122"/>
                 <a:cs typeface="Calibri" pitchFamily="34" charset="-120"/>
               </a:rPr>
-              <a:t>RUN SCENARIO   </a:t>
-            </a:r>
-            <a:r>
-              <a:rPr lang="en-US" sz="1500" b="1" dirty="0">
-                <a:solidFill>
-                  <a:srgbClr val="C1121F"/>
-                </a:solidFill>
-                <a:latin typeface="Calibri" pitchFamily="34" charset="0"/>
-                <a:ea typeface="Calibri" pitchFamily="34" charset="-122"/>
-                <a:cs typeface="Calibri" pitchFamily="34" charset="-120"/>
-              </a:rPr>
-              <a:t>✗</a:t>
+              <a:t>RUN SCENARIO   ✗</a:t>
             </a:r>
             <a:endParaRPr lang="en-US" sz="1500" dirty="0"/>
           </a:p>
@@ -15484,6 +16661,13 @@
             </a:outerShdw>
           </a:effectLst>
         </p:spPr>
+        <p:txBody>
+          <a:bodyPr/>
+          <a:lstStyle/>
+          <a:p>
+            <a:endParaRPr lang="ko-KR" altLang="en-US"/>
+          </a:p>
+        </p:txBody>
       </p:sp>
       <p:sp>
         <p:nvSpPr>
@@ -15881,6 +17065,13 @@
             </a:outerShdw>
           </a:effectLst>
         </p:spPr>
+        <p:txBody>
+          <a:bodyPr/>
+          <a:lstStyle/>
+          <a:p>
+            <a:endParaRPr lang="ko-KR" altLang="en-US"/>
+          </a:p>
+        </p:txBody>
       </p:sp>
       <p:sp>
         <p:nvSpPr>
@@ -15914,10 +17105,10 @@
                 <a:ea typeface="Georgia" panose="02040502050405090303" pitchFamily="34" charset="-122"/>
                 <a:cs typeface="Georgia" panose="02040502050405090303" pitchFamily="34" charset="-120"/>
               </a:rPr>
-              <a:t>D*(Ñ*, S, θ, L)  =  </a:t>
-            </a:r>
-            <a:r>
-              <a:rPr lang="en-US" sz="1800" b="1" dirty="0">
+              <a:t>D*(Ñ*, S, </a:t>
+            </a:r>
+            <a:r>
+              <a:rPr lang="en-US" sz="1800" b="1">
                 <a:solidFill>
                   <a:srgbClr val="13294B"/>
                 </a:solidFill>
@@ -15925,7 +17116,18 @@
                 <a:ea typeface="Georgia" panose="02040502050405090303" pitchFamily="34" charset="-122"/>
                 <a:cs typeface="Georgia" panose="02040502050405090303" pitchFamily="34" charset="-120"/>
               </a:rPr>
-              <a:t>D*</a:t>
+              <a:t>θ, </a:t>
+            </a:r>
+            <a:r>
+              <a:rPr lang="en-US" sz="1800" b="1" dirty="0">
+                <a:solidFill>
+                  <a:srgbClr val="13294B"/>
+                </a:solidFill>
+                <a:latin typeface="Georgia" panose="02040502050405090303" pitchFamily="34" charset="0"/>
+                <a:ea typeface="Georgia" panose="02040502050405090303" pitchFamily="34" charset="-122"/>
+                <a:cs typeface="Georgia" panose="02040502050405090303" pitchFamily="34" charset="-120"/>
+              </a:rPr>
+              <a:t>L)  =  D*</a:t>
             </a:r>
             <a:r>
               <a:rPr lang="en-US" sz="1100" b="1" dirty="0">
@@ -16082,6 +17284,13 @@
             </a:outerShdw>
           </a:effectLst>
         </p:spPr>
+        <p:txBody>
+          <a:bodyPr/>
+          <a:lstStyle/>
+          <a:p>
+            <a:endParaRPr lang="ko-KR" altLang="en-US"/>
+          </a:p>
+        </p:txBody>
       </p:sp>
       <p:sp>
         <p:nvSpPr>
@@ -16101,6 +17310,13 @@
             <a:srgbClr val="1B998B"/>
           </a:solidFill>
         </p:spPr>
+        <p:txBody>
+          <a:bodyPr/>
+          <a:lstStyle/>
+          <a:p>
+            <a:endParaRPr lang="ko-KR" altLang="en-US"/>
+          </a:p>
+        </p:txBody>
       </p:sp>
       <p:sp>
         <p:nvSpPr>
@@ -16246,6 +17462,13 @@
             </a:outerShdw>
           </a:effectLst>
         </p:spPr>
+        <p:txBody>
+          <a:bodyPr/>
+          <a:lstStyle/>
+          <a:p>
+            <a:endParaRPr lang="ko-KR" altLang="en-US"/>
+          </a:p>
+        </p:txBody>
       </p:sp>
       <p:sp>
         <p:nvSpPr>
@@ -16265,6 +17488,13 @@
             <a:srgbClr val="E8A12C"/>
           </a:solidFill>
         </p:spPr>
+        <p:txBody>
+          <a:bodyPr/>
+          <a:lstStyle/>
+          <a:p>
+            <a:endParaRPr lang="ko-KR" altLang="en-US"/>
+          </a:p>
+        </p:txBody>
       </p:sp>
       <p:sp>
         <p:nvSpPr>
@@ -16541,7 +17771,7 @@
           <p:nvPr/>
         </p:nvPicPr>
         <p:blipFill>
-          <a:blip r:embed="rId1"/>
+          <a:blip r:embed="rId3"/>
           <a:stretch>
             <a:fillRect/>
           </a:stretch>
@@ -16690,6 +17920,13 @@
             </a:outerShdw>
           </a:effectLst>
         </p:spPr>
+        <p:txBody>
+          <a:bodyPr/>
+          <a:lstStyle/>
+          <a:p>
+            <a:endParaRPr lang="ko-KR" altLang="en-US"/>
+          </a:p>
+        </p:txBody>
       </p:sp>
       <p:sp>
         <p:nvSpPr>
@@ -16709,6 +17946,13 @@
             <a:srgbClr val="13294B"/>
           </a:solidFill>
         </p:spPr>
+        <p:txBody>
+          <a:bodyPr/>
+          <a:lstStyle/>
+          <a:p>
+            <a:endParaRPr lang="ko-KR" altLang="en-US"/>
+          </a:p>
+        </p:txBody>
       </p:sp>
       <p:sp>
         <p:nvSpPr>
@@ -16871,6 +18115,13 @@
             </a:outerShdw>
           </a:effectLst>
         </p:spPr>
+        <p:txBody>
+          <a:bodyPr/>
+          <a:lstStyle/>
+          <a:p>
+            <a:endParaRPr lang="ko-KR" altLang="en-US"/>
+          </a:p>
+        </p:txBody>
       </p:sp>
       <p:sp>
         <p:nvSpPr>
@@ -16890,6 +18141,13 @@
             <a:srgbClr val="13294B"/>
           </a:solidFill>
         </p:spPr>
+        <p:txBody>
+          <a:bodyPr/>
+          <a:lstStyle/>
+          <a:p>
+            <a:endParaRPr lang="ko-KR" altLang="en-US"/>
+          </a:p>
+        </p:txBody>
       </p:sp>
       <p:sp>
         <p:nvSpPr>
@@ -17052,6 +18310,13 @@
             </a:outerShdw>
           </a:effectLst>
         </p:spPr>
+        <p:txBody>
+          <a:bodyPr/>
+          <a:lstStyle/>
+          <a:p>
+            <a:endParaRPr lang="ko-KR" altLang="en-US"/>
+          </a:p>
+        </p:txBody>
       </p:sp>
       <p:sp>
         <p:nvSpPr>
@@ -17071,6 +18336,13 @@
             <a:srgbClr val="13294B"/>
           </a:solidFill>
         </p:spPr>
+        <p:txBody>
+          <a:bodyPr/>
+          <a:lstStyle/>
+          <a:p>
+            <a:endParaRPr lang="ko-KR" altLang="en-US"/>
+          </a:p>
+        </p:txBody>
       </p:sp>
       <p:sp>
         <p:nvSpPr>
@@ -17233,6 +18505,13 @@
             </a:outerShdw>
           </a:effectLst>
         </p:spPr>
+        <p:txBody>
+          <a:bodyPr/>
+          <a:lstStyle/>
+          <a:p>
+            <a:endParaRPr lang="ko-KR" altLang="en-US"/>
+          </a:p>
+        </p:txBody>
       </p:sp>
       <p:sp>
         <p:nvSpPr>
@@ -17561,6 +18840,13 @@
             </a:outerShdw>
           </a:effectLst>
         </p:spPr>
+        <p:txBody>
+          <a:bodyPr/>
+          <a:lstStyle/>
+          <a:p>
+            <a:endParaRPr lang="ko-KR" altLang="en-US"/>
+          </a:p>
+        </p:txBody>
       </p:sp>
       <p:sp>
         <p:nvSpPr>
@@ -17580,6 +18866,13 @@
             <a:srgbClr val="C1121F"/>
           </a:solidFill>
         </p:spPr>
+        <p:txBody>
+          <a:bodyPr/>
+          <a:lstStyle/>
+          <a:p>
+            <a:endParaRPr lang="ko-KR" altLang="en-US"/>
+          </a:p>
+        </p:txBody>
       </p:sp>
       <p:sp>
         <p:nvSpPr>
@@ -17787,6 +19080,13 @@
             </a:outerShdw>
           </a:effectLst>
         </p:spPr>
+        <p:txBody>
+          <a:bodyPr/>
+          <a:lstStyle/>
+          <a:p>
+            <a:endParaRPr lang="ko-KR" altLang="en-US"/>
+          </a:p>
+        </p:txBody>
       </p:sp>
       <p:sp>
         <p:nvSpPr>
@@ -17806,6 +19106,13 @@
             <a:srgbClr val="13294B"/>
           </a:solidFill>
         </p:spPr>
+        <p:txBody>
+          <a:bodyPr/>
+          <a:lstStyle/>
+          <a:p>
+            <a:endParaRPr lang="ko-KR" altLang="en-US"/>
+          </a:p>
+        </p:txBody>
       </p:sp>
       <p:sp>
         <p:nvSpPr>
@@ -18013,6 +19320,13 @@
             </a:outerShdw>
           </a:effectLst>
         </p:spPr>
+        <p:txBody>
+          <a:bodyPr/>
+          <a:lstStyle/>
+          <a:p>
+            <a:endParaRPr lang="ko-KR" altLang="en-US"/>
+          </a:p>
+        </p:txBody>
       </p:sp>
       <p:sp>
         <p:nvSpPr>
@@ -18032,6 +19346,13 @@
             <a:srgbClr val="1B998B"/>
           </a:solidFill>
         </p:spPr>
+        <p:txBody>
+          <a:bodyPr/>
+          <a:lstStyle/>
+          <a:p>
+            <a:endParaRPr lang="ko-KR" altLang="en-US"/>
+          </a:p>
+        </p:txBody>
       </p:sp>
       <p:sp>
         <p:nvSpPr>
@@ -18288,6 +19609,13 @@
             </a:outerShdw>
           </a:effectLst>
         </p:spPr>
+        <p:txBody>
+          <a:bodyPr/>
+          <a:lstStyle/>
+          <a:p>
+            <a:endParaRPr lang="ko-KR" altLang="en-US"/>
+          </a:p>
+        </p:txBody>
       </p:sp>
       <p:sp>
         <p:nvSpPr>
@@ -18576,9 +19904,27 @@
             <a:tbl>
               <a:tblPr/>
               <a:tblGrid>
-                <a:gridCol w="2286000"/>
-                <a:gridCol w="3291840"/>
-                <a:gridCol w="1188720"/>
+                <a:gridCol w="2286000">
+                  <a:extLst>
+                    <a:ext uri="{9D8B030D-6E8A-4147-A177-3AD203B41FA5}">
+                      <a16:colId xmlns:a16="http://schemas.microsoft.com/office/drawing/2014/main" val="20000"/>
+                    </a:ext>
+                  </a:extLst>
+                </a:gridCol>
+                <a:gridCol w="3291840">
+                  <a:extLst>
+                    <a:ext uri="{9D8B030D-6E8A-4147-A177-3AD203B41FA5}">
+                      <a16:colId xmlns:a16="http://schemas.microsoft.com/office/drawing/2014/main" val="20001"/>
+                    </a:ext>
+                  </a:extLst>
+                </a:gridCol>
+                <a:gridCol w="1188720">
+                  <a:extLst>
+                    <a:ext uri="{9D8B030D-6E8A-4147-A177-3AD203B41FA5}">
+                      <a16:colId xmlns:a16="http://schemas.microsoft.com/office/drawing/2014/main" val="20002"/>
+                    </a:ext>
+                  </a:extLst>
+                </a:gridCol>
               </a:tblGrid>
               <a:tr h="384048">
                 <a:tc>
@@ -18785,6 +20131,11 @@
                     </a:solidFill>
                   </a:tcPr>
                 </a:tc>
+                <a:extLst>
+                  <a:ext uri="{0D108BD9-81ED-4DB2-BD59-A6C34878D82A}">
+                    <a16:rowId xmlns:a16="http://schemas.microsoft.com/office/drawing/2014/main" val="10000"/>
+                  </a:ext>
+                </a:extLst>
               </a:tr>
               <a:tr h="384048">
                 <a:tc>
@@ -18991,6 +20342,11 @@
                     </a:solidFill>
                   </a:tcPr>
                 </a:tc>
+                <a:extLst>
+                  <a:ext uri="{0D108BD9-81ED-4DB2-BD59-A6C34878D82A}">
+                    <a16:rowId xmlns:a16="http://schemas.microsoft.com/office/drawing/2014/main" val="10001"/>
+                  </a:ext>
+                </a:extLst>
               </a:tr>
               <a:tr h="384048">
                 <a:tc>
@@ -19197,6 +20553,11 @@
                     </a:solidFill>
                   </a:tcPr>
                 </a:tc>
+                <a:extLst>
+                  <a:ext uri="{0D108BD9-81ED-4DB2-BD59-A6C34878D82A}">
+                    <a16:rowId xmlns:a16="http://schemas.microsoft.com/office/drawing/2014/main" val="10002"/>
+                  </a:ext>
+                </a:extLst>
               </a:tr>
               <a:tr h="384048">
                 <a:tc>
@@ -19403,6 +20764,11 @@
                     </a:solidFill>
                   </a:tcPr>
                 </a:tc>
+                <a:extLst>
+                  <a:ext uri="{0D108BD9-81ED-4DB2-BD59-A6C34878D82A}">
+                    <a16:rowId xmlns:a16="http://schemas.microsoft.com/office/drawing/2014/main" val="10003"/>
+                  </a:ext>
+                </a:extLst>
               </a:tr>
               <a:tr h="384048">
                 <a:tc>
@@ -19609,6 +20975,11 @@
                     </a:solidFill>
                   </a:tcPr>
                 </a:tc>
+                <a:extLst>
+                  <a:ext uri="{0D108BD9-81ED-4DB2-BD59-A6C34878D82A}">
+                    <a16:rowId xmlns:a16="http://schemas.microsoft.com/office/drawing/2014/main" val="10004"/>
+                  </a:ext>
+                </a:extLst>
               </a:tr>
               <a:tr h="384048">
                 <a:tc>
@@ -19815,6 +21186,11 @@
                     </a:solidFill>
                   </a:tcPr>
                 </a:tc>
+                <a:extLst>
+                  <a:ext uri="{0D108BD9-81ED-4DB2-BD59-A6C34878D82A}">
+                    <a16:rowId xmlns:a16="http://schemas.microsoft.com/office/drawing/2014/main" val="10005"/>
+                  </a:ext>
+                </a:extLst>
               </a:tr>
               <a:tr h="384048">
                 <a:tc>
@@ -20021,6 +21397,11 @@
                     </a:solidFill>
                   </a:tcPr>
                 </a:tc>
+                <a:extLst>
+                  <a:ext uri="{0D108BD9-81ED-4DB2-BD59-A6C34878D82A}">
+                    <a16:rowId xmlns:a16="http://schemas.microsoft.com/office/drawing/2014/main" val="10006"/>
+                  </a:ext>
+                </a:extLst>
               </a:tr>
               <a:tr h="384048">
                 <a:tc>
@@ -20227,6 +21608,11 @@
                     </a:solidFill>
                   </a:tcPr>
                 </a:tc>
+                <a:extLst>
+                  <a:ext uri="{0D108BD9-81ED-4DB2-BD59-A6C34878D82A}">
+                    <a16:rowId xmlns:a16="http://schemas.microsoft.com/office/drawing/2014/main" val="10007"/>
+                  </a:ext>
+                </a:extLst>
               </a:tr>
             </a:tbl>
           </a:graphicData>
@@ -20295,6 +21681,13 @@
             </a:outerShdw>
           </a:effectLst>
         </p:spPr>
+        <p:txBody>
+          <a:bodyPr/>
+          <a:lstStyle/>
+          <a:p>
+            <a:endParaRPr lang="ko-KR" altLang="en-US"/>
+          </a:p>
+        </p:txBody>
       </p:sp>
       <p:sp>
         <p:nvSpPr>
@@ -20314,6 +21707,13 @@
             <a:srgbClr val="C1121F"/>
           </a:solidFill>
         </p:spPr>
+        <p:txBody>
+          <a:bodyPr/>
+          <a:lstStyle/>
+          <a:p>
+            <a:endParaRPr lang="ko-KR" altLang="en-US"/>
+          </a:p>
+        </p:txBody>
       </p:sp>
       <p:sp>
         <p:nvSpPr>
@@ -20417,7 +21817,7 @@
         </p:xfrm>
         <a:graphic>
           <a:graphicData uri="http://schemas.openxmlformats.org/drawingml/2006/chart">
-            <c:chart xmlns:c="http://schemas.openxmlformats.org/drawingml/2006/chart" xmlns:r="http://schemas.openxmlformats.org/officeDocument/2006/relationships" r:id="rId1"/>
+            <c:chart xmlns:c="http://schemas.openxmlformats.org/drawingml/2006/chart" xmlns:r="http://schemas.openxmlformats.org/officeDocument/2006/relationships" r:id="rId3"/>
           </a:graphicData>
         </a:graphic>
       </p:graphicFrame>
@@ -20661,6 +22061,13 @@
             </a:outerShdw>
           </a:effectLst>
         </p:spPr>
+        <p:txBody>
+          <a:bodyPr/>
+          <a:lstStyle/>
+          <a:p>
+            <a:endParaRPr lang="ko-KR" altLang="en-US"/>
+          </a:p>
+        </p:txBody>
       </p:sp>
       <p:sp>
         <p:nvSpPr>
@@ -20680,6 +22087,13 @@
             <a:srgbClr val="1B998B"/>
           </a:solidFill>
         </p:spPr>
+        <p:txBody>
+          <a:bodyPr/>
+          <a:lstStyle/>
+          <a:p>
+            <a:endParaRPr lang="ko-KR" altLang="en-US"/>
+          </a:p>
+        </p:txBody>
       </p:sp>
       <p:sp>
         <p:nvSpPr>
@@ -20767,14 +22181,6 @@
               </a:rPr>
               <a:t>— corrected convenience-yield spread (DGS3MO − overnight SOFR).   </a:t>
             </a:r>
-            <a:endParaRPr lang="en-US" sz="1200" dirty="0">
-              <a:solidFill>
-                <a:srgbClr val="33425C"/>
-              </a:solidFill>
-              <a:latin typeface="Calibri" pitchFamily="34" charset="0"/>
-              <a:ea typeface="Calibri" pitchFamily="34" charset="-122"/>
-              <a:cs typeface="Calibri" pitchFamily="34" charset="-120"/>
-            </a:endParaRPr>
           </a:p>
           <a:p>
             <a:pPr marL="0" indent="0">
@@ -20805,14 +22211,6 @@
               </a:rPr>
               <a:t>— USDT+USDC supply, now ~$260B.   </a:t>
             </a:r>
-            <a:endParaRPr lang="en-US" sz="1200" dirty="0">
-              <a:solidFill>
-                <a:srgbClr val="33425C"/>
-              </a:solidFill>
-              <a:latin typeface="Calibri" pitchFamily="34" charset="0"/>
-              <a:ea typeface="Calibri" pitchFamily="34" charset="-122"/>
-              <a:cs typeface="Calibri" pitchFamily="34" charset="-120"/>
-            </a:endParaRPr>
           </a:p>
           <a:p>
             <a:pPr marL="0" indent="0">
@@ -20872,6 +22270,13 @@
             </a:outerShdw>
           </a:effectLst>
         </p:spPr>
+        <p:txBody>
+          <a:bodyPr/>
+          <a:lstStyle/>
+          <a:p>
+            <a:endParaRPr lang="ko-KR" altLang="en-US"/>
+          </a:p>
+        </p:txBody>
       </p:sp>
       <p:sp>
         <p:nvSpPr>
@@ -20891,6 +22296,13 @@
             <a:srgbClr val="E8A12C"/>
           </a:solidFill>
         </p:spPr>
+        <p:txBody>
+          <a:bodyPr/>
+          <a:lstStyle/>
+          <a:p>
+            <a:endParaRPr lang="ko-KR" altLang="en-US"/>
+          </a:p>
+        </p:txBody>
       </p:sp>
       <p:sp>
         <p:nvSpPr>
@@ -21056,7 +22468,7 @@
           <p:nvPr/>
         </p:nvPicPr>
         <p:blipFill>
-          <a:blip r:embed="rId1"/>
+          <a:blip r:embed="rId3"/>
           <a:stretch>
             <a:fillRect/>
           </a:stretch>
@@ -21330,6 +22742,8 @@
       </a:bgFillStyleLst>
     </a:fmtScheme>
   </a:themeElements>
+  <a:objectDefaults/>
+  <a:extraClrSchemeLst/>
   <a:extLst>
     <a:ext uri="{05A4C25C-085E-4340-85A3-A5531E510DB2}">
       <thm15:themeFamily xmlns:thm15="http://schemas.microsoft.com/office/thememl/2012/main" name="Office Theme" id="{62F939B6-93AF-4DB8-9C6B-D6C7DFDC589F}" vid="{4A3C46E8-61CC-4603-A589-7422A47A8E4A}"/>
@@ -21589,6 +23003,8 @@
       </a:bgFillStyleLst>
     </a:fmtScheme>
   </a:themeElements>
+  <a:objectDefaults/>
+  <a:extraClrSchemeLst/>
   <a:extLst>
     <a:ext uri="{05A4C25C-085E-4340-85A3-A5531E510DB2}">
       <thm15:themeFamily xmlns:thm15="http://schemas.microsoft.com/office/thememl/2012/main" name="Office Theme" id="{62F939B6-93AF-4DB8-9C6B-D6C7DFDC589F}" vid="{4A3C46E8-61CC-4603-A589-7422A47A8E4A}"/>

--- a/presentations/0609_FINAL_merged_Stablecoin_Privilege.pptx
+++ b/presentations/0609_FINAL_merged_Stablecoin_Privilege.pptx
@@ -5,30 +5,30 @@
     <p:sldMasterId id="2147483648" r:id="rId1"/>
   </p:sldMasterIdLst>
   <p:notesMasterIdLst>
-    <p:notesMasterId r:id="rId23"/>
+    <p:notesMasterId r:id="rId4"/>
   </p:notesMasterIdLst>
   <p:sldIdLst>
-    <p:sldId id="256" r:id="rId2"/>
-    <p:sldId id="257" r:id="rId3"/>
-    <p:sldId id="258" r:id="rId4"/>
-    <p:sldId id="276" r:id="rId5"/>
-    <p:sldId id="260" r:id="rId6"/>
-    <p:sldId id="261" r:id="rId7"/>
-    <p:sldId id="262" r:id="rId8"/>
-    <p:sldId id="263" r:id="rId9"/>
-    <p:sldId id="280" r:id="rId10"/>
-    <p:sldId id="264" r:id="rId11"/>
-    <p:sldId id="277" r:id="rId12"/>
-    <p:sldId id="266" r:id="rId13"/>
-    <p:sldId id="268" r:id="rId14"/>
-    <p:sldId id="269" r:id="rId15"/>
-    <p:sldId id="281" r:id="rId16"/>
-    <p:sldId id="270" r:id="rId17"/>
-    <p:sldId id="271" r:id="rId18"/>
-    <p:sldId id="272" r:id="rId19"/>
-    <p:sldId id="273" r:id="rId20"/>
-    <p:sldId id="274" r:id="rId21"/>
-    <p:sldId id="275" r:id="rId22"/>
+    <p:sldId id="256" r:id="rId3"/>
+    <p:sldId id="257" r:id="rId5"/>
+    <p:sldId id="258" r:id="rId6"/>
+    <p:sldId id="276" r:id="rId7"/>
+    <p:sldId id="260" r:id="rId8"/>
+    <p:sldId id="261" r:id="rId9"/>
+    <p:sldId id="262" r:id="rId10"/>
+    <p:sldId id="263" r:id="rId11"/>
+    <p:sldId id="280" r:id="rId12"/>
+    <p:sldId id="264" r:id="rId13"/>
+    <p:sldId id="277" r:id="rId14"/>
+    <p:sldId id="266" r:id="rId15"/>
+    <p:sldId id="268" r:id="rId16"/>
+    <p:sldId id="269" r:id="rId17"/>
+    <p:sldId id="281" r:id="rId18"/>
+    <p:sldId id="270" r:id="rId19"/>
+    <p:sldId id="271" r:id="rId20"/>
+    <p:sldId id="272" r:id="rId21"/>
+    <p:sldId id="273" r:id="rId22"/>
+    <p:sldId id="274" r:id="rId23"/>
+    <p:sldId id="275" r:id="rId24"/>
   </p:sldIdLst>
   <p:sldSz cx="12192000" cy="6858000"/>
   <p:notesSz cx="6858000" cy="12192000"/>
@@ -124,18 +124,13 @@
       </a:defRPr>
     </a:lvl9pPr>
   </p:defaultTextStyle>
-  <p:extLst>
-    <p:ext uri="{EFAFB233-063F-42B5-8137-9DF3F51BA10A}">
-      <p15:sldGuideLst xmlns:p15="http://schemas.microsoft.com/office/powerpoint/2012/main"/>
-    </p:ext>
-  </p:extLst>
 </p:presentation>
 </file>
 
 <file path=ppt/charts/chart1.xml><?xml version="1.0" encoding="utf-8"?>
-<c:chartSpace xmlns:c="http://schemas.openxmlformats.org/drawingml/2006/chart" xmlns:a="http://schemas.openxmlformats.org/drawingml/2006/main" xmlns:r="http://schemas.openxmlformats.org/officeDocument/2006/relationships" xmlns:c16r2="http://schemas.microsoft.com/office/drawing/2015/06/chart">
+<c:chartSpace xmlns:c="http://schemas.openxmlformats.org/drawingml/2006/chart" xmlns:a="http://schemas.openxmlformats.org/drawingml/2006/main" xmlns:r="http://schemas.openxmlformats.org/officeDocument/2006/relationships">
   <c:date1904 val="0"/>
-  <c:lang val="ko-KR"/>
+  <c:lang val="zh-CN"/>
   <c:roundedCorners val="1"/>
   <mc:AlternateContent xmlns:mc="http://schemas.openxmlformats.org/markup-compatibility/2006">
     <mc:Choice xmlns:c14="http://schemas.microsoft.com/office/drawing/2007/8/2/chart" Requires="c14">
@@ -197,7 +192,6 @@
                     <a:cs typeface="+mn-cs"/>
                   </a:defRPr>
                 </a:pPr>
-                <a:endParaRPr lang="ko-KR"/>
               </a:p>
             </c:txPr>
             <c:dLblPos val="outEnd"/>
@@ -210,7 +204,9 @@
             <c:showLeaderLines val="0"/>
             <c:extLst>
               <c:ext xmlns:c15="http://schemas.microsoft.com/office/drawing/2012/chart" uri="{CE6537A1-D6FC-4f65-9D91-7224C49458BB}">
+                <c15:layout/>
                 <c15:showLeaderLines val="0"/>
+                <c15:leaderLines/>
               </c:ext>
             </c:extLst>
           </c:dLbls>
@@ -241,7 +237,7 @@
                   <c:v>84.8</c:v>
                 </c:pt>
                 <c:pt idx="1">
-                  <c:v>70.900000000000006</c:v>
+                  <c:v>70.9</c:v>
                 </c:pt>
                 <c:pt idx="2">
                   <c:v>0.2</c:v>
@@ -249,11 +245,6 @@
               </c:numCache>
             </c:numRef>
           </c:val>
-          <c:extLst>
-            <c:ext xmlns:c16="http://schemas.microsoft.com/office/drawing/2014/chart" uri="{C3380CC4-5D6E-409C-BE32-E72D297353CC}">
-              <c16:uniqueId val="{00000000-8BA2-0649-9647-185E7E1B1DAE}"/>
-            </c:ext>
-          </c:extLst>
         </c:ser>
         <c:ser>
           <c:idx val="1"/>
@@ -299,7 +290,6 @@
                     <a:cs typeface="+mn-cs"/>
                   </a:defRPr>
                 </a:pPr>
-                <a:endParaRPr lang="ko-KR"/>
               </a:p>
             </c:txPr>
             <c:dLblPos val="outEnd"/>
@@ -312,7 +302,9 @@
             <c:showLeaderLines val="0"/>
             <c:extLst>
               <c:ext xmlns:c15="http://schemas.microsoft.com/office/drawing/2012/chart" uri="{CE6537A1-D6FC-4f65-9D91-7224C49458BB}">
+                <c15:layout/>
                 <c15:showLeaderLines val="0"/>
+                <c15:leaderLines/>
               </c:ext>
             </c:extLst>
           </c:dLbls>
@@ -340,7 +332,7 @@
                 <c:formatCode>General</c:formatCode>
                 <c:ptCount val="3"/>
                 <c:pt idx="0">
-                  <c:v>16.600000000000001</c:v>
+                  <c:v>16.6</c:v>
                 </c:pt>
                 <c:pt idx="1">
                   <c:v>14</c:v>
@@ -351,11 +343,6 @@
               </c:numCache>
             </c:numRef>
           </c:val>
-          <c:extLst>
-            <c:ext xmlns:c16="http://schemas.microsoft.com/office/drawing/2014/chart" uri="{C3380CC4-5D6E-409C-BE32-E72D297353CC}">
-              <c16:uniqueId val="{00000001-8BA2-0649-9647-185E7E1B1DAE}"/>
-            </c:ext>
-          </c:extLst>
         </c:ser>
         <c:dLbls>
           <c:showLegendKey val="0"/>
@@ -366,6 +353,7 @@
           <c:showBubbleSize val="0"/>
         </c:dLbls>
         <c:gapWidth val="150"/>
+        <c:overlap val="0"/>
         <c:axId val="2094734554"/>
         <c:axId val="2094734552"/>
       </c:barChart>
@@ -403,7 +391,6 @@
                 <a:cs typeface="+mn-cs"/>
               </a:defRPr>
             </a:pPr>
-            <a:endParaRPr lang="ko-KR"/>
           </a:p>
         </c:txPr>
         <c:crossAx val="2094734552"/>
@@ -424,6 +411,22 @@
         <c:majorTickMark val="out"/>
         <c:minorTickMark val="none"/>
         <c:tickLblPos val="nextTo"/>
+        <c:txPr>
+          <a:bodyPr rot="-60000000" spcFirstLastPara="0" vertOverflow="ellipsis" vert="horz" wrap="square" anchor="ctr" anchorCtr="1"/>
+          <a:lstStyle/>
+          <a:p>
+            <a:pPr>
+              <a:defRPr lang="en-US" sz="1200" b="0" i="0" u="none" strike="noStrike" kern="1200" baseline="0">
+                <a:solidFill>
+                  <a:srgbClr val="000000"/>
+                </a:solidFill>
+                <a:latin typeface="Arial" panose="020B0704020202020204"/>
+                <a:ea typeface="+mn-ea"/>
+                <a:cs typeface="+mn-cs"/>
+              </a:defRPr>
+            </a:pPr>
+          </a:p>
+        </c:txPr>
         <c:crossAx val="2094734554"/>
         <c:crosses val="autoZero"/>
         <c:crossBetween val="between"/>
@@ -438,6 +441,7 @@
     </c:plotArea>
     <c:legend>
       <c:legendPos val="b"/>
+      <c:layout/>
       <c:overlay val="0"/>
       <c:txPr>
         <a:bodyPr rot="0" spcFirstLastPara="0" vertOverflow="ellipsis" vert="horz" wrap="square" anchor="ctr" anchorCtr="1"/>
@@ -453,7 +457,6 @@
               <a:cs typeface="+mn-cs"/>
             </a:defRPr>
           </a:pPr>
-          <a:endParaRPr lang="ko-KR"/>
         </a:p>
       </c:txPr>
     </c:legend>
@@ -480,7 +483,6 @@
       <a:pPr>
         <a:defRPr lang="en-US"/>
       </a:pPr>
-      <a:endParaRPr lang="ko-KR"/>
     </a:p>
   </c:txPr>
   <c:externalData r:id="rId1">
@@ -571,7 +573,6 @@
           <a:p>
             <a:fld id="{5282F153-3F37-0F45-9E97-73ACFA13230C}" type="datetimeFigureOut">
               <a:rPr lang="en-US"/>
-              <a:t>6/9/26</a:t>
             </a:fld>
             <a:endParaRPr lang="en-US"/>
           </a:p>
@@ -638,6 +639,7 @@
               <a:rPr lang="en-US"/>
               <a:t>Click to edit Master text styles</a:t>
             </a:r>
+            <a:endParaRPr lang="en-US"/>
           </a:p>
           <a:p>
             <a:pPr lvl="1"/>
@@ -645,6 +647,7 @@
               <a:rPr lang="en-US"/>
               <a:t>Second level</a:t>
             </a:r>
+            <a:endParaRPr lang="en-US"/>
           </a:p>
           <a:p>
             <a:pPr lvl="2"/>
@@ -652,6 +655,7 @@
               <a:rPr lang="en-US"/>
               <a:t>Third level</a:t>
             </a:r>
+            <a:endParaRPr lang="en-US"/>
           </a:p>
           <a:p>
             <a:pPr lvl="3"/>
@@ -659,6 +663,7 @@
               <a:rPr lang="en-US"/>
               <a:t>Fourth level</a:t>
             </a:r>
+            <a:endParaRPr lang="en-US"/>
           </a:p>
           <a:p>
             <a:pPr lvl="4"/>
@@ -666,6 +671,7 @@
               <a:rPr lang="en-US"/>
               <a:t>Fifth level</a:t>
             </a:r>
+            <a:endParaRPr lang="en-US"/>
           </a:p>
         </p:txBody>
       </p:sp>
@@ -729,7 +735,6 @@
           <a:p>
             <a:fld id="{CE5E9CC1-C706-0F49-92D6-E571CC5EEA8F}" type="slidenum">
               <a:rPr lang="en-US"/>
-              <a:t>‹#›</a:t>
             </a:fld>
             <a:endParaRPr lang="en-US"/>
           </a:p>
@@ -898,7 +903,6 @@
           <a:p>
             <a:fld id="{F7021451-1387-4CA6-816F-3879F97B5CBC}" type="slidenum">
               <a:rPr lang="en-US"/>
-              <a:t>1</a:t>
             </a:fld>
             <a:endParaRPr lang="en-US"/>
           </a:p>
@@ -977,7 +981,6 @@
           <a:p>
             <a:fld id="{F7021451-1387-4CA6-816F-3879F97B5CBC}" type="slidenum">
               <a:rPr lang="en-US"/>
-              <a:t>10</a:t>
             </a:fld>
             <a:endParaRPr lang="en-US"/>
           </a:p>
@@ -1056,7 +1059,6 @@
           <a:p>
             <a:fld id="{F7021451-1387-4CA6-816F-3879F97B5CBC}" type="slidenum">
               <a:rPr lang="en-US"/>
-              <a:t>11</a:t>
             </a:fld>
             <a:endParaRPr lang="en-US"/>
           </a:p>
@@ -1135,7 +1137,6 @@
           <a:p>
             <a:fld id="{F7021451-1387-4CA6-816F-3879F97B5CBC}" type="slidenum">
               <a:rPr lang="en-US"/>
-              <a:t>12</a:t>
             </a:fld>
             <a:endParaRPr lang="en-US"/>
           </a:p>
@@ -1214,7 +1215,6 @@
           <a:p>
             <a:fld id="{F7021451-1387-4CA6-816F-3879F97B5CBC}" type="slidenum">
               <a:rPr lang="en-US"/>
-              <a:t>13</a:t>
             </a:fld>
             <a:endParaRPr lang="en-US"/>
           </a:p>
@@ -1293,7 +1293,6 @@
           <a:p>
             <a:fld id="{F7021451-1387-4CA6-816F-3879F97B5CBC}" type="slidenum">
               <a:rPr lang="en-US"/>
-              <a:t>14</a:t>
             </a:fld>
             <a:endParaRPr lang="en-US"/>
           </a:p>
@@ -1372,7 +1371,6 @@
           <a:p>
             <a:fld id="{F7021451-1387-4CA6-816F-3879F97B5CBC}" type="slidenum">
               <a:rPr lang="en-US"/>
-              <a:t>15</a:t>
             </a:fld>
             <a:endParaRPr lang="en-US"/>
           </a:p>
@@ -1451,7 +1449,6 @@
           <a:p>
             <a:fld id="{F7021451-1387-4CA6-816F-3879F97B5CBC}" type="slidenum">
               <a:rPr lang="en-US"/>
-              <a:t>16</a:t>
             </a:fld>
             <a:endParaRPr lang="en-US"/>
           </a:p>
@@ -1530,7 +1527,6 @@
           <a:p>
             <a:fld id="{F7021451-1387-4CA6-816F-3879F97B5CBC}" type="slidenum">
               <a:rPr lang="en-US"/>
-              <a:t>17</a:t>
             </a:fld>
             <a:endParaRPr lang="en-US"/>
           </a:p>
@@ -1609,7 +1605,6 @@
           <a:p>
             <a:fld id="{F7021451-1387-4CA6-816F-3879F97B5CBC}" type="slidenum">
               <a:rPr lang="en-US"/>
-              <a:t>18</a:t>
             </a:fld>
             <a:endParaRPr lang="en-US"/>
           </a:p>
@@ -1688,7 +1683,6 @@
           <a:p>
             <a:fld id="{F7021451-1387-4CA6-816F-3879F97B5CBC}" type="slidenum">
               <a:rPr lang="en-US"/>
-              <a:t>19</a:t>
             </a:fld>
             <a:endParaRPr lang="en-US"/>
           </a:p>
@@ -1767,7 +1761,6 @@
           <a:p>
             <a:fld id="{F7021451-1387-4CA6-816F-3879F97B5CBC}" type="slidenum">
               <a:rPr lang="en-US"/>
-              <a:t>2</a:t>
             </a:fld>
             <a:endParaRPr lang="en-US"/>
           </a:p>
@@ -1846,7 +1839,6 @@
           <a:p>
             <a:fld id="{F7021451-1387-4CA6-816F-3879F97B5CBC}" type="slidenum">
               <a:rPr lang="en-US"/>
-              <a:t>20</a:t>
             </a:fld>
             <a:endParaRPr lang="en-US"/>
           </a:p>
@@ -1925,7 +1917,6 @@
           <a:p>
             <a:fld id="{F7021451-1387-4CA6-816F-3879F97B5CBC}" type="slidenum">
               <a:rPr lang="en-US"/>
-              <a:t>21</a:t>
             </a:fld>
             <a:endParaRPr lang="en-US"/>
           </a:p>
@@ -2004,7 +1995,6 @@
           <a:p>
             <a:fld id="{F7021451-1387-4CA6-816F-3879F97B5CBC}" type="slidenum">
               <a:rPr lang="en-US"/>
-              <a:t>3</a:t>
             </a:fld>
             <a:endParaRPr lang="en-US"/>
           </a:p>
@@ -2083,7 +2073,6 @@
           <a:p>
             <a:fld id="{F7021451-1387-4CA6-816F-3879F97B5CBC}" type="slidenum">
               <a:rPr lang="en-US"/>
-              <a:t>4</a:t>
             </a:fld>
             <a:endParaRPr lang="en-US"/>
           </a:p>
@@ -2162,7 +2151,6 @@
           <a:p>
             <a:fld id="{F7021451-1387-4CA6-816F-3879F97B5CBC}" type="slidenum">
               <a:rPr lang="en-US"/>
-              <a:t>5</a:t>
             </a:fld>
             <a:endParaRPr lang="en-US"/>
           </a:p>
@@ -2241,7 +2229,6 @@
           <a:p>
             <a:fld id="{F7021451-1387-4CA6-816F-3879F97B5CBC}" type="slidenum">
               <a:rPr lang="en-US"/>
-              <a:t>6</a:t>
             </a:fld>
             <a:endParaRPr lang="en-US"/>
           </a:p>
@@ -2320,7 +2307,6 @@
           <a:p>
             <a:fld id="{F7021451-1387-4CA6-816F-3879F97B5CBC}" type="slidenum">
               <a:rPr lang="en-US"/>
-              <a:t>7</a:t>
             </a:fld>
             <a:endParaRPr lang="en-US"/>
           </a:p>
@@ -2399,7 +2385,6 @@
           <a:p>
             <a:fld id="{F7021451-1387-4CA6-816F-3879F97B5CBC}" type="slidenum">
               <a:rPr lang="en-US"/>
-              <a:t>8</a:t>
             </a:fld>
             <a:endParaRPr lang="en-US"/>
           </a:p>
@@ -2478,7 +2463,6 @@
           <a:p>
             <a:fld id="{F7021451-1387-4CA6-816F-3879F97B5CBC}" type="slidenum">
               <a:rPr lang="en-US"/>
-              <a:t>9</a:t>
             </a:fld>
             <a:endParaRPr lang="en-US"/>
           </a:p>
@@ -2847,13 +2831,6 @@
             <a:srgbClr val="1B998B"/>
           </a:solidFill>
         </p:spPr>
-        <p:txBody>
-          <a:bodyPr/>
-          <a:lstStyle/>
-          <a:p>
-            <a:endParaRPr lang="ko-KR" altLang="en-US"/>
-          </a:p>
-        </p:txBody>
       </p:sp>
       <p:sp>
         <p:nvSpPr>
@@ -2873,13 +2850,6 @@
             <a:srgbClr val="E8A12C"/>
           </a:solidFill>
         </p:spPr>
-        <p:txBody>
-          <a:bodyPr/>
-          <a:lstStyle/>
-          <a:p>
-            <a:endParaRPr lang="ko-KR" altLang="en-US"/>
-          </a:p>
-        </p:txBody>
       </p:sp>
       <p:sp>
         <p:nvSpPr>
@@ -3057,13 +3027,6 @@
             <a:prstDash val="solid"/>
           </a:ln>
         </p:spPr>
-        <p:txBody>
-          <a:bodyPr/>
-          <a:lstStyle/>
-          <a:p>
-            <a:endParaRPr lang="ko-KR" altLang="en-US"/>
-          </a:p>
-        </p:txBody>
       </p:sp>
       <p:sp>
         <p:nvSpPr>
@@ -3083,13 +3046,6 @@
             <a:srgbClr val="1B998B"/>
           </a:solidFill>
         </p:spPr>
-        <p:txBody>
-          <a:bodyPr/>
-          <a:lstStyle/>
-          <a:p>
-            <a:endParaRPr lang="ko-KR" altLang="en-US"/>
-          </a:p>
-        </p:txBody>
       </p:sp>
       <p:sp>
         <p:nvSpPr>
@@ -3208,13 +3164,6 @@
             <a:prstDash val="solid"/>
           </a:ln>
         </p:spPr>
-        <p:txBody>
-          <a:bodyPr/>
-          <a:lstStyle/>
-          <a:p>
-            <a:endParaRPr lang="ko-KR" altLang="en-US"/>
-          </a:p>
-        </p:txBody>
       </p:sp>
       <p:sp>
         <p:nvSpPr>
@@ -3234,13 +3183,6 @@
             <a:srgbClr val="E8A12C"/>
           </a:solidFill>
         </p:spPr>
-        <p:txBody>
-          <a:bodyPr/>
-          <a:lstStyle/>
-          <a:p>
-            <a:endParaRPr lang="ko-KR" altLang="en-US"/>
-          </a:p>
-        </p:txBody>
       </p:sp>
       <p:sp>
         <p:nvSpPr>
@@ -3359,13 +3301,6 @@
             <a:prstDash val="solid"/>
           </a:ln>
         </p:spPr>
-        <p:txBody>
-          <a:bodyPr/>
-          <a:lstStyle/>
-          <a:p>
-            <a:endParaRPr lang="ko-KR" altLang="en-US"/>
-          </a:p>
-        </p:txBody>
       </p:sp>
       <p:sp>
         <p:nvSpPr>
@@ -3385,13 +3320,6 @@
             <a:srgbClr val="5B8DEF"/>
           </a:solidFill>
         </p:spPr>
-        <p:txBody>
-          <a:bodyPr/>
-          <a:lstStyle/>
-          <a:p>
-            <a:endParaRPr lang="ko-KR" altLang="en-US"/>
-          </a:p>
-        </p:txBody>
       </p:sp>
       <p:sp>
         <p:nvSpPr>
@@ -3658,13 +3586,6 @@
             </a:outerShdw>
           </a:effectLst>
         </p:spPr>
-        <p:txBody>
-          <a:bodyPr/>
-          <a:lstStyle/>
-          <a:p>
-            <a:endParaRPr lang="ko-KR" altLang="en-US"/>
-          </a:p>
-        </p:txBody>
       </p:sp>
       <p:sp>
         <p:nvSpPr>
@@ -3684,13 +3605,6 @@
             <a:srgbClr val="C1121F"/>
           </a:solidFill>
         </p:spPr>
-        <p:txBody>
-          <a:bodyPr/>
-          <a:lstStyle/>
-          <a:p>
-            <a:endParaRPr lang="ko-KR" altLang="en-US"/>
-          </a:p>
-        </p:txBody>
       </p:sp>
       <p:sp>
         <p:nvSpPr>
@@ -3762,7 +3676,7 @@
                 <a:ea typeface="Calibri" pitchFamily="34" charset="-122"/>
                 <a:cs typeface="Calibri" pitchFamily="34" charset="-120"/>
               </a:rPr>
-              <a:t>e.g. Tether, May 2022: ~5–8% cash</a:t>
+              <a:t>e.g. Tether, May 2022: ~low cash</a:t>
             </a:r>
             <a:endParaRPr lang="en-US" sz="1200" dirty="0"/>
           </a:p>
@@ -3936,13 +3850,6 @@
             </a:outerShdw>
           </a:effectLst>
         </p:spPr>
-        <p:txBody>
-          <a:bodyPr/>
-          <a:lstStyle/>
-          <a:p>
-            <a:endParaRPr lang="ko-KR" altLang="en-US"/>
-          </a:p>
-        </p:txBody>
       </p:sp>
       <p:sp>
         <p:nvSpPr>
@@ -3962,13 +3869,6 @@
             <a:srgbClr val="1B998B"/>
           </a:solidFill>
         </p:spPr>
-        <p:txBody>
-          <a:bodyPr/>
-          <a:lstStyle/>
-          <a:p>
-            <a:endParaRPr lang="ko-KR" altLang="en-US"/>
-          </a:p>
-        </p:txBody>
       </p:sp>
       <p:sp>
         <p:nvSpPr>
@@ -4040,7 +3940,7 @@
                 <a:ea typeface="Calibri" pitchFamily="34" charset="-122"/>
                 <a:cs typeface="Calibri" pitchFamily="34" charset="-120"/>
               </a:rPr>
-              <a:t>e.g. Circle, Mar 2023: ~18–22% cash</a:t>
+              <a:t>e.g. Circle, Mar 2023: ~high cash</a:t>
             </a:r>
             <a:endParaRPr lang="en-US" sz="1200" dirty="0"/>
           </a:p>
@@ -4254,6 +4154,7 @@
               <a:rPr lang="en-US" sz="1100" dirty="0"/>
               <a:t>10</a:t>
             </a:r>
+            <a:endParaRPr lang="en-US" sz="1100" dirty="0"/>
           </a:p>
         </p:txBody>
       </p:sp>
@@ -4383,13 +4284,6 @@
             </a:outerShdw>
           </a:effectLst>
         </p:spPr>
-        <p:txBody>
-          <a:bodyPr/>
-          <a:lstStyle/>
-          <a:p>
-            <a:endParaRPr lang="ko-KR" altLang="en-US"/>
-          </a:p>
-        </p:txBody>
       </p:sp>
       <p:sp>
         <p:nvSpPr>
@@ -4767,34 +4661,10 @@
             <a:tbl>
               <a:tblPr/>
               <a:tblGrid>
-                <a:gridCol w="2743200">
-                  <a:extLst>
-                    <a:ext uri="{9D8B030D-6E8A-4147-A177-3AD203B41FA5}">
-                      <a16:colId xmlns:a16="http://schemas.microsoft.com/office/drawing/2014/main" val="20000"/>
-                    </a:ext>
-                  </a:extLst>
-                </a:gridCol>
-                <a:gridCol w="1371600">
-                  <a:extLst>
-                    <a:ext uri="{9D8B030D-6E8A-4147-A177-3AD203B41FA5}">
-                      <a16:colId xmlns:a16="http://schemas.microsoft.com/office/drawing/2014/main" val="20001"/>
-                    </a:ext>
-                  </a:extLst>
-                </a:gridCol>
-                <a:gridCol w="1371600">
-                  <a:extLst>
-                    <a:ext uri="{9D8B030D-6E8A-4147-A177-3AD203B41FA5}">
-                      <a16:colId xmlns:a16="http://schemas.microsoft.com/office/drawing/2014/main" val="20002"/>
-                    </a:ext>
-                  </a:extLst>
-                </a:gridCol>
-                <a:gridCol w="1371600">
-                  <a:extLst>
-                    <a:ext uri="{9D8B030D-6E8A-4147-A177-3AD203B41FA5}">
-                      <a16:colId xmlns:a16="http://schemas.microsoft.com/office/drawing/2014/main" val="20003"/>
-                    </a:ext>
-                  </a:extLst>
-                </a:gridCol>
+                <a:gridCol w="2743200"/>
+                <a:gridCol w="1371600"/>
+                <a:gridCol w="1371600"/>
+                <a:gridCol w="1371600"/>
               </a:tblGrid>
               <a:tr h="457200">
                 <a:tc>
@@ -5069,11 +4939,6 @@
                     </a:solidFill>
                   </a:tcPr>
                 </a:tc>
-                <a:extLst>
-                  <a:ext uri="{0D108BD9-81ED-4DB2-BD59-A6C34878D82A}">
-                    <a16:rowId xmlns:a16="http://schemas.microsoft.com/office/drawing/2014/main" val="10000"/>
-                  </a:ext>
-                </a:extLst>
               </a:tr>
               <a:tr h="457200">
                 <a:tc>
@@ -5348,11 +5213,6 @@
                     </a:solidFill>
                   </a:tcPr>
                 </a:tc>
-                <a:extLst>
-                  <a:ext uri="{0D108BD9-81ED-4DB2-BD59-A6C34878D82A}">
-                    <a16:rowId xmlns:a16="http://schemas.microsoft.com/office/drawing/2014/main" val="10001"/>
-                  </a:ext>
-                </a:extLst>
               </a:tr>
               <a:tr h="457200">
                 <a:tc>
@@ -5627,11 +5487,6 @@
                     </a:solidFill>
                   </a:tcPr>
                 </a:tc>
-                <a:extLst>
-                  <a:ext uri="{0D108BD9-81ED-4DB2-BD59-A6C34878D82A}">
-                    <a16:rowId xmlns:a16="http://schemas.microsoft.com/office/drawing/2014/main" val="10002"/>
-                  </a:ext>
-                </a:extLst>
               </a:tr>
               <a:tr h="457200">
                 <a:tc>
@@ -5906,11 +5761,6 @@
                     </a:solidFill>
                   </a:tcPr>
                 </a:tc>
-                <a:extLst>
-                  <a:ext uri="{0D108BD9-81ED-4DB2-BD59-A6C34878D82A}">
-                    <a16:rowId xmlns:a16="http://schemas.microsoft.com/office/drawing/2014/main" val="10003"/>
-                  </a:ext>
-                </a:extLst>
               </a:tr>
               <a:tr h="457200">
                 <a:tc>
@@ -6185,11 +6035,6 @@
                     </a:solidFill>
                   </a:tcPr>
                 </a:tc>
-                <a:extLst>
-                  <a:ext uri="{0D108BD9-81ED-4DB2-BD59-A6C34878D82A}">
-                    <a16:rowId xmlns:a16="http://schemas.microsoft.com/office/drawing/2014/main" val="10004"/>
-                  </a:ext>
-                </a:extLst>
               </a:tr>
             </a:tbl>
           </a:graphicData>
@@ -6258,13 +6103,6 @@
             </a:outerShdw>
           </a:effectLst>
         </p:spPr>
-        <p:txBody>
-          <a:bodyPr/>
-          <a:lstStyle/>
-          <a:p>
-            <a:endParaRPr lang="ko-KR" altLang="en-US"/>
-          </a:p>
-        </p:txBody>
       </p:sp>
       <p:sp>
         <p:nvSpPr>
@@ -6284,13 +6122,6 @@
             <a:srgbClr val="E8A12C"/>
           </a:solidFill>
         </p:spPr>
-        <p:txBody>
-          <a:bodyPr/>
-          <a:lstStyle/>
-          <a:p>
-            <a:endParaRPr lang="ko-KR" altLang="en-US"/>
-          </a:p>
-        </p:txBody>
       </p:sp>
       <p:sp>
         <p:nvSpPr>
@@ -6418,13 +6249,6 @@
             </a:outerShdw>
           </a:effectLst>
         </p:spPr>
-        <p:txBody>
-          <a:bodyPr/>
-          <a:lstStyle/>
-          <a:p>
-            <a:endParaRPr lang="ko-KR" altLang="en-US"/>
-          </a:p>
-        </p:txBody>
       </p:sp>
       <p:sp>
         <p:nvSpPr>
@@ -6444,13 +6268,6 @@
             <a:srgbClr val="1B998B"/>
           </a:solidFill>
         </p:spPr>
-        <p:txBody>
-          <a:bodyPr/>
-          <a:lstStyle/>
-          <a:p>
-            <a:endParaRPr lang="ko-KR" altLang="en-US"/>
-          </a:p>
-        </p:txBody>
       </p:sp>
       <p:sp>
         <p:nvSpPr>
@@ -6591,13 +6408,6 @@
             </a:outerShdw>
           </a:effectLst>
         </p:spPr>
-        <p:txBody>
-          <a:bodyPr/>
-          <a:lstStyle/>
-          <a:p>
-            <a:endParaRPr lang="ko-KR" altLang="en-US"/>
-          </a:p>
-        </p:txBody>
       </p:sp>
       <p:sp>
         <p:nvSpPr>
@@ -6617,13 +6427,6 @@
             <a:srgbClr val="13294B"/>
           </a:solidFill>
         </p:spPr>
-        <p:txBody>
-          <a:bodyPr/>
-          <a:lstStyle/>
-          <a:p>
-            <a:endParaRPr lang="ko-KR" altLang="en-US"/>
-          </a:p>
-        </p:txBody>
       </p:sp>
       <p:sp>
         <p:nvSpPr>
@@ -6996,7 +6799,7 @@
         <p:spPr>
           <a:xfrm>
             <a:off x="548640" y="2057400"/>
-            <a:ext cx="3042859" cy="2834640"/>
+            <a:ext cx="5362956" cy="2834640"/>
           </a:xfrm>
           <a:prstGeom prst="rect">
             <a:avLst/>
@@ -7012,13 +6815,6 @@
             </a:outerShdw>
           </a:effectLst>
         </p:spPr>
-        <p:txBody>
-          <a:bodyPr/>
-          <a:lstStyle/>
-          <a:p>
-            <a:endParaRPr lang="ko-KR" altLang="en-US"/>
-          </a:p>
-        </p:txBody>
       </p:sp>
       <p:sp>
         <p:nvSpPr>
@@ -7038,13 +6834,6 @@
             <a:srgbClr val="C1121F"/>
           </a:solidFill>
         </p:spPr>
-        <p:txBody>
-          <a:bodyPr/>
-          <a:lstStyle/>
-          <a:p>
-            <a:endParaRPr lang="ko-KR" altLang="en-US"/>
-          </a:p>
-        </p:txBody>
       </p:sp>
       <p:sp>
         <p:nvSpPr>
@@ -7093,7 +6882,7 @@
         <p:spPr>
           <a:xfrm>
             <a:off x="804672" y="2651760"/>
-            <a:ext cx="2512121" cy="2011680"/>
+            <a:ext cx="4860036" cy="2011680"/>
           </a:xfrm>
           <a:prstGeom prst="rect">
             <a:avLst/>
@@ -7176,8 +6965,8 @@
         </p:nvSpPr>
         <p:spPr>
           <a:xfrm>
-            <a:off x="3765235" y="2057400"/>
-            <a:ext cx="2877661" cy="2834640"/>
+            <a:off x="6277356" y="2057400"/>
+            <a:ext cx="5362956" cy="2834640"/>
           </a:xfrm>
           <a:prstGeom prst="rect">
             <a:avLst/>
@@ -7193,13 +6982,6 @@
             </a:outerShdw>
           </a:effectLst>
         </p:spPr>
-        <p:txBody>
-          <a:bodyPr/>
-          <a:lstStyle/>
-          <a:p>
-            <a:endParaRPr lang="ko-KR" altLang="en-US"/>
-          </a:p>
-        </p:txBody>
       </p:sp>
       <p:sp>
         <p:nvSpPr>
@@ -7209,7 +6991,7 @@
         </p:nvSpPr>
         <p:spPr>
           <a:xfrm>
-            <a:off x="3765235" y="2057400"/>
+            <a:off x="6277356" y="2057400"/>
             <a:ext cx="82296" cy="2834640"/>
           </a:xfrm>
           <a:prstGeom prst="rect">
@@ -7219,13 +7001,6 @@
             <a:srgbClr val="1B998B"/>
           </a:solidFill>
         </p:spPr>
-        <p:txBody>
-          <a:bodyPr/>
-          <a:lstStyle/>
-          <a:p>
-            <a:endParaRPr lang="ko-KR" altLang="en-US"/>
-          </a:p>
-        </p:txBody>
       </p:sp>
       <p:sp>
         <p:nvSpPr>
@@ -7235,8 +7010,8 @@
         </p:nvSpPr>
         <p:spPr>
           <a:xfrm>
-            <a:off x="4028696" y="2258568"/>
-            <a:ext cx="2067304" cy="365760"/>
+            <a:off x="6533388" y="2212848"/>
+            <a:ext cx="4905756" cy="365760"/>
           </a:xfrm>
           <a:prstGeom prst="rect">
             <a:avLst/>
@@ -7273,8 +7048,8 @@
         </p:nvSpPr>
         <p:spPr>
           <a:xfrm>
-            <a:off x="4021267" y="2651760"/>
-            <a:ext cx="2330012" cy="2011680"/>
+            <a:off x="6533388" y="2651760"/>
+            <a:ext cx="4494276" cy="2011680"/>
           </a:xfrm>
           <a:prstGeom prst="rect">
             <a:avLst/>
@@ -7374,13 +7149,6 @@
             </a:outerShdw>
           </a:effectLst>
         </p:spPr>
-        <p:txBody>
-          <a:bodyPr/>
-          <a:lstStyle/>
-          <a:p>
-            <a:endParaRPr lang="ko-KR" altLang="en-US"/>
-          </a:p>
-        </p:txBody>
       </p:sp>
       <p:sp>
         <p:nvSpPr>
@@ -7428,7 +7196,7 @@
                 <a:ea typeface="Calibri" pitchFamily="34" charset="-122"/>
                 <a:cs typeface="Calibri" pitchFamily="34" charset="-120"/>
               </a:rPr>
-              <a:t>a critical buffer region (L* ≈ 13%) separating amplification from forced liquidation — located consistently by two methods.</a:t>
+              <a:t>a critical buffer region in the low teens (L* ≈ 13%) separating amplification from forced liquidation — located consistently by two methods, though imprecisely estimated.</a:t>
             </a:r>
             <a:endParaRPr lang="en-US" sz="1350" dirty="0"/>
           </a:p>
@@ -7507,354 +7275,6 @@
               <a:t>13</a:t>
             </a:r>
             <a:endParaRPr lang="en-US" sz="1100" dirty="0"/>
-          </a:p>
-        </p:txBody>
-      </p:sp>
-      <p:sp>
-        <p:nvSpPr>
-          <p:cNvPr id="17" name="Shape 12">
-            <a:extLst>
-              <a:ext uri="{FF2B5EF4-FFF2-40B4-BE49-F238E27FC236}">
-                <a16:creationId xmlns:a16="http://schemas.microsoft.com/office/drawing/2014/main" id="{34FCE5DF-20C9-5636-A609-56D47C380EFF}"/>
-              </a:ext>
-            </a:extLst>
-          </p:cNvPr>
-          <p:cNvSpPr/>
-          <p:nvPr/>
-        </p:nvSpPr>
-        <p:spPr>
-          <a:xfrm>
-            <a:off x="6816632" y="2057400"/>
-            <a:ext cx="5193792" cy="2847104"/>
-          </a:xfrm>
-          <a:prstGeom prst="rect">
-            <a:avLst/>
-          </a:prstGeom>
-          <a:solidFill>
-            <a:srgbClr val="F4F6FA"/>
-          </a:solidFill>
-          <a:effectLst>
-            <a:outerShdw blurRad="88900" dist="38100" dir="8100000" algn="bl" rotWithShape="0">
-              <a:srgbClr val="000000">
-                <a:alpha val="13000"/>
-              </a:srgbClr>
-            </a:outerShdw>
-          </a:effectLst>
-        </p:spPr>
-        <p:txBody>
-          <a:bodyPr/>
-          <a:lstStyle/>
-          <a:p>
-            <a:endParaRPr lang="ko-KR" altLang="en-US"/>
-          </a:p>
-        </p:txBody>
-      </p:sp>
-      <p:sp>
-        <p:nvSpPr>
-          <p:cNvPr id="18" name="Shape 13">
-            <a:extLst>
-              <a:ext uri="{FF2B5EF4-FFF2-40B4-BE49-F238E27FC236}">
-                <a16:creationId xmlns:a16="http://schemas.microsoft.com/office/drawing/2014/main" id="{96B1B4A8-6414-9ABB-BD51-DB6F006AA1EF}"/>
-              </a:ext>
-            </a:extLst>
-          </p:cNvPr>
-          <p:cNvSpPr/>
-          <p:nvPr/>
-        </p:nvSpPr>
-        <p:spPr>
-          <a:xfrm>
-            <a:off x="6816632" y="2057400"/>
-            <a:ext cx="82296" cy="2847104"/>
-          </a:xfrm>
-          <a:prstGeom prst="rect">
-            <a:avLst/>
-          </a:prstGeom>
-          <a:solidFill>
-            <a:srgbClr val="E8A12C"/>
-          </a:solidFill>
-        </p:spPr>
-        <p:txBody>
-          <a:bodyPr/>
-          <a:lstStyle/>
-          <a:p>
-            <a:endParaRPr lang="ko-KR" altLang="en-US"/>
-          </a:p>
-        </p:txBody>
-      </p:sp>
-      <p:sp>
-        <p:nvSpPr>
-          <p:cNvPr id="19" name="Text 14">
-            <a:extLst>
-              <a:ext uri="{FF2B5EF4-FFF2-40B4-BE49-F238E27FC236}">
-                <a16:creationId xmlns:a16="http://schemas.microsoft.com/office/drawing/2014/main" id="{E8B88EF7-4715-5E8F-C87F-08B32656A655}"/>
-              </a:ext>
-            </a:extLst>
-          </p:cNvPr>
-          <p:cNvSpPr/>
-          <p:nvPr/>
-        </p:nvSpPr>
-        <p:spPr>
-          <a:xfrm>
-            <a:off x="7072664" y="1818477"/>
-            <a:ext cx="4736592" cy="1220187"/>
-          </a:xfrm>
-          <a:prstGeom prst="rect">
-            <a:avLst/>
-          </a:prstGeom>
-          <a:noFill/>
-        </p:spPr>
-        <p:txBody>
-          <a:bodyPr wrap="square" lIns="0" tIns="0" rIns="0" bIns="0" rtlCol="0" anchor="ctr"/>
-          <a:lstStyle/>
-          <a:p>
-            <a:pPr marL="0" indent="0">
-              <a:buNone/>
-            </a:pPr>
-            <a:r>
-              <a:rPr lang="en-US" sz="2200" b="1" dirty="0">
-                <a:solidFill>
-                  <a:srgbClr val="13294B"/>
-                </a:solidFill>
-                <a:latin typeface="Georgia" panose="02040502050405090303" pitchFamily="34" charset="0"/>
-                <a:ea typeface="Georgia" panose="02040502050405090303" pitchFamily="34" charset="-122"/>
-                <a:cs typeface="Georgia" panose="02040502050405090303" pitchFamily="34" charset="-120"/>
-              </a:rPr>
-              <a:t>L* is the point of the switch</a:t>
-            </a:r>
-            <a:endParaRPr lang="en-US" sz="2200" dirty="0"/>
-          </a:p>
-        </p:txBody>
-      </p:sp>
-      <p:sp>
-        <p:nvSpPr>
-          <p:cNvPr id="20" name="Text 15">
-            <a:extLst>
-              <a:ext uri="{FF2B5EF4-FFF2-40B4-BE49-F238E27FC236}">
-                <a16:creationId xmlns:a16="http://schemas.microsoft.com/office/drawing/2014/main" id="{0B464FF1-E1BC-FA4C-7565-37BD6B0B9788}"/>
-              </a:ext>
-            </a:extLst>
-          </p:cNvPr>
-          <p:cNvSpPr/>
-          <p:nvPr/>
-        </p:nvSpPr>
-        <p:spPr>
-          <a:xfrm>
-            <a:off x="7045232" y="2412430"/>
-            <a:ext cx="4736592" cy="1084611"/>
-          </a:xfrm>
-          <a:prstGeom prst="rect">
-            <a:avLst/>
-          </a:prstGeom>
-          <a:noFill/>
-        </p:spPr>
-        <p:txBody>
-          <a:bodyPr wrap="square" lIns="0" tIns="0" rIns="0" bIns="0" rtlCol="0" anchor="ctr"/>
-          <a:lstStyle/>
-          <a:p>
-            <a:pPr marL="0" indent="0">
-              <a:buNone/>
-            </a:pPr>
-            <a:endParaRPr lang="en-US" sz="1150" dirty="0"/>
-          </a:p>
-        </p:txBody>
-      </p:sp>
-      <p:sp>
-        <p:nvSpPr>
-          <p:cNvPr id="25" name="Text 10">
-            <a:extLst>
-              <a:ext uri="{FF2B5EF4-FFF2-40B4-BE49-F238E27FC236}">
-                <a16:creationId xmlns:a16="http://schemas.microsoft.com/office/drawing/2014/main" id="{EC6ACDE3-C373-84EE-2C2E-8D25C10C1C7A}"/>
-              </a:ext>
-            </a:extLst>
-          </p:cNvPr>
-          <p:cNvSpPr/>
-          <p:nvPr/>
-        </p:nvSpPr>
-        <p:spPr>
-          <a:xfrm>
-            <a:off x="7141244" y="2674081"/>
-            <a:ext cx="4626864" cy="2011680"/>
-          </a:xfrm>
-          <a:prstGeom prst="rect">
-            <a:avLst/>
-          </a:prstGeom>
-          <a:noFill/>
-        </p:spPr>
-        <p:txBody>
-          <a:bodyPr wrap="square" lIns="0" tIns="0" rIns="0" bIns="0" rtlCol="0" anchor="ctr"/>
-          <a:lstStyle/>
-          <a:p>
-            <a:pPr marL="342900" indent="-342900">
-              <a:spcAft>
-                <a:spcPts val="800"/>
-              </a:spcAft>
-              <a:buSzPct val="100000"/>
-              <a:buChar char="•"/>
-            </a:pPr>
-            <a:r>
-              <a:rPr lang="en-US" sz="1400" dirty="0">
-                <a:solidFill>
-                  <a:srgbClr val="33425C"/>
-                </a:solidFill>
-                <a:latin typeface="Calibri" pitchFamily="34" charset="0"/>
-                <a:ea typeface="Calibri" pitchFamily="34" charset="-122"/>
-                <a:cs typeface="Calibri" pitchFamily="34" charset="-120"/>
-              </a:rPr>
-              <a:t>Depends on the historical </a:t>
-            </a:r>
-            <a:r>
-              <a:rPr lang="en-US" sz="1400" dirty="0">
-                <a:solidFill>
-                  <a:srgbClr val="33425C"/>
-                </a:solidFill>
-                <a:highlight>
-                  <a:srgbClr val="FFFF00"/>
-                </a:highlight>
-                <a:latin typeface="Calibri" pitchFamily="34" charset="0"/>
-                <a:ea typeface="Calibri" pitchFamily="34" charset="-122"/>
-                <a:cs typeface="Calibri" pitchFamily="34" charset="-120"/>
-              </a:rPr>
-              <a:t>distribution of redemption shocks</a:t>
-            </a:r>
-            <a:r>
-              <a:rPr lang="en-US" sz="1400" dirty="0">
-                <a:solidFill>
-                  <a:srgbClr val="33425C"/>
-                </a:solidFill>
-                <a:latin typeface="Calibri" pitchFamily="34" charset="0"/>
-                <a:ea typeface="Calibri" pitchFamily="34" charset="-122"/>
-                <a:cs typeface="Calibri" pitchFamily="34" charset="-120"/>
-              </a:rPr>
-              <a:t>, the </a:t>
-            </a:r>
-            <a:r>
-              <a:rPr lang="en-US" sz="1400" dirty="0">
-                <a:solidFill>
-                  <a:srgbClr val="33425C"/>
-                </a:solidFill>
-                <a:highlight>
-                  <a:srgbClr val="FFFF00"/>
-                </a:highlight>
-                <a:latin typeface="Calibri" pitchFamily="34" charset="0"/>
-                <a:ea typeface="Calibri" pitchFamily="34" charset="-122"/>
-                <a:cs typeface="Calibri" pitchFamily="34" charset="-120"/>
-              </a:rPr>
-              <a:t>depth and liquidity of the T-bill market</a:t>
-            </a:r>
-            <a:r>
-              <a:rPr lang="en-US" sz="1400" dirty="0">
-                <a:solidFill>
-                  <a:srgbClr val="33425C"/>
-                </a:solidFill>
-                <a:latin typeface="Calibri" pitchFamily="34" charset="0"/>
-                <a:ea typeface="Calibri" pitchFamily="34" charset="-122"/>
-                <a:cs typeface="Calibri" pitchFamily="34" charset="-120"/>
-              </a:rPr>
-              <a:t>, and </a:t>
-            </a:r>
-            <a:r>
-              <a:rPr lang="en-US" sz="1400" dirty="0">
-                <a:solidFill>
-                  <a:srgbClr val="33425C"/>
-                </a:solidFill>
-                <a:highlight>
-                  <a:srgbClr val="FFFF00"/>
-                </a:highlight>
-                <a:latin typeface="Calibri" pitchFamily="34" charset="0"/>
-                <a:ea typeface="Calibri" pitchFamily="34" charset="-122"/>
-                <a:cs typeface="Calibri" pitchFamily="34" charset="-120"/>
-              </a:rPr>
-              <a:t>composition of reserves</a:t>
-            </a:r>
-            <a:r>
-              <a:rPr lang="en-US" sz="1400" dirty="0">
-                <a:solidFill>
-                  <a:srgbClr val="33425C"/>
-                </a:solidFill>
-                <a:latin typeface="Calibri" pitchFamily="34" charset="0"/>
-                <a:ea typeface="Calibri" pitchFamily="34" charset="-122"/>
-                <a:cs typeface="Calibri" pitchFamily="34" charset="-120"/>
-              </a:rPr>
-              <a:t>.</a:t>
-            </a:r>
-            <a:endParaRPr lang="en-US" sz="1400" dirty="0"/>
-          </a:p>
-          <a:p>
-            <a:pPr marL="342900" indent="-342900">
-              <a:spcAft>
-                <a:spcPts val="800"/>
-              </a:spcAft>
-              <a:buSzPct val="100000"/>
-              <a:buChar char="•"/>
-            </a:pPr>
-            <a:r>
-              <a:rPr lang="en-US" sz="1400" dirty="0">
-                <a:solidFill>
-                  <a:srgbClr val="33425C"/>
-                </a:solidFill>
-                <a:latin typeface="Calibri" pitchFamily="34" charset="0"/>
-                <a:ea typeface="Calibri" pitchFamily="34" charset="-122"/>
-                <a:cs typeface="Calibri" pitchFamily="34" charset="-120"/>
-              </a:rPr>
-              <a:t>Above L*, supply-spread relationship reflects the </a:t>
-            </a:r>
-            <a:r>
-              <a:rPr lang="en-US" sz="1400" dirty="0">
-                <a:solidFill>
-                  <a:srgbClr val="33425C"/>
-                </a:solidFill>
-                <a:highlight>
-                  <a:srgbClr val="FFFF00"/>
-                </a:highlight>
-                <a:latin typeface="Calibri" pitchFamily="34" charset="0"/>
-                <a:ea typeface="Calibri" pitchFamily="34" charset="-122"/>
-                <a:cs typeface="Calibri" pitchFamily="34" charset="-120"/>
-              </a:rPr>
-              <a:t>demand only channel. </a:t>
-            </a:r>
-          </a:p>
-          <a:p>
-            <a:pPr marL="342900" indent="-342900">
-              <a:spcAft>
-                <a:spcPts val="800"/>
-              </a:spcAft>
-              <a:buSzPct val="100000"/>
-              <a:buChar char="•"/>
-            </a:pPr>
-            <a:r>
-              <a:rPr lang="en-US" sz="1400" dirty="0">
-                <a:solidFill>
-                  <a:srgbClr val="33425C"/>
-                </a:solidFill>
-                <a:latin typeface="Calibri" pitchFamily="34" charset="0"/>
-                <a:cs typeface="Calibri" pitchFamily="34" charset="-120"/>
-              </a:rPr>
-              <a:t>Below L*, it reflects for </a:t>
-            </a:r>
-            <a:r>
-              <a:rPr lang="en-US" sz="1400" dirty="0">
-                <a:solidFill>
-                  <a:srgbClr val="33425C"/>
-                </a:solidFill>
-                <a:highlight>
-                  <a:srgbClr val="FFFF00"/>
-                </a:highlight>
-                <a:latin typeface="Calibri" pitchFamily="34" charset="0"/>
-                <a:cs typeface="Calibri" pitchFamily="34" charset="-120"/>
-              </a:rPr>
-              <a:t>forced liquidation </a:t>
-            </a:r>
-            <a:r>
-              <a:rPr lang="en-US" sz="1400" dirty="0">
-                <a:solidFill>
-                  <a:srgbClr val="33425C"/>
-                </a:solidFill>
-                <a:latin typeface="Calibri" pitchFamily="34" charset="0"/>
-                <a:cs typeface="Calibri" pitchFamily="34" charset="-120"/>
-              </a:rPr>
-              <a:t>– also changes the sign of some effects and magnitude of others. </a:t>
-            </a:r>
-            <a:endParaRPr lang="en-US" sz="1400" dirty="0"/>
           </a:p>
         </p:txBody>
       </p:sp>
@@ -7923,7 +7343,7 @@
                 <a:ea typeface="Calibri" pitchFamily="34" charset="-122"/>
                 <a:cs typeface="Calibri" pitchFamily="34" charset="-120"/>
               </a:rPr>
-              <a:t>THRESHOLD RESULT: HANSEN</a:t>
+              <a:t>THRESHOLD RESULT</a:t>
             </a:r>
             <a:endParaRPr lang="en-US" sz="1200" dirty="0"/>
           </a:p>
@@ -8014,7 +7434,7 @@
           <p:nvPr/>
         </p:nvPicPr>
         <p:blipFill>
-          <a:blip r:embed="rId3"/>
+          <a:blip r:embed="rId1"/>
           <a:stretch>
             <a:fillRect/>
           </a:stretch>
@@ -8075,7 +7495,7 @@
         </p:nvSpPr>
         <p:spPr>
           <a:xfrm>
-            <a:off x="6446520" y="2438763"/>
+            <a:off x="6446520" y="1920240"/>
             <a:ext cx="5193792" cy="960120"/>
           </a:xfrm>
           <a:prstGeom prst="rect">
@@ -8092,13 +7512,6 @@
             </a:outerShdw>
           </a:effectLst>
         </p:spPr>
-        <p:txBody>
-          <a:bodyPr/>
-          <a:lstStyle/>
-          <a:p>
-            <a:endParaRPr lang="ko-KR" altLang="en-US"/>
-          </a:p>
-        </p:txBody>
       </p:sp>
       <p:sp>
         <p:nvSpPr>
@@ -8108,7 +7521,7 @@
         </p:nvSpPr>
         <p:spPr>
           <a:xfrm>
-            <a:off x="6446520" y="2438763"/>
+            <a:off x="6446520" y="1920240"/>
             <a:ext cx="82296" cy="960120"/>
           </a:xfrm>
           <a:prstGeom prst="rect">
@@ -8118,13 +7531,6 @@
             <a:srgbClr val="1B998B"/>
           </a:solidFill>
         </p:spPr>
-        <p:txBody>
-          <a:bodyPr/>
-          <a:lstStyle/>
-          <a:p>
-            <a:endParaRPr lang="ko-KR" altLang="en-US"/>
-          </a:p>
-        </p:txBody>
       </p:sp>
       <p:sp>
         <p:nvSpPr>
@@ -8134,7 +7540,7 @@
         </p:nvSpPr>
         <p:spPr>
           <a:xfrm>
-            <a:off x="6675120" y="2548491"/>
+            <a:off x="6675120" y="2029968"/>
             <a:ext cx="4736592" cy="411480"/>
           </a:xfrm>
           <a:prstGeom prst="rect">
@@ -8172,7 +7578,7 @@
         </p:nvSpPr>
         <p:spPr>
           <a:xfrm>
-            <a:off x="6675120" y="2987403"/>
+            <a:off x="6675120" y="2468880"/>
             <a:ext cx="4736592" cy="365760"/>
           </a:xfrm>
           <a:prstGeom prst="rect">
@@ -8204,13 +7610,13 @@
       </p:sp>
       <p:sp>
         <p:nvSpPr>
-          <p:cNvPr id="15" name="Shape 12"/>
-          <p:cNvSpPr/>
-          <p:nvPr/>
-        </p:nvSpPr>
-        <p:spPr>
-          <a:xfrm>
-            <a:off x="6446520" y="3658858"/>
+          <p:cNvPr id="11" name="Shape 8"/>
+          <p:cNvSpPr/>
+          <p:nvPr/>
+        </p:nvSpPr>
+        <p:spPr>
+          <a:xfrm>
+            <a:off x="6446520" y="2999232"/>
             <a:ext cx="5193792" cy="960120"/>
           </a:xfrm>
           <a:prstGeom prst="rect">
@@ -8227,49 +7633,35 @@
             </a:outerShdw>
           </a:effectLst>
         </p:spPr>
-        <p:txBody>
-          <a:bodyPr/>
-          <a:lstStyle/>
-          <a:p>
-            <a:endParaRPr lang="ko-KR" altLang="en-US"/>
-          </a:p>
-        </p:txBody>
-      </p:sp>
-      <p:sp>
-        <p:nvSpPr>
-          <p:cNvPr id="16" name="Shape 13"/>
-          <p:cNvSpPr/>
-          <p:nvPr/>
-        </p:nvSpPr>
-        <p:spPr>
-          <a:xfrm>
-            <a:off x="6446520" y="3658858"/>
+      </p:sp>
+      <p:sp>
+        <p:nvSpPr>
+          <p:cNvPr id="12" name="Shape 9"/>
+          <p:cNvSpPr/>
+          <p:nvPr/>
+        </p:nvSpPr>
+        <p:spPr>
+          <a:xfrm>
+            <a:off x="6446520" y="2999232"/>
             <a:ext cx="82296" cy="960120"/>
           </a:xfrm>
           <a:prstGeom prst="rect">
             <a:avLst/>
           </a:prstGeom>
           <a:solidFill>
-            <a:srgbClr val="E8A12C"/>
+            <a:srgbClr val="13294B"/>
           </a:solidFill>
         </p:spPr>
-        <p:txBody>
-          <a:bodyPr/>
-          <a:lstStyle/>
-          <a:p>
-            <a:endParaRPr lang="ko-KR" altLang="en-US"/>
-          </a:p>
-        </p:txBody>
-      </p:sp>
-      <p:sp>
-        <p:nvSpPr>
-          <p:cNvPr id="17" name="Text 14"/>
-          <p:cNvSpPr/>
-          <p:nvPr/>
-        </p:nvSpPr>
-        <p:spPr>
-          <a:xfrm>
-            <a:off x="6675120" y="3768586"/>
+      </p:sp>
+      <p:sp>
+        <p:nvSpPr>
+          <p:cNvPr id="13" name="Text 10"/>
+          <p:cNvSpPr/>
+          <p:nvPr/>
+        </p:nvSpPr>
+        <p:spPr>
+          <a:xfrm>
+            <a:off x="6675120" y="3108960"/>
             <a:ext cx="4736592" cy="411480"/>
           </a:xfrm>
           <a:prstGeom prst="rect">
@@ -8293,7 +7685,7 @@
                 <a:ea typeface="Georgia" panose="02040502050405090303" pitchFamily="34" charset="-122"/>
                 <a:cs typeface="Georgia" panose="02040502050405090303" pitchFamily="34" charset="-120"/>
               </a:rPr>
-              <a:t>p = 0.406</a:t>
+              <a:t>c* = 14.9%</a:t>
             </a:r>
             <a:endParaRPr lang="en-US" sz="2200" dirty="0"/>
           </a:p>
@@ -8301,13 +7693,13 @@
       </p:sp>
       <p:sp>
         <p:nvSpPr>
-          <p:cNvPr id="18" name="Text 15"/>
-          <p:cNvSpPr/>
-          <p:nvPr/>
-        </p:nvSpPr>
-        <p:spPr>
-          <a:xfrm>
-            <a:off x="6675120" y="4207498"/>
+          <p:cNvPr id="14" name="Text 11"/>
+          <p:cNvSpPr/>
+          <p:nvPr/>
+        </p:nvSpPr>
+        <p:spPr>
+          <a:xfrm>
+            <a:off x="6675120" y="3547872"/>
             <a:ext cx="4736592" cy="365760"/>
           </a:xfrm>
           <a:prstGeom prst="rect">
@@ -8331,7 +7723,7 @@
                 <a:ea typeface="Calibri" pitchFamily="34" charset="-122"/>
                 <a:cs typeface="Calibri" pitchFamily="34" charset="-120"/>
               </a:rPr>
-              <a:t>bootstrap; 90% CI [3.1%, 14.5%] — location robust, not precise</a:t>
+              <a:t>LSTAR smooth transition — locates the same region</a:t>
             </a:r>
             <a:endParaRPr lang="en-US" sz="1150" dirty="0"/>
           </a:p>
@@ -8339,14 +7731,14 @@
       </p:sp>
       <p:sp>
         <p:nvSpPr>
-          <p:cNvPr id="19" name="Shape 16"/>
-          <p:cNvSpPr/>
-          <p:nvPr/>
-        </p:nvSpPr>
-        <p:spPr>
-          <a:xfrm>
-            <a:off x="548640" y="5138928"/>
-            <a:ext cx="11091672" cy="1188720"/>
+          <p:cNvPr id="15" name="Shape 12"/>
+          <p:cNvSpPr/>
+          <p:nvPr/>
+        </p:nvSpPr>
+        <p:spPr>
+          <a:xfrm>
+            <a:off x="6446520" y="4078224"/>
+            <a:ext cx="5193792" cy="960120"/>
           </a:xfrm>
           <a:prstGeom prst="rect">
             <a:avLst/>
@@ -8362,13 +7754,127 @@
             </a:outerShdw>
           </a:effectLst>
         </p:spPr>
-        <p:txBody>
-          <a:bodyPr/>
-          <a:lstStyle/>
-          <a:p>
-            <a:endParaRPr lang="ko-KR" altLang="en-US"/>
-          </a:p>
-        </p:txBody>
+      </p:sp>
+      <p:sp>
+        <p:nvSpPr>
+          <p:cNvPr id="16" name="Shape 13"/>
+          <p:cNvSpPr/>
+          <p:nvPr/>
+        </p:nvSpPr>
+        <p:spPr>
+          <a:xfrm>
+            <a:off x="6446520" y="4078224"/>
+            <a:ext cx="82296" cy="960120"/>
+          </a:xfrm>
+          <a:prstGeom prst="rect">
+            <a:avLst/>
+          </a:prstGeom>
+          <a:solidFill>
+            <a:srgbClr val="E8A12C"/>
+          </a:solidFill>
+        </p:spPr>
+      </p:sp>
+      <p:sp>
+        <p:nvSpPr>
+          <p:cNvPr id="17" name="Text 14"/>
+          <p:cNvSpPr/>
+          <p:nvPr/>
+        </p:nvSpPr>
+        <p:spPr>
+          <a:xfrm>
+            <a:off x="6675120" y="4187952"/>
+            <a:ext cx="4736592" cy="411480"/>
+          </a:xfrm>
+          <a:prstGeom prst="rect">
+            <a:avLst/>
+          </a:prstGeom>
+          <a:noFill/>
+        </p:spPr>
+        <p:txBody>
+          <a:bodyPr wrap="square" lIns="0" tIns="0" rIns="0" bIns="0" rtlCol="0" anchor="ctr"/>
+          <a:lstStyle/>
+          <a:p>
+            <a:pPr marL="0" indent="0">
+              <a:buNone/>
+            </a:pPr>
+            <a:r>
+              <a:rPr lang="en-US" sz="2200" b="1" dirty="0">
+                <a:solidFill>
+                  <a:srgbClr val="13294B"/>
+                </a:solidFill>
+                <a:latin typeface="Georgia" panose="02040502050405090303" pitchFamily="34" charset="0"/>
+                <a:ea typeface="Georgia" panose="02040502050405090303" pitchFamily="34" charset="-122"/>
+                <a:cs typeface="Georgia" panose="02040502050405090303" pitchFamily="34" charset="-120"/>
+              </a:rPr>
+              <a:t>p = 0.406</a:t>
+            </a:r>
+            <a:endParaRPr lang="en-US" sz="2200" dirty="0"/>
+          </a:p>
+        </p:txBody>
+      </p:sp>
+      <p:sp>
+        <p:nvSpPr>
+          <p:cNvPr id="18" name="Text 15"/>
+          <p:cNvSpPr/>
+          <p:nvPr/>
+        </p:nvSpPr>
+        <p:spPr>
+          <a:xfrm>
+            <a:off x="6675120" y="4626864"/>
+            <a:ext cx="4736592" cy="365760"/>
+          </a:xfrm>
+          <a:prstGeom prst="rect">
+            <a:avLst/>
+          </a:prstGeom>
+          <a:noFill/>
+        </p:spPr>
+        <p:txBody>
+          <a:bodyPr wrap="square" lIns="0" tIns="0" rIns="0" bIns="0" rtlCol="0" anchor="ctr"/>
+          <a:lstStyle/>
+          <a:p>
+            <a:pPr marL="0" indent="0">
+              <a:buNone/>
+            </a:pPr>
+            <a:r>
+              <a:rPr lang="en-US" sz="1150" dirty="0">
+                <a:solidFill>
+                  <a:srgbClr val="33425C"/>
+                </a:solidFill>
+                <a:latin typeface="Calibri" pitchFamily="34" charset="0"/>
+                <a:ea typeface="Calibri" pitchFamily="34" charset="-122"/>
+                <a:cs typeface="Calibri" pitchFamily="34" charset="-120"/>
+              </a:rPr>
+              <a:t>bootstrap; 90% CI [3.1%, 14.5%] — location robust, not precise</a:t>
+            </a:r>
+            <a:endParaRPr lang="en-US" sz="1150" dirty="0"/>
+          </a:p>
+        </p:txBody>
+      </p:sp>
+      <p:sp>
+        <p:nvSpPr>
+          <p:cNvPr id="19" name="Shape 16"/>
+          <p:cNvSpPr/>
+          <p:nvPr/>
+        </p:nvSpPr>
+        <p:spPr>
+          <a:xfrm>
+            <a:off x="548640" y="5138928"/>
+            <a:ext cx="11091672" cy="1188720"/>
+          </a:xfrm>
+          <a:prstGeom prst="rect">
+            <a:avLst/>
+          </a:prstGeom>
+          <a:solidFill>
+            <a:srgbClr val="F4F6FA"/>
+          </a:solidFill>
+          <a:effectLst>
+            <a:outerShdw blurRad="88900" dist="38100" dir="8100000" algn="bl" rotWithShape="0">
+              <a:srgbClr val="000000">
+                <a:alpha val="13000"/>
+              </a:srgbClr>
+            </a:outerShdw>
+          </a:effectLst>
+        </p:spPr>
       </p:sp>
       <p:sp>
         <p:nvSpPr>
@@ -8388,13 +7894,6 @@
             <a:srgbClr val="C1121F"/>
           </a:solidFill>
         </p:spPr>
-        <p:txBody>
-          <a:bodyPr/>
-          <a:lstStyle/>
-          <a:p>
-            <a:endParaRPr lang="ko-KR" altLang="en-US"/>
-          </a:p>
-        </p:txBody>
       </p:sp>
       <p:sp>
         <p:nvSpPr>
@@ -8404,7 +7903,7 @@
         </p:nvSpPr>
         <p:spPr>
           <a:xfrm>
-            <a:off x="822960" y="5376672"/>
+            <a:off x="822960" y="5248656"/>
             <a:ext cx="10543032" cy="960120"/>
           </a:xfrm>
           <a:prstGeom prst="rect">
@@ -8423,7 +7922,7 @@
               <a:buNone/>
             </a:pPr>
             <a:r>
-              <a:rPr lang="en-US" sz="1600" b="1" dirty="0">
+              <a:rPr lang="en-US" sz="1250" b="1" dirty="0">
                 <a:solidFill>
                   <a:srgbClr val="1B998B"/>
                 </a:solidFill>
@@ -8434,7 +7933,7 @@
               <a:t>Converges:  </a:t>
             </a:r>
             <a:r>
-              <a:rPr lang="en-US" sz="1600" dirty="0">
+              <a:rPr lang="en-US" sz="1250" dirty="0">
                 <a:solidFill>
                   <a:srgbClr val="33425C"/>
                 </a:solidFill>
@@ -8445,7 +7944,7 @@
               <a:t>the threshold LOCATION (≈13%) — stable across both methods, all TRIM values, every model vintage.   </a:t>
             </a:r>
             <a:br>
-              <a:rPr lang="en-US" sz="1600" dirty="0">
+              <a:rPr lang="en-US" sz="1250" dirty="0">
                 <a:solidFill>
                   <a:srgbClr val="33425C"/>
                 </a:solidFill>
@@ -8455,7 +7954,7 @@
               </a:rPr>
             </a:br>
             <a:r>
-              <a:rPr lang="en-US" sz="1600" b="1" dirty="0">
+              <a:rPr lang="en-US" sz="1250" b="1" dirty="0">
                 <a:solidFill>
                   <a:srgbClr val="C1121F"/>
                 </a:solidFill>
@@ -8466,7 +7965,7 @@
               <a:t>Does NOT converge:  </a:t>
             </a:r>
             <a:r>
-              <a:rPr lang="en-US" sz="1600" dirty="0">
+              <a:rPr lang="en-US" sz="1250" dirty="0">
                 <a:solidFill>
                   <a:srgbClr val="33425C"/>
                 </a:solidFill>
@@ -8474,10 +7973,10 @@
                 <a:ea typeface="Calibri" pitchFamily="34" charset="-122"/>
                 <a:cs typeface="Calibri" pitchFamily="34" charset="-120"/>
               </a:rPr>
-              <a:t>the regime-beta magnitudes — Hansen (hard split) and LSTAR (smooth model) estimate different objects.</a:t>
+              <a:t>the regime-beta magnitudes — Hansen (hard split) and LSTAR (smooth model) estimate different objects, so do not show them as mutual corroboration.   </a:t>
             </a:r>
             <a:br>
-              <a:rPr lang="en-US" sz="1600" dirty="0">
+              <a:rPr lang="en-US" sz="1250" dirty="0">
                 <a:solidFill>
                   <a:srgbClr val="33425C"/>
                 </a:solidFill>
@@ -8486,7 +7985,29 @@
                 <a:cs typeface="Calibri" pitchFamily="34" charset="-120"/>
               </a:rPr>
             </a:br>
-            <a:endParaRPr lang="en-US" sz="1600" dirty="0"/>
+            <a:r>
+              <a:rPr lang="en-US" sz="1250" b="1" dirty="0">
+                <a:solidFill>
+                  <a:srgbClr val="13294B"/>
+                </a:solidFill>
+                <a:latin typeface="Calibri" pitchFamily="34" charset="0"/>
+                <a:ea typeface="Calibri" pitchFamily="34" charset="-122"/>
+                <a:cs typeface="Calibri" pitchFamily="34" charset="-120"/>
+              </a:rPr>
+              <a:t>Claim only:  </a:t>
+            </a:r>
+            <a:r>
+              <a:rPr lang="en-US" sz="1250" i="1" dirty="0">
+                <a:solidFill>
+                  <a:srgbClr val="33425C"/>
+                </a:solidFill>
+                <a:latin typeface="Calibri" pitchFamily="34" charset="0"/>
+                <a:ea typeface="Calibri" pitchFamily="34" charset="-122"/>
+                <a:cs typeface="Calibri" pitchFamily="34" charset="-120"/>
+              </a:rPr>
+              <a:t>“two methods locate the same fragility region near 13%.”</a:t>
+            </a:r>
+            <a:endParaRPr lang="en-US" sz="1250" dirty="0"/>
           </a:p>
         </p:txBody>
       </p:sp>
@@ -8611,6 +8132,9 @@
           <a:bodyPr wrap="square" lIns="0" tIns="0" rIns="0" bIns="0" rtlCol="0" anchor="ctr"/>
           <a:lstStyle/>
           <a:p>
+            <a:pPr marL="0" indent="0">
+              <a:buNone/>
+            </a:pPr>
             <a:r>
               <a:rPr lang="en-US" sz="1200" b="1" kern="0" spc="200" dirty="0">
                 <a:solidFill>
@@ -8620,20 +8144,9 @@
                 <a:ea typeface="Calibri" pitchFamily="34" charset="-122"/>
                 <a:cs typeface="Calibri" pitchFamily="34" charset="-120"/>
               </a:rPr>
-              <a:t>ROBUSTNESS - </a:t>
-            </a:r>
-            <a:r>
-              <a:rPr lang="en-US" altLang="ko-KR" sz="1200" b="1" kern="0" spc="200" dirty="0">
-                <a:solidFill>
-                  <a:srgbClr val="1B998B"/>
-                </a:solidFill>
-                <a:latin typeface="Calibri" pitchFamily="34" charset="0"/>
-                <a:ea typeface="Calibri" pitchFamily="34" charset="-122"/>
-                <a:cs typeface="Calibri" pitchFamily="34" charset="-120"/>
-              </a:rPr>
-              <a:t>THRESHOLD RESULT: LSTAR</a:t>
-            </a:r>
-            <a:endParaRPr lang="en-US" altLang="ko-KR" sz="1200" dirty="0"/>
+              <a:t>ROBUSTNESS</a:t>
+            </a:r>
+            <a:endParaRPr lang="en-US" sz="1200" dirty="0"/>
           </a:p>
         </p:txBody>
       </p:sp>
@@ -8722,15 +8235,15 @@
           <p:nvPr/>
         </p:nvPicPr>
         <p:blipFill>
-          <a:blip r:embed="rId3"/>
+          <a:blip r:embed="rId1"/>
           <a:stretch>
             <a:fillRect/>
           </a:stretch>
         </p:blipFill>
         <p:spPr>
           <a:xfrm>
-            <a:off x="3068879" y="1874521"/>
-            <a:ext cx="8495105" cy="3178116"/>
+            <a:off x="1705356" y="1828800"/>
+            <a:ext cx="8778240" cy="3284040"/>
           </a:xfrm>
           <a:prstGeom prst="rect">
             <a:avLst/>
@@ -8762,13 +8275,6 @@
             </a:outerShdw>
           </a:effectLst>
         </p:spPr>
-        <p:txBody>
-          <a:bodyPr/>
-          <a:lstStyle/>
-          <a:p>
-            <a:endParaRPr lang="ko-KR" altLang="en-US"/>
-          </a:p>
-        </p:txBody>
       </p:sp>
       <p:sp>
         <p:nvSpPr>
@@ -8788,13 +8294,6 @@
             <a:srgbClr val="E8A12C"/>
           </a:solidFill>
         </p:spPr>
-        <p:txBody>
-          <a:bodyPr/>
-          <a:lstStyle/>
-          <a:p>
-            <a:endParaRPr lang="ko-KR" altLang="en-US"/>
-          </a:p>
-        </p:txBody>
       </p:sp>
       <p:sp>
         <p:nvSpPr>
@@ -8842,94 +8341,29 @@
                 <a:ea typeface="Calibri" pitchFamily="34" charset="-122"/>
                 <a:cs typeface="Calibri" pitchFamily="34" charset="-120"/>
               </a:rPr>
-              <a:t>the transition midpoint c* = 14.9% lands just above the Hansen bootstrap CI — two methods, </a:t>
+              <a:t>the transition midpoint c* = 14.9% lands inside the Hansen bootstrap CI — two methods, same 13–15% region.   </a:t>
+            </a:r>
+            <a:r>
+              <a:rPr lang="en-US" sz="1200" b="1" dirty="0">
+                <a:solidFill>
+                  <a:srgbClr val="C1121F"/>
+                </a:solidFill>
+                <a:latin typeface="Calibri" pitchFamily="34" charset="0"/>
+                <a:ea typeface="Calibri" pitchFamily="34" charset="-122"/>
+                <a:cs typeface="Calibri" pitchFamily="34" charset="-120"/>
+              </a:rPr>
+              <a:t>Read with care:  </a:t>
             </a:r>
             <a:r>
               <a:rPr lang="en-US" sz="1200" dirty="0">
                 <a:solidFill>
                   <a:srgbClr val="33425C"/>
                 </a:solidFill>
-                <a:highlight>
-                  <a:srgbClr val="FFFF00"/>
-                </a:highlight>
-                <a:latin typeface="Calibri" pitchFamily="34" charset="0"/>
-                <a:ea typeface="Calibri" pitchFamily="34" charset="-122"/>
-                <a:cs typeface="Calibri" pitchFamily="34" charset="-120"/>
-              </a:rPr>
-              <a:t>same 13–15% region.   </a:t>
-            </a:r>
-          </a:p>
-          <a:p>
-            <a:pPr marL="0" indent="0">
-              <a:lnSpc>
-                <a:spcPct val="106000"/>
-              </a:lnSpc>
-              <a:buNone/>
-            </a:pPr>
-            <a:r>
-              <a:rPr lang="en-US" sz="1200" b="1" dirty="0">
-                <a:solidFill>
-                  <a:srgbClr val="C1121F"/>
-                </a:solidFill>
-                <a:latin typeface="Calibri" pitchFamily="34" charset="0"/>
-                <a:ea typeface="Calibri" pitchFamily="34" charset="-122"/>
-                <a:cs typeface="Calibri" pitchFamily="34" charset="-120"/>
-              </a:rPr>
-              <a:t>Read with care:  </a:t>
-            </a:r>
-            <a:r>
-              <a:rPr lang="en-US" sz="1200" dirty="0">
-                <a:solidFill>
-                  <a:srgbClr val="33425C"/>
-                </a:solidFill>
-                <a:latin typeface="Calibri" pitchFamily="34" charset="0"/>
-                <a:ea typeface="Calibri" pitchFamily="34" charset="-122"/>
-                <a:cs typeface="Calibri" pitchFamily="34" charset="-120"/>
-              </a:rPr>
-              <a:t>the per-regime betas (−1.81 / −12.59) come from a different functional form than Hansen's — treat them as the LSTAR fit, not as beta-level confirmation. The robust cross-model claim is the threshold </a:t>
-            </a:r>
-            <a:r>
-              <a:rPr lang="en-US" sz="1200" dirty="0">
-                <a:solidFill>
-                  <a:srgbClr val="33425C"/>
-                </a:solidFill>
-                <a:highlight>
-                  <a:srgbClr val="FFFF00"/>
-                </a:highlight>
-                <a:latin typeface="Calibri" pitchFamily="34" charset="0"/>
-                <a:ea typeface="Calibri" pitchFamily="34" charset="-122"/>
-                <a:cs typeface="Calibri" pitchFamily="34" charset="-120"/>
-              </a:rPr>
-              <a:t>LOCATION.</a:t>
-            </a:r>
-          </a:p>
-          <a:p>
-            <a:pPr>
-              <a:lnSpc>
-                <a:spcPct val="106000"/>
-              </a:lnSpc>
-            </a:pPr>
-            <a:r>
-              <a:rPr lang="en-US" altLang="ko-KR" sz="1200" b="1" dirty="0">
-                <a:solidFill>
-                  <a:srgbClr val="13294B"/>
-                </a:solidFill>
-                <a:latin typeface="Calibri" pitchFamily="34" charset="0"/>
-                <a:ea typeface="Calibri" pitchFamily="34" charset="-122"/>
-                <a:cs typeface="Calibri" pitchFamily="34" charset="-120"/>
-              </a:rPr>
-              <a:t>Claim:  </a:t>
-            </a:r>
-            <a:r>
-              <a:rPr lang="en-US" altLang="ko-KR" sz="1200" i="1" dirty="0">
-                <a:solidFill>
-                  <a:srgbClr val="33425C"/>
-                </a:solidFill>
-                <a:latin typeface="Calibri" pitchFamily="34" charset="0"/>
-                <a:ea typeface="Calibri" pitchFamily="34" charset="-122"/>
-                <a:cs typeface="Calibri" pitchFamily="34" charset="-120"/>
-              </a:rPr>
-              <a:t>“two methods locate the same fragility region near 13%.”</a:t>
+                <a:latin typeface="Calibri" pitchFamily="34" charset="0"/>
+                <a:ea typeface="Calibri" pitchFamily="34" charset="-122"/>
+                <a:cs typeface="Calibri" pitchFamily="34" charset="-120"/>
+              </a:rPr>
+              <a:t>the per-regime betas (−1.81 / −12.59) come from a different functional form than Hansen's — treat them as the LSTAR fit, not as beta-level confirmation. The robust cross-model claim is the threshold LOCATION.</a:t>
             </a:r>
             <a:endParaRPr lang="en-US" sz="1200" dirty="0"/>
           </a:p>
@@ -9008,321 +8442,6 @@
               <a:t>15</a:t>
             </a:r>
             <a:endParaRPr lang="en-US" sz="1100" dirty="0"/>
-          </a:p>
-        </p:txBody>
-      </p:sp>
-      <p:sp>
-        <p:nvSpPr>
-          <p:cNvPr id="11" name="Shape 8">
-            <a:extLst>
-              <a:ext uri="{FF2B5EF4-FFF2-40B4-BE49-F238E27FC236}">
-                <a16:creationId xmlns:a16="http://schemas.microsoft.com/office/drawing/2014/main" id="{00F3DB8D-E911-06FB-2D49-D384F9C74714}"/>
-              </a:ext>
-            </a:extLst>
-          </p:cNvPr>
-          <p:cNvSpPr/>
-          <p:nvPr/>
-        </p:nvSpPr>
-        <p:spPr>
-          <a:xfrm>
-            <a:off x="204004" y="2480599"/>
-            <a:ext cx="2778339" cy="960120"/>
-          </a:xfrm>
-          <a:prstGeom prst="rect">
-            <a:avLst/>
-          </a:prstGeom>
-          <a:solidFill>
-            <a:srgbClr val="F4F6FA"/>
-          </a:solidFill>
-          <a:effectLst>
-            <a:outerShdw blurRad="88900" dist="38100" dir="8100000" algn="bl" rotWithShape="0">
-              <a:srgbClr val="000000">
-                <a:alpha val="13000"/>
-              </a:srgbClr>
-            </a:outerShdw>
-          </a:effectLst>
-        </p:spPr>
-        <p:txBody>
-          <a:bodyPr/>
-          <a:lstStyle/>
-          <a:p>
-            <a:endParaRPr lang="ko-KR" altLang="en-US"/>
-          </a:p>
-        </p:txBody>
-      </p:sp>
-      <p:sp>
-        <p:nvSpPr>
-          <p:cNvPr id="12" name="Shape 9">
-            <a:extLst>
-              <a:ext uri="{FF2B5EF4-FFF2-40B4-BE49-F238E27FC236}">
-                <a16:creationId xmlns:a16="http://schemas.microsoft.com/office/drawing/2014/main" id="{5A79590A-AF30-3C1E-151A-61507E740F57}"/>
-              </a:ext>
-            </a:extLst>
-          </p:cNvPr>
-          <p:cNvSpPr/>
-          <p:nvPr/>
-        </p:nvSpPr>
-        <p:spPr>
-          <a:xfrm>
-            <a:off x="142422" y="2480599"/>
-            <a:ext cx="82296" cy="960120"/>
-          </a:xfrm>
-          <a:prstGeom prst="rect">
-            <a:avLst/>
-          </a:prstGeom>
-          <a:solidFill>
-            <a:srgbClr val="13294B"/>
-          </a:solidFill>
-        </p:spPr>
-        <p:txBody>
-          <a:bodyPr/>
-          <a:lstStyle/>
-          <a:p>
-            <a:endParaRPr lang="ko-KR" altLang="en-US"/>
-          </a:p>
-        </p:txBody>
-      </p:sp>
-      <p:sp>
-        <p:nvSpPr>
-          <p:cNvPr id="13" name="Text 10">
-            <a:extLst>
-              <a:ext uri="{FF2B5EF4-FFF2-40B4-BE49-F238E27FC236}">
-                <a16:creationId xmlns:a16="http://schemas.microsoft.com/office/drawing/2014/main" id="{9351EC8B-D08D-4EC3-684E-CBA763BCDADA}"/>
-              </a:ext>
-            </a:extLst>
-          </p:cNvPr>
-          <p:cNvSpPr/>
-          <p:nvPr/>
-        </p:nvSpPr>
-        <p:spPr>
-          <a:xfrm>
-            <a:off x="336647" y="2572039"/>
-            <a:ext cx="2533767" cy="411480"/>
-          </a:xfrm>
-          <a:prstGeom prst="rect">
-            <a:avLst/>
-          </a:prstGeom>
-          <a:noFill/>
-        </p:spPr>
-        <p:txBody>
-          <a:bodyPr wrap="square" lIns="0" tIns="0" rIns="0" bIns="0" rtlCol="0" anchor="ctr"/>
-          <a:lstStyle/>
-          <a:p>
-            <a:pPr marL="0" indent="0">
-              <a:buNone/>
-            </a:pPr>
-            <a:r>
-              <a:rPr lang="en-US" sz="2200" b="1" dirty="0">
-                <a:solidFill>
-                  <a:srgbClr val="13294B"/>
-                </a:solidFill>
-                <a:latin typeface="Georgia" panose="02040502050405090303" pitchFamily="34" charset="0"/>
-                <a:ea typeface="Georgia" panose="02040502050405090303" pitchFamily="34" charset="-122"/>
-                <a:cs typeface="Georgia" panose="02040502050405090303" pitchFamily="34" charset="-120"/>
-              </a:rPr>
-              <a:t>c* = 14.9%</a:t>
-            </a:r>
-            <a:endParaRPr lang="en-US" sz="2200" dirty="0"/>
-          </a:p>
-        </p:txBody>
-      </p:sp>
-      <p:sp>
-        <p:nvSpPr>
-          <p:cNvPr id="14" name="Text 11">
-            <a:extLst>
-              <a:ext uri="{FF2B5EF4-FFF2-40B4-BE49-F238E27FC236}">
-                <a16:creationId xmlns:a16="http://schemas.microsoft.com/office/drawing/2014/main" id="{FD166B33-C2EA-594C-6C47-100E76262320}"/>
-              </a:ext>
-            </a:extLst>
-          </p:cNvPr>
-          <p:cNvSpPr/>
-          <p:nvPr/>
-        </p:nvSpPr>
-        <p:spPr>
-          <a:xfrm>
-            <a:off x="286300" y="3029238"/>
-            <a:ext cx="2533767" cy="365760"/>
-          </a:xfrm>
-          <a:prstGeom prst="rect">
-            <a:avLst/>
-          </a:prstGeom>
-          <a:noFill/>
-        </p:spPr>
-        <p:txBody>
-          <a:bodyPr wrap="square" lIns="0" tIns="0" rIns="0" bIns="0" rtlCol="0" anchor="ctr"/>
-          <a:lstStyle/>
-          <a:p>
-            <a:pPr marL="0" indent="0">
-              <a:buNone/>
-            </a:pPr>
-            <a:r>
-              <a:rPr lang="en-US" sz="1150" dirty="0">
-                <a:solidFill>
-                  <a:srgbClr val="33425C"/>
-                </a:solidFill>
-                <a:latin typeface="Calibri" pitchFamily="34" charset="0"/>
-                <a:ea typeface="Calibri" pitchFamily="34" charset="-122"/>
-                <a:cs typeface="Calibri" pitchFamily="34" charset="-120"/>
-              </a:rPr>
-              <a:t>LSTAR smooth transition — locates a near region</a:t>
-            </a:r>
-            <a:endParaRPr lang="en-US" sz="1150" dirty="0"/>
-          </a:p>
-        </p:txBody>
-      </p:sp>
-      <p:sp>
-        <p:nvSpPr>
-          <p:cNvPr id="15" name="Shape 12">
-            <a:extLst>
-              <a:ext uri="{FF2B5EF4-FFF2-40B4-BE49-F238E27FC236}">
-                <a16:creationId xmlns:a16="http://schemas.microsoft.com/office/drawing/2014/main" id="{C847B695-BD6F-D6B5-F4B5-979D8BD7AE0A}"/>
-              </a:ext>
-            </a:extLst>
-          </p:cNvPr>
-          <p:cNvSpPr/>
-          <p:nvPr/>
-        </p:nvSpPr>
-        <p:spPr>
-          <a:xfrm>
-            <a:off x="142422" y="3554441"/>
-            <a:ext cx="2839921" cy="960120"/>
-          </a:xfrm>
-          <a:prstGeom prst="rect">
-            <a:avLst/>
-          </a:prstGeom>
-          <a:solidFill>
-            <a:srgbClr val="F4F6FA"/>
-          </a:solidFill>
-          <a:effectLst>
-            <a:outerShdw blurRad="88900" dist="38100" dir="8100000" algn="bl" rotWithShape="0">
-              <a:srgbClr val="000000">
-                <a:alpha val="13000"/>
-              </a:srgbClr>
-            </a:outerShdw>
-          </a:effectLst>
-        </p:spPr>
-        <p:txBody>
-          <a:bodyPr/>
-          <a:lstStyle/>
-          <a:p>
-            <a:endParaRPr lang="ko-KR" altLang="en-US"/>
-          </a:p>
-        </p:txBody>
-      </p:sp>
-      <p:sp>
-        <p:nvSpPr>
-          <p:cNvPr id="16" name="Shape 13">
-            <a:extLst>
-              <a:ext uri="{FF2B5EF4-FFF2-40B4-BE49-F238E27FC236}">
-                <a16:creationId xmlns:a16="http://schemas.microsoft.com/office/drawing/2014/main" id="{5AEB9283-4706-9AFD-26BC-A9866FC9F6CB}"/>
-              </a:ext>
-            </a:extLst>
-          </p:cNvPr>
-          <p:cNvSpPr/>
-          <p:nvPr/>
-        </p:nvSpPr>
-        <p:spPr>
-          <a:xfrm>
-            <a:off x="142422" y="3554441"/>
-            <a:ext cx="45719" cy="960120"/>
-          </a:xfrm>
-          <a:prstGeom prst="rect">
-            <a:avLst/>
-          </a:prstGeom>
-          <a:solidFill>
-            <a:srgbClr val="E8A12C"/>
-          </a:solidFill>
-        </p:spPr>
-        <p:txBody>
-          <a:bodyPr/>
-          <a:lstStyle/>
-          <a:p>
-            <a:endParaRPr lang="ko-KR" altLang="en-US"/>
-          </a:p>
-        </p:txBody>
-      </p:sp>
-      <p:sp>
-        <p:nvSpPr>
-          <p:cNvPr id="17" name="Text 14">
-            <a:extLst>
-              <a:ext uri="{FF2B5EF4-FFF2-40B4-BE49-F238E27FC236}">
-                <a16:creationId xmlns:a16="http://schemas.microsoft.com/office/drawing/2014/main" id="{4F6C2E0C-59FC-908A-D251-C3ED56F8A4C7}"/>
-              </a:ext>
-            </a:extLst>
-          </p:cNvPr>
-          <p:cNvSpPr/>
-          <p:nvPr/>
-        </p:nvSpPr>
-        <p:spPr>
-          <a:xfrm>
-            <a:off x="371022" y="3664169"/>
-            <a:ext cx="2589928" cy="411480"/>
-          </a:xfrm>
-          <a:prstGeom prst="rect">
-            <a:avLst/>
-          </a:prstGeom>
-          <a:noFill/>
-        </p:spPr>
-        <p:txBody>
-          <a:bodyPr wrap="square" lIns="0" tIns="0" rIns="0" bIns="0" rtlCol="0" anchor="ctr"/>
-          <a:lstStyle/>
-          <a:p>
-            <a:pPr marL="0" indent="0">
-              <a:buNone/>
-            </a:pPr>
-            <a:r>
-              <a:rPr lang="en-US" sz="2200" b="1" dirty="0">
-                <a:solidFill>
-                  <a:srgbClr val="13294B"/>
-                </a:solidFill>
-                <a:latin typeface="Georgia" panose="02040502050405090303" pitchFamily="34" charset="0"/>
-                <a:ea typeface="Georgia" panose="02040502050405090303" pitchFamily="34" charset="-122"/>
-                <a:cs typeface="Georgia" panose="02040502050405090303" pitchFamily="34" charset="-120"/>
-              </a:rPr>
-              <a:t>p = 0.063</a:t>
-            </a:r>
-            <a:endParaRPr lang="en-US" sz="2200" dirty="0"/>
-          </a:p>
-        </p:txBody>
-      </p:sp>
-      <p:sp>
-        <p:nvSpPr>
-          <p:cNvPr id="18" name="Text 15">
-            <a:extLst>
-              <a:ext uri="{FF2B5EF4-FFF2-40B4-BE49-F238E27FC236}">
-                <a16:creationId xmlns:a16="http://schemas.microsoft.com/office/drawing/2014/main" id="{0B71220E-46B3-BB25-80CC-E00CE1B53F4F}"/>
-              </a:ext>
-            </a:extLst>
-          </p:cNvPr>
-          <p:cNvSpPr/>
-          <p:nvPr/>
-        </p:nvSpPr>
-        <p:spPr>
-          <a:xfrm>
-            <a:off x="371022" y="4103081"/>
-            <a:ext cx="2589928" cy="365760"/>
-          </a:xfrm>
-          <a:prstGeom prst="rect">
-            <a:avLst/>
-          </a:prstGeom>
-          <a:noFill/>
-        </p:spPr>
-        <p:txBody>
-          <a:bodyPr wrap="square" lIns="0" tIns="0" rIns="0" bIns="0" rtlCol="0" anchor="ctr"/>
-          <a:lstStyle/>
-          <a:p>
-            <a:r>
-              <a:rPr lang="en-US" sz="1150" dirty="0">
-                <a:solidFill>
-                  <a:srgbClr val="33425C"/>
-                </a:solidFill>
-                <a:latin typeface="Calibri" pitchFamily="34" charset="0"/>
-                <a:ea typeface="Calibri" pitchFamily="34" charset="-122"/>
-                <a:cs typeface="Calibri" pitchFamily="34" charset="-120"/>
-              </a:rPr>
-              <a:t>bootstrap; 90% CI [3.24%, 14.52%] — location robust, not precise</a:t>
-            </a:r>
-            <a:endParaRPr lang="en-US" sz="1150" dirty="0"/>
           </a:p>
         </p:txBody>
       </p:sp>
@@ -9483,55 +8602,19 @@
         </p:nvGraphicFramePr>
         <p:xfrm>
           <a:off x="548640" y="2057400"/>
-          <a:ext cx="11091670" cy="2377440"/>
+          <a:ext cx="11091672" cy="2377440"/>
         </p:xfrm>
         <a:graphic>
           <a:graphicData uri="http://schemas.openxmlformats.org/drawingml/2006/table">
             <a:tbl>
               <a:tblPr/>
               <a:tblGrid>
-                <a:gridCol w="2011680">
-                  <a:extLst>
-                    <a:ext uri="{9D8B030D-6E8A-4147-A177-3AD203B41FA5}">
-                      <a16:colId xmlns:a16="http://schemas.microsoft.com/office/drawing/2014/main" val="20000"/>
-                    </a:ext>
-                  </a:extLst>
-                </a:gridCol>
-                <a:gridCol w="1815998">
-                  <a:extLst>
-                    <a:ext uri="{9D8B030D-6E8A-4147-A177-3AD203B41FA5}">
-                      <a16:colId xmlns:a16="http://schemas.microsoft.com/office/drawing/2014/main" val="20001"/>
-                    </a:ext>
-                  </a:extLst>
-                </a:gridCol>
-                <a:gridCol w="1815998">
-                  <a:extLst>
-                    <a:ext uri="{9D8B030D-6E8A-4147-A177-3AD203B41FA5}">
-                      <a16:colId xmlns:a16="http://schemas.microsoft.com/office/drawing/2014/main" val="20002"/>
-                    </a:ext>
-                  </a:extLst>
-                </a:gridCol>
-                <a:gridCol w="1815998">
-                  <a:extLst>
-                    <a:ext uri="{9D8B030D-6E8A-4147-A177-3AD203B41FA5}">
-                      <a16:colId xmlns:a16="http://schemas.microsoft.com/office/drawing/2014/main" val="20003"/>
-                    </a:ext>
-                  </a:extLst>
-                </a:gridCol>
-                <a:gridCol w="1815998">
-                  <a:extLst>
-                    <a:ext uri="{9D8B030D-6E8A-4147-A177-3AD203B41FA5}">
-                      <a16:colId xmlns:a16="http://schemas.microsoft.com/office/drawing/2014/main" val="20004"/>
-                    </a:ext>
-                  </a:extLst>
-                </a:gridCol>
-                <a:gridCol w="1815998">
-                  <a:extLst>
-                    <a:ext uri="{9D8B030D-6E8A-4147-A177-3AD203B41FA5}">
-                      <a16:colId xmlns:a16="http://schemas.microsoft.com/office/drawing/2014/main" val="20005"/>
-                    </a:ext>
-                  </a:extLst>
-                </a:gridCol>
+                <a:gridCol w="2011680"/>
+                <a:gridCol w="1815998"/>
+                <a:gridCol w="1815998"/>
+                <a:gridCol w="1815998"/>
+                <a:gridCol w="1815998"/>
+                <a:gridCol w="1815998"/>
               </a:tblGrid>
               <a:tr h="475488">
                 <a:tc>
@@ -9942,11 +9025,6 @@
                     </a:solidFill>
                   </a:tcPr>
                 </a:tc>
-                <a:extLst>
-                  <a:ext uri="{0D108BD9-81ED-4DB2-BD59-A6C34878D82A}">
-                    <a16:rowId xmlns:a16="http://schemas.microsoft.com/office/drawing/2014/main" val="10000"/>
-                  </a:ext>
-                </a:extLst>
               </a:tr>
               <a:tr h="475488">
                 <a:tc>
@@ -10357,11 +9435,6 @@
                     </a:solidFill>
                   </a:tcPr>
                 </a:tc>
-                <a:extLst>
-                  <a:ext uri="{0D108BD9-81ED-4DB2-BD59-A6C34878D82A}">
-                    <a16:rowId xmlns:a16="http://schemas.microsoft.com/office/drawing/2014/main" val="10001"/>
-                  </a:ext>
-                </a:extLst>
               </a:tr>
               <a:tr h="475488">
                 <a:tc>
@@ -10772,11 +9845,6 @@
                     </a:solidFill>
                   </a:tcPr>
                 </a:tc>
-                <a:extLst>
-                  <a:ext uri="{0D108BD9-81ED-4DB2-BD59-A6C34878D82A}">
-                    <a16:rowId xmlns:a16="http://schemas.microsoft.com/office/drawing/2014/main" val="10002"/>
-                  </a:ext>
-                </a:extLst>
               </a:tr>
               <a:tr h="475488">
                 <a:tc>
@@ -11187,11 +10255,6 @@
                     </a:solidFill>
                   </a:tcPr>
                 </a:tc>
-                <a:extLst>
-                  <a:ext uri="{0D108BD9-81ED-4DB2-BD59-A6C34878D82A}">
-                    <a16:rowId xmlns:a16="http://schemas.microsoft.com/office/drawing/2014/main" val="10003"/>
-                  </a:ext>
-                </a:extLst>
               </a:tr>
               <a:tr h="475488">
                 <a:tc>
@@ -11602,11 +10665,6 @@
                     </a:solidFill>
                   </a:tcPr>
                 </a:tc>
-                <a:extLst>
-                  <a:ext uri="{0D108BD9-81ED-4DB2-BD59-A6C34878D82A}">
-                    <a16:rowId xmlns:a16="http://schemas.microsoft.com/office/drawing/2014/main" val="10004"/>
-                  </a:ext>
-                </a:extLst>
               </a:tr>
             </a:tbl>
           </a:graphicData>
@@ -11637,13 +10695,6 @@
             </a:outerShdw>
           </a:effectLst>
         </p:spPr>
-        <p:txBody>
-          <a:bodyPr/>
-          <a:lstStyle/>
-          <a:p>
-            <a:endParaRPr lang="ko-KR" altLang="en-US"/>
-          </a:p>
-        </p:txBody>
       </p:sp>
       <p:sp>
         <p:nvSpPr>
@@ -11663,13 +10714,6 @@
             <a:srgbClr val="1B998B"/>
           </a:solidFill>
         </p:spPr>
-        <p:txBody>
-          <a:bodyPr/>
-          <a:lstStyle/>
-          <a:p>
-            <a:endParaRPr lang="ko-KR" altLang="en-US"/>
-          </a:p>
-        </p:txBody>
       </p:sp>
       <p:sp>
         <p:nvSpPr>
@@ -11955,7 +10999,7 @@
           <p:nvPr/>
         </p:nvPicPr>
         <p:blipFill>
-          <a:blip r:embed="rId3"/>
+          <a:blip r:embed="rId1"/>
           <a:stretch>
             <a:fillRect/>
           </a:stretch>
@@ -11979,7 +11023,7 @@
           <p:nvPr/>
         </p:nvPicPr>
         <p:blipFill>
-          <a:blip r:embed="rId4"/>
+          <a:blip r:embed="rId2"/>
           <a:stretch>
             <a:fillRect/>
           </a:stretch>
@@ -12019,13 +11063,6 @@
             </a:outerShdw>
           </a:effectLst>
         </p:spPr>
-        <p:txBody>
-          <a:bodyPr/>
-          <a:lstStyle/>
-          <a:p>
-            <a:endParaRPr lang="ko-KR" altLang="en-US"/>
-          </a:p>
-        </p:txBody>
       </p:sp>
       <p:sp>
         <p:nvSpPr>
@@ -12045,13 +11082,6 @@
             <a:srgbClr val="C1121F"/>
           </a:solidFill>
         </p:spPr>
-        <p:txBody>
-          <a:bodyPr/>
-          <a:lstStyle/>
-          <a:p>
-            <a:endParaRPr lang="ko-KR" altLang="en-US"/>
-          </a:p>
-        </p:txBody>
       </p:sp>
       <p:sp>
         <p:nvSpPr>
@@ -12126,7 +11156,18 @@
                 <a:ea typeface="Calibri" pitchFamily="34" charset="-122"/>
                 <a:cs typeface="Calibri" pitchFamily="34" charset="-120"/>
               </a:rPr>
-              <a:t>Only 3 events; FOMC contamination in 2 of 3.   All CARs individually insignificant (−41 / +23 / −27 bps).   </a:t>
+              <a:t>Only 3 events; FOMC contamination in 2 of 3.   </a:t>
+            </a:r>
+            <a:r>
+              <a:rPr lang="en-US" sz="1250" dirty="0">
+                <a:solidFill>
+                  <a:srgbClr val="33425C"/>
+                </a:solidFill>
+                <a:latin typeface="Calibri" pitchFamily="34" charset="0"/>
+                <a:ea typeface="Calibri" pitchFamily="34" charset="-122"/>
+                <a:cs typeface="Calibri" pitchFamily="34" charset="-120"/>
+              </a:rPr>
+              <a:t>All CARs individually insignificant (−41 / +23 / −27 bps).   </a:t>
             </a:r>
             <a:endParaRPr lang="en-US" sz="1250" dirty="0"/>
           </a:p>
@@ -12146,7 +11187,18 @@
                 <a:ea typeface="Calibri" pitchFamily="34" charset="-122"/>
                 <a:cs typeface="Calibri" pitchFamily="34" charset="-120"/>
               </a:rPr>
-              <a:t>Placebo ratio 7.0× — suggestive, not individually significant.   Story has shifted across re-runs — too unstable to be evidence.</a:t>
+              <a:t>Placebo ratio 7.0× — suggestive, not individually significant.   </a:t>
+            </a:r>
+            <a:r>
+              <a:rPr lang="en-US" sz="1250" dirty="0">
+                <a:solidFill>
+                  <a:srgbClr val="33425C"/>
+                </a:solidFill>
+                <a:latin typeface="Calibri" pitchFamily="34" charset="0"/>
+                <a:ea typeface="Calibri" pitchFamily="34" charset="-122"/>
+                <a:cs typeface="Calibri" pitchFamily="34" charset="-120"/>
+              </a:rPr>
+              <a:t>Story has shifted across re-runs — too unstable to be evidence.</a:t>
             </a:r>
             <a:endParaRPr lang="en-US" sz="1250" dirty="0"/>
           </a:p>
@@ -12400,13 +11452,6 @@
             </a:outerShdw>
           </a:effectLst>
         </p:spPr>
-        <p:txBody>
-          <a:bodyPr/>
-          <a:lstStyle/>
-          <a:p>
-            <a:endParaRPr lang="ko-KR" altLang="en-US"/>
-          </a:p>
-        </p:txBody>
       </p:sp>
       <p:sp>
         <p:nvSpPr>
@@ -12426,13 +11471,6 @@
             <a:srgbClr val="13294B"/>
           </a:solidFill>
         </p:spPr>
-        <p:txBody>
-          <a:bodyPr/>
-          <a:lstStyle/>
-          <a:p>
-            <a:endParaRPr lang="ko-KR" altLang="en-US"/>
-          </a:p>
-        </p:txBody>
       </p:sp>
       <p:sp>
         <p:nvSpPr>
@@ -12538,13 +11576,6 @@
             </a:outerShdw>
           </a:effectLst>
         </p:spPr>
-        <p:txBody>
-          <a:bodyPr/>
-          <a:lstStyle/>
-          <a:p>
-            <a:endParaRPr lang="ko-KR" altLang="en-US"/>
-          </a:p>
-        </p:txBody>
       </p:sp>
       <p:sp>
         <p:nvSpPr>
@@ -12564,13 +11595,6 @@
             <a:srgbClr val="1B998B"/>
           </a:solidFill>
         </p:spPr>
-        <p:txBody>
-          <a:bodyPr/>
-          <a:lstStyle/>
-          <a:p>
-            <a:endParaRPr lang="ko-KR" altLang="en-US"/>
-          </a:p>
-        </p:txBody>
       </p:sp>
       <p:sp>
         <p:nvSpPr>
@@ -12676,13 +11700,6 @@
             </a:outerShdw>
           </a:effectLst>
         </p:spPr>
-        <p:txBody>
-          <a:bodyPr/>
-          <a:lstStyle/>
-          <a:p>
-            <a:endParaRPr lang="ko-KR" altLang="en-US"/>
-          </a:p>
-        </p:txBody>
       </p:sp>
       <p:sp>
         <p:nvSpPr>
@@ -12702,13 +11719,6 @@
             <a:srgbClr val="E8A12C"/>
           </a:solidFill>
         </p:spPr>
-        <p:txBody>
-          <a:bodyPr/>
-          <a:lstStyle/>
-          <a:p>
-            <a:endParaRPr lang="ko-KR" altLang="en-US"/>
-          </a:p>
-        </p:txBody>
       </p:sp>
       <p:sp>
         <p:nvSpPr>
@@ -12814,13 +11824,6 @@
             </a:outerShdw>
           </a:effectLst>
         </p:spPr>
-        <p:txBody>
-          <a:bodyPr/>
-          <a:lstStyle/>
-          <a:p>
-            <a:endParaRPr lang="ko-KR" altLang="en-US"/>
-          </a:p>
-        </p:txBody>
       </p:sp>
       <p:sp>
         <p:nvSpPr>
@@ -13133,13 +12136,6 @@
             </a:outerShdw>
           </a:effectLst>
         </p:spPr>
-        <p:txBody>
-          <a:bodyPr/>
-          <a:lstStyle/>
-          <a:p>
-            <a:endParaRPr lang="ko-KR" altLang="en-US"/>
-          </a:p>
-        </p:txBody>
       </p:sp>
       <p:sp>
         <p:nvSpPr>
@@ -13159,13 +12155,6 @@
             <a:srgbClr val="1B998B"/>
           </a:solidFill>
         </p:spPr>
-        <p:txBody>
-          <a:bodyPr/>
-          <a:lstStyle/>
-          <a:p>
-            <a:endParaRPr lang="ko-KR" altLang="en-US"/>
-          </a:p>
-        </p:txBody>
       </p:sp>
       <p:sp>
         <p:nvSpPr>
@@ -13185,13 +12174,6 @@
             <a:srgbClr val="1B998B"/>
           </a:solidFill>
         </p:spPr>
-        <p:txBody>
-          <a:bodyPr/>
-          <a:lstStyle/>
-          <a:p>
-            <a:endParaRPr lang="ko-KR" altLang="en-US"/>
-          </a:p>
-        </p:txBody>
       </p:sp>
       <p:sp>
         <p:nvSpPr>
@@ -13378,13 +12360,6 @@
             </a:outerShdw>
           </a:effectLst>
         </p:spPr>
-        <p:txBody>
-          <a:bodyPr/>
-          <a:lstStyle/>
-          <a:p>
-            <a:endParaRPr lang="ko-KR" altLang="en-US"/>
-          </a:p>
-        </p:txBody>
       </p:sp>
       <p:sp>
         <p:nvSpPr>
@@ -13404,13 +12379,6 @@
             <a:srgbClr val="5B8DEF"/>
           </a:solidFill>
         </p:spPr>
-        <p:txBody>
-          <a:bodyPr/>
-          <a:lstStyle/>
-          <a:p>
-            <a:endParaRPr lang="ko-KR" altLang="en-US"/>
-          </a:p>
-        </p:txBody>
       </p:sp>
       <p:sp>
         <p:nvSpPr>
@@ -13430,13 +12398,6 @@
             <a:srgbClr val="5B8DEF"/>
           </a:solidFill>
         </p:spPr>
-        <p:txBody>
-          <a:bodyPr/>
-          <a:lstStyle/>
-          <a:p>
-            <a:endParaRPr lang="ko-KR" altLang="en-US"/>
-          </a:p>
-        </p:txBody>
       </p:sp>
       <p:sp>
         <p:nvSpPr>
@@ -13623,13 +12584,6 @@
             </a:outerShdw>
           </a:effectLst>
         </p:spPr>
-        <p:txBody>
-          <a:bodyPr/>
-          <a:lstStyle/>
-          <a:p>
-            <a:endParaRPr lang="ko-KR" altLang="en-US"/>
-          </a:p>
-        </p:txBody>
       </p:sp>
       <p:sp>
         <p:nvSpPr>
@@ -13649,13 +12603,6 @@
             <a:srgbClr val="E8A12C"/>
           </a:solidFill>
         </p:spPr>
-        <p:txBody>
-          <a:bodyPr/>
-          <a:lstStyle/>
-          <a:p>
-            <a:endParaRPr lang="ko-KR" altLang="en-US"/>
-          </a:p>
-        </p:txBody>
       </p:sp>
       <p:sp>
         <p:nvSpPr>
@@ -13675,13 +12622,6 @@
             <a:srgbClr val="E8A12C"/>
           </a:solidFill>
         </p:spPr>
-        <p:txBody>
-          <a:bodyPr/>
-          <a:lstStyle/>
-          <a:p>
-            <a:endParaRPr lang="ko-KR" altLang="en-US"/>
-          </a:p>
-        </p:txBody>
       </p:sp>
       <p:sp>
         <p:nvSpPr>
@@ -14129,13 +13069,6 @@
             </a:outerShdw>
           </a:effectLst>
         </p:spPr>
-        <p:txBody>
-          <a:bodyPr/>
-          <a:lstStyle/>
-          <a:p>
-            <a:endParaRPr lang="ko-KR" altLang="en-US"/>
-          </a:p>
-        </p:txBody>
       </p:sp>
       <p:sp>
         <p:nvSpPr>
@@ -14155,13 +13088,6 @@
             <a:srgbClr val="1B998B"/>
           </a:solidFill>
         </p:spPr>
-        <p:txBody>
-          <a:bodyPr/>
-          <a:lstStyle/>
-          <a:p>
-            <a:endParaRPr lang="ko-KR" altLang="en-US"/>
-          </a:p>
-        </p:txBody>
       </p:sp>
       <p:sp>
         <p:nvSpPr>
@@ -14188,13 +13114,6 @@
             </a:outerShdw>
           </a:effectLst>
         </p:spPr>
-        <p:txBody>
-          <a:bodyPr/>
-          <a:lstStyle/>
-          <a:p>
-            <a:endParaRPr lang="ko-KR" altLang="en-US"/>
-          </a:p>
-        </p:txBody>
       </p:sp>
       <p:sp>
         <p:nvSpPr>
@@ -14214,13 +13133,6 @@
             <a:srgbClr val="13294B"/>
           </a:solidFill>
         </p:spPr>
-        <p:txBody>
-          <a:bodyPr/>
-          <a:lstStyle/>
-          <a:p>
-            <a:endParaRPr lang="ko-KR" altLang="en-US"/>
-          </a:p>
-        </p:txBody>
       </p:sp>
       <p:sp>
         <p:nvSpPr>
@@ -14247,13 +13159,6 @@
             </a:outerShdw>
           </a:effectLst>
         </p:spPr>
-        <p:txBody>
-          <a:bodyPr/>
-          <a:lstStyle/>
-          <a:p>
-            <a:endParaRPr lang="ko-KR" altLang="en-US"/>
-          </a:p>
-        </p:txBody>
       </p:sp>
       <p:sp>
         <p:nvSpPr>
@@ -14273,13 +13178,6 @@
             <a:srgbClr val="E8A12C"/>
           </a:solidFill>
         </p:spPr>
-        <p:txBody>
-          <a:bodyPr/>
-          <a:lstStyle/>
-          <a:p>
-            <a:endParaRPr lang="ko-KR" altLang="en-US"/>
-          </a:p>
-        </p:txBody>
       </p:sp>
       <p:sp>
         <p:nvSpPr>
@@ -14766,13 +13664,6 @@
             </a:outerShdw>
           </a:effectLst>
         </p:spPr>
-        <p:txBody>
-          <a:bodyPr/>
-          <a:lstStyle/>
-          <a:p>
-            <a:endParaRPr lang="ko-KR" altLang="en-US"/>
-          </a:p>
-        </p:txBody>
       </p:sp>
       <p:sp>
         <p:nvSpPr>
@@ -14792,13 +13683,6 @@
             <a:srgbClr val="C1121F"/>
           </a:solidFill>
         </p:spPr>
-        <p:txBody>
-          <a:bodyPr/>
-          <a:lstStyle/>
-          <a:p>
-            <a:endParaRPr lang="ko-KR" altLang="en-US"/>
-          </a:p>
-        </p:txBody>
       </p:sp>
       <p:sp>
         <p:nvSpPr>
@@ -15010,13 +13894,6 @@
             </a:outerShdw>
           </a:effectLst>
         </p:spPr>
-        <p:txBody>
-          <a:bodyPr/>
-          <a:lstStyle/>
-          <a:p>
-            <a:endParaRPr lang="ko-KR" altLang="en-US"/>
-          </a:p>
-        </p:txBody>
       </p:sp>
       <p:sp>
         <p:nvSpPr>
@@ -15036,13 +13913,6 @@
             <a:srgbClr val="1B998B"/>
           </a:solidFill>
         </p:spPr>
-        <p:txBody>
-          <a:bodyPr/>
-          <a:lstStyle/>
-          <a:p>
-            <a:endParaRPr lang="ko-KR" altLang="en-US"/>
-          </a:p>
-        </p:txBody>
       </p:sp>
       <p:sp>
         <p:nvSpPr>
@@ -15273,6 +14143,7 @@
               <a:rPr lang="en-US" sz="1100" dirty="0"/>
               <a:t>20</a:t>
             </a:r>
+            <a:endParaRPr lang="en-US" sz="1100" dirty="0"/>
           </a:p>
         </p:txBody>
       </p:sp>
@@ -15327,13 +14198,6 @@
             <a:srgbClr val="1B998B"/>
           </a:solidFill>
         </p:spPr>
-        <p:txBody>
-          <a:bodyPr/>
-          <a:lstStyle/>
-          <a:p>
-            <a:endParaRPr lang="ko-KR" altLang="en-US"/>
-          </a:p>
-        </p:txBody>
       </p:sp>
       <p:sp>
         <p:nvSpPr>
@@ -15353,13 +14217,6 @@
             <a:srgbClr val="E8A12C"/>
           </a:solidFill>
         </p:spPr>
-        <p:txBody>
-          <a:bodyPr/>
-          <a:lstStyle/>
-          <a:p>
-            <a:endParaRPr lang="ko-KR" altLang="en-US"/>
-          </a:p>
-        </p:txBody>
       </p:sp>
       <p:sp>
         <p:nvSpPr>
@@ -15723,13 +14580,6 @@
             </a:outerShdw>
           </a:effectLst>
         </p:spPr>
-        <p:txBody>
-          <a:bodyPr/>
-          <a:lstStyle/>
-          <a:p>
-            <a:endParaRPr lang="ko-KR" altLang="en-US"/>
-          </a:p>
-        </p:txBody>
       </p:sp>
       <p:sp>
         <p:nvSpPr>
@@ -15749,13 +14599,6 @@
             <a:srgbClr val="E8A12C"/>
           </a:solidFill>
         </p:spPr>
-        <p:txBody>
-          <a:bodyPr/>
-          <a:lstStyle/>
-          <a:p>
-            <a:endParaRPr lang="ko-KR" altLang="en-US"/>
-          </a:p>
-        </p:txBody>
       </p:sp>
       <p:sp>
         <p:nvSpPr>
@@ -15861,13 +14704,6 @@
             </a:outerShdw>
           </a:effectLst>
         </p:spPr>
-        <p:txBody>
-          <a:bodyPr/>
-          <a:lstStyle/>
-          <a:p>
-            <a:endParaRPr lang="ko-KR" altLang="en-US"/>
-          </a:p>
-        </p:txBody>
       </p:sp>
       <p:sp>
         <p:nvSpPr>
@@ -15887,13 +14723,6 @@
             <a:srgbClr val="1B998B"/>
           </a:solidFill>
         </p:spPr>
-        <p:txBody>
-          <a:bodyPr/>
-          <a:lstStyle/>
-          <a:p>
-            <a:endParaRPr lang="ko-KR" altLang="en-US"/>
-          </a:p>
-        </p:txBody>
       </p:sp>
       <p:sp>
         <p:nvSpPr>
@@ -16257,13 +15086,6 @@
             </a:outerShdw>
           </a:effectLst>
         </p:spPr>
-        <p:txBody>
-          <a:bodyPr/>
-          <a:lstStyle/>
-          <a:p>
-            <a:endParaRPr lang="ko-KR" altLang="en-US"/>
-          </a:p>
-        </p:txBody>
       </p:sp>
       <p:sp>
         <p:nvSpPr>
@@ -16283,13 +15105,6 @@
             <a:srgbClr val="1B998B"/>
           </a:solidFill>
         </p:spPr>
-        <p:txBody>
-          <a:bodyPr/>
-          <a:lstStyle/>
-          <a:p>
-            <a:endParaRPr lang="ko-KR" altLang="en-US"/>
-          </a:p>
-        </p:txBody>
       </p:sp>
       <p:sp>
         <p:nvSpPr>
@@ -16323,7 +15138,18 @@
                 <a:ea typeface="Calibri" pitchFamily="34" charset="-122"/>
                 <a:cs typeface="Calibri" pitchFamily="34" charset="-120"/>
               </a:rPr>
-              <a:t>NORMAL TIMES   ✓</a:t>
+              <a:t>NORMAL TIMES   </a:t>
+            </a:r>
+            <a:r>
+              <a:rPr lang="en-US" sz="1500" b="1" dirty="0">
+                <a:solidFill>
+                  <a:srgbClr val="1B998B"/>
+                </a:solidFill>
+                <a:latin typeface="Calibri" pitchFamily="34" charset="0"/>
+                <a:ea typeface="Calibri" pitchFamily="34" charset="-122"/>
+                <a:cs typeface="Calibri" pitchFamily="34" charset="-120"/>
+              </a:rPr>
+              <a:t>✓</a:t>
             </a:r>
             <a:endParaRPr lang="en-US" sz="1500" dirty="0"/>
           </a:p>
@@ -16459,13 +15285,6 @@
             </a:outerShdw>
           </a:effectLst>
         </p:spPr>
-        <p:txBody>
-          <a:bodyPr/>
-          <a:lstStyle/>
-          <a:p>
-            <a:endParaRPr lang="ko-KR" altLang="en-US"/>
-          </a:p>
-        </p:txBody>
       </p:sp>
       <p:sp>
         <p:nvSpPr>
@@ -16485,13 +15304,6 @@
             <a:srgbClr val="C1121F"/>
           </a:solidFill>
         </p:spPr>
-        <p:txBody>
-          <a:bodyPr/>
-          <a:lstStyle/>
-          <a:p>
-            <a:endParaRPr lang="ko-KR" altLang="en-US"/>
-          </a:p>
-        </p:txBody>
       </p:sp>
       <p:sp>
         <p:nvSpPr>
@@ -16525,7 +15337,18 @@
                 <a:ea typeface="Calibri" pitchFamily="34" charset="-122"/>
                 <a:cs typeface="Calibri" pitchFamily="34" charset="-120"/>
               </a:rPr>
-              <a:t>RUN SCENARIO   ✗</a:t>
+              <a:t>RUN SCENARIO   </a:t>
+            </a:r>
+            <a:r>
+              <a:rPr lang="en-US" sz="1500" b="1" dirty="0">
+                <a:solidFill>
+                  <a:srgbClr val="C1121F"/>
+                </a:solidFill>
+                <a:latin typeface="Calibri" pitchFamily="34" charset="0"/>
+                <a:ea typeface="Calibri" pitchFamily="34" charset="-122"/>
+                <a:cs typeface="Calibri" pitchFamily="34" charset="-120"/>
+              </a:rPr>
+              <a:t>✗</a:t>
             </a:r>
             <a:endParaRPr lang="en-US" sz="1500" dirty="0"/>
           </a:p>
@@ -16661,13 +15484,6 @@
             </a:outerShdw>
           </a:effectLst>
         </p:spPr>
-        <p:txBody>
-          <a:bodyPr/>
-          <a:lstStyle/>
-          <a:p>
-            <a:endParaRPr lang="ko-KR" altLang="en-US"/>
-          </a:p>
-        </p:txBody>
       </p:sp>
       <p:sp>
         <p:nvSpPr>
@@ -17065,13 +15881,6 @@
             </a:outerShdw>
           </a:effectLst>
         </p:spPr>
-        <p:txBody>
-          <a:bodyPr/>
-          <a:lstStyle/>
-          <a:p>
-            <a:endParaRPr lang="ko-KR" altLang="en-US"/>
-          </a:p>
-        </p:txBody>
       </p:sp>
       <p:sp>
         <p:nvSpPr>
@@ -17105,10 +15914,10 @@
                 <a:ea typeface="Georgia" panose="02040502050405090303" pitchFamily="34" charset="-122"/>
                 <a:cs typeface="Georgia" panose="02040502050405090303" pitchFamily="34" charset="-120"/>
               </a:rPr>
-              <a:t>D*(Ñ*, S, </a:t>
-            </a:r>
-            <a:r>
-              <a:rPr lang="en-US" sz="1800" b="1">
+              <a:t>D*(Ñ*, S, θ, L)  =  </a:t>
+            </a:r>
+            <a:r>
+              <a:rPr lang="en-US" sz="1800" b="1" dirty="0">
                 <a:solidFill>
                   <a:srgbClr val="13294B"/>
                 </a:solidFill>
@@ -17116,18 +15925,7 @@
                 <a:ea typeface="Georgia" panose="02040502050405090303" pitchFamily="34" charset="-122"/>
                 <a:cs typeface="Georgia" panose="02040502050405090303" pitchFamily="34" charset="-120"/>
               </a:rPr>
-              <a:t>θ, </a:t>
-            </a:r>
-            <a:r>
-              <a:rPr lang="en-US" sz="1800" b="1" dirty="0">
-                <a:solidFill>
-                  <a:srgbClr val="13294B"/>
-                </a:solidFill>
-                <a:latin typeface="Georgia" panose="02040502050405090303" pitchFamily="34" charset="0"/>
-                <a:ea typeface="Georgia" panose="02040502050405090303" pitchFamily="34" charset="-122"/>
-                <a:cs typeface="Georgia" panose="02040502050405090303" pitchFamily="34" charset="-120"/>
-              </a:rPr>
-              <a:t>L)  =  D*</a:t>
+              <a:t>D*</a:t>
             </a:r>
             <a:r>
               <a:rPr lang="en-US" sz="1100" b="1" dirty="0">
@@ -17284,13 +16082,6 @@
             </a:outerShdw>
           </a:effectLst>
         </p:spPr>
-        <p:txBody>
-          <a:bodyPr/>
-          <a:lstStyle/>
-          <a:p>
-            <a:endParaRPr lang="ko-KR" altLang="en-US"/>
-          </a:p>
-        </p:txBody>
       </p:sp>
       <p:sp>
         <p:nvSpPr>
@@ -17310,13 +16101,6 @@
             <a:srgbClr val="1B998B"/>
           </a:solidFill>
         </p:spPr>
-        <p:txBody>
-          <a:bodyPr/>
-          <a:lstStyle/>
-          <a:p>
-            <a:endParaRPr lang="ko-KR" altLang="en-US"/>
-          </a:p>
-        </p:txBody>
       </p:sp>
       <p:sp>
         <p:nvSpPr>
@@ -17462,13 +16246,6 @@
             </a:outerShdw>
           </a:effectLst>
         </p:spPr>
-        <p:txBody>
-          <a:bodyPr/>
-          <a:lstStyle/>
-          <a:p>
-            <a:endParaRPr lang="ko-KR" altLang="en-US"/>
-          </a:p>
-        </p:txBody>
       </p:sp>
       <p:sp>
         <p:nvSpPr>
@@ -17488,13 +16265,6 @@
             <a:srgbClr val="E8A12C"/>
           </a:solidFill>
         </p:spPr>
-        <p:txBody>
-          <a:bodyPr/>
-          <a:lstStyle/>
-          <a:p>
-            <a:endParaRPr lang="ko-KR" altLang="en-US"/>
-          </a:p>
-        </p:txBody>
       </p:sp>
       <p:sp>
         <p:nvSpPr>
@@ -17771,7 +16541,7 @@
           <p:nvPr/>
         </p:nvPicPr>
         <p:blipFill>
-          <a:blip r:embed="rId3"/>
+          <a:blip r:embed="rId1"/>
           <a:stretch>
             <a:fillRect/>
           </a:stretch>
@@ -17920,13 +16690,6 @@
             </a:outerShdw>
           </a:effectLst>
         </p:spPr>
-        <p:txBody>
-          <a:bodyPr/>
-          <a:lstStyle/>
-          <a:p>
-            <a:endParaRPr lang="ko-KR" altLang="en-US"/>
-          </a:p>
-        </p:txBody>
       </p:sp>
       <p:sp>
         <p:nvSpPr>
@@ -17946,13 +16709,6 @@
             <a:srgbClr val="13294B"/>
           </a:solidFill>
         </p:spPr>
-        <p:txBody>
-          <a:bodyPr/>
-          <a:lstStyle/>
-          <a:p>
-            <a:endParaRPr lang="ko-KR" altLang="en-US"/>
-          </a:p>
-        </p:txBody>
       </p:sp>
       <p:sp>
         <p:nvSpPr>
@@ -18115,13 +16871,6 @@
             </a:outerShdw>
           </a:effectLst>
         </p:spPr>
-        <p:txBody>
-          <a:bodyPr/>
-          <a:lstStyle/>
-          <a:p>
-            <a:endParaRPr lang="ko-KR" altLang="en-US"/>
-          </a:p>
-        </p:txBody>
       </p:sp>
       <p:sp>
         <p:nvSpPr>
@@ -18141,13 +16890,6 @@
             <a:srgbClr val="13294B"/>
           </a:solidFill>
         </p:spPr>
-        <p:txBody>
-          <a:bodyPr/>
-          <a:lstStyle/>
-          <a:p>
-            <a:endParaRPr lang="ko-KR" altLang="en-US"/>
-          </a:p>
-        </p:txBody>
       </p:sp>
       <p:sp>
         <p:nvSpPr>
@@ -18310,13 +17052,6 @@
             </a:outerShdw>
           </a:effectLst>
         </p:spPr>
-        <p:txBody>
-          <a:bodyPr/>
-          <a:lstStyle/>
-          <a:p>
-            <a:endParaRPr lang="ko-KR" altLang="en-US"/>
-          </a:p>
-        </p:txBody>
       </p:sp>
       <p:sp>
         <p:nvSpPr>
@@ -18336,13 +17071,6 @@
             <a:srgbClr val="13294B"/>
           </a:solidFill>
         </p:spPr>
-        <p:txBody>
-          <a:bodyPr/>
-          <a:lstStyle/>
-          <a:p>
-            <a:endParaRPr lang="ko-KR" altLang="en-US"/>
-          </a:p>
-        </p:txBody>
       </p:sp>
       <p:sp>
         <p:nvSpPr>
@@ -18505,13 +17233,6 @@
             </a:outerShdw>
           </a:effectLst>
         </p:spPr>
-        <p:txBody>
-          <a:bodyPr/>
-          <a:lstStyle/>
-          <a:p>
-            <a:endParaRPr lang="ko-KR" altLang="en-US"/>
-          </a:p>
-        </p:txBody>
       </p:sp>
       <p:sp>
         <p:nvSpPr>
@@ -18840,13 +17561,6 @@
             </a:outerShdw>
           </a:effectLst>
         </p:spPr>
-        <p:txBody>
-          <a:bodyPr/>
-          <a:lstStyle/>
-          <a:p>
-            <a:endParaRPr lang="ko-KR" altLang="en-US"/>
-          </a:p>
-        </p:txBody>
       </p:sp>
       <p:sp>
         <p:nvSpPr>
@@ -18866,13 +17580,6 @@
             <a:srgbClr val="C1121F"/>
           </a:solidFill>
         </p:spPr>
-        <p:txBody>
-          <a:bodyPr/>
-          <a:lstStyle/>
-          <a:p>
-            <a:endParaRPr lang="ko-KR" altLang="en-US"/>
-          </a:p>
-        </p:txBody>
       </p:sp>
       <p:sp>
         <p:nvSpPr>
@@ -19080,13 +17787,6 @@
             </a:outerShdw>
           </a:effectLst>
         </p:spPr>
-        <p:txBody>
-          <a:bodyPr/>
-          <a:lstStyle/>
-          <a:p>
-            <a:endParaRPr lang="ko-KR" altLang="en-US"/>
-          </a:p>
-        </p:txBody>
       </p:sp>
       <p:sp>
         <p:nvSpPr>
@@ -19106,13 +17806,6 @@
             <a:srgbClr val="13294B"/>
           </a:solidFill>
         </p:spPr>
-        <p:txBody>
-          <a:bodyPr/>
-          <a:lstStyle/>
-          <a:p>
-            <a:endParaRPr lang="ko-KR" altLang="en-US"/>
-          </a:p>
-        </p:txBody>
       </p:sp>
       <p:sp>
         <p:nvSpPr>
@@ -19320,13 +18013,6 @@
             </a:outerShdw>
           </a:effectLst>
         </p:spPr>
-        <p:txBody>
-          <a:bodyPr/>
-          <a:lstStyle/>
-          <a:p>
-            <a:endParaRPr lang="ko-KR" altLang="en-US"/>
-          </a:p>
-        </p:txBody>
       </p:sp>
       <p:sp>
         <p:nvSpPr>
@@ -19346,13 +18032,6 @@
             <a:srgbClr val="1B998B"/>
           </a:solidFill>
         </p:spPr>
-        <p:txBody>
-          <a:bodyPr/>
-          <a:lstStyle/>
-          <a:p>
-            <a:endParaRPr lang="ko-KR" altLang="en-US"/>
-          </a:p>
-        </p:txBody>
       </p:sp>
       <p:sp>
         <p:nvSpPr>
@@ -19609,13 +18288,6 @@
             </a:outerShdw>
           </a:effectLst>
         </p:spPr>
-        <p:txBody>
-          <a:bodyPr/>
-          <a:lstStyle/>
-          <a:p>
-            <a:endParaRPr lang="ko-KR" altLang="en-US"/>
-          </a:p>
-        </p:txBody>
       </p:sp>
       <p:sp>
         <p:nvSpPr>
@@ -19904,27 +18576,9 @@
             <a:tbl>
               <a:tblPr/>
               <a:tblGrid>
-                <a:gridCol w="2286000">
-                  <a:extLst>
-                    <a:ext uri="{9D8B030D-6E8A-4147-A177-3AD203B41FA5}">
-                      <a16:colId xmlns:a16="http://schemas.microsoft.com/office/drawing/2014/main" val="20000"/>
-                    </a:ext>
-                  </a:extLst>
-                </a:gridCol>
-                <a:gridCol w="3291840">
-                  <a:extLst>
-                    <a:ext uri="{9D8B030D-6E8A-4147-A177-3AD203B41FA5}">
-                      <a16:colId xmlns:a16="http://schemas.microsoft.com/office/drawing/2014/main" val="20001"/>
-                    </a:ext>
-                  </a:extLst>
-                </a:gridCol>
-                <a:gridCol w="1188720">
-                  <a:extLst>
-                    <a:ext uri="{9D8B030D-6E8A-4147-A177-3AD203B41FA5}">
-                      <a16:colId xmlns:a16="http://schemas.microsoft.com/office/drawing/2014/main" val="20002"/>
-                    </a:ext>
-                  </a:extLst>
-                </a:gridCol>
+                <a:gridCol w="2286000"/>
+                <a:gridCol w="3291840"/>
+                <a:gridCol w="1188720"/>
               </a:tblGrid>
               <a:tr h="384048">
                 <a:tc>
@@ -20131,11 +18785,6 @@
                     </a:solidFill>
                   </a:tcPr>
                 </a:tc>
-                <a:extLst>
-                  <a:ext uri="{0D108BD9-81ED-4DB2-BD59-A6C34878D82A}">
-                    <a16:rowId xmlns:a16="http://schemas.microsoft.com/office/drawing/2014/main" val="10000"/>
-                  </a:ext>
-                </a:extLst>
               </a:tr>
               <a:tr h="384048">
                 <a:tc>
@@ -20342,11 +18991,6 @@
                     </a:solidFill>
                   </a:tcPr>
                 </a:tc>
-                <a:extLst>
-                  <a:ext uri="{0D108BD9-81ED-4DB2-BD59-A6C34878D82A}">
-                    <a16:rowId xmlns:a16="http://schemas.microsoft.com/office/drawing/2014/main" val="10001"/>
-                  </a:ext>
-                </a:extLst>
               </a:tr>
               <a:tr h="384048">
                 <a:tc>
@@ -20553,11 +19197,6 @@
                     </a:solidFill>
                   </a:tcPr>
                 </a:tc>
-                <a:extLst>
-                  <a:ext uri="{0D108BD9-81ED-4DB2-BD59-A6C34878D82A}">
-                    <a16:rowId xmlns:a16="http://schemas.microsoft.com/office/drawing/2014/main" val="10002"/>
-                  </a:ext>
-                </a:extLst>
               </a:tr>
               <a:tr h="384048">
                 <a:tc>
@@ -20764,11 +19403,6 @@
                     </a:solidFill>
                   </a:tcPr>
                 </a:tc>
-                <a:extLst>
-                  <a:ext uri="{0D108BD9-81ED-4DB2-BD59-A6C34878D82A}">
-                    <a16:rowId xmlns:a16="http://schemas.microsoft.com/office/drawing/2014/main" val="10003"/>
-                  </a:ext>
-                </a:extLst>
               </a:tr>
               <a:tr h="384048">
                 <a:tc>
@@ -20975,11 +19609,6 @@
                     </a:solidFill>
                   </a:tcPr>
                 </a:tc>
-                <a:extLst>
-                  <a:ext uri="{0D108BD9-81ED-4DB2-BD59-A6C34878D82A}">
-                    <a16:rowId xmlns:a16="http://schemas.microsoft.com/office/drawing/2014/main" val="10004"/>
-                  </a:ext>
-                </a:extLst>
               </a:tr>
               <a:tr h="384048">
                 <a:tc>
@@ -21186,11 +19815,6 @@
                     </a:solidFill>
                   </a:tcPr>
                 </a:tc>
-                <a:extLst>
-                  <a:ext uri="{0D108BD9-81ED-4DB2-BD59-A6C34878D82A}">
-                    <a16:rowId xmlns:a16="http://schemas.microsoft.com/office/drawing/2014/main" val="10005"/>
-                  </a:ext>
-                </a:extLst>
               </a:tr>
               <a:tr h="384048">
                 <a:tc>
@@ -21397,11 +20021,6 @@
                     </a:solidFill>
                   </a:tcPr>
                 </a:tc>
-                <a:extLst>
-                  <a:ext uri="{0D108BD9-81ED-4DB2-BD59-A6C34878D82A}">
-                    <a16:rowId xmlns:a16="http://schemas.microsoft.com/office/drawing/2014/main" val="10006"/>
-                  </a:ext>
-                </a:extLst>
               </a:tr>
               <a:tr h="384048">
                 <a:tc>
@@ -21608,11 +20227,6 @@
                     </a:solidFill>
                   </a:tcPr>
                 </a:tc>
-                <a:extLst>
-                  <a:ext uri="{0D108BD9-81ED-4DB2-BD59-A6C34878D82A}">
-                    <a16:rowId xmlns:a16="http://schemas.microsoft.com/office/drawing/2014/main" val="10007"/>
-                  </a:ext>
-                </a:extLst>
               </a:tr>
             </a:tbl>
           </a:graphicData>
@@ -21681,13 +20295,6 @@
             </a:outerShdw>
           </a:effectLst>
         </p:spPr>
-        <p:txBody>
-          <a:bodyPr/>
-          <a:lstStyle/>
-          <a:p>
-            <a:endParaRPr lang="ko-KR" altLang="en-US"/>
-          </a:p>
-        </p:txBody>
       </p:sp>
       <p:sp>
         <p:nvSpPr>
@@ -21707,13 +20314,6 @@
             <a:srgbClr val="C1121F"/>
           </a:solidFill>
         </p:spPr>
-        <p:txBody>
-          <a:bodyPr/>
-          <a:lstStyle/>
-          <a:p>
-            <a:endParaRPr lang="ko-KR" altLang="en-US"/>
-          </a:p>
-        </p:txBody>
       </p:sp>
       <p:sp>
         <p:nvSpPr>
@@ -21817,7 +20417,7 @@
         </p:xfrm>
         <a:graphic>
           <a:graphicData uri="http://schemas.openxmlformats.org/drawingml/2006/chart">
-            <c:chart xmlns:c="http://schemas.openxmlformats.org/drawingml/2006/chart" xmlns:r="http://schemas.openxmlformats.org/officeDocument/2006/relationships" r:id="rId3"/>
+            <c:chart xmlns:c="http://schemas.openxmlformats.org/drawingml/2006/chart" xmlns:r="http://schemas.openxmlformats.org/officeDocument/2006/relationships" r:id="rId1"/>
           </a:graphicData>
         </a:graphic>
       </p:graphicFrame>
@@ -22061,13 +20661,6 @@
             </a:outerShdw>
           </a:effectLst>
         </p:spPr>
-        <p:txBody>
-          <a:bodyPr/>
-          <a:lstStyle/>
-          <a:p>
-            <a:endParaRPr lang="ko-KR" altLang="en-US"/>
-          </a:p>
-        </p:txBody>
       </p:sp>
       <p:sp>
         <p:nvSpPr>
@@ -22087,13 +20680,6 @@
             <a:srgbClr val="1B998B"/>
           </a:solidFill>
         </p:spPr>
-        <p:txBody>
-          <a:bodyPr/>
-          <a:lstStyle/>
-          <a:p>
-            <a:endParaRPr lang="ko-KR" altLang="en-US"/>
-          </a:p>
-        </p:txBody>
       </p:sp>
       <p:sp>
         <p:nvSpPr>
@@ -22181,6 +20767,14 @@
               </a:rPr>
               <a:t>— corrected convenience-yield spread (DGS3MO − overnight SOFR).   </a:t>
             </a:r>
+            <a:endParaRPr lang="en-US" sz="1200" dirty="0">
+              <a:solidFill>
+                <a:srgbClr val="33425C"/>
+              </a:solidFill>
+              <a:latin typeface="Calibri" pitchFamily="34" charset="0"/>
+              <a:ea typeface="Calibri" pitchFamily="34" charset="-122"/>
+              <a:cs typeface="Calibri" pitchFamily="34" charset="-120"/>
+            </a:endParaRPr>
           </a:p>
           <a:p>
             <a:pPr marL="0" indent="0">
@@ -22211,6 +20805,14 @@
               </a:rPr>
               <a:t>— USDT+USDC supply, now ~$260B.   </a:t>
             </a:r>
+            <a:endParaRPr lang="en-US" sz="1200" dirty="0">
+              <a:solidFill>
+                <a:srgbClr val="33425C"/>
+              </a:solidFill>
+              <a:latin typeface="Calibri" pitchFamily="34" charset="0"/>
+              <a:ea typeface="Calibri" pitchFamily="34" charset="-122"/>
+              <a:cs typeface="Calibri" pitchFamily="34" charset="-120"/>
+            </a:endParaRPr>
           </a:p>
           <a:p>
             <a:pPr marL="0" indent="0">
@@ -22270,13 +20872,6 @@
             </a:outerShdw>
           </a:effectLst>
         </p:spPr>
-        <p:txBody>
-          <a:bodyPr/>
-          <a:lstStyle/>
-          <a:p>
-            <a:endParaRPr lang="ko-KR" altLang="en-US"/>
-          </a:p>
-        </p:txBody>
       </p:sp>
       <p:sp>
         <p:nvSpPr>
@@ -22296,13 +20891,6 @@
             <a:srgbClr val="E8A12C"/>
           </a:solidFill>
         </p:spPr>
-        <p:txBody>
-          <a:bodyPr/>
-          <a:lstStyle/>
-          <a:p>
-            <a:endParaRPr lang="ko-KR" altLang="en-US"/>
-          </a:p>
-        </p:txBody>
       </p:sp>
       <p:sp>
         <p:nvSpPr>
@@ -22468,7 +21056,7 @@
           <p:nvPr/>
         </p:nvPicPr>
         <p:blipFill>
-          <a:blip r:embed="rId3"/>
+          <a:blip r:embed="rId1"/>
           <a:stretch>
             <a:fillRect/>
           </a:stretch>
@@ -22742,8 +21330,6 @@
       </a:bgFillStyleLst>
     </a:fmtScheme>
   </a:themeElements>
-  <a:objectDefaults/>
-  <a:extraClrSchemeLst/>
   <a:extLst>
     <a:ext uri="{05A4C25C-085E-4340-85A3-A5531E510DB2}">
       <thm15:themeFamily xmlns:thm15="http://schemas.microsoft.com/office/thememl/2012/main" name="Office Theme" id="{62F939B6-93AF-4DB8-9C6B-D6C7DFDC589F}" vid="{4A3C46E8-61CC-4603-A589-7422A47A8E4A}"/>
@@ -23003,8 +21589,6 @@
       </a:bgFillStyleLst>
     </a:fmtScheme>
   </a:themeElements>
-  <a:objectDefaults/>
-  <a:extraClrSchemeLst/>
   <a:extLst>
     <a:ext uri="{05A4C25C-085E-4340-85A3-A5531E510DB2}">
       <thm15:themeFamily xmlns:thm15="http://schemas.microsoft.com/office/thememl/2012/main" name="Office Theme" id="{62F939B6-93AF-4DB8-9C6B-D6C7DFDC589F}" vid="{4A3C46E8-61CC-4603-A589-7422A47A8E4A}"/>
